--- a/Bases de Datos II/Clases/Clase 12 - Integracion y preparacion final/Presentacion.pptx
+++ b/Bases de Datos II/Clases/Clase 12 - Integracion y preparacion final/Presentacion.pptx
@@ -36,6 +36,9 @@
     <p:sldId id="284" r:id="rId35"/>
     <p:sldId id="285" r:id="rId36"/>
     <p:sldId id="286" r:id="rId37"/>
+    <p:sldId id="287" r:id="rId38"/>
+    <p:sldId id="288" r:id="rId39"/>
+    <p:sldId id="289" r:id="rId40"/>
   </p:sldIdLst>
   <p:sldSz cx="12191695" cy="6858000" type="screen4x3"/>
   <p:notesSz cx="6858000" cy="9144000"/>
@@ -3636,7 +3639,7 @@
                 </a:solidFill>
                 <a:latin typeface="Calibri"/>
               </a:rPr>
-              <a:t>El contrato y sus seis partes, que se exigen en el entregable (1/2)</a:t>
+              <a:t>Por que el parametro lo evita por construccion (2/2)</a:t>
             </a:r>
           </a:p>
         </p:txBody>
@@ -3675,7 +3678,7 @@
                 </a:solidFill>
                 <a:latin typeface="Calibri"/>
               </a:rPr>
-              <a:t>–   Contrato, dicho en serio, es mucho mas que el nombre del procedimiento, y tiene seis partes que hay que exigir en el entregable de hoy.</a:t>
+              <a:t>–   Llamar un procedimiento con parametros hereda esa proteccion y agrega dos cosas: el usuario de la aplicacion puede tener EXECUTE sobre sp_agendar_cita y ninguna posibilidad de SELECT ni UPDATE sobre las tablas</a:t>
             </a:r>
           </a:p>
           <a:p>
@@ -3691,7 +3694,7 @@
                 </a:solidFill>
                 <a:latin typeface="Calibri"/>
               </a:rPr>
-              <a:t>–   La firma: nombre y lista ordenada de parametros con su tipo y su direccion, donde IN significa que el dato entra, OUT que el procedimiento lo devuelve e IN OUT que entra y sale modificado.</a:t>
+              <a:t>–   De modo que aunque alguien controle la entrada no tiene sobre que ejercerla</a:t>
             </a:r>
           </a:p>
           <a:p>
@@ -3707,7 +3710,7 @@
                 </a:solidFill>
                 <a:latin typeface="Calibri"/>
               </a:rPr>
-              <a:t>–   Las precondiciones: lo que debe ser verdadero antes de llamar.</a:t>
+              <a:t>–   Y el motor reutiliza el plan porque la sentencia es siempre la misma cadena, lo que enlaza con el analisis de planes de las Clases 6 y 8.</a:t>
             </a:r>
           </a:p>
           <a:p>
@@ -3723,71 +3726,7 @@
                 </a:solidFill>
                 <a:latin typeface="Calibri"/>
               </a:rPr>
-              <a:t>–   El efecto o postcondicion: que quedo distinto en la base despues de la llamada.</a:t>
-            </a:r>
-          </a:p>
-          <a:p>
-            <a:pPr>
-              <a:spcAft>
-                <a:spcPts val="800"/>
-              </a:spcAft>
-            </a:pPr>
-            <a:r>
-              <a:rPr sz="2000" b="0" i="0">
-                <a:solidFill>
-                  <a:srgbClr val="333333"/>
-                </a:solidFill>
-                <a:latin typeface="Calibri"/>
-              </a:rPr>
-              <a:t>–   La lista de errores posibles con codigo y significado.</a:t>
-            </a:r>
-          </a:p>
-          <a:p>
-            <a:pPr>
-              <a:spcAft>
-                <a:spcPts val="800"/>
-              </a:spcAft>
-            </a:pPr>
-            <a:r>
-              <a:rPr sz="2000" b="0" i="0">
-                <a:solidFill>
-                  <a:srgbClr val="333333"/>
-                </a:solidFill>
-                <a:latin typeface="Calibri"/>
-              </a:rPr>
-              <a:t>–   Si la operacion es idempotente.</a:t>
-            </a:r>
-          </a:p>
-          <a:p>
-            <a:pPr>
-              <a:spcAft>
-                <a:spcPts val="800"/>
-              </a:spcAft>
-            </a:pPr>
-            <a:r>
-              <a:rPr sz="2000" b="0" i="0">
-                <a:solidFill>
-                  <a:srgbClr val="333333"/>
-                </a:solidFill>
-                <a:latin typeface="Calibri"/>
-              </a:rPr>
-              <a:t>–   Y la version.</a:t>
-            </a:r>
-          </a:p>
-          <a:p>
-            <a:pPr>
-              <a:spcAft>
-                <a:spcPts val="800"/>
-              </a:spcAft>
-            </a:pPr>
-            <a:r>
-              <a:rPr sz="2000" b="0" i="0">
-                <a:solidFill>
-                  <a:srgbClr val="333333"/>
-                </a:solidFill>
-                <a:latin typeface="Calibri"/>
-              </a:rPr>
-              <a:t>–   En VetCare el contrato de agendamiento se escribe asi: sp_agendar_cita(p_id_mascota IN NUMBER, p_id_veterinario IN NUMBER, p_fecha_hora IN TIMESTAMP, p_motivo IN VARCHAR2, p_id_cita OUT NUMBER)</a:t>
+              <a:t>–   Aqui llega la primera pregunta previsible: si uso un ORM como JPA, ya estoy protegido.</a:t>
             </a:r>
           </a:p>
         </p:txBody>
@@ -3968,7 +3907,7 @@
                 </a:solidFill>
                 <a:latin typeface="Calibri"/>
               </a:rPr>
-              <a:t>El contrato y sus seis partes, que se exigen en el entregable (2/2)</a:t>
+              <a:t>El contrato y sus seis partes, que se exigen en el entregable (1/2)</a:t>
             </a:r>
           </a:p>
         </p:txBody>
@@ -4007,7 +3946,7 @@
                 </a:solidFill>
                 <a:latin typeface="Calibri"/>
               </a:rPr>
-              <a:t>–   Precondicion, la mascota existe y esta activa; efecto, inserta una fila en Cita en estado PROGRAMADA y devuelve su identificador; errores, -20010 mascota inexistente, -20011 mascota inactiva, -20012 franja ocupada; idempotente, no.</a:t>
+              <a:t>–   Contrato, dicho en serio, es mucho mas que el nombre del procedimiento, y tiene seis partes que hay que exigir en el entregable de hoy.</a:t>
             </a:r>
           </a:p>
           <a:p>
@@ -4023,7 +3962,7 @@
                 </a:solidFill>
                 <a:latin typeface="Calibri"/>
               </a:rPr>
-              <a:t>–   Idempotente significa que ejecutar la operacion dos veces con los mismos datos deja el sistema igual que ejecutarla una sola vez.</a:t>
+              <a:t>–   La firma: nombre y lista ordenada de parametros con su tipo y su direccion, donde IN significa que el dato entra, OUT que el procedimiento lo devuelve e IN OUT que entra y sale modificado.</a:t>
             </a:r>
           </a:p>
           <a:p>
@@ -4039,7 +3978,7 @@
                 </a:solidFill>
                 <a:latin typeface="Calibri"/>
               </a:rPr>
-              <a:t>–   Agendar no lo es, y eso tiene consecuencia inmediata: si la recepcionista da doble clic, o si la red corta la respuesta y la aplicacion reintenta, quedan dos citas identicas.</a:t>
+              <a:t>–   Las precondiciones: lo que debe ser verdadero antes de llamar.</a:t>
             </a:r>
           </a:p>
           <a:p>
@@ -4055,7 +3994,7 @@
                 </a:solidFill>
                 <a:latin typeface="Calibri"/>
               </a:rPr>
-              <a:t>–   La solucion no es pedirle al usuario que no haga doble clic: es una restriccion UNIQUE sobre (id_veterinario</a:t>
+              <a:t>–   El efecto o postcondicion: que quedo distinto en la base despues de la llamada.</a:t>
             </a:r>
           </a:p>
           <a:p>
@@ -4071,7 +4010,7 @@
                 </a:solidFill>
                 <a:latin typeface="Calibri"/>
               </a:rPr>
-              <a:t>–   Fecha_hora) que hace fallar el segundo intento en la base y no en la interfaz, o una clave de idempotencia que la aplicacion genera y la base guarda como unica.</a:t>
+              <a:t>–   Si la operacion es idempotente.</a:t>
             </a:r>
           </a:p>
           <a:p>
@@ -4087,7 +4026,7 @@
                 </a:solidFill>
                 <a:latin typeface="Calibri"/>
               </a:rPr>
-              <a:t>–   Esto conecta con la Clase 10, donde dos recepcionistas simultaneas producian el mismo dano sin que ninguna sentencia fallara.</a:t>
+              <a:t>–   En VetCare el contrato de agendamiento se escribe asi: sp_agendar_cita(p_id_mascota IN NUMBER, p_id_veterinario IN NUMBER, p_fecha_hora IN TIMESTAMP, p_motivo IN VARCHAR2, p_id_cita OUT NUMBER)</a:t>
             </a:r>
           </a:p>
         </p:txBody>
@@ -4268,7 +4207,7 @@
                 </a:solidFill>
                 <a:latin typeface="Calibri"/>
               </a:rPr>
-              <a:t>El manejo de errores entre capas: las tres reglas (1/2)</a:t>
+              <a:t>El contrato y sus seis partes, que se exigen en el entregable (2/2)</a:t>
             </a:r>
           </a:p>
         </p:txBody>
@@ -4307,7 +4246,7 @@
                 </a:solidFill>
                 <a:latin typeface="Calibri"/>
               </a:rPr>
-              <a:t>–   El manejo de errores entre capas se resuelve con tres reglas.</a:t>
+              <a:t>–   Precondicion, la mascota existe y esta activa; efecto, inserta una fila en Cita en estado PROGRAMADA y devuelve su identificador; errores, -20010 mascota inexistente, -20011 mascota inactiva, -20012 franja ocupada; idempotente, no.</a:t>
             </a:r>
           </a:p>
           <a:p>
@@ -4323,7 +4262,7 @@
                 </a:solidFill>
                 <a:latin typeface="Calibri"/>
               </a:rPr>
-              <a:t>–   Primera: el procedimiento nunca informa un fallo devolviendo cero o menos uno en un parametro de salida, porque quien llama puede ignorarlo y seguir; lanza el error con RAISE_APPLICATION_ERROR</a:t>
+              <a:t>–   Agendar no lo es, y eso tiene consecuencia inmediata: si la recepcionista da doble clic, o si la red corta la respuesta y la aplicacion reintenta, quedan dos citas identicas.</a:t>
             </a:r>
           </a:p>
           <a:p>
@@ -4339,7 +4278,7 @@
                 </a:solidFill>
                 <a:latin typeface="Calibri"/>
               </a:rPr>
-              <a:t>–   Y el rango disponible en Oracle para errores propios va de -20000 a -20999, es decir mil codigos.</a:t>
+              <a:t>–   La solucion no es pedirle al usuario que no haga doble clic: es una restriccion UNIQUE sobre (id_veterinario</a:t>
             </a:r>
           </a:p>
           <a:p>
@@ -4355,7 +4294,7 @@
                 </a:solidFill>
                 <a:latin typeface="Calibri"/>
               </a:rPr>
-              <a:t>–   Ese rango es regla dura del motor; repartirlo por modulo, por ejemplo -20010 a -20019 para mascotas y -20020 a -20029 para inventario, es convencion propia del proyecto.</a:t>
+              <a:t>–   Fecha_hora) que hace fallar el segundo intento en la base y no en la interfaz, o una clave de idempotencia que la aplicacion genera y la base guarda como unica.</a:t>
             </a:r>
           </a:p>
           <a:p>
@@ -4371,23 +4310,7 @@
                 </a:solidFill>
                 <a:latin typeface="Calibri"/>
               </a:rPr>
-              <a:t>–   Segunda: la aplicacion captura el codigo, lo traduce a un mensaje en lenguaje de recepcion y jamas muestra el texto crudo del motor</a:t>
-            </a:r>
-          </a:p>
-          <a:p>
-            <a:pPr>
-              <a:spcAft>
-                <a:spcPts val="800"/>
-              </a:spcAft>
-            </a:pPr>
-            <a:r>
-              <a:rPr sz="2000" b="0" i="0">
-                <a:solidFill>
-                  <a:srgbClr val="333333"/>
-                </a:solidFill>
-                <a:latin typeface="Calibri"/>
-              </a:rPr>
-              <a:t>–   Porque un ORA-00942 tabla o vista no existe le regala al atacante el nombre de los objetos y al recepcionista no le dice nada</a:t>
+              <a:t>–   Esto conecta con la Clase 10, donde dos recepcionistas simultaneas producian el mismo dano sin que ninguna sentencia fallara.</a:t>
             </a:r>
           </a:p>
         </p:txBody>
@@ -4568,7 +4491,7 @@
                 </a:solidFill>
                 <a:latin typeface="Calibri"/>
               </a:rPr>
-              <a:t>El manejo de errores entre capas: las tres reglas (2/2)</a:t>
+              <a:t>El manejo de errores entre capas: las tres reglas (1/2)</a:t>
             </a:r>
           </a:p>
         </p:txBody>
@@ -4607,7 +4530,7 @@
                 </a:solidFill>
                 <a:latin typeface="Calibri"/>
               </a:rPr>
-              <a:t>–   El error tecnico completo se registra en el log del servidor con un identificador de correlacion que permita encontrar despues ese evento exacto.</a:t>
+              <a:t>–   Primera: el procedimiento nunca informa un fallo devolviendo cero o menos uno en un parametro de salida, porque quien llama puede ignorarlo y seguir; lanza el error con RAISE_APPLICATION_ERROR</a:t>
             </a:r>
           </a:p>
           <a:p>
@@ -4623,7 +4546,7 @@
                 </a:solidFill>
                 <a:latin typeface="Calibri"/>
               </a:rPr>
-              <a:t>–   Tercera, la mas discutida: quien decide COMMIT.</a:t>
+              <a:t>–   Y el rango disponible en Oracle para errores propios va de -20000 a -20999, es decir mil codigos.</a:t>
             </a:r>
           </a:p>
           <a:p>
@@ -4639,7 +4562,7 @@
                 </a:solidFill>
                 <a:latin typeface="Calibri"/>
               </a:rPr>
-              <a:t>–   La operacion de negocio completa, con todas sus validaciones y sus insercciones, vive dentro de un solo procedimiento, y ese procedimiento hace COMMIT si todo salio bien o ROLLBACK si algo fallo; la aplicacion no confirma a la mitad.</a:t>
+              <a:t>–   Ese rango es regla dura del motor; repartirlo por modulo, por ejemplo -20010 a -20019 para mascotas y -20020 a -20029 para inventario, es convencion propia del proyecto.</a:t>
             </a:r>
           </a:p>
           <a:p>
@@ -4655,7 +4578,7 @@
                 </a:solidFill>
                 <a:latin typeface="Calibri"/>
               </a:rPr>
-              <a:t>–   En el bloque de excepciones se escribe ROLLBACK y luego RAISE para que el error suba, y nunca WHEN OTHERS THEN NULL, que es la forma mas eficaz que existe de perder datos sin enterarse.</a:t>
+              <a:t>–   Segunda: la aplicacion captura el codigo, lo traduce a un mensaje en lenguaje de recepcion y jamas muestra el texto crudo del motor</a:t>
             </a:r>
           </a:p>
         </p:txBody>
@@ -4836,7 +4759,7 @@
                 </a:solidFill>
                 <a:latin typeface="Calibri"/>
               </a:rPr>
-              <a:t>El pool de conexiones: que es y por que se agota (1/2)</a:t>
+              <a:t>El manejo de errores entre capas: las tres reglas (2/2)</a:t>
             </a:r>
           </a:p>
         </p:txBody>
@@ -4875,7 +4798,7 @@
                 </a:solidFill>
                 <a:latin typeface="Calibri"/>
               </a:rPr>
-              <a:t>–   Un pool de conexiones es un conjunto de conexiones ya abiertas y autenticadas que la aplicacion mantiene vivas, presta a cada peticion mientras dura y recupera al terminar.</a:t>
+              <a:t>–   Porque un ORA-00942 tabla o vista no existe le regala al atacante el nombre de los objetos y al recepcionista no le dice nada</a:t>
             </a:r>
           </a:p>
           <a:p>
@@ -4891,7 +4814,7 @@
                 </a:solidFill>
                 <a:latin typeface="Calibri"/>
               </a:rPr>
-              <a:t>–   Existe por una asimetria que conviene dar con numeros: abrir una conexion es caro y ejecutar una consulta es barato.</a:t>
+              <a:t>–   El error tecnico completo se registra en el log del servidor con un identificador de correlacion que permita encontrar despues ese evento exacto.</a:t>
             </a:r>
           </a:p>
           <a:p>
@@ -4907,7 +4830,7 @@
                 </a:solidFill>
                 <a:latin typeface="Calibri"/>
               </a:rPr>
-              <a:t>–   Abrir una conexion implica saludo TCP, autenticacion del usuario, creacion de la sesion y reserva de memoria privada</a:t>
+              <a:t>–   Tercera, la mas discutida: quien decide COMMIT.</a:t>
             </a:r>
           </a:p>
           <a:p>
@@ -4923,71 +4846,7 @@
                 </a:solidFill>
                 <a:latin typeface="Calibri"/>
               </a:rPr>
-              <a:t>–   En un motor como Oracle sobre una red de oficina eso cuesta del orden de decenas de milisegundos, digamos entre 20 y 100 segun red y configuracion.</a:t>
-            </a:r>
-          </a:p>
-          <a:p>
-            <a:pPr>
-              <a:spcAft>
-                <a:spcPts val="800"/>
-              </a:spcAft>
-            </a:pPr>
-            <a:r>
-              <a:rPr sz="2000" b="0" i="0">
-                <a:solidFill>
-                  <a:srgbClr val="333333"/>
-                </a:solidFill>
-                <a:latin typeface="Calibri"/>
-              </a:rPr>
-              <a:t>–   Tomar una conexion prestada del pool cuesta una fraccion de milisegundo.</a:t>
-            </a:r>
-          </a:p>
-          <a:p>
-            <a:pPr>
-              <a:spcAft>
-                <a:spcPts val="800"/>
-              </a:spcAft>
-            </a:pPr>
-            <a:r>
-              <a:rPr sz="2000" b="0" i="0">
-                <a:solidFill>
-                  <a:srgbClr val="333333"/>
-                </a:solidFill>
-                <a:latin typeface="Calibri"/>
-              </a:rPr>
-              <a:t>–   Un SELECT bien indexado sobre Cita se resuelve en 2 o 3 milisegundos.</a:t>
-            </a:r>
-          </a:p>
-          <a:p>
-            <a:pPr>
-              <a:spcAft>
-                <a:spcPts val="800"/>
-              </a:spcAft>
-            </a:pPr>
-            <a:r>
-              <a:rPr sz="2000" b="0" i="0">
-                <a:solidFill>
-                  <a:srgbClr val="333333"/>
-                </a:solidFill>
-                <a:latin typeface="Calibri"/>
-              </a:rPr>
-              <a:t>–   Si por cada consulta se abre y se cierra la conexion, la aplicacion gasta cincuenta milisegundos en el tramite y tres en el trabajo: mas del noventa por ciento del tiempo de respuesta es protocolo.</a:t>
-            </a:r>
-          </a:p>
-          <a:p>
-            <a:pPr>
-              <a:spcAft>
-                <a:spcPts val="800"/>
-              </a:spcAft>
-            </a:pPr>
-            <a:r>
-              <a:rPr sz="2000" b="0" i="0">
-                <a:solidFill>
-                  <a:srgbClr val="333333"/>
-                </a:solidFill>
-                <a:latin typeface="Calibri"/>
-              </a:rPr>
-              <a:t>–   Los valores exactos dependen del entorno y hay que medirlos; lo que si es regla dura es la direccion de la desigualdad.</a:t>
+              <a:t>–   En el bloque de excepciones se escribe ROLLBACK y luego RAISE para que el error suba, y nunca WHEN OTHERS THEN NULL, que es la forma mas eficaz que existe de perder datos sin enterarse.</a:t>
             </a:r>
           </a:p>
         </p:txBody>
@@ -5168,7 +5027,7 @@
                 </a:solidFill>
                 <a:latin typeface="Calibri"/>
               </a:rPr>
-              <a:t>El pool de conexiones: que es y por que se agota (2/2)</a:t>
+              <a:t>El pool de conexiones: que es y por que se agota (1/3)</a:t>
             </a:r>
           </a:p>
         </p:txBody>
@@ -5207,7 +5066,7 @@
                 </a:solidFill>
                 <a:latin typeface="Calibri"/>
               </a:rPr>
-              <a:t>–   De ahi salen dos consecuencias.</a:t>
+              <a:t>–   Un pool de conexiones es un conjunto de conexiones ya abiertas y autenticadas que la aplicacion mantiene vivas, presta a cada peticion mientras dura y recupera al terminar.</a:t>
             </a:r>
           </a:p>
           <a:p>
@@ -5223,7 +5082,7 @@
                 </a:solidFill>
                 <a:latin typeface="Calibri"/>
               </a:rPr>
-              <a:t>–   El tamano del pool no se maximiza, porque cada sesion consume memoria del servidor y mas conexiones simultaneas que nucleos de CPU no aumentan el trabajo hecho</a:t>
+              <a:t>–   Existe por una asimetria que conviene dar con numeros: abrir una conexion es caro y ejecutar una consulta es barato.</a:t>
             </a:r>
           </a:p>
           <a:p>
@@ -5239,7 +5098,7 @@
                 </a:solidFill>
                 <a:latin typeface="Calibri"/>
               </a:rPr>
-              <a:t>–   Solo la cola: la convencion difundida, no ley, es partir de unas diez conexiones para una aplicacion de este tamano y subir solo con mediciones.</a:t>
+              <a:t>–   Abrir una conexion implica saludo TCP, autenticacion del usuario, creacion de la sesion y reserva de memoria privada</a:t>
             </a:r>
           </a:p>
           <a:p>
@@ -5255,7 +5114,7 @@
                 </a:solidFill>
                 <a:latin typeface="Calibri"/>
               </a:rPr>
-              <a:t>–   Y la fuga de conexiones es el fallo tipico: si una ruta del codigo no devuelve la conexion porque falto el finally o el try con recursos, el pool se agota y la aplicacion se congela esperando</a:t>
+              <a:t>–   En un motor como Oracle sobre una red de oficina eso cuesta del orden de decenas de milisegundos, digamos entre 20 y 100 segun red y configuracion.</a:t>
             </a:r>
           </a:p>
           <a:p>
@@ -5271,39 +5130,7 @@
                 </a:solidFill>
                 <a:latin typeface="Calibri"/>
               </a:rPr>
-              <a:t>–   El sintoma es un sistema que funciona media hora y despues no responde.</a:t>
-            </a:r>
-          </a:p>
-          <a:p>
-            <a:pPr>
-              <a:spcAft>
-                <a:spcPts val="800"/>
-              </a:spcAft>
-            </a:pPr>
-            <a:r>
-              <a:rPr sz="2000" b="0" i="0">
-                <a:solidFill>
-                  <a:srgbClr val="333333"/>
-                </a:solidFill>
-                <a:latin typeface="Calibri"/>
-              </a:rPr>
-              <a:t>–   Segunda pregunta previsible: no es mas lento llamar un procedimiento que consultar directo.</a:t>
-            </a:r>
-          </a:p>
-          <a:p>
-            <a:pPr>
-              <a:spcAft>
-                <a:spcPts val="800"/>
-              </a:spcAft>
-            </a:pPr>
-            <a:r>
-              <a:rPr sz="2000" b="0" i="0">
-                <a:solidFill>
-                  <a:srgbClr val="333333"/>
-                </a:solidFill>
-                <a:latin typeface="Calibri"/>
-              </a:rPr>
-              <a:t>–   Normalmente es mas rapido, porque una llamada resuelve en el servidor lo que la aplicacion haria en tres o cuatro viajes de red; en todo caso la respuesta profesional es medir, con las herramientas de la Clase 8.</a:t>
+              <a:t>–   Un SELECT bien indexado sobre Cita se resuelve en 2 o 3 milisegundos.</a:t>
             </a:r>
           </a:p>
         </p:txBody>
@@ -5484,7 +5311,7 @@
                 </a:solidFill>
                 <a:latin typeface="Calibri"/>
               </a:rPr>
-              <a:t>Logica en la base o en la aplicacion: honestidad y no propaganda (1/2)</a:t>
+              <a:t>El pool de conexiones: que es y por que se agota (2/3)</a:t>
             </a:r>
           </a:p>
         </p:txBody>
@@ -5523,7 +5350,7 @@
                 </a:solidFill>
                 <a:latin typeface="Calibri"/>
               </a:rPr>
-              <a:t>–   El trade-off de poner logica en la base o en la aplicacion merece honestidad y no propaganda, porque el estudiante encontrara equipos reales que defienden lo contrario de lo que oye hoy.</a:t>
+              <a:t>–   Si por cada consulta se abre y se cierra la conexion, la aplicacion gasta cincuenta milisegundos en el tramite y tres en el trabajo: mas del noventa por ciento del tiempo de respuesta es protocolo.</a:t>
             </a:r>
           </a:p>
           <a:p>
@@ -5539,7 +5366,7 @@
                 </a:solidFill>
                 <a:latin typeface="Calibri"/>
               </a:rPr>
-              <a:t>–   A favor de la base: la regla queda escrita una sola vez y la cumplen todos los clientes, incluida la consola del administrador, el reporte de Excel y el script que alguien correra a las once de la noche</a:t>
+              <a:t>–   Los valores exactos dependen del entorno y hay que medirlos; lo que si es regla dura es la direccion de la desigualdad.</a:t>
             </a:r>
           </a:p>
           <a:p>
@@ -5555,7 +5382,7 @@
                 </a:solidFill>
                 <a:latin typeface="Calibri"/>
               </a:rPr>
-              <a:t>–   Queda dentro de la misma transaccion que los datos, sin ventana entre validar y escribir; y ahorra viajes de red.</a:t>
+              <a:t>–   El tamano del pool no se maximiza, porque cada sesion consume memoria del servidor y mas conexiones simultaneas que nucleos de CPU no aumentan el trabajo hecho</a:t>
             </a:r>
           </a:p>
           <a:p>
@@ -5571,23 +5398,7 @@
                 </a:solidFill>
                 <a:latin typeface="Calibri"/>
               </a:rPr>
-              <a:t>–   En contra: PL/SQL es mas dificil de probar de forma automatizada, sus cambios no se versionan tan naturalmente en un repositorio como el codigo de la aplicacion, hay menos programadores que lo dominen, ata el proyecto al motor elegido</a:t>
-            </a:r>
-          </a:p>
-          <a:p>
-            <a:pPr>
-              <a:spcAft>
-                <a:spcPts val="800"/>
-              </a:spcAft>
-            </a:pPr>
-            <a:r>
-              <a:rPr sz="2000" b="0" i="0">
-                <a:solidFill>
-                  <a:srgbClr val="333333"/>
-                </a:solidFill>
-                <a:latin typeface="Calibri"/>
-              </a:rPr>
-              <a:t>–   Y la CPU de la base suele ser el recurso mas escaso y mas caro de escalar, porque se agrega servidor de aplicacion con facilidad y no se agrega servidor de base de datos con la misma facilidad.</a:t>
+              <a:t>–   Solo la cola: la convencion difundida, no ley, es partir de unas diez conexiones para una aplicacion de este tamano y subir solo con mediciones.</a:t>
             </a:r>
           </a:p>
         </p:txBody>
@@ -5768,7 +5579,7 @@
                 </a:solidFill>
                 <a:latin typeface="Calibri"/>
               </a:rPr>
-              <a:t>Logica en la base o en la aplicacion: honestidad y no propaganda (2/2)</a:t>
+              <a:t>El pool de conexiones: que es y por que se agota (3/3)</a:t>
             </a:r>
           </a:p>
         </p:txBody>
@@ -5807,7 +5618,7 @@
                 </a:solidFill>
                 <a:latin typeface="Calibri"/>
               </a:rPr>
-              <a:t>–   El criterio de decision que conviene entregar es este: las invariantes que protegen la integridad de los datos van en la base, porque son las que no pueden depender de que todos los clientes se porten bien</a:t>
+              <a:t>–   Y la fuga de conexiones es el fallo tipico: si una ruta del codigo no devuelve la conexion porque falto el finally o el try con recursos, el pool se agota y la aplicacion se congela esperando</a:t>
             </a:r>
           </a:p>
           <a:p>
@@ -5823,7 +5634,7 @@
                 </a:solidFill>
                 <a:latin typeface="Calibri"/>
               </a:rPr>
-              <a:t>–   Y en VetCare son exactamente las tres reglas del proyecto, que una mascota inactiva no agende cita, que el stock de Insumo nunca quede negativo y que los cambios sensibles queden auditados.</a:t>
+              <a:t>–   El sintoma es un sistema que funciona media hora y despues no responde.</a:t>
             </a:r>
           </a:p>
           <a:p>
@@ -5839,7 +5650,7 @@
                 </a:solidFill>
                 <a:latin typeface="Calibri"/>
               </a:rPr>
-              <a:t>–   La orquestacion, la presentacion, los formatos de fecha y el envio de correos van en la aplicacion.</a:t>
+              <a:t>–   Segunda pregunta previsible: no es mas lento llamar un procedimiento que consultar directo.</a:t>
             </a:r>
           </a:p>
           <a:p>
@@ -5855,7 +5666,7 @@
                 </a:solidFill>
                 <a:latin typeface="Calibri"/>
               </a:rPr>
-              <a:t>–   Cuando pregunten cual es mejor, la respuesta es que depende de donde caiga el costo del error, y para datos que no se pueden reconstruir ese costo cae siempre del lado de la base.</a:t>
+              <a:t>–   Normalmente es mas rapido, porque una llamada resuelve en el servidor lo que la aplicacion haria en tres o cuatro viajes de red; en todo caso la respuesta profesional es medir, con las herramientas de la Clase 8.</a:t>
             </a:r>
           </a:p>
         </p:txBody>
@@ -6036,7 +5847,7 @@
                 </a:solidFill>
                 <a:latin typeface="Calibri"/>
               </a:rPr>
-              <a:t>Cambiar el esquema sin romper la aplicacion que ya corre (1/2)</a:t>
+              <a:t>Logica en la base o en la aplicacion: honestidad y no propaganda (1/2)</a:t>
             </a:r>
           </a:p>
         </p:txBody>
@@ -6075,7 +5886,7 @@
                 </a:solidFill>
                 <a:latin typeface="Calibri"/>
               </a:rPr>
-              <a:t>–   Queda el problema mas subestimado: cambiar el esquema sin romper la aplicacion que ya esta corriendo.</a:t>
+              <a:t>–   A favor de la base: la regla queda escrita una sola vez y la cumplen todos los clientes, incluida la consola del administrador, el reporte de Excel y el script que alguien correra a las once de la noche</a:t>
             </a:r>
           </a:p>
           <a:p>
@@ -6091,7 +5902,7 @@
                 </a:solidFill>
                 <a:latin typeface="Calibri"/>
               </a:rPr>
-              <a:t>–   La regla es que nunca se cambia una cosa en su lugar, se expande, se migra y despues se contrae.</a:t>
+              <a:t>–   Queda dentro de la misma transaccion que los datos, sin ventana entre validar y escribir; y ahorra viajes de red.</a:t>
             </a:r>
           </a:p>
           <a:p>
@@ -6107,7 +5918,7 @@
                 </a:solidFill>
                 <a:latin typeface="Calibri"/>
               </a:rPr>
-              <a:t>–   Suponga que VetCare necesita registrar la fecha en que una mascota fue inactivada, dato que hoy no existe.</a:t>
+              <a:t>–   En contra: PL/SQL es mas dificil de probar de forma automatizada, sus cambios no se versionan tan naturalmente en un repositorio como el codigo de la aplicacion, hay menos programadores que lo dominen, ata el proyecto al motor elegido</a:t>
             </a:r>
           </a:p>
           <a:p>
@@ -6123,71 +5934,7 @@
                 </a:solidFill>
                 <a:latin typeface="Calibri"/>
               </a:rPr>
-              <a:t>–   Uno, expandir: ALTER TABLE Mascota ADD (fecha_inactivacion DATE NULL), sin tocar ningun procedimiento; la aplicacion vieja ignora la columna y sigue igual porque admite nulos.</a:t>
-            </a:r>
-          </a:p>
-          <a:p>
-            <a:pPr>
-              <a:spcAft>
-                <a:spcPts val="800"/>
-              </a:spcAft>
-            </a:pPr>
-            <a:r>
-              <a:rPr sz="2000" b="0" i="0">
-                <a:solidFill>
-                  <a:srgbClr val="333333"/>
-                </a:solidFill>
-                <a:latin typeface="Calibri"/>
-              </a:rPr>
-              <a:t>–   Dos, escribir en ambos lados: sp_inactivar_mascota se actualiza para llenar tambien la columna nueva.</a:t>
-            </a:r>
-          </a:p>
-          <a:p>
-            <a:pPr>
-              <a:spcAft>
-                <a:spcPts val="800"/>
-              </a:spcAft>
-            </a:pPr>
-            <a:r>
-              <a:rPr sz="2000" b="0" i="0">
-                <a:solidFill>
-                  <a:srgbClr val="333333"/>
-                </a:solidFill>
-                <a:latin typeface="Calibri"/>
-              </a:rPr>
-              <a:t>–   Tres, rellenar el historico con UPDATE por lotes y no en una sentencia gigante sobre la tabla completa, para no bloquear a nadie por minutos, lo que enlaza con la Clase 10.</a:t>
-            </a:r>
-          </a:p>
-          <a:p>
-            <a:pPr>
-              <a:spcAft>
-                <a:spcPts val="800"/>
-              </a:spcAft>
-            </a:pPr>
-            <a:r>
-              <a:rPr sz="2000" b="0" i="0">
-                <a:solidFill>
-                  <a:srgbClr val="333333"/>
-                </a:solidFill>
-                <a:latin typeface="Calibri"/>
-              </a:rPr>
-              <a:t>–   Cuatro, mover lecturas y reportes a la columna nueva.</a:t>
-            </a:r>
-          </a:p>
-          <a:p>
-            <a:pPr>
-              <a:spcAft>
-                <a:spcPts val="800"/>
-              </a:spcAft>
-            </a:pPr>
-            <a:r>
-              <a:rPr sz="2000" b="0" i="0">
-                <a:solidFill>
-                  <a:srgbClr val="333333"/>
-                </a:solidFill>
-                <a:latin typeface="Calibri"/>
-              </a:rPr>
-              <a:t>–   Cinco, contraer: eliminar lo viejo solo cuando ninguna version desplegada lo use.</a:t>
+              <a:t>–   Y la CPU de la base suele ser el recurso mas escaso y mas caro de escalar, porque se agrega servidor de aplicacion con facilidad y no se agrega servidor de base de datos con la misma facilidad.</a:t>
             </a:r>
           </a:p>
         </p:txBody>
@@ -6368,7 +6115,7 @@
                 </a:solidFill>
                 <a:latin typeface="Calibri"/>
               </a:rPr>
-              <a:t>Cambiar el esquema sin romper la aplicacion que ya corre (2/2)</a:t>
+              <a:t>Logica en la base o en la aplicacion: honestidad y no propaganda (2/2)</a:t>
             </a:r>
           </a:p>
         </p:txBody>
@@ -6407,7 +6154,7 @@
                 </a:solidFill>
                 <a:latin typeface="Calibri"/>
               </a:rPr>
-              <a:t>–   Cada paso deja funcionando al mismo tiempo la version vieja y la nueva.</a:t>
+              <a:t>–   El criterio de decision que conviene entregar es este: las invariantes que protegen la integridad de los datos van en la base, porque son las que no pueden depender de que todos los clientes se porten bien</a:t>
             </a:r>
           </a:p>
           <a:p>
@@ -6423,7 +6170,7 @@
                 </a:solidFill>
                 <a:latin typeface="Calibri"/>
               </a:rPr>
-              <a:t>–   Con los procedimientos aplica la misma logica: agregar un parametro al final con valor DEFAULT es compatible, porque las llamadas existentes siguen valiendo; cambiar el orden de los parametros, su tipo o el significado de un codigo de error rompe</a:t>
+              <a:t>–   Y en VetCare son exactamente las tres reglas del proyecto, que una mascota inactiva no agende cita, que el stock de Insumo nunca quede negativo y que los cambios sensibles queden auditados.</a:t>
             </a:r>
           </a:p>
           <a:p>
@@ -6439,55 +6186,7 @@
                 </a:solidFill>
                 <a:latin typeface="Calibri"/>
               </a:rPr>
-              <a:t>–   Y ahi se publica sp_agendar_cita_v2 y se conserva la anterior como envoltura hasta que la aplicacion migre.</a:t>
-            </a:r>
-          </a:p>
-          <a:p>
-            <a:pPr>
-              <a:spcAft>
-                <a:spcPts val="800"/>
-              </a:spcAft>
-            </a:pPr>
-            <a:r>
-              <a:rPr sz="2000" b="0" i="0">
-                <a:solidFill>
-                  <a:srgbClr val="333333"/>
-                </a:solidFill>
-                <a:latin typeface="Calibri"/>
-              </a:rPr>
-              <a:t>–   Los scripts de migracion se numeran, se guardan en el repositorio y jamas se editan despues de aplicados: si algo quedo mal, se escribe el siguiente numero.</a:t>
-            </a:r>
-          </a:p>
-          <a:p>
-            <a:pPr>
-              <a:spcAft>
-                <a:spcPts val="800"/>
-              </a:spcAft>
-            </a:pPr>
-            <a:r>
-              <a:rPr sz="2000" b="0" i="0">
-                <a:solidFill>
-                  <a:srgbClr val="333333"/>
-                </a:solidFill>
-                <a:latin typeface="Calibri"/>
-              </a:rPr>
-              <a:t>–   Eso mismo entra en el informe y en el pitch de hoy, porque el estudiante no muestra pantallas: muestra su contrato, un caso de exito, un caso de error visto por el usuario y su plan de cambio de esquema</a:t>
-            </a:r>
-          </a:p>
-          <a:p>
-            <a:pPr>
-              <a:spcAft>
-                <a:spcPts val="800"/>
-              </a:spcAft>
-            </a:pPr>
-            <a:r>
-              <a:rPr sz="2000" b="0" i="0">
-                <a:solidFill>
-                  <a:srgbClr val="333333"/>
-                </a:solidFill>
-                <a:latin typeface="Calibri"/>
-              </a:rPr>
-              <a:t>–   Que es lo que la Clase 13 mirara desde el lado de los fallos reales y lo que la Clase 15 va a evaluar.</a:t>
+              <a:t>–   Cuando pregunten cual es mejor, la respuesta es que depende de donde caiga el costo del error, y para datos que no se pueden reconstruir ese costo cae siempre del lado de la base.</a:t>
             </a:r>
           </a:p>
         </p:txBody>
@@ -7040,141 +6739,21 @@
                 </a:solidFill>
                 <a:latin typeface="Calibri"/>
               </a:rPr>
-              <a:t>El contrato que la app consume (no SQL suelto)</a:t>
-            </a:r>
-          </a:p>
-        </p:txBody>
-      </p:sp>
-      <p:sp>
-        <p:nvSpPr>
-          <p:cNvPr id="5" name="Rounded Rectangle 4"/>
-          <p:cNvSpPr/>
-          <p:nvPr/>
-        </p:nvSpPr>
-        <p:spPr>
-          <a:xfrm>
-            <a:off x="457200" y="1261872"/>
-            <a:ext cx="11277295" cy="4773168"/>
-          </a:xfrm>
-          <a:prstGeom prst="roundRect">
-            <a:avLst>
-              <a:gd name="adj" fmla="val 12000"/>
-            </a:avLst>
-          </a:prstGeom>
-          <a:solidFill>
-            <a:srgbClr val="1E2A38"/>
-          </a:solidFill>
-          <a:ln>
-            <a:noFill/>
-          </a:ln>
-        </p:spPr>
-        <p:style>
-          <a:lnRef idx="1">
-            <a:schemeClr val="accent1"/>
-          </a:lnRef>
-          <a:fillRef idx="3">
-            <a:schemeClr val="accent1"/>
-          </a:fillRef>
-          <a:effectRef idx="2">
-            <a:schemeClr val="accent1"/>
-          </a:effectRef>
-          <a:fontRef idx="minor">
-            <a:schemeClr val="lt1"/>
-          </a:fontRef>
-        </p:style>
-        <p:txBody>
-          <a:bodyPr rtlCol="0" anchor="ctr"/>
-          <a:lstStyle/>
-          <a:p>
-            <a:pPr algn="ctr"/>
-          </a:p>
-        </p:txBody>
-      </p:sp>
-      <p:sp>
-        <p:nvSpPr>
-          <p:cNvPr id="6" name="Rectangle 5"/>
-          <p:cNvSpPr/>
-          <p:nvPr/>
-        </p:nvSpPr>
-        <p:spPr>
-          <a:xfrm>
-            <a:off x="457200" y="1261872"/>
-            <a:ext cx="11277295" cy="320040"/>
-          </a:xfrm>
-          <a:prstGeom prst="rect">
-            <a:avLst/>
-          </a:prstGeom>
-          <a:solidFill>
-            <a:srgbClr val="095292"/>
-          </a:solidFill>
-          <a:ln>
-            <a:noFill/>
-          </a:ln>
-        </p:spPr>
-        <p:style>
-          <a:lnRef idx="1">
-            <a:schemeClr val="accent1"/>
-          </a:lnRef>
-          <a:fillRef idx="3">
-            <a:schemeClr val="accent1"/>
-          </a:fillRef>
-          <a:effectRef idx="2">
-            <a:schemeClr val="accent1"/>
-          </a:effectRef>
-          <a:fontRef idx="minor">
-            <a:schemeClr val="lt1"/>
-          </a:fontRef>
-        </p:style>
-        <p:txBody>
-          <a:bodyPr rtlCol="0" anchor="ctr"/>
-          <a:lstStyle/>
-          <a:p>
-            <a:pPr algn="ctr"/>
-          </a:p>
-        </p:txBody>
-      </p:sp>
-      <p:sp>
-        <p:nvSpPr>
-          <p:cNvPr id="7" name="TextBox 6"/>
+              <a:t>Cambiar el esquema sin romper la aplicacion que ya corre (1/2)</a:t>
+            </a:r>
+          </a:p>
+        </p:txBody>
+      </p:sp>
+      <p:sp>
+        <p:nvSpPr>
+          <p:cNvPr id="5" name="TextBox 4"/>
           <p:cNvSpPr txBox="1"/>
           <p:nvPr/>
         </p:nvSpPr>
         <p:spPr>
           <a:xfrm>
-            <a:off x="685800" y="1307592"/>
-            <a:ext cx="10820095" cy="256032"/>
-          </a:xfrm>
-          <a:prstGeom prst="rect">
-            <a:avLst/>
-          </a:prstGeom>
-          <a:noFill/>
-        </p:spPr>
-        <p:txBody>
-          <a:bodyPr wrap="square" anchor="ctr"/>
-          <a:lstStyle/>
-          <a:p>
-            <a:r>
-              <a:rPr sz="1000" b="1" i="0">
-                <a:solidFill>
-                  <a:srgbClr val="269CCB"/>
-                </a:solidFill>
-                <a:latin typeface="Calibri"/>
-              </a:rPr>
-              <a:t>● ● ●</a:t>
-            </a:r>
-          </a:p>
-        </p:txBody>
-      </p:sp>
-      <p:sp>
-        <p:nvSpPr>
-          <p:cNvPr id="8" name="TextBox 7"/>
-          <p:cNvSpPr txBox="1"/>
-          <p:nvPr/>
-        </p:nvSpPr>
-        <p:spPr>
-          <a:xfrm>
-            <a:off x="777240" y="1719072"/>
-            <a:ext cx="10637215" cy="4133087"/>
+            <a:off x="457200" y="1170432"/>
+            <a:ext cx="11277295" cy="5230368"/>
           </a:xfrm>
           <a:prstGeom prst="rect">
             <a:avLst/>
@@ -7189,139 +6768,88 @@
           <a:p>
             <a:pPr>
               <a:spcAft>
-                <a:spcPts val="400"/>
+                <a:spcPts val="800"/>
               </a:spcAft>
             </a:pPr>
             <a:r>
-              <a:rPr sz="1400" b="0" i="0">
-                <a:solidFill>
-                  <a:srgbClr val="FFFFFF"/>
-                </a:solidFill>
-                <a:latin typeface="Calibri"/>
-              </a:rPr>
-              <a:t>sp_agendar_cita(</a:t>
+              <a:rPr sz="2000" b="0" i="0">
+                <a:solidFill>
+                  <a:srgbClr val="333333"/>
+                </a:solidFill>
+                <a:latin typeface="Calibri"/>
+              </a:rPr>
+              <a:t>–   Queda el problema mas subestimado: cambiar el esquema sin romper la aplicacion que ya esta corriendo.</a:t>
             </a:r>
           </a:p>
           <a:p>
             <a:pPr>
               <a:spcAft>
-                <a:spcPts val="400"/>
+                <a:spcPts val="800"/>
               </a:spcAft>
             </a:pPr>
             <a:r>
-              <a:rPr sz="1400" b="0" i="0">
-                <a:solidFill>
-                  <a:srgbClr val="FFFFFF"/>
-                </a:solidFill>
-                <a:latin typeface="Calibri"/>
-              </a:rPr>
-              <a:t>   p_id_cita     IN  NUMBER,</a:t>
+              <a:rPr sz="2000" b="0" i="0">
+                <a:solidFill>
+                  <a:srgbClr val="333333"/>
+                </a:solidFill>
+                <a:latin typeface="Calibri"/>
+              </a:rPr>
+              <a:t>–   La regla es que nunca se cambia una cosa en su lugar, se expande, se migra y despues se contrae.</a:t>
             </a:r>
           </a:p>
           <a:p>
             <a:pPr>
               <a:spcAft>
-                <a:spcPts val="400"/>
+                <a:spcPts val="800"/>
               </a:spcAft>
             </a:pPr>
             <a:r>
-              <a:rPr sz="1400" b="0" i="0">
-                <a:solidFill>
-                  <a:srgbClr val="FFFFFF"/>
-                </a:solidFill>
-                <a:latin typeface="Calibri"/>
-              </a:rPr>
-              <a:t>   p_id_mascota  IN  NUMBER,</a:t>
+              <a:rPr sz="2000" b="0" i="0">
+                <a:solidFill>
+                  <a:srgbClr val="333333"/>
+                </a:solidFill>
+                <a:latin typeface="Calibri"/>
+              </a:rPr>
+              <a:t>–   Uno, expandir:, sin tocar ningun procedimiento; la aplicacion vieja ignora la columna y sigue igual porque admite nulos.</a:t>
             </a:r>
           </a:p>
           <a:p>
             <a:pPr>
               <a:spcAft>
-                <a:spcPts val="400"/>
+                <a:spcPts val="800"/>
               </a:spcAft>
             </a:pPr>
             <a:r>
-              <a:rPr sz="1400" b="0" i="0">
-                <a:solidFill>
-                  <a:srgbClr val="FFFFFF"/>
-                </a:solidFill>
-                <a:latin typeface="Calibri"/>
-              </a:rPr>
-              <a:t>   p_fecha       IN  TIMESTAMP,</a:t>
+              <a:rPr sz="2000" b="0" i="0">
+                <a:solidFill>
+                  <a:srgbClr val="333333"/>
+                </a:solidFill>
+                <a:latin typeface="Calibri"/>
+              </a:rPr>
+              <a:t>–   Dos, escribir en ambos lados: sp_inactivar_mascota se actualiza para llenar tambien la columna nueva.</a:t>
             </a:r>
           </a:p>
           <a:p>
             <a:pPr>
               <a:spcAft>
-                <a:spcPts val="400"/>
+                <a:spcPts val="800"/>
               </a:spcAft>
             </a:pPr>
             <a:r>
-              <a:rPr sz="1400" b="0" i="0">
-                <a:solidFill>
-                  <a:srgbClr val="FFFFFF"/>
-                </a:solidFill>
-                <a:latin typeface="Calibri"/>
-              </a:rPr>
-              <a:t>   p_msg         OUT VARCHAR2   -- 'OK: ...' | 'ERROR: ...'</a:t>
-            </a:r>
-          </a:p>
-          <a:p>
-            <a:pPr>
-              <a:spcAft>
-                <a:spcPts val="400"/>
-              </a:spcAft>
-            </a:pPr>
-            <a:r>
-              <a:rPr sz="1400" b="0" i="0">
-                <a:solidFill>
-                  <a:srgbClr val="FFFFFF"/>
-                </a:solidFill>
-                <a:latin typeface="Calibri"/>
-              </a:rPr>
-              <a:t>)</a:t>
-            </a:r>
-          </a:p>
-        </p:txBody>
-      </p:sp>
-      <p:sp>
-        <p:nvSpPr>
-          <p:cNvPr id="9" name="TextBox 8"/>
-          <p:cNvSpPr txBox="1"/>
-          <p:nvPr/>
-        </p:nvSpPr>
-        <p:spPr>
-          <a:xfrm>
-            <a:off x="457200" y="6080760"/>
-            <a:ext cx="11277295" cy="320040"/>
-          </a:xfrm>
-          <a:prstGeom prst="rect">
-            <a:avLst/>
-          </a:prstGeom>
-          <a:noFill/>
-        </p:spPr>
-        <p:txBody>
-          <a:bodyPr wrap="square">
-            <a:spAutoFit/>
-          </a:bodyPr>
-          <a:lstStyle/>
-          <a:p>
-            <a:pPr algn="ctr"/>
-            <a:r>
-              <a:rPr sz="1200" b="0" i="1">
-                <a:solidFill>
-                  <a:srgbClr val="666666"/>
-                </a:solidFill>
-                <a:latin typeface="Calibri"/>
-              </a:rPr>
-              <a:t>La app llama el proc con parametros tipados: por eso no hay inyeccion SQL.</a:t>
-            </a:r>
-          </a:p>
-        </p:txBody>
-      </p:sp>
-      <p:sp>
-        <p:nvSpPr>
-          <p:cNvPr id="10" name="TextBox 9"/>
+              <a:rPr sz="2000" b="0" i="0">
+                <a:solidFill>
+                  <a:srgbClr val="333333"/>
+                </a:solidFill>
+                <a:latin typeface="Calibri"/>
+              </a:rPr>
+              <a:t>–   Tres, rellenar el historico con UPDATE por lotes y no en una sentencia gigante sobre la tabla completa, para no bloquear a nadie por minutos, lo que enlaza con la Clase 10.</a:t>
+            </a:r>
+          </a:p>
+        </p:txBody>
+      </p:sp>
+      <p:sp>
+        <p:nvSpPr>
+          <p:cNvPr id="6" name="TextBox 5"/>
           <p:cNvSpPr txBox="1"/>
           <p:nvPr/>
         </p:nvSpPr>
@@ -7495,7 +7023,7 @@
                 </a:solidFill>
                 <a:latin typeface="Calibri"/>
               </a:rPr>
-              <a:t>Demo del dia</a:t>
+              <a:t>Cambiar el esquema sin romper la aplicacion que ya corre (2/2)</a:t>
             </a:r>
           </a:p>
         </p:txBody>
@@ -7534,25 +7062,7 @@
                 </a:solidFill>
                 <a:latin typeface="Calibri"/>
               </a:rPr>
-              <a:t>–   </a:t>
-            </a:r>
-            <a:r>
-              <a:rPr sz="2000" b="1" i="0">
-                <a:solidFill>
-                  <a:srgbClr val="333333"/>
-                </a:solidFill>
-                <a:latin typeface="Calibri"/>
-              </a:rPr>
-              <a:t>Herramienta:</a:t>
-            </a:r>
-            <a:r>
-              <a:rPr sz="2000" b="0" i="0">
-                <a:solidFill>
-                  <a:srgbClr val="333333"/>
-                </a:solidFill>
-                <a:latin typeface="Calibri"/>
-              </a:rPr>
-              <a:t> Google Docs + Live SQL + Excalidraw</a:t>
+              <a:t>–   Cinco, contraer: eliminar lo viejo solo cuando ninguna version desplegada lo use.</a:t>
             </a:r>
           </a:p>
           <a:p>
@@ -7568,25 +7078,7 @@
                 </a:solidFill>
                 <a:latin typeface="Calibri"/>
               </a:rPr>
-              <a:t>–   </a:t>
-            </a:r>
-            <a:r>
-              <a:rPr sz="2000" b="1" i="0">
-                <a:solidFill>
-                  <a:srgbClr val="333333"/>
-                </a:solidFill>
-                <a:latin typeface="Calibri"/>
-              </a:rPr>
-              <a:t>Demo:</a:t>
-            </a:r>
-            <a:r>
-              <a:rPr sz="2000" b="0" i="0">
-                <a:solidFill>
-                  <a:srgbClr val="333333"/>
-                </a:solidFill>
-                <a:latin typeface="Calibri"/>
-              </a:rPr>
-              <a:t> Plantilla contrato sp_agendar_cita + storyboard 6 slides.</a:t>
+              <a:t>–   Con los procedimientos aplica la misma logica: agregar un parametro al final con valor DEFAULT es compatible, porque las llamadas existentes siguen valiendo; cambiar el orden de los parametros, su tipo o el significado de un codigo de error rompe</a:t>
             </a:r>
           </a:p>
           <a:p>
@@ -7602,7 +7094,7 @@
                 </a:solidFill>
                 <a:latin typeface="Calibri"/>
               </a:rPr>
-              <a:t>–   Sigan el mismo dominio VetCare (no inventen otro caso).</a:t>
+              <a:t>–   Y ahi se publica sp_agendar_cita_v2 y se conserva la anterior como envoltura hasta que la aplicacion migre.</a:t>
             </a:r>
           </a:p>
           <a:p>
@@ -7618,7 +7110,7 @@
                 </a:solidFill>
                 <a:latin typeface="Calibri"/>
               </a:rPr>
-              <a:t>–   Al final de la demo: dejar enlace/script compartible al grupo.</a:t>
+              <a:t>–   Los scripts de migracion se numeran, se guardan en el repositorio y jamas se editan despues de aplicados: si algo quedo mal, se escribe el siguiente numero.</a:t>
             </a:r>
           </a:p>
         </p:txBody>
@@ -7693,7 +7185,7 @@
         <p:spPr>
           <a:xfrm>
             <a:off x="0" y="0"/>
-            <a:ext cx="12191695" cy="1170432"/>
+            <a:ext cx="12191695" cy="960120"/>
           </a:xfrm>
           <a:prstGeom prst="rect">
             <a:avLst/>
@@ -7735,7 +7227,7 @@
         </p:nvSpPr>
         <p:spPr>
           <a:xfrm>
-            <a:off x="0" y="1170432"/>
+            <a:off x="0" y="960120"/>
             <a:ext cx="12191695" cy="41148"/>
           </a:xfrm>
           <a:prstGeom prst="rect">
@@ -7779,7 +7271,7 @@
         <p:spPr>
           <a:xfrm>
             <a:off x="457200" y="164592"/>
-            <a:ext cx="11277295" cy="384048"/>
+            <a:ext cx="11277295" cy="502920"/>
           </a:xfrm>
           <a:prstGeom prst="rect">
             <a:avLst/>
@@ -7799,55 +7291,21 @@
                 </a:solidFill>
                 <a:latin typeface="Calibri"/>
               </a:rPr>
-              <a:t>Herramientas de hoy</a:t>
-            </a:r>
-          </a:p>
-        </p:txBody>
-      </p:sp>
-      <p:sp>
-        <p:nvSpPr>
-          <p:cNvPr id="5" name="TextBox 4"/>
-          <p:cNvSpPr txBox="1"/>
-          <p:nvPr/>
-        </p:nvSpPr>
-        <p:spPr>
-          <a:xfrm>
-            <a:off x="457200" y="566928"/>
-            <a:ext cx="11277295" cy="411480"/>
-          </a:xfrm>
-          <a:prstGeom prst="rect">
-            <a:avLst/>
-          </a:prstGeom>
-          <a:noFill/>
-        </p:spPr>
-        <p:txBody>
-          <a:bodyPr wrap="square">
-            <a:spAutoFit/>
-          </a:bodyPr>
-          <a:lstStyle/>
-          <a:p>
-            <a:r>
-              <a:rPr sz="1400" b="0" i="0">
-                <a:solidFill>
-                  <a:srgbClr val="B8D8EE"/>
-                </a:solidFill>
-                <a:latin typeface="Calibri"/>
-              </a:rPr>
-              <a:t>Gratis · navegador o free tier</a:t>
-            </a:r>
-          </a:p>
-        </p:txBody>
-      </p:sp>
-      <p:sp>
-        <p:nvSpPr>
-          <p:cNvPr id="6" name="Rounded Rectangle 5"/>
+              <a:t>Cambiar el esquema sin romper la aplicacion... — sintaxis</a:t>
+            </a:r>
+          </a:p>
+        </p:txBody>
+      </p:sp>
+      <p:sp>
+        <p:nvSpPr>
+          <p:cNvPr id="5" name="Rounded Rectangle 4"/>
           <p:cNvSpPr/>
           <p:nvPr/>
         </p:nvSpPr>
         <p:spPr>
           <a:xfrm>
-            <a:off x="457200" y="1591056"/>
-            <a:ext cx="3624986" cy="2331720"/>
+            <a:off x="457200" y="1261872"/>
+            <a:ext cx="11277295" cy="5093208"/>
           </a:xfrm>
           <a:prstGeom prst="roundRect">
             <a:avLst>
@@ -7855,7 +7313,7 @@
             </a:avLst>
           </a:prstGeom>
           <a:solidFill>
-            <a:srgbClr val="F2F2F2"/>
+            <a:srgbClr val="1E2A38"/>
           </a:solidFill>
           <a:ln>
             <a:noFill/>
@@ -7885,14 +7343,14 @@
       </p:sp>
       <p:sp>
         <p:nvSpPr>
-          <p:cNvPr id="7" name="Rectangle 6"/>
+          <p:cNvPr id="6" name="Rectangle 5"/>
           <p:cNvSpPr/>
           <p:nvPr/>
         </p:nvSpPr>
         <p:spPr>
           <a:xfrm>
-            <a:off x="457200" y="1591056"/>
-            <a:ext cx="3624986" cy="64008"/>
+            <a:off x="457200" y="1261872"/>
+            <a:ext cx="11277295" cy="320040"/>
           </a:xfrm>
           <a:prstGeom prst="rect">
             <a:avLst/>
@@ -7928,81 +7386,14 @@
       </p:sp>
       <p:sp>
         <p:nvSpPr>
-          <p:cNvPr id="8" name="Rectangle 7"/>
-          <p:cNvSpPr/>
-          <p:nvPr/>
-        </p:nvSpPr>
-        <p:spPr>
-          <a:xfrm>
-            <a:off x="457200" y="1655064"/>
-            <a:ext cx="3624986" cy="27432"/>
-          </a:xfrm>
-          <a:prstGeom prst="rect">
-            <a:avLst/>
-          </a:prstGeom>
-          <a:solidFill>
-            <a:srgbClr val="FFD000"/>
-          </a:solidFill>
-          <a:ln>
-            <a:noFill/>
-          </a:ln>
-        </p:spPr>
-        <p:style>
-          <a:lnRef idx="1">
-            <a:schemeClr val="accent1"/>
-          </a:lnRef>
-          <a:fillRef idx="3">
-            <a:schemeClr val="accent1"/>
-          </a:fillRef>
-          <a:effectRef idx="2">
-            <a:schemeClr val="accent1"/>
-          </a:effectRef>
-          <a:fontRef idx="minor">
-            <a:schemeClr val="lt1"/>
-          </a:fontRef>
-        </p:style>
-        <p:txBody>
-          <a:bodyPr rtlCol="0" anchor="ctr"/>
-          <a:lstStyle/>
-          <a:p>
-            <a:pPr algn="ctr"/>
-          </a:p>
-        </p:txBody>
-      </p:sp>
-      <p:pic>
-        <p:nvPicPr>
-          <p:cNvPr id="9" name="Picture 8" descr="google_docs.png"/>
-          <p:cNvPicPr>
-            <a:picLocks noChangeAspect="1"/>
-          </p:cNvPicPr>
-          <p:nvPr/>
-        </p:nvPicPr>
-        <p:blipFill>
-          <a:blip r:embed="rId2"/>
-          <a:stretch>
-            <a:fillRect/>
-          </a:stretch>
-        </p:blipFill>
-        <p:spPr>
-          <a:xfrm>
-            <a:off x="1643329" y="1847087"/>
-            <a:ext cx="1252728" cy="1252728"/>
-          </a:xfrm>
-          <a:prstGeom prst="rect">
-            <a:avLst/>
-          </a:prstGeom>
-        </p:spPr>
-      </p:pic>
-      <p:sp>
-        <p:nvSpPr>
-          <p:cNvPr id="10" name="TextBox 9"/>
+          <p:cNvPr id="7" name="TextBox 6"/>
           <p:cNvSpPr txBox="1"/>
           <p:nvPr/>
         </p:nvSpPr>
         <p:spPr>
           <a:xfrm>
-            <a:off x="530352" y="3191256"/>
-            <a:ext cx="3478682" cy="621792"/>
+            <a:off x="685800" y="1307592"/>
+            <a:ext cx="10820095" cy="256032"/>
           </a:xfrm>
           <a:prstGeom prst="rect">
             <a:avLst/>
@@ -8010,449 +7401,63 @@
           <a:noFill/>
         </p:spPr>
         <p:txBody>
-          <a:bodyPr wrap="square" anchor="t"/>
-          <a:lstStyle/>
-          <a:p>
-            <a:pPr algn="ctr"/>
-            <a:r>
-              <a:rPr sz="1300" b="1" i="0">
-                <a:solidFill>
-                  <a:srgbClr val="095292"/>
-                </a:solidFill>
-                <a:latin typeface="Calibri"/>
-              </a:rPr>
-              <a:t>Google Docs</a:t>
-            </a:r>
-          </a:p>
-          <a:p>
-            <a:pPr algn="ctr">
-              <a:spcBef>
-                <a:spcPts val="200"/>
-              </a:spcBef>
+          <a:bodyPr wrap="square" anchor="ctr"/>
+          <a:lstStyle/>
+          <a:p>
+            <a:r>
+              <a:rPr sz="1000" b="1" i="0">
+                <a:solidFill>
+                  <a:srgbClr val="269CCB"/>
+                </a:solidFill>
+                <a:latin typeface="Calibri"/>
+              </a:rPr>
+              <a:t>● ● ●</a:t>
+            </a:r>
+          </a:p>
+        </p:txBody>
+      </p:sp>
+      <p:sp>
+        <p:nvSpPr>
+          <p:cNvPr id="8" name="TextBox 7"/>
+          <p:cNvSpPr txBox="1"/>
+          <p:nvPr/>
+        </p:nvSpPr>
+        <p:spPr>
+          <a:xfrm>
+            <a:off x="777240" y="1719072"/>
+            <a:ext cx="10637215" cy="4453128"/>
+          </a:xfrm>
+          <a:prstGeom prst="rect">
+            <a:avLst/>
+          </a:prstGeom>
+          <a:noFill/>
+        </p:spPr>
+        <p:txBody>
+          <a:bodyPr wrap="square">
+            <a:spAutoFit/>
+          </a:bodyPr>
+          <a:lstStyle/>
+          <a:p>
+            <a:pPr>
+              <a:spcAft>
+                <a:spcPts val="400"/>
+              </a:spcAft>
             </a:pPr>
             <a:r>
-              <a:rPr sz="1000" b="0" i="0">
-                <a:solidFill>
-                  <a:srgbClr val="666666"/>
-                </a:solidFill>
-                <a:latin typeface="Calibri"/>
-              </a:rPr>
-              <a:t>Contrato app-BD</a:t>
-            </a:r>
-          </a:p>
-        </p:txBody>
-      </p:sp>
-      <p:sp>
-        <p:nvSpPr>
-          <p:cNvPr id="11" name="Rounded Rectangle 10"/>
-          <p:cNvSpPr/>
-          <p:nvPr/>
-        </p:nvSpPr>
-        <p:spPr>
-          <a:xfrm>
-            <a:off x="4283354" y="1591056"/>
-            <a:ext cx="3624986" cy="2331720"/>
-          </a:xfrm>
-          <a:prstGeom prst="roundRect">
-            <a:avLst>
-              <a:gd name="adj" fmla="val 12000"/>
-            </a:avLst>
-          </a:prstGeom>
-          <a:solidFill>
-            <a:srgbClr val="F2F2F2"/>
-          </a:solidFill>
-          <a:ln>
-            <a:noFill/>
-          </a:ln>
-        </p:spPr>
-        <p:style>
-          <a:lnRef idx="1">
-            <a:schemeClr val="accent1"/>
-          </a:lnRef>
-          <a:fillRef idx="3">
-            <a:schemeClr val="accent1"/>
-          </a:fillRef>
-          <a:effectRef idx="2">
-            <a:schemeClr val="accent1"/>
-          </a:effectRef>
-          <a:fontRef idx="minor">
-            <a:schemeClr val="lt1"/>
-          </a:fontRef>
-        </p:style>
-        <p:txBody>
-          <a:bodyPr rtlCol="0" anchor="ctr"/>
-          <a:lstStyle/>
-          <a:p>
-            <a:pPr algn="ctr"/>
-          </a:p>
-        </p:txBody>
-      </p:sp>
-      <p:sp>
-        <p:nvSpPr>
-          <p:cNvPr id="12" name="Rectangle 11"/>
-          <p:cNvSpPr/>
-          <p:nvPr/>
-        </p:nvSpPr>
-        <p:spPr>
-          <a:xfrm>
-            <a:off x="4283354" y="1591056"/>
-            <a:ext cx="3624986" cy="64008"/>
-          </a:xfrm>
-          <a:prstGeom prst="rect">
-            <a:avLst/>
-          </a:prstGeom>
-          <a:solidFill>
-            <a:srgbClr val="095292"/>
-          </a:solidFill>
-          <a:ln>
-            <a:noFill/>
-          </a:ln>
-        </p:spPr>
-        <p:style>
-          <a:lnRef idx="1">
-            <a:schemeClr val="accent1"/>
-          </a:lnRef>
-          <a:fillRef idx="3">
-            <a:schemeClr val="accent1"/>
-          </a:fillRef>
-          <a:effectRef idx="2">
-            <a:schemeClr val="accent1"/>
-          </a:effectRef>
-          <a:fontRef idx="minor">
-            <a:schemeClr val="lt1"/>
-          </a:fontRef>
-        </p:style>
-        <p:txBody>
-          <a:bodyPr rtlCol="0" anchor="ctr"/>
-          <a:lstStyle/>
-          <a:p>
-            <a:pPr algn="ctr"/>
-          </a:p>
-        </p:txBody>
-      </p:sp>
-      <p:sp>
-        <p:nvSpPr>
-          <p:cNvPr id="13" name="Rectangle 12"/>
-          <p:cNvSpPr/>
-          <p:nvPr/>
-        </p:nvSpPr>
-        <p:spPr>
-          <a:xfrm>
-            <a:off x="4283354" y="1655064"/>
-            <a:ext cx="3624986" cy="27432"/>
-          </a:xfrm>
-          <a:prstGeom prst="rect">
-            <a:avLst/>
-          </a:prstGeom>
-          <a:solidFill>
-            <a:srgbClr val="FFD000"/>
-          </a:solidFill>
-          <a:ln>
-            <a:noFill/>
-          </a:ln>
-        </p:spPr>
-        <p:style>
-          <a:lnRef idx="1">
-            <a:schemeClr val="accent1"/>
-          </a:lnRef>
-          <a:fillRef idx="3">
-            <a:schemeClr val="accent1"/>
-          </a:fillRef>
-          <a:effectRef idx="2">
-            <a:schemeClr val="accent1"/>
-          </a:effectRef>
-          <a:fontRef idx="minor">
-            <a:schemeClr val="lt1"/>
-          </a:fontRef>
-        </p:style>
-        <p:txBody>
-          <a:bodyPr rtlCol="0" anchor="ctr"/>
-          <a:lstStyle/>
-          <a:p>
-            <a:pPr algn="ctr"/>
-          </a:p>
-        </p:txBody>
-      </p:sp>
-      <p:pic>
-        <p:nvPicPr>
-          <p:cNvPr id="14" name="Picture 13" descr="oracle_livesql.png"/>
-          <p:cNvPicPr>
-            <a:picLocks noChangeAspect="1"/>
-          </p:cNvPicPr>
-          <p:nvPr/>
-        </p:nvPicPr>
-        <p:blipFill>
-          <a:blip r:embed="rId3"/>
-          <a:stretch>
-            <a:fillRect/>
-          </a:stretch>
-        </p:blipFill>
-        <p:spPr>
-          <a:xfrm>
-            <a:off x="5469483" y="1847087"/>
-            <a:ext cx="1252728" cy="1252728"/>
-          </a:xfrm>
-          <a:prstGeom prst="rect">
-            <a:avLst/>
-          </a:prstGeom>
-        </p:spPr>
-      </p:pic>
-      <p:sp>
-        <p:nvSpPr>
-          <p:cNvPr id="15" name="TextBox 14"/>
-          <p:cNvSpPr txBox="1"/>
-          <p:nvPr/>
-        </p:nvSpPr>
-        <p:spPr>
-          <a:xfrm>
-            <a:off x="4356506" y="3191256"/>
-            <a:ext cx="3478682" cy="621792"/>
-          </a:xfrm>
-          <a:prstGeom prst="rect">
-            <a:avLst/>
-          </a:prstGeom>
-          <a:noFill/>
-        </p:spPr>
-        <p:txBody>
-          <a:bodyPr wrap="square" anchor="t"/>
-          <a:lstStyle/>
-          <a:p>
-            <a:pPr algn="ctr"/>
-            <a:r>
-              <a:rPr sz="1300" b="1" i="0">
-                <a:solidFill>
-                  <a:srgbClr val="095292"/>
-                </a:solidFill>
-                <a:latin typeface="Calibri"/>
-              </a:rPr>
-              <a:t>Oracle Live SQL</a:t>
-            </a:r>
-          </a:p>
-          <a:p>
-            <a:pPr algn="ctr">
-              <a:spcBef>
-                <a:spcPts val="200"/>
-              </a:spcBef>
-            </a:pPr>
-            <a:r>
-              <a:rPr sz="1000" b="0" i="0">
-                <a:solidFill>
-                  <a:srgbClr val="666666"/>
-                </a:solidFill>
-                <a:latin typeface="Calibri"/>
-              </a:rPr>
-              <a:t>Ops</a:t>
-            </a:r>
-          </a:p>
-        </p:txBody>
-      </p:sp>
-      <p:sp>
-        <p:nvSpPr>
-          <p:cNvPr id="16" name="Rounded Rectangle 15"/>
-          <p:cNvSpPr/>
-          <p:nvPr/>
-        </p:nvSpPr>
-        <p:spPr>
-          <a:xfrm>
-            <a:off x="8109508" y="1591056"/>
-            <a:ext cx="3624986" cy="2331720"/>
-          </a:xfrm>
-          <a:prstGeom prst="roundRect">
-            <a:avLst>
-              <a:gd name="adj" fmla="val 12000"/>
-            </a:avLst>
-          </a:prstGeom>
-          <a:solidFill>
-            <a:srgbClr val="F2F2F2"/>
-          </a:solidFill>
-          <a:ln>
-            <a:noFill/>
-          </a:ln>
-        </p:spPr>
-        <p:style>
-          <a:lnRef idx="1">
-            <a:schemeClr val="accent1"/>
-          </a:lnRef>
-          <a:fillRef idx="3">
-            <a:schemeClr val="accent1"/>
-          </a:fillRef>
-          <a:effectRef idx="2">
-            <a:schemeClr val="accent1"/>
-          </a:effectRef>
-          <a:fontRef idx="minor">
-            <a:schemeClr val="lt1"/>
-          </a:fontRef>
-        </p:style>
-        <p:txBody>
-          <a:bodyPr rtlCol="0" anchor="ctr"/>
-          <a:lstStyle/>
-          <a:p>
-            <a:pPr algn="ctr"/>
-          </a:p>
-        </p:txBody>
-      </p:sp>
-      <p:sp>
-        <p:nvSpPr>
-          <p:cNvPr id="17" name="Rectangle 16"/>
-          <p:cNvSpPr/>
-          <p:nvPr/>
-        </p:nvSpPr>
-        <p:spPr>
-          <a:xfrm>
-            <a:off x="8109508" y="1591056"/>
-            <a:ext cx="3624986" cy="64008"/>
-          </a:xfrm>
-          <a:prstGeom prst="rect">
-            <a:avLst/>
-          </a:prstGeom>
-          <a:solidFill>
-            <a:srgbClr val="095292"/>
-          </a:solidFill>
-          <a:ln>
-            <a:noFill/>
-          </a:ln>
-        </p:spPr>
-        <p:style>
-          <a:lnRef idx="1">
-            <a:schemeClr val="accent1"/>
-          </a:lnRef>
-          <a:fillRef idx="3">
-            <a:schemeClr val="accent1"/>
-          </a:fillRef>
-          <a:effectRef idx="2">
-            <a:schemeClr val="accent1"/>
-          </a:effectRef>
-          <a:fontRef idx="minor">
-            <a:schemeClr val="lt1"/>
-          </a:fontRef>
-        </p:style>
-        <p:txBody>
-          <a:bodyPr rtlCol="0" anchor="ctr"/>
-          <a:lstStyle/>
-          <a:p>
-            <a:pPr algn="ctr"/>
-          </a:p>
-        </p:txBody>
-      </p:sp>
-      <p:sp>
-        <p:nvSpPr>
-          <p:cNvPr id="18" name="Rectangle 17"/>
-          <p:cNvSpPr/>
-          <p:nvPr/>
-        </p:nvSpPr>
-        <p:spPr>
-          <a:xfrm>
-            <a:off x="8109508" y="1655064"/>
-            <a:ext cx="3624986" cy="27432"/>
-          </a:xfrm>
-          <a:prstGeom prst="rect">
-            <a:avLst/>
-          </a:prstGeom>
-          <a:solidFill>
-            <a:srgbClr val="FFD000"/>
-          </a:solidFill>
-          <a:ln>
-            <a:noFill/>
-          </a:ln>
-        </p:spPr>
-        <p:style>
-          <a:lnRef idx="1">
-            <a:schemeClr val="accent1"/>
-          </a:lnRef>
-          <a:fillRef idx="3">
-            <a:schemeClr val="accent1"/>
-          </a:fillRef>
-          <a:effectRef idx="2">
-            <a:schemeClr val="accent1"/>
-          </a:effectRef>
-          <a:fontRef idx="minor">
-            <a:schemeClr val="lt1"/>
-          </a:fontRef>
-        </p:style>
-        <p:txBody>
-          <a:bodyPr rtlCol="0" anchor="ctr"/>
-          <a:lstStyle/>
-          <a:p>
-            <a:pPr algn="ctr"/>
-          </a:p>
-        </p:txBody>
-      </p:sp>
-      <p:pic>
-        <p:nvPicPr>
-          <p:cNvPr id="19" name="Picture 18" descr="drawio.png"/>
-          <p:cNvPicPr>
-            <a:picLocks noChangeAspect="1"/>
-          </p:cNvPicPr>
-          <p:nvPr/>
-        </p:nvPicPr>
-        <p:blipFill>
-          <a:blip r:embed="rId4"/>
-          <a:stretch>
-            <a:fillRect/>
-          </a:stretch>
-        </p:blipFill>
-        <p:spPr>
-          <a:xfrm>
-            <a:off x="9295638" y="1847087"/>
-            <a:ext cx="1252728" cy="1252728"/>
-          </a:xfrm>
-          <a:prstGeom prst="rect">
-            <a:avLst/>
-          </a:prstGeom>
-        </p:spPr>
-      </p:pic>
-      <p:sp>
-        <p:nvSpPr>
-          <p:cNvPr id="20" name="TextBox 19"/>
-          <p:cNvSpPr txBox="1"/>
-          <p:nvPr/>
-        </p:nvSpPr>
-        <p:spPr>
-          <a:xfrm>
-            <a:off x="8182660" y="3191256"/>
-            <a:ext cx="3478682" cy="621792"/>
-          </a:xfrm>
-          <a:prstGeom prst="rect">
-            <a:avLst/>
-          </a:prstGeom>
-          <a:noFill/>
-        </p:spPr>
-        <p:txBody>
-          <a:bodyPr wrap="square" anchor="t"/>
-          <a:lstStyle/>
-          <a:p>
-            <a:pPr algn="ctr"/>
-            <a:r>
-              <a:rPr sz="1300" b="1" i="0">
-                <a:solidFill>
-                  <a:srgbClr val="095292"/>
-                </a:solidFill>
-                <a:latin typeface="Calibri"/>
-              </a:rPr>
-              <a:t>draw.io</a:t>
-            </a:r>
-          </a:p>
-          <a:p>
-            <a:pPr algn="ctr">
-              <a:spcBef>
-                <a:spcPts val="200"/>
-              </a:spcBef>
-            </a:pPr>
-            <a:r>
-              <a:rPr sz="1000" b="0" i="0">
-                <a:solidFill>
-                  <a:srgbClr val="666666"/>
-                </a:solidFill>
-                <a:latin typeface="Calibri"/>
-              </a:rPr>
-              <a:t>Flujo</a:t>
-            </a:r>
-          </a:p>
-        </p:txBody>
-      </p:sp>
-      <p:sp>
-        <p:nvSpPr>
-          <p:cNvPr id="21" name="TextBox 20"/>
+              <a:rPr sz="1400" b="0" i="0">
+                <a:solidFill>
+                  <a:srgbClr val="FFFFFF"/>
+                </a:solidFill>
+                <a:latin typeface="Calibri"/>
+              </a:rPr>
+              <a:t>ALTER TABLE Mascota ADD (fecha_inactivacion DATE NULL)</a:t>
+            </a:r>
+          </a:p>
+        </p:txBody>
+      </p:sp>
+      <p:sp>
+        <p:nvSpPr>
+          <p:cNvPr id="9" name="TextBox 8"/>
           <p:cNvSpPr txBox="1"/>
           <p:nvPr/>
         </p:nvSpPr>
@@ -8520,7 +7525,7 @@
         <p:spPr>
           <a:xfrm>
             <a:off x="0" y="0"/>
-            <a:ext cx="12191695" cy="1170432"/>
+            <a:ext cx="12191695" cy="960120"/>
           </a:xfrm>
           <a:prstGeom prst="rect">
             <a:avLst/>
@@ -8562,7 +7567,7 @@
         </p:nvSpPr>
         <p:spPr>
           <a:xfrm>
-            <a:off x="0" y="1170432"/>
+            <a:off x="0" y="960120"/>
             <a:ext cx="12191695" cy="41148"/>
           </a:xfrm>
           <a:prstGeom prst="rect">
@@ -8606,7 +7611,7 @@
         <p:spPr>
           <a:xfrm>
             <a:off x="457200" y="164592"/>
-            <a:ext cx="11277295" cy="384048"/>
+            <a:ext cx="11277295" cy="502920"/>
           </a:xfrm>
           <a:prstGeom prst="rect">
             <a:avLst/>
@@ -8626,55 +7631,21 @@
                 </a:solidFill>
                 <a:latin typeface="Calibri"/>
               </a:rPr>
-              <a:t>Del boceto a la plataforma del curso (diagrama)</a:t>
-            </a:r>
-          </a:p>
-        </p:txBody>
-      </p:sp>
-      <p:sp>
-        <p:nvSpPr>
-          <p:cNvPr id="5" name="TextBox 4"/>
-          <p:cNvSpPr txBox="1"/>
-          <p:nvPr/>
-        </p:nvSpPr>
-        <p:spPr>
-          <a:xfrm>
-            <a:off x="457200" y="566928"/>
-            <a:ext cx="11277295" cy="411480"/>
-          </a:xfrm>
-          <a:prstGeom prst="rect">
-            <a:avLst/>
-          </a:prstGeom>
-          <a:noFill/>
-        </p:spPr>
-        <p:txBody>
-          <a:bodyPr wrap="square">
-            <a:spAutoFit/>
-          </a:bodyPr>
-          <a:lstStyle/>
-          <a:p>
-            <a:r>
-              <a:rPr sz="1400" b="0" i="0">
-                <a:solidFill>
-                  <a:srgbClr val="B8D8EE"/>
-                </a:solidFill>
-                <a:latin typeface="Calibri"/>
-              </a:rPr>
-              <a:t>El diagrama se entrega como codigo Mermaid dentro de la plataforma del curso, no como imagen</a:t>
-            </a:r>
-          </a:p>
-        </p:txBody>
-      </p:sp>
-      <p:sp>
-        <p:nvSpPr>
-          <p:cNvPr id="6" name="Rounded Rectangle 5"/>
+              <a:t>El contrato que la app consume (no SQL suelto)</a:t>
+            </a:r>
+          </a:p>
+        </p:txBody>
+      </p:sp>
+      <p:sp>
+        <p:nvSpPr>
+          <p:cNvPr id="5" name="Rounded Rectangle 4"/>
           <p:cNvSpPr/>
           <p:nvPr/>
         </p:nvSpPr>
         <p:spPr>
           <a:xfrm>
-            <a:off x="457200" y="1659636"/>
-            <a:ext cx="11277295" cy="1051560"/>
+            <a:off x="457200" y="1261872"/>
+            <a:ext cx="11277295" cy="4773168"/>
           </a:xfrm>
           <a:prstGeom prst="roundRect">
             <a:avLst>
@@ -8682,7 +7653,7 @@
             </a:avLst>
           </a:prstGeom>
           <a:solidFill>
-            <a:srgbClr val="F2F2F2"/>
+            <a:srgbClr val="1E2A38"/>
           </a:solidFill>
           <a:ln>
             <a:noFill/>
@@ -8712,19 +7683,17 @@
       </p:sp>
       <p:sp>
         <p:nvSpPr>
-          <p:cNvPr id="7" name="Rounded Rectangle 6"/>
+          <p:cNvPr id="6" name="Rectangle 5"/>
           <p:cNvSpPr/>
           <p:nvPr/>
         </p:nvSpPr>
         <p:spPr>
           <a:xfrm>
-            <a:off x="594360" y="1965960"/>
-            <a:ext cx="438912" cy="438912"/>
-          </a:xfrm>
-          <a:prstGeom prst="roundRect">
-            <a:avLst>
-              <a:gd name="adj" fmla="val 12000"/>
-            </a:avLst>
+            <a:off x="457200" y="1261872"/>
+            <a:ext cx="11277295" cy="320040"/>
+          </a:xfrm>
+          <a:prstGeom prst="rect">
+            <a:avLst/>
           </a:prstGeom>
           <a:solidFill>
             <a:srgbClr val="095292"/>
@@ -8757,14 +7726,46 @@
       </p:sp>
       <p:sp>
         <p:nvSpPr>
+          <p:cNvPr id="7" name="TextBox 6"/>
+          <p:cNvSpPr txBox="1"/>
+          <p:nvPr/>
+        </p:nvSpPr>
+        <p:spPr>
+          <a:xfrm>
+            <a:off x="685800" y="1307592"/>
+            <a:ext cx="10820095" cy="256032"/>
+          </a:xfrm>
+          <a:prstGeom prst="rect">
+            <a:avLst/>
+          </a:prstGeom>
+          <a:noFill/>
+        </p:spPr>
+        <p:txBody>
+          <a:bodyPr wrap="square" anchor="ctr"/>
+          <a:lstStyle/>
+          <a:p>
+            <a:r>
+              <a:rPr sz="1000" b="1" i="0">
+                <a:solidFill>
+                  <a:srgbClr val="269CCB"/>
+                </a:solidFill>
+                <a:latin typeface="Calibri"/>
+              </a:rPr>
+              <a:t>● ● ●</a:t>
+            </a:r>
+          </a:p>
+        </p:txBody>
+      </p:sp>
+      <p:sp>
+        <p:nvSpPr>
           <p:cNvPr id="8" name="TextBox 7"/>
           <p:cNvSpPr txBox="1"/>
           <p:nvPr/>
         </p:nvSpPr>
         <p:spPr>
           <a:xfrm>
-            <a:off x="594360" y="1965960"/>
-            <a:ext cx="438912" cy="438912"/>
+            <a:off x="777240" y="1719072"/>
+            <a:ext cx="10637215" cy="4133087"/>
           </a:xfrm>
           <a:prstGeom prst="rect">
             <a:avLst/>
@@ -8772,18 +7773,104 @@
           <a:noFill/>
         </p:spPr>
         <p:txBody>
-          <a:bodyPr wrap="square" anchor="ctr"/>
-          <a:lstStyle/>
-          <a:p>
-            <a:pPr algn="ctr"/>
-            <a:r>
-              <a:rPr sz="1600" b="1" i="0">
+          <a:bodyPr wrap="square">
+            <a:spAutoFit/>
+          </a:bodyPr>
+          <a:lstStyle/>
+          <a:p>
+            <a:pPr>
+              <a:spcAft>
+                <a:spcPts val="400"/>
+              </a:spcAft>
+            </a:pPr>
+            <a:r>
+              <a:rPr sz="1400" b="0" i="0">
                 <a:solidFill>
                   <a:srgbClr val="FFFFFF"/>
                 </a:solidFill>
                 <a:latin typeface="Calibri"/>
               </a:rPr>
-              <a:t>1</a:t>
+              <a:t>sp_agendar_cita(</a:t>
+            </a:r>
+          </a:p>
+          <a:p>
+            <a:pPr>
+              <a:spcAft>
+                <a:spcPts val="400"/>
+              </a:spcAft>
+            </a:pPr>
+            <a:r>
+              <a:rPr sz="1400" b="0" i="0">
+                <a:solidFill>
+                  <a:srgbClr val="FFFFFF"/>
+                </a:solidFill>
+                <a:latin typeface="Calibri"/>
+              </a:rPr>
+              <a:t>   p_id_cita     IN  NUMBER,</a:t>
+            </a:r>
+          </a:p>
+          <a:p>
+            <a:pPr>
+              <a:spcAft>
+                <a:spcPts val="400"/>
+              </a:spcAft>
+            </a:pPr>
+            <a:r>
+              <a:rPr sz="1400" b="0" i="0">
+                <a:solidFill>
+                  <a:srgbClr val="FFFFFF"/>
+                </a:solidFill>
+                <a:latin typeface="Calibri"/>
+              </a:rPr>
+              <a:t>   p_id_mascota  IN  NUMBER,</a:t>
+            </a:r>
+          </a:p>
+          <a:p>
+            <a:pPr>
+              <a:spcAft>
+                <a:spcPts val="400"/>
+              </a:spcAft>
+            </a:pPr>
+            <a:r>
+              <a:rPr sz="1400" b="0" i="0">
+                <a:solidFill>
+                  <a:srgbClr val="FFFFFF"/>
+                </a:solidFill>
+                <a:latin typeface="Calibri"/>
+              </a:rPr>
+              <a:t>   p_fecha       IN  TIMESTAMP,</a:t>
+            </a:r>
+          </a:p>
+          <a:p>
+            <a:pPr>
+              <a:spcAft>
+                <a:spcPts val="400"/>
+              </a:spcAft>
+            </a:pPr>
+            <a:r>
+              <a:rPr sz="1400" b="0" i="0">
+                <a:solidFill>
+                  <a:srgbClr val="FFFFFF"/>
+                </a:solidFill>
+                <a:latin typeface="Calibri"/>
+              </a:rPr>
+              <a:t>   p_msg         OUT VARCHAR2   -- 'OK: ...' | 'ERROR: ...'</a:t>
+            </a:r>
+          </a:p>
+          <a:p>
+            <a:pPr>
+              <a:spcAft>
+                <a:spcPts val="400"/>
+              </a:spcAft>
+            </a:pPr>
+            <a:r>
+              <a:rPr sz="1400" b="0" i="0">
+                <a:solidFill>
+                  <a:srgbClr val="FFFFFF"/>
+                </a:solidFill>
+                <a:latin typeface="Calibri"/>
+              </a:rPr>
+              <a:t>)</a:t>
             </a:r>
           </a:p>
         </p:txBody>
@@ -8796,8 +7883,8 @@
         </p:nvSpPr>
         <p:spPr>
           <a:xfrm>
-            <a:off x="1188720" y="1751076"/>
-            <a:ext cx="10271455" cy="886968"/>
+            <a:off x="457200" y="6080760"/>
+            <a:ext cx="11277295" cy="320040"/>
           </a:xfrm>
           <a:prstGeom prst="rect">
             <a:avLst/>
@@ -8805,553 +7892,27 @@
           <a:noFill/>
         </p:spPr>
         <p:txBody>
-          <a:bodyPr wrap="square" anchor="ctr"/>
-          <a:lstStyle/>
-          <a:p>
-            <a:r>
-              <a:rPr sz="1500" b="1" i="0">
-                <a:solidFill>
-                  <a:srgbClr val="095292"/>
-                </a:solidFill>
-                <a:latin typeface="Calibri"/>
-              </a:rPr>
-              <a:t>Disena visual</a:t>
-            </a:r>
-          </a:p>
-          <a:p>
-            <a:pPr>
-              <a:spcBef>
-                <a:spcPts val="200"/>
-              </a:spcBef>
-            </a:pPr>
-            <a:r>
-              <a:rPr sz="1300" b="0" i="0">
-                <a:solidFill>
-                  <a:srgbClr val="333333"/>
-                </a:solidFill>
-                <a:latin typeface="Calibri"/>
-              </a:rPr>
-              <a:t>Dibuja el diagrama como quieras en Excalidraw o draw.io: es mas rapido arrastrar cajas que escribir codigo, y ahi es donde piensas el modelo.</a:t>
-            </a:r>
-          </a:p>
-        </p:txBody>
-      </p:sp>
-      <p:sp>
-        <p:nvSpPr>
-          <p:cNvPr id="10" name="Rounded Rectangle 9"/>
-          <p:cNvSpPr/>
-          <p:nvPr/>
-        </p:nvSpPr>
-        <p:spPr>
-          <a:xfrm>
-            <a:off x="457200" y="2802636"/>
-            <a:ext cx="11277295" cy="1051560"/>
-          </a:xfrm>
-          <a:prstGeom prst="roundRect">
-            <a:avLst>
-              <a:gd name="adj" fmla="val 12000"/>
-            </a:avLst>
-          </a:prstGeom>
-          <a:solidFill>
-            <a:srgbClr val="E8F4FA"/>
-          </a:solidFill>
-          <a:ln>
-            <a:noFill/>
-          </a:ln>
-        </p:spPr>
-        <p:style>
-          <a:lnRef idx="1">
-            <a:schemeClr val="accent1"/>
-          </a:lnRef>
-          <a:fillRef idx="3">
-            <a:schemeClr val="accent1"/>
-          </a:fillRef>
-          <a:effectRef idx="2">
-            <a:schemeClr val="accent1"/>
-          </a:effectRef>
-          <a:fontRef idx="minor">
-            <a:schemeClr val="lt1"/>
-          </a:fontRef>
-        </p:style>
-        <p:txBody>
-          <a:bodyPr rtlCol="0" anchor="ctr"/>
+          <a:bodyPr wrap="square">
+            <a:spAutoFit/>
+          </a:bodyPr>
           <a:lstStyle/>
           <a:p>
             <a:pPr algn="ctr"/>
-          </a:p>
-        </p:txBody>
-      </p:sp>
-      <p:sp>
-        <p:nvSpPr>
-          <p:cNvPr id="11" name="Rounded Rectangle 10"/>
-          <p:cNvSpPr/>
-          <p:nvPr/>
-        </p:nvSpPr>
-        <p:spPr>
-          <a:xfrm>
-            <a:off x="594360" y="3108960"/>
-            <a:ext cx="438912" cy="438912"/>
-          </a:xfrm>
-          <a:prstGeom prst="roundRect">
-            <a:avLst>
-              <a:gd name="adj" fmla="val 12000"/>
-            </a:avLst>
-          </a:prstGeom>
-          <a:solidFill>
-            <a:srgbClr val="095292"/>
-          </a:solidFill>
-          <a:ln>
-            <a:noFill/>
-          </a:ln>
-        </p:spPr>
-        <p:style>
-          <a:lnRef idx="1">
-            <a:schemeClr val="accent1"/>
-          </a:lnRef>
-          <a:fillRef idx="3">
-            <a:schemeClr val="accent1"/>
-          </a:fillRef>
-          <a:effectRef idx="2">
-            <a:schemeClr val="accent1"/>
-          </a:effectRef>
-          <a:fontRef idx="minor">
-            <a:schemeClr val="lt1"/>
-          </a:fontRef>
-        </p:style>
-        <p:txBody>
-          <a:bodyPr rtlCol="0" anchor="ctr"/>
-          <a:lstStyle/>
-          <a:p>
-            <a:pPr algn="ctr"/>
-          </a:p>
-        </p:txBody>
-      </p:sp>
-      <p:sp>
-        <p:nvSpPr>
-          <p:cNvPr id="12" name="TextBox 11"/>
-          <p:cNvSpPr txBox="1"/>
-          <p:nvPr/>
-        </p:nvSpPr>
-        <p:spPr>
-          <a:xfrm>
-            <a:off x="594360" y="3108960"/>
-            <a:ext cx="438912" cy="438912"/>
-          </a:xfrm>
-          <a:prstGeom prst="rect">
-            <a:avLst/>
-          </a:prstGeom>
-          <a:noFill/>
-        </p:spPr>
-        <p:txBody>
-          <a:bodyPr wrap="square" anchor="ctr"/>
-          <a:lstStyle/>
-          <a:p>
-            <a:pPr algn="ctr"/>
-            <a:r>
-              <a:rPr sz="1600" b="1" i="0">
-                <a:solidFill>
-                  <a:srgbClr val="FFFFFF"/>
-                </a:solidFill>
-                <a:latin typeface="Calibri"/>
-              </a:rPr>
-              <a:t>2</a:t>
-            </a:r>
-          </a:p>
-        </p:txBody>
-      </p:sp>
-      <p:sp>
-        <p:nvSpPr>
-          <p:cNvPr id="13" name="TextBox 12"/>
-          <p:cNvSpPr txBox="1"/>
-          <p:nvPr/>
-        </p:nvSpPr>
-        <p:spPr>
-          <a:xfrm>
-            <a:off x="1188720" y="2894076"/>
-            <a:ext cx="10271455" cy="886968"/>
-          </a:xfrm>
-          <a:prstGeom prst="rect">
-            <a:avLst/>
-          </a:prstGeom>
-          <a:noFill/>
-        </p:spPr>
-        <p:txBody>
-          <a:bodyPr wrap="square" anchor="ctr"/>
-          <a:lstStyle/>
-          <a:p>
-            <a:r>
-              <a:rPr sz="1500" b="1" i="0">
-                <a:solidFill>
-                  <a:srgbClr val="095292"/>
-                </a:solidFill>
-                <a:latin typeface="Calibri"/>
-              </a:rPr>
-              <a:t>Traduce con IA</a:t>
-            </a:r>
-          </a:p>
-          <a:p>
-            <a:pPr>
-              <a:spcBef>
-                <a:spcPts val="200"/>
-              </a:spcBef>
-            </a:pPr>
-            <a:r>
-              <a:rPr sz="1300" b="0" i="0">
-                <a:solidFill>
-                  <a:srgbClr val="333333"/>
-                </a:solidFill>
-                <a:latin typeface="Calibri"/>
-              </a:rPr>
-              <a:t>Copia o describe tu boceto a una IA y pidele el codigo Mermaid: «convierte este diagrama a Mermaid usando sequenceDiagram». Revisa el resultado: la IA acierta la sintaxis, no tu modelo.</a:t>
-            </a:r>
-          </a:p>
-        </p:txBody>
-      </p:sp>
-      <p:sp>
-        <p:nvSpPr>
-          <p:cNvPr id="14" name="Rounded Rectangle 13"/>
-          <p:cNvSpPr/>
-          <p:nvPr/>
-        </p:nvSpPr>
-        <p:spPr>
-          <a:xfrm>
-            <a:off x="457200" y="3945636"/>
-            <a:ext cx="11277295" cy="1051560"/>
-          </a:xfrm>
-          <a:prstGeom prst="roundRect">
-            <a:avLst>
-              <a:gd name="adj" fmla="val 12000"/>
-            </a:avLst>
-          </a:prstGeom>
-          <a:solidFill>
-            <a:srgbClr val="F2F2F2"/>
-          </a:solidFill>
-          <a:ln>
-            <a:noFill/>
-          </a:ln>
-        </p:spPr>
-        <p:style>
-          <a:lnRef idx="1">
-            <a:schemeClr val="accent1"/>
-          </a:lnRef>
-          <a:fillRef idx="3">
-            <a:schemeClr val="accent1"/>
-          </a:fillRef>
-          <a:effectRef idx="2">
-            <a:schemeClr val="accent1"/>
-          </a:effectRef>
-          <a:fontRef idx="minor">
-            <a:schemeClr val="lt1"/>
-          </a:fontRef>
-        </p:style>
-        <p:txBody>
-          <a:bodyPr rtlCol="0" anchor="ctr"/>
-          <a:lstStyle/>
-          <a:p>
-            <a:pPr algn="ctr"/>
-          </a:p>
-        </p:txBody>
-      </p:sp>
-      <p:sp>
-        <p:nvSpPr>
-          <p:cNvPr id="15" name="Rounded Rectangle 14"/>
-          <p:cNvSpPr/>
-          <p:nvPr/>
-        </p:nvSpPr>
-        <p:spPr>
-          <a:xfrm>
-            <a:off x="594360" y="4251960"/>
-            <a:ext cx="438912" cy="438912"/>
-          </a:xfrm>
-          <a:prstGeom prst="roundRect">
-            <a:avLst>
-              <a:gd name="adj" fmla="val 12000"/>
-            </a:avLst>
-          </a:prstGeom>
-          <a:solidFill>
-            <a:srgbClr val="095292"/>
-          </a:solidFill>
-          <a:ln>
-            <a:noFill/>
-          </a:ln>
-        </p:spPr>
-        <p:style>
-          <a:lnRef idx="1">
-            <a:schemeClr val="accent1"/>
-          </a:lnRef>
-          <a:fillRef idx="3">
-            <a:schemeClr val="accent1"/>
-          </a:fillRef>
-          <a:effectRef idx="2">
-            <a:schemeClr val="accent1"/>
-          </a:effectRef>
-          <a:fontRef idx="minor">
-            <a:schemeClr val="lt1"/>
-          </a:fontRef>
-        </p:style>
-        <p:txBody>
-          <a:bodyPr rtlCol="0" anchor="ctr"/>
-          <a:lstStyle/>
-          <a:p>
-            <a:pPr algn="ctr"/>
-          </a:p>
-        </p:txBody>
-      </p:sp>
-      <p:sp>
-        <p:nvSpPr>
-          <p:cNvPr id="16" name="TextBox 15"/>
-          <p:cNvSpPr txBox="1"/>
-          <p:nvPr/>
-        </p:nvSpPr>
-        <p:spPr>
-          <a:xfrm>
-            <a:off x="594360" y="4251960"/>
-            <a:ext cx="438912" cy="438912"/>
-          </a:xfrm>
-          <a:prstGeom prst="rect">
-            <a:avLst/>
-          </a:prstGeom>
-          <a:noFill/>
-        </p:spPr>
-        <p:txBody>
-          <a:bodyPr wrap="square" anchor="ctr"/>
-          <a:lstStyle/>
-          <a:p>
-            <a:pPr algn="ctr"/>
-            <a:r>
-              <a:rPr sz="1600" b="1" i="0">
-                <a:solidFill>
-                  <a:srgbClr val="FFFFFF"/>
-                </a:solidFill>
-                <a:latin typeface="Calibri"/>
-              </a:rPr>
-              <a:t>3</a:t>
-            </a:r>
-          </a:p>
-        </p:txBody>
-      </p:sp>
-      <p:sp>
-        <p:nvSpPr>
-          <p:cNvPr id="17" name="TextBox 16"/>
-          <p:cNvSpPr txBox="1"/>
-          <p:nvPr/>
-        </p:nvSpPr>
-        <p:spPr>
-          <a:xfrm>
-            <a:off x="1188720" y="4037076"/>
-            <a:ext cx="10271455" cy="886968"/>
-          </a:xfrm>
-          <a:prstGeom prst="rect">
-            <a:avLst/>
-          </a:prstGeom>
-          <a:noFill/>
-        </p:spPr>
-        <p:txBody>
-          <a:bodyPr wrap="square" anchor="ctr"/>
-          <a:lstStyle/>
-          <a:p>
-            <a:r>
-              <a:rPr sz="1500" b="1" i="0">
-                <a:solidFill>
-                  <a:srgbClr val="095292"/>
-                </a:solidFill>
-                <a:latin typeface="Calibri"/>
-              </a:rPr>
-              <a:t>Pega y renderiza en la plataforma del curso</a:t>
-            </a:r>
-          </a:p>
-          <a:p>
-            <a:pPr>
-              <a:spcBef>
-                <a:spcPts val="200"/>
-              </a:spcBef>
-            </a:pPr>
-            <a:r>
-              <a:rPr sz="1300" b="0" i="0">
-                <a:solidFill>
-                  <a:srgbClr val="333333"/>
-                </a:solidFill>
-                <a:latin typeface="Calibri"/>
-              </a:rPr>
-              <a:t>Pega ese codigo en la caja de texto de la pregunta y mira como lo dibuja la plataforma. Si no renderiza, corrige ahi mismo: lo que se califica es el diagrama renderizado dentro de la plataforma del curso.</a:t>
-            </a:r>
-          </a:p>
-        </p:txBody>
-      </p:sp>
-      <p:sp>
-        <p:nvSpPr>
-          <p:cNvPr id="18" name="Rounded Rectangle 17"/>
-          <p:cNvSpPr/>
-          <p:nvPr/>
-        </p:nvSpPr>
-        <p:spPr>
-          <a:xfrm>
-            <a:off x="457200" y="5088636"/>
-            <a:ext cx="11277295" cy="1051560"/>
-          </a:xfrm>
-          <a:prstGeom prst="roundRect">
-            <a:avLst>
-              <a:gd name="adj" fmla="val 12000"/>
-            </a:avLst>
-          </a:prstGeom>
-          <a:solidFill>
-            <a:srgbClr val="E8F4FA"/>
-          </a:solidFill>
-          <a:ln>
-            <a:noFill/>
-          </a:ln>
-        </p:spPr>
-        <p:style>
-          <a:lnRef idx="1">
-            <a:schemeClr val="accent1"/>
-          </a:lnRef>
-          <a:fillRef idx="3">
-            <a:schemeClr val="accent1"/>
-          </a:fillRef>
-          <a:effectRef idx="2">
-            <a:schemeClr val="accent1"/>
-          </a:effectRef>
-          <a:fontRef idx="minor">
-            <a:schemeClr val="lt1"/>
-          </a:fontRef>
-        </p:style>
-        <p:txBody>
-          <a:bodyPr rtlCol="0" anchor="ctr"/>
-          <a:lstStyle/>
-          <a:p>
-            <a:pPr algn="ctr"/>
-          </a:p>
-        </p:txBody>
-      </p:sp>
-      <p:sp>
-        <p:nvSpPr>
-          <p:cNvPr id="19" name="Rounded Rectangle 18"/>
-          <p:cNvSpPr/>
-          <p:nvPr/>
-        </p:nvSpPr>
-        <p:spPr>
-          <a:xfrm>
-            <a:off x="594360" y="5394960"/>
-            <a:ext cx="438912" cy="438912"/>
-          </a:xfrm>
-          <a:prstGeom prst="roundRect">
-            <a:avLst>
-              <a:gd name="adj" fmla="val 12000"/>
-            </a:avLst>
-          </a:prstGeom>
-          <a:solidFill>
-            <a:srgbClr val="095292"/>
-          </a:solidFill>
-          <a:ln>
-            <a:noFill/>
-          </a:ln>
-        </p:spPr>
-        <p:style>
-          <a:lnRef idx="1">
-            <a:schemeClr val="accent1"/>
-          </a:lnRef>
-          <a:fillRef idx="3">
-            <a:schemeClr val="accent1"/>
-          </a:fillRef>
-          <a:effectRef idx="2">
-            <a:schemeClr val="accent1"/>
-          </a:effectRef>
-          <a:fontRef idx="minor">
-            <a:schemeClr val="lt1"/>
-          </a:fontRef>
-        </p:style>
-        <p:txBody>
-          <a:bodyPr rtlCol="0" anchor="ctr"/>
-          <a:lstStyle/>
-          <a:p>
-            <a:pPr algn="ctr"/>
-          </a:p>
-        </p:txBody>
-      </p:sp>
-      <p:sp>
-        <p:nvSpPr>
-          <p:cNvPr id="20" name="TextBox 19"/>
-          <p:cNvSpPr txBox="1"/>
-          <p:nvPr/>
-        </p:nvSpPr>
-        <p:spPr>
-          <a:xfrm>
-            <a:off x="594360" y="5394960"/>
-            <a:ext cx="438912" cy="438912"/>
-          </a:xfrm>
-          <a:prstGeom prst="rect">
-            <a:avLst/>
-          </a:prstGeom>
-          <a:noFill/>
-        </p:spPr>
-        <p:txBody>
-          <a:bodyPr wrap="square" anchor="ctr"/>
-          <a:lstStyle/>
-          <a:p>
-            <a:pPr algn="ctr"/>
-            <a:r>
-              <a:rPr sz="1600" b="1" i="0">
-                <a:solidFill>
-                  <a:srgbClr val="FFFFFF"/>
-                </a:solidFill>
-                <a:latin typeface="Calibri"/>
-              </a:rPr>
-              <a:t>4</a:t>
-            </a:r>
-          </a:p>
-        </p:txBody>
-      </p:sp>
-      <p:sp>
-        <p:nvSpPr>
-          <p:cNvPr id="21" name="TextBox 20"/>
-          <p:cNvSpPr txBox="1"/>
-          <p:nvPr/>
-        </p:nvSpPr>
-        <p:spPr>
-          <a:xfrm>
-            <a:off x="1188720" y="5180076"/>
-            <a:ext cx="10271455" cy="886968"/>
-          </a:xfrm>
-          <a:prstGeom prst="rect">
-            <a:avLst/>
-          </a:prstGeom>
-          <a:noFill/>
-        </p:spPr>
-        <p:txBody>
-          <a:bodyPr wrap="square" anchor="ctr"/>
-          <a:lstStyle/>
-          <a:p>
-            <a:r>
-              <a:rPr sz="1500" b="1" i="0">
-                <a:solidFill>
-                  <a:srgbClr val="095292"/>
-                </a:solidFill>
-                <a:latin typeface="Calibri"/>
-              </a:rPr>
-              <a:t>Guarda el PNG para tu PI</a:t>
-            </a:r>
-          </a:p>
-          <a:p>
-            <a:pPr>
-              <a:spcBef>
-                <a:spcPts val="200"/>
-              </a:spcBef>
-            </a:pPr>
-            <a:r>
-              <a:rPr sz="1300" b="0" i="0">
-                <a:solidFill>
-                  <a:srgbClr val="333333"/>
-                </a:solidFill>
-                <a:latin typeface="Calibri"/>
-              </a:rPr>
-              <a:t>Exporta tambien la imagen a la carpeta de tu Proyecto Integrador. Esa copia es para tu informe; no reemplaza la respuesta en la plataforma.</a:t>
-            </a:r>
-          </a:p>
-        </p:txBody>
-      </p:sp>
-      <p:sp>
-        <p:nvSpPr>
-          <p:cNvPr id="22" name="TextBox 21"/>
+            <a:r>
+              <a:rPr sz="1200" b="0" i="1">
+                <a:solidFill>
+                  <a:srgbClr val="666666"/>
+                </a:solidFill>
+                <a:latin typeface="Calibri"/>
+              </a:rPr>
+              <a:t>La app llama el proc con parametros tipados: por eso no hay inyeccion SQL.</a:t>
+            </a:r>
+          </a:p>
+        </p:txBody>
+      </p:sp>
+      <p:sp>
+        <p:nvSpPr>
+          <p:cNvPr id="10" name="TextBox 9"/>
           <p:cNvSpPr txBox="1"/>
           <p:nvPr/>
         </p:nvSpPr>
@@ -9525,7 +8086,7 @@
                 </a:solidFill>
                 <a:latin typeface="Calibri"/>
               </a:rPr>
-              <a:t>Taller PI VetCare — contexto / por que importa</a:t>
+              <a:t>Demo del dia</a:t>
             </a:r>
           </a:p>
         </p:txBody>
@@ -9573,7 +8134,7 @@
                 </a:solidFill>
                 <a:latin typeface="Calibri"/>
               </a:rPr>
-              <a:t>Por qué importa al PI:</a:t>
+              <a:t>Herramienta:</a:t>
             </a:r>
             <a:r>
               <a:rPr sz="2000" b="0" i="0">
@@ -9582,7 +8143,7 @@
                 </a:solidFill>
                 <a:latin typeface="Calibri"/>
               </a:rPr>
-              <a:t> app llama contrato, no SQL suelto.</a:t>
+              <a:t> Google Docs + Live SQL + Excalidraw</a:t>
             </a:r>
           </a:p>
           <a:p>
@@ -9598,7 +8159,57 @@
                 </a:solidFill>
                 <a:latin typeface="Calibri"/>
               </a:rPr>
-              <a:t>–   Preparar sustentacion.</a:t>
+              <a:t>–   </a:t>
+            </a:r>
+            <a:r>
+              <a:rPr sz="2000" b="1" i="0">
+                <a:solidFill>
+                  <a:srgbClr val="333333"/>
+                </a:solidFill>
+                <a:latin typeface="Calibri"/>
+              </a:rPr>
+              <a:t>Demo:</a:t>
+            </a:r>
+            <a:r>
+              <a:rPr sz="2000" b="0" i="0">
+                <a:solidFill>
+                  <a:srgbClr val="333333"/>
+                </a:solidFill>
+                <a:latin typeface="Calibri"/>
+              </a:rPr>
+              <a:t> Plantilla contrato sp_agendar_cita + storyboard 6 slides.</a:t>
+            </a:r>
+          </a:p>
+          <a:p>
+            <a:pPr>
+              <a:spcAft>
+                <a:spcPts val="800"/>
+              </a:spcAft>
+            </a:pPr>
+            <a:r>
+              <a:rPr sz="2000" b="0" i="0">
+                <a:solidFill>
+                  <a:srgbClr val="333333"/>
+                </a:solidFill>
+                <a:latin typeface="Calibri"/>
+              </a:rPr>
+              <a:t>–   Sigan el mismo dominio VetCare (no inventen otro caso).</a:t>
+            </a:r>
+          </a:p>
+          <a:p>
+            <a:pPr>
+              <a:spcAft>
+                <a:spcPts val="800"/>
+              </a:spcAft>
+            </a:pPr>
+            <a:r>
+              <a:rPr sz="2000" b="0" i="0">
+                <a:solidFill>
+                  <a:srgbClr val="333333"/>
+                </a:solidFill>
+                <a:latin typeface="Calibri"/>
+              </a:rPr>
+              <a:t>–   Al final de la demo: dejar enlace/script compartible al grupo.</a:t>
             </a:r>
           </a:p>
         </p:txBody>
@@ -9673,7 +8284,7 @@
         <p:spPr>
           <a:xfrm>
             <a:off x="0" y="0"/>
-            <a:ext cx="12191695" cy="960120"/>
+            <a:ext cx="12191695" cy="1170432"/>
           </a:xfrm>
           <a:prstGeom prst="rect">
             <a:avLst/>
@@ -9715,7 +8326,7 @@
         </p:nvSpPr>
         <p:spPr>
           <a:xfrm>
-            <a:off x="0" y="960120"/>
+            <a:off x="0" y="1170432"/>
             <a:ext cx="12191695" cy="41148"/>
           </a:xfrm>
           <a:prstGeom prst="rect">
@@ -9759,7 +8370,7 @@
         <p:spPr>
           <a:xfrm>
             <a:off x="457200" y="164592"/>
-            <a:ext cx="11277295" cy="502920"/>
+            <a:ext cx="11277295" cy="384048"/>
           </a:xfrm>
           <a:prstGeom prst="rect">
             <a:avLst/>
@@ -9779,7 +8390,7 @@
                 </a:solidFill>
                 <a:latin typeface="Calibri"/>
               </a:rPr>
-              <a:t>Taller PI VetCare — objetivo y criterios</a:t>
+              <a:t>Herramientas de hoy</a:t>
             </a:r>
           </a:p>
         </p:txBody>
@@ -9792,8 +8403,8 @@
         </p:nvSpPr>
         <p:spPr>
           <a:xfrm>
-            <a:off x="457200" y="1170432"/>
-            <a:ext cx="11277295" cy="5230368"/>
+            <a:off x="457200" y="566928"/>
+            <a:ext cx="11277295" cy="411480"/>
           </a:xfrm>
           <a:prstGeom prst="rect">
             <a:avLst/>
@@ -9806,180 +8417,633 @@
           </a:bodyPr>
           <a:lstStyle/>
           <a:p>
-            <a:pPr>
-              <a:spcAft>
-                <a:spcPts val="800"/>
-              </a:spcAft>
+            <a:r>
+              <a:rPr sz="1400" b="0" i="0">
+                <a:solidFill>
+                  <a:srgbClr val="B8D8EE"/>
+                </a:solidFill>
+                <a:latin typeface="Calibri"/>
+              </a:rPr>
+              <a:t>Gratis · navegador o free tier</a:t>
+            </a:r>
+          </a:p>
+        </p:txBody>
+      </p:sp>
+      <p:sp>
+        <p:nvSpPr>
+          <p:cNvPr id="6" name="Rounded Rectangle 5"/>
+          <p:cNvSpPr/>
+          <p:nvPr/>
+        </p:nvSpPr>
+        <p:spPr>
+          <a:xfrm>
+            <a:off x="457200" y="1591056"/>
+            <a:ext cx="3624986" cy="2331720"/>
+          </a:xfrm>
+          <a:prstGeom prst="roundRect">
+            <a:avLst>
+              <a:gd name="adj" fmla="val 12000"/>
+            </a:avLst>
+          </a:prstGeom>
+          <a:solidFill>
+            <a:srgbClr val="F2F2F2"/>
+          </a:solidFill>
+          <a:ln>
+            <a:noFill/>
+          </a:ln>
+        </p:spPr>
+        <p:style>
+          <a:lnRef idx="1">
+            <a:schemeClr val="accent1"/>
+          </a:lnRef>
+          <a:fillRef idx="3">
+            <a:schemeClr val="accent1"/>
+          </a:fillRef>
+          <a:effectRef idx="2">
+            <a:schemeClr val="accent1"/>
+          </a:effectRef>
+          <a:fontRef idx="minor">
+            <a:schemeClr val="lt1"/>
+          </a:fontRef>
+        </p:style>
+        <p:txBody>
+          <a:bodyPr rtlCol="0" anchor="ctr"/>
+          <a:lstStyle/>
+          <a:p>
+            <a:pPr algn="ctr"/>
+          </a:p>
+        </p:txBody>
+      </p:sp>
+      <p:sp>
+        <p:nvSpPr>
+          <p:cNvPr id="7" name="Rectangle 6"/>
+          <p:cNvSpPr/>
+          <p:nvPr/>
+        </p:nvSpPr>
+        <p:spPr>
+          <a:xfrm>
+            <a:off x="457200" y="1591056"/>
+            <a:ext cx="3624986" cy="64008"/>
+          </a:xfrm>
+          <a:prstGeom prst="rect">
+            <a:avLst/>
+          </a:prstGeom>
+          <a:solidFill>
+            <a:srgbClr val="095292"/>
+          </a:solidFill>
+          <a:ln>
+            <a:noFill/>
+          </a:ln>
+        </p:spPr>
+        <p:style>
+          <a:lnRef idx="1">
+            <a:schemeClr val="accent1"/>
+          </a:lnRef>
+          <a:fillRef idx="3">
+            <a:schemeClr val="accent1"/>
+          </a:fillRef>
+          <a:effectRef idx="2">
+            <a:schemeClr val="accent1"/>
+          </a:effectRef>
+          <a:fontRef idx="minor">
+            <a:schemeClr val="lt1"/>
+          </a:fontRef>
+        </p:style>
+        <p:txBody>
+          <a:bodyPr rtlCol="0" anchor="ctr"/>
+          <a:lstStyle/>
+          <a:p>
+            <a:pPr algn="ctr"/>
+          </a:p>
+        </p:txBody>
+      </p:sp>
+      <p:sp>
+        <p:nvSpPr>
+          <p:cNvPr id="8" name="Rectangle 7"/>
+          <p:cNvSpPr/>
+          <p:nvPr/>
+        </p:nvSpPr>
+        <p:spPr>
+          <a:xfrm>
+            <a:off x="457200" y="1655064"/>
+            <a:ext cx="3624986" cy="27432"/>
+          </a:xfrm>
+          <a:prstGeom prst="rect">
+            <a:avLst/>
+          </a:prstGeom>
+          <a:solidFill>
+            <a:srgbClr val="FFD000"/>
+          </a:solidFill>
+          <a:ln>
+            <a:noFill/>
+          </a:ln>
+        </p:spPr>
+        <p:style>
+          <a:lnRef idx="1">
+            <a:schemeClr val="accent1"/>
+          </a:lnRef>
+          <a:fillRef idx="3">
+            <a:schemeClr val="accent1"/>
+          </a:fillRef>
+          <a:effectRef idx="2">
+            <a:schemeClr val="accent1"/>
+          </a:effectRef>
+          <a:fontRef idx="minor">
+            <a:schemeClr val="lt1"/>
+          </a:fontRef>
+        </p:style>
+        <p:txBody>
+          <a:bodyPr rtlCol="0" anchor="ctr"/>
+          <a:lstStyle/>
+          <a:p>
+            <a:pPr algn="ctr"/>
+          </a:p>
+        </p:txBody>
+      </p:sp>
+      <p:pic>
+        <p:nvPicPr>
+          <p:cNvPr id="9" name="Picture 8" descr="google_docs.png"/>
+          <p:cNvPicPr>
+            <a:picLocks noChangeAspect="1"/>
+          </p:cNvPicPr>
+          <p:nvPr/>
+        </p:nvPicPr>
+        <p:blipFill>
+          <a:blip r:embed="rId2"/>
+          <a:stretch>
+            <a:fillRect/>
+          </a:stretch>
+        </p:blipFill>
+        <p:spPr>
+          <a:xfrm>
+            <a:off x="1643329" y="1847087"/>
+            <a:ext cx="1252728" cy="1252728"/>
+          </a:xfrm>
+          <a:prstGeom prst="rect">
+            <a:avLst/>
+          </a:prstGeom>
+        </p:spPr>
+      </p:pic>
+      <p:sp>
+        <p:nvSpPr>
+          <p:cNvPr id="10" name="TextBox 9"/>
+          <p:cNvSpPr txBox="1"/>
+          <p:nvPr/>
+        </p:nvSpPr>
+        <p:spPr>
+          <a:xfrm>
+            <a:off x="530352" y="3191256"/>
+            <a:ext cx="3478682" cy="621792"/>
+          </a:xfrm>
+          <a:prstGeom prst="rect">
+            <a:avLst/>
+          </a:prstGeom>
+          <a:noFill/>
+        </p:spPr>
+        <p:txBody>
+          <a:bodyPr wrap="square" anchor="t"/>
+          <a:lstStyle/>
+          <a:p>
+            <a:pPr algn="ctr"/>
+            <a:r>
+              <a:rPr sz="1300" b="1" i="0">
+                <a:solidFill>
+                  <a:srgbClr val="095292"/>
+                </a:solidFill>
+                <a:latin typeface="Calibri"/>
+              </a:rPr>
+              <a:t>Google Docs</a:t>
+            </a:r>
+          </a:p>
+          <a:p>
+            <a:pPr algn="ctr">
+              <a:spcBef>
+                <a:spcPts val="200"/>
+              </a:spcBef>
             </a:pPr>
             <a:r>
-              <a:rPr sz="2000" b="0" i="0">
-                <a:solidFill>
-                  <a:srgbClr val="333333"/>
-                </a:solidFill>
-                <a:latin typeface="Calibri"/>
-              </a:rPr>
-              <a:t>–   </a:t>
-            </a:r>
-            <a:r>
-              <a:rPr sz="2000" b="1" i="0">
-                <a:solidFill>
-                  <a:srgbClr val="333333"/>
-                </a:solidFill>
-                <a:latin typeface="Calibri"/>
-              </a:rPr>
-              <a:t>Objetivo:</a:t>
-            </a:r>
-            <a:r>
-              <a:rPr sz="2000" b="0" i="0">
-                <a:solidFill>
-                  <a:srgbClr val="333333"/>
-                </a:solidFill>
-                <a:latin typeface="Calibri"/>
-              </a:rPr>
-              <a:t> Contrato &gt;=3 ops + outline pitch 5-8 min.</a:t>
-            </a:r>
-          </a:p>
-          <a:p>
-            <a:pPr>
-              <a:spcAft>
-                <a:spcPts val="800"/>
-              </a:spcAft>
+              <a:rPr sz="1000" b="0" i="0">
+                <a:solidFill>
+                  <a:srgbClr val="666666"/>
+                </a:solidFill>
+                <a:latin typeface="Calibri"/>
+              </a:rPr>
+              <a:t>Contrato app-BD</a:t>
+            </a:r>
+          </a:p>
+        </p:txBody>
+      </p:sp>
+      <p:sp>
+        <p:nvSpPr>
+          <p:cNvPr id="11" name="Rounded Rectangle 10"/>
+          <p:cNvSpPr/>
+          <p:nvPr/>
+        </p:nvSpPr>
+        <p:spPr>
+          <a:xfrm>
+            <a:off x="4283354" y="1591056"/>
+            <a:ext cx="3624986" cy="2331720"/>
+          </a:xfrm>
+          <a:prstGeom prst="roundRect">
+            <a:avLst>
+              <a:gd name="adj" fmla="val 12000"/>
+            </a:avLst>
+          </a:prstGeom>
+          <a:solidFill>
+            <a:srgbClr val="F2F2F2"/>
+          </a:solidFill>
+          <a:ln>
+            <a:noFill/>
+          </a:ln>
+        </p:spPr>
+        <p:style>
+          <a:lnRef idx="1">
+            <a:schemeClr val="accent1"/>
+          </a:lnRef>
+          <a:fillRef idx="3">
+            <a:schemeClr val="accent1"/>
+          </a:fillRef>
+          <a:effectRef idx="2">
+            <a:schemeClr val="accent1"/>
+          </a:effectRef>
+          <a:fontRef idx="minor">
+            <a:schemeClr val="lt1"/>
+          </a:fontRef>
+        </p:style>
+        <p:txBody>
+          <a:bodyPr rtlCol="0" anchor="ctr"/>
+          <a:lstStyle/>
+          <a:p>
+            <a:pPr algn="ctr"/>
+          </a:p>
+        </p:txBody>
+      </p:sp>
+      <p:sp>
+        <p:nvSpPr>
+          <p:cNvPr id="12" name="Rectangle 11"/>
+          <p:cNvSpPr/>
+          <p:nvPr/>
+        </p:nvSpPr>
+        <p:spPr>
+          <a:xfrm>
+            <a:off x="4283354" y="1591056"/>
+            <a:ext cx="3624986" cy="64008"/>
+          </a:xfrm>
+          <a:prstGeom prst="rect">
+            <a:avLst/>
+          </a:prstGeom>
+          <a:solidFill>
+            <a:srgbClr val="095292"/>
+          </a:solidFill>
+          <a:ln>
+            <a:noFill/>
+          </a:ln>
+        </p:spPr>
+        <p:style>
+          <a:lnRef idx="1">
+            <a:schemeClr val="accent1"/>
+          </a:lnRef>
+          <a:fillRef idx="3">
+            <a:schemeClr val="accent1"/>
+          </a:fillRef>
+          <a:effectRef idx="2">
+            <a:schemeClr val="accent1"/>
+          </a:effectRef>
+          <a:fontRef idx="minor">
+            <a:schemeClr val="lt1"/>
+          </a:fontRef>
+        </p:style>
+        <p:txBody>
+          <a:bodyPr rtlCol="0" anchor="ctr"/>
+          <a:lstStyle/>
+          <a:p>
+            <a:pPr algn="ctr"/>
+          </a:p>
+        </p:txBody>
+      </p:sp>
+      <p:sp>
+        <p:nvSpPr>
+          <p:cNvPr id="13" name="Rectangle 12"/>
+          <p:cNvSpPr/>
+          <p:nvPr/>
+        </p:nvSpPr>
+        <p:spPr>
+          <a:xfrm>
+            <a:off x="4283354" y="1655064"/>
+            <a:ext cx="3624986" cy="27432"/>
+          </a:xfrm>
+          <a:prstGeom prst="rect">
+            <a:avLst/>
+          </a:prstGeom>
+          <a:solidFill>
+            <a:srgbClr val="FFD000"/>
+          </a:solidFill>
+          <a:ln>
+            <a:noFill/>
+          </a:ln>
+        </p:spPr>
+        <p:style>
+          <a:lnRef idx="1">
+            <a:schemeClr val="accent1"/>
+          </a:lnRef>
+          <a:fillRef idx="3">
+            <a:schemeClr val="accent1"/>
+          </a:fillRef>
+          <a:effectRef idx="2">
+            <a:schemeClr val="accent1"/>
+          </a:effectRef>
+          <a:fontRef idx="minor">
+            <a:schemeClr val="lt1"/>
+          </a:fontRef>
+        </p:style>
+        <p:txBody>
+          <a:bodyPr rtlCol="0" anchor="ctr"/>
+          <a:lstStyle/>
+          <a:p>
+            <a:pPr algn="ctr"/>
+          </a:p>
+        </p:txBody>
+      </p:sp>
+      <p:pic>
+        <p:nvPicPr>
+          <p:cNvPr id="14" name="Picture 13" descr="oracle_livesql.png"/>
+          <p:cNvPicPr>
+            <a:picLocks noChangeAspect="1"/>
+          </p:cNvPicPr>
+          <p:nvPr/>
+        </p:nvPicPr>
+        <p:blipFill>
+          <a:blip r:embed="rId3"/>
+          <a:stretch>
+            <a:fillRect/>
+          </a:stretch>
+        </p:blipFill>
+        <p:spPr>
+          <a:xfrm>
+            <a:off x="5469483" y="1847087"/>
+            <a:ext cx="1252728" cy="1252728"/>
+          </a:xfrm>
+          <a:prstGeom prst="rect">
+            <a:avLst/>
+          </a:prstGeom>
+        </p:spPr>
+      </p:pic>
+      <p:sp>
+        <p:nvSpPr>
+          <p:cNvPr id="15" name="TextBox 14"/>
+          <p:cNvSpPr txBox="1"/>
+          <p:nvPr/>
+        </p:nvSpPr>
+        <p:spPr>
+          <a:xfrm>
+            <a:off x="4356506" y="3191256"/>
+            <a:ext cx="3478682" cy="621792"/>
+          </a:xfrm>
+          <a:prstGeom prst="rect">
+            <a:avLst/>
+          </a:prstGeom>
+          <a:noFill/>
+        </p:spPr>
+        <p:txBody>
+          <a:bodyPr wrap="square" anchor="t"/>
+          <a:lstStyle/>
+          <a:p>
+            <a:pPr algn="ctr"/>
+            <a:r>
+              <a:rPr sz="1300" b="1" i="0">
+                <a:solidFill>
+                  <a:srgbClr val="095292"/>
+                </a:solidFill>
+                <a:latin typeface="Calibri"/>
+              </a:rPr>
+              <a:t>Oracle Live SQL</a:t>
+            </a:r>
+          </a:p>
+          <a:p>
+            <a:pPr algn="ctr">
+              <a:spcBef>
+                <a:spcPts val="200"/>
+              </a:spcBef>
             </a:pPr>
             <a:r>
-              <a:rPr sz="2000" b="0" i="0">
-                <a:solidFill>
-                  <a:srgbClr val="333333"/>
-                </a:solidFill>
-                <a:latin typeface="Calibri"/>
-              </a:rPr>
-              <a:t>–   </a:t>
-            </a:r>
-            <a:r>
-              <a:rPr sz="2000" b="1" i="0">
-                <a:solidFill>
-                  <a:srgbClr val="333333"/>
-                </a:solidFill>
-                <a:latin typeface="Calibri"/>
-              </a:rPr>
-              <a:t>Exito:</a:t>
-            </a:r>
-            <a:r>
-              <a:rPr sz="2000" b="0" i="0">
-                <a:solidFill>
-                  <a:srgbClr val="333333"/>
-                </a:solidFill>
-                <a:latin typeface="Calibri"/>
-              </a:rPr>
-              <a:t> Contrato 3 ops.</a:t>
-            </a:r>
-          </a:p>
-          <a:p>
-            <a:pPr>
-              <a:spcAft>
-                <a:spcPts val="800"/>
-              </a:spcAft>
+              <a:rPr sz="1000" b="0" i="0">
+                <a:solidFill>
+                  <a:srgbClr val="666666"/>
+                </a:solidFill>
+                <a:latin typeface="Calibri"/>
+              </a:rPr>
+              <a:t>Ops</a:t>
+            </a:r>
+          </a:p>
+        </p:txBody>
+      </p:sp>
+      <p:sp>
+        <p:nvSpPr>
+          <p:cNvPr id="16" name="Rounded Rectangle 15"/>
+          <p:cNvSpPr/>
+          <p:nvPr/>
+        </p:nvSpPr>
+        <p:spPr>
+          <a:xfrm>
+            <a:off x="8109508" y="1591056"/>
+            <a:ext cx="3624986" cy="2331720"/>
+          </a:xfrm>
+          <a:prstGeom prst="roundRect">
+            <a:avLst>
+              <a:gd name="adj" fmla="val 12000"/>
+            </a:avLst>
+          </a:prstGeom>
+          <a:solidFill>
+            <a:srgbClr val="F2F2F2"/>
+          </a:solidFill>
+          <a:ln>
+            <a:noFill/>
+          </a:ln>
+        </p:spPr>
+        <p:style>
+          <a:lnRef idx="1">
+            <a:schemeClr val="accent1"/>
+          </a:lnRef>
+          <a:fillRef idx="3">
+            <a:schemeClr val="accent1"/>
+          </a:fillRef>
+          <a:effectRef idx="2">
+            <a:schemeClr val="accent1"/>
+          </a:effectRef>
+          <a:fontRef idx="minor">
+            <a:schemeClr val="lt1"/>
+          </a:fontRef>
+        </p:style>
+        <p:txBody>
+          <a:bodyPr rtlCol="0" anchor="ctr"/>
+          <a:lstStyle/>
+          <a:p>
+            <a:pPr algn="ctr"/>
+          </a:p>
+        </p:txBody>
+      </p:sp>
+      <p:sp>
+        <p:nvSpPr>
+          <p:cNvPr id="17" name="Rectangle 16"/>
+          <p:cNvSpPr/>
+          <p:nvPr/>
+        </p:nvSpPr>
+        <p:spPr>
+          <a:xfrm>
+            <a:off x="8109508" y="1591056"/>
+            <a:ext cx="3624986" cy="64008"/>
+          </a:xfrm>
+          <a:prstGeom prst="rect">
+            <a:avLst/>
+          </a:prstGeom>
+          <a:solidFill>
+            <a:srgbClr val="095292"/>
+          </a:solidFill>
+          <a:ln>
+            <a:noFill/>
+          </a:ln>
+        </p:spPr>
+        <p:style>
+          <a:lnRef idx="1">
+            <a:schemeClr val="accent1"/>
+          </a:lnRef>
+          <a:fillRef idx="3">
+            <a:schemeClr val="accent1"/>
+          </a:fillRef>
+          <a:effectRef idx="2">
+            <a:schemeClr val="accent1"/>
+          </a:effectRef>
+          <a:fontRef idx="minor">
+            <a:schemeClr val="lt1"/>
+          </a:fontRef>
+        </p:style>
+        <p:txBody>
+          <a:bodyPr rtlCol="0" anchor="ctr"/>
+          <a:lstStyle/>
+          <a:p>
+            <a:pPr algn="ctr"/>
+          </a:p>
+        </p:txBody>
+      </p:sp>
+      <p:sp>
+        <p:nvSpPr>
+          <p:cNvPr id="18" name="Rectangle 17"/>
+          <p:cNvSpPr/>
+          <p:nvPr/>
+        </p:nvSpPr>
+        <p:spPr>
+          <a:xfrm>
+            <a:off x="8109508" y="1655064"/>
+            <a:ext cx="3624986" cy="27432"/>
+          </a:xfrm>
+          <a:prstGeom prst="rect">
+            <a:avLst/>
+          </a:prstGeom>
+          <a:solidFill>
+            <a:srgbClr val="FFD000"/>
+          </a:solidFill>
+          <a:ln>
+            <a:noFill/>
+          </a:ln>
+        </p:spPr>
+        <p:style>
+          <a:lnRef idx="1">
+            <a:schemeClr val="accent1"/>
+          </a:lnRef>
+          <a:fillRef idx="3">
+            <a:schemeClr val="accent1"/>
+          </a:fillRef>
+          <a:effectRef idx="2">
+            <a:schemeClr val="accent1"/>
+          </a:effectRef>
+          <a:fontRef idx="minor">
+            <a:schemeClr val="lt1"/>
+          </a:fontRef>
+        </p:style>
+        <p:txBody>
+          <a:bodyPr rtlCol="0" anchor="ctr"/>
+          <a:lstStyle/>
+          <a:p>
+            <a:pPr algn="ctr"/>
+          </a:p>
+        </p:txBody>
+      </p:sp>
+      <p:pic>
+        <p:nvPicPr>
+          <p:cNvPr id="19" name="Picture 18" descr="drawio.png"/>
+          <p:cNvPicPr>
+            <a:picLocks noChangeAspect="1"/>
+          </p:cNvPicPr>
+          <p:nvPr/>
+        </p:nvPicPr>
+        <p:blipFill>
+          <a:blip r:embed="rId4"/>
+          <a:stretch>
+            <a:fillRect/>
+          </a:stretch>
+        </p:blipFill>
+        <p:spPr>
+          <a:xfrm>
+            <a:off x="9295638" y="1847087"/>
+            <a:ext cx="1252728" cy="1252728"/>
+          </a:xfrm>
+          <a:prstGeom prst="rect">
+            <a:avLst/>
+          </a:prstGeom>
+        </p:spPr>
+      </p:pic>
+      <p:sp>
+        <p:nvSpPr>
+          <p:cNvPr id="20" name="TextBox 19"/>
+          <p:cNvSpPr txBox="1"/>
+          <p:nvPr/>
+        </p:nvSpPr>
+        <p:spPr>
+          <a:xfrm>
+            <a:off x="8182660" y="3191256"/>
+            <a:ext cx="3478682" cy="621792"/>
+          </a:xfrm>
+          <a:prstGeom prst="rect">
+            <a:avLst/>
+          </a:prstGeom>
+          <a:noFill/>
+        </p:spPr>
+        <p:txBody>
+          <a:bodyPr wrap="square" anchor="t"/>
+          <a:lstStyle/>
+          <a:p>
+            <a:pPr algn="ctr"/>
+            <a:r>
+              <a:rPr sz="1300" b="1" i="0">
+                <a:solidFill>
+                  <a:srgbClr val="095292"/>
+                </a:solidFill>
+                <a:latin typeface="Calibri"/>
+              </a:rPr>
+              <a:t>draw.io</a:t>
+            </a:r>
+          </a:p>
+          <a:p>
+            <a:pPr algn="ctr">
+              <a:spcBef>
+                <a:spcPts val="200"/>
+              </a:spcBef>
             </a:pPr>
             <a:r>
-              <a:rPr sz="2000" b="0" i="0">
-                <a:solidFill>
-                  <a:srgbClr val="333333"/>
-                </a:solidFill>
-                <a:latin typeface="Calibri"/>
-              </a:rPr>
-              <a:t>–   </a:t>
-            </a:r>
-            <a:r>
-              <a:rPr sz="2000" b="1" i="0">
-                <a:solidFill>
-                  <a:srgbClr val="333333"/>
-                </a:solidFill>
-                <a:latin typeface="Calibri"/>
-              </a:rPr>
-              <a:t>Exito:</a:t>
-            </a:r>
-            <a:r>
-              <a:rPr sz="2000" b="0" i="0">
-                <a:solidFill>
-                  <a:srgbClr val="333333"/>
-                </a:solidFill>
-                <a:latin typeface="Calibri"/>
-              </a:rPr>
-              <a:t> Parametros/errores/ejemplo.</a:t>
-            </a:r>
-          </a:p>
-          <a:p>
-            <a:pPr>
-              <a:spcAft>
-                <a:spcPts val="800"/>
-              </a:spcAft>
-            </a:pPr>
-            <a:r>
-              <a:rPr sz="2000" b="0" i="0">
-                <a:solidFill>
-                  <a:srgbClr val="333333"/>
-                </a:solidFill>
-                <a:latin typeface="Calibri"/>
-              </a:rPr>
-              <a:t>–   </a:t>
-            </a:r>
-            <a:r>
-              <a:rPr sz="2000" b="1" i="0">
-                <a:solidFill>
-                  <a:srgbClr val="333333"/>
-                </a:solidFill>
-                <a:latin typeface="Calibri"/>
-              </a:rPr>
-              <a:t>Exito:</a:t>
-            </a:r>
-            <a:r>
-              <a:rPr sz="2000" b="0" i="0">
-                <a:solidFill>
-                  <a:srgbClr val="333333"/>
-                </a:solidFill>
-                <a:latin typeface="Calibri"/>
-              </a:rPr>
-              <a:t> Outline pitch.</a:t>
-            </a:r>
-          </a:p>
-          <a:p>
-            <a:pPr>
-              <a:spcAft>
-                <a:spcPts val="800"/>
-              </a:spcAft>
-            </a:pPr>
-            <a:r>
-              <a:rPr sz="2000" b="0" i="0">
-                <a:solidFill>
-                  <a:srgbClr val="333333"/>
-                </a:solidFill>
-                <a:latin typeface="Calibri"/>
-              </a:rPr>
-              <a:t>–   </a:t>
-            </a:r>
-            <a:r>
-              <a:rPr sz="2000" b="1" i="0">
-                <a:solidFill>
-                  <a:srgbClr val="333333"/>
-                </a:solidFill>
-                <a:latin typeface="Calibri"/>
-              </a:rPr>
-              <a:t>Exito:</a:t>
-            </a:r>
-            <a:r>
-              <a:rPr sz="2000" b="0" i="0">
-                <a:solidFill>
-                  <a:srgbClr val="333333"/>
-                </a:solidFill>
-                <a:latin typeface="Calibri"/>
-              </a:rPr>
-              <a:t> Borrador final.</a:t>
-            </a:r>
-          </a:p>
-        </p:txBody>
-      </p:sp>
-      <p:sp>
-        <p:nvSpPr>
-          <p:cNvPr id="6" name="TextBox 5"/>
+              <a:rPr sz="1000" b="0" i="0">
+                <a:solidFill>
+                  <a:srgbClr val="666666"/>
+                </a:solidFill>
+                <a:latin typeface="Calibri"/>
+              </a:rPr>
+              <a:t>Flujo</a:t>
+            </a:r>
+          </a:p>
+        </p:txBody>
+      </p:sp>
+      <p:sp>
+        <p:nvSpPr>
+          <p:cNvPr id="21" name="TextBox 20"/>
           <p:cNvSpPr txBox="1"/>
           <p:nvPr/>
         </p:nvSpPr>
@@ -10047,7 +9111,7 @@
         <p:spPr>
           <a:xfrm>
             <a:off x="0" y="0"/>
-            <a:ext cx="12191695" cy="960120"/>
+            <a:ext cx="12191695" cy="1170432"/>
           </a:xfrm>
           <a:prstGeom prst="rect">
             <a:avLst/>
@@ -10089,7 +9153,7 @@
         </p:nvSpPr>
         <p:spPr>
           <a:xfrm>
-            <a:off x="0" y="960120"/>
+            <a:off x="0" y="1170432"/>
             <a:ext cx="12191695" cy="41148"/>
           </a:xfrm>
           <a:prstGeom prst="rect">
@@ -10133,7 +9197,7 @@
         <p:spPr>
           <a:xfrm>
             <a:off x="457200" y="164592"/>
-            <a:ext cx="11277295" cy="502920"/>
+            <a:ext cx="11277295" cy="384048"/>
           </a:xfrm>
           <a:prstGeom prst="rect">
             <a:avLst/>
@@ -10153,7 +9217,7 @@
                 </a:solidFill>
                 <a:latin typeface="Calibri"/>
               </a:rPr>
-              <a:t>Taller PI VetCare — escenario / datos de partida</a:t>
+              <a:t>Del boceto a la plataforma del curso (diagrama)</a:t>
             </a:r>
           </a:p>
         </p:txBody>
@@ -10166,8 +9230,8 @@
         </p:nvSpPr>
         <p:spPr>
           <a:xfrm>
-            <a:off x="457200" y="1170432"/>
-            <a:ext cx="11277295" cy="5230368"/>
+            <a:off x="457200" y="566928"/>
+            <a:ext cx="11277295" cy="411480"/>
           </a:xfrm>
           <a:prstGeom prst="rect">
             <a:avLst/>
@@ -10180,26 +9244,705 @@
           </a:bodyPr>
           <a:lstStyle/>
           <a:p>
+            <a:r>
+              <a:rPr sz="1400" b="0" i="0">
+                <a:solidFill>
+                  <a:srgbClr val="B8D8EE"/>
+                </a:solidFill>
+                <a:latin typeface="Calibri"/>
+              </a:rPr>
+              <a:t>El diagrama se entrega como codigo Mermaid dentro de la plataforma del curso, no como imagen</a:t>
+            </a:r>
+          </a:p>
+        </p:txBody>
+      </p:sp>
+      <p:sp>
+        <p:nvSpPr>
+          <p:cNvPr id="6" name="Rounded Rectangle 5"/>
+          <p:cNvSpPr/>
+          <p:nvPr/>
+        </p:nvSpPr>
+        <p:spPr>
+          <a:xfrm>
+            <a:off x="457200" y="1659636"/>
+            <a:ext cx="11277295" cy="1051560"/>
+          </a:xfrm>
+          <a:prstGeom prst="roundRect">
+            <a:avLst>
+              <a:gd name="adj" fmla="val 12000"/>
+            </a:avLst>
+          </a:prstGeom>
+          <a:solidFill>
+            <a:srgbClr val="F2F2F2"/>
+          </a:solidFill>
+          <a:ln>
+            <a:noFill/>
+          </a:ln>
+        </p:spPr>
+        <p:style>
+          <a:lnRef idx="1">
+            <a:schemeClr val="accent1"/>
+          </a:lnRef>
+          <a:fillRef idx="3">
+            <a:schemeClr val="accent1"/>
+          </a:fillRef>
+          <a:effectRef idx="2">
+            <a:schemeClr val="accent1"/>
+          </a:effectRef>
+          <a:fontRef idx="minor">
+            <a:schemeClr val="lt1"/>
+          </a:fontRef>
+        </p:style>
+        <p:txBody>
+          <a:bodyPr rtlCol="0" anchor="ctr"/>
+          <a:lstStyle/>
+          <a:p>
+            <a:pPr algn="ctr"/>
+          </a:p>
+        </p:txBody>
+      </p:sp>
+      <p:sp>
+        <p:nvSpPr>
+          <p:cNvPr id="7" name="Rounded Rectangle 6"/>
+          <p:cNvSpPr/>
+          <p:nvPr/>
+        </p:nvSpPr>
+        <p:spPr>
+          <a:xfrm>
+            <a:off x="594360" y="1965960"/>
+            <a:ext cx="438912" cy="438912"/>
+          </a:xfrm>
+          <a:prstGeom prst="roundRect">
+            <a:avLst>
+              <a:gd name="adj" fmla="val 12000"/>
+            </a:avLst>
+          </a:prstGeom>
+          <a:solidFill>
+            <a:srgbClr val="095292"/>
+          </a:solidFill>
+          <a:ln>
+            <a:noFill/>
+          </a:ln>
+        </p:spPr>
+        <p:style>
+          <a:lnRef idx="1">
+            <a:schemeClr val="accent1"/>
+          </a:lnRef>
+          <a:fillRef idx="3">
+            <a:schemeClr val="accent1"/>
+          </a:fillRef>
+          <a:effectRef idx="2">
+            <a:schemeClr val="accent1"/>
+          </a:effectRef>
+          <a:fontRef idx="minor">
+            <a:schemeClr val="lt1"/>
+          </a:fontRef>
+        </p:style>
+        <p:txBody>
+          <a:bodyPr rtlCol="0" anchor="ctr"/>
+          <a:lstStyle/>
+          <a:p>
+            <a:pPr algn="ctr"/>
+          </a:p>
+        </p:txBody>
+      </p:sp>
+      <p:sp>
+        <p:nvSpPr>
+          <p:cNvPr id="8" name="TextBox 7"/>
+          <p:cNvSpPr txBox="1"/>
+          <p:nvPr/>
+        </p:nvSpPr>
+        <p:spPr>
+          <a:xfrm>
+            <a:off x="594360" y="1965960"/>
+            <a:ext cx="438912" cy="438912"/>
+          </a:xfrm>
+          <a:prstGeom prst="rect">
+            <a:avLst/>
+          </a:prstGeom>
+          <a:noFill/>
+        </p:spPr>
+        <p:txBody>
+          <a:bodyPr wrap="square" anchor="ctr"/>
+          <a:lstStyle/>
+          <a:p>
+            <a:pPr algn="ctr"/>
+            <a:r>
+              <a:rPr sz="1600" b="1" i="0">
+                <a:solidFill>
+                  <a:srgbClr val="FFFFFF"/>
+                </a:solidFill>
+                <a:latin typeface="Calibri"/>
+              </a:rPr>
+              <a:t>1</a:t>
+            </a:r>
+          </a:p>
+        </p:txBody>
+      </p:sp>
+      <p:sp>
+        <p:nvSpPr>
+          <p:cNvPr id="9" name="TextBox 8"/>
+          <p:cNvSpPr txBox="1"/>
+          <p:nvPr/>
+        </p:nvSpPr>
+        <p:spPr>
+          <a:xfrm>
+            <a:off x="1188720" y="1751076"/>
+            <a:ext cx="10271455" cy="886968"/>
+          </a:xfrm>
+          <a:prstGeom prst="rect">
+            <a:avLst/>
+          </a:prstGeom>
+          <a:noFill/>
+        </p:spPr>
+        <p:txBody>
+          <a:bodyPr wrap="square" anchor="ctr"/>
+          <a:lstStyle/>
+          <a:p>
+            <a:r>
+              <a:rPr sz="1500" b="1" i="0">
+                <a:solidFill>
+                  <a:srgbClr val="095292"/>
+                </a:solidFill>
+                <a:latin typeface="Calibri"/>
+              </a:rPr>
+              <a:t>Disena visual</a:t>
+            </a:r>
+          </a:p>
+          <a:p>
             <a:pPr>
-              <a:spcAft>
-                <a:spcPts val="800"/>
-              </a:spcAft>
+              <a:spcBef>
+                <a:spcPts val="200"/>
+              </a:spcBef>
             </a:pPr>
             <a:r>
-              <a:rPr sz="2000" b="0" i="0">
+              <a:rPr sz="1300" b="0" i="0">
                 <a:solidFill>
                   <a:srgbClr val="333333"/>
                 </a:solidFill>
                 <a:latin typeface="Calibri"/>
               </a:rPr>
-              <a:t>–   Plantilla sp_agendar_cita / consulta / facturar.</a:t>
-            </a:r>
-          </a:p>
-        </p:txBody>
-      </p:sp>
-      <p:sp>
-        <p:nvSpPr>
-          <p:cNvPr id="6" name="TextBox 5"/>
+              <a:t>Dibuja el diagrama como quieras en Excalidraw o draw.io: es mas rapido arrastrar cajas que escribir codigo, y ahi es donde piensas el modelo.</a:t>
+            </a:r>
+          </a:p>
+        </p:txBody>
+      </p:sp>
+      <p:sp>
+        <p:nvSpPr>
+          <p:cNvPr id="10" name="Rounded Rectangle 9"/>
+          <p:cNvSpPr/>
+          <p:nvPr/>
+        </p:nvSpPr>
+        <p:spPr>
+          <a:xfrm>
+            <a:off x="457200" y="2802636"/>
+            <a:ext cx="11277295" cy="1051560"/>
+          </a:xfrm>
+          <a:prstGeom prst="roundRect">
+            <a:avLst>
+              <a:gd name="adj" fmla="val 12000"/>
+            </a:avLst>
+          </a:prstGeom>
+          <a:solidFill>
+            <a:srgbClr val="E8F4FA"/>
+          </a:solidFill>
+          <a:ln>
+            <a:noFill/>
+          </a:ln>
+        </p:spPr>
+        <p:style>
+          <a:lnRef idx="1">
+            <a:schemeClr val="accent1"/>
+          </a:lnRef>
+          <a:fillRef idx="3">
+            <a:schemeClr val="accent1"/>
+          </a:fillRef>
+          <a:effectRef idx="2">
+            <a:schemeClr val="accent1"/>
+          </a:effectRef>
+          <a:fontRef idx="minor">
+            <a:schemeClr val="lt1"/>
+          </a:fontRef>
+        </p:style>
+        <p:txBody>
+          <a:bodyPr rtlCol="0" anchor="ctr"/>
+          <a:lstStyle/>
+          <a:p>
+            <a:pPr algn="ctr"/>
+          </a:p>
+        </p:txBody>
+      </p:sp>
+      <p:sp>
+        <p:nvSpPr>
+          <p:cNvPr id="11" name="Rounded Rectangle 10"/>
+          <p:cNvSpPr/>
+          <p:nvPr/>
+        </p:nvSpPr>
+        <p:spPr>
+          <a:xfrm>
+            <a:off x="594360" y="3108960"/>
+            <a:ext cx="438912" cy="438912"/>
+          </a:xfrm>
+          <a:prstGeom prst="roundRect">
+            <a:avLst>
+              <a:gd name="adj" fmla="val 12000"/>
+            </a:avLst>
+          </a:prstGeom>
+          <a:solidFill>
+            <a:srgbClr val="095292"/>
+          </a:solidFill>
+          <a:ln>
+            <a:noFill/>
+          </a:ln>
+        </p:spPr>
+        <p:style>
+          <a:lnRef idx="1">
+            <a:schemeClr val="accent1"/>
+          </a:lnRef>
+          <a:fillRef idx="3">
+            <a:schemeClr val="accent1"/>
+          </a:fillRef>
+          <a:effectRef idx="2">
+            <a:schemeClr val="accent1"/>
+          </a:effectRef>
+          <a:fontRef idx="minor">
+            <a:schemeClr val="lt1"/>
+          </a:fontRef>
+        </p:style>
+        <p:txBody>
+          <a:bodyPr rtlCol="0" anchor="ctr"/>
+          <a:lstStyle/>
+          <a:p>
+            <a:pPr algn="ctr"/>
+          </a:p>
+        </p:txBody>
+      </p:sp>
+      <p:sp>
+        <p:nvSpPr>
+          <p:cNvPr id="12" name="TextBox 11"/>
+          <p:cNvSpPr txBox="1"/>
+          <p:nvPr/>
+        </p:nvSpPr>
+        <p:spPr>
+          <a:xfrm>
+            <a:off x="594360" y="3108960"/>
+            <a:ext cx="438912" cy="438912"/>
+          </a:xfrm>
+          <a:prstGeom prst="rect">
+            <a:avLst/>
+          </a:prstGeom>
+          <a:noFill/>
+        </p:spPr>
+        <p:txBody>
+          <a:bodyPr wrap="square" anchor="ctr"/>
+          <a:lstStyle/>
+          <a:p>
+            <a:pPr algn="ctr"/>
+            <a:r>
+              <a:rPr sz="1600" b="1" i="0">
+                <a:solidFill>
+                  <a:srgbClr val="FFFFFF"/>
+                </a:solidFill>
+                <a:latin typeface="Calibri"/>
+              </a:rPr>
+              <a:t>2</a:t>
+            </a:r>
+          </a:p>
+        </p:txBody>
+      </p:sp>
+      <p:sp>
+        <p:nvSpPr>
+          <p:cNvPr id="13" name="TextBox 12"/>
+          <p:cNvSpPr txBox="1"/>
+          <p:nvPr/>
+        </p:nvSpPr>
+        <p:spPr>
+          <a:xfrm>
+            <a:off x="1188720" y="2894076"/>
+            <a:ext cx="10271455" cy="886968"/>
+          </a:xfrm>
+          <a:prstGeom prst="rect">
+            <a:avLst/>
+          </a:prstGeom>
+          <a:noFill/>
+        </p:spPr>
+        <p:txBody>
+          <a:bodyPr wrap="square" anchor="ctr"/>
+          <a:lstStyle/>
+          <a:p>
+            <a:r>
+              <a:rPr sz="1500" b="1" i="0">
+                <a:solidFill>
+                  <a:srgbClr val="095292"/>
+                </a:solidFill>
+                <a:latin typeface="Calibri"/>
+              </a:rPr>
+              <a:t>Traduce con IA</a:t>
+            </a:r>
+          </a:p>
+          <a:p>
+            <a:pPr>
+              <a:spcBef>
+                <a:spcPts val="200"/>
+              </a:spcBef>
+            </a:pPr>
+            <a:r>
+              <a:rPr sz="1300" b="0" i="0">
+                <a:solidFill>
+                  <a:srgbClr val="333333"/>
+                </a:solidFill>
+                <a:latin typeface="Calibri"/>
+              </a:rPr>
+              <a:t>Copia o describe tu boceto a una IA y pidele el codigo Mermaid: «convierte este diagrama a Mermaid usando sequenceDiagram». Revisa el resultado: la IA acierta la sintaxis, no tu modelo.</a:t>
+            </a:r>
+          </a:p>
+        </p:txBody>
+      </p:sp>
+      <p:sp>
+        <p:nvSpPr>
+          <p:cNvPr id="14" name="Rounded Rectangle 13"/>
+          <p:cNvSpPr/>
+          <p:nvPr/>
+        </p:nvSpPr>
+        <p:spPr>
+          <a:xfrm>
+            <a:off x="457200" y="3945636"/>
+            <a:ext cx="11277295" cy="1051560"/>
+          </a:xfrm>
+          <a:prstGeom prst="roundRect">
+            <a:avLst>
+              <a:gd name="adj" fmla="val 12000"/>
+            </a:avLst>
+          </a:prstGeom>
+          <a:solidFill>
+            <a:srgbClr val="F2F2F2"/>
+          </a:solidFill>
+          <a:ln>
+            <a:noFill/>
+          </a:ln>
+        </p:spPr>
+        <p:style>
+          <a:lnRef idx="1">
+            <a:schemeClr val="accent1"/>
+          </a:lnRef>
+          <a:fillRef idx="3">
+            <a:schemeClr val="accent1"/>
+          </a:fillRef>
+          <a:effectRef idx="2">
+            <a:schemeClr val="accent1"/>
+          </a:effectRef>
+          <a:fontRef idx="minor">
+            <a:schemeClr val="lt1"/>
+          </a:fontRef>
+        </p:style>
+        <p:txBody>
+          <a:bodyPr rtlCol="0" anchor="ctr"/>
+          <a:lstStyle/>
+          <a:p>
+            <a:pPr algn="ctr"/>
+          </a:p>
+        </p:txBody>
+      </p:sp>
+      <p:sp>
+        <p:nvSpPr>
+          <p:cNvPr id="15" name="Rounded Rectangle 14"/>
+          <p:cNvSpPr/>
+          <p:nvPr/>
+        </p:nvSpPr>
+        <p:spPr>
+          <a:xfrm>
+            <a:off x="594360" y="4251960"/>
+            <a:ext cx="438912" cy="438912"/>
+          </a:xfrm>
+          <a:prstGeom prst="roundRect">
+            <a:avLst>
+              <a:gd name="adj" fmla="val 12000"/>
+            </a:avLst>
+          </a:prstGeom>
+          <a:solidFill>
+            <a:srgbClr val="095292"/>
+          </a:solidFill>
+          <a:ln>
+            <a:noFill/>
+          </a:ln>
+        </p:spPr>
+        <p:style>
+          <a:lnRef idx="1">
+            <a:schemeClr val="accent1"/>
+          </a:lnRef>
+          <a:fillRef idx="3">
+            <a:schemeClr val="accent1"/>
+          </a:fillRef>
+          <a:effectRef idx="2">
+            <a:schemeClr val="accent1"/>
+          </a:effectRef>
+          <a:fontRef idx="minor">
+            <a:schemeClr val="lt1"/>
+          </a:fontRef>
+        </p:style>
+        <p:txBody>
+          <a:bodyPr rtlCol="0" anchor="ctr"/>
+          <a:lstStyle/>
+          <a:p>
+            <a:pPr algn="ctr"/>
+          </a:p>
+        </p:txBody>
+      </p:sp>
+      <p:sp>
+        <p:nvSpPr>
+          <p:cNvPr id="16" name="TextBox 15"/>
+          <p:cNvSpPr txBox="1"/>
+          <p:nvPr/>
+        </p:nvSpPr>
+        <p:spPr>
+          <a:xfrm>
+            <a:off x="594360" y="4251960"/>
+            <a:ext cx="438912" cy="438912"/>
+          </a:xfrm>
+          <a:prstGeom prst="rect">
+            <a:avLst/>
+          </a:prstGeom>
+          <a:noFill/>
+        </p:spPr>
+        <p:txBody>
+          <a:bodyPr wrap="square" anchor="ctr"/>
+          <a:lstStyle/>
+          <a:p>
+            <a:pPr algn="ctr"/>
+            <a:r>
+              <a:rPr sz="1600" b="1" i="0">
+                <a:solidFill>
+                  <a:srgbClr val="FFFFFF"/>
+                </a:solidFill>
+                <a:latin typeface="Calibri"/>
+              </a:rPr>
+              <a:t>3</a:t>
+            </a:r>
+          </a:p>
+        </p:txBody>
+      </p:sp>
+      <p:sp>
+        <p:nvSpPr>
+          <p:cNvPr id="17" name="TextBox 16"/>
+          <p:cNvSpPr txBox="1"/>
+          <p:nvPr/>
+        </p:nvSpPr>
+        <p:spPr>
+          <a:xfrm>
+            <a:off x="1188720" y="4037076"/>
+            <a:ext cx="10271455" cy="886968"/>
+          </a:xfrm>
+          <a:prstGeom prst="rect">
+            <a:avLst/>
+          </a:prstGeom>
+          <a:noFill/>
+        </p:spPr>
+        <p:txBody>
+          <a:bodyPr wrap="square" anchor="ctr"/>
+          <a:lstStyle/>
+          <a:p>
+            <a:r>
+              <a:rPr sz="1500" b="1" i="0">
+                <a:solidFill>
+                  <a:srgbClr val="095292"/>
+                </a:solidFill>
+                <a:latin typeface="Calibri"/>
+              </a:rPr>
+              <a:t>Pega y renderiza en la plataforma del curso</a:t>
+            </a:r>
+          </a:p>
+          <a:p>
+            <a:pPr>
+              <a:spcBef>
+                <a:spcPts val="200"/>
+              </a:spcBef>
+            </a:pPr>
+            <a:r>
+              <a:rPr sz="1300" b="0" i="0">
+                <a:solidFill>
+                  <a:srgbClr val="333333"/>
+                </a:solidFill>
+                <a:latin typeface="Calibri"/>
+              </a:rPr>
+              <a:t>Pega ese codigo en la caja de texto de la pregunta y mira como lo dibuja la plataforma. Si no renderiza, corrige ahi mismo: lo que se califica es el diagrama renderizado dentro de la plataforma del curso.</a:t>
+            </a:r>
+          </a:p>
+        </p:txBody>
+      </p:sp>
+      <p:sp>
+        <p:nvSpPr>
+          <p:cNvPr id="18" name="Rounded Rectangle 17"/>
+          <p:cNvSpPr/>
+          <p:nvPr/>
+        </p:nvSpPr>
+        <p:spPr>
+          <a:xfrm>
+            <a:off x="457200" y="5088636"/>
+            <a:ext cx="11277295" cy="1051560"/>
+          </a:xfrm>
+          <a:prstGeom prst="roundRect">
+            <a:avLst>
+              <a:gd name="adj" fmla="val 12000"/>
+            </a:avLst>
+          </a:prstGeom>
+          <a:solidFill>
+            <a:srgbClr val="E8F4FA"/>
+          </a:solidFill>
+          <a:ln>
+            <a:noFill/>
+          </a:ln>
+        </p:spPr>
+        <p:style>
+          <a:lnRef idx="1">
+            <a:schemeClr val="accent1"/>
+          </a:lnRef>
+          <a:fillRef idx="3">
+            <a:schemeClr val="accent1"/>
+          </a:fillRef>
+          <a:effectRef idx="2">
+            <a:schemeClr val="accent1"/>
+          </a:effectRef>
+          <a:fontRef idx="minor">
+            <a:schemeClr val="lt1"/>
+          </a:fontRef>
+        </p:style>
+        <p:txBody>
+          <a:bodyPr rtlCol="0" anchor="ctr"/>
+          <a:lstStyle/>
+          <a:p>
+            <a:pPr algn="ctr"/>
+          </a:p>
+        </p:txBody>
+      </p:sp>
+      <p:sp>
+        <p:nvSpPr>
+          <p:cNvPr id="19" name="Rounded Rectangle 18"/>
+          <p:cNvSpPr/>
+          <p:nvPr/>
+        </p:nvSpPr>
+        <p:spPr>
+          <a:xfrm>
+            <a:off x="594360" y="5394960"/>
+            <a:ext cx="438912" cy="438912"/>
+          </a:xfrm>
+          <a:prstGeom prst="roundRect">
+            <a:avLst>
+              <a:gd name="adj" fmla="val 12000"/>
+            </a:avLst>
+          </a:prstGeom>
+          <a:solidFill>
+            <a:srgbClr val="095292"/>
+          </a:solidFill>
+          <a:ln>
+            <a:noFill/>
+          </a:ln>
+        </p:spPr>
+        <p:style>
+          <a:lnRef idx="1">
+            <a:schemeClr val="accent1"/>
+          </a:lnRef>
+          <a:fillRef idx="3">
+            <a:schemeClr val="accent1"/>
+          </a:fillRef>
+          <a:effectRef idx="2">
+            <a:schemeClr val="accent1"/>
+          </a:effectRef>
+          <a:fontRef idx="minor">
+            <a:schemeClr val="lt1"/>
+          </a:fontRef>
+        </p:style>
+        <p:txBody>
+          <a:bodyPr rtlCol="0" anchor="ctr"/>
+          <a:lstStyle/>
+          <a:p>
+            <a:pPr algn="ctr"/>
+          </a:p>
+        </p:txBody>
+      </p:sp>
+      <p:sp>
+        <p:nvSpPr>
+          <p:cNvPr id="20" name="TextBox 19"/>
+          <p:cNvSpPr txBox="1"/>
+          <p:nvPr/>
+        </p:nvSpPr>
+        <p:spPr>
+          <a:xfrm>
+            <a:off x="594360" y="5394960"/>
+            <a:ext cx="438912" cy="438912"/>
+          </a:xfrm>
+          <a:prstGeom prst="rect">
+            <a:avLst/>
+          </a:prstGeom>
+          <a:noFill/>
+        </p:spPr>
+        <p:txBody>
+          <a:bodyPr wrap="square" anchor="ctr"/>
+          <a:lstStyle/>
+          <a:p>
+            <a:pPr algn="ctr"/>
+            <a:r>
+              <a:rPr sz="1600" b="1" i="0">
+                <a:solidFill>
+                  <a:srgbClr val="FFFFFF"/>
+                </a:solidFill>
+                <a:latin typeface="Calibri"/>
+              </a:rPr>
+              <a:t>4</a:t>
+            </a:r>
+          </a:p>
+        </p:txBody>
+      </p:sp>
+      <p:sp>
+        <p:nvSpPr>
+          <p:cNvPr id="21" name="TextBox 20"/>
+          <p:cNvSpPr txBox="1"/>
+          <p:nvPr/>
+        </p:nvSpPr>
+        <p:spPr>
+          <a:xfrm>
+            <a:off x="1188720" y="5180076"/>
+            <a:ext cx="10271455" cy="886968"/>
+          </a:xfrm>
+          <a:prstGeom prst="rect">
+            <a:avLst/>
+          </a:prstGeom>
+          <a:noFill/>
+        </p:spPr>
+        <p:txBody>
+          <a:bodyPr wrap="square" anchor="ctr"/>
+          <a:lstStyle/>
+          <a:p>
+            <a:r>
+              <a:rPr sz="1500" b="1" i="0">
+                <a:solidFill>
+                  <a:srgbClr val="095292"/>
+                </a:solidFill>
+                <a:latin typeface="Calibri"/>
+              </a:rPr>
+              <a:t>Guarda el PNG para tu PI</a:t>
+            </a:r>
+          </a:p>
+          <a:p>
+            <a:pPr>
+              <a:spcBef>
+                <a:spcPts val="200"/>
+              </a:spcBef>
+            </a:pPr>
+            <a:r>
+              <a:rPr sz="1300" b="0" i="0">
+                <a:solidFill>
+                  <a:srgbClr val="333333"/>
+                </a:solidFill>
+                <a:latin typeface="Calibri"/>
+              </a:rPr>
+              <a:t>Exporta tambien la imagen a la carpeta de tu Proyecto Integrador. Esa copia es para tu informe; no reemplaza la respuesta en la plataforma.</a:t>
+            </a:r>
+          </a:p>
+        </p:txBody>
+      </p:sp>
+      <p:sp>
+        <p:nvSpPr>
+          <p:cNvPr id="22" name="TextBox 21"/>
           <p:cNvSpPr txBox="1"/>
           <p:nvPr/>
         </p:nvSpPr>
@@ -10373,111 +10116,21 @@
                 </a:solidFill>
                 <a:latin typeface="Calibri"/>
               </a:rPr>
-              <a:t>Taller PI VetCare — pasos guiados</a:t>
-            </a:r>
-          </a:p>
-        </p:txBody>
-      </p:sp>
-      <p:sp>
-        <p:nvSpPr>
-          <p:cNvPr id="5" name="Rounded Rectangle 4"/>
-          <p:cNvSpPr/>
-          <p:nvPr/>
-        </p:nvSpPr>
-        <p:spPr>
-          <a:xfrm>
-            <a:off x="457200" y="1554480"/>
-            <a:ext cx="11277295" cy="1051560"/>
-          </a:xfrm>
-          <a:prstGeom prst="roundRect">
-            <a:avLst>
-              <a:gd name="adj" fmla="val 12000"/>
-            </a:avLst>
-          </a:prstGeom>
-          <a:solidFill>
-            <a:srgbClr val="F2F2F2"/>
-          </a:solidFill>
-          <a:ln>
-            <a:noFill/>
-          </a:ln>
-        </p:spPr>
-        <p:style>
-          <a:lnRef idx="1">
-            <a:schemeClr val="accent1"/>
-          </a:lnRef>
-          <a:fillRef idx="3">
-            <a:schemeClr val="accent1"/>
-          </a:fillRef>
-          <a:effectRef idx="2">
-            <a:schemeClr val="accent1"/>
-          </a:effectRef>
-          <a:fontRef idx="minor">
-            <a:schemeClr val="lt1"/>
-          </a:fontRef>
-        </p:style>
-        <p:txBody>
-          <a:bodyPr rtlCol="0" anchor="ctr"/>
-          <a:lstStyle/>
-          <a:p>
-            <a:pPr algn="ctr"/>
-          </a:p>
-        </p:txBody>
-      </p:sp>
-      <p:sp>
-        <p:nvSpPr>
-          <p:cNvPr id="6" name="Rounded Rectangle 5"/>
-          <p:cNvSpPr/>
-          <p:nvPr/>
-        </p:nvSpPr>
-        <p:spPr>
-          <a:xfrm>
-            <a:off x="594360" y="1860804"/>
-            <a:ext cx="438912" cy="438912"/>
-          </a:xfrm>
-          <a:prstGeom prst="roundRect">
-            <a:avLst>
-              <a:gd name="adj" fmla="val 12000"/>
-            </a:avLst>
-          </a:prstGeom>
-          <a:solidFill>
-            <a:srgbClr val="095292"/>
-          </a:solidFill>
-          <a:ln>
-            <a:noFill/>
-          </a:ln>
-        </p:spPr>
-        <p:style>
-          <a:lnRef idx="1">
-            <a:schemeClr val="accent1"/>
-          </a:lnRef>
-          <a:fillRef idx="3">
-            <a:schemeClr val="accent1"/>
-          </a:fillRef>
-          <a:effectRef idx="2">
-            <a:schemeClr val="accent1"/>
-          </a:effectRef>
-          <a:fontRef idx="minor">
-            <a:schemeClr val="lt1"/>
-          </a:fontRef>
-        </p:style>
-        <p:txBody>
-          <a:bodyPr rtlCol="0" anchor="ctr"/>
-          <a:lstStyle/>
-          <a:p>
-            <a:pPr algn="ctr"/>
-          </a:p>
-        </p:txBody>
-      </p:sp>
-      <p:sp>
-        <p:nvSpPr>
-          <p:cNvPr id="7" name="TextBox 6"/>
+              <a:t>Taller PI VetCare — contexto / por que importa</a:t>
+            </a:r>
+          </a:p>
+        </p:txBody>
+      </p:sp>
+      <p:sp>
+        <p:nvSpPr>
+          <p:cNvPr id="5" name="TextBox 4"/>
           <p:cNvSpPr txBox="1"/>
           <p:nvPr/>
         </p:nvSpPr>
         <p:spPr>
           <a:xfrm>
-            <a:off x="594360" y="1860804"/>
-            <a:ext cx="438912" cy="438912"/>
+            <a:off x="457200" y="1170432"/>
+            <a:ext cx="11277295" cy="5230368"/>
           </a:xfrm>
           <a:prstGeom prst="rect">
             <a:avLst/>
@@ -10485,522 +10138,65 @@
           <a:noFill/>
         </p:spPr>
         <p:txBody>
-          <a:bodyPr wrap="square" anchor="ctr"/>
-          <a:lstStyle/>
-          <a:p>
-            <a:pPr algn="ctr"/>
-            <a:r>
-              <a:rPr sz="1600" b="1" i="0">
-                <a:solidFill>
-                  <a:srgbClr val="FFFFFF"/>
-                </a:solidFill>
-                <a:latin typeface="Calibri"/>
-              </a:rPr>
-              <a:t>1</a:t>
-            </a:r>
-          </a:p>
-        </p:txBody>
-      </p:sp>
-      <p:sp>
-        <p:nvSpPr>
-          <p:cNvPr id="8" name="TextBox 7"/>
-          <p:cNvSpPr txBox="1"/>
-          <p:nvPr/>
-        </p:nvSpPr>
-        <p:spPr>
-          <a:xfrm>
-            <a:off x="1188720" y="1645920"/>
-            <a:ext cx="10271455" cy="886968"/>
-          </a:xfrm>
-          <a:prstGeom prst="rect">
-            <a:avLst/>
-          </a:prstGeom>
-          <a:noFill/>
-        </p:spPr>
-        <p:txBody>
-          <a:bodyPr wrap="square" anchor="ctr"/>
-          <a:lstStyle/>
-          <a:p>
-            <a:r>
-              <a:rPr sz="1500" b="1" i="0">
-                <a:solidFill>
-                  <a:srgbClr val="095292"/>
-                </a:solidFill>
-                <a:latin typeface="Calibri"/>
-              </a:rPr>
-              <a:t>Redactar contrato de &gt;=3 operaciones.</a:t>
-            </a:r>
-          </a:p>
-        </p:txBody>
-      </p:sp>
-      <p:sp>
-        <p:nvSpPr>
-          <p:cNvPr id="9" name="Rounded Rectangle 8"/>
-          <p:cNvSpPr/>
-          <p:nvPr/>
-        </p:nvSpPr>
-        <p:spPr>
-          <a:xfrm>
-            <a:off x="457200" y="2697480"/>
-            <a:ext cx="11277295" cy="1051560"/>
-          </a:xfrm>
-          <a:prstGeom prst="roundRect">
-            <a:avLst>
-              <a:gd name="adj" fmla="val 12000"/>
-            </a:avLst>
-          </a:prstGeom>
-          <a:solidFill>
-            <a:srgbClr val="E8F4FA"/>
-          </a:solidFill>
-          <a:ln>
-            <a:noFill/>
-          </a:ln>
-        </p:spPr>
-        <p:style>
-          <a:lnRef idx="1">
-            <a:schemeClr val="accent1"/>
-          </a:lnRef>
-          <a:fillRef idx="3">
-            <a:schemeClr val="accent1"/>
-          </a:fillRef>
-          <a:effectRef idx="2">
-            <a:schemeClr val="accent1"/>
-          </a:effectRef>
-          <a:fontRef idx="minor">
-            <a:schemeClr val="lt1"/>
-          </a:fontRef>
-        </p:style>
-        <p:txBody>
-          <a:bodyPr rtlCol="0" anchor="ctr"/>
-          <a:lstStyle/>
-          <a:p>
-            <a:pPr algn="ctr"/>
-          </a:p>
-        </p:txBody>
-      </p:sp>
-      <p:sp>
-        <p:nvSpPr>
-          <p:cNvPr id="10" name="Rounded Rectangle 9"/>
-          <p:cNvSpPr/>
-          <p:nvPr/>
-        </p:nvSpPr>
-        <p:spPr>
-          <a:xfrm>
-            <a:off x="594360" y="3003804"/>
-            <a:ext cx="438912" cy="438912"/>
-          </a:xfrm>
-          <a:prstGeom prst="roundRect">
-            <a:avLst>
-              <a:gd name="adj" fmla="val 12000"/>
-            </a:avLst>
-          </a:prstGeom>
-          <a:solidFill>
-            <a:srgbClr val="095292"/>
-          </a:solidFill>
-          <a:ln>
-            <a:noFill/>
-          </a:ln>
-        </p:spPr>
-        <p:style>
-          <a:lnRef idx="1">
-            <a:schemeClr val="accent1"/>
-          </a:lnRef>
-          <a:fillRef idx="3">
-            <a:schemeClr val="accent1"/>
-          </a:fillRef>
-          <a:effectRef idx="2">
-            <a:schemeClr val="accent1"/>
-          </a:effectRef>
-          <a:fontRef idx="minor">
-            <a:schemeClr val="lt1"/>
-          </a:fontRef>
-        </p:style>
-        <p:txBody>
-          <a:bodyPr rtlCol="0" anchor="ctr"/>
-          <a:lstStyle/>
-          <a:p>
-            <a:pPr algn="ctr"/>
-          </a:p>
-        </p:txBody>
-      </p:sp>
-      <p:sp>
-        <p:nvSpPr>
-          <p:cNvPr id="11" name="TextBox 10"/>
-          <p:cNvSpPr txBox="1"/>
-          <p:nvPr/>
-        </p:nvSpPr>
-        <p:spPr>
-          <a:xfrm>
-            <a:off x="594360" y="3003804"/>
-            <a:ext cx="438912" cy="438912"/>
-          </a:xfrm>
-          <a:prstGeom prst="rect">
-            <a:avLst/>
-          </a:prstGeom>
-          <a:noFill/>
-        </p:spPr>
-        <p:txBody>
-          <a:bodyPr wrap="square" anchor="ctr"/>
-          <a:lstStyle/>
-          <a:p>
-            <a:pPr algn="ctr"/>
-            <a:r>
-              <a:rPr sz="1600" b="1" i="0">
-                <a:solidFill>
-                  <a:srgbClr val="FFFFFF"/>
-                </a:solidFill>
-                <a:latin typeface="Calibri"/>
-              </a:rPr>
-              <a:t>2</a:t>
-            </a:r>
-          </a:p>
-        </p:txBody>
-      </p:sp>
-      <p:sp>
-        <p:nvSpPr>
-          <p:cNvPr id="12" name="TextBox 11"/>
-          <p:cNvSpPr txBox="1"/>
-          <p:nvPr/>
-        </p:nvSpPr>
-        <p:spPr>
-          <a:xfrm>
-            <a:off x="1188720" y="2788920"/>
-            <a:ext cx="10271455" cy="886968"/>
-          </a:xfrm>
-          <a:prstGeom prst="rect">
-            <a:avLst/>
-          </a:prstGeom>
-          <a:noFill/>
-        </p:spPr>
-        <p:txBody>
-          <a:bodyPr wrap="square" anchor="ctr"/>
-          <a:lstStyle/>
-          <a:p>
-            <a:r>
-              <a:rPr sz="1500" b="1" i="0">
-                <a:solidFill>
-                  <a:srgbClr val="095292"/>
-                </a:solidFill>
-                <a:latin typeface="Calibri"/>
-              </a:rPr>
-              <a:t>Diagrama flujo app-&gt;BD (Excalidraw) opcional.</a:t>
-            </a:r>
-          </a:p>
-        </p:txBody>
-      </p:sp>
-      <p:sp>
-        <p:nvSpPr>
-          <p:cNvPr id="13" name="Rounded Rectangle 12"/>
-          <p:cNvSpPr/>
-          <p:nvPr/>
-        </p:nvSpPr>
-        <p:spPr>
-          <a:xfrm>
-            <a:off x="457200" y="3840480"/>
-            <a:ext cx="11277295" cy="1051560"/>
-          </a:xfrm>
-          <a:prstGeom prst="roundRect">
-            <a:avLst>
-              <a:gd name="adj" fmla="val 12000"/>
-            </a:avLst>
-          </a:prstGeom>
-          <a:solidFill>
-            <a:srgbClr val="F2F2F2"/>
-          </a:solidFill>
-          <a:ln>
-            <a:noFill/>
-          </a:ln>
-        </p:spPr>
-        <p:style>
-          <a:lnRef idx="1">
-            <a:schemeClr val="accent1"/>
-          </a:lnRef>
-          <a:fillRef idx="3">
-            <a:schemeClr val="accent1"/>
-          </a:fillRef>
-          <a:effectRef idx="2">
-            <a:schemeClr val="accent1"/>
-          </a:effectRef>
-          <a:fontRef idx="minor">
-            <a:schemeClr val="lt1"/>
-          </a:fontRef>
-        </p:style>
-        <p:txBody>
-          <a:bodyPr rtlCol="0" anchor="ctr"/>
-          <a:lstStyle/>
-          <a:p>
-            <a:pPr algn="ctr"/>
-          </a:p>
-        </p:txBody>
-      </p:sp>
-      <p:sp>
-        <p:nvSpPr>
-          <p:cNvPr id="14" name="Rounded Rectangle 13"/>
-          <p:cNvSpPr/>
-          <p:nvPr/>
-        </p:nvSpPr>
-        <p:spPr>
-          <a:xfrm>
-            <a:off x="594360" y="4146804"/>
-            <a:ext cx="438912" cy="438912"/>
-          </a:xfrm>
-          <a:prstGeom prst="roundRect">
-            <a:avLst>
-              <a:gd name="adj" fmla="val 12000"/>
-            </a:avLst>
-          </a:prstGeom>
-          <a:solidFill>
-            <a:srgbClr val="095292"/>
-          </a:solidFill>
-          <a:ln>
-            <a:noFill/>
-          </a:ln>
-        </p:spPr>
-        <p:style>
-          <a:lnRef idx="1">
-            <a:schemeClr val="accent1"/>
-          </a:lnRef>
-          <a:fillRef idx="3">
-            <a:schemeClr val="accent1"/>
-          </a:fillRef>
-          <a:effectRef idx="2">
-            <a:schemeClr val="accent1"/>
-          </a:effectRef>
-          <a:fontRef idx="minor">
-            <a:schemeClr val="lt1"/>
-          </a:fontRef>
-        </p:style>
-        <p:txBody>
-          <a:bodyPr rtlCol="0" anchor="ctr"/>
-          <a:lstStyle/>
-          <a:p>
-            <a:pPr algn="ctr"/>
-          </a:p>
-        </p:txBody>
-      </p:sp>
-      <p:sp>
-        <p:nvSpPr>
-          <p:cNvPr id="15" name="TextBox 14"/>
-          <p:cNvSpPr txBox="1"/>
-          <p:nvPr/>
-        </p:nvSpPr>
-        <p:spPr>
-          <a:xfrm>
-            <a:off x="594360" y="4146804"/>
-            <a:ext cx="438912" cy="438912"/>
-          </a:xfrm>
-          <a:prstGeom prst="rect">
-            <a:avLst/>
-          </a:prstGeom>
-          <a:noFill/>
-        </p:spPr>
-        <p:txBody>
-          <a:bodyPr wrap="square" anchor="ctr"/>
-          <a:lstStyle/>
-          <a:p>
-            <a:pPr algn="ctr"/>
-            <a:r>
-              <a:rPr sz="1600" b="1" i="0">
-                <a:solidFill>
-                  <a:srgbClr val="FFFFFF"/>
-                </a:solidFill>
-                <a:latin typeface="Calibri"/>
-              </a:rPr>
-              <a:t>3</a:t>
-            </a:r>
-          </a:p>
-        </p:txBody>
-      </p:sp>
-      <p:sp>
-        <p:nvSpPr>
-          <p:cNvPr id="16" name="TextBox 15"/>
-          <p:cNvSpPr txBox="1"/>
-          <p:nvPr/>
-        </p:nvSpPr>
-        <p:spPr>
-          <a:xfrm>
-            <a:off x="1188720" y="3931920"/>
-            <a:ext cx="10271455" cy="886968"/>
-          </a:xfrm>
-          <a:prstGeom prst="rect">
-            <a:avLst/>
-          </a:prstGeom>
-          <a:noFill/>
-        </p:spPr>
-        <p:txBody>
-          <a:bodyPr wrap="square" anchor="ctr"/>
-          <a:lstStyle/>
-          <a:p>
-            <a:r>
-              <a:rPr sz="1500" b="1" i="0">
-                <a:solidFill>
-                  <a:srgbClr val="095292"/>
-                </a:solidFill>
-                <a:latin typeface="Calibri"/>
-              </a:rPr>
-              <a:t>Outline presentacion 5-8 min + quien habla que.</a:t>
-            </a:r>
-          </a:p>
-        </p:txBody>
-      </p:sp>
-      <p:sp>
-        <p:nvSpPr>
-          <p:cNvPr id="17" name="Rounded Rectangle 16"/>
-          <p:cNvSpPr/>
-          <p:nvPr/>
-        </p:nvSpPr>
-        <p:spPr>
-          <a:xfrm>
-            <a:off x="457200" y="4983480"/>
-            <a:ext cx="11277295" cy="1051560"/>
-          </a:xfrm>
-          <a:prstGeom prst="roundRect">
-            <a:avLst>
-              <a:gd name="adj" fmla="val 12000"/>
-            </a:avLst>
-          </a:prstGeom>
-          <a:solidFill>
-            <a:srgbClr val="E8F4FA"/>
-          </a:solidFill>
-          <a:ln>
-            <a:noFill/>
-          </a:ln>
-        </p:spPr>
-        <p:style>
-          <a:lnRef idx="1">
-            <a:schemeClr val="accent1"/>
-          </a:lnRef>
-          <a:fillRef idx="3">
-            <a:schemeClr val="accent1"/>
-          </a:fillRef>
-          <a:effectRef idx="2">
-            <a:schemeClr val="accent1"/>
-          </a:effectRef>
-          <a:fontRef idx="minor">
-            <a:schemeClr val="lt1"/>
-          </a:fontRef>
-        </p:style>
-        <p:txBody>
-          <a:bodyPr rtlCol="0" anchor="ctr"/>
-          <a:lstStyle/>
-          <a:p>
-            <a:pPr algn="ctr"/>
-          </a:p>
-        </p:txBody>
-      </p:sp>
-      <p:sp>
-        <p:nvSpPr>
-          <p:cNvPr id="18" name="Rounded Rectangle 17"/>
-          <p:cNvSpPr/>
-          <p:nvPr/>
-        </p:nvSpPr>
-        <p:spPr>
-          <a:xfrm>
-            <a:off x="594360" y="5289804"/>
-            <a:ext cx="438912" cy="438912"/>
-          </a:xfrm>
-          <a:prstGeom prst="roundRect">
-            <a:avLst>
-              <a:gd name="adj" fmla="val 12000"/>
-            </a:avLst>
-          </a:prstGeom>
-          <a:solidFill>
-            <a:srgbClr val="095292"/>
-          </a:solidFill>
-          <a:ln>
-            <a:noFill/>
-          </a:ln>
-        </p:spPr>
-        <p:style>
-          <a:lnRef idx="1">
-            <a:schemeClr val="accent1"/>
-          </a:lnRef>
-          <a:fillRef idx="3">
-            <a:schemeClr val="accent1"/>
-          </a:fillRef>
-          <a:effectRef idx="2">
-            <a:schemeClr val="accent1"/>
-          </a:effectRef>
-          <a:fontRef idx="minor">
-            <a:schemeClr val="lt1"/>
-          </a:fontRef>
-        </p:style>
-        <p:txBody>
-          <a:bodyPr rtlCol="0" anchor="ctr"/>
-          <a:lstStyle/>
-          <a:p>
-            <a:pPr algn="ctr"/>
-          </a:p>
-        </p:txBody>
-      </p:sp>
-      <p:sp>
-        <p:nvSpPr>
-          <p:cNvPr id="19" name="TextBox 18"/>
-          <p:cNvSpPr txBox="1"/>
-          <p:nvPr/>
-        </p:nvSpPr>
-        <p:spPr>
-          <a:xfrm>
-            <a:off x="594360" y="5289804"/>
-            <a:ext cx="438912" cy="438912"/>
-          </a:xfrm>
-          <a:prstGeom prst="rect">
-            <a:avLst/>
-          </a:prstGeom>
-          <a:noFill/>
-        </p:spPr>
-        <p:txBody>
-          <a:bodyPr wrap="square" anchor="ctr"/>
-          <a:lstStyle/>
-          <a:p>
-            <a:pPr algn="ctr"/>
-            <a:r>
-              <a:rPr sz="1600" b="1" i="0">
-                <a:solidFill>
-                  <a:srgbClr val="FFFFFF"/>
-                </a:solidFill>
-                <a:latin typeface="Calibri"/>
-              </a:rPr>
-              <a:t>4</a:t>
-            </a:r>
-          </a:p>
-        </p:txBody>
-      </p:sp>
-      <p:sp>
-        <p:nvSpPr>
-          <p:cNvPr id="20" name="TextBox 19"/>
-          <p:cNvSpPr txBox="1"/>
-          <p:nvPr/>
-        </p:nvSpPr>
-        <p:spPr>
-          <a:xfrm>
-            <a:off x="1188720" y="5074920"/>
-            <a:ext cx="10271455" cy="886968"/>
-          </a:xfrm>
-          <a:prstGeom prst="rect">
-            <a:avLst/>
-          </a:prstGeom>
-          <a:noFill/>
-        </p:spPr>
-        <p:txBody>
-          <a:bodyPr wrap="square" anchor="ctr"/>
-          <a:lstStyle/>
-          <a:p>
-            <a:r>
-              <a:rPr sz="1500" b="1" i="0">
-                <a:solidFill>
-                  <a:srgbClr val="095292"/>
-                </a:solidFill>
-                <a:latin typeface="Calibri"/>
-              </a:rPr>
-              <a:t>Empaquetar borrador entrega final.</a:t>
-            </a:r>
-          </a:p>
-        </p:txBody>
-      </p:sp>
-      <p:sp>
-        <p:nvSpPr>
-          <p:cNvPr id="21" name="TextBox 20"/>
+          <a:bodyPr wrap="square">
+            <a:spAutoFit/>
+          </a:bodyPr>
+          <a:lstStyle/>
+          <a:p>
+            <a:pPr>
+              <a:spcAft>
+                <a:spcPts val="800"/>
+              </a:spcAft>
+            </a:pPr>
+            <a:r>
+              <a:rPr sz="2000" b="0" i="0">
+                <a:solidFill>
+                  <a:srgbClr val="333333"/>
+                </a:solidFill>
+                <a:latin typeface="Calibri"/>
+              </a:rPr>
+              <a:t>–   </a:t>
+            </a:r>
+            <a:r>
+              <a:rPr sz="2000" b="1" i="0">
+                <a:solidFill>
+                  <a:srgbClr val="333333"/>
+                </a:solidFill>
+                <a:latin typeface="Calibri"/>
+              </a:rPr>
+              <a:t>Por qué importa al PI:</a:t>
+            </a:r>
+            <a:r>
+              <a:rPr sz="2000" b="0" i="0">
+                <a:solidFill>
+                  <a:srgbClr val="333333"/>
+                </a:solidFill>
+                <a:latin typeface="Calibri"/>
+              </a:rPr>
+              <a:t> app llama contrato, no SQL suelto.</a:t>
+            </a:r>
+          </a:p>
+          <a:p>
+            <a:pPr>
+              <a:spcAft>
+                <a:spcPts val="800"/>
+              </a:spcAft>
+            </a:pPr>
+            <a:r>
+              <a:rPr sz="2000" b="0" i="0">
+                <a:solidFill>
+                  <a:srgbClr val="333333"/>
+                </a:solidFill>
+                <a:latin typeface="Calibri"/>
+              </a:rPr>
+              <a:t>–   Preparar sustentacion.</a:t>
+            </a:r>
+          </a:p>
+        </p:txBody>
+      </p:sp>
+      <p:sp>
+        <p:nvSpPr>
+          <p:cNvPr id="6" name="TextBox 5"/>
           <p:cNvSpPr txBox="1"/>
           <p:nvPr/>
         </p:nvSpPr>
@@ -11174,154 +10370,21 @@
                 </a:solidFill>
                 <a:latin typeface="Calibri"/>
               </a:rPr>
-              <a:t>Taller PI VetCare — pistas (checklist vacio)</a:t>
-            </a:r>
-          </a:p>
-        </p:txBody>
-      </p:sp>
-      <p:sp>
-        <p:nvSpPr>
-          <p:cNvPr id="5" name="Rounded Rectangle 4"/>
-          <p:cNvSpPr/>
-          <p:nvPr/>
-        </p:nvSpPr>
-        <p:spPr>
-          <a:xfrm>
-            <a:off x="457200" y="1261872"/>
-            <a:ext cx="11277295" cy="566928"/>
-          </a:xfrm>
-          <a:prstGeom prst="roundRect">
-            <a:avLst>
-              <a:gd name="adj" fmla="val 12000"/>
-            </a:avLst>
-          </a:prstGeom>
-          <a:solidFill>
-            <a:srgbClr val="F2F2F2"/>
-          </a:solidFill>
-          <a:ln>
-            <a:noFill/>
-          </a:ln>
-        </p:spPr>
-        <p:style>
-          <a:lnRef idx="1">
-            <a:schemeClr val="accent1"/>
-          </a:lnRef>
-          <a:fillRef idx="3">
-            <a:schemeClr val="accent1"/>
-          </a:fillRef>
-          <a:effectRef idx="2">
-            <a:schemeClr val="accent1"/>
-          </a:effectRef>
-          <a:fontRef idx="minor">
-            <a:schemeClr val="lt1"/>
-          </a:fontRef>
-        </p:style>
-        <p:txBody>
-          <a:bodyPr rtlCol="0" anchor="ctr"/>
-          <a:lstStyle/>
-          <a:p>
-            <a:pPr algn="ctr"/>
-          </a:p>
-        </p:txBody>
-      </p:sp>
-      <p:sp>
-        <p:nvSpPr>
-          <p:cNvPr id="6" name="Rectangle 5"/>
-          <p:cNvSpPr/>
-          <p:nvPr/>
-        </p:nvSpPr>
-        <p:spPr>
-          <a:xfrm>
-            <a:off x="640080" y="1408175"/>
-            <a:ext cx="274320" cy="274320"/>
-          </a:xfrm>
-          <a:prstGeom prst="rect">
-            <a:avLst/>
-          </a:prstGeom>
-          <a:solidFill>
-            <a:srgbClr val="FFFFFF"/>
-          </a:solidFill>
-          <a:ln>
-            <a:solidFill>
-              <a:srgbClr val="333333"/>
-            </a:solidFill>
-          </a:ln>
-        </p:spPr>
-        <p:style>
-          <a:lnRef idx="1">
-            <a:schemeClr val="accent1"/>
-          </a:lnRef>
-          <a:fillRef idx="3">
-            <a:schemeClr val="accent1"/>
-          </a:fillRef>
-          <a:effectRef idx="2">
-            <a:schemeClr val="accent1"/>
-          </a:effectRef>
-          <a:fontRef idx="minor">
-            <a:schemeClr val="lt1"/>
-          </a:fontRef>
-        </p:style>
-        <p:txBody>
-          <a:bodyPr rtlCol="0" anchor="ctr"/>
-          <a:lstStyle/>
-          <a:p>
-            <a:pPr algn="ctr"/>
-          </a:p>
-        </p:txBody>
-      </p:sp>
-      <p:sp>
-        <p:nvSpPr>
-          <p:cNvPr id="7" name="Rectangle 6"/>
-          <p:cNvSpPr/>
-          <p:nvPr/>
-        </p:nvSpPr>
-        <p:spPr>
-          <a:xfrm>
-            <a:off x="640080" y="1408175"/>
-            <a:ext cx="73152" cy="274320"/>
-          </a:xfrm>
-          <a:prstGeom prst="rect">
-            <a:avLst/>
-          </a:prstGeom>
-          <a:solidFill>
-            <a:srgbClr val="269CCB"/>
-          </a:solidFill>
-          <a:ln>
-            <a:noFill/>
-          </a:ln>
-        </p:spPr>
-        <p:style>
-          <a:lnRef idx="1">
-            <a:schemeClr val="accent1"/>
-          </a:lnRef>
-          <a:fillRef idx="3">
-            <a:schemeClr val="accent1"/>
-          </a:fillRef>
-          <a:effectRef idx="2">
-            <a:schemeClr val="accent1"/>
-          </a:effectRef>
-          <a:fontRef idx="minor">
-            <a:schemeClr val="lt1"/>
-          </a:fontRef>
-        </p:style>
-        <p:txBody>
-          <a:bodyPr rtlCol="0" anchor="ctr"/>
-          <a:lstStyle/>
-          <a:p>
-            <a:pPr algn="ctr"/>
-          </a:p>
-        </p:txBody>
-      </p:sp>
-      <p:sp>
-        <p:nvSpPr>
-          <p:cNvPr id="8" name="TextBox 7"/>
+              <a:t>Taller PI VetCare — objetivo y criterios</a:t>
+            </a:r>
+          </a:p>
+        </p:txBody>
+      </p:sp>
+      <p:sp>
+        <p:nvSpPr>
+          <p:cNvPr id="5" name="TextBox 4"/>
           <p:cNvSpPr txBox="1"/>
           <p:nvPr/>
         </p:nvSpPr>
         <p:spPr>
           <a:xfrm>
-            <a:off x="1097280" y="1353312"/>
-            <a:ext cx="10362895" cy="402336"/>
+            <a:off x="457200" y="1170432"/>
+            <a:ext cx="11277295" cy="5230368"/>
           </a:xfrm>
           <a:prstGeom prst="rect">
             <a:avLst/>
@@ -11329,354 +10392,185 @@
           <a:noFill/>
         </p:spPr>
         <p:txBody>
-          <a:bodyPr wrap="square" anchor="ctr"/>
-          <a:lstStyle/>
-          <a:p>
-            <a:r>
-              <a:rPr sz="1500" b="0" i="0">
+          <a:bodyPr wrap="square">
+            <a:spAutoFit/>
+          </a:bodyPr>
+          <a:lstStyle/>
+          <a:p>
+            <a:pPr>
+              <a:spcAft>
+                <a:spcPts val="800"/>
+              </a:spcAft>
+            </a:pPr>
+            <a:r>
+              <a:rPr sz="2000" b="0" i="0">
                 <a:solidFill>
                   <a:srgbClr val="333333"/>
                 </a:solidFill>
                 <a:latin typeface="Calibri"/>
               </a:rPr>
-              <a:t>□ &gt;=3 ops?</a:t>
-            </a:r>
-          </a:p>
-        </p:txBody>
-      </p:sp>
-      <p:sp>
-        <p:nvSpPr>
-          <p:cNvPr id="9" name="Rounded Rectangle 8"/>
-          <p:cNvSpPr/>
-          <p:nvPr/>
-        </p:nvSpPr>
-        <p:spPr>
-          <a:xfrm>
-            <a:off x="457200" y="1938528"/>
-            <a:ext cx="11277295" cy="566928"/>
-          </a:xfrm>
-          <a:prstGeom prst="roundRect">
-            <a:avLst>
-              <a:gd name="adj" fmla="val 12000"/>
-            </a:avLst>
-          </a:prstGeom>
-          <a:solidFill>
-            <a:srgbClr val="F2F2F2"/>
-          </a:solidFill>
-          <a:ln>
-            <a:noFill/>
-          </a:ln>
-        </p:spPr>
-        <p:style>
-          <a:lnRef idx="1">
-            <a:schemeClr val="accent1"/>
-          </a:lnRef>
-          <a:fillRef idx="3">
-            <a:schemeClr val="accent1"/>
-          </a:fillRef>
-          <a:effectRef idx="2">
-            <a:schemeClr val="accent1"/>
-          </a:effectRef>
-          <a:fontRef idx="minor">
-            <a:schemeClr val="lt1"/>
-          </a:fontRef>
-        </p:style>
-        <p:txBody>
-          <a:bodyPr rtlCol="0" anchor="ctr"/>
-          <a:lstStyle/>
-          <a:p>
-            <a:pPr algn="ctr"/>
-          </a:p>
-        </p:txBody>
-      </p:sp>
-      <p:sp>
-        <p:nvSpPr>
-          <p:cNvPr id="10" name="Rectangle 9"/>
-          <p:cNvSpPr/>
-          <p:nvPr/>
-        </p:nvSpPr>
-        <p:spPr>
-          <a:xfrm>
-            <a:off x="640080" y="2084832"/>
-            <a:ext cx="274320" cy="274320"/>
-          </a:xfrm>
-          <a:prstGeom prst="rect">
-            <a:avLst/>
-          </a:prstGeom>
-          <a:solidFill>
-            <a:srgbClr val="FFFFFF"/>
-          </a:solidFill>
-          <a:ln>
-            <a:solidFill>
-              <a:srgbClr val="333333"/>
-            </a:solidFill>
-          </a:ln>
-        </p:spPr>
-        <p:style>
-          <a:lnRef idx="1">
-            <a:schemeClr val="accent1"/>
-          </a:lnRef>
-          <a:fillRef idx="3">
-            <a:schemeClr val="accent1"/>
-          </a:fillRef>
-          <a:effectRef idx="2">
-            <a:schemeClr val="accent1"/>
-          </a:effectRef>
-          <a:fontRef idx="minor">
-            <a:schemeClr val="lt1"/>
-          </a:fontRef>
-        </p:style>
-        <p:txBody>
-          <a:bodyPr rtlCol="0" anchor="ctr"/>
-          <a:lstStyle/>
-          <a:p>
-            <a:pPr algn="ctr"/>
-          </a:p>
-        </p:txBody>
-      </p:sp>
-      <p:sp>
-        <p:nvSpPr>
-          <p:cNvPr id="11" name="Rectangle 10"/>
-          <p:cNvSpPr/>
-          <p:nvPr/>
-        </p:nvSpPr>
-        <p:spPr>
-          <a:xfrm>
-            <a:off x="640080" y="2084832"/>
-            <a:ext cx="73152" cy="274320"/>
-          </a:xfrm>
-          <a:prstGeom prst="rect">
-            <a:avLst/>
-          </a:prstGeom>
-          <a:solidFill>
-            <a:srgbClr val="269CCB"/>
-          </a:solidFill>
-          <a:ln>
-            <a:noFill/>
-          </a:ln>
-        </p:spPr>
-        <p:style>
-          <a:lnRef idx="1">
-            <a:schemeClr val="accent1"/>
-          </a:lnRef>
-          <a:fillRef idx="3">
-            <a:schemeClr val="accent1"/>
-          </a:fillRef>
-          <a:effectRef idx="2">
-            <a:schemeClr val="accent1"/>
-          </a:effectRef>
-          <a:fontRef idx="minor">
-            <a:schemeClr val="lt1"/>
-          </a:fontRef>
-        </p:style>
-        <p:txBody>
-          <a:bodyPr rtlCol="0" anchor="ctr"/>
-          <a:lstStyle/>
-          <a:p>
-            <a:pPr algn="ctr"/>
-          </a:p>
-        </p:txBody>
-      </p:sp>
-      <p:sp>
-        <p:nvSpPr>
-          <p:cNvPr id="12" name="TextBox 11"/>
-          <p:cNvSpPr txBox="1"/>
-          <p:nvPr/>
-        </p:nvSpPr>
-        <p:spPr>
-          <a:xfrm>
-            <a:off x="1097280" y="2029968"/>
-            <a:ext cx="10362895" cy="402336"/>
-          </a:xfrm>
-          <a:prstGeom prst="rect">
-            <a:avLst/>
-          </a:prstGeom>
-          <a:noFill/>
-        </p:spPr>
-        <p:txBody>
-          <a:bodyPr wrap="square" anchor="ctr"/>
-          <a:lstStyle/>
-          <a:p>
-            <a:r>
-              <a:rPr sz="1500" b="0" i="0">
+              <a:t>–   </a:t>
+            </a:r>
+            <a:r>
+              <a:rPr sz="2000" b="1" i="0">
                 <a:solidFill>
                   <a:srgbClr val="333333"/>
                 </a:solidFill>
                 <a:latin typeface="Calibri"/>
               </a:rPr>
-              <a:t>□ Errores esperados?</a:t>
-            </a:r>
-          </a:p>
-        </p:txBody>
-      </p:sp>
-      <p:sp>
-        <p:nvSpPr>
-          <p:cNvPr id="13" name="Rounded Rectangle 12"/>
-          <p:cNvSpPr/>
-          <p:nvPr/>
-        </p:nvSpPr>
-        <p:spPr>
-          <a:xfrm>
-            <a:off x="457200" y="2615184"/>
-            <a:ext cx="11277295" cy="566928"/>
-          </a:xfrm>
-          <a:prstGeom prst="roundRect">
-            <a:avLst>
-              <a:gd name="adj" fmla="val 12000"/>
-            </a:avLst>
-          </a:prstGeom>
-          <a:solidFill>
-            <a:srgbClr val="F2F2F2"/>
-          </a:solidFill>
-          <a:ln>
-            <a:noFill/>
-          </a:ln>
-        </p:spPr>
-        <p:style>
-          <a:lnRef idx="1">
-            <a:schemeClr val="accent1"/>
-          </a:lnRef>
-          <a:fillRef idx="3">
-            <a:schemeClr val="accent1"/>
-          </a:fillRef>
-          <a:effectRef idx="2">
-            <a:schemeClr val="accent1"/>
-          </a:effectRef>
-          <a:fontRef idx="minor">
-            <a:schemeClr val="lt1"/>
-          </a:fontRef>
-        </p:style>
-        <p:txBody>
-          <a:bodyPr rtlCol="0" anchor="ctr"/>
-          <a:lstStyle/>
-          <a:p>
-            <a:pPr algn="ctr"/>
-          </a:p>
-        </p:txBody>
-      </p:sp>
-      <p:sp>
-        <p:nvSpPr>
-          <p:cNvPr id="14" name="Rectangle 13"/>
-          <p:cNvSpPr/>
-          <p:nvPr/>
-        </p:nvSpPr>
-        <p:spPr>
-          <a:xfrm>
-            <a:off x="640080" y="2761488"/>
-            <a:ext cx="274320" cy="274320"/>
-          </a:xfrm>
-          <a:prstGeom prst="rect">
-            <a:avLst/>
-          </a:prstGeom>
-          <a:solidFill>
-            <a:srgbClr val="FFFFFF"/>
-          </a:solidFill>
-          <a:ln>
-            <a:solidFill>
-              <a:srgbClr val="333333"/>
-            </a:solidFill>
-          </a:ln>
-        </p:spPr>
-        <p:style>
-          <a:lnRef idx="1">
-            <a:schemeClr val="accent1"/>
-          </a:lnRef>
-          <a:fillRef idx="3">
-            <a:schemeClr val="accent1"/>
-          </a:fillRef>
-          <a:effectRef idx="2">
-            <a:schemeClr val="accent1"/>
-          </a:effectRef>
-          <a:fontRef idx="minor">
-            <a:schemeClr val="lt1"/>
-          </a:fontRef>
-        </p:style>
-        <p:txBody>
-          <a:bodyPr rtlCol="0" anchor="ctr"/>
-          <a:lstStyle/>
-          <a:p>
-            <a:pPr algn="ctr"/>
-          </a:p>
-        </p:txBody>
-      </p:sp>
-      <p:sp>
-        <p:nvSpPr>
-          <p:cNvPr id="15" name="Rectangle 14"/>
-          <p:cNvSpPr/>
-          <p:nvPr/>
-        </p:nvSpPr>
-        <p:spPr>
-          <a:xfrm>
-            <a:off x="640080" y="2761488"/>
-            <a:ext cx="73152" cy="274320"/>
-          </a:xfrm>
-          <a:prstGeom prst="rect">
-            <a:avLst/>
-          </a:prstGeom>
-          <a:solidFill>
-            <a:srgbClr val="269CCB"/>
-          </a:solidFill>
-          <a:ln>
-            <a:noFill/>
-          </a:ln>
-        </p:spPr>
-        <p:style>
-          <a:lnRef idx="1">
-            <a:schemeClr val="accent1"/>
-          </a:lnRef>
-          <a:fillRef idx="3">
-            <a:schemeClr val="accent1"/>
-          </a:fillRef>
-          <a:effectRef idx="2">
-            <a:schemeClr val="accent1"/>
-          </a:effectRef>
-          <a:fontRef idx="minor">
-            <a:schemeClr val="lt1"/>
-          </a:fontRef>
-        </p:style>
-        <p:txBody>
-          <a:bodyPr rtlCol="0" anchor="ctr"/>
-          <a:lstStyle/>
-          <a:p>
-            <a:pPr algn="ctr"/>
-          </a:p>
-        </p:txBody>
-      </p:sp>
-      <p:sp>
-        <p:nvSpPr>
-          <p:cNvPr id="16" name="TextBox 15"/>
-          <p:cNvSpPr txBox="1"/>
-          <p:nvPr/>
-        </p:nvSpPr>
-        <p:spPr>
-          <a:xfrm>
-            <a:off x="1097280" y="2706624"/>
-            <a:ext cx="10362895" cy="402336"/>
-          </a:xfrm>
-          <a:prstGeom prst="rect">
-            <a:avLst/>
-          </a:prstGeom>
-          <a:noFill/>
-        </p:spPr>
-        <p:txBody>
-          <a:bodyPr wrap="square" anchor="ctr"/>
-          <a:lstStyle/>
-          <a:p>
-            <a:r>
-              <a:rPr sz="1500" b="0" i="0">
+              <a:t>Objetivo:</a:t>
+            </a:r>
+            <a:r>
+              <a:rPr sz="2000" b="0" i="0">
                 <a:solidFill>
                   <a:srgbClr val="333333"/>
                 </a:solidFill>
                 <a:latin typeface="Calibri"/>
               </a:rPr>
-              <a:t>□ Outline completo?</a:t>
-            </a:r>
-          </a:p>
-        </p:txBody>
-      </p:sp>
-      <p:sp>
-        <p:nvSpPr>
-          <p:cNvPr id="17" name="TextBox 16"/>
+              <a:t> Contrato &gt;=3 ops + outline pitch 5-8 min.</a:t>
+            </a:r>
+          </a:p>
+          <a:p>
+            <a:pPr>
+              <a:spcAft>
+                <a:spcPts val="800"/>
+              </a:spcAft>
+            </a:pPr>
+            <a:r>
+              <a:rPr sz="2000" b="0" i="0">
+                <a:solidFill>
+                  <a:srgbClr val="333333"/>
+                </a:solidFill>
+                <a:latin typeface="Calibri"/>
+              </a:rPr>
+              <a:t>–   </a:t>
+            </a:r>
+            <a:r>
+              <a:rPr sz="2000" b="1" i="0">
+                <a:solidFill>
+                  <a:srgbClr val="333333"/>
+                </a:solidFill>
+                <a:latin typeface="Calibri"/>
+              </a:rPr>
+              <a:t>Exito:</a:t>
+            </a:r>
+            <a:r>
+              <a:rPr sz="2000" b="0" i="0">
+                <a:solidFill>
+                  <a:srgbClr val="333333"/>
+                </a:solidFill>
+                <a:latin typeface="Calibri"/>
+              </a:rPr>
+              <a:t> Contrato 3 ops.</a:t>
+            </a:r>
+          </a:p>
+          <a:p>
+            <a:pPr>
+              <a:spcAft>
+                <a:spcPts val="800"/>
+              </a:spcAft>
+            </a:pPr>
+            <a:r>
+              <a:rPr sz="2000" b="0" i="0">
+                <a:solidFill>
+                  <a:srgbClr val="333333"/>
+                </a:solidFill>
+                <a:latin typeface="Calibri"/>
+              </a:rPr>
+              <a:t>–   </a:t>
+            </a:r>
+            <a:r>
+              <a:rPr sz="2000" b="1" i="0">
+                <a:solidFill>
+                  <a:srgbClr val="333333"/>
+                </a:solidFill>
+                <a:latin typeface="Calibri"/>
+              </a:rPr>
+              <a:t>Exito:</a:t>
+            </a:r>
+            <a:r>
+              <a:rPr sz="2000" b="0" i="0">
+                <a:solidFill>
+                  <a:srgbClr val="333333"/>
+                </a:solidFill>
+                <a:latin typeface="Calibri"/>
+              </a:rPr>
+              <a:t> Parametros/errores/ejemplo.</a:t>
+            </a:r>
+          </a:p>
+          <a:p>
+            <a:pPr>
+              <a:spcAft>
+                <a:spcPts val="800"/>
+              </a:spcAft>
+            </a:pPr>
+            <a:r>
+              <a:rPr sz="2000" b="0" i="0">
+                <a:solidFill>
+                  <a:srgbClr val="333333"/>
+                </a:solidFill>
+                <a:latin typeface="Calibri"/>
+              </a:rPr>
+              <a:t>–   </a:t>
+            </a:r>
+            <a:r>
+              <a:rPr sz="2000" b="1" i="0">
+                <a:solidFill>
+                  <a:srgbClr val="333333"/>
+                </a:solidFill>
+                <a:latin typeface="Calibri"/>
+              </a:rPr>
+              <a:t>Exito:</a:t>
+            </a:r>
+            <a:r>
+              <a:rPr sz="2000" b="0" i="0">
+                <a:solidFill>
+                  <a:srgbClr val="333333"/>
+                </a:solidFill>
+                <a:latin typeface="Calibri"/>
+              </a:rPr>
+              <a:t> Outline pitch.</a:t>
+            </a:r>
+          </a:p>
+          <a:p>
+            <a:pPr>
+              <a:spcAft>
+                <a:spcPts val="800"/>
+              </a:spcAft>
+            </a:pPr>
+            <a:r>
+              <a:rPr sz="2000" b="0" i="0">
+                <a:solidFill>
+                  <a:srgbClr val="333333"/>
+                </a:solidFill>
+                <a:latin typeface="Calibri"/>
+              </a:rPr>
+              <a:t>–   </a:t>
+            </a:r>
+            <a:r>
+              <a:rPr sz="2000" b="1" i="0">
+                <a:solidFill>
+                  <a:srgbClr val="333333"/>
+                </a:solidFill>
+                <a:latin typeface="Calibri"/>
+              </a:rPr>
+              <a:t>Exito:</a:t>
+            </a:r>
+            <a:r>
+              <a:rPr sz="2000" b="0" i="0">
+                <a:solidFill>
+                  <a:srgbClr val="333333"/>
+                </a:solidFill>
+                <a:latin typeface="Calibri"/>
+              </a:rPr>
+              <a:t> Borrador final.</a:t>
+            </a:r>
+          </a:p>
+        </p:txBody>
+      </p:sp>
+      <p:sp>
+        <p:nvSpPr>
+          <p:cNvPr id="6" name="TextBox 5"/>
           <p:cNvSpPr txBox="1"/>
           <p:nvPr/>
         </p:nvSpPr>
@@ -11850,7 +10744,7 @@
                 </a:solidFill>
                 <a:latin typeface="Calibri"/>
               </a:rPr>
-              <a:t>Criterios de exito / entregable</a:t>
+              <a:t>Taller PI VetCare — escenario / datos de partida</a:t>
             </a:r>
           </a:p>
         </p:txBody>
@@ -11889,107 +10783,7 @@
                 </a:solidFill>
                 <a:latin typeface="Calibri"/>
               </a:rPr>
-              <a:t>–   </a:t>
-            </a:r>
-            <a:r>
-              <a:rPr sz="2000" b="1" i="0">
-                <a:solidFill>
-                  <a:srgbClr val="333333"/>
-                </a:solidFill>
-                <a:latin typeface="Calibri"/>
-              </a:rPr>
-              <a:t>Entregable:</a:t>
-            </a:r>
-            <a:r>
-              <a:rPr sz="2000" b="0" i="0">
-                <a:solidFill>
-                  <a:srgbClr val="333333"/>
-                </a:solidFill>
-                <a:latin typeface="Calibri"/>
-              </a:rPr>
-              <a:t> Contrato app&lt;-&gt;BD + outline de slides de sustentacion (5-8 min)</a:t>
-            </a:r>
-          </a:p>
-          <a:p>
-            <a:pPr>
-              <a:spcAft>
-                <a:spcPts val="800"/>
-              </a:spcAft>
-            </a:pPr>
-            <a:r>
-              <a:rPr sz="2000" b="0" i="0">
-                <a:solidFill>
-                  <a:srgbClr val="333333"/>
-                </a:solidFill>
-                <a:latin typeface="Calibri"/>
-              </a:rPr>
-              <a:t>–   Evidencia: el SQL y su salida quedan guardados en cada pregunta de la plataforma del curso.</a:t>
-            </a:r>
-          </a:p>
-          <a:p>
-            <a:pPr>
-              <a:spcAft>
-                <a:spcPts val="800"/>
-              </a:spcAft>
-            </a:pPr>
-            <a:r>
-              <a:rPr sz="2000" b="0" i="0">
-                <a:solidFill>
-                  <a:srgbClr val="333333"/>
-                </a:solidFill>
-                <a:latin typeface="Calibri"/>
-              </a:rPr>
-              <a:t>–   Conserva copia en tu carpeta del PI (los .sql que pide el entregable).</a:t>
-            </a:r>
-          </a:p>
-          <a:p>
-            <a:pPr>
-              <a:spcAft>
-                <a:spcPts val="800"/>
-              </a:spcAft>
-            </a:pPr>
-            <a:r>
-              <a:rPr sz="2000" b="0" i="0">
-                <a:solidFill>
-                  <a:srgbClr val="333333"/>
-                </a:solidFill>
-                <a:latin typeface="Calibri"/>
-              </a:rPr>
-              <a:t>–   Actualizar checklist PI (que criterio de rubrica avanzo).</a:t>
-            </a:r>
-          </a:p>
-          <a:p>
-            <a:pPr>
-              <a:spcAft>
-                <a:spcPts val="800"/>
-              </a:spcAft>
-            </a:pPr>
-            <a:r>
-              <a:rPr sz="2000" b="0" i="0">
-                <a:solidFill>
-                  <a:srgbClr val="333333"/>
-                </a:solidFill>
-                <a:latin typeface="Calibri"/>
-              </a:rPr>
-              <a:t>–   </a:t>
-            </a:r>
-            <a:r>
-              <a:rPr sz="2000" b="1" i="0">
-                <a:solidFill>
-                  <a:srgbClr val="333333"/>
-                </a:solidFill>
-                <a:latin typeface="Calibri"/>
-              </a:rPr>
-              <a:t>Entrega en la plataforma del curso</a:t>
-            </a:r>
-            <a:r>
-              <a:rPr sz="2000" b="0" i="0">
-                <a:solidFill>
-                  <a:srgbClr val="333333"/>
-                </a:solidFill>
-                <a:latin typeface="Calibri"/>
-              </a:rPr>
-              <a:t> — en la fecha que indique el docente.</a:t>
+              <a:t>–   Plantilla sp_agendar_cita / consulta / facturar.</a:t>
             </a:r>
           </a:p>
         </p:txBody>
@@ -13022,7 +11816,7 @@
                 </a:solidFill>
                 <a:latin typeface="Calibri"/>
               </a:rPr>
-              <a:t>Para el PI esta semana</a:t>
+              <a:t>Taller PI VetCare — pasos guiados</a:t>
             </a:r>
           </a:p>
         </p:txBody>
@@ -13035,7 +11829,162 @@
         </p:nvSpPr>
         <p:spPr>
           <a:xfrm>
-            <a:off x="457200" y="1261872"/>
+            <a:off x="457200" y="1554480"/>
+            <a:ext cx="11277295" cy="1051560"/>
+          </a:xfrm>
+          <a:prstGeom prst="roundRect">
+            <a:avLst>
+              <a:gd name="adj" fmla="val 12000"/>
+            </a:avLst>
+          </a:prstGeom>
+          <a:solidFill>
+            <a:srgbClr val="F2F2F2"/>
+          </a:solidFill>
+          <a:ln>
+            <a:noFill/>
+          </a:ln>
+        </p:spPr>
+        <p:style>
+          <a:lnRef idx="1">
+            <a:schemeClr val="accent1"/>
+          </a:lnRef>
+          <a:fillRef idx="3">
+            <a:schemeClr val="accent1"/>
+          </a:fillRef>
+          <a:effectRef idx="2">
+            <a:schemeClr val="accent1"/>
+          </a:effectRef>
+          <a:fontRef idx="minor">
+            <a:schemeClr val="lt1"/>
+          </a:fontRef>
+        </p:style>
+        <p:txBody>
+          <a:bodyPr rtlCol="0" anchor="ctr"/>
+          <a:lstStyle/>
+          <a:p>
+            <a:pPr algn="ctr"/>
+          </a:p>
+        </p:txBody>
+      </p:sp>
+      <p:sp>
+        <p:nvSpPr>
+          <p:cNvPr id="6" name="Rounded Rectangle 5"/>
+          <p:cNvSpPr/>
+          <p:nvPr/>
+        </p:nvSpPr>
+        <p:spPr>
+          <a:xfrm>
+            <a:off x="594360" y="1860804"/>
+            <a:ext cx="438912" cy="438912"/>
+          </a:xfrm>
+          <a:prstGeom prst="roundRect">
+            <a:avLst>
+              <a:gd name="adj" fmla="val 12000"/>
+            </a:avLst>
+          </a:prstGeom>
+          <a:solidFill>
+            <a:srgbClr val="095292"/>
+          </a:solidFill>
+          <a:ln>
+            <a:noFill/>
+          </a:ln>
+        </p:spPr>
+        <p:style>
+          <a:lnRef idx="1">
+            <a:schemeClr val="accent1"/>
+          </a:lnRef>
+          <a:fillRef idx="3">
+            <a:schemeClr val="accent1"/>
+          </a:fillRef>
+          <a:effectRef idx="2">
+            <a:schemeClr val="accent1"/>
+          </a:effectRef>
+          <a:fontRef idx="minor">
+            <a:schemeClr val="lt1"/>
+          </a:fontRef>
+        </p:style>
+        <p:txBody>
+          <a:bodyPr rtlCol="0" anchor="ctr"/>
+          <a:lstStyle/>
+          <a:p>
+            <a:pPr algn="ctr"/>
+          </a:p>
+        </p:txBody>
+      </p:sp>
+      <p:sp>
+        <p:nvSpPr>
+          <p:cNvPr id="7" name="TextBox 6"/>
+          <p:cNvSpPr txBox="1"/>
+          <p:nvPr/>
+        </p:nvSpPr>
+        <p:spPr>
+          <a:xfrm>
+            <a:off x="594360" y="1860804"/>
+            <a:ext cx="438912" cy="438912"/>
+          </a:xfrm>
+          <a:prstGeom prst="rect">
+            <a:avLst/>
+          </a:prstGeom>
+          <a:noFill/>
+        </p:spPr>
+        <p:txBody>
+          <a:bodyPr wrap="square" anchor="ctr"/>
+          <a:lstStyle/>
+          <a:p>
+            <a:pPr algn="ctr"/>
+            <a:r>
+              <a:rPr sz="1600" b="1" i="0">
+                <a:solidFill>
+                  <a:srgbClr val="FFFFFF"/>
+                </a:solidFill>
+                <a:latin typeface="Calibri"/>
+              </a:rPr>
+              <a:t>1</a:t>
+            </a:r>
+          </a:p>
+        </p:txBody>
+      </p:sp>
+      <p:sp>
+        <p:nvSpPr>
+          <p:cNvPr id="8" name="TextBox 7"/>
+          <p:cNvSpPr txBox="1"/>
+          <p:nvPr/>
+        </p:nvSpPr>
+        <p:spPr>
+          <a:xfrm>
+            <a:off x="1188720" y="1645920"/>
+            <a:ext cx="10271455" cy="886968"/>
+          </a:xfrm>
+          <a:prstGeom prst="rect">
+            <a:avLst/>
+          </a:prstGeom>
+          <a:noFill/>
+        </p:spPr>
+        <p:txBody>
+          <a:bodyPr wrap="square" anchor="ctr"/>
+          <a:lstStyle/>
+          <a:p>
+            <a:r>
+              <a:rPr sz="1500" b="1" i="0">
+                <a:solidFill>
+                  <a:srgbClr val="095292"/>
+                </a:solidFill>
+                <a:latin typeface="Calibri"/>
+              </a:rPr>
+              <a:t>Redactar contrato de &gt;=3 operaciones.</a:t>
+            </a:r>
+          </a:p>
+        </p:txBody>
+      </p:sp>
+      <p:sp>
+        <p:nvSpPr>
+          <p:cNvPr id="9" name="Rounded Rectangle 8"/>
+          <p:cNvSpPr/>
+          <p:nvPr/>
+        </p:nvSpPr>
+        <p:spPr>
+          <a:xfrm>
+            <a:off x="457200" y="2697480"/>
             <a:ext cx="11277295" cy="1051560"/>
           </a:xfrm>
           <a:prstGeom prst="roundRect">
@@ -13074,20 +12023,22 @@
       </p:sp>
       <p:sp>
         <p:nvSpPr>
-          <p:cNvPr id="6" name="Rectangle 5"/>
+          <p:cNvPr id="10" name="Rounded Rectangle 9"/>
           <p:cNvSpPr/>
           <p:nvPr/>
         </p:nvSpPr>
         <p:spPr>
           <a:xfrm>
-            <a:off x="457200" y="1261872"/>
-            <a:ext cx="128016" cy="1051560"/>
-          </a:xfrm>
-          <a:prstGeom prst="rect">
-            <a:avLst/>
+            <a:off x="594360" y="3003804"/>
+            <a:ext cx="438912" cy="438912"/>
+          </a:xfrm>
+          <a:prstGeom prst="roundRect">
+            <a:avLst>
+              <a:gd name="adj" fmla="val 12000"/>
+            </a:avLst>
           </a:prstGeom>
           <a:solidFill>
-            <a:srgbClr val="269CCB"/>
+            <a:srgbClr val="095292"/>
           </a:solidFill>
           <a:ln>
             <a:noFill/>
@@ -13117,14 +12068,14 @@
       </p:sp>
       <p:sp>
         <p:nvSpPr>
-          <p:cNvPr id="7" name="TextBox 6"/>
+          <p:cNvPr id="11" name="TextBox 10"/>
           <p:cNvSpPr txBox="1"/>
           <p:nvPr/>
         </p:nvSpPr>
         <p:spPr>
           <a:xfrm>
-            <a:off x="777240" y="1399031"/>
-            <a:ext cx="10774375" cy="822959"/>
+            <a:off x="594360" y="3003804"/>
+            <a:ext cx="438912" cy="438912"/>
           </a:xfrm>
           <a:prstGeom prst="rect">
             <a:avLst/>
@@ -13132,48 +12083,63 @@
           <a:noFill/>
         </p:spPr>
         <p:txBody>
-          <a:bodyPr wrap="square">
-            <a:spAutoFit/>
-          </a:bodyPr>
-          <a:lstStyle/>
-          <a:p>
-            <a:r>
-              <a:rPr sz="1200" b="1" i="0">
-                <a:solidFill>
-                  <a:srgbClr val="269CCB"/>
-                </a:solidFill>
-                <a:latin typeface="Calibri"/>
-              </a:rPr>
-              <a:t>Info</a:t>
-            </a:r>
-          </a:p>
-          <a:p>
-            <a:pPr>
-              <a:spcBef>
-                <a:spcPts val="400"/>
-              </a:spcBef>
-            </a:pPr>
-            <a:r>
-              <a:rPr sz="1400" b="0" i="0">
-                <a:solidFill>
-                  <a:srgbClr val="333333"/>
-                </a:solidFill>
-                <a:latin typeface="Calibri"/>
-              </a:rPr>
-              <a:t>Hito: Contrato integracion + preparacion de entrega/sustentacion</a:t>
-            </a:r>
-          </a:p>
-        </p:txBody>
-      </p:sp>
-      <p:sp>
-        <p:nvSpPr>
-          <p:cNvPr id="8" name="Rounded Rectangle 7"/>
+          <a:bodyPr wrap="square" anchor="ctr"/>
+          <a:lstStyle/>
+          <a:p>
+            <a:pPr algn="ctr"/>
+            <a:r>
+              <a:rPr sz="1600" b="1" i="0">
+                <a:solidFill>
+                  <a:srgbClr val="FFFFFF"/>
+                </a:solidFill>
+                <a:latin typeface="Calibri"/>
+              </a:rPr>
+              <a:t>2</a:t>
+            </a:r>
+          </a:p>
+        </p:txBody>
+      </p:sp>
+      <p:sp>
+        <p:nvSpPr>
+          <p:cNvPr id="12" name="TextBox 11"/>
+          <p:cNvSpPr txBox="1"/>
+          <p:nvPr/>
+        </p:nvSpPr>
+        <p:spPr>
+          <a:xfrm>
+            <a:off x="1188720" y="2788920"/>
+            <a:ext cx="10271455" cy="886968"/>
+          </a:xfrm>
+          <a:prstGeom prst="rect">
+            <a:avLst/>
+          </a:prstGeom>
+          <a:noFill/>
+        </p:spPr>
+        <p:txBody>
+          <a:bodyPr wrap="square" anchor="ctr"/>
+          <a:lstStyle/>
+          <a:p>
+            <a:r>
+              <a:rPr sz="1500" b="1" i="0">
+                <a:solidFill>
+                  <a:srgbClr val="095292"/>
+                </a:solidFill>
+                <a:latin typeface="Calibri"/>
+              </a:rPr>
+              <a:t>Diagrama flujo app-&gt;BD (Excalidraw) opcional.</a:t>
+            </a:r>
+          </a:p>
+        </p:txBody>
+      </p:sp>
+      <p:sp>
+        <p:nvSpPr>
+          <p:cNvPr id="13" name="Rounded Rectangle 12"/>
           <p:cNvSpPr/>
           <p:nvPr/>
         </p:nvSpPr>
         <p:spPr>
           <a:xfrm>
-            <a:off x="457200" y="2478024"/>
+            <a:off x="457200" y="3840480"/>
             <a:ext cx="11277295" cy="1051560"/>
           </a:xfrm>
           <a:prstGeom prst="roundRect">
@@ -13182,7 +12148,7 @@
             </a:avLst>
           </a:prstGeom>
           <a:solidFill>
-            <a:srgbClr val="FFF8E1"/>
+            <a:srgbClr val="F2F2F2"/>
           </a:solidFill>
           <a:ln>
             <a:noFill/>
@@ -13212,20 +12178,22 @@
       </p:sp>
       <p:sp>
         <p:nvSpPr>
-          <p:cNvPr id="9" name="Rectangle 8"/>
+          <p:cNvPr id="14" name="Rounded Rectangle 13"/>
           <p:cNvSpPr/>
           <p:nvPr/>
         </p:nvSpPr>
         <p:spPr>
           <a:xfrm>
-            <a:off x="457200" y="2478024"/>
-            <a:ext cx="128016" cy="1051560"/>
-          </a:xfrm>
-          <a:prstGeom prst="rect">
-            <a:avLst/>
+            <a:off x="594360" y="4146804"/>
+            <a:ext cx="438912" cy="438912"/>
+          </a:xfrm>
+          <a:prstGeom prst="roundRect">
+            <a:avLst>
+              <a:gd name="adj" fmla="val 12000"/>
+            </a:avLst>
           </a:prstGeom>
           <a:solidFill>
-            <a:srgbClr val="FFD000"/>
+            <a:srgbClr val="095292"/>
           </a:solidFill>
           <a:ln>
             <a:noFill/>
@@ -13255,14 +12223,14 @@
       </p:sp>
       <p:sp>
         <p:nvSpPr>
-          <p:cNvPr id="10" name="TextBox 9"/>
+          <p:cNvPr id="15" name="TextBox 14"/>
           <p:cNvSpPr txBox="1"/>
           <p:nvPr/>
         </p:nvSpPr>
         <p:spPr>
           <a:xfrm>
-            <a:off x="777240" y="2615184"/>
-            <a:ext cx="10774375" cy="822959"/>
+            <a:off x="594360" y="4146804"/>
+            <a:ext cx="438912" cy="438912"/>
           </a:xfrm>
           <a:prstGeom prst="rect">
             <a:avLst/>
@@ -13270,48 +12238,63 @@
           <a:noFill/>
         </p:spPr>
         <p:txBody>
-          <a:bodyPr wrap="square">
-            <a:spAutoFit/>
-          </a:bodyPr>
-          <a:lstStyle/>
-          <a:p>
-            <a:r>
-              <a:rPr sz="1200" b="1" i="0">
-                <a:solidFill>
-                  <a:srgbClr val="FFD000"/>
-                </a:solidFill>
-                <a:latin typeface="Calibri"/>
-              </a:rPr>
-              <a:t>Aclaración</a:t>
-            </a:r>
-          </a:p>
-          <a:p>
-            <a:pPr>
-              <a:spcBef>
-                <a:spcPts val="400"/>
-              </a:spcBef>
-            </a:pPr>
-            <a:r>
-              <a:rPr sz="1400" b="0" i="0">
-                <a:solidFill>
-                  <a:srgbClr val="333333"/>
-                </a:solidFill>
-                <a:latin typeface="Calibri"/>
-              </a:rPr>
-              <a:t>Enunciado completo: Clases/Proyecto Integrador/ (VetCare DB).</a:t>
-            </a:r>
-          </a:p>
-        </p:txBody>
-      </p:sp>
-      <p:sp>
-        <p:nvSpPr>
-          <p:cNvPr id="11" name="Rounded Rectangle 10"/>
+          <a:bodyPr wrap="square" anchor="ctr"/>
+          <a:lstStyle/>
+          <a:p>
+            <a:pPr algn="ctr"/>
+            <a:r>
+              <a:rPr sz="1600" b="1" i="0">
+                <a:solidFill>
+                  <a:srgbClr val="FFFFFF"/>
+                </a:solidFill>
+                <a:latin typeface="Calibri"/>
+              </a:rPr>
+              <a:t>3</a:t>
+            </a:r>
+          </a:p>
+        </p:txBody>
+      </p:sp>
+      <p:sp>
+        <p:nvSpPr>
+          <p:cNvPr id="16" name="TextBox 15"/>
+          <p:cNvSpPr txBox="1"/>
+          <p:nvPr/>
+        </p:nvSpPr>
+        <p:spPr>
+          <a:xfrm>
+            <a:off x="1188720" y="3931920"/>
+            <a:ext cx="10271455" cy="886968"/>
+          </a:xfrm>
+          <a:prstGeom prst="rect">
+            <a:avLst/>
+          </a:prstGeom>
+          <a:noFill/>
+        </p:spPr>
+        <p:txBody>
+          <a:bodyPr wrap="square" anchor="ctr"/>
+          <a:lstStyle/>
+          <a:p>
+            <a:r>
+              <a:rPr sz="1500" b="1" i="0">
+                <a:solidFill>
+                  <a:srgbClr val="095292"/>
+                </a:solidFill>
+                <a:latin typeface="Calibri"/>
+              </a:rPr>
+              <a:t>Outline presentacion 5-8 min + quien habla que.</a:t>
+            </a:r>
+          </a:p>
+        </p:txBody>
+      </p:sp>
+      <p:sp>
+        <p:nvSpPr>
+          <p:cNvPr id="17" name="Rounded Rectangle 16"/>
           <p:cNvSpPr/>
           <p:nvPr/>
         </p:nvSpPr>
         <p:spPr>
           <a:xfrm>
-            <a:off x="457200" y="3694176"/>
+            <a:off x="457200" y="4983480"/>
             <a:ext cx="11277295" cy="1051560"/>
           </a:xfrm>
           <a:prstGeom prst="roundRect">
@@ -13320,7 +12303,7 @@
             </a:avLst>
           </a:prstGeom>
           <a:solidFill>
-            <a:srgbClr val="FBE4E4"/>
+            <a:srgbClr val="E8F4FA"/>
           </a:solidFill>
           <a:ln>
             <a:noFill/>
@@ -13350,20 +12333,22 @@
       </p:sp>
       <p:sp>
         <p:nvSpPr>
-          <p:cNvPr id="12" name="Rectangle 11"/>
+          <p:cNvPr id="18" name="Rounded Rectangle 17"/>
           <p:cNvSpPr/>
           <p:nvPr/>
         </p:nvSpPr>
         <p:spPr>
           <a:xfrm>
-            <a:off x="457200" y="3694176"/>
-            <a:ext cx="128016" cy="1051560"/>
-          </a:xfrm>
-          <a:prstGeom prst="rect">
-            <a:avLst/>
+            <a:off x="594360" y="5289804"/>
+            <a:ext cx="438912" cy="438912"/>
+          </a:xfrm>
+          <a:prstGeom prst="roundRect">
+            <a:avLst>
+              <a:gd name="adj" fmla="val 12000"/>
+            </a:avLst>
           </a:prstGeom>
           <a:solidFill>
-            <a:srgbClr val="A02030"/>
+            <a:srgbClr val="095292"/>
           </a:solidFill>
           <a:ln>
             <a:noFill/>
@@ -13393,14 +12378,14 @@
       </p:sp>
       <p:sp>
         <p:nvSpPr>
-          <p:cNvPr id="13" name="TextBox 12"/>
+          <p:cNvPr id="19" name="TextBox 18"/>
           <p:cNvSpPr txBox="1"/>
           <p:nvPr/>
         </p:nvSpPr>
         <p:spPr>
           <a:xfrm>
-            <a:off x="777240" y="3831336"/>
-            <a:ext cx="10774375" cy="822959"/>
+            <a:off x="594360" y="5289804"/>
+            <a:ext cx="438912" cy="438912"/>
           </a:xfrm>
           <a:prstGeom prst="rect">
             <a:avLst/>
@@ -13408,42 +12393,57 @@
           <a:noFill/>
         </p:spPr>
         <p:txBody>
-          <a:bodyPr wrap="square">
-            <a:spAutoFit/>
-          </a:bodyPr>
-          <a:lstStyle/>
-          <a:p>
-            <a:r>
-              <a:rPr sz="1200" b="1" i="0">
-                <a:solidFill>
-                  <a:srgbClr val="A02030"/>
-                </a:solidFill>
-                <a:latin typeface="Calibri"/>
-              </a:rPr>
-              <a:t>Atención</a:t>
-            </a:r>
-          </a:p>
-          <a:p>
-            <a:pPr>
-              <a:spcBef>
-                <a:spcPts val="400"/>
-              </a:spcBef>
-            </a:pPr>
-            <a:r>
-              <a:rPr sz="1400" b="0" i="0">
-                <a:solidFill>
-                  <a:srgbClr val="333333"/>
-                </a:solidFill>
-                <a:latin typeface="Calibri"/>
-              </a:rPr>
-              <a:t>Si el docente asigna taller esta semana, él indica el canal y la fecha.</a:t>
-            </a:r>
-          </a:p>
-        </p:txBody>
-      </p:sp>
-      <p:sp>
-        <p:nvSpPr>
-          <p:cNvPr id="14" name="TextBox 13"/>
+          <a:bodyPr wrap="square" anchor="ctr"/>
+          <a:lstStyle/>
+          <a:p>
+            <a:pPr algn="ctr"/>
+            <a:r>
+              <a:rPr sz="1600" b="1" i="0">
+                <a:solidFill>
+                  <a:srgbClr val="FFFFFF"/>
+                </a:solidFill>
+                <a:latin typeface="Calibri"/>
+              </a:rPr>
+              <a:t>4</a:t>
+            </a:r>
+          </a:p>
+        </p:txBody>
+      </p:sp>
+      <p:sp>
+        <p:nvSpPr>
+          <p:cNvPr id="20" name="TextBox 19"/>
+          <p:cNvSpPr txBox="1"/>
+          <p:nvPr/>
+        </p:nvSpPr>
+        <p:spPr>
+          <a:xfrm>
+            <a:off x="1188720" y="5074920"/>
+            <a:ext cx="10271455" cy="886968"/>
+          </a:xfrm>
+          <a:prstGeom prst="rect">
+            <a:avLst/>
+          </a:prstGeom>
+          <a:noFill/>
+        </p:spPr>
+        <p:txBody>
+          <a:bodyPr wrap="square" anchor="ctr"/>
+          <a:lstStyle/>
+          <a:p>
+            <a:r>
+              <a:rPr sz="1500" b="1" i="0">
+                <a:solidFill>
+                  <a:srgbClr val="095292"/>
+                </a:solidFill>
+                <a:latin typeface="Calibri"/>
+              </a:rPr>
+              <a:t>Empaquetar borrador entrega final.</a:t>
+            </a:r>
+          </a:p>
+        </p:txBody>
+      </p:sp>
+      <p:sp>
+        <p:nvSpPr>
+          <p:cNvPr id="21" name="TextBox 20"/>
           <p:cNvSpPr txBox="1"/>
           <p:nvPr/>
         </p:nvSpPr>
@@ -13511,6 +12511,1597 @@
         <p:spPr>
           <a:xfrm>
             <a:off x="0" y="0"/>
+            <a:ext cx="12191695" cy="960120"/>
+          </a:xfrm>
+          <a:prstGeom prst="rect">
+            <a:avLst/>
+          </a:prstGeom>
+          <a:solidFill>
+            <a:srgbClr val="095292"/>
+          </a:solidFill>
+          <a:ln>
+            <a:noFill/>
+          </a:ln>
+        </p:spPr>
+        <p:style>
+          <a:lnRef idx="1">
+            <a:schemeClr val="accent1"/>
+          </a:lnRef>
+          <a:fillRef idx="3">
+            <a:schemeClr val="accent1"/>
+          </a:fillRef>
+          <a:effectRef idx="2">
+            <a:schemeClr val="accent1"/>
+          </a:effectRef>
+          <a:fontRef idx="minor">
+            <a:schemeClr val="lt1"/>
+          </a:fontRef>
+        </p:style>
+        <p:txBody>
+          <a:bodyPr rtlCol="0" anchor="ctr"/>
+          <a:lstStyle/>
+          <a:p>
+            <a:pPr algn="ctr"/>
+          </a:p>
+        </p:txBody>
+      </p:sp>
+      <p:sp>
+        <p:nvSpPr>
+          <p:cNvPr id="3" name="Rectangle 2"/>
+          <p:cNvSpPr/>
+          <p:nvPr/>
+        </p:nvSpPr>
+        <p:spPr>
+          <a:xfrm>
+            <a:off x="0" y="960120"/>
+            <a:ext cx="12191695" cy="41148"/>
+          </a:xfrm>
+          <a:prstGeom prst="rect">
+            <a:avLst/>
+          </a:prstGeom>
+          <a:solidFill>
+            <a:srgbClr val="FFD000"/>
+          </a:solidFill>
+          <a:ln>
+            <a:noFill/>
+          </a:ln>
+        </p:spPr>
+        <p:style>
+          <a:lnRef idx="1">
+            <a:schemeClr val="accent1"/>
+          </a:lnRef>
+          <a:fillRef idx="3">
+            <a:schemeClr val="accent1"/>
+          </a:fillRef>
+          <a:effectRef idx="2">
+            <a:schemeClr val="accent1"/>
+          </a:effectRef>
+          <a:fontRef idx="minor">
+            <a:schemeClr val="lt1"/>
+          </a:fontRef>
+        </p:style>
+        <p:txBody>
+          <a:bodyPr rtlCol="0" anchor="ctr"/>
+          <a:lstStyle/>
+          <a:p>
+            <a:pPr algn="ctr"/>
+          </a:p>
+        </p:txBody>
+      </p:sp>
+      <p:sp>
+        <p:nvSpPr>
+          <p:cNvPr id="4" name="TextBox 3"/>
+          <p:cNvSpPr txBox="1"/>
+          <p:nvPr/>
+        </p:nvSpPr>
+        <p:spPr>
+          <a:xfrm>
+            <a:off x="457200" y="164592"/>
+            <a:ext cx="11277295" cy="502920"/>
+          </a:xfrm>
+          <a:prstGeom prst="rect">
+            <a:avLst/>
+          </a:prstGeom>
+          <a:noFill/>
+        </p:spPr>
+        <p:txBody>
+          <a:bodyPr wrap="square">
+            <a:spAutoFit/>
+          </a:bodyPr>
+          <a:lstStyle/>
+          <a:p>
+            <a:r>
+              <a:rPr sz="2600" b="1" i="0">
+                <a:solidFill>
+                  <a:srgbClr val="FFFFFF"/>
+                </a:solidFill>
+                <a:latin typeface="Calibri"/>
+              </a:rPr>
+              <a:t>Taller PI VetCare — pistas (checklist vacio)</a:t>
+            </a:r>
+          </a:p>
+        </p:txBody>
+      </p:sp>
+      <p:sp>
+        <p:nvSpPr>
+          <p:cNvPr id="5" name="Rounded Rectangle 4"/>
+          <p:cNvSpPr/>
+          <p:nvPr/>
+        </p:nvSpPr>
+        <p:spPr>
+          <a:xfrm>
+            <a:off x="457200" y="1261872"/>
+            <a:ext cx="11277295" cy="566928"/>
+          </a:xfrm>
+          <a:prstGeom prst="roundRect">
+            <a:avLst>
+              <a:gd name="adj" fmla="val 12000"/>
+            </a:avLst>
+          </a:prstGeom>
+          <a:solidFill>
+            <a:srgbClr val="F2F2F2"/>
+          </a:solidFill>
+          <a:ln>
+            <a:noFill/>
+          </a:ln>
+        </p:spPr>
+        <p:style>
+          <a:lnRef idx="1">
+            <a:schemeClr val="accent1"/>
+          </a:lnRef>
+          <a:fillRef idx="3">
+            <a:schemeClr val="accent1"/>
+          </a:fillRef>
+          <a:effectRef idx="2">
+            <a:schemeClr val="accent1"/>
+          </a:effectRef>
+          <a:fontRef idx="minor">
+            <a:schemeClr val="lt1"/>
+          </a:fontRef>
+        </p:style>
+        <p:txBody>
+          <a:bodyPr rtlCol="0" anchor="ctr"/>
+          <a:lstStyle/>
+          <a:p>
+            <a:pPr algn="ctr"/>
+          </a:p>
+        </p:txBody>
+      </p:sp>
+      <p:sp>
+        <p:nvSpPr>
+          <p:cNvPr id="6" name="Rectangle 5"/>
+          <p:cNvSpPr/>
+          <p:nvPr/>
+        </p:nvSpPr>
+        <p:spPr>
+          <a:xfrm>
+            <a:off x="640080" y="1408175"/>
+            <a:ext cx="274320" cy="274320"/>
+          </a:xfrm>
+          <a:prstGeom prst="rect">
+            <a:avLst/>
+          </a:prstGeom>
+          <a:solidFill>
+            <a:srgbClr val="FFFFFF"/>
+          </a:solidFill>
+          <a:ln>
+            <a:solidFill>
+              <a:srgbClr val="333333"/>
+            </a:solidFill>
+          </a:ln>
+        </p:spPr>
+        <p:style>
+          <a:lnRef idx="1">
+            <a:schemeClr val="accent1"/>
+          </a:lnRef>
+          <a:fillRef idx="3">
+            <a:schemeClr val="accent1"/>
+          </a:fillRef>
+          <a:effectRef idx="2">
+            <a:schemeClr val="accent1"/>
+          </a:effectRef>
+          <a:fontRef idx="minor">
+            <a:schemeClr val="lt1"/>
+          </a:fontRef>
+        </p:style>
+        <p:txBody>
+          <a:bodyPr rtlCol="0" anchor="ctr"/>
+          <a:lstStyle/>
+          <a:p>
+            <a:pPr algn="ctr"/>
+          </a:p>
+        </p:txBody>
+      </p:sp>
+      <p:sp>
+        <p:nvSpPr>
+          <p:cNvPr id="7" name="Rectangle 6"/>
+          <p:cNvSpPr/>
+          <p:nvPr/>
+        </p:nvSpPr>
+        <p:spPr>
+          <a:xfrm>
+            <a:off x="640080" y="1408175"/>
+            <a:ext cx="73152" cy="274320"/>
+          </a:xfrm>
+          <a:prstGeom prst="rect">
+            <a:avLst/>
+          </a:prstGeom>
+          <a:solidFill>
+            <a:srgbClr val="269CCB"/>
+          </a:solidFill>
+          <a:ln>
+            <a:noFill/>
+          </a:ln>
+        </p:spPr>
+        <p:style>
+          <a:lnRef idx="1">
+            <a:schemeClr val="accent1"/>
+          </a:lnRef>
+          <a:fillRef idx="3">
+            <a:schemeClr val="accent1"/>
+          </a:fillRef>
+          <a:effectRef idx="2">
+            <a:schemeClr val="accent1"/>
+          </a:effectRef>
+          <a:fontRef idx="minor">
+            <a:schemeClr val="lt1"/>
+          </a:fontRef>
+        </p:style>
+        <p:txBody>
+          <a:bodyPr rtlCol="0" anchor="ctr"/>
+          <a:lstStyle/>
+          <a:p>
+            <a:pPr algn="ctr"/>
+          </a:p>
+        </p:txBody>
+      </p:sp>
+      <p:sp>
+        <p:nvSpPr>
+          <p:cNvPr id="8" name="TextBox 7"/>
+          <p:cNvSpPr txBox="1"/>
+          <p:nvPr/>
+        </p:nvSpPr>
+        <p:spPr>
+          <a:xfrm>
+            <a:off x="1097280" y="1353312"/>
+            <a:ext cx="10362895" cy="402336"/>
+          </a:xfrm>
+          <a:prstGeom prst="rect">
+            <a:avLst/>
+          </a:prstGeom>
+          <a:noFill/>
+        </p:spPr>
+        <p:txBody>
+          <a:bodyPr wrap="square" anchor="ctr"/>
+          <a:lstStyle/>
+          <a:p>
+            <a:r>
+              <a:rPr sz="1500" b="0" i="0">
+                <a:solidFill>
+                  <a:srgbClr val="333333"/>
+                </a:solidFill>
+                <a:latin typeface="Calibri"/>
+              </a:rPr>
+              <a:t>□ &gt;=3 ops?</a:t>
+            </a:r>
+          </a:p>
+        </p:txBody>
+      </p:sp>
+      <p:sp>
+        <p:nvSpPr>
+          <p:cNvPr id="9" name="Rounded Rectangle 8"/>
+          <p:cNvSpPr/>
+          <p:nvPr/>
+        </p:nvSpPr>
+        <p:spPr>
+          <a:xfrm>
+            <a:off x="457200" y="1938528"/>
+            <a:ext cx="11277295" cy="566928"/>
+          </a:xfrm>
+          <a:prstGeom prst="roundRect">
+            <a:avLst>
+              <a:gd name="adj" fmla="val 12000"/>
+            </a:avLst>
+          </a:prstGeom>
+          <a:solidFill>
+            <a:srgbClr val="F2F2F2"/>
+          </a:solidFill>
+          <a:ln>
+            <a:noFill/>
+          </a:ln>
+        </p:spPr>
+        <p:style>
+          <a:lnRef idx="1">
+            <a:schemeClr val="accent1"/>
+          </a:lnRef>
+          <a:fillRef idx="3">
+            <a:schemeClr val="accent1"/>
+          </a:fillRef>
+          <a:effectRef idx="2">
+            <a:schemeClr val="accent1"/>
+          </a:effectRef>
+          <a:fontRef idx="minor">
+            <a:schemeClr val="lt1"/>
+          </a:fontRef>
+        </p:style>
+        <p:txBody>
+          <a:bodyPr rtlCol="0" anchor="ctr"/>
+          <a:lstStyle/>
+          <a:p>
+            <a:pPr algn="ctr"/>
+          </a:p>
+        </p:txBody>
+      </p:sp>
+      <p:sp>
+        <p:nvSpPr>
+          <p:cNvPr id="10" name="Rectangle 9"/>
+          <p:cNvSpPr/>
+          <p:nvPr/>
+        </p:nvSpPr>
+        <p:spPr>
+          <a:xfrm>
+            <a:off x="640080" y="2084832"/>
+            <a:ext cx="274320" cy="274320"/>
+          </a:xfrm>
+          <a:prstGeom prst="rect">
+            <a:avLst/>
+          </a:prstGeom>
+          <a:solidFill>
+            <a:srgbClr val="FFFFFF"/>
+          </a:solidFill>
+          <a:ln>
+            <a:solidFill>
+              <a:srgbClr val="333333"/>
+            </a:solidFill>
+          </a:ln>
+        </p:spPr>
+        <p:style>
+          <a:lnRef idx="1">
+            <a:schemeClr val="accent1"/>
+          </a:lnRef>
+          <a:fillRef idx="3">
+            <a:schemeClr val="accent1"/>
+          </a:fillRef>
+          <a:effectRef idx="2">
+            <a:schemeClr val="accent1"/>
+          </a:effectRef>
+          <a:fontRef idx="minor">
+            <a:schemeClr val="lt1"/>
+          </a:fontRef>
+        </p:style>
+        <p:txBody>
+          <a:bodyPr rtlCol="0" anchor="ctr"/>
+          <a:lstStyle/>
+          <a:p>
+            <a:pPr algn="ctr"/>
+          </a:p>
+        </p:txBody>
+      </p:sp>
+      <p:sp>
+        <p:nvSpPr>
+          <p:cNvPr id="11" name="Rectangle 10"/>
+          <p:cNvSpPr/>
+          <p:nvPr/>
+        </p:nvSpPr>
+        <p:spPr>
+          <a:xfrm>
+            <a:off x="640080" y="2084832"/>
+            <a:ext cx="73152" cy="274320"/>
+          </a:xfrm>
+          <a:prstGeom prst="rect">
+            <a:avLst/>
+          </a:prstGeom>
+          <a:solidFill>
+            <a:srgbClr val="269CCB"/>
+          </a:solidFill>
+          <a:ln>
+            <a:noFill/>
+          </a:ln>
+        </p:spPr>
+        <p:style>
+          <a:lnRef idx="1">
+            <a:schemeClr val="accent1"/>
+          </a:lnRef>
+          <a:fillRef idx="3">
+            <a:schemeClr val="accent1"/>
+          </a:fillRef>
+          <a:effectRef idx="2">
+            <a:schemeClr val="accent1"/>
+          </a:effectRef>
+          <a:fontRef idx="minor">
+            <a:schemeClr val="lt1"/>
+          </a:fontRef>
+        </p:style>
+        <p:txBody>
+          <a:bodyPr rtlCol="0" anchor="ctr"/>
+          <a:lstStyle/>
+          <a:p>
+            <a:pPr algn="ctr"/>
+          </a:p>
+        </p:txBody>
+      </p:sp>
+      <p:sp>
+        <p:nvSpPr>
+          <p:cNvPr id="12" name="TextBox 11"/>
+          <p:cNvSpPr txBox="1"/>
+          <p:nvPr/>
+        </p:nvSpPr>
+        <p:spPr>
+          <a:xfrm>
+            <a:off x="1097280" y="2029968"/>
+            <a:ext cx="10362895" cy="402336"/>
+          </a:xfrm>
+          <a:prstGeom prst="rect">
+            <a:avLst/>
+          </a:prstGeom>
+          <a:noFill/>
+        </p:spPr>
+        <p:txBody>
+          <a:bodyPr wrap="square" anchor="ctr"/>
+          <a:lstStyle/>
+          <a:p>
+            <a:r>
+              <a:rPr sz="1500" b="0" i="0">
+                <a:solidFill>
+                  <a:srgbClr val="333333"/>
+                </a:solidFill>
+                <a:latin typeface="Calibri"/>
+              </a:rPr>
+              <a:t>□ Errores esperados?</a:t>
+            </a:r>
+          </a:p>
+        </p:txBody>
+      </p:sp>
+      <p:sp>
+        <p:nvSpPr>
+          <p:cNvPr id="13" name="Rounded Rectangle 12"/>
+          <p:cNvSpPr/>
+          <p:nvPr/>
+        </p:nvSpPr>
+        <p:spPr>
+          <a:xfrm>
+            <a:off x="457200" y="2615184"/>
+            <a:ext cx="11277295" cy="566928"/>
+          </a:xfrm>
+          <a:prstGeom prst="roundRect">
+            <a:avLst>
+              <a:gd name="adj" fmla="val 12000"/>
+            </a:avLst>
+          </a:prstGeom>
+          <a:solidFill>
+            <a:srgbClr val="F2F2F2"/>
+          </a:solidFill>
+          <a:ln>
+            <a:noFill/>
+          </a:ln>
+        </p:spPr>
+        <p:style>
+          <a:lnRef idx="1">
+            <a:schemeClr val="accent1"/>
+          </a:lnRef>
+          <a:fillRef idx="3">
+            <a:schemeClr val="accent1"/>
+          </a:fillRef>
+          <a:effectRef idx="2">
+            <a:schemeClr val="accent1"/>
+          </a:effectRef>
+          <a:fontRef idx="minor">
+            <a:schemeClr val="lt1"/>
+          </a:fontRef>
+        </p:style>
+        <p:txBody>
+          <a:bodyPr rtlCol="0" anchor="ctr"/>
+          <a:lstStyle/>
+          <a:p>
+            <a:pPr algn="ctr"/>
+          </a:p>
+        </p:txBody>
+      </p:sp>
+      <p:sp>
+        <p:nvSpPr>
+          <p:cNvPr id="14" name="Rectangle 13"/>
+          <p:cNvSpPr/>
+          <p:nvPr/>
+        </p:nvSpPr>
+        <p:spPr>
+          <a:xfrm>
+            <a:off x="640080" y="2761488"/>
+            <a:ext cx="274320" cy="274320"/>
+          </a:xfrm>
+          <a:prstGeom prst="rect">
+            <a:avLst/>
+          </a:prstGeom>
+          <a:solidFill>
+            <a:srgbClr val="FFFFFF"/>
+          </a:solidFill>
+          <a:ln>
+            <a:solidFill>
+              <a:srgbClr val="333333"/>
+            </a:solidFill>
+          </a:ln>
+        </p:spPr>
+        <p:style>
+          <a:lnRef idx="1">
+            <a:schemeClr val="accent1"/>
+          </a:lnRef>
+          <a:fillRef idx="3">
+            <a:schemeClr val="accent1"/>
+          </a:fillRef>
+          <a:effectRef idx="2">
+            <a:schemeClr val="accent1"/>
+          </a:effectRef>
+          <a:fontRef idx="minor">
+            <a:schemeClr val="lt1"/>
+          </a:fontRef>
+        </p:style>
+        <p:txBody>
+          <a:bodyPr rtlCol="0" anchor="ctr"/>
+          <a:lstStyle/>
+          <a:p>
+            <a:pPr algn="ctr"/>
+          </a:p>
+        </p:txBody>
+      </p:sp>
+      <p:sp>
+        <p:nvSpPr>
+          <p:cNvPr id="15" name="Rectangle 14"/>
+          <p:cNvSpPr/>
+          <p:nvPr/>
+        </p:nvSpPr>
+        <p:spPr>
+          <a:xfrm>
+            <a:off x="640080" y="2761488"/>
+            <a:ext cx="73152" cy="274320"/>
+          </a:xfrm>
+          <a:prstGeom prst="rect">
+            <a:avLst/>
+          </a:prstGeom>
+          <a:solidFill>
+            <a:srgbClr val="269CCB"/>
+          </a:solidFill>
+          <a:ln>
+            <a:noFill/>
+          </a:ln>
+        </p:spPr>
+        <p:style>
+          <a:lnRef idx="1">
+            <a:schemeClr val="accent1"/>
+          </a:lnRef>
+          <a:fillRef idx="3">
+            <a:schemeClr val="accent1"/>
+          </a:fillRef>
+          <a:effectRef idx="2">
+            <a:schemeClr val="accent1"/>
+          </a:effectRef>
+          <a:fontRef idx="minor">
+            <a:schemeClr val="lt1"/>
+          </a:fontRef>
+        </p:style>
+        <p:txBody>
+          <a:bodyPr rtlCol="0" anchor="ctr"/>
+          <a:lstStyle/>
+          <a:p>
+            <a:pPr algn="ctr"/>
+          </a:p>
+        </p:txBody>
+      </p:sp>
+      <p:sp>
+        <p:nvSpPr>
+          <p:cNvPr id="16" name="TextBox 15"/>
+          <p:cNvSpPr txBox="1"/>
+          <p:nvPr/>
+        </p:nvSpPr>
+        <p:spPr>
+          <a:xfrm>
+            <a:off x="1097280" y="2706624"/>
+            <a:ext cx="10362895" cy="402336"/>
+          </a:xfrm>
+          <a:prstGeom prst="rect">
+            <a:avLst/>
+          </a:prstGeom>
+          <a:noFill/>
+        </p:spPr>
+        <p:txBody>
+          <a:bodyPr wrap="square" anchor="ctr"/>
+          <a:lstStyle/>
+          <a:p>
+            <a:r>
+              <a:rPr sz="1500" b="0" i="0">
+                <a:solidFill>
+                  <a:srgbClr val="333333"/>
+                </a:solidFill>
+                <a:latin typeface="Calibri"/>
+              </a:rPr>
+              <a:t>□ Outline completo?</a:t>
+            </a:r>
+          </a:p>
+        </p:txBody>
+      </p:sp>
+      <p:sp>
+        <p:nvSpPr>
+          <p:cNvPr id="17" name="TextBox 16"/>
+          <p:cNvSpPr txBox="1"/>
+          <p:nvPr/>
+        </p:nvSpPr>
+        <p:spPr>
+          <a:xfrm>
+            <a:off x="11185855" y="6473952"/>
+            <a:ext cx="640080" cy="274320"/>
+          </a:xfrm>
+          <a:prstGeom prst="rect">
+            <a:avLst/>
+          </a:prstGeom>
+          <a:noFill/>
+        </p:spPr>
+        <p:txBody>
+          <a:bodyPr wrap="square">
+            <a:spAutoFit/>
+          </a:bodyPr>
+          <a:lstStyle/>
+          <a:p>
+            <a:pPr algn="r"/>
+            <a:r>
+              <a:rPr sz="1100" b="0" i="0">
+                <a:solidFill>
+                  <a:srgbClr val="666666"/>
+                </a:solidFill>
+                <a:latin typeface="Calibri"/>
+              </a:rPr>
+              <a:t>31</a:t>
+            </a:r>
+          </a:p>
+        </p:txBody>
+      </p:sp>
+    </p:spTree>
+  </p:cSld>
+  <p:clrMapOvr>
+    <a:masterClrMapping/>
+  </p:clrMapOvr>
+</p:sld>
+</file>
+
+<file path=ppt/slides/slide32.xml><?xml version="1.0" encoding="utf-8"?>
+<p:sld xmlns:a="http://schemas.openxmlformats.org/drawingml/2006/main" xmlns:p="http://schemas.openxmlformats.org/presentationml/2006/main" xmlns:r="http://schemas.openxmlformats.org/officeDocument/2006/relationships">
+  <p:cSld>
+    <p:bg>
+      <p:bgPr>
+        <a:solidFill>
+          <a:srgbClr val="FFFFFF"/>
+        </a:solidFill>
+        <a:effectLst/>
+      </p:bgPr>
+    </p:bg>
+    <p:spTree>
+      <p:nvGrpSpPr>
+        <p:cNvPr id="1" name=""/>
+        <p:cNvGrpSpPr/>
+        <p:nvPr/>
+      </p:nvGrpSpPr>
+      <p:grpSpPr/>
+      <p:sp>
+        <p:nvSpPr>
+          <p:cNvPr id="2" name="Rectangle 1"/>
+          <p:cNvSpPr/>
+          <p:nvPr/>
+        </p:nvSpPr>
+        <p:spPr>
+          <a:xfrm>
+            <a:off x="0" y="0"/>
+            <a:ext cx="12191695" cy="960120"/>
+          </a:xfrm>
+          <a:prstGeom prst="rect">
+            <a:avLst/>
+          </a:prstGeom>
+          <a:solidFill>
+            <a:srgbClr val="095292"/>
+          </a:solidFill>
+          <a:ln>
+            <a:noFill/>
+          </a:ln>
+        </p:spPr>
+        <p:style>
+          <a:lnRef idx="1">
+            <a:schemeClr val="accent1"/>
+          </a:lnRef>
+          <a:fillRef idx="3">
+            <a:schemeClr val="accent1"/>
+          </a:fillRef>
+          <a:effectRef idx="2">
+            <a:schemeClr val="accent1"/>
+          </a:effectRef>
+          <a:fontRef idx="minor">
+            <a:schemeClr val="lt1"/>
+          </a:fontRef>
+        </p:style>
+        <p:txBody>
+          <a:bodyPr rtlCol="0" anchor="ctr"/>
+          <a:lstStyle/>
+          <a:p>
+            <a:pPr algn="ctr"/>
+          </a:p>
+        </p:txBody>
+      </p:sp>
+      <p:sp>
+        <p:nvSpPr>
+          <p:cNvPr id="3" name="Rectangle 2"/>
+          <p:cNvSpPr/>
+          <p:nvPr/>
+        </p:nvSpPr>
+        <p:spPr>
+          <a:xfrm>
+            <a:off x="0" y="960120"/>
+            <a:ext cx="12191695" cy="41148"/>
+          </a:xfrm>
+          <a:prstGeom prst="rect">
+            <a:avLst/>
+          </a:prstGeom>
+          <a:solidFill>
+            <a:srgbClr val="FFD000"/>
+          </a:solidFill>
+          <a:ln>
+            <a:noFill/>
+          </a:ln>
+        </p:spPr>
+        <p:style>
+          <a:lnRef idx="1">
+            <a:schemeClr val="accent1"/>
+          </a:lnRef>
+          <a:fillRef idx="3">
+            <a:schemeClr val="accent1"/>
+          </a:fillRef>
+          <a:effectRef idx="2">
+            <a:schemeClr val="accent1"/>
+          </a:effectRef>
+          <a:fontRef idx="minor">
+            <a:schemeClr val="lt1"/>
+          </a:fontRef>
+        </p:style>
+        <p:txBody>
+          <a:bodyPr rtlCol="0" anchor="ctr"/>
+          <a:lstStyle/>
+          <a:p>
+            <a:pPr algn="ctr"/>
+          </a:p>
+        </p:txBody>
+      </p:sp>
+      <p:sp>
+        <p:nvSpPr>
+          <p:cNvPr id="4" name="TextBox 3"/>
+          <p:cNvSpPr txBox="1"/>
+          <p:nvPr/>
+        </p:nvSpPr>
+        <p:spPr>
+          <a:xfrm>
+            <a:off x="457200" y="164592"/>
+            <a:ext cx="11277295" cy="502920"/>
+          </a:xfrm>
+          <a:prstGeom prst="rect">
+            <a:avLst/>
+          </a:prstGeom>
+          <a:noFill/>
+        </p:spPr>
+        <p:txBody>
+          <a:bodyPr wrap="square">
+            <a:spAutoFit/>
+          </a:bodyPr>
+          <a:lstStyle/>
+          <a:p>
+            <a:r>
+              <a:rPr sz="2600" b="1" i="0">
+                <a:solidFill>
+                  <a:srgbClr val="FFFFFF"/>
+                </a:solidFill>
+                <a:latin typeface="Calibri"/>
+              </a:rPr>
+              <a:t>Criterios de exito / entregable</a:t>
+            </a:r>
+          </a:p>
+        </p:txBody>
+      </p:sp>
+      <p:sp>
+        <p:nvSpPr>
+          <p:cNvPr id="5" name="TextBox 4"/>
+          <p:cNvSpPr txBox="1"/>
+          <p:nvPr/>
+        </p:nvSpPr>
+        <p:spPr>
+          <a:xfrm>
+            <a:off x="457200" y="1170432"/>
+            <a:ext cx="11277295" cy="5230368"/>
+          </a:xfrm>
+          <a:prstGeom prst="rect">
+            <a:avLst/>
+          </a:prstGeom>
+          <a:noFill/>
+        </p:spPr>
+        <p:txBody>
+          <a:bodyPr wrap="square">
+            <a:spAutoFit/>
+          </a:bodyPr>
+          <a:lstStyle/>
+          <a:p>
+            <a:pPr>
+              <a:spcAft>
+                <a:spcPts val="800"/>
+              </a:spcAft>
+            </a:pPr>
+            <a:r>
+              <a:rPr sz="2000" b="0" i="0">
+                <a:solidFill>
+                  <a:srgbClr val="333333"/>
+                </a:solidFill>
+                <a:latin typeface="Calibri"/>
+              </a:rPr>
+              <a:t>–   </a:t>
+            </a:r>
+            <a:r>
+              <a:rPr sz="2000" b="1" i="0">
+                <a:solidFill>
+                  <a:srgbClr val="333333"/>
+                </a:solidFill>
+                <a:latin typeface="Calibri"/>
+              </a:rPr>
+              <a:t>Entregable:</a:t>
+            </a:r>
+            <a:r>
+              <a:rPr sz="2000" b="0" i="0">
+                <a:solidFill>
+                  <a:srgbClr val="333333"/>
+                </a:solidFill>
+                <a:latin typeface="Calibri"/>
+              </a:rPr>
+              <a:t> Contrato app&lt;-&gt;BD + outline de slides de sustentacion (5-8 min)</a:t>
+            </a:r>
+          </a:p>
+          <a:p>
+            <a:pPr>
+              <a:spcAft>
+                <a:spcPts val="800"/>
+              </a:spcAft>
+            </a:pPr>
+            <a:r>
+              <a:rPr sz="2000" b="0" i="0">
+                <a:solidFill>
+                  <a:srgbClr val="333333"/>
+                </a:solidFill>
+                <a:latin typeface="Calibri"/>
+              </a:rPr>
+              <a:t>–   Evidencia: el SQL y su salida quedan guardados en cada pregunta de la plataforma del curso.</a:t>
+            </a:r>
+          </a:p>
+          <a:p>
+            <a:pPr>
+              <a:spcAft>
+                <a:spcPts val="800"/>
+              </a:spcAft>
+            </a:pPr>
+            <a:r>
+              <a:rPr sz="2000" b="0" i="0">
+                <a:solidFill>
+                  <a:srgbClr val="333333"/>
+                </a:solidFill>
+                <a:latin typeface="Calibri"/>
+              </a:rPr>
+              <a:t>–   Conserva copia en tu carpeta del PI (los .sql que pide el entregable).</a:t>
+            </a:r>
+          </a:p>
+          <a:p>
+            <a:pPr>
+              <a:spcAft>
+                <a:spcPts val="800"/>
+              </a:spcAft>
+            </a:pPr>
+            <a:r>
+              <a:rPr sz="2000" b="0" i="0">
+                <a:solidFill>
+                  <a:srgbClr val="333333"/>
+                </a:solidFill>
+                <a:latin typeface="Calibri"/>
+              </a:rPr>
+              <a:t>–   Actualizar checklist PI (que criterio de rubrica avanzo).</a:t>
+            </a:r>
+          </a:p>
+          <a:p>
+            <a:pPr>
+              <a:spcAft>
+                <a:spcPts val="800"/>
+              </a:spcAft>
+            </a:pPr>
+            <a:r>
+              <a:rPr sz="2000" b="0" i="0">
+                <a:solidFill>
+                  <a:srgbClr val="333333"/>
+                </a:solidFill>
+                <a:latin typeface="Calibri"/>
+              </a:rPr>
+              <a:t>–   </a:t>
+            </a:r>
+            <a:r>
+              <a:rPr sz="2000" b="1" i="0">
+                <a:solidFill>
+                  <a:srgbClr val="333333"/>
+                </a:solidFill>
+                <a:latin typeface="Calibri"/>
+              </a:rPr>
+              <a:t>Entrega en la plataforma del curso</a:t>
+            </a:r>
+            <a:r>
+              <a:rPr sz="2000" b="0" i="0">
+                <a:solidFill>
+                  <a:srgbClr val="333333"/>
+                </a:solidFill>
+                <a:latin typeface="Calibri"/>
+              </a:rPr>
+              <a:t> — en la fecha que indique el docente.</a:t>
+            </a:r>
+          </a:p>
+        </p:txBody>
+      </p:sp>
+      <p:sp>
+        <p:nvSpPr>
+          <p:cNvPr id="6" name="TextBox 5"/>
+          <p:cNvSpPr txBox="1"/>
+          <p:nvPr/>
+        </p:nvSpPr>
+        <p:spPr>
+          <a:xfrm>
+            <a:off x="11185855" y="6473952"/>
+            <a:ext cx="640080" cy="274320"/>
+          </a:xfrm>
+          <a:prstGeom prst="rect">
+            <a:avLst/>
+          </a:prstGeom>
+          <a:noFill/>
+        </p:spPr>
+        <p:txBody>
+          <a:bodyPr wrap="square">
+            <a:spAutoFit/>
+          </a:bodyPr>
+          <a:lstStyle/>
+          <a:p>
+            <a:pPr algn="r"/>
+            <a:r>
+              <a:rPr sz="1100" b="0" i="0">
+                <a:solidFill>
+                  <a:srgbClr val="666666"/>
+                </a:solidFill>
+                <a:latin typeface="Calibri"/>
+              </a:rPr>
+              <a:t>32</a:t>
+            </a:r>
+          </a:p>
+        </p:txBody>
+      </p:sp>
+    </p:spTree>
+  </p:cSld>
+  <p:clrMapOvr>
+    <a:masterClrMapping/>
+  </p:clrMapOvr>
+</p:sld>
+</file>
+
+<file path=ppt/slides/slide33.xml><?xml version="1.0" encoding="utf-8"?>
+<p:sld xmlns:a="http://schemas.openxmlformats.org/drawingml/2006/main" xmlns:p="http://schemas.openxmlformats.org/presentationml/2006/main" xmlns:r="http://schemas.openxmlformats.org/officeDocument/2006/relationships">
+  <p:cSld>
+    <p:bg>
+      <p:bgPr>
+        <a:solidFill>
+          <a:srgbClr val="FFFFFF"/>
+        </a:solidFill>
+        <a:effectLst/>
+      </p:bgPr>
+    </p:bg>
+    <p:spTree>
+      <p:nvGrpSpPr>
+        <p:cNvPr id="1" name=""/>
+        <p:cNvGrpSpPr/>
+        <p:nvPr/>
+      </p:nvGrpSpPr>
+      <p:grpSpPr/>
+      <p:sp>
+        <p:nvSpPr>
+          <p:cNvPr id="2" name="Rectangle 1"/>
+          <p:cNvSpPr/>
+          <p:nvPr/>
+        </p:nvSpPr>
+        <p:spPr>
+          <a:xfrm>
+            <a:off x="0" y="0"/>
+            <a:ext cx="12191695" cy="960120"/>
+          </a:xfrm>
+          <a:prstGeom prst="rect">
+            <a:avLst/>
+          </a:prstGeom>
+          <a:solidFill>
+            <a:srgbClr val="095292"/>
+          </a:solidFill>
+          <a:ln>
+            <a:noFill/>
+          </a:ln>
+        </p:spPr>
+        <p:style>
+          <a:lnRef idx="1">
+            <a:schemeClr val="accent1"/>
+          </a:lnRef>
+          <a:fillRef idx="3">
+            <a:schemeClr val="accent1"/>
+          </a:fillRef>
+          <a:effectRef idx="2">
+            <a:schemeClr val="accent1"/>
+          </a:effectRef>
+          <a:fontRef idx="minor">
+            <a:schemeClr val="lt1"/>
+          </a:fontRef>
+        </p:style>
+        <p:txBody>
+          <a:bodyPr rtlCol="0" anchor="ctr"/>
+          <a:lstStyle/>
+          <a:p>
+            <a:pPr algn="ctr"/>
+          </a:p>
+        </p:txBody>
+      </p:sp>
+      <p:sp>
+        <p:nvSpPr>
+          <p:cNvPr id="3" name="Rectangle 2"/>
+          <p:cNvSpPr/>
+          <p:nvPr/>
+        </p:nvSpPr>
+        <p:spPr>
+          <a:xfrm>
+            <a:off x="0" y="960120"/>
+            <a:ext cx="12191695" cy="41148"/>
+          </a:xfrm>
+          <a:prstGeom prst="rect">
+            <a:avLst/>
+          </a:prstGeom>
+          <a:solidFill>
+            <a:srgbClr val="FFD000"/>
+          </a:solidFill>
+          <a:ln>
+            <a:noFill/>
+          </a:ln>
+        </p:spPr>
+        <p:style>
+          <a:lnRef idx="1">
+            <a:schemeClr val="accent1"/>
+          </a:lnRef>
+          <a:fillRef idx="3">
+            <a:schemeClr val="accent1"/>
+          </a:fillRef>
+          <a:effectRef idx="2">
+            <a:schemeClr val="accent1"/>
+          </a:effectRef>
+          <a:fontRef idx="minor">
+            <a:schemeClr val="lt1"/>
+          </a:fontRef>
+        </p:style>
+        <p:txBody>
+          <a:bodyPr rtlCol="0" anchor="ctr"/>
+          <a:lstStyle/>
+          <a:p>
+            <a:pPr algn="ctr"/>
+          </a:p>
+        </p:txBody>
+      </p:sp>
+      <p:sp>
+        <p:nvSpPr>
+          <p:cNvPr id="4" name="TextBox 3"/>
+          <p:cNvSpPr txBox="1"/>
+          <p:nvPr/>
+        </p:nvSpPr>
+        <p:spPr>
+          <a:xfrm>
+            <a:off x="457200" y="164592"/>
+            <a:ext cx="11277295" cy="502920"/>
+          </a:xfrm>
+          <a:prstGeom prst="rect">
+            <a:avLst/>
+          </a:prstGeom>
+          <a:noFill/>
+        </p:spPr>
+        <p:txBody>
+          <a:bodyPr wrap="square">
+            <a:spAutoFit/>
+          </a:bodyPr>
+          <a:lstStyle/>
+          <a:p>
+            <a:r>
+              <a:rPr sz="2600" b="1" i="0">
+                <a:solidFill>
+                  <a:srgbClr val="FFFFFF"/>
+                </a:solidFill>
+                <a:latin typeface="Calibri"/>
+              </a:rPr>
+              <a:t>Para el PI esta semana</a:t>
+            </a:r>
+          </a:p>
+        </p:txBody>
+      </p:sp>
+      <p:sp>
+        <p:nvSpPr>
+          <p:cNvPr id="5" name="Rounded Rectangle 4"/>
+          <p:cNvSpPr/>
+          <p:nvPr/>
+        </p:nvSpPr>
+        <p:spPr>
+          <a:xfrm>
+            <a:off x="457200" y="1261872"/>
+            <a:ext cx="11277295" cy="1051560"/>
+          </a:xfrm>
+          <a:prstGeom prst="roundRect">
+            <a:avLst>
+              <a:gd name="adj" fmla="val 12000"/>
+            </a:avLst>
+          </a:prstGeom>
+          <a:solidFill>
+            <a:srgbClr val="E8F4FA"/>
+          </a:solidFill>
+          <a:ln>
+            <a:noFill/>
+          </a:ln>
+        </p:spPr>
+        <p:style>
+          <a:lnRef idx="1">
+            <a:schemeClr val="accent1"/>
+          </a:lnRef>
+          <a:fillRef idx="3">
+            <a:schemeClr val="accent1"/>
+          </a:fillRef>
+          <a:effectRef idx="2">
+            <a:schemeClr val="accent1"/>
+          </a:effectRef>
+          <a:fontRef idx="minor">
+            <a:schemeClr val="lt1"/>
+          </a:fontRef>
+        </p:style>
+        <p:txBody>
+          <a:bodyPr rtlCol="0" anchor="ctr"/>
+          <a:lstStyle/>
+          <a:p>
+            <a:pPr algn="ctr"/>
+          </a:p>
+        </p:txBody>
+      </p:sp>
+      <p:sp>
+        <p:nvSpPr>
+          <p:cNvPr id="6" name="Rectangle 5"/>
+          <p:cNvSpPr/>
+          <p:nvPr/>
+        </p:nvSpPr>
+        <p:spPr>
+          <a:xfrm>
+            <a:off x="457200" y="1261872"/>
+            <a:ext cx="128016" cy="1051560"/>
+          </a:xfrm>
+          <a:prstGeom prst="rect">
+            <a:avLst/>
+          </a:prstGeom>
+          <a:solidFill>
+            <a:srgbClr val="269CCB"/>
+          </a:solidFill>
+          <a:ln>
+            <a:noFill/>
+          </a:ln>
+        </p:spPr>
+        <p:style>
+          <a:lnRef idx="1">
+            <a:schemeClr val="accent1"/>
+          </a:lnRef>
+          <a:fillRef idx="3">
+            <a:schemeClr val="accent1"/>
+          </a:fillRef>
+          <a:effectRef idx="2">
+            <a:schemeClr val="accent1"/>
+          </a:effectRef>
+          <a:fontRef idx="minor">
+            <a:schemeClr val="lt1"/>
+          </a:fontRef>
+        </p:style>
+        <p:txBody>
+          <a:bodyPr rtlCol="0" anchor="ctr"/>
+          <a:lstStyle/>
+          <a:p>
+            <a:pPr algn="ctr"/>
+          </a:p>
+        </p:txBody>
+      </p:sp>
+      <p:sp>
+        <p:nvSpPr>
+          <p:cNvPr id="7" name="TextBox 6"/>
+          <p:cNvSpPr txBox="1"/>
+          <p:nvPr/>
+        </p:nvSpPr>
+        <p:spPr>
+          <a:xfrm>
+            <a:off x="777240" y="1399031"/>
+            <a:ext cx="10774375" cy="822959"/>
+          </a:xfrm>
+          <a:prstGeom prst="rect">
+            <a:avLst/>
+          </a:prstGeom>
+          <a:noFill/>
+        </p:spPr>
+        <p:txBody>
+          <a:bodyPr wrap="square">
+            <a:spAutoFit/>
+          </a:bodyPr>
+          <a:lstStyle/>
+          <a:p>
+            <a:r>
+              <a:rPr sz="1200" b="1" i="0">
+                <a:solidFill>
+                  <a:srgbClr val="269CCB"/>
+                </a:solidFill>
+                <a:latin typeface="Calibri"/>
+              </a:rPr>
+              <a:t>Info</a:t>
+            </a:r>
+          </a:p>
+          <a:p>
+            <a:pPr>
+              <a:spcBef>
+                <a:spcPts val="400"/>
+              </a:spcBef>
+            </a:pPr>
+            <a:r>
+              <a:rPr sz="1400" b="0" i="0">
+                <a:solidFill>
+                  <a:srgbClr val="333333"/>
+                </a:solidFill>
+                <a:latin typeface="Calibri"/>
+              </a:rPr>
+              <a:t>Hito: Contrato integracion + preparacion de entrega/sustentacion</a:t>
+            </a:r>
+          </a:p>
+        </p:txBody>
+      </p:sp>
+      <p:sp>
+        <p:nvSpPr>
+          <p:cNvPr id="8" name="Rounded Rectangle 7"/>
+          <p:cNvSpPr/>
+          <p:nvPr/>
+        </p:nvSpPr>
+        <p:spPr>
+          <a:xfrm>
+            <a:off x="457200" y="2478024"/>
+            <a:ext cx="11277295" cy="1051560"/>
+          </a:xfrm>
+          <a:prstGeom prst="roundRect">
+            <a:avLst>
+              <a:gd name="adj" fmla="val 12000"/>
+            </a:avLst>
+          </a:prstGeom>
+          <a:solidFill>
+            <a:srgbClr val="FFF8E1"/>
+          </a:solidFill>
+          <a:ln>
+            <a:noFill/>
+          </a:ln>
+        </p:spPr>
+        <p:style>
+          <a:lnRef idx="1">
+            <a:schemeClr val="accent1"/>
+          </a:lnRef>
+          <a:fillRef idx="3">
+            <a:schemeClr val="accent1"/>
+          </a:fillRef>
+          <a:effectRef idx="2">
+            <a:schemeClr val="accent1"/>
+          </a:effectRef>
+          <a:fontRef idx="minor">
+            <a:schemeClr val="lt1"/>
+          </a:fontRef>
+        </p:style>
+        <p:txBody>
+          <a:bodyPr rtlCol="0" anchor="ctr"/>
+          <a:lstStyle/>
+          <a:p>
+            <a:pPr algn="ctr"/>
+          </a:p>
+        </p:txBody>
+      </p:sp>
+      <p:sp>
+        <p:nvSpPr>
+          <p:cNvPr id="9" name="Rectangle 8"/>
+          <p:cNvSpPr/>
+          <p:nvPr/>
+        </p:nvSpPr>
+        <p:spPr>
+          <a:xfrm>
+            <a:off x="457200" y="2478024"/>
+            <a:ext cx="128016" cy="1051560"/>
+          </a:xfrm>
+          <a:prstGeom prst="rect">
+            <a:avLst/>
+          </a:prstGeom>
+          <a:solidFill>
+            <a:srgbClr val="FFD000"/>
+          </a:solidFill>
+          <a:ln>
+            <a:noFill/>
+          </a:ln>
+        </p:spPr>
+        <p:style>
+          <a:lnRef idx="1">
+            <a:schemeClr val="accent1"/>
+          </a:lnRef>
+          <a:fillRef idx="3">
+            <a:schemeClr val="accent1"/>
+          </a:fillRef>
+          <a:effectRef idx="2">
+            <a:schemeClr val="accent1"/>
+          </a:effectRef>
+          <a:fontRef idx="minor">
+            <a:schemeClr val="lt1"/>
+          </a:fontRef>
+        </p:style>
+        <p:txBody>
+          <a:bodyPr rtlCol="0" anchor="ctr"/>
+          <a:lstStyle/>
+          <a:p>
+            <a:pPr algn="ctr"/>
+          </a:p>
+        </p:txBody>
+      </p:sp>
+      <p:sp>
+        <p:nvSpPr>
+          <p:cNvPr id="10" name="TextBox 9"/>
+          <p:cNvSpPr txBox="1"/>
+          <p:nvPr/>
+        </p:nvSpPr>
+        <p:spPr>
+          <a:xfrm>
+            <a:off x="777240" y="2615184"/>
+            <a:ext cx="10774375" cy="822959"/>
+          </a:xfrm>
+          <a:prstGeom prst="rect">
+            <a:avLst/>
+          </a:prstGeom>
+          <a:noFill/>
+        </p:spPr>
+        <p:txBody>
+          <a:bodyPr wrap="square">
+            <a:spAutoFit/>
+          </a:bodyPr>
+          <a:lstStyle/>
+          <a:p>
+            <a:r>
+              <a:rPr sz="1200" b="1" i="0">
+                <a:solidFill>
+                  <a:srgbClr val="FFD000"/>
+                </a:solidFill>
+                <a:latin typeface="Calibri"/>
+              </a:rPr>
+              <a:t>Aclaración</a:t>
+            </a:r>
+          </a:p>
+          <a:p>
+            <a:pPr>
+              <a:spcBef>
+                <a:spcPts val="400"/>
+              </a:spcBef>
+            </a:pPr>
+            <a:r>
+              <a:rPr sz="1400" b="0" i="0">
+                <a:solidFill>
+                  <a:srgbClr val="333333"/>
+                </a:solidFill>
+                <a:latin typeface="Calibri"/>
+              </a:rPr>
+              <a:t>Enunciado completo: Clases/Proyecto Integrador/ (VetCare DB).</a:t>
+            </a:r>
+          </a:p>
+        </p:txBody>
+      </p:sp>
+      <p:sp>
+        <p:nvSpPr>
+          <p:cNvPr id="11" name="Rounded Rectangle 10"/>
+          <p:cNvSpPr/>
+          <p:nvPr/>
+        </p:nvSpPr>
+        <p:spPr>
+          <a:xfrm>
+            <a:off x="457200" y="3694176"/>
+            <a:ext cx="11277295" cy="1051560"/>
+          </a:xfrm>
+          <a:prstGeom prst="roundRect">
+            <a:avLst>
+              <a:gd name="adj" fmla="val 12000"/>
+            </a:avLst>
+          </a:prstGeom>
+          <a:solidFill>
+            <a:srgbClr val="FBE4E4"/>
+          </a:solidFill>
+          <a:ln>
+            <a:noFill/>
+          </a:ln>
+        </p:spPr>
+        <p:style>
+          <a:lnRef idx="1">
+            <a:schemeClr val="accent1"/>
+          </a:lnRef>
+          <a:fillRef idx="3">
+            <a:schemeClr val="accent1"/>
+          </a:fillRef>
+          <a:effectRef idx="2">
+            <a:schemeClr val="accent1"/>
+          </a:effectRef>
+          <a:fontRef idx="minor">
+            <a:schemeClr val="lt1"/>
+          </a:fontRef>
+        </p:style>
+        <p:txBody>
+          <a:bodyPr rtlCol="0" anchor="ctr"/>
+          <a:lstStyle/>
+          <a:p>
+            <a:pPr algn="ctr"/>
+          </a:p>
+        </p:txBody>
+      </p:sp>
+      <p:sp>
+        <p:nvSpPr>
+          <p:cNvPr id="12" name="Rectangle 11"/>
+          <p:cNvSpPr/>
+          <p:nvPr/>
+        </p:nvSpPr>
+        <p:spPr>
+          <a:xfrm>
+            <a:off x="457200" y="3694176"/>
+            <a:ext cx="128016" cy="1051560"/>
+          </a:xfrm>
+          <a:prstGeom prst="rect">
+            <a:avLst/>
+          </a:prstGeom>
+          <a:solidFill>
+            <a:srgbClr val="A02030"/>
+          </a:solidFill>
+          <a:ln>
+            <a:noFill/>
+          </a:ln>
+        </p:spPr>
+        <p:style>
+          <a:lnRef idx="1">
+            <a:schemeClr val="accent1"/>
+          </a:lnRef>
+          <a:fillRef idx="3">
+            <a:schemeClr val="accent1"/>
+          </a:fillRef>
+          <a:effectRef idx="2">
+            <a:schemeClr val="accent1"/>
+          </a:effectRef>
+          <a:fontRef idx="minor">
+            <a:schemeClr val="lt1"/>
+          </a:fontRef>
+        </p:style>
+        <p:txBody>
+          <a:bodyPr rtlCol="0" anchor="ctr"/>
+          <a:lstStyle/>
+          <a:p>
+            <a:pPr algn="ctr"/>
+          </a:p>
+        </p:txBody>
+      </p:sp>
+      <p:sp>
+        <p:nvSpPr>
+          <p:cNvPr id="13" name="TextBox 12"/>
+          <p:cNvSpPr txBox="1"/>
+          <p:nvPr/>
+        </p:nvSpPr>
+        <p:spPr>
+          <a:xfrm>
+            <a:off x="777240" y="3831336"/>
+            <a:ext cx="10774375" cy="822959"/>
+          </a:xfrm>
+          <a:prstGeom prst="rect">
+            <a:avLst/>
+          </a:prstGeom>
+          <a:noFill/>
+        </p:spPr>
+        <p:txBody>
+          <a:bodyPr wrap="square">
+            <a:spAutoFit/>
+          </a:bodyPr>
+          <a:lstStyle/>
+          <a:p>
+            <a:r>
+              <a:rPr sz="1200" b="1" i="0">
+                <a:solidFill>
+                  <a:srgbClr val="A02030"/>
+                </a:solidFill>
+                <a:latin typeface="Calibri"/>
+              </a:rPr>
+              <a:t>Atención</a:t>
+            </a:r>
+          </a:p>
+          <a:p>
+            <a:pPr>
+              <a:spcBef>
+                <a:spcPts val="400"/>
+              </a:spcBef>
+            </a:pPr>
+            <a:r>
+              <a:rPr sz="1400" b="0" i="0">
+                <a:solidFill>
+                  <a:srgbClr val="333333"/>
+                </a:solidFill>
+                <a:latin typeface="Calibri"/>
+              </a:rPr>
+              <a:t>Si el docente asigna taller esta semana, él indica el canal y la fecha.</a:t>
+            </a:r>
+          </a:p>
+        </p:txBody>
+      </p:sp>
+      <p:sp>
+        <p:nvSpPr>
+          <p:cNvPr id="14" name="TextBox 13"/>
+          <p:cNvSpPr txBox="1"/>
+          <p:nvPr/>
+        </p:nvSpPr>
+        <p:spPr>
+          <a:xfrm>
+            <a:off x="11185855" y="6473952"/>
+            <a:ext cx="640080" cy="274320"/>
+          </a:xfrm>
+          <a:prstGeom prst="rect">
+            <a:avLst/>
+          </a:prstGeom>
+          <a:noFill/>
+        </p:spPr>
+        <p:txBody>
+          <a:bodyPr wrap="square">
+            <a:spAutoFit/>
+          </a:bodyPr>
+          <a:lstStyle/>
+          <a:p>
+            <a:pPr algn="r"/>
+            <a:r>
+              <a:rPr sz="1100" b="0" i="0">
+                <a:solidFill>
+                  <a:srgbClr val="666666"/>
+                </a:solidFill>
+                <a:latin typeface="Calibri"/>
+              </a:rPr>
+              <a:t>33</a:t>
+            </a:r>
+          </a:p>
+        </p:txBody>
+      </p:sp>
+    </p:spTree>
+  </p:cSld>
+  <p:clrMapOvr>
+    <a:masterClrMapping/>
+  </p:clrMapOvr>
+</p:sld>
+</file>
+
+<file path=ppt/slides/slide34.xml><?xml version="1.0" encoding="utf-8"?>
+<p:sld xmlns:a="http://schemas.openxmlformats.org/drawingml/2006/main" xmlns:p="http://schemas.openxmlformats.org/presentationml/2006/main" xmlns:r="http://schemas.openxmlformats.org/officeDocument/2006/relationships">
+  <p:cSld>
+    <p:bg>
+      <p:bgPr>
+        <a:solidFill>
+          <a:srgbClr val="FFFFFF"/>
+        </a:solidFill>
+        <a:effectLst/>
+      </p:bgPr>
+    </p:bg>
+    <p:spTree>
+      <p:nvGrpSpPr>
+        <p:cNvPr id="1" name=""/>
+        <p:cNvGrpSpPr/>
+        <p:nvPr/>
+      </p:nvGrpSpPr>
+      <p:grpSpPr/>
+      <p:sp>
+        <p:nvSpPr>
+          <p:cNvPr id="2" name="Rectangle 1"/>
+          <p:cNvSpPr/>
+          <p:nvPr/>
+        </p:nvSpPr>
+        <p:spPr>
+          <a:xfrm>
+            <a:off x="0" y="0"/>
             <a:ext cx="12191695" cy="164592"/>
           </a:xfrm>
           <a:prstGeom prst="rect">
@@ -13920,38 +14511,6 @@
                 </a:solidFill>
                 <a:latin typeface="Calibri"/>
               </a:rPr>
-              <a:t>–   Esa puerta es la interfaz app-BD y el documento que la describe es el contrato.</a:t>
-            </a:r>
-          </a:p>
-          <a:p>
-            <a:pPr>
-              <a:spcAft>
-                <a:spcPts val="800"/>
-              </a:spcAft>
-            </a:pPr>
-            <a:r>
-              <a:rPr sz="2000" b="0" i="0">
-                <a:solidFill>
-                  <a:srgbClr val="333333"/>
-                </a:solidFill>
-                <a:latin typeface="Calibri"/>
-              </a:rPr>
-              <a:t>–   Hay exactamente dos formas de construirla.</a:t>
-            </a:r>
-          </a:p>
-          <a:p>
-            <a:pPr>
-              <a:spcAft>
-                <a:spcPts val="800"/>
-              </a:spcAft>
-            </a:pPr>
-            <a:r>
-              <a:rPr sz="2000" b="0" i="0">
-                <a:solidFill>
-                  <a:srgbClr val="333333"/>
-                </a:solidFill>
-                <a:latin typeface="Calibri"/>
-              </a:rPr>
               <a:t>–   En la primera, la aplicacion arma texto SQL contra las tablas: SELECT, INSERT y UPDATE escritos dentro del codigo Java o Python, apuntando directo a Mascota, Cita o Insumo.</a:t>
             </a:r>
           </a:p>
@@ -14239,22 +14798,6 @@
               <a:t>–   Y habilita algo que la primera hace imposible: quitarle al usuario de la aplicacion todo permiso de leer o escribir tablas y dejarle solo EXECUTE sobre los procedimientos, que es el privilegio minimo trabajado en la Clase 2.</a:t>
             </a:r>
           </a:p>
-          <a:p>
-            <a:pPr>
-              <a:spcAft>
-                <a:spcPts val="800"/>
-              </a:spcAft>
-            </a:pPr>
-            <a:r>
-              <a:rPr sz="2000" b="0" i="0">
-                <a:solidFill>
-                  <a:srgbClr val="333333"/>
-                </a:solidFill>
-                <a:latin typeface="Calibri"/>
-              </a:rPr>
-              <a:t>–   Todo lo demas de esta clase se deriva de esa decision.</a:t>
-            </a:r>
-          </a:p>
         </p:txBody>
       </p:sp>
       <p:sp>
@@ -14504,7 +15047,7 @@
                 </a:solidFill>
                 <a:latin typeface="Calibri"/>
               </a:rPr>
-              <a:t>–   Concretemoslo en VetCare.</a:t>
+              <a:t>–   Si alguien escribe la secuencia comilla, espacio, OR 1=1, espacio, doble guion, el motor recibe WHERE nombre = '' OR 1=1 -- ' y devuelve la tabla Mascota completa</a:t>
             </a:r>
           </a:p>
           <a:p>
@@ -14520,39 +15063,7 @@
                 </a:solidFill>
                 <a:latin typeface="Calibri"/>
               </a:rPr>
-              <a:t>–   El buscador de mascotas de la recepcion arma la consulta pegando la entrada del usuario, de modo que el motor recibe SELECT id_mascota, nombre FROM Mascota WHERE nombre = 'ENTRADA'.</a:t>
-            </a:r>
-          </a:p>
-          <a:p>
-            <a:pPr>
-              <a:spcAft>
-                <a:spcPts val="800"/>
-              </a:spcAft>
-            </a:pPr>
-            <a:r>
-              <a:rPr sz="2000" b="0" i="0">
-                <a:solidFill>
-                  <a:srgbClr val="333333"/>
-                </a:solidFill>
-                <a:latin typeface="Calibri"/>
-              </a:rPr>
-              <a:t>–   Si la recepcionista escribe Luna, el motor recibe WHERE nombre = 'Luna', devuelve una fila, todo parece correcto y la aplicacion pasa a produccion.</a:t>
-            </a:r>
-          </a:p>
-          <a:p>
-            <a:pPr>
-              <a:spcAft>
-                <a:spcPts val="800"/>
-              </a:spcAft>
-            </a:pPr>
-            <a:r>
-              <a:rPr sz="2000" b="0" i="0">
-                <a:solidFill>
-                  <a:srgbClr val="333333"/>
-                </a:solidFill>
-                <a:latin typeface="Calibri"/>
-              </a:rPr>
-              <a:t>–   Si alguien escribe la secuencia comilla, espacio, OR 1=1, espacio, doble guion, el motor recibe WHERE nombre = '' OR 1=1 -- ' y devuelve la tabla Mascota completa</a:t>
+              <a:t>–   Porque 1=1 es verdadero para toda fila y el doble guion comenta el resto de la linea, incluida la comilla que quedo sobrando.</a:t>
             </a:r>
           </a:p>
         </p:txBody>
@@ -14772,22 +15283,6 @@
                 </a:solidFill>
                 <a:latin typeface="Calibri"/>
               </a:rPr>
-              <a:t>–   Porque 1=1 es verdadero para toda fila y el doble guion comenta el resto de la linea, incluida la comilla que quedo sobrando.</a:t>
-            </a:r>
-          </a:p>
-          <a:p>
-            <a:pPr>
-              <a:spcAft>
-                <a:spcPts val="800"/>
-              </a:spcAft>
-            </a:pPr>
-            <a:r>
-              <a:rPr sz="2000" b="0" i="0">
-                <a:solidFill>
-                  <a:srgbClr val="333333"/>
-                </a:solidFill>
-                <a:latin typeface="Calibri"/>
-              </a:rPr>
               <a:t>–   El mismo truco en el formulario de acceso permite entrar sin conocer ninguna clave: si la validacion es SELECT COUNT(*) FROM Usuario WHERE usuario = 'U' AND clave = 'C'</a:t>
             </a:r>
           </a:p>
@@ -15001,21 +15496,141 @@
                 </a:solidFill>
                 <a:latin typeface="Calibri"/>
               </a:rPr>
-              <a:t>Por que el parametro lo evita por construccion (1/2)</a:t>
-            </a:r>
-          </a:p>
-        </p:txBody>
-      </p:sp>
-      <p:sp>
-        <p:nvSpPr>
-          <p:cNvPr id="5" name="TextBox 4"/>
+              <a:t>Inyeccion SQL: cuando el dato se interpreta... — sintaxis</a:t>
+            </a:r>
+          </a:p>
+        </p:txBody>
+      </p:sp>
+      <p:sp>
+        <p:nvSpPr>
+          <p:cNvPr id="5" name="Rounded Rectangle 4"/>
+          <p:cNvSpPr/>
+          <p:nvPr/>
+        </p:nvSpPr>
+        <p:spPr>
+          <a:xfrm>
+            <a:off x="457200" y="1261872"/>
+            <a:ext cx="11277295" cy="5093208"/>
+          </a:xfrm>
+          <a:prstGeom prst="roundRect">
+            <a:avLst>
+              <a:gd name="adj" fmla="val 12000"/>
+            </a:avLst>
+          </a:prstGeom>
+          <a:solidFill>
+            <a:srgbClr val="1E2A38"/>
+          </a:solidFill>
+          <a:ln>
+            <a:noFill/>
+          </a:ln>
+        </p:spPr>
+        <p:style>
+          <a:lnRef idx="1">
+            <a:schemeClr val="accent1"/>
+          </a:lnRef>
+          <a:fillRef idx="3">
+            <a:schemeClr val="accent1"/>
+          </a:fillRef>
+          <a:effectRef idx="2">
+            <a:schemeClr val="accent1"/>
+          </a:effectRef>
+          <a:fontRef idx="minor">
+            <a:schemeClr val="lt1"/>
+          </a:fontRef>
+        </p:style>
+        <p:txBody>
+          <a:bodyPr rtlCol="0" anchor="ctr"/>
+          <a:lstStyle/>
+          <a:p>
+            <a:pPr algn="ctr"/>
+          </a:p>
+        </p:txBody>
+      </p:sp>
+      <p:sp>
+        <p:nvSpPr>
+          <p:cNvPr id="6" name="Rectangle 5"/>
+          <p:cNvSpPr/>
+          <p:nvPr/>
+        </p:nvSpPr>
+        <p:spPr>
+          <a:xfrm>
+            <a:off x="457200" y="1261872"/>
+            <a:ext cx="11277295" cy="320040"/>
+          </a:xfrm>
+          <a:prstGeom prst="rect">
+            <a:avLst/>
+          </a:prstGeom>
+          <a:solidFill>
+            <a:srgbClr val="095292"/>
+          </a:solidFill>
+          <a:ln>
+            <a:noFill/>
+          </a:ln>
+        </p:spPr>
+        <p:style>
+          <a:lnRef idx="1">
+            <a:schemeClr val="accent1"/>
+          </a:lnRef>
+          <a:fillRef idx="3">
+            <a:schemeClr val="accent1"/>
+          </a:fillRef>
+          <a:effectRef idx="2">
+            <a:schemeClr val="accent1"/>
+          </a:effectRef>
+          <a:fontRef idx="minor">
+            <a:schemeClr val="lt1"/>
+          </a:fontRef>
+        </p:style>
+        <p:txBody>
+          <a:bodyPr rtlCol="0" anchor="ctr"/>
+          <a:lstStyle/>
+          <a:p>
+            <a:pPr algn="ctr"/>
+          </a:p>
+        </p:txBody>
+      </p:sp>
+      <p:sp>
+        <p:nvSpPr>
+          <p:cNvPr id="7" name="TextBox 6"/>
           <p:cNvSpPr txBox="1"/>
           <p:nvPr/>
         </p:nvSpPr>
         <p:spPr>
           <a:xfrm>
-            <a:off x="457200" y="1170432"/>
-            <a:ext cx="11277295" cy="5230368"/>
+            <a:off x="685800" y="1307592"/>
+            <a:ext cx="10820095" cy="256032"/>
+          </a:xfrm>
+          <a:prstGeom prst="rect">
+            <a:avLst/>
+          </a:prstGeom>
+          <a:noFill/>
+        </p:spPr>
+        <p:txBody>
+          <a:bodyPr wrap="square" anchor="ctr"/>
+          <a:lstStyle/>
+          <a:p>
+            <a:r>
+              <a:rPr sz="1000" b="1" i="0">
+                <a:solidFill>
+                  <a:srgbClr val="269CCB"/>
+                </a:solidFill>
+                <a:latin typeface="Calibri"/>
+              </a:rPr>
+              <a:t>● ● ●</a:t>
+            </a:r>
+          </a:p>
+        </p:txBody>
+      </p:sp>
+      <p:sp>
+        <p:nvSpPr>
+          <p:cNvPr id="8" name="TextBox 7"/>
+          <p:cNvSpPr txBox="1"/>
+          <p:nvPr/>
+        </p:nvSpPr>
+        <p:spPr>
+          <a:xfrm>
+            <a:off x="777240" y="1719072"/>
+            <a:ext cx="10637215" cy="4453128"/>
           </a:xfrm>
           <a:prstGeom prst="rect">
             <a:avLst/>
@@ -15030,104 +15645,56 @@
           <a:p>
             <a:pPr>
               <a:spcAft>
-                <a:spcPts val="800"/>
+                <a:spcPts val="400"/>
               </a:spcAft>
             </a:pPr>
             <a:r>
-              <a:rPr sz="2000" b="0" i="0">
-                <a:solidFill>
-                  <a:srgbClr val="333333"/>
-                </a:solidFill>
-                <a:latin typeface="Calibri"/>
-              </a:rPr>
-              <a:t>–   El parametro evita esto por construccion, y hay que explicar el mecanismo y no solo la receta.</a:t>
+              <a:rPr sz="1400" b="0" i="0">
+                <a:solidFill>
+                  <a:srgbClr val="FFFFFF"/>
+                </a:solidFill>
+                <a:latin typeface="Calibri"/>
+              </a:rPr>
+              <a:t>SELECT id_mascota, nombre</a:t>
             </a:r>
           </a:p>
           <a:p>
             <a:pPr>
               <a:spcAft>
-                <a:spcPts val="800"/>
+                <a:spcPts val="400"/>
               </a:spcAft>
             </a:pPr>
             <a:r>
-              <a:rPr sz="2000" b="0" i="0">
-                <a:solidFill>
-                  <a:srgbClr val="333333"/>
-                </a:solidFill>
-                <a:latin typeface="Calibri"/>
-              </a:rPr>
-              <a:t>–   Cuando la aplicacion envia la sentencia con marcadores de posicion (en Oracle:1 o:p_nombre, en JDBC el signo de interrogacion) el motor analiza primero la sentencia sin los valores, construye el plan de ejecucion</a:t>
+              <a:rPr sz="1400" b="0" i="0">
+                <a:solidFill>
+                  <a:srgbClr val="FFFFFF"/>
+                </a:solidFill>
+                <a:latin typeface="Calibri"/>
+              </a:rPr>
+              <a:t>FROM Mascota</a:t>
             </a:r>
           </a:p>
           <a:p>
             <a:pPr>
               <a:spcAft>
-                <a:spcPts val="800"/>
+                <a:spcPts val="400"/>
               </a:spcAft>
             </a:pPr>
             <a:r>
-              <a:rPr sz="2000" b="0" i="0">
-                <a:solidFill>
-                  <a:srgbClr val="333333"/>
-                </a:solidFill>
-                <a:latin typeface="Calibri"/>
-              </a:rPr>
-              <a:t>–   Y solo despues recibe cada valor como un dato tipado que se acomoda en una casilla ya reservada.</a:t>
-            </a:r>
-          </a:p>
-          <a:p>
-            <a:pPr>
-              <a:spcAft>
-                <a:spcPts val="800"/>
-              </a:spcAft>
-            </a:pPr>
-            <a:r>
-              <a:rPr sz="2000" b="0" i="0">
-                <a:solidFill>
-                  <a:srgbClr val="333333"/>
-                </a:solidFill>
-                <a:latin typeface="Calibri"/>
-              </a:rPr>
-              <a:t>–   Ese valor nunca vuelve al analizador sintactico: si el usuario escribio comilla OR 1=1 doble guion, el motor busca literalmente una mascota cuyo nombre sea esa cadena, no la encuentra y devuelve cero filas.</a:t>
-            </a:r>
-          </a:p>
-          <a:p>
-            <a:pPr>
-              <a:spcAft>
-                <a:spcPts val="800"/>
-              </a:spcAft>
-            </a:pPr>
-            <a:r>
-              <a:rPr sz="2000" b="0" i="0">
-                <a:solidFill>
-                  <a:srgbClr val="333333"/>
-                </a:solidFill>
-                <a:latin typeface="Calibri"/>
-              </a:rPr>
-              <a:t>–   La inyeccion queda imposible, no improbable, y esa diferencia entre imposible e improbable es la que hay que instalar.</a:t>
-            </a:r>
-          </a:p>
-          <a:p>
-            <a:pPr>
-              <a:spcAft>
-                <a:spcPts val="800"/>
-              </a:spcAft>
-            </a:pPr>
-            <a:r>
-              <a:rPr sz="2000" b="0" i="0">
-                <a:solidFill>
-                  <a:srgbClr val="333333"/>
-                </a:solidFill>
-                <a:latin typeface="Calibri"/>
-              </a:rPr>
-              <a:t>–   Llamar un procedimiento con parametros hereda esa proteccion y agrega dos cosas: el usuario de la aplicacion puede tener EXECUTE sobre sp_agendar_cita y ninguna posibilidad de SELECT ni UPDATE sobre las tablas</a:t>
-            </a:r>
-          </a:p>
-        </p:txBody>
-      </p:sp>
-      <p:sp>
-        <p:nvSpPr>
-          <p:cNvPr id="6" name="TextBox 5"/>
+              <a:rPr sz="1400" b="0" i="0">
+                <a:solidFill>
+                  <a:srgbClr val="FFFFFF"/>
+                </a:solidFill>
+                <a:latin typeface="Calibri"/>
+              </a:rPr>
+              <a:t>WHERE nombre = 'ENTRADA'</a:t>
+            </a:r>
+          </a:p>
+        </p:txBody>
+      </p:sp>
+      <p:sp>
+        <p:nvSpPr>
+          <p:cNvPr id="9" name="TextBox 8"/>
           <p:cNvSpPr txBox="1"/>
           <p:nvPr/>
         </p:nvSpPr>
@@ -15301,7 +15868,7 @@
                 </a:solidFill>
                 <a:latin typeface="Calibri"/>
               </a:rPr>
-              <a:t>Por que el parametro lo evita por construccion (2/2)</a:t>
+              <a:t>Por que el parametro lo evita por construccion (1/2)</a:t>
             </a:r>
           </a:p>
         </p:txBody>
@@ -15340,7 +15907,7 @@
                 </a:solidFill>
                 <a:latin typeface="Calibri"/>
               </a:rPr>
-              <a:t>–   De modo que aunque alguien controle la entrada no tiene sobre que ejercerla</a:t>
+              <a:t>–   El parametro evita esto por construccion, y hay que explicar el mecanismo y no solo la receta.</a:t>
             </a:r>
           </a:p>
           <a:p>
@@ -15356,7 +15923,7 @@
                 </a:solidFill>
                 <a:latin typeface="Calibri"/>
               </a:rPr>
-              <a:t>–   Y el motor reutiliza el plan porque la sentencia es siempre la misma cadena, lo que enlaza con el analisis de planes de las Clases 6 y 8.</a:t>
+              <a:t>–   Cuando la aplicacion envia la sentencia con marcadores de posicion (en Oracle:1 o:p_nombre, en JDBC el signo de interrogacion) el motor analiza primero la sentencia sin los valores, construye el plan de ejecucion</a:t>
             </a:r>
           </a:p>
           <a:p>
@@ -15372,7 +15939,7 @@
                 </a:solidFill>
                 <a:latin typeface="Calibri"/>
               </a:rPr>
-              <a:t>–   Aqui llega la primera pregunta previsible: si uso un ORM como JPA, ya estoy protegido.</a:t>
+              <a:t>–   Y solo despues recibe cada valor como un dato tipado que se acomoda en una casilla ya reservada.</a:t>
             </a:r>
           </a:p>
           <a:p>
@@ -15388,23 +15955,7 @@
                 </a:solidFill>
                 <a:latin typeface="Calibri"/>
               </a:rPr>
-              <a:t>–   La respuesta honesta es que si mientras use los metodos del ORM o consultas con parametros nombrados, y que no en el momento en que arme una consulta nativa concatenando texto, porque el ORM no revisa lo que usted le entrega.</a:t>
-            </a:r>
-          </a:p>
-          <a:p>
-            <a:pPr>
-              <a:spcAft>
-                <a:spcPts val="800"/>
-              </a:spcAft>
-            </a:pPr>
-            <a:r>
-              <a:rPr sz="2000" b="0" i="0">
-                <a:solidFill>
-                  <a:srgbClr val="333333"/>
-                </a:solidFill>
-                <a:latin typeface="Calibri"/>
-              </a:rPr>
-              <a:t>–   La vulnerabilidad no la produce la tecnologia sino la concatenacion.</a:t>
+              <a:t>–   Ese valor nunca vuelve al analizador sintactico: si el usuario escribio comilla OR 1=1 doble guion, el motor busca literalmente una mascota cuyo nombre sea esa cadena, no la encuentra y devuelve cero filas.</a:t>
             </a:r>
           </a:p>
         </p:txBody>

--- a/Bases de Datos II/Clases/Clase 12 - Integracion y preparacion final/Presentacion.pptx
+++ b/Bases de Datos II/Clases/Clase 12 - Integracion y preparacion final/Presentacion.pptx
@@ -39,6 +39,8 @@
     <p:sldId id="287" r:id="rId38"/>
     <p:sldId id="288" r:id="rId39"/>
     <p:sldId id="289" r:id="rId40"/>
+    <p:sldId id="290" r:id="rId41"/>
+    <p:sldId id="291" r:id="rId42"/>
   </p:sldIdLst>
   <p:sldSz cx="12191695" cy="6858000" type="screen4x3"/>
   <p:notesSz cx="6858000" cy="9144000"/>
@@ -7631,7 +7633,7 @@
                 </a:solidFill>
                 <a:latin typeface="Calibri"/>
               </a:rPr>
-              <a:t>El contrato que la app consume (no SQL suelto)</a:t>
+              <a:t>El contrato de la capa de API: siempre parametros ligados</a:t>
             </a:r>
           </a:p>
         </p:txBody>
@@ -7645,7 +7647,7 @@
         <p:spPr>
           <a:xfrm>
             <a:off x="457200" y="1261872"/>
-            <a:ext cx="11277295" cy="4773168"/>
+            <a:ext cx="11277295" cy="5093208"/>
           </a:xfrm>
           <a:prstGeom prst="roundRect">
             <a:avLst>
@@ -7765,7 +7767,7 @@
         <p:spPr>
           <a:xfrm>
             <a:off x="777240" y="1719072"/>
-            <a:ext cx="10637215" cy="4133087"/>
+            <a:ext cx="10637215" cy="4453128"/>
           </a:xfrm>
           <a:prstGeom prst="rect">
             <a:avLst/>
@@ -7790,7 +7792,7 @@
                 </a:solidFill>
                 <a:latin typeface="Calibri"/>
               </a:rPr>
-              <a:t>sp_agendar_cita(</a:t>
+              <a:t>-- La BD expone operaciones, no tablas. La aplicacion llama, no improvisa SQL.</a:t>
             </a:r>
           </a:p>
           <a:p>
@@ -7806,7 +7808,7 @@
                 </a:solidFill>
                 <a:latin typeface="Calibri"/>
               </a:rPr>
-              <a:t>   p_id_cita     IN  NUMBER,</a:t>
+              <a:t>CREATE OR REPLACE FUNCTION api_agenda_del_dia(p_dia DATE)</a:t>
             </a:r>
           </a:p>
           <a:p>
@@ -7822,7 +7824,7 @@
                 </a:solidFill>
                 <a:latin typeface="Calibri"/>
               </a:rPr>
-              <a:t>   p_id_mascota  IN  NUMBER,</a:t>
+              <a:t>RETURNS TABLE (id_cita INT, hora TIMESTAMP, mascota VARCHAR, dueno VARCHAR)</a:t>
             </a:r>
           </a:p>
           <a:p>
@@ -7838,7 +7840,7 @@
                 </a:solidFill>
                 <a:latin typeface="Calibri"/>
               </a:rPr>
-              <a:t>   p_fecha       IN  TIMESTAMP,</a:t>
+              <a:t>LANGUAGE sql</a:t>
             </a:r>
           </a:p>
           <a:p>
@@ -7854,7 +7856,7 @@
                 </a:solidFill>
                 <a:latin typeface="Calibri"/>
               </a:rPr>
-              <a:t>   p_msg         OUT VARCHAR2   -- 'OK: ...' | 'ERROR: ...'</a:t>
+              <a:t>STABLE</a:t>
             </a:r>
           </a:p>
           <a:p>
@@ -7870,7 +7872,119 @@
                 </a:solidFill>
                 <a:latin typeface="Calibri"/>
               </a:rPr>
-              <a:t>)</a:t>
+              <a:t>AS $$</a:t>
+            </a:r>
+          </a:p>
+          <a:p>
+            <a:pPr>
+              <a:spcAft>
+                <a:spcPts val="400"/>
+              </a:spcAft>
+            </a:pPr>
+            <a:r>
+              <a:rPr sz="1400" b="0" i="0">
+                <a:solidFill>
+                  <a:srgbClr val="FFFFFF"/>
+                </a:solidFill>
+                <a:latin typeface="Calibri"/>
+              </a:rPr>
+              <a:t>  SELECT c.id_cita, c.fecha_hora, m.nombre, d.nombre</a:t>
+            </a:r>
+          </a:p>
+          <a:p>
+            <a:pPr>
+              <a:spcAft>
+                <a:spcPts val="400"/>
+              </a:spcAft>
+            </a:pPr>
+            <a:r>
+              <a:rPr sz="1400" b="0" i="0">
+                <a:solidFill>
+                  <a:srgbClr val="FFFFFF"/>
+                </a:solidFill>
+                <a:latin typeface="Calibri"/>
+              </a:rPr>
+              <a:t>  FROM cita c</a:t>
+            </a:r>
+          </a:p>
+          <a:p>
+            <a:pPr>
+              <a:spcAft>
+                <a:spcPts val="400"/>
+              </a:spcAft>
+            </a:pPr>
+            <a:r>
+              <a:rPr sz="1400" b="0" i="0">
+                <a:solidFill>
+                  <a:srgbClr val="FFFFFF"/>
+                </a:solidFill>
+                <a:latin typeface="Calibri"/>
+              </a:rPr>
+              <a:t>  JOIN mascota m ON m.id_mascota = c.id_mascota</a:t>
+            </a:r>
+          </a:p>
+          <a:p>
+            <a:pPr>
+              <a:spcAft>
+                <a:spcPts val="400"/>
+              </a:spcAft>
+            </a:pPr>
+            <a:r>
+              <a:rPr sz="1400" b="0" i="0">
+                <a:solidFill>
+                  <a:srgbClr val="FFFFFF"/>
+                </a:solidFill>
+                <a:latin typeface="Calibri"/>
+              </a:rPr>
+              <a:t>  JOIN dueno   d ON d.id_dueno   = m.id_dueno</a:t>
+            </a:r>
+          </a:p>
+          <a:p>
+            <a:pPr>
+              <a:spcAft>
+                <a:spcPts val="400"/>
+              </a:spcAft>
+            </a:pPr>
+            <a:r>
+              <a:rPr sz="1400" b="0" i="0">
+                <a:solidFill>
+                  <a:srgbClr val="FFFFFF"/>
+                </a:solidFill>
+                <a:latin typeface="Calibri"/>
+              </a:rPr>
+              <a:t>  WHERE c.fecha_hora &gt;= p_dia AND c.fecha_hora &lt; p_dia + 1</a:t>
+            </a:r>
+          </a:p>
+          <a:p>
+            <a:pPr>
+              <a:spcAft>
+                <a:spcPts val="400"/>
+              </a:spcAft>
+            </a:pPr>
+            <a:r>
+              <a:rPr sz="1400" b="0" i="0">
+                <a:solidFill>
+                  <a:srgbClr val="FFFFFF"/>
+                </a:solidFill>
+                <a:latin typeface="Calibri"/>
+              </a:rPr>
+              <a:t>  ORDER BY c.fecha_hora;</a:t>
+            </a:r>
+          </a:p>
+          <a:p>
+            <a:pPr>
+              <a:spcAft>
+                <a:spcPts val="400"/>
+              </a:spcAft>
+            </a:pPr>
+            <a:r>
+              <a:rPr sz="1400" b="0" i="0">
+                <a:solidFill>
+                  <a:srgbClr val="FFFFFF"/>
+                </a:solidFill>
+                <a:latin typeface="Calibri"/>
+              </a:rPr>
+              <a:t>$$;</a:t>
             </a:r>
           </a:p>
         </p:txBody>
@@ -7878,41 +7992,6 @@
       <p:sp>
         <p:nvSpPr>
           <p:cNvPr id="9" name="TextBox 8"/>
-          <p:cNvSpPr txBox="1"/>
-          <p:nvPr/>
-        </p:nvSpPr>
-        <p:spPr>
-          <a:xfrm>
-            <a:off x="457200" y="6080760"/>
-            <a:ext cx="11277295" cy="320040"/>
-          </a:xfrm>
-          <a:prstGeom prst="rect">
-            <a:avLst/>
-          </a:prstGeom>
-          <a:noFill/>
-        </p:spPr>
-        <p:txBody>
-          <a:bodyPr wrap="square">
-            <a:spAutoFit/>
-          </a:bodyPr>
-          <a:lstStyle/>
-          <a:p>
-            <a:pPr algn="ctr"/>
-            <a:r>
-              <a:rPr sz="1200" b="0" i="1">
-                <a:solidFill>
-                  <a:srgbClr val="666666"/>
-                </a:solidFill>
-                <a:latin typeface="Calibri"/>
-              </a:rPr>
-              <a:t>La app llama el proc con parametros tipados: por eso no hay inyeccion SQL.</a:t>
-            </a:r>
-          </a:p>
-        </p:txBody>
-      </p:sp>
-      <p:sp>
-        <p:nvSpPr>
-          <p:cNvPr id="10" name="TextBox 9"/>
           <p:cNvSpPr txBox="1"/>
           <p:nvPr/>
         </p:nvSpPr>
@@ -8086,21 +8165,141 @@
                 </a:solidFill>
                 <a:latin typeface="Calibri"/>
               </a:rPr>
-              <a:t>Demo del dia</a:t>
-            </a:r>
-          </a:p>
-        </p:txBody>
-      </p:sp>
-      <p:sp>
-        <p:nvSpPr>
-          <p:cNvPr id="5" name="TextBox 4"/>
+              <a:t>La inyeccion de SQL, explicada con las dos versiones</a:t>
+            </a:r>
+          </a:p>
+        </p:txBody>
+      </p:sp>
+      <p:sp>
+        <p:nvSpPr>
+          <p:cNvPr id="5" name="Rounded Rectangle 4"/>
+          <p:cNvSpPr/>
+          <p:nvPr/>
+        </p:nvSpPr>
+        <p:spPr>
+          <a:xfrm>
+            <a:off x="457200" y="1261872"/>
+            <a:ext cx="11277295" cy="5093208"/>
+          </a:xfrm>
+          <a:prstGeom prst="roundRect">
+            <a:avLst>
+              <a:gd name="adj" fmla="val 12000"/>
+            </a:avLst>
+          </a:prstGeom>
+          <a:solidFill>
+            <a:srgbClr val="1E2A38"/>
+          </a:solidFill>
+          <a:ln>
+            <a:noFill/>
+          </a:ln>
+        </p:spPr>
+        <p:style>
+          <a:lnRef idx="1">
+            <a:schemeClr val="accent1"/>
+          </a:lnRef>
+          <a:fillRef idx="3">
+            <a:schemeClr val="accent1"/>
+          </a:fillRef>
+          <a:effectRef idx="2">
+            <a:schemeClr val="accent1"/>
+          </a:effectRef>
+          <a:fontRef idx="minor">
+            <a:schemeClr val="lt1"/>
+          </a:fontRef>
+        </p:style>
+        <p:txBody>
+          <a:bodyPr rtlCol="0" anchor="ctr"/>
+          <a:lstStyle/>
+          <a:p>
+            <a:pPr algn="ctr"/>
+          </a:p>
+        </p:txBody>
+      </p:sp>
+      <p:sp>
+        <p:nvSpPr>
+          <p:cNvPr id="6" name="Rectangle 5"/>
+          <p:cNvSpPr/>
+          <p:nvPr/>
+        </p:nvSpPr>
+        <p:spPr>
+          <a:xfrm>
+            <a:off x="457200" y="1261872"/>
+            <a:ext cx="11277295" cy="320040"/>
+          </a:xfrm>
+          <a:prstGeom prst="rect">
+            <a:avLst/>
+          </a:prstGeom>
+          <a:solidFill>
+            <a:srgbClr val="095292"/>
+          </a:solidFill>
+          <a:ln>
+            <a:noFill/>
+          </a:ln>
+        </p:spPr>
+        <p:style>
+          <a:lnRef idx="1">
+            <a:schemeClr val="accent1"/>
+          </a:lnRef>
+          <a:fillRef idx="3">
+            <a:schemeClr val="accent1"/>
+          </a:fillRef>
+          <a:effectRef idx="2">
+            <a:schemeClr val="accent1"/>
+          </a:effectRef>
+          <a:fontRef idx="minor">
+            <a:schemeClr val="lt1"/>
+          </a:fontRef>
+        </p:style>
+        <p:txBody>
+          <a:bodyPr rtlCol="0" anchor="ctr"/>
+          <a:lstStyle/>
+          <a:p>
+            <a:pPr algn="ctr"/>
+          </a:p>
+        </p:txBody>
+      </p:sp>
+      <p:sp>
+        <p:nvSpPr>
+          <p:cNvPr id="7" name="TextBox 6"/>
           <p:cNvSpPr txBox="1"/>
           <p:nvPr/>
         </p:nvSpPr>
         <p:spPr>
           <a:xfrm>
-            <a:off x="457200" y="1170432"/>
-            <a:ext cx="11277295" cy="5230368"/>
+            <a:off x="685800" y="1307592"/>
+            <a:ext cx="10820095" cy="256032"/>
+          </a:xfrm>
+          <a:prstGeom prst="rect">
+            <a:avLst/>
+          </a:prstGeom>
+          <a:noFill/>
+        </p:spPr>
+        <p:txBody>
+          <a:bodyPr wrap="square" anchor="ctr"/>
+          <a:lstStyle/>
+          <a:p>
+            <a:r>
+              <a:rPr sz="1000" b="1" i="0">
+                <a:solidFill>
+                  <a:srgbClr val="269CCB"/>
+                </a:solidFill>
+                <a:latin typeface="Calibri"/>
+              </a:rPr>
+              <a:t>● ● ●</a:t>
+            </a:r>
+          </a:p>
+        </p:txBody>
+      </p:sp>
+      <p:sp>
+        <p:nvSpPr>
+          <p:cNvPr id="8" name="TextBox 7"/>
+          <p:cNvSpPr txBox="1"/>
+          <p:nvPr/>
+        </p:nvSpPr>
+        <p:spPr>
+          <a:xfrm>
+            <a:off x="777240" y="1719072"/>
+            <a:ext cx="10637215" cy="4453128"/>
           </a:xfrm>
           <a:prstGeom prst="rect">
             <a:avLst/>
@@ -8115,108 +8314,184 @@
           <a:p>
             <a:pPr>
               <a:spcAft>
-                <a:spcPts val="800"/>
+                <a:spcPts val="400"/>
               </a:spcAft>
             </a:pPr>
             <a:r>
-              <a:rPr sz="2000" b="0" i="0">
-                <a:solidFill>
-                  <a:srgbClr val="333333"/>
-                </a:solidFill>
-                <a:latin typeface="Calibri"/>
-              </a:rPr>
-              <a:t>–   </a:t>
-            </a:r>
-            <a:r>
-              <a:rPr sz="2000" b="1" i="0">
-                <a:solidFill>
-                  <a:srgbClr val="333333"/>
-                </a:solidFill>
-                <a:latin typeface="Calibri"/>
-              </a:rPr>
-              <a:t>Herramienta:</a:t>
-            </a:r>
-            <a:r>
-              <a:rPr sz="2000" b="0" i="0">
-                <a:solidFill>
-                  <a:srgbClr val="333333"/>
-                </a:solidFill>
-                <a:latin typeface="Calibri"/>
-              </a:rPr>
-              <a:t> Google Docs + Live SQL + Excalidraw</a:t>
+              <a:rPr sz="1400" b="0" i="0">
+                <a:solidFill>
+                  <a:srgbClr val="FFFFFF"/>
+                </a:solidFill>
+                <a:latin typeface="Calibri"/>
+              </a:rPr>
+              <a:t>-- MAL: la aplicacion concatena lo que el usuario escribio</a:t>
             </a:r>
           </a:p>
           <a:p>
             <a:pPr>
               <a:spcAft>
-                <a:spcPts val="800"/>
+                <a:spcPts val="400"/>
               </a:spcAft>
             </a:pPr>
             <a:r>
-              <a:rPr sz="2000" b="0" i="0">
-                <a:solidFill>
-                  <a:srgbClr val="333333"/>
-                </a:solidFill>
-                <a:latin typeface="Calibri"/>
-              </a:rPr>
-              <a:t>–   </a:t>
-            </a:r>
-            <a:r>
-              <a:rPr sz="2000" b="1" i="0">
-                <a:solidFill>
-                  <a:srgbClr val="333333"/>
-                </a:solidFill>
-                <a:latin typeface="Calibri"/>
-              </a:rPr>
-              <a:t>Demo:</a:t>
-            </a:r>
-            <a:r>
-              <a:rPr sz="2000" b="0" i="0">
-                <a:solidFill>
-                  <a:srgbClr val="333333"/>
-                </a:solidFill>
-                <a:latin typeface="Calibri"/>
-              </a:rPr>
-              <a:t> Plantilla contrato sp_agendar_cita + storyboard 6 slides.</a:t>
+              <a:rPr sz="1400" b="0" i="0">
+                <a:solidFill>
+                  <a:srgbClr val="FFFFFF"/>
+                </a:solidFill>
+                <a:latin typeface="Calibri"/>
+              </a:rPr>
+              <a:t>--   "SELECT * FROM dueno WHERE nombre = '" + entrada + "'"</a:t>
             </a:r>
           </a:p>
           <a:p>
             <a:pPr>
               <a:spcAft>
-                <a:spcPts val="800"/>
+                <a:spcPts val="400"/>
               </a:spcAft>
             </a:pPr>
             <a:r>
-              <a:rPr sz="2000" b="0" i="0">
-                <a:solidFill>
-                  <a:srgbClr val="333333"/>
-                </a:solidFill>
-                <a:latin typeface="Calibri"/>
-              </a:rPr>
-              <a:t>–   Sigan el mismo dominio VetCare (no inventen otro caso).</a:t>
+              <a:rPr sz="1400" b="0" i="0">
+                <a:solidFill>
+                  <a:srgbClr val="FFFFFF"/>
+                </a:solidFill>
+                <a:latin typeface="Calibri"/>
+              </a:rPr>
+              <a:t>-- Si entrada = 'x'; DROP TABLE cita; --</a:t>
             </a:r>
           </a:p>
           <a:p>
             <a:pPr>
               <a:spcAft>
-                <a:spcPts val="800"/>
+                <a:spcPts val="400"/>
               </a:spcAft>
             </a:pPr>
             <a:r>
-              <a:rPr sz="2000" b="0" i="0">
-                <a:solidFill>
-                  <a:srgbClr val="333333"/>
-                </a:solidFill>
-                <a:latin typeface="Calibri"/>
-              </a:rPr>
-              <a:t>–   Al final de la demo: dejar enlace/script compartible al grupo.</a:t>
-            </a:r>
-          </a:p>
-        </p:txBody>
-      </p:sp>
-      <p:sp>
-        <p:nvSpPr>
-          <p:cNvPr id="6" name="TextBox 5"/>
+              <a:rPr sz="1400" b="0" i="0">
+                <a:solidFill>
+                  <a:srgbClr val="FFFFFF"/>
+                </a:solidFill>
+                <a:latin typeface="Calibri"/>
+              </a:rPr>
+              <a:t>-- el motor recibe dos sentencias y ejecuta las dos.</a:t>
+            </a:r>
+          </a:p>
+          <a:p>
+            <a:pPr>
+              <a:spcAft>
+                <a:spcPts val="400"/>
+              </a:spcAft>
+            </a:pPr>
+            <a:r>
+              <a:rPr sz="1400" b="0" i="0">
+                <a:solidFill>
+                  <a:srgbClr val="FFFFFF"/>
+                </a:solidFill>
+                <a:latin typeface="Calibri"/>
+              </a:rPr>
+              <a:t/>
+            </a:r>
+          </a:p>
+          <a:p>
+            <a:pPr>
+              <a:spcAft>
+                <a:spcPts val="400"/>
+              </a:spcAft>
+            </a:pPr>
+            <a:r>
+              <a:rPr sz="1400" b="0" i="0">
+                <a:solidFill>
+                  <a:srgbClr val="FFFFFF"/>
+                </a:solidFill>
+                <a:latin typeface="Calibri"/>
+              </a:rPr>
+              <a:t>-- BIEN: el valor viaja como PARAMETRO, nunca como texto de la sentencia</a:t>
+            </a:r>
+          </a:p>
+          <a:p>
+            <a:pPr>
+              <a:spcAft>
+                <a:spcPts val="400"/>
+              </a:spcAft>
+            </a:pPr>
+            <a:r>
+              <a:rPr sz="1400" b="0" i="0">
+                <a:solidFill>
+                  <a:srgbClr val="FFFFFF"/>
+                </a:solidFill>
+                <a:latin typeface="Calibri"/>
+              </a:rPr>
+              <a:t>PREPARE buscar_dueno (VARCHAR) AS</a:t>
+            </a:r>
+          </a:p>
+          <a:p>
+            <a:pPr>
+              <a:spcAft>
+                <a:spcPts val="400"/>
+              </a:spcAft>
+            </a:pPr>
+            <a:r>
+              <a:rPr sz="1400" b="0" i="0">
+                <a:solidFill>
+                  <a:srgbClr val="FFFFFF"/>
+                </a:solidFill>
+                <a:latin typeface="Calibri"/>
+              </a:rPr>
+              <a:t>  SELECT id_dueno, nombre, telefono FROM dueno WHERE nombre = $1;</a:t>
+            </a:r>
+          </a:p>
+          <a:p>
+            <a:pPr>
+              <a:spcAft>
+                <a:spcPts val="400"/>
+              </a:spcAft>
+            </a:pPr>
+            <a:r>
+              <a:rPr sz="1400" b="0" i="0">
+                <a:solidFill>
+                  <a:srgbClr val="FFFFFF"/>
+                </a:solidFill>
+                <a:latin typeface="Calibri"/>
+              </a:rPr>
+              <a:t/>
+            </a:r>
+          </a:p>
+          <a:p>
+            <a:pPr>
+              <a:spcAft>
+                <a:spcPts val="400"/>
+              </a:spcAft>
+            </a:pPr>
+            <a:r>
+              <a:rPr sz="1400" b="0" i="0">
+                <a:solidFill>
+                  <a:srgbClr val="FFFFFF"/>
+                </a:solidFill>
+                <a:latin typeface="Calibri"/>
+              </a:rPr>
+              <a:t>EXECUTE buscar_dueno('Ana Gomez');</a:t>
+            </a:r>
+          </a:p>
+          <a:p>
+            <a:pPr>
+              <a:spcAft>
+                <a:spcPts val="400"/>
+              </a:spcAft>
+            </a:pPr>
+            <a:r>
+              <a:rPr sz="1400" b="0" i="0">
+                <a:solidFill>
+                  <a:srgbClr val="FFFFFF"/>
+                </a:solidFill>
+                <a:latin typeface="Calibri"/>
+              </a:rPr>
+              <a:t>EXECUTE buscar_dueno('x''; DROP TABLE cita; --');   -- 0 filas, nada mas</a:t>
+            </a:r>
+          </a:p>
+        </p:txBody>
+      </p:sp>
+      <p:sp>
+        <p:nvSpPr>
+          <p:cNvPr id="9" name="TextBox 8"/>
           <p:cNvSpPr txBox="1"/>
           <p:nvPr/>
         </p:nvSpPr>
@@ -8284,7 +8559,7 @@
         <p:spPr>
           <a:xfrm>
             <a:off x="0" y="0"/>
-            <a:ext cx="12191695" cy="1170432"/>
+            <a:ext cx="12191695" cy="960120"/>
           </a:xfrm>
           <a:prstGeom prst="rect">
             <a:avLst/>
@@ -8326,7 +8601,7 @@
         </p:nvSpPr>
         <p:spPr>
           <a:xfrm>
-            <a:off x="0" y="1170432"/>
+            <a:off x="0" y="960120"/>
             <a:ext cx="12191695" cy="41148"/>
           </a:xfrm>
           <a:prstGeom prst="rect">
@@ -8370,7 +8645,7 @@
         <p:spPr>
           <a:xfrm>
             <a:off x="457200" y="164592"/>
-            <a:ext cx="11277295" cy="384048"/>
+            <a:ext cx="11277295" cy="502920"/>
           </a:xfrm>
           <a:prstGeom prst="rect">
             <a:avLst/>
@@ -8390,55 +8665,21 @@
                 </a:solidFill>
                 <a:latin typeface="Calibri"/>
               </a:rPr>
-              <a:t>Herramientas de hoy</a:t>
-            </a:r>
-          </a:p>
-        </p:txBody>
-      </p:sp>
-      <p:sp>
-        <p:nvSpPr>
-          <p:cNvPr id="5" name="TextBox 4"/>
-          <p:cNvSpPr txBox="1"/>
-          <p:nvPr/>
-        </p:nvSpPr>
-        <p:spPr>
-          <a:xfrm>
-            <a:off x="457200" y="566928"/>
-            <a:ext cx="11277295" cy="411480"/>
-          </a:xfrm>
-          <a:prstGeom prst="rect">
-            <a:avLst/>
-          </a:prstGeom>
-          <a:noFill/>
-        </p:spPr>
-        <p:txBody>
-          <a:bodyPr wrap="square">
-            <a:spAutoFit/>
-          </a:bodyPr>
-          <a:lstStyle/>
-          <a:p>
-            <a:r>
-              <a:rPr sz="1400" b="0" i="0">
-                <a:solidFill>
-                  <a:srgbClr val="B8D8EE"/>
-                </a:solidFill>
-                <a:latin typeface="Calibri"/>
-              </a:rPr>
-              <a:t>Gratis · navegador o free tier</a:t>
-            </a:r>
-          </a:p>
-        </p:txBody>
-      </p:sp>
-      <p:sp>
-        <p:nvSpPr>
-          <p:cNvPr id="6" name="Rounded Rectangle 5"/>
+              <a:t>El contrato que la app consume (no SQL suelto)</a:t>
+            </a:r>
+          </a:p>
+        </p:txBody>
+      </p:sp>
+      <p:sp>
+        <p:nvSpPr>
+          <p:cNvPr id="5" name="Rounded Rectangle 4"/>
           <p:cNvSpPr/>
           <p:nvPr/>
         </p:nvSpPr>
         <p:spPr>
           <a:xfrm>
-            <a:off x="457200" y="1591056"/>
-            <a:ext cx="3624986" cy="2331720"/>
+            <a:off x="457200" y="1261872"/>
+            <a:ext cx="11277295" cy="4773168"/>
           </a:xfrm>
           <a:prstGeom prst="roundRect">
             <a:avLst>
@@ -8446,7 +8687,7 @@
             </a:avLst>
           </a:prstGeom>
           <a:solidFill>
-            <a:srgbClr val="F2F2F2"/>
+            <a:srgbClr val="1E2A38"/>
           </a:solidFill>
           <a:ln>
             <a:noFill/>
@@ -8476,14 +8717,14 @@
       </p:sp>
       <p:sp>
         <p:nvSpPr>
-          <p:cNvPr id="7" name="Rectangle 6"/>
+          <p:cNvPr id="6" name="Rectangle 5"/>
           <p:cNvSpPr/>
           <p:nvPr/>
         </p:nvSpPr>
         <p:spPr>
           <a:xfrm>
-            <a:off x="457200" y="1591056"/>
-            <a:ext cx="3624986" cy="64008"/>
+            <a:off x="457200" y="1261872"/>
+            <a:ext cx="11277295" cy="320040"/>
           </a:xfrm>
           <a:prstGeom prst="rect">
             <a:avLst/>
@@ -8519,531 +8760,193 @@
       </p:sp>
       <p:sp>
         <p:nvSpPr>
-          <p:cNvPr id="8" name="Rectangle 7"/>
-          <p:cNvSpPr/>
-          <p:nvPr/>
-        </p:nvSpPr>
-        <p:spPr>
-          <a:xfrm>
-            <a:off x="457200" y="1655064"/>
-            <a:ext cx="3624986" cy="27432"/>
-          </a:xfrm>
-          <a:prstGeom prst="rect">
-            <a:avLst/>
-          </a:prstGeom>
-          <a:solidFill>
-            <a:srgbClr val="FFD000"/>
-          </a:solidFill>
-          <a:ln>
-            <a:noFill/>
-          </a:ln>
-        </p:spPr>
-        <p:style>
-          <a:lnRef idx="1">
-            <a:schemeClr val="accent1"/>
-          </a:lnRef>
-          <a:fillRef idx="3">
-            <a:schemeClr val="accent1"/>
-          </a:fillRef>
-          <a:effectRef idx="2">
-            <a:schemeClr val="accent1"/>
-          </a:effectRef>
-          <a:fontRef idx="minor">
-            <a:schemeClr val="lt1"/>
-          </a:fontRef>
-        </p:style>
-        <p:txBody>
-          <a:bodyPr rtlCol="0" anchor="ctr"/>
+          <p:cNvPr id="7" name="TextBox 6"/>
+          <p:cNvSpPr txBox="1"/>
+          <p:nvPr/>
+        </p:nvSpPr>
+        <p:spPr>
+          <a:xfrm>
+            <a:off x="685800" y="1307592"/>
+            <a:ext cx="10820095" cy="256032"/>
+          </a:xfrm>
+          <a:prstGeom prst="rect">
+            <a:avLst/>
+          </a:prstGeom>
+          <a:noFill/>
+        </p:spPr>
+        <p:txBody>
+          <a:bodyPr wrap="square" anchor="ctr"/>
+          <a:lstStyle/>
+          <a:p>
+            <a:r>
+              <a:rPr sz="1000" b="1" i="0">
+                <a:solidFill>
+                  <a:srgbClr val="269CCB"/>
+                </a:solidFill>
+                <a:latin typeface="Calibri"/>
+              </a:rPr>
+              <a:t>● ● ●</a:t>
+            </a:r>
+          </a:p>
+        </p:txBody>
+      </p:sp>
+      <p:sp>
+        <p:nvSpPr>
+          <p:cNvPr id="8" name="TextBox 7"/>
+          <p:cNvSpPr txBox="1"/>
+          <p:nvPr/>
+        </p:nvSpPr>
+        <p:spPr>
+          <a:xfrm>
+            <a:off x="777240" y="1719072"/>
+            <a:ext cx="10637215" cy="4133087"/>
+          </a:xfrm>
+          <a:prstGeom prst="rect">
+            <a:avLst/>
+          </a:prstGeom>
+          <a:noFill/>
+        </p:spPr>
+        <p:txBody>
+          <a:bodyPr wrap="square">
+            <a:spAutoFit/>
+          </a:bodyPr>
+          <a:lstStyle/>
+          <a:p>
+            <a:pPr>
+              <a:spcAft>
+                <a:spcPts val="400"/>
+              </a:spcAft>
+            </a:pPr>
+            <a:r>
+              <a:rPr sz="1400" b="0" i="0">
+                <a:solidFill>
+                  <a:srgbClr val="FFFFFF"/>
+                </a:solidFill>
+                <a:latin typeface="Calibri"/>
+              </a:rPr>
+              <a:t>sp_agendar_cita(</a:t>
+            </a:r>
+          </a:p>
+          <a:p>
+            <a:pPr>
+              <a:spcAft>
+                <a:spcPts val="400"/>
+              </a:spcAft>
+            </a:pPr>
+            <a:r>
+              <a:rPr sz="1400" b="0" i="0">
+                <a:solidFill>
+                  <a:srgbClr val="FFFFFF"/>
+                </a:solidFill>
+                <a:latin typeface="Calibri"/>
+              </a:rPr>
+              <a:t>   p_id_cita     IN  NUMBER,</a:t>
+            </a:r>
+          </a:p>
+          <a:p>
+            <a:pPr>
+              <a:spcAft>
+                <a:spcPts val="400"/>
+              </a:spcAft>
+            </a:pPr>
+            <a:r>
+              <a:rPr sz="1400" b="0" i="0">
+                <a:solidFill>
+                  <a:srgbClr val="FFFFFF"/>
+                </a:solidFill>
+                <a:latin typeface="Calibri"/>
+              </a:rPr>
+              <a:t>   p_id_mascota  IN  NUMBER,</a:t>
+            </a:r>
+          </a:p>
+          <a:p>
+            <a:pPr>
+              <a:spcAft>
+                <a:spcPts val="400"/>
+              </a:spcAft>
+            </a:pPr>
+            <a:r>
+              <a:rPr sz="1400" b="0" i="0">
+                <a:solidFill>
+                  <a:srgbClr val="FFFFFF"/>
+                </a:solidFill>
+                <a:latin typeface="Calibri"/>
+              </a:rPr>
+              <a:t>   p_fecha       IN  TIMESTAMP,</a:t>
+            </a:r>
+          </a:p>
+          <a:p>
+            <a:pPr>
+              <a:spcAft>
+                <a:spcPts val="400"/>
+              </a:spcAft>
+            </a:pPr>
+            <a:r>
+              <a:rPr sz="1400" b="0" i="0">
+                <a:solidFill>
+                  <a:srgbClr val="FFFFFF"/>
+                </a:solidFill>
+                <a:latin typeface="Calibri"/>
+              </a:rPr>
+              <a:t>   p_msg         OUT VARCHAR2   -- 'OK: ...' | 'ERROR: ...'</a:t>
+            </a:r>
+          </a:p>
+          <a:p>
+            <a:pPr>
+              <a:spcAft>
+                <a:spcPts val="400"/>
+              </a:spcAft>
+            </a:pPr>
+            <a:r>
+              <a:rPr sz="1400" b="0" i="0">
+                <a:solidFill>
+                  <a:srgbClr val="FFFFFF"/>
+                </a:solidFill>
+                <a:latin typeface="Calibri"/>
+              </a:rPr>
+              <a:t>)</a:t>
+            </a:r>
+          </a:p>
+        </p:txBody>
+      </p:sp>
+      <p:sp>
+        <p:nvSpPr>
+          <p:cNvPr id="9" name="TextBox 8"/>
+          <p:cNvSpPr txBox="1"/>
+          <p:nvPr/>
+        </p:nvSpPr>
+        <p:spPr>
+          <a:xfrm>
+            <a:off x="457200" y="6080760"/>
+            <a:ext cx="11277295" cy="320040"/>
+          </a:xfrm>
+          <a:prstGeom prst="rect">
+            <a:avLst/>
+          </a:prstGeom>
+          <a:noFill/>
+        </p:spPr>
+        <p:txBody>
+          <a:bodyPr wrap="square">
+            <a:spAutoFit/>
+          </a:bodyPr>
           <a:lstStyle/>
           <a:p>
             <a:pPr algn="ctr"/>
-          </a:p>
-        </p:txBody>
-      </p:sp>
-      <p:pic>
-        <p:nvPicPr>
-          <p:cNvPr id="9" name="Picture 8" descr="google_docs.png"/>
-          <p:cNvPicPr>
-            <a:picLocks noChangeAspect="1"/>
-          </p:cNvPicPr>
-          <p:nvPr/>
-        </p:nvPicPr>
-        <p:blipFill>
-          <a:blip r:embed="rId2"/>
-          <a:stretch>
-            <a:fillRect/>
-          </a:stretch>
-        </p:blipFill>
-        <p:spPr>
-          <a:xfrm>
-            <a:off x="1643329" y="1847087"/>
-            <a:ext cx="1252728" cy="1252728"/>
-          </a:xfrm>
-          <a:prstGeom prst="rect">
-            <a:avLst/>
-          </a:prstGeom>
-        </p:spPr>
-      </p:pic>
+            <a:r>
+              <a:rPr sz="1200" b="0" i="1">
+                <a:solidFill>
+                  <a:srgbClr val="666666"/>
+                </a:solidFill>
+                <a:latin typeface="Calibri"/>
+              </a:rPr>
+              <a:t>La app llama el proc con parametros tipados: por eso no hay inyeccion SQL.</a:t>
+            </a:r>
+          </a:p>
+        </p:txBody>
+      </p:sp>
       <p:sp>
         <p:nvSpPr>
           <p:cNvPr id="10" name="TextBox 9"/>
-          <p:cNvSpPr txBox="1"/>
-          <p:nvPr/>
-        </p:nvSpPr>
-        <p:spPr>
-          <a:xfrm>
-            <a:off x="530352" y="3191256"/>
-            <a:ext cx="3478682" cy="621792"/>
-          </a:xfrm>
-          <a:prstGeom prst="rect">
-            <a:avLst/>
-          </a:prstGeom>
-          <a:noFill/>
-        </p:spPr>
-        <p:txBody>
-          <a:bodyPr wrap="square" anchor="t"/>
-          <a:lstStyle/>
-          <a:p>
-            <a:pPr algn="ctr"/>
-            <a:r>
-              <a:rPr sz="1300" b="1" i="0">
-                <a:solidFill>
-                  <a:srgbClr val="095292"/>
-                </a:solidFill>
-                <a:latin typeface="Calibri"/>
-              </a:rPr>
-              <a:t>Google Docs</a:t>
-            </a:r>
-          </a:p>
-          <a:p>
-            <a:pPr algn="ctr">
-              <a:spcBef>
-                <a:spcPts val="200"/>
-              </a:spcBef>
-            </a:pPr>
-            <a:r>
-              <a:rPr sz="1000" b="0" i="0">
-                <a:solidFill>
-                  <a:srgbClr val="666666"/>
-                </a:solidFill>
-                <a:latin typeface="Calibri"/>
-              </a:rPr>
-              <a:t>Contrato app-BD</a:t>
-            </a:r>
-          </a:p>
-        </p:txBody>
-      </p:sp>
-      <p:sp>
-        <p:nvSpPr>
-          <p:cNvPr id="11" name="Rounded Rectangle 10"/>
-          <p:cNvSpPr/>
-          <p:nvPr/>
-        </p:nvSpPr>
-        <p:spPr>
-          <a:xfrm>
-            <a:off x="4283354" y="1591056"/>
-            <a:ext cx="3624986" cy="2331720"/>
-          </a:xfrm>
-          <a:prstGeom prst="roundRect">
-            <a:avLst>
-              <a:gd name="adj" fmla="val 12000"/>
-            </a:avLst>
-          </a:prstGeom>
-          <a:solidFill>
-            <a:srgbClr val="F2F2F2"/>
-          </a:solidFill>
-          <a:ln>
-            <a:noFill/>
-          </a:ln>
-        </p:spPr>
-        <p:style>
-          <a:lnRef idx="1">
-            <a:schemeClr val="accent1"/>
-          </a:lnRef>
-          <a:fillRef idx="3">
-            <a:schemeClr val="accent1"/>
-          </a:fillRef>
-          <a:effectRef idx="2">
-            <a:schemeClr val="accent1"/>
-          </a:effectRef>
-          <a:fontRef idx="minor">
-            <a:schemeClr val="lt1"/>
-          </a:fontRef>
-        </p:style>
-        <p:txBody>
-          <a:bodyPr rtlCol="0" anchor="ctr"/>
-          <a:lstStyle/>
-          <a:p>
-            <a:pPr algn="ctr"/>
-          </a:p>
-        </p:txBody>
-      </p:sp>
-      <p:sp>
-        <p:nvSpPr>
-          <p:cNvPr id="12" name="Rectangle 11"/>
-          <p:cNvSpPr/>
-          <p:nvPr/>
-        </p:nvSpPr>
-        <p:spPr>
-          <a:xfrm>
-            <a:off x="4283354" y="1591056"/>
-            <a:ext cx="3624986" cy="64008"/>
-          </a:xfrm>
-          <a:prstGeom prst="rect">
-            <a:avLst/>
-          </a:prstGeom>
-          <a:solidFill>
-            <a:srgbClr val="095292"/>
-          </a:solidFill>
-          <a:ln>
-            <a:noFill/>
-          </a:ln>
-        </p:spPr>
-        <p:style>
-          <a:lnRef idx="1">
-            <a:schemeClr val="accent1"/>
-          </a:lnRef>
-          <a:fillRef idx="3">
-            <a:schemeClr val="accent1"/>
-          </a:fillRef>
-          <a:effectRef idx="2">
-            <a:schemeClr val="accent1"/>
-          </a:effectRef>
-          <a:fontRef idx="minor">
-            <a:schemeClr val="lt1"/>
-          </a:fontRef>
-        </p:style>
-        <p:txBody>
-          <a:bodyPr rtlCol="0" anchor="ctr"/>
-          <a:lstStyle/>
-          <a:p>
-            <a:pPr algn="ctr"/>
-          </a:p>
-        </p:txBody>
-      </p:sp>
-      <p:sp>
-        <p:nvSpPr>
-          <p:cNvPr id="13" name="Rectangle 12"/>
-          <p:cNvSpPr/>
-          <p:nvPr/>
-        </p:nvSpPr>
-        <p:spPr>
-          <a:xfrm>
-            <a:off x="4283354" y="1655064"/>
-            <a:ext cx="3624986" cy="27432"/>
-          </a:xfrm>
-          <a:prstGeom prst="rect">
-            <a:avLst/>
-          </a:prstGeom>
-          <a:solidFill>
-            <a:srgbClr val="FFD000"/>
-          </a:solidFill>
-          <a:ln>
-            <a:noFill/>
-          </a:ln>
-        </p:spPr>
-        <p:style>
-          <a:lnRef idx="1">
-            <a:schemeClr val="accent1"/>
-          </a:lnRef>
-          <a:fillRef idx="3">
-            <a:schemeClr val="accent1"/>
-          </a:fillRef>
-          <a:effectRef idx="2">
-            <a:schemeClr val="accent1"/>
-          </a:effectRef>
-          <a:fontRef idx="minor">
-            <a:schemeClr val="lt1"/>
-          </a:fontRef>
-        </p:style>
-        <p:txBody>
-          <a:bodyPr rtlCol="0" anchor="ctr"/>
-          <a:lstStyle/>
-          <a:p>
-            <a:pPr algn="ctr"/>
-          </a:p>
-        </p:txBody>
-      </p:sp>
-      <p:pic>
-        <p:nvPicPr>
-          <p:cNvPr id="14" name="Picture 13" descr="oracle_livesql.png"/>
-          <p:cNvPicPr>
-            <a:picLocks noChangeAspect="1"/>
-          </p:cNvPicPr>
-          <p:nvPr/>
-        </p:nvPicPr>
-        <p:blipFill>
-          <a:blip r:embed="rId3"/>
-          <a:stretch>
-            <a:fillRect/>
-          </a:stretch>
-        </p:blipFill>
-        <p:spPr>
-          <a:xfrm>
-            <a:off x="5469483" y="1847087"/>
-            <a:ext cx="1252728" cy="1252728"/>
-          </a:xfrm>
-          <a:prstGeom prst="rect">
-            <a:avLst/>
-          </a:prstGeom>
-        </p:spPr>
-      </p:pic>
-      <p:sp>
-        <p:nvSpPr>
-          <p:cNvPr id="15" name="TextBox 14"/>
-          <p:cNvSpPr txBox="1"/>
-          <p:nvPr/>
-        </p:nvSpPr>
-        <p:spPr>
-          <a:xfrm>
-            <a:off x="4356506" y="3191256"/>
-            <a:ext cx="3478682" cy="621792"/>
-          </a:xfrm>
-          <a:prstGeom prst="rect">
-            <a:avLst/>
-          </a:prstGeom>
-          <a:noFill/>
-        </p:spPr>
-        <p:txBody>
-          <a:bodyPr wrap="square" anchor="t"/>
-          <a:lstStyle/>
-          <a:p>
-            <a:pPr algn="ctr"/>
-            <a:r>
-              <a:rPr sz="1300" b="1" i="0">
-                <a:solidFill>
-                  <a:srgbClr val="095292"/>
-                </a:solidFill>
-                <a:latin typeface="Calibri"/>
-              </a:rPr>
-              <a:t>Oracle Live SQL</a:t>
-            </a:r>
-          </a:p>
-          <a:p>
-            <a:pPr algn="ctr">
-              <a:spcBef>
-                <a:spcPts val="200"/>
-              </a:spcBef>
-            </a:pPr>
-            <a:r>
-              <a:rPr sz="1000" b="0" i="0">
-                <a:solidFill>
-                  <a:srgbClr val="666666"/>
-                </a:solidFill>
-                <a:latin typeface="Calibri"/>
-              </a:rPr>
-              <a:t>Ops</a:t>
-            </a:r>
-          </a:p>
-        </p:txBody>
-      </p:sp>
-      <p:sp>
-        <p:nvSpPr>
-          <p:cNvPr id="16" name="Rounded Rectangle 15"/>
-          <p:cNvSpPr/>
-          <p:nvPr/>
-        </p:nvSpPr>
-        <p:spPr>
-          <a:xfrm>
-            <a:off x="8109508" y="1591056"/>
-            <a:ext cx="3624986" cy="2331720"/>
-          </a:xfrm>
-          <a:prstGeom prst="roundRect">
-            <a:avLst>
-              <a:gd name="adj" fmla="val 12000"/>
-            </a:avLst>
-          </a:prstGeom>
-          <a:solidFill>
-            <a:srgbClr val="F2F2F2"/>
-          </a:solidFill>
-          <a:ln>
-            <a:noFill/>
-          </a:ln>
-        </p:spPr>
-        <p:style>
-          <a:lnRef idx="1">
-            <a:schemeClr val="accent1"/>
-          </a:lnRef>
-          <a:fillRef idx="3">
-            <a:schemeClr val="accent1"/>
-          </a:fillRef>
-          <a:effectRef idx="2">
-            <a:schemeClr val="accent1"/>
-          </a:effectRef>
-          <a:fontRef idx="minor">
-            <a:schemeClr val="lt1"/>
-          </a:fontRef>
-        </p:style>
-        <p:txBody>
-          <a:bodyPr rtlCol="0" anchor="ctr"/>
-          <a:lstStyle/>
-          <a:p>
-            <a:pPr algn="ctr"/>
-          </a:p>
-        </p:txBody>
-      </p:sp>
-      <p:sp>
-        <p:nvSpPr>
-          <p:cNvPr id="17" name="Rectangle 16"/>
-          <p:cNvSpPr/>
-          <p:nvPr/>
-        </p:nvSpPr>
-        <p:spPr>
-          <a:xfrm>
-            <a:off x="8109508" y="1591056"/>
-            <a:ext cx="3624986" cy="64008"/>
-          </a:xfrm>
-          <a:prstGeom prst="rect">
-            <a:avLst/>
-          </a:prstGeom>
-          <a:solidFill>
-            <a:srgbClr val="095292"/>
-          </a:solidFill>
-          <a:ln>
-            <a:noFill/>
-          </a:ln>
-        </p:spPr>
-        <p:style>
-          <a:lnRef idx="1">
-            <a:schemeClr val="accent1"/>
-          </a:lnRef>
-          <a:fillRef idx="3">
-            <a:schemeClr val="accent1"/>
-          </a:fillRef>
-          <a:effectRef idx="2">
-            <a:schemeClr val="accent1"/>
-          </a:effectRef>
-          <a:fontRef idx="minor">
-            <a:schemeClr val="lt1"/>
-          </a:fontRef>
-        </p:style>
-        <p:txBody>
-          <a:bodyPr rtlCol="0" anchor="ctr"/>
-          <a:lstStyle/>
-          <a:p>
-            <a:pPr algn="ctr"/>
-          </a:p>
-        </p:txBody>
-      </p:sp>
-      <p:sp>
-        <p:nvSpPr>
-          <p:cNvPr id="18" name="Rectangle 17"/>
-          <p:cNvSpPr/>
-          <p:nvPr/>
-        </p:nvSpPr>
-        <p:spPr>
-          <a:xfrm>
-            <a:off x="8109508" y="1655064"/>
-            <a:ext cx="3624986" cy="27432"/>
-          </a:xfrm>
-          <a:prstGeom prst="rect">
-            <a:avLst/>
-          </a:prstGeom>
-          <a:solidFill>
-            <a:srgbClr val="FFD000"/>
-          </a:solidFill>
-          <a:ln>
-            <a:noFill/>
-          </a:ln>
-        </p:spPr>
-        <p:style>
-          <a:lnRef idx="1">
-            <a:schemeClr val="accent1"/>
-          </a:lnRef>
-          <a:fillRef idx="3">
-            <a:schemeClr val="accent1"/>
-          </a:fillRef>
-          <a:effectRef idx="2">
-            <a:schemeClr val="accent1"/>
-          </a:effectRef>
-          <a:fontRef idx="minor">
-            <a:schemeClr val="lt1"/>
-          </a:fontRef>
-        </p:style>
-        <p:txBody>
-          <a:bodyPr rtlCol="0" anchor="ctr"/>
-          <a:lstStyle/>
-          <a:p>
-            <a:pPr algn="ctr"/>
-          </a:p>
-        </p:txBody>
-      </p:sp>
-      <p:pic>
-        <p:nvPicPr>
-          <p:cNvPr id="19" name="Picture 18" descr="drawio.png"/>
-          <p:cNvPicPr>
-            <a:picLocks noChangeAspect="1"/>
-          </p:cNvPicPr>
-          <p:nvPr/>
-        </p:nvPicPr>
-        <p:blipFill>
-          <a:blip r:embed="rId4"/>
-          <a:stretch>
-            <a:fillRect/>
-          </a:stretch>
-        </p:blipFill>
-        <p:spPr>
-          <a:xfrm>
-            <a:off x="9295638" y="1847087"/>
-            <a:ext cx="1252728" cy="1252728"/>
-          </a:xfrm>
-          <a:prstGeom prst="rect">
-            <a:avLst/>
-          </a:prstGeom>
-        </p:spPr>
-      </p:pic>
-      <p:sp>
-        <p:nvSpPr>
-          <p:cNvPr id="20" name="TextBox 19"/>
-          <p:cNvSpPr txBox="1"/>
-          <p:nvPr/>
-        </p:nvSpPr>
-        <p:spPr>
-          <a:xfrm>
-            <a:off x="8182660" y="3191256"/>
-            <a:ext cx="3478682" cy="621792"/>
-          </a:xfrm>
-          <a:prstGeom prst="rect">
-            <a:avLst/>
-          </a:prstGeom>
-          <a:noFill/>
-        </p:spPr>
-        <p:txBody>
-          <a:bodyPr wrap="square" anchor="t"/>
-          <a:lstStyle/>
-          <a:p>
-            <a:pPr algn="ctr"/>
-            <a:r>
-              <a:rPr sz="1300" b="1" i="0">
-                <a:solidFill>
-                  <a:srgbClr val="095292"/>
-                </a:solidFill>
-                <a:latin typeface="Calibri"/>
-              </a:rPr>
-              <a:t>draw.io</a:t>
-            </a:r>
-          </a:p>
-          <a:p>
-            <a:pPr algn="ctr">
-              <a:spcBef>
-                <a:spcPts val="200"/>
-              </a:spcBef>
-            </a:pPr>
-            <a:r>
-              <a:rPr sz="1000" b="0" i="0">
-                <a:solidFill>
-                  <a:srgbClr val="666666"/>
-                </a:solidFill>
-                <a:latin typeface="Calibri"/>
-              </a:rPr>
-              <a:t>Flujo</a:t>
-            </a:r>
-          </a:p>
-        </p:txBody>
-      </p:sp>
-      <p:sp>
-        <p:nvSpPr>
-          <p:cNvPr id="21" name="TextBox 20"/>
           <p:cNvSpPr txBox="1"/>
           <p:nvPr/>
         </p:nvSpPr>
@@ -9111,7 +9014,7 @@
         <p:spPr>
           <a:xfrm>
             <a:off x="0" y="0"/>
-            <a:ext cx="12191695" cy="1170432"/>
+            <a:ext cx="12191695" cy="960120"/>
           </a:xfrm>
           <a:prstGeom prst="rect">
             <a:avLst/>
@@ -9153,7 +9056,7 @@
         </p:nvSpPr>
         <p:spPr>
           <a:xfrm>
-            <a:off x="0" y="1170432"/>
+            <a:off x="0" y="960120"/>
             <a:ext cx="12191695" cy="41148"/>
           </a:xfrm>
           <a:prstGeom prst="rect">
@@ -9197,7 +9100,7 @@
         <p:spPr>
           <a:xfrm>
             <a:off x="457200" y="164592"/>
-            <a:ext cx="11277295" cy="384048"/>
+            <a:ext cx="11277295" cy="502920"/>
           </a:xfrm>
           <a:prstGeom prst="rect">
             <a:avLst/>
@@ -9217,7 +9120,7 @@
                 </a:solidFill>
                 <a:latin typeface="Calibri"/>
               </a:rPr>
-              <a:t>Del boceto a la plataforma del curso (diagrama)</a:t>
+              <a:t>Demo del dia</a:t>
             </a:r>
           </a:p>
         </p:txBody>
@@ -9230,8 +9133,8 @@
         </p:nvSpPr>
         <p:spPr>
           <a:xfrm>
-            <a:off x="457200" y="566928"/>
-            <a:ext cx="11277295" cy="411480"/>
+            <a:off x="457200" y="1170432"/>
+            <a:ext cx="11277295" cy="5230368"/>
           </a:xfrm>
           <a:prstGeom prst="rect">
             <a:avLst/>
@@ -9244,705 +9147,110 @@
           </a:bodyPr>
           <a:lstStyle/>
           <a:p>
-            <a:r>
-              <a:rPr sz="1400" b="0" i="0">
-                <a:solidFill>
-                  <a:srgbClr val="B8D8EE"/>
-                </a:solidFill>
-                <a:latin typeface="Calibri"/>
-              </a:rPr>
-              <a:t>El diagrama se entrega como codigo Mermaid dentro de la plataforma del curso, no como imagen</a:t>
-            </a:r>
-          </a:p>
-        </p:txBody>
-      </p:sp>
-      <p:sp>
-        <p:nvSpPr>
-          <p:cNvPr id="6" name="Rounded Rectangle 5"/>
-          <p:cNvSpPr/>
-          <p:nvPr/>
-        </p:nvSpPr>
-        <p:spPr>
-          <a:xfrm>
-            <a:off x="457200" y="1659636"/>
-            <a:ext cx="11277295" cy="1051560"/>
-          </a:xfrm>
-          <a:prstGeom prst="roundRect">
-            <a:avLst>
-              <a:gd name="adj" fmla="val 12000"/>
-            </a:avLst>
-          </a:prstGeom>
-          <a:solidFill>
-            <a:srgbClr val="F2F2F2"/>
-          </a:solidFill>
-          <a:ln>
-            <a:noFill/>
-          </a:ln>
-        </p:spPr>
-        <p:style>
-          <a:lnRef idx="1">
-            <a:schemeClr val="accent1"/>
-          </a:lnRef>
-          <a:fillRef idx="3">
-            <a:schemeClr val="accent1"/>
-          </a:fillRef>
-          <a:effectRef idx="2">
-            <a:schemeClr val="accent1"/>
-          </a:effectRef>
-          <a:fontRef idx="minor">
-            <a:schemeClr val="lt1"/>
-          </a:fontRef>
-        </p:style>
-        <p:txBody>
-          <a:bodyPr rtlCol="0" anchor="ctr"/>
-          <a:lstStyle/>
-          <a:p>
-            <a:pPr algn="ctr"/>
-          </a:p>
-        </p:txBody>
-      </p:sp>
-      <p:sp>
-        <p:nvSpPr>
-          <p:cNvPr id="7" name="Rounded Rectangle 6"/>
-          <p:cNvSpPr/>
-          <p:nvPr/>
-        </p:nvSpPr>
-        <p:spPr>
-          <a:xfrm>
-            <a:off x="594360" y="1965960"/>
-            <a:ext cx="438912" cy="438912"/>
-          </a:xfrm>
-          <a:prstGeom prst="roundRect">
-            <a:avLst>
-              <a:gd name="adj" fmla="val 12000"/>
-            </a:avLst>
-          </a:prstGeom>
-          <a:solidFill>
-            <a:srgbClr val="095292"/>
-          </a:solidFill>
-          <a:ln>
-            <a:noFill/>
-          </a:ln>
-        </p:spPr>
-        <p:style>
-          <a:lnRef idx="1">
-            <a:schemeClr val="accent1"/>
-          </a:lnRef>
-          <a:fillRef idx="3">
-            <a:schemeClr val="accent1"/>
-          </a:fillRef>
-          <a:effectRef idx="2">
-            <a:schemeClr val="accent1"/>
-          </a:effectRef>
-          <a:fontRef idx="minor">
-            <a:schemeClr val="lt1"/>
-          </a:fontRef>
-        </p:style>
-        <p:txBody>
-          <a:bodyPr rtlCol="0" anchor="ctr"/>
-          <a:lstStyle/>
-          <a:p>
-            <a:pPr algn="ctr"/>
-          </a:p>
-        </p:txBody>
-      </p:sp>
-      <p:sp>
-        <p:nvSpPr>
-          <p:cNvPr id="8" name="TextBox 7"/>
-          <p:cNvSpPr txBox="1"/>
-          <p:nvPr/>
-        </p:nvSpPr>
-        <p:spPr>
-          <a:xfrm>
-            <a:off x="594360" y="1965960"/>
-            <a:ext cx="438912" cy="438912"/>
-          </a:xfrm>
-          <a:prstGeom prst="rect">
-            <a:avLst/>
-          </a:prstGeom>
-          <a:noFill/>
-        </p:spPr>
-        <p:txBody>
-          <a:bodyPr wrap="square" anchor="ctr"/>
-          <a:lstStyle/>
-          <a:p>
-            <a:pPr algn="ctr"/>
-            <a:r>
-              <a:rPr sz="1600" b="1" i="0">
-                <a:solidFill>
-                  <a:srgbClr val="FFFFFF"/>
-                </a:solidFill>
-                <a:latin typeface="Calibri"/>
-              </a:rPr>
-              <a:t>1</a:t>
-            </a:r>
-          </a:p>
-        </p:txBody>
-      </p:sp>
-      <p:sp>
-        <p:nvSpPr>
-          <p:cNvPr id="9" name="TextBox 8"/>
-          <p:cNvSpPr txBox="1"/>
-          <p:nvPr/>
-        </p:nvSpPr>
-        <p:spPr>
-          <a:xfrm>
-            <a:off x="1188720" y="1751076"/>
-            <a:ext cx="10271455" cy="886968"/>
-          </a:xfrm>
-          <a:prstGeom prst="rect">
-            <a:avLst/>
-          </a:prstGeom>
-          <a:noFill/>
-        </p:spPr>
-        <p:txBody>
-          <a:bodyPr wrap="square" anchor="ctr"/>
-          <a:lstStyle/>
-          <a:p>
-            <a:r>
-              <a:rPr sz="1500" b="1" i="0">
-                <a:solidFill>
-                  <a:srgbClr val="095292"/>
-                </a:solidFill>
-                <a:latin typeface="Calibri"/>
-              </a:rPr>
-              <a:t>Disena visual</a:t>
-            </a:r>
-          </a:p>
-          <a:p>
             <a:pPr>
-              <a:spcBef>
-                <a:spcPts val="200"/>
-              </a:spcBef>
+              <a:spcAft>
+                <a:spcPts val="800"/>
+              </a:spcAft>
             </a:pPr>
             <a:r>
-              <a:rPr sz="1300" b="0" i="0">
+              <a:rPr sz="2000" b="0" i="0">
                 <a:solidFill>
                   <a:srgbClr val="333333"/>
                 </a:solidFill>
                 <a:latin typeface="Calibri"/>
               </a:rPr>
-              <a:t>Dibuja el diagrama como quieras en Excalidraw o draw.io: es mas rapido arrastrar cajas que escribir codigo, y ahi es donde piensas el modelo.</a:t>
-            </a:r>
-          </a:p>
-        </p:txBody>
-      </p:sp>
-      <p:sp>
-        <p:nvSpPr>
-          <p:cNvPr id="10" name="Rounded Rectangle 9"/>
-          <p:cNvSpPr/>
-          <p:nvPr/>
-        </p:nvSpPr>
-        <p:spPr>
-          <a:xfrm>
-            <a:off x="457200" y="2802636"/>
-            <a:ext cx="11277295" cy="1051560"/>
-          </a:xfrm>
-          <a:prstGeom prst="roundRect">
-            <a:avLst>
-              <a:gd name="adj" fmla="val 12000"/>
-            </a:avLst>
-          </a:prstGeom>
-          <a:solidFill>
-            <a:srgbClr val="E8F4FA"/>
-          </a:solidFill>
-          <a:ln>
-            <a:noFill/>
-          </a:ln>
-        </p:spPr>
-        <p:style>
-          <a:lnRef idx="1">
-            <a:schemeClr val="accent1"/>
-          </a:lnRef>
-          <a:fillRef idx="3">
-            <a:schemeClr val="accent1"/>
-          </a:fillRef>
-          <a:effectRef idx="2">
-            <a:schemeClr val="accent1"/>
-          </a:effectRef>
-          <a:fontRef idx="minor">
-            <a:schemeClr val="lt1"/>
-          </a:fontRef>
-        </p:style>
-        <p:txBody>
-          <a:bodyPr rtlCol="0" anchor="ctr"/>
-          <a:lstStyle/>
-          <a:p>
-            <a:pPr algn="ctr"/>
-          </a:p>
-        </p:txBody>
-      </p:sp>
-      <p:sp>
-        <p:nvSpPr>
-          <p:cNvPr id="11" name="Rounded Rectangle 10"/>
-          <p:cNvSpPr/>
-          <p:nvPr/>
-        </p:nvSpPr>
-        <p:spPr>
-          <a:xfrm>
-            <a:off x="594360" y="3108960"/>
-            <a:ext cx="438912" cy="438912"/>
-          </a:xfrm>
-          <a:prstGeom prst="roundRect">
-            <a:avLst>
-              <a:gd name="adj" fmla="val 12000"/>
-            </a:avLst>
-          </a:prstGeom>
-          <a:solidFill>
-            <a:srgbClr val="095292"/>
-          </a:solidFill>
-          <a:ln>
-            <a:noFill/>
-          </a:ln>
-        </p:spPr>
-        <p:style>
-          <a:lnRef idx="1">
-            <a:schemeClr val="accent1"/>
-          </a:lnRef>
-          <a:fillRef idx="3">
-            <a:schemeClr val="accent1"/>
-          </a:fillRef>
-          <a:effectRef idx="2">
-            <a:schemeClr val="accent1"/>
-          </a:effectRef>
-          <a:fontRef idx="minor">
-            <a:schemeClr val="lt1"/>
-          </a:fontRef>
-        </p:style>
-        <p:txBody>
-          <a:bodyPr rtlCol="0" anchor="ctr"/>
-          <a:lstStyle/>
-          <a:p>
-            <a:pPr algn="ctr"/>
-          </a:p>
-        </p:txBody>
-      </p:sp>
-      <p:sp>
-        <p:nvSpPr>
-          <p:cNvPr id="12" name="TextBox 11"/>
-          <p:cNvSpPr txBox="1"/>
-          <p:nvPr/>
-        </p:nvSpPr>
-        <p:spPr>
-          <a:xfrm>
-            <a:off x="594360" y="3108960"/>
-            <a:ext cx="438912" cy="438912"/>
-          </a:xfrm>
-          <a:prstGeom prst="rect">
-            <a:avLst/>
-          </a:prstGeom>
-          <a:noFill/>
-        </p:spPr>
-        <p:txBody>
-          <a:bodyPr wrap="square" anchor="ctr"/>
-          <a:lstStyle/>
-          <a:p>
-            <a:pPr algn="ctr"/>
-            <a:r>
-              <a:rPr sz="1600" b="1" i="0">
-                <a:solidFill>
-                  <a:srgbClr val="FFFFFF"/>
-                </a:solidFill>
-                <a:latin typeface="Calibri"/>
-              </a:rPr>
-              <a:t>2</a:t>
-            </a:r>
-          </a:p>
-        </p:txBody>
-      </p:sp>
-      <p:sp>
-        <p:nvSpPr>
-          <p:cNvPr id="13" name="TextBox 12"/>
-          <p:cNvSpPr txBox="1"/>
-          <p:nvPr/>
-        </p:nvSpPr>
-        <p:spPr>
-          <a:xfrm>
-            <a:off x="1188720" y="2894076"/>
-            <a:ext cx="10271455" cy="886968"/>
-          </a:xfrm>
-          <a:prstGeom prst="rect">
-            <a:avLst/>
-          </a:prstGeom>
-          <a:noFill/>
-        </p:spPr>
-        <p:txBody>
-          <a:bodyPr wrap="square" anchor="ctr"/>
-          <a:lstStyle/>
-          <a:p>
-            <a:r>
-              <a:rPr sz="1500" b="1" i="0">
-                <a:solidFill>
-                  <a:srgbClr val="095292"/>
-                </a:solidFill>
-                <a:latin typeface="Calibri"/>
-              </a:rPr>
-              <a:t>Traduce con IA</a:t>
+              <a:t>–   </a:t>
+            </a:r>
+            <a:r>
+              <a:rPr sz="2000" b="1" i="0">
+                <a:solidFill>
+                  <a:srgbClr val="333333"/>
+                </a:solidFill>
+                <a:latin typeface="Calibri"/>
+              </a:rPr>
+              <a:t>Herramienta:</a:t>
+            </a:r>
+            <a:r>
+              <a:rPr sz="2000" b="0" i="0">
+                <a:solidFill>
+                  <a:srgbClr val="333333"/>
+                </a:solidFill>
+                <a:latin typeface="Calibri"/>
+              </a:rPr>
+              <a:t> Google Docs + Live SQL + Excalidraw</a:t>
             </a:r>
           </a:p>
           <a:p>
             <a:pPr>
-              <a:spcBef>
-                <a:spcPts val="200"/>
-              </a:spcBef>
+              <a:spcAft>
+                <a:spcPts val="800"/>
+              </a:spcAft>
             </a:pPr>
             <a:r>
-              <a:rPr sz="1300" b="0" i="0">
+              <a:rPr sz="2000" b="0" i="0">
                 <a:solidFill>
                   <a:srgbClr val="333333"/>
                 </a:solidFill>
                 <a:latin typeface="Calibri"/>
               </a:rPr>
-              <a:t>Copia o describe tu boceto a una IA y pidele el codigo Mermaid: «convierte este diagrama a Mermaid usando sequenceDiagram». Revisa el resultado: la IA acierta la sintaxis, no tu modelo.</a:t>
-            </a:r>
-          </a:p>
-        </p:txBody>
-      </p:sp>
-      <p:sp>
-        <p:nvSpPr>
-          <p:cNvPr id="14" name="Rounded Rectangle 13"/>
-          <p:cNvSpPr/>
-          <p:nvPr/>
-        </p:nvSpPr>
-        <p:spPr>
-          <a:xfrm>
-            <a:off x="457200" y="3945636"/>
-            <a:ext cx="11277295" cy="1051560"/>
-          </a:xfrm>
-          <a:prstGeom prst="roundRect">
-            <a:avLst>
-              <a:gd name="adj" fmla="val 12000"/>
-            </a:avLst>
-          </a:prstGeom>
-          <a:solidFill>
-            <a:srgbClr val="F2F2F2"/>
-          </a:solidFill>
-          <a:ln>
-            <a:noFill/>
-          </a:ln>
-        </p:spPr>
-        <p:style>
-          <a:lnRef idx="1">
-            <a:schemeClr val="accent1"/>
-          </a:lnRef>
-          <a:fillRef idx="3">
-            <a:schemeClr val="accent1"/>
-          </a:fillRef>
-          <a:effectRef idx="2">
-            <a:schemeClr val="accent1"/>
-          </a:effectRef>
-          <a:fontRef idx="minor">
-            <a:schemeClr val="lt1"/>
-          </a:fontRef>
-        </p:style>
-        <p:txBody>
-          <a:bodyPr rtlCol="0" anchor="ctr"/>
-          <a:lstStyle/>
-          <a:p>
-            <a:pPr algn="ctr"/>
-          </a:p>
-        </p:txBody>
-      </p:sp>
-      <p:sp>
-        <p:nvSpPr>
-          <p:cNvPr id="15" name="Rounded Rectangle 14"/>
-          <p:cNvSpPr/>
-          <p:nvPr/>
-        </p:nvSpPr>
-        <p:spPr>
-          <a:xfrm>
-            <a:off x="594360" y="4251960"/>
-            <a:ext cx="438912" cy="438912"/>
-          </a:xfrm>
-          <a:prstGeom prst="roundRect">
-            <a:avLst>
-              <a:gd name="adj" fmla="val 12000"/>
-            </a:avLst>
-          </a:prstGeom>
-          <a:solidFill>
-            <a:srgbClr val="095292"/>
-          </a:solidFill>
-          <a:ln>
-            <a:noFill/>
-          </a:ln>
-        </p:spPr>
-        <p:style>
-          <a:lnRef idx="1">
-            <a:schemeClr val="accent1"/>
-          </a:lnRef>
-          <a:fillRef idx="3">
-            <a:schemeClr val="accent1"/>
-          </a:fillRef>
-          <a:effectRef idx="2">
-            <a:schemeClr val="accent1"/>
-          </a:effectRef>
-          <a:fontRef idx="minor">
-            <a:schemeClr val="lt1"/>
-          </a:fontRef>
-        </p:style>
-        <p:txBody>
-          <a:bodyPr rtlCol="0" anchor="ctr"/>
-          <a:lstStyle/>
-          <a:p>
-            <a:pPr algn="ctr"/>
-          </a:p>
-        </p:txBody>
-      </p:sp>
-      <p:sp>
-        <p:nvSpPr>
-          <p:cNvPr id="16" name="TextBox 15"/>
-          <p:cNvSpPr txBox="1"/>
-          <p:nvPr/>
-        </p:nvSpPr>
-        <p:spPr>
-          <a:xfrm>
-            <a:off x="594360" y="4251960"/>
-            <a:ext cx="438912" cy="438912"/>
-          </a:xfrm>
-          <a:prstGeom prst="rect">
-            <a:avLst/>
-          </a:prstGeom>
-          <a:noFill/>
-        </p:spPr>
-        <p:txBody>
-          <a:bodyPr wrap="square" anchor="ctr"/>
-          <a:lstStyle/>
-          <a:p>
-            <a:pPr algn="ctr"/>
-            <a:r>
-              <a:rPr sz="1600" b="1" i="0">
-                <a:solidFill>
-                  <a:srgbClr val="FFFFFF"/>
-                </a:solidFill>
-                <a:latin typeface="Calibri"/>
-              </a:rPr>
-              <a:t>3</a:t>
-            </a:r>
-          </a:p>
-        </p:txBody>
-      </p:sp>
-      <p:sp>
-        <p:nvSpPr>
-          <p:cNvPr id="17" name="TextBox 16"/>
-          <p:cNvSpPr txBox="1"/>
-          <p:nvPr/>
-        </p:nvSpPr>
-        <p:spPr>
-          <a:xfrm>
-            <a:off x="1188720" y="4037076"/>
-            <a:ext cx="10271455" cy="886968"/>
-          </a:xfrm>
-          <a:prstGeom prst="rect">
-            <a:avLst/>
-          </a:prstGeom>
-          <a:noFill/>
-        </p:spPr>
-        <p:txBody>
-          <a:bodyPr wrap="square" anchor="ctr"/>
-          <a:lstStyle/>
-          <a:p>
-            <a:r>
-              <a:rPr sz="1500" b="1" i="0">
-                <a:solidFill>
-                  <a:srgbClr val="095292"/>
-                </a:solidFill>
-                <a:latin typeface="Calibri"/>
-              </a:rPr>
-              <a:t>Pega y renderiza en la plataforma del curso</a:t>
+              <a:t>–   </a:t>
+            </a:r>
+            <a:r>
+              <a:rPr sz="2000" b="1" i="0">
+                <a:solidFill>
+                  <a:srgbClr val="333333"/>
+                </a:solidFill>
+                <a:latin typeface="Calibri"/>
+              </a:rPr>
+              <a:t>Demo:</a:t>
+            </a:r>
+            <a:r>
+              <a:rPr sz="2000" b="0" i="0">
+                <a:solidFill>
+                  <a:srgbClr val="333333"/>
+                </a:solidFill>
+                <a:latin typeface="Calibri"/>
+              </a:rPr>
+              <a:t> Plantilla contrato sp_agendar_cita + storyboard 6 slides.</a:t>
             </a:r>
           </a:p>
           <a:p>
             <a:pPr>
-              <a:spcBef>
-                <a:spcPts val="200"/>
-              </a:spcBef>
+              <a:spcAft>
+                <a:spcPts val="800"/>
+              </a:spcAft>
             </a:pPr>
             <a:r>
-              <a:rPr sz="1300" b="0" i="0">
+              <a:rPr sz="2000" b="0" i="0">
                 <a:solidFill>
                   <a:srgbClr val="333333"/>
                 </a:solidFill>
                 <a:latin typeface="Calibri"/>
               </a:rPr>
-              <a:t>Pega ese codigo en la caja de texto de la pregunta y mira como lo dibuja la plataforma. Si no renderiza, corrige ahi mismo: lo que se califica es el diagrama renderizado dentro de la plataforma del curso.</a:t>
-            </a:r>
-          </a:p>
-        </p:txBody>
-      </p:sp>
-      <p:sp>
-        <p:nvSpPr>
-          <p:cNvPr id="18" name="Rounded Rectangle 17"/>
-          <p:cNvSpPr/>
-          <p:nvPr/>
-        </p:nvSpPr>
-        <p:spPr>
-          <a:xfrm>
-            <a:off x="457200" y="5088636"/>
-            <a:ext cx="11277295" cy="1051560"/>
-          </a:xfrm>
-          <a:prstGeom prst="roundRect">
-            <a:avLst>
-              <a:gd name="adj" fmla="val 12000"/>
-            </a:avLst>
-          </a:prstGeom>
-          <a:solidFill>
-            <a:srgbClr val="E8F4FA"/>
-          </a:solidFill>
-          <a:ln>
-            <a:noFill/>
-          </a:ln>
-        </p:spPr>
-        <p:style>
-          <a:lnRef idx="1">
-            <a:schemeClr val="accent1"/>
-          </a:lnRef>
-          <a:fillRef idx="3">
-            <a:schemeClr val="accent1"/>
-          </a:fillRef>
-          <a:effectRef idx="2">
-            <a:schemeClr val="accent1"/>
-          </a:effectRef>
-          <a:fontRef idx="minor">
-            <a:schemeClr val="lt1"/>
-          </a:fontRef>
-        </p:style>
-        <p:txBody>
-          <a:bodyPr rtlCol="0" anchor="ctr"/>
-          <a:lstStyle/>
-          <a:p>
-            <a:pPr algn="ctr"/>
-          </a:p>
-        </p:txBody>
-      </p:sp>
-      <p:sp>
-        <p:nvSpPr>
-          <p:cNvPr id="19" name="Rounded Rectangle 18"/>
-          <p:cNvSpPr/>
-          <p:nvPr/>
-        </p:nvSpPr>
-        <p:spPr>
-          <a:xfrm>
-            <a:off x="594360" y="5394960"/>
-            <a:ext cx="438912" cy="438912"/>
-          </a:xfrm>
-          <a:prstGeom prst="roundRect">
-            <a:avLst>
-              <a:gd name="adj" fmla="val 12000"/>
-            </a:avLst>
-          </a:prstGeom>
-          <a:solidFill>
-            <a:srgbClr val="095292"/>
-          </a:solidFill>
-          <a:ln>
-            <a:noFill/>
-          </a:ln>
-        </p:spPr>
-        <p:style>
-          <a:lnRef idx="1">
-            <a:schemeClr val="accent1"/>
-          </a:lnRef>
-          <a:fillRef idx="3">
-            <a:schemeClr val="accent1"/>
-          </a:fillRef>
-          <a:effectRef idx="2">
-            <a:schemeClr val="accent1"/>
-          </a:effectRef>
-          <a:fontRef idx="minor">
-            <a:schemeClr val="lt1"/>
-          </a:fontRef>
-        </p:style>
-        <p:txBody>
-          <a:bodyPr rtlCol="0" anchor="ctr"/>
-          <a:lstStyle/>
-          <a:p>
-            <a:pPr algn="ctr"/>
-          </a:p>
-        </p:txBody>
-      </p:sp>
-      <p:sp>
-        <p:nvSpPr>
-          <p:cNvPr id="20" name="TextBox 19"/>
-          <p:cNvSpPr txBox="1"/>
-          <p:nvPr/>
-        </p:nvSpPr>
-        <p:spPr>
-          <a:xfrm>
-            <a:off x="594360" y="5394960"/>
-            <a:ext cx="438912" cy="438912"/>
-          </a:xfrm>
-          <a:prstGeom prst="rect">
-            <a:avLst/>
-          </a:prstGeom>
-          <a:noFill/>
-        </p:spPr>
-        <p:txBody>
-          <a:bodyPr wrap="square" anchor="ctr"/>
-          <a:lstStyle/>
-          <a:p>
-            <a:pPr algn="ctr"/>
-            <a:r>
-              <a:rPr sz="1600" b="1" i="0">
-                <a:solidFill>
-                  <a:srgbClr val="FFFFFF"/>
-                </a:solidFill>
-                <a:latin typeface="Calibri"/>
-              </a:rPr>
-              <a:t>4</a:t>
-            </a:r>
-          </a:p>
-        </p:txBody>
-      </p:sp>
-      <p:sp>
-        <p:nvSpPr>
-          <p:cNvPr id="21" name="TextBox 20"/>
-          <p:cNvSpPr txBox="1"/>
-          <p:nvPr/>
-        </p:nvSpPr>
-        <p:spPr>
-          <a:xfrm>
-            <a:off x="1188720" y="5180076"/>
-            <a:ext cx="10271455" cy="886968"/>
-          </a:xfrm>
-          <a:prstGeom prst="rect">
-            <a:avLst/>
-          </a:prstGeom>
-          <a:noFill/>
-        </p:spPr>
-        <p:txBody>
-          <a:bodyPr wrap="square" anchor="ctr"/>
-          <a:lstStyle/>
-          <a:p>
-            <a:r>
-              <a:rPr sz="1500" b="1" i="0">
-                <a:solidFill>
-                  <a:srgbClr val="095292"/>
-                </a:solidFill>
-                <a:latin typeface="Calibri"/>
-              </a:rPr>
-              <a:t>Guarda el PNG para tu PI</a:t>
+              <a:t>–   Sigan el mismo dominio VetCare (no inventen otro caso).</a:t>
             </a:r>
           </a:p>
           <a:p>
             <a:pPr>
-              <a:spcBef>
-                <a:spcPts val="200"/>
-              </a:spcBef>
+              <a:spcAft>
+                <a:spcPts val="800"/>
+              </a:spcAft>
             </a:pPr>
             <a:r>
-              <a:rPr sz="1300" b="0" i="0">
+              <a:rPr sz="2000" b="0" i="0">
                 <a:solidFill>
                   <a:srgbClr val="333333"/>
                 </a:solidFill>
                 <a:latin typeface="Calibri"/>
               </a:rPr>
-              <a:t>Exporta tambien la imagen a la carpeta de tu Proyecto Integrador. Esa copia es para tu informe; no reemplaza la respuesta en la plataforma.</a:t>
-            </a:r>
-          </a:p>
-        </p:txBody>
-      </p:sp>
-      <p:sp>
-        <p:nvSpPr>
-          <p:cNvPr id="22" name="TextBox 21"/>
+              <a:t>–   Al final de la demo: dejar enlace/script compartible al grupo.</a:t>
+            </a:r>
+          </a:p>
+        </p:txBody>
+      </p:sp>
+      <p:sp>
+        <p:nvSpPr>
+          <p:cNvPr id="6" name="TextBox 5"/>
           <p:cNvSpPr txBox="1"/>
           <p:nvPr/>
         </p:nvSpPr>
@@ -10010,7 +9318,7 @@
         <p:spPr>
           <a:xfrm>
             <a:off x="0" y="0"/>
-            <a:ext cx="12191695" cy="960120"/>
+            <a:ext cx="12191695" cy="1170432"/>
           </a:xfrm>
           <a:prstGeom prst="rect">
             <a:avLst/>
@@ -10052,7 +9360,7 @@
         </p:nvSpPr>
         <p:spPr>
           <a:xfrm>
-            <a:off x="0" y="960120"/>
+            <a:off x="0" y="1170432"/>
             <a:ext cx="12191695" cy="41148"/>
           </a:xfrm>
           <a:prstGeom prst="rect">
@@ -10096,7 +9404,7 @@
         <p:spPr>
           <a:xfrm>
             <a:off x="457200" y="164592"/>
-            <a:ext cx="11277295" cy="502920"/>
+            <a:ext cx="11277295" cy="384048"/>
           </a:xfrm>
           <a:prstGeom prst="rect">
             <a:avLst/>
@@ -10116,7 +9424,7 @@
                 </a:solidFill>
                 <a:latin typeface="Calibri"/>
               </a:rPr>
-              <a:t>Taller PI VetCare — contexto / por que importa</a:t>
+              <a:t>Herramientas de hoy</a:t>
             </a:r>
           </a:p>
         </p:txBody>
@@ -10129,8 +9437,8 @@
         </p:nvSpPr>
         <p:spPr>
           <a:xfrm>
-            <a:off x="457200" y="1170432"/>
-            <a:ext cx="11277295" cy="5230368"/>
+            <a:off x="457200" y="566928"/>
+            <a:ext cx="11277295" cy="411480"/>
           </a:xfrm>
           <a:prstGeom prst="rect">
             <a:avLst/>
@@ -10143,60 +9451,633 @@
           </a:bodyPr>
           <a:lstStyle/>
           <a:p>
-            <a:pPr>
-              <a:spcAft>
-                <a:spcPts val="800"/>
-              </a:spcAft>
+            <a:r>
+              <a:rPr sz="1400" b="0" i="0">
+                <a:solidFill>
+                  <a:srgbClr val="B8D8EE"/>
+                </a:solidFill>
+                <a:latin typeface="Calibri"/>
+              </a:rPr>
+              <a:t>Gratis · navegador o free tier</a:t>
+            </a:r>
+          </a:p>
+        </p:txBody>
+      </p:sp>
+      <p:sp>
+        <p:nvSpPr>
+          <p:cNvPr id="6" name="Rounded Rectangle 5"/>
+          <p:cNvSpPr/>
+          <p:nvPr/>
+        </p:nvSpPr>
+        <p:spPr>
+          <a:xfrm>
+            <a:off x="457200" y="1591056"/>
+            <a:ext cx="3624986" cy="2331720"/>
+          </a:xfrm>
+          <a:prstGeom prst="roundRect">
+            <a:avLst>
+              <a:gd name="adj" fmla="val 12000"/>
+            </a:avLst>
+          </a:prstGeom>
+          <a:solidFill>
+            <a:srgbClr val="F2F2F2"/>
+          </a:solidFill>
+          <a:ln>
+            <a:noFill/>
+          </a:ln>
+        </p:spPr>
+        <p:style>
+          <a:lnRef idx="1">
+            <a:schemeClr val="accent1"/>
+          </a:lnRef>
+          <a:fillRef idx="3">
+            <a:schemeClr val="accent1"/>
+          </a:fillRef>
+          <a:effectRef idx="2">
+            <a:schemeClr val="accent1"/>
+          </a:effectRef>
+          <a:fontRef idx="minor">
+            <a:schemeClr val="lt1"/>
+          </a:fontRef>
+        </p:style>
+        <p:txBody>
+          <a:bodyPr rtlCol="0" anchor="ctr"/>
+          <a:lstStyle/>
+          <a:p>
+            <a:pPr algn="ctr"/>
+          </a:p>
+        </p:txBody>
+      </p:sp>
+      <p:sp>
+        <p:nvSpPr>
+          <p:cNvPr id="7" name="Rectangle 6"/>
+          <p:cNvSpPr/>
+          <p:nvPr/>
+        </p:nvSpPr>
+        <p:spPr>
+          <a:xfrm>
+            <a:off x="457200" y="1591056"/>
+            <a:ext cx="3624986" cy="64008"/>
+          </a:xfrm>
+          <a:prstGeom prst="rect">
+            <a:avLst/>
+          </a:prstGeom>
+          <a:solidFill>
+            <a:srgbClr val="095292"/>
+          </a:solidFill>
+          <a:ln>
+            <a:noFill/>
+          </a:ln>
+        </p:spPr>
+        <p:style>
+          <a:lnRef idx="1">
+            <a:schemeClr val="accent1"/>
+          </a:lnRef>
+          <a:fillRef idx="3">
+            <a:schemeClr val="accent1"/>
+          </a:fillRef>
+          <a:effectRef idx="2">
+            <a:schemeClr val="accent1"/>
+          </a:effectRef>
+          <a:fontRef idx="minor">
+            <a:schemeClr val="lt1"/>
+          </a:fontRef>
+        </p:style>
+        <p:txBody>
+          <a:bodyPr rtlCol="0" anchor="ctr"/>
+          <a:lstStyle/>
+          <a:p>
+            <a:pPr algn="ctr"/>
+          </a:p>
+        </p:txBody>
+      </p:sp>
+      <p:sp>
+        <p:nvSpPr>
+          <p:cNvPr id="8" name="Rectangle 7"/>
+          <p:cNvSpPr/>
+          <p:nvPr/>
+        </p:nvSpPr>
+        <p:spPr>
+          <a:xfrm>
+            <a:off x="457200" y="1655064"/>
+            <a:ext cx="3624986" cy="27432"/>
+          </a:xfrm>
+          <a:prstGeom prst="rect">
+            <a:avLst/>
+          </a:prstGeom>
+          <a:solidFill>
+            <a:srgbClr val="FFD000"/>
+          </a:solidFill>
+          <a:ln>
+            <a:noFill/>
+          </a:ln>
+        </p:spPr>
+        <p:style>
+          <a:lnRef idx="1">
+            <a:schemeClr val="accent1"/>
+          </a:lnRef>
+          <a:fillRef idx="3">
+            <a:schemeClr val="accent1"/>
+          </a:fillRef>
+          <a:effectRef idx="2">
+            <a:schemeClr val="accent1"/>
+          </a:effectRef>
+          <a:fontRef idx="minor">
+            <a:schemeClr val="lt1"/>
+          </a:fontRef>
+        </p:style>
+        <p:txBody>
+          <a:bodyPr rtlCol="0" anchor="ctr"/>
+          <a:lstStyle/>
+          <a:p>
+            <a:pPr algn="ctr"/>
+          </a:p>
+        </p:txBody>
+      </p:sp>
+      <p:pic>
+        <p:nvPicPr>
+          <p:cNvPr id="9" name="Picture 8" descr="google_docs.png"/>
+          <p:cNvPicPr>
+            <a:picLocks noChangeAspect="1"/>
+          </p:cNvPicPr>
+          <p:nvPr/>
+        </p:nvPicPr>
+        <p:blipFill>
+          <a:blip r:embed="rId2"/>
+          <a:stretch>
+            <a:fillRect/>
+          </a:stretch>
+        </p:blipFill>
+        <p:spPr>
+          <a:xfrm>
+            <a:off x="1643329" y="1847087"/>
+            <a:ext cx="1252728" cy="1252728"/>
+          </a:xfrm>
+          <a:prstGeom prst="rect">
+            <a:avLst/>
+          </a:prstGeom>
+        </p:spPr>
+      </p:pic>
+      <p:sp>
+        <p:nvSpPr>
+          <p:cNvPr id="10" name="TextBox 9"/>
+          <p:cNvSpPr txBox="1"/>
+          <p:nvPr/>
+        </p:nvSpPr>
+        <p:spPr>
+          <a:xfrm>
+            <a:off x="530352" y="3191256"/>
+            <a:ext cx="3478682" cy="621792"/>
+          </a:xfrm>
+          <a:prstGeom prst="rect">
+            <a:avLst/>
+          </a:prstGeom>
+          <a:noFill/>
+        </p:spPr>
+        <p:txBody>
+          <a:bodyPr wrap="square" anchor="t"/>
+          <a:lstStyle/>
+          <a:p>
+            <a:pPr algn="ctr"/>
+            <a:r>
+              <a:rPr sz="1300" b="1" i="0">
+                <a:solidFill>
+                  <a:srgbClr val="095292"/>
+                </a:solidFill>
+                <a:latin typeface="Calibri"/>
+              </a:rPr>
+              <a:t>Google Docs</a:t>
+            </a:r>
+          </a:p>
+          <a:p>
+            <a:pPr algn="ctr">
+              <a:spcBef>
+                <a:spcPts val="200"/>
+              </a:spcBef>
             </a:pPr>
             <a:r>
-              <a:rPr sz="2000" b="0" i="0">
-                <a:solidFill>
-                  <a:srgbClr val="333333"/>
-                </a:solidFill>
-                <a:latin typeface="Calibri"/>
-              </a:rPr>
-              <a:t>–   </a:t>
-            </a:r>
-            <a:r>
-              <a:rPr sz="2000" b="1" i="0">
-                <a:solidFill>
-                  <a:srgbClr val="333333"/>
-                </a:solidFill>
-                <a:latin typeface="Calibri"/>
-              </a:rPr>
-              <a:t>Por qué importa al PI:</a:t>
-            </a:r>
-            <a:r>
-              <a:rPr sz="2000" b="0" i="0">
-                <a:solidFill>
-                  <a:srgbClr val="333333"/>
-                </a:solidFill>
-                <a:latin typeface="Calibri"/>
-              </a:rPr>
-              <a:t> app llama contrato, no SQL suelto.</a:t>
-            </a:r>
-          </a:p>
-          <a:p>
-            <a:pPr>
-              <a:spcAft>
-                <a:spcPts val="800"/>
-              </a:spcAft>
+              <a:rPr sz="1000" b="0" i="0">
+                <a:solidFill>
+                  <a:srgbClr val="666666"/>
+                </a:solidFill>
+                <a:latin typeface="Calibri"/>
+              </a:rPr>
+              <a:t>Contrato app-BD</a:t>
+            </a:r>
+          </a:p>
+        </p:txBody>
+      </p:sp>
+      <p:sp>
+        <p:nvSpPr>
+          <p:cNvPr id="11" name="Rounded Rectangle 10"/>
+          <p:cNvSpPr/>
+          <p:nvPr/>
+        </p:nvSpPr>
+        <p:spPr>
+          <a:xfrm>
+            <a:off x="4283354" y="1591056"/>
+            <a:ext cx="3624986" cy="2331720"/>
+          </a:xfrm>
+          <a:prstGeom prst="roundRect">
+            <a:avLst>
+              <a:gd name="adj" fmla="val 12000"/>
+            </a:avLst>
+          </a:prstGeom>
+          <a:solidFill>
+            <a:srgbClr val="F2F2F2"/>
+          </a:solidFill>
+          <a:ln>
+            <a:noFill/>
+          </a:ln>
+        </p:spPr>
+        <p:style>
+          <a:lnRef idx="1">
+            <a:schemeClr val="accent1"/>
+          </a:lnRef>
+          <a:fillRef idx="3">
+            <a:schemeClr val="accent1"/>
+          </a:fillRef>
+          <a:effectRef idx="2">
+            <a:schemeClr val="accent1"/>
+          </a:effectRef>
+          <a:fontRef idx="minor">
+            <a:schemeClr val="lt1"/>
+          </a:fontRef>
+        </p:style>
+        <p:txBody>
+          <a:bodyPr rtlCol="0" anchor="ctr"/>
+          <a:lstStyle/>
+          <a:p>
+            <a:pPr algn="ctr"/>
+          </a:p>
+        </p:txBody>
+      </p:sp>
+      <p:sp>
+        <p:nvSpPr>
+          <p:cNvPr id="12" name="Rectangle 11"/>
+          <p:cNvSpPr/>
+          <p:nvPr/>
+        </p:nvSpPr>
+        <p:spPr>
+          <a:xfrm>
+            <a:off x="4283354" y="1591056"/>
+            <a:ext cx="3624986" cy="64008"/>
+          </a:xfrm>
+          <a:prstGeom prst="rect">
+            <a:avLst/>
+          </a:prstGeom>
+          <a:solidFill>
+            <a:srgbClr val="095292"/>
+          </a:solidFill>
+          <a:ln>
+            <a:noFill/>
+          </a:ln>
+        </p:spPr>
+        <p:style>
+          <a:lnRef idx="1">
+            <a:schemeClr val="accent1"/>
+          </a:lnRef>
+          <a:fillRef idx="3">
+            <a:schemeClr val="accent1"/>
+          </a:fillRef>
+          <a:effectRef idx="2">
+            <a:schemeClr val="accent1"/>
+          </a:effectRef>
+          <a:fontRef idx="minor">
+            <a:schemeClr val="lt1"/>
+          </a:fontRef>
+        </p:style>
+        <p:txBody>
+          <a:bodyPr rtlCol="0" anchor="ctr"/>
+          <a:lstStyle/>
+          <a:p>
+            <a:pPr algn="ctr"/>
+          </a:p>
+        </p:txBody>
+      </p:sp>
+      <p:sp>
+        <p:nvSpPr>
+          <p:cNvPr id="13" name="Rectangle 12"/>
+          <p:cNvSpPr/>
+          <p:nvPr/>
+        </p:nvSpPr>
+        <p:spPr>
+          <a:xfrm>
+            <a:off x="4283354" y="1655064"/>
+            <a:ext cx="3624986" cy="27432"/>
+          </a:xfrm>
+          <a:prstGeom prst="rect">
+            <a:avLst/>
+          </a:prstGeom>
+          <a:solidFill>
+            <a:srgbClr val="FFD000"/>
+          </a:solidFill>
+          <a:ln>
+            <a:noFill/>
+          </a:ln>
+        </p:spPr>
+        <p:style>
+          <a:lnRef idx="1">
+            <a:schemeClr val="accent1"/>
+          </a:lnRef>
+          <a:fillRef idx="3">
+            <a:schemeClr val="accent1"/>
+          </a:fillRef>
+          <a:effectRef idx="2">
+            <a:schemeClr val="accent1"/>
+          </a:effectRef>
+          <a:fontRef idx="minor">
+            <a:schemeClr val="lt1"/>
+          </a:fontRef>
+        </p:style>
+        <p:txBody>
+          <a:bodyPr rtlCol="0" anchor="ctr"/>
+          <a:lstStyle/>
+          <a:p>
+            <a:pPr algn="ctr"/>
+          </a:p>
+        </p:txBody>
+      </p:sp>
+      <p:pic>
+        <p:nvPicPr>
+          <p:cNvPr id="14" name="Picture 13" descr="oracle_livesql.png"/>
+          <p:cNvPicPr>
+            <a:picLocks noChangeAspect="1"/>
+          </p:cNvPicPr>
+          <p:nvPr/>
+        </p:nvPicPr>
+        <p:blipFill>
+          <a:blip r:embed="rId3"/>
+          <a:stretch>
+            <a:fillRect/>
+          </a:stretch>
+        </p:blipFill>
+        <p:spPr>
+          <a:xfrm>
+            <a:off x="5469483" y="1847087"/>
+            <a:ext cx="1252728" cy="1252728"/>
+          </a:xfrm>
+          <a:prstGeom prst="rect">
+            <a:avLst/>
+          </a:prstGeom>
+        </p:spPr>
+      </p:pic>
+      <p:sp>
+        <p:nvSpPr>
+          <p:cNvPr id="15" name="TextBox 14"/>
+          <p:cNvSpPr txBox="1"/>
+          <p:nvPr/>
+        </p:nvSpPr>
+        <p:spPr>
+          <a:xfrm>
+            <a:off x="4356506" y="3191256"/>
+            <a:ext cx="3478682" cy="621792"/>
+          </a:xfrm>
+          <a:prstGeom prst="rect">
+            <a:avLst/>
+          </a:prstGeom>
+          <a:noFill/>
+        </p:spPr>
+        <p:txBody>
+          <a:bodyPr wrap="square" anchor="t"/>
+          <a:lstStyle/>
+          <a:p>
+            <a:pPr algn="ctr"/>
+            <a:r>
+              <a:rPr sz="1300" b="1" i="0">
+                <a:solidFill>
+                  <a:srgbClr val="095292"/>
+                </a:solidFill>
+                <a:latin typeface="Calibri"/>
+              </a:rPr>
+              <a:t>Oracle Live SQL</a:t>
+            </a:r>
+          </a:p>
+          <a:p>
+            <a:pPr algn="ctr">
+              <a:spcBef>
+                <a:spcPts val="200"/>
+              </a:spcBef>
             </a:pPr>
             <a:r>
-              <a:rPr sz="2000" b="0" i="0">
-                <a:solidFill>
-                  <a:srgbClr val="333333"/>
-                </a:solidFill>
-                <a:latin typeface="Calibri"/>
-              </a:rPr>
-              <a:t>–   Preparar sustentacion.</a:t>
-            </a:r>
-          </a:p>
-        </p:txBody>
-      </p:sp>
-      <p:sp>
-        <p:nvSpPr>
-          <p:cNvPr id="6" name="TextBox 5"/>
+              <a:rPr sz="1000" b="0" i="0">
+                <a:solidFill>
+                  <a:srgbClr val="666666"/>
+                </a:solidFill>
+                <a:latin typeface="Calibri"/>
+              </a:rPr>
+              <a:t>Ops</a:t>
+            </a:r>
+          </a:p>
+        </p:txBody>
+      </p:sp>
+      <p:sp>
+        <p:nvSpPr>
+          <p:cNvPr id="16" name="Rounded Rectangle 15"/>
+          <p:cNvSpPr/>
+          <p:nvPr/>
+        </p:nvSpPr>
+        <p:spPr>
+          <a:xfrm>
+            <a:off x="8109508" y="1591056"/>
+            <a:ext cx="3624986" cy="2331720"/>
+          </a:xfrm>
+          <a:prstGeom prst="roundRect">
+            <a:avLst>
+              <a:gd name="adj" fmla="val 12000"/>
+            </a:avLst>
+          </a:prstGeom>
+          <a:solidFill>
+            <a:srgbClr val="F2F2F2"/>
+          </a:solidFill>
+          <a:ln>
+            <a:noFill/>
+          </a:ln>
+        </p:spPr>
+        <p:style>
+          <a:lnRef idx="1">
+            <a:schemeClr val="accent1"/>
+          </a:lnRef>
+          <a:fillRef idx="3">
+            <a:schemeClr val="accent1"/>
+          </a:fillRef>
+          <a:effectRef idx="2">
+            <a:schemeClr val="accent1"/>
+          </a:effectRef>
+          <a:fontRef idx="minor">
+            <a:schemeClr val="lt1"/>
+          </a:fontRef>
+        </p:style>
+        <p:txBody>
+          <a:bodyPr rtlCol="0" anchor="ctr"/>
+          <a:lstStyle/>
+          <a:p>
+            <a:pPr algn="ctr"/>
+          </a:p>
+        </p:txBody>
+      </p:sp>
+      <p:sp>
+        <p:nvSpPr>
+          <p:cNvPr id="17" name="Rectangle 16"/>
+          <p:cNvSpPr/>
+          <p:nvPr/>
+        </p:nvSpPr>
+        <p:spPr>
+          <a:xfrm>
+            <a:off x="8109508" y="1591056"/>
+            <a:ext cx="3624986" cy="64008"/>
+          </a:xfrm>
+          <a:prstGeom prst="rect">
+            <a:avLst/>
+          </a:prstGeom>
+          <a:solidFill>
+            <a:srgbClr val="095292"/>
+          </a:solidFill>
+          <a:ln>
+            <a:noFill/>
+          </a:ln>
+        </p:spPr>
+        <p:style>
+          <a:lnRef idx="1">
+            <a:schemeClr val="accent1"/>
+          </a:lnRef>
+          <a:fillRef idx="3">
+            <a:schemeClr val="accent1"/>
+          </a:fillRef>
+          <a:effectRef idx="2">
+            <a:schemeClr val="accent1"/>
+          </a:effectRef>
+          <a:fontRef idx="minor">
+            <a:schemeClr val="lt1"/>
+          </a:fontRef>
+        </p:style>
+        <p:txBody>
+          <a:bodyPr rtlCol="0" anchor="ctr"/>
+          <a:lstStyle/>
+          <a:p>
+            <a:pPr algn="ctr"/>
+          </a:p>
+        </p:txBody>
+      </p:sp>
+      <p:sp>
+        <p:nvSpPr>
+          <p:cNvPr id="18" name="Rectangle 17"/>
+          <p:cNvSpPr/>
+          <p:nvPr/>
+        </p:nvSpPr>
+        <p:spPr>
+          <a:xfrm>
+            <a:off x="8109508" y="1655064"/>
+            <a:ext cx="3624986" cy="27432"/>
+          </a:xfrm>
+          <a:prstGeom prst="rect">
+            <a:avLst/>
+          </a:prstGeom>
+          <a:solidFill>
+            <a:srgbClr val="FFD000"/>
+          </a:solidFill>
+          <a:ln>
+            <a:noFill/>
+          </a:ln>
+        </p:spPr>
+        <p:style>
+          <a:lnRef idx="1">
+            <a:schemeClr val="accent1"/>
+          </a:lnRef>
+          <a:fillRef idx="3">
+            <a:schemeClr val="accent1"/>
+          </a:fillRef>
+          <a:effectRef idx="2">
+            <a:schemeClr val="accent1"/>
+          </a:effectRef>
+          <a:fontRef idx="minor">
+            <a:schemeClr val="lt1"/>
+          </a:fontRef>
+        </p:style>
+        <p:txBody>
+          <a:bodyPr rtlCol="0" anchor="ctr"/>
+          <a:lstStyle/>
+          <a:p>
+            <a:pPr algn="ctr"/>
+          </a:p>
+        </p:txBody>
+      </p:sp>
+      <p:pic>
+        <p:nvPicPr>
+          <p:cNvPr id="19" name="Picture 18" descr="drawio.png"/>
+          <p:cNvPicPr>
+            <a:picLocks noChangeAspect="1"/>
+          </p:cNvPicPr>
+          <p:nvPr/>
+        </p:nvPicPr>
+        <p:blipFill>
+          <a:blip r:embed="rId4"/>
+          <a:stretch>
+            <a:fillRect/>
+          </a:stretch>
+        </p:blipFill>
+        <p:spPr>
+          <a:xfrm>
+            <a:off x="9295638" y="1847087"/>
+            <a:ext cx="1252728" cy="1252728"/>
+          </a:xfrm>
+          <a:prstGeom prst="rect">
+            <a:avLst/>
+          </a:prstGeom>
+        </p:spPr>
+      </p:pic>
+      <p:sp>
+        <p:nvSpPr>
+          <p:cNvPr id="20" name="TextBox 19"/>
+          <p:cNvSpPr txBox="1"/>
+          <p:nvPr/>
+        </p:nvSpPr>
+        <p:spPr>
+          <a:xfrm>
+            <a:off x="8182660" y="3191256"/>
+            <a:ext cx="3478682" cy="621792"/>
+          </a:xfrm>
+          <a:prstGeom prst="rect">
+            <a:avLst/>
+          </a:prstGeom>
+          <a:noFill/>
+        </p:spPr>
+        <p:txBody>
+          <a:bodyPr wrap="square" anchor="t"/>
+          <a:lstStyle/>
+          <a:p>
+            <a:pPr algn="ctr"/>
+            <a:r>
+              <a:rPr sz="1300" b="1" i="0">
+                <a:solidFill>
+                  <a:srgbClr val="095292"/>
+                </a:solidFill>
+                <a:latin typeface="Calibri"/>
+              </a:rPr>
+              <a:t>draw.io</a:t>
+            </a:r>
+          </a:p>
+          <a:p>
+            <a:pPr algn="ctr">
+              <a:spcBef>
+                <a:spcPts val="200"/>
+              </a:spcBef>
+            </a:pPr>
+            <a:r>
+              <a:rPr sz="1000" b="0" i="0">
+                <a:solidFill>
+                  <a:srgbClr val="666666"/>
+                </a:solidFill>
+                <a:latin typeface="Calibri"/>
+              </a:rPr>
+              <a:t>Flujo</a:t>
+            </a:r>
+          </a:p>
+        </p:txBody>
+      </p:sp>
+      <p:sp>
+        <p:nvSpPr>
+          <p:cNvPr id="21" name="TextBox 20"/>
           <p:cNvSpPr txBox="1"/>
           <p:nvPr/>
         </p:nvSpPr>
@@ -10264,7 +10145,7 @@
         <p:spPr>
           <a:xfrm>
             <a:off x="0" y="0"/>
-            <a:ext cx="12191695" cy="960120"/>
+            <a:ext cx="12191695" cy="1170432"/>
           </a:xfrm>
           <a:prstGeom prst="rect">
             <a:avLst/>
@@ -10306,7 +10187,7 @@
         </p:nvSpPr>
         <p:spPr>
           <a:xfrm>
-            <a:off x="0" y="960120"/>
+            <a:off x="0" y="1170432"/>
             <a:ext cx="12191695" cy="41148"/>
           </a:xfrm>
           <a:prstGeom prst="rect">
@@ -10350,7 +10231,7 @@
         <p:spPr>
           <a:xfrm>
             <a:off x="457200" y="164592"/>
-            <a:ext cx="11277295" cy="502920"/>
+            <a:ext cx="11277295" cy="384048"/>
           </a:xfrm>
           <a:prstGeom prst="rect">
             <a:avLst/>
@@ -10370,7 +10251,7 @@
                 </a:solidFill>
                 <a:latin typeface="Calibri"/>
               </a:rPr>
-              <a:t>Taller PI VetCare — objetivo y criterios</a:t>
+              <a:t>Del boceto a la plataforma del curso (diagrama)</a:t>
             </a:r>
           </a:p>
         </p:txBody>
@@ -10383,8 +10264,8 @@
         </p:nvSpPr>
         <p:spPr>
           <a:xfrm>
-            <a:off x="457200" y="1170432"/>
-            <a:ext cx="11277295" cy="5230368"/>
+            <a:off x="457200" y="566928"/>
+            <a:ext cx="11277295" cy="411480"/>
           </a:xfrm>
           <a:prstGeom prst="rect">
             <a:avLst/>
@@ -10397,180 +10278,705 @@
           </a:bodyPr>
           <a:lstStyle/>
           <a:p>
+            <a:r>
+              <a:rPr sz="1400" b="0" i="0">
+                <a:solidFill>
+                  <a:srgbClr val="B8D8EE"/>
+                </a:solidFill>
+                <a:latin typeface="Calibri"/>
+              </a:rPr>
+              <a:t>El diagrama se entrega como codigo Mermaid dentro de la plataforma del curso, no como imagen</a:t>
+            </a:r>
+          </a:p>
+        </p:txBody>
+      </p:sp>
+      <p:sp>
+        <p:nvSpPr>
+          <p:cNvPr id="6" name="Rounded Rectangle 5"/>
+          <p:cNvSpPr/>
+          <p:nvPr/>
+        </p:nvSpPr>
+        <p:spPr>
+          <a:xfrm>
+            <a:off x="457200" y="1659636"/>
+            <a:ext cx="11277295" cy="1051560"/>
+          </a:xfrm>
+          <a:prstGeom prst="roundRect">
+            <a:avLst>
+              <a:gd name="adj" fmla="val 12000"/>
+            </a:avLst>
+          </a:prstGeom>
+          <a:solidFill>
+            <a:srgbClr val="F2F2F2"/>
+          </a:solidFill>
+          <a:ln>
+            <a:noFill/>
+          </a:ln>
+        </p:spPr>
+        <p:style>
+          <a:lnRef idx="1">
+            <a:schemeClr val="accent1"/>
+          </a:lnRef>
+          <a:fillRef idx="3">
+            <a:schemeClr val="accent1"/>
+          </a:fillRef>
+          <a:effectRef idx="2">
+            <a:schemeClr val="accent1"/>
+          </a:effectRef>
+          <a:fontRef idx="minor">
+            <a:schemeClr val="lt1"/>
+          </a:fontRef>
+        </p:style>
+        <p:txBody>
+          <a:bodyPr rtlCol="0" anchor="ctr"/>
+          <a:lstStyle/>
+          <a:p>
+            <a:pPr algn="ctr"/>
+          </a:p>
+        </p:txBody>
+      </p:sp>
+      <p:sp>
+        <p:nvSpPr>
+          <p:cNvPr id="7" name="Rounded Rectangle 6"/>
+          <p:cNvSpPr/>
+          <p:nvPr/>
+        </p:nvSpPr>
+        <p:spPr>
+          <a:xfrm>
+            <a:off x="594360" y="1965960"/>
+            <a:ext cx="438912" cy="438912"/>
+          </a:xfrm>
+          <a:prstGeom prst="roundRect">
+            <a:avLst>
+              <a:gd name="adj" fmla="val 12000"/>
+            </a:avLst>
+          </a:prstGeom>
+          <a:solidFill>
+            <a:srgbClr val="095292"/>
+          </a:solidFill>
+          <a:ln>
+            <a:noFill/>
+          </a:ln>
+        </p:spPr>
+        <p:style>
+          <a:lnRef idx="1">
+            <a:schemeClr val="accent1"/>
+          </a:lnRef>
+          <a:fillRef idx="3">
+            <a:schemeClr val="accent1"/>
+          </a:fillRef>
+          <a:effectRef idx="2">
+            <a:schemeClr val="accent1"/>
+          </a:effectRef>
+          <a:fontRef idx="minor">
+            <a:schemeClr val="lt1"/>
+          </a:fontRef>
+        </p:style>
+        <p:txBody>
+          <a:bodyPr rtlCol="0" anchor="ctr"/>
+          <a:lstStyle/>
+          <a:p>
+            <a:pPr algn="ctr"/>
+          </a:p>
+        </p:txBody>
+      </p:sp>
+      <p:sp>
+        <p:nvSpPr>
+          <p:cNvPr id="8" name="TextBox 7"/>
+          <p:cNvSpPr txBox="1"/>
+          <p:nvPr/>
+        </p:nvSpPr>
+        <p:spPr>
+          <a:xfrm>
+            <a:off x="594360" y="1965960"/>
+            <a:ext cx="438912" cy="438912"/>
+          </a:xfrm>
+          <a:prstGeom prst="rect">
+            <a:avLst/>
+          </a:prstGeom>
+          <a:noFill/>
+        </p:spPr>
+        <p:txBody>
+          <a:bodyPr wrap="square" anchor="ctr"/>
+          <a:lstStyle/>
+          <a:p>
+            <a:pPr algn="ctr"/>
+            <a:r>
+              <a:rPr sz="1600" b="1" i="0">
+                <a:solidFill>
+                  <a:srgbClr val="FFFFFF"/>
+                </a:solidFill>
+                <a:latin typeface="Calibri"/>
+              </a:rPr>
+              <a:t>1</a:t>
+            </a:r>
+          </a:p>
+        </p:txBody>
+      </p:sp>
+      <p:sp>
+        <p:nvSpPr>
+          <p:cNvPr id="9" name="TextBox 8"/>
+          <p:cNvSpPr txBox="1"/>
+          <p:nvPr/>
+        </p:nvSpPr>
+        <p:spPr>
+          <a:xfrm>
+            <a:off x="1188720" y="1751076"/>
+            <a:ext cx="10271455" cy="886968"/>
+          </a:xfrm>
+          <a:prstGeom prst="rect">
+            <a:avLst/>
+          </a:prstGeom>
+          <a:noFill/>
+        </p:spPr>
+        <p:txBody>
+          <a:bodyPr wrap="square" anchor="ctr"/>
+          <a:lstStyle/>
+          <a:p>
+            <a:r>
+              <a:rPr sz="1500" b="1" i="0">
+                <a:solidFill>
+                  <a:srgbClr val="095292"/>
+                </a:solidFill>
+                <a:latin typeface="Calibri"/>
+              </a:rPr>
+              <a:t>Disena visual</a:t>
+            </a:r>
+          </a:p>
+          <a:p>
             <a:pPr>
-              <a:spcAft>
-                <a:spcPts val="800"/>
-              </a:spcAft>
+              <a:spcBef>
+                <a:spcPts val="200"/>
+              </a:spcBef>
             </a:pPr>
             <a:r>
-              <a:rPr sz="2000" b="0" i="0">
+              <a:rPr sz="1300" b="0" i="0">
                 <a:solidFill>
                   <a:srgbClr val="333333"/>
                 </a:solidFill>
                 <a:latin typeface="Calibri"/>
               </a:rPr>
-              <a:t>–   </a:t>
-            </a:r>
-            <a:r>
-              <a:rPr sz="2000" b="1" i="0">
+              <a:t>Dibuja el diagrama como quieras en Excalidraw o draw.io: es mas rapido arrastrar cajas que escribir codigo, y ahi es donde piensas el modelo.</a:t>
+            </a:r>
+          </a:p>
+        </p:txBody>
+      </p:sp>
+      <p:sp>
+        <p:nvSpPr>
+          <p:cNvPr id="10" name="Rounded Rectangle 9"/>
+          <p:cNvSpPr/>
+          <p:nvPr/>
+        </p:nvSpPr>
+        <p:spPr>
+          <a:xfrm>
+            <a:off x="457200" y="2802636"/>
+            <a:ext cx="11277295" cy="1051560"/>
+          </a:xfrm>
+          <a:prstGeom prst="roundRect">
+            <a:avLst>
+              <a:gd name="adj" fmla="val 12000"/>
+            </a:avLst>
+          </a:prstGeom>
+          <a:solidFill>
+            <a:srgbClr val="E8F4FA"/>
+          </a:solidFill>
+          <a:ln>
+            <a:noFill/>
+          </a:ln>
+        </p:spPr>
+        <p:style>
+          <a:lnRef idx="1">
+            <a:schemeClr val="accent1"/>
+          </a:lnRef>
+          <a:fillRef idx="3">
+            <a:schemeClr val="accent1"/>
+          </a:fillRef>
+          <a:effectRef idx="2">
+            <a:schemeClr val="accent1"/>
+          </a:effectRef>
+          <a:fontRef idx="minor">
+            <a:schemeClr val="lt1"/>
+          </a:fontRef>
+        </p:style>
+        <p:txBody>
+          <a:bodyPr rtlCol="0" anchor="ctr"/>
+          <a:lstStyle/>
+          <a:p>
+            <a:pPr algn="ctr"/>
+          </a:p>
+        </p:txBody>
+      </p:sp>
+      <p:sp>
+        <p:nvSpPr>
+          <p:cNvPr id="11" name="Rounded Rectangle 10"/>
+          <p:cNvSpPr/>
+          <p:nvPr/>
+        </p:nvSpPr>
+        <p:spPr>
+          <a:xfrm>
+            <a:off x="594360" y="3108960"/>
+            <a:ext cx="438912" cy="438912"/>
+          </a:xfrm>
+          <a:prstGeom prst="roundRect">
+            <a:avLst>
+              <a:gd name="adj" fmla="val 12000"/>
+            </a:avLst>
+          </a:prstGeom>
+          <a:solidFill>
+            <a:srgbClr val="095292"/>
+          </a:solidFill>
+          <a:ln>
+            <a:noFill/>
+          </a:ln>
+        </p:spPr>
+        <p:style>
+          <a:lnRef idx="1">
+            <a:schemeClr val="accent1"/>
+          </a:lnRef>
+          <a:fillRef idx="3">
+            <a:schemeClr val="accent1"/>
+          </a:fillRef>
+          <a:effectRef idx="2">
+            <a:schemeClr val="accent1"/>
+          </a:effectRef>
+          <a:fontRef idx="minor">
+            <a:schemeClr val="lt1"/>
+          </a:fontRef>
+        </p:style>
+        <p:txBody>
+          <a:bodyPr rtlCol="0" anchor="ctr"/>
+          <a:lstStyle/>
+          <a:p>
+            <a:pPr algn="ctr"/>
+          </a:p>
+        </p:txBody>
+      </p:sp>
+      <p:sp>
+        <p:nvSpPr>
+          <p:cNvPr id="12" name="TextBox 11"/>
+          <p:cNvSpPr txBox="1"/>
+          <p:nvPr/>
+        </p:nvSpPr>
+        <p:spPr>
+          <a:xfrm>
+            <a:off x="594360" y="3108960"/>
+            <a:ext cx="438912" cy="438912"/>
+          </a:xfrm>
+          <a:prstGeom prst="rect">
+            <a:avLst/>
+          </a:prstGeom>
+          <a:noFill/>
+        </p:spPr>
+        <p:txBody>
+          <a:bodyPr wrap="square" anchor="ctr"/>
+          <a:lstStyle/>
+          <a:p>
+            <a:pPr algn="ctr"/>
+            <a:r>
+              <a:rPr sz="1600" b="1" i="0">
+                <a:solidFill>
+                  <a:srgbClr val="FFFFFF"/>
+                </a:solidFill>
+                <a:latin typeface="Calibri"/>
+              </a:rPr>
+              <a:t>2</a:t>
+            </a:r>
+          </a:p>
+        </p:txBody>
+      </p:sp>
+      <p:sp>
+        <p:nvSpPr>
+          <p:cNvPr id="13" name="TextBox 12"/>
+          <p:cNvSpPr txBox="1"/>
+          <p:nvPr/>
+        </p:nvSpPr>
+        <p:spPr>
+          <a:xfrm>
+            <a:off x="1188720" y="2894076"/>
+            <a:ext cx="10271455" cy="886968"/>
+          </a:xfrm>
+          <a:prstGeom prst="rect">
+            <a:avLst/>
+          </a:prstGeom>
+          <a:noFill/>
+        </p:spPr>
+        <p:txBody>
+          <a:bodyPr wrap="square" anchor="ctr"/>
+          <a:lstStyle/>
+          <a:p>
+            <a:r>
+              <a:rPr sz="1500" b="1" i="0">
+                <a:solidFill>
+                  <a:srgbClr val="095292"/>
+                </a:solidFill>
+                <a:latin typeface="Calibri"/>
+              </a:rPr>
+              <a:t>Traduce con IA</a:t>
+            </a:r>
+          </a:p>
+          <a:p>
+            <a:pPr>
+              <a:spcBef>
+                <a:spcPts val="200"/>
+              </a:spcBef>
+            </a:pPr>
+            <a:r>
+              <a:rPr sz="1300" b="0" i="0">
                 <a:solidFill>
                   <a:srgbClr val="333333"/>
                 </a:solidFill>
                 <a:latin typeface="Calibri"/>
               </a:rPr>
-              <a:t>Objetivo:</a:t>
-            </a:r>
-            <a:r>
-              <a:rPr sz="2000" b="0" i="0">
+              <a:t>Copia o describe tu boceto a una IA y pidele el codigo Mermaid: «convierte este diagrama a Mermaid usando sequenceDiagram». Revisa el resultado: la IA acierta la sintaxis, no tu modelo.</a:t>
+            </a:r>
+          </a:p>
+        </p:txBody>
+      </p:sp>
+      <p:sp>
+        <p:nvSpPr>
+          <p:cNvPr id="14" name="Rounded Rectangle 13"/>
+          <p:cNvSpPr/>
+          <p:nvPr/>
+        </p:nvSpPr>
+        <p:spPr>
+          <a:xfrm>
+            <a:off x="457200" y="3945636"/>
+            <a:ext cx="11277295" cy="1051560"/>
+          </a:xfrm>
+          <a:prstGeom prst="roundRect">
+            <a:avLst>
+              <a:gd name="adj" fmla="val 12000"/>
+            </a:avLst>
+          </a:prstGeom>
+          <a:solidFill>
+            <a:srgbClr val="F2F2F2"/>
+          </a:solidFill>
+          <a:ln>
+            <a:noFill/>
+          </a:ln>
+        </p:spPr>
+        <p:style>
+          <a:lnRef idx="1">
+            <a:schemeClr val="accent1"/>
+          </a:lnRef>
+          <a:fillRef idx="3">
+            <a:schemeClr val="accent1"/>
+          </a:fillRef>
+          <a:effectRef idx="2">
+            <a:schemeClr val="accent1"/>
+          </a:effectRef>
+          <a:fontRef idx="minor">
+            <a:schemeClr val="lt1"/>
+          </a:fontRef>
+        </p:style>
+        <p:txBody>
+          <a:bodyPr rtlCol="0" anchor="ctr"/>
+          <a:lstStyle/>
+          <a:p>
+            <a:pPr algn="ctr"/>
+          </a:p>
+        </p:txBody>
+      </p:sp>
+      <p:sp>
+        <p:nvSpPr>
+          <p:cNvPr id="15" name="Rounded Rectangle 14"/>
+          <p:cNvSpPr/>
+          <p:nvPr/>
+        </p:nvSpPr>
+        <p:spPr>
+          <a:xfrm>
+            <a:off x="594360" y="4251960"/>
+            <a:ext cx="438912" cy="438912"/>
+          </a:xfrm>
+          <a:prstGeom prst="roundRect">
+            <a:avLst>
+              <a:gd name="adj" fmla="val 12000"/>
+            </a:avLst>
+          </a:prstGeom>
+          <a:solidFill>
+            <a:srgbClr val="095292"/>
+          </a:solidFill>
+          <a:ln>
+            <a:noFill/>
+          </a:ln>
+        </p:spPr>
+        <p:style>
+          <a:lnRef idx="1">
+            <a:schemeClr val="accent1"/>
+          </a:lnRef>
+          <a:fillRef idx="3">
+            <a:schemeClr val="accent1"/>
+          </a:fillRef>
+          <a:effectRef idx="2">
+            <a:schemeClr val="accent1"/>
+          </a:effectRef>
+          <a:fontRef idx="minor">
+            <a:schemeClr val="lt1"/>
+          </a:fontRef>
+        </p:style>
+        <p:txBody>
+          <a:bodyPr rtlCol="0" anchor="ctr"/>
+          <a:lstStyle/>
+          <a:p>
+            <a:pPr algn="ctr"/>
+          </a:p>
+        </p:txBody>
+      </p:sp>
+      <p:sp>
+        <p:nvSpPr>
+          <p:cNvPr id="16" name="TextBox 15"/>
+          <p:cNvSpPr txBox="1"/>
+          <p:nvPr/>
+        </p:nvSpPr>
+        <p:spPr>
+          <a:xfrm>
+            <a:off x="594360" y="4251960"/>
+            <a:ext cx="438912" cy="438912"/>
+          </a:xfrm>
+          <a:prstGeom prst="rect">
+            <a:avLst/>
+          </a:prstGeom>
+          <a:noFill/>
+        </p:spPr>
+        <p:txBody>
+          <a:bodyPr wrap="square" anchor="ctr"/>
+          <a:lstStyle/>
+          <a:p>
+            <a:pPr algn="ctr"/>
+            <a:r>
+              <a:rPr sz="1600" b="1" i="0">
+                <a:solidFill>
+                  <a:srgbClr val="FFFFFF"/>
+                </a:solidFill>
+                <a:latin typeface="Calibri"/>
+              </a:rPr>
+              <a:t>3</a:t>
+            </a:r>
+          </a:p>
+        </p:txBody>
+      </p:sp>
+      <p:sp>
+        <p:nvSpPr>
+          <p:cNvPr id="17" name="TextBox 16"/>
+          <p:cNvSpPr txBox="1"/>
+          <p:nvPr/>
+        </p:nvSpPr>
+        <p:spPr>
+          <a:xfrm>
+            <a:off x="1188720" y="4037076"/>
+            <a:ext cx="10271455" cy="886968"/>
+          </a:xfrm>
+          <a:prstGeom prst="rect">
+            <a:avLst/>
+          </a:prstGeom>
+          <a:noFill/>
+        </p:spPr>
+        <p:txBody>
+          <a:bodyPr wrap="square" anchor="ctr"/>
+          <a:lstStyle/>
+          <a:p>
+            <a:r>
+              <a:rPr sz="1500" b="1" i="0">
+                <a:solidFill>
+                  <a:srgbClr val="095292"/>
+                </a:solidFill>
+                <a:latin typeface="Calibri"/>
+              </a:rPr>
+              <a:t>Pega y renderiza en la plataforma del curso</a:t>
+            </a:r>
+          </a:p>
+          <a:p>
+            <a:pPr>
+              <a:spcBef>
+                <a:spcPts val="200"/>
+              </a:spcBef>
+            </a:pPr>
+            <a:r>
+              <a:rPr sz="1300" b="0" i="0">
                 <a:solidFill>
                   <a:srgbClr val="333333"/>
                 </a:solidFill>
                 <a:latin typeface="Calibri"/>
               </a:rPr>
-              <a:t> Contrato &gt;=3 ops + outline pitch 5-8 min.</a:t>
+              <a:t>Pega ese codigo en la caja de texto de la pregunta y mira como lo dibuja la plataforma. Si no renderiza, corrige ahi mismo: lo que se califica es el diagrama renderizado dentro de la plataforma del curso.</a:t>
+            </a:r>
+          </a:p>
+        </p:txBody>
+      </p:sp>
+      <p:sp>
+        <p:nvSpPr>
+          <p:cNvPr id="18" name="Rounded Rectangle 17"/>
+          <p:cNvSpPr/>
+          <p:nvPr/>
+        </p:nvSpPr>
+        <p:spPr>
+          <a:xfrm>
+            <a:off x="457200" y="5088636"/>
+            <a:ext cx="11277295" cy="1051560"/>
+          </a:xfrm>
+          <a:prstGeom prst="roundRect">
+            <a:avLst>
+              <a:gd name="adj" fmla="val 12000"/>
+            </a:avLst>
+          </a:prstGeom>
+          <a:solidFill>
+            <a:srgbClr val="E8F4FA"/>
+          </a:solidFill>
+          <a:ln>
+            <a:noFill/>
+          </a:ln>
+        </p:spPr>
+        <p:style>
+          <a:lnRef idx="1">
+            <a:schemeClr val="accent1"/>
+          </a:lnRef>
+          <a:fillRef idx="3">
+            <a:schemeClr val="accent1"/>
+          </a:fillRef>
+          <a:effectRef idx="2">
+            <a:schemeClr val="accent1"/>
+          </a:effectRef>
+          <a:fontRef idx="minor">
+            <a:schemeClr val="lt1"/>
+          </a:fontRef>
+        </p:style>
+        <p:txBody>
+          <a:bodyPr rtlCol="0" anchor="ctr"/>
+          <a:lstStyle/>
+          <a:p>
+            <a:pPr algn="ctr"/>
+          </a:p>
+        </p:txBody>
+      </p:sp>
+      <p:sp>
+        <p:nvSpPr>
+          <p:cNvPr id="19" name="Rounded Rectangle 18"/>
+          <p:cNvSpPr/>
+          <p:nvPr/>
+        </p:nvSpPr>
+        <p:spPr>
+          <a:xfrm>
+            <a:off x="594360" y="5394960"/>
+            <a:ext cx="438912" cy="438912"/>
+          </a:xfrm>
+          <a:prstGeom prst="roundRect">
+            <a:avLst>
+              <a:gd name="adj" fmla="val 12000"/>
+            </a:avLst>
+          </a:prstGeom>
+          <a:solidFill>
+            <a:srgbClr val="095292"/>
+          </a:solidFill>
+          <a:ln>
+            <a:noFill/>
+          </a:ln>
+        </p:spPr>
+        <p:style>
+          <a:lnRef idx="1">
+            <a:schemeClr val="accent1"/>
+          </a:lnRef>
+          <a:fillRef idx="3">
+            <a:schemeClr val="accent1"/>
+          </a:fillRef>
+          <a:effectRef idx="2">
+            <a:schemeClr val="accent1"/>
+          </a:effectRef>
+          <a:fontRef idx="minor">
+            <a:schemeClr val="lt1"/>
+          </a:fontRef>
+        </p:style>
+        <p:txBody>
+          <a:bodyPr rtlCol="0" anchor="ctr"/>
+          <a:lstStyle/>
+          <a:p>
+            <a:pPr algn="ctr"/>
+          </a:p>
+        </p:txBody>
+      </p:sp>
+      <p:sp>
+        <p:nvSpPr>
+          <p:cNvPr id="20" name="TextBox 19"/>
+          <p:cNvSpPr txBox="1"/>
+          <p:nvPr/>
+        </p:nvSpPr>
+        <p:spPr>
+          <a:xfrm>
+            <a:off x="594360" y="5394960"/>
+            <a:ext cx="438912" cy="438912"/>
+          </a:xfrm>
+          <a:prstGeom prst="rect">
+            <a:avLst/>
+          </a:prstGeom>
+          <a:noFill/>
+        </p:spPr>
+        <p:txBody>
+          <a:bodyPr wrap="square" anchor="ctr"/>
+          <a:lstStyle/>
+          <a:p>
+            <a:pPr algn="ctr"/>
+            <a:r>
+              <a:rPr sz="1600" b="1" i="0">
+                <a:solidFill>
+                  <a:srgbClr val="FFFFFF"/>
+                </a:solidFill>
+                <a:latin typeface="Calibri"/>
+              </a:rPr>
+              <a:t>4</a:t>
+            </a:r>
+          </a:p>
+        </p:txBody>
+      </p:sp>
+      <p:sp>
+        <p:nvSpPr>
+          <p:cNvPr id="21" name="TextBox 20"/>
+          <p:cNvSpPr txBox="1"/>
+          <p:nvPr/>
+        </p:nvSpPr>
+        <p:spPr>
+          <a:xfrm>
+            <a:off x="1188720" y="5180076"/>
+            <a:ext cx="10271455" cy="886968"/>
+          </a:xfrm>
+          <a:prstGeom prst="rect">
+            <a:avLst/>
+          </a:prstGeom>
+          <a:noFill/>
+        </p:spPr>
+        <p:txBody>
+          <a:bodyPr wrap="square" anchor="ctr"/>
+          <a:lstStyle/>
+          <a:p>
+            <a:r>
+              <a:rPr sz="1500" b="1" i="0">
+                <a:solidFill>
+                  <a:srgbClr val="095292"/>
+                </a:solidFill>
+                <a:latin typeface="Calibri"/>
+              </a:rPr>
+              <a:t>Guarda el PNG para tu PI</a:t>
             </a:r>
           </a:p>
           <a:p>
             <a:pPr>
-              <a:spcAft>
-                <a:spcPts val="800"/>
-              </a:spcAft>
+              <a:spcBef>
+                <a:spcPts val="200"/>
+              </a:spcBef>
             </a:pPr>
             <a:r>
-              <a:rPr sz="2000" b="0" i="0">
+              <a:rPr sz="1300" b="0" i="0">
                 <a:solidFill>
                   <a:srgbClr val="333333"/>
                 </a:solidFill>
                 <a:latin typeface="Calibri"/>
               </a:rPr>
-              <a:t>–   </a:t>
-            </a:r>
-            <a:r>
-              <a:rPr sz="2000" b="1" i="0">
-                <a:solidFill>
-                  <a:srgbClr val="333333"/>
-                </a:solidFill>
-                <a:latin typeface="Calibri"/>
-              </a:rPr>
-              <a:t>Exito:</a:t>
-            </a:r>
-            <a:r>
-              <a:rPr sz="2000" b="0" i="0">
-                <a:solidFill>
-                  <a:srgbClr val="333333"/>
-                </a:solidFill>
-                <a:latin typeface="Calibri"/>
-              </a:rPr>
-              <a:t> Contrato 3 ops.</a:t>
-            </a:r>
-          </a:p>
-          <a:p>
-            <a:pPr>
-              <a:spcAft>
-                <a:spcPts val="800"/>
-              </a:spcAft>
-            </a:pPr>
-            <a:r>
-              <a:rPr sz="2000" b="0" i="0">
-                <a:solidFill>
-                  <a:srgbClr val="333333"/>
-                </a:solidFill>
-                <a:latin typeface="Calibri"/>
-              </a:rPr>
-              <a:t>–   </a:t>
-            </a:r>
-            <a:r>
-              <a:rPr sz="2000" b="1" i="0">
-                <a:solidFill>
-                  <a:srgbClr val="333333"/>
-                </a:solidFill>
-                <a:latin typeface="Calibri"/>
-              </a:rPr>
-              <a:t>Exito:</a:t>
-            </a:r>
-            <a:r>
-              <a:rPr sz="2000" b="0" i="0">
-                <a:solidFill>
-                  <a:srgbClr val="333333"/>
-                </a:solidFill>
-                <a:latin typeface="Calibri"/>
-              </a:rPr>
-              <a:t> Parametros/errores/ejemplo.</a:t>
-            </a:r>
-          </a:p>
-          <a:p>
-            <a:pPr>
-              <a:spcAft>
-                <a:spcPts val="800"/>
-              </a:spcAft>
-            </a:pPr>
-            <a:r>
-              <a:rPr sz="2000" b="0" i="0">
-                <a:solidFill>
-                  <a:srgbClr val="333333"/>
-                </a:solidFill>
-                <a:latin typeface="Calibri"/>
-              </a:rPr>
-              <a:t>–   </a:t>
-            </a:r>
-            <a:r>
-              <a:rPr sz="2000" b="1" i="0">
-                <a:solidFill>
-                  <a:srgbClr val="333333"/>
-                </a:solidFill>
-                <a:latin typeface="Calibri"/>
-              </a:rPr>
-              <a:t>Exito:</a:t>
-            </a:r>
-            <a:r>
-              <a:rPr sz="2000" b="0" i="0">
-                <a:solidFill>
-                  <a:srgbClr val="333333"/>
-                </a:solidFill>
-                <a:latin typeface="Calibri"/>
-              </a:rPr>
-              <a:t> Outline pitch.</a:t>
-            </a:r>
-          </a:p>
-          <a:p>
-            <a:pPr>
-              <a:spcAft>
-                <a:spcPts val="800"/>
-              </a:spcAft>
-            </a:pPr>
-            <a:r>
-              <a:rPr sz="2000" b="0" i="0">
-                <a:solidFill>
-                  <a:srgbClr val="333333"/>
-                </a:solidFill>
-                <a:latin typeface="Calibri"/>
-              </a:rPr>
-              <a:t>–   </a:t>
-            </a:r>
-            <a:r>
-              <a:rPr sz="2000" b="1" i="0">
-                <a:solidFill>
-                  <a:srgbClr val="333333"/>
-                </a:solidFill>
-                <a:latin typeface="Calibri"/>
-              </a:rPr>
-              <a:t>Exito:</a:t>
-            </a:r>
-            <a:r>
-              <a:rPr sz="2000" b="0" i="0">
-                <a:solidFill>
-                  <a:srgbClr val="333333"/>
-                </a:solidFill>
-                <a:latin typeface="Calibri"/>
-              </a:rPr>
-              <a:t> Borrador final.</a:t>
-            </a:r>
-          </a:p>
-        </p:txBody>
-      </p:sp>
-      <p:sp>
-        <p:nvSpPr>
-          <p:cNvPr id="6" name="TextBox 5"/>
+              <a:t>Exporta tambien la imagen a la carpeta de tu Proyecto Integrador. Esa copia es para tu informe; no reemplaza la respuesta en la plataforma.</a:t>
+            </a:r>
+          </a:p>
+        </p:txBody>
+      </p:sp>
+      <p:sp>
+        <p:nvSpPr>
+          <p:cNvPr id="22" name="TextBox 21"/>
           <p:cNvSpPr txBox="1"/>
           <p:nvPr/>
         </p:nvSpPr>
@@ -10744,7 +11150,7 @@
                 </a:solidFill>
                 <a:latin typeface="Calibri"/>
               </a:rPr>
-              <a:t>Taller PI VetCare — escenario / datos de partida</a:t>
+              <a:t>Taller PI VetCare — contexto / por que importa</a:t>
             </a:r>
           </a:p>
         </p:txBody>
@@ -10783,7 +11189,41 @@
                 </a:solidFill>
                 <a:latin typeface="Calibri"/>
               </a:rPr>
-              <a:t>–   Plantilla sp_agendar_cita / consulta / facturar.</a:t>
+              <a:t>–   </a:t>
+            </a:r>
+            <a:r>
+              <a:rPr sz="2000" b="1" i="0">
+                <a:solidFill>
+                  <a:srgbClr val="333333"/>
+                </a:solidFill>
+                <a:latin typeface="Calibri"/>
+              </a:rPr>
+              <a:t>Por qué importa al PI:</a:t>
+            </a:r>
+            <a:r>
+              <a:rPr sz="2000" b="0" i="0">
+                <a:solidFill>
+                  <a:srgbClr val="333333"/>
+                </a:solidFill>
+                <a:latin typeface="Calibri"/>
+              </a:rPr>
+              <a:t> app llama contrato, no SQL suelto.</a:t>
+            </a:r>
+          </a:p>
+          <a:p>
+            <a:pPr>
+              <a:spcAft>
+                <a:spcPts val="800"/>
+              </a:spcAft>
+            </a:pPr>
+            <a:r>
+              <a:rPr sz="2000" b="0" i="0">
+                <a:solidFill>
+                  <a:srgbClr val="333333"/>
+                </a:solidFill>
+                <a:latin typeface="Calibri"/>
+              </a:rPr>
+              <a:t>–   Preparar sustentacion.</a:t>
             </a:r>
           </a:p>
         </p:txBody>
@@ -11816,111 +12256,21 @@
                 </a:solidFill>
                 <a:latin typeface="Calibri"/>
               </a:rPr>
-              <a:t>Taller PI VetCare — pasos guiados</a:t>
-            </a:r>
-          </a:p>
-        </p:txBody>
-      </p:sp>
-      <p:sp>
-        <p:nvSpPr>
-          <p:cNvPr id="5" name="Rounded Rectangle 4"/>
-          <p:cNvSpPr/>
-          <p:nvPr/>
-        </p:nvSpPr>
-        <p:spPr>
-          <a:xfrm>
-            <a:off x="457200" y="1554480"/>
-            <a:ext cx="11277295" cy="1051560"/>
-          </a:xfrm>
-          <a:prstGeom prst="roundRect">
-            <a:avLst>
-              <a:gd name="adj" fmla="val 12000"/>
-            </a:avLst>
-          </a:prstGeom>
-          <a:solidFill>
-            <a:srgbClr val="F2F2F2"/>
-          </a:solidFill>
-          <a:ln>
-            <a:noFill/>
-          </a:ln>
-        </p:spPr>
-        <p:style>
-          <a:lnRef idx="1">
-            <a:schemeClr val="accent1"/>
-          </a:lnRef>
-          <a:fillRef idx="3">
-            <a:schemeClr val="accent1"/>
-          </a:fillRef>
-          <a:effectRef idx="2">
-            <a:schemeClr val="accent1"/>
-          </a:effectRef>
-          <a:fontRef idx="minor">
-            <a:schemeClr val="lt1"/>
-          </a:fontRef>
-        </p:style>
-        <p:txBody>
-          <a:bodyPr rtlCol="0" anchor="ctr"/>
-          <a:lstStyle/>
-          <a:p>
-            <a:pPr algn="ctr"/>
-          </a:p>
-        </p:txBody>
-      </p:sp>
-      <p:sp>
-        <p:nvSpPr>
-          <p:cNvPr id="6" name="Rounded Rectangle 5"/>
-          <p:cNvSpPr/>
-          <p:nvPr/>
-        </p:nvSpPr>
-        <p:spPr>
-          <a:xfrm>
-            <a:off x="594360" y="1860804"/>
-            <a:ext cx="438912" cy="438912"/>
-          </a:xfrm>
-          <a:prstGeom prst="roundRect">
-            <a:avLst>
-              <a:gd name="adj" fmla="val 12000"/>
-            </a:avLst>
-          </a:prstGeom>
-          <a:solidFill>
-            <a:srgbClr val="095292"/>
-          </a:solidFill>
-          <a:ln>
-            <a:noFill/>
-          </a:ln>
-        </p:spPr>
-        <p:style>
-          <a:lnRef idx="1">
-            <a:schemeClr val="accent1"/>
-          </a:lnRef>
-          <a:fillRef idx="3">
-            <a:schemeClr val="accent1"/>
-          </a:fillRef>
-          <a:effectRef idx="2">
-            <a:schemeClr val="accent1"/>
-          </a:effectRef>
-          <a:fontRef idx="minor">
-            <a:schemeClr val="lt1"/>
-          </a:fontRef>
-        </p:style>
-        <p:txBody>
-          <a:bodyPr rtlCol="0" anchor="ctr"/>
-          <a:lstStyle/>
-          <a:p>
-            <a:pPr algn="ctr"/>
-          </a:p>
-        </p:txBody>
-      </p:sp>
-      <p:sp>
-        <p:nvSpPr>
-          <p:cNvPr id="7" name="TextBox 6"/>
+              <a:t>Taller PI VetCare — objetivo y criterios</a:t>
+            </a:r>
+          </a:p>
+        </p:txBody>
+      </p:sp>
+      <p:sp>
+        <p:nvSpPr>
+          <p:cNvPr id="5" name="TextBox 4"/>
           <p:cNvSpPr txBox="1"/>
           <p:nvPr/>
         </p:nvSpPr>
         <p:spPr>
           <a:xfrm>
-            <a:off x="594360" y="1860804"/>
-            <a:ext cx="438912" cy="438912"/>
+            <a:off x="457200" y="1170432"/>
+            <a:ext cx="11277295" cy="5230368"/>
           </a:xfrm>
           <a:prstGeom prst="rect">
             <a:avLst/>
@@ -11928,522 +12278,185 @@
           <a:noFill/>
         </p:spPr>
         <p:txBody>
-          <a:bodyPr wrap="square" anchor="ctr"/>
-          <a:lstStyle/>
-          <a:p>
-            <a:pPr algn="ctr"/>
-            <a:r>
-              <a:rPr sz="1600" b="1" i="0">
-                <a:solidFill>
-                  <a:srgbClr val="FFFFFF"/>
-                </a:solidFill>
-                <a:latin typeface="Calibri"/>
-              </a:rPr>
-              <a:t>1</a:t>
-            </a:r>
-          </a:p>
-        </p:txBody>
-      </p:sp>
-      <p:sp>
-        <p:nvSpPr>
-          <p:cNvPr id="8" name="TextBox 7"/>
-          <p:cNvSpPr txBox="1"/>
-          <p:nvPr/>
-        </p:nvSpPr>
-        <p:spPr>
-          <a:xfrm>
-            <a:off x="1188720" y="1645920"/>
-            <a:ext cx="10271455" cy="886968"/>
-          </a:xfrm>
-          <a:prstGeom prst="rect">
-            <a:avLst/>
-          </a:prstGeom>
-          <a:noFill/>
-        </p:spPr>
-        <p:txBody>
-          <a:bodyPr wrap="square" anchor="ctr"/>
-          <a:lstStyle/>
-          <a:p>
-            <a:r>
-              <a:rPr sz="1500" b="1" i="0">
-                <a:solidFill>
-                  <a:srgbClr val="095292"/>
-                </a:solidFill>
-                <a:latin typeface="Calibri"/>
-              </a:rPr>
-              <a:t>Redactar contrato de &gt;=3 operaciones.</a:t>
-            </a:r>
-          </a:p>
-        </p:txBody>
-      </p:sp>
-      <p:sp>
-        <p:nvSpPr>
-          <p:cNvPr id="9" name="Rounded Rectangle 8"/>
-          <p:cNvSpPr/>
-          <p:nvPr/>
-        </p:nvSpPr>
-        <p:spPr>
-          <a:xfrm>
-            <a:off x="457200" y="2697480"/>
-            <a:ext cx="11277295" cy="1051560"/>
-          </a:xfrm>
-          <a:prstGeom prst="roundRect">
-            <a:avLst>
-              <a:gd name="adj" fmla="val 12000"/>
-            </a:avLst>
-          </a:prstGeom>
-          <a:solidFill>
-            <a:srgbClr val="E8F4FA"/>
-          </a:solidFill>
-          <a:ln>
-            <a:noFill/>
-          </a:ln>
-        </p:spPr>
-        <p:style>
-          <a:lnRef idx="1">
-            <a:schemeClr val="accent1"/>
-          </a:lnRef>
-          <a:fillRef idx="3">
-            <a:schemeClr val="accent1"/>
-          </a:fillRef>
-          <a:effectRef idx="2">
-            <a:schemeClr val="accent1"/>
-          </a:effectRef>
-          <a:fontRef idx="minor">
-            <a:schemeClr val="lt1"/>
-          </a:fontRef>
-        </p:style>
-        <p:txBody>
-          <a:bodyPr rtlCol="0" anchor="ctr"/>
-          <a:lstStyle/>
-          <a:p>
-            <a:pPr algn="ctr"/>
-          </a:p>
-        </p:txBody>
-      </p:sp>
-      <p:sp>
-        <p:nvSpPr>
-          <p:cNvPr id="10" name="Rounded Rectangle 9"/>
-          <p:cNvSpPr/>
-          <p:nvPr/>
-        </p:nvSpPr>
-        <p:spPr>
-          <a:xfrm>
-            <a:off x="594360" y="3003804"/>
-            <a:ext cx="438912" cy="438912"/>
-          </a:xfrm>
-          <a:prstGeom prst="roundRect">
-            <a:avLst>
-              <a:gd name="adj" fmla="val 12000"/>
-            </a:avLst>
-          </a:prstGeom>
-          <a:solidFill>
-            <a:srgbClr val="095292"/>
-          </a:solidFill>
-          <a:ln>
-            <a:noFill/>
-          </a:ln>
-        </p:spPr>
-        <p:style>
-          <a:lnRef idx="1">
-            <a:schemeClr val="accent1"/>
-          </a:lnRef>
-          <a:fillRef idx="3">
-            <a:schemeClr val="accent1"/>
-          </a:fillRef>
-          <a:effectRef idx="2">
-            <a:schemeClr val="accent1"/>
-          </a:effectRef>
-          <a:fontRef idx="minor">
-            <a:schemeClr val="lt1"/>
-          </a:fontRef>
-        </p:style>
-        <p:txBody>
-          <a:bodyPr rtlCol="0" anchor="ctr"/>
-          <a:lstStyle/>
-          <a:p>
-            <a:pPr algn="ctr"/>
-          </a:p>
-        </p:txBody>
-      </p:sp>
-      <p:sp>
-        <p:nvSpPr>
-          <p:cNvPr id="11" name="TextBox 10"/>
-          <p:cNvSpPr txBox="1"/>
-          <p:nvPr/>
-        </p:nvSpPr>
-        <p:spPr>
-          <a:xfrm>
-            <a:off x="594360" y="3003804"/>
-            <a:ext cx="438912" cy="438912"/>
-          </a:xfrm>
-          <a:prstGeom prst="rect">
-            <a:avLst/>
-          </a:prstGeom>
-          <a:noFill/>
-        </p:spPr>
-        <p:txBody>
-          <a:bodyPr wrap="square" anchor="ctr"/>
-          <a:lstStyle/>
-          <a:p>
-            <a:pPr algn="ctr"/>
-            <a:r>
-              <a:rPr sz="1600" b="1" i="0">
-                <a:solidFill>
-                  <a:srgbClr val="FFFFFF"/>
-                </a:solidFill>
-                <a:latin typeface="Calibri"/>
-              </a:rPr>
-              <a:t>2</a:t>
-            </a:r>
-          </a:p>
-        </p:txBody>
-      </p:sp>
-      <p:sp>
-        <p:nvSpPr>
-          <p:cNvPr id="12" name="TextBox 11"/>
-          <p:cNvSpPr txBox="1"/>
-          <p:nvPr/>
-        </p:nvSpPr>
-        <p:spPr>
-          <a:xfrm>
-            <a:off x="1188720" y="2788920"/>
-            <a:ext cx="10271455" cy="886968"/>
-          </a:xfrm>
-          <a:prstGeom prst="rect">
-            <a:avLst/>
-          </a:prstGeom>
-          <a:noFill/>
-        </p:spPr>
-        <p:txBody>
-          <a:bodyPr wrap="square" anchor="ctr"/>
-          <a:lstStyle/>
-          <a:p>
-            <a:r>
-              <a:rPr sz="1500" b="1" i="0">
-                <a:solidFill>
-                  <a:srgbClr val="095292"/>
-                </a:solidFill>
-                <a:latin typeface="Calibri"/>
-              </a:rPr>
-              <a:t>Diagrama flujo app-&gt;BD (Excalidraw) opcional.</a:t>
-            </a:r>
-          </a:p>
-        </p:txBody>
-      </p:sp>
-      <p:sp>
-        <p:nvSpPr>
-          <p:cNvPr id="13" name="Rounded Rectangle 12"/>
-          <p:cNvSpPr/>
-          <p:nvPr/>
-        </p:nvSpPr>
-        <p:spPr>
-          <a:xfrm>
-            <a:off x="457200" y="3840480"/>
-            <a:ext cx="11277295" cy="1051560"/>
-          </a:xfrm>
-          <a:prstGeom prst="roundRect">
-            <a:avLst>
-              <a:gd name="adj" fmla="val 12000"/>
-            </a:avLst>
-          </a:prstGeom>
-          <a:solidFill>
-            <a:srgbClr val="F2F2F2"/>
-          </a:solidFill>
-          <a:ln>
-            <a:noFill/>
-          </a:ln>
-        </p:spPr>
-        <p:style>
-          <a:lnRef idx="1">
-            <a:schemeClr val="accent1"/>
-          </a:lnRef>
-          <a:fillRef idx="3">
-            <a:schemeClr val="accent1"/>
-          </a:fillRef>
-          <a:effectRef idx="2">
-            <a:schemeClr val="accent1"/>
-          </a:effectRef>
-          <a:fontRef idx="minor">
-            <a:schemeClr val="lt1"/>
-          </a:fontRef>
-        </p:style>
-        <p:txBody>
-          <a:bodyPr rtlCol="0" anchor="ctr"/>
-          <a:lstStyle/>
-          <a:p>
-            <a:pPr algn="ctr"/>
-          </a:p>
-        </p:txBody>
-      </p:sp>
-      <p:sp>
-        <p:nvSpPr>
-          <p:cNvPr id="14" name="Rounded Rectangle 13"/>
-          <p:cNvSpPr/>
-          <p:nvPr/>
-        </p:nvSpPr>
-        <p:spPr>
-          <a:xfrm>
-            <a:off x="594360" y="4146804"/>
-            <a:ext cx="438912" cy="438912"/>
-          </a:xfrm>
-          <a:prstGeom prst="roundRect">
-            <a:avLst>
-              <a:gd name="adj" fmla="val 12000"/>
-            </a:avLst>
-          </a:prstGeom>
-          <a:solidFill>
-            <a:srgbClr val="095292"/>
-          </a:solidFill>
-          <a:ln>
-            <a:noFill/>
-          </a:ln>
-        </p:spPr>
-        <p:style>
-          <a:lnRef idx="1">
-            <a:schemeClr val="accent1"/>
-          </a:lnRef>
-          <a:fillRef idx="3">
-            <a:schemeClr val="accent1"/>
-          </a:fillRef>
-          <a:effectRef idx="2">
-            <a:schemeClr val="accent1"/>
-          </a:effectRef>
-          <a:fontRef idx="minor">
-            <a:schemeClr val="lt1"/>
-          </a:fontRef>
-        </p:style>
-        <p:txBody>
-          <a:bodyPr rtlCol="0" anchor="ctr"/>
-          <a:lstStyle/>
-          <a:p>
-            <a:pPr algn="ctr"/>
-          </a:p>
-        </p:txBody>
-      </p:sp>
-      <p:sp>
-        <p:nvSpPr>
-          <p:cNvPr id="15" name="TextBox 14"/>
-          <p:cNvSpPr txBox="1"/>
-          <p:nvPr/>
-        </p:nvSpPr>
-        <p:spPr>
-          <a:xfrm>
-            <a:off x="594360" y="4146804"/>
-            <a:ext cx="438912" cy="438912"/>
-          </a:xfrm>
-          <a:prstGeom prst="rect">
-            <a:avLst/>
-          </a:prstGeom>
-          <a:noFill/>
-        </p:spPr>
-        <p:txBody>
-          <a:bodyPr wrap="square" anchor="ctr"/>
-          <a:lstStyle/>
-          <a:p>
-            <a:pPr algn="ctr"/>
-            <a:r>
-              <a:rPr sz="1600" b="1" i="0">
-                <a:solidFill>
-                  <a:srgbClr val="FFFFFF"/>
-                </a:solidFill>
-                <a:latin typeface="Calibri"/>
-              </a:rPr>
-              <a:t>3</a:t>
-            </a:r>
-          </a:p>
-        </p:txBody>
-      </p:sp>
-      <p:sp>
-        <p:nvSpPr>
-          <p:cNvPr id="16" name="TextBox 15"/>
-          <p:cNvSpPr txBox="1"/>
-          <p:nvPr/>
-        </p:nvSpPr>
-        <p:spPr>
-          <a:xfrm>
-            <a:off x="1188720" y="3931920"/>
-            <a:ext cx="10271455" cy="886968"/>
-          </a:xfrm>
-          <a:prstGeom prst="rect">
-            <a:avLst/>
-          </a:prstGeom>
-          <a:noFill/>
-        </p:spPr>
-        <p:txBody>
-          <a:bodyPr wrap="square" anchor="ctr"/>
-          <a:lstStyle/>
-          <a:p>
-            <a:r>
-              <a:rPr sz="1500" b="1" i="0">
-                <a:solidFill>
-                  <a:srgbClr val="095292"/>
-                </a:solidFill>
-                <a:latin typeface="Calibri"/>
-              </a:rPr>
-              <a:t>Outline presentacion 5-8 min + quien habla que.</a:t>
-            </a:r>
-          </a:p>
-        </p:txBody>
-      </p:sp>
-      <p:sp>
-        <p:nvSpPr>
-          <p:cNvPr id="17" name="Rounded Rectangle 16"/>
-          <p:cNvSpPr/>
-          <p:nvPr/>
-        </p:nvSpPr>
-        <p:spPr>
-          <a:xfrm>
-            <a:off x="457200" y="4983480"/>
-            <a:ext cx="11277295" cy="1051560"/>
-          </a:xfrm>
-          <a:prstGeom prst="roundRect">
-            <a:avLst>
-              <a:gd name="adj" fmla="val 12000"/>
-            </a:avLst>
-          </a:prstGeom>
-          <a:solidFill>
-            <a:srgbClr val="E8F4FA"/>
-          </a:solidFill>
-          <a:ln>
-            <a:noFill/>
-          </a:ln>
-        </p:spPr>
-        <p:style>
-          <a:lnRef idx="1">
-            <a:schemeClr val="accent1"/>
-          </a:lnRef>
-          <a:fillRef idx="3">
-            <a:schemeClr val="accent1"/>
-          </a:fillRef>
-          <a:effectRef idx="2">
-            <a:schemeClr val="accent1"/>
-          </a:effectRef>
-          <a:fontRef idx="minor">
-            <a:schemeClr val="lt1"/>
-          </a:fontRef>
-        </p:style>
-        <p:txBody>
-          <a:bodyPr rtlCol="0" anchor="ctr"/>
-          <a:lstStyle/>
-          <a:p>
-            <a:pPr algn="ctr"/>
-          </a:p>
-        </p:txBody>
-      </p:sp>
-      <p:sp>
-        <p:nvSpPr>
-          <p:cNvPr id="18" name="Rounded Rectangle 17"/>
-          <p:cNvSpPr/>
-          <p:nvPr/>
-        </p:nvSpPr>
-        <p:spPr>
-          <a:xfrm>
-            <a:off x="594360" y="5289804"/>
-            <a:ext cx="438912" cy="438912"/>
-          </a:xfrm>
-          <a:prstGeom prst="roundRect">
-            <a:avLst>
-              <a:gd name="adj" fmla="val 12000"/>
-            </a:avLst>
-          </a:prstGeom>
-          <a:solidFill>
-            <a:srgbClr val="095292"/>
-          </a:solidFill>
-          <a:ln>
-            <a:noFill/>
-          </a:ln>
-        </p:spPr>
-        <p:style>
-          <a:lnRef idx="1">
-            <a:schemeClr val="accent1"/>
-          </a:lnRef>
-          <a:fillRef idx="3">
-            <a:schemeClr val="accent1"/>
-          </a:fillRef>
-          <a:effectRef idx="2">
-            <a:schemeClr val="accent1"/>
-          </a:effectRef>
-          <a:fontRef idx="minor">
-            <a:schemeClr val="lt1"/>
-          </a:fontRef>
-        </p:style>
-        <p:txBody>
-          <a:bodyPr rtlCol="0" anchor="ctr"/>
-          <a:lstStyle/>
-          <a:p>
-            <a:pPr algn="ctr"/>
-          </a:p>
-        </p:txBody>
-      </p:sp>
-      <p:sp>
-        <p:nvSpPr>
-          <p:cNvPr id="19" name="TextBox 18"/>
-          <p:cNvSpPr txBox="1"/>
-          <p:nvPr/>
-        </p:nvSpPr>
-        <p:spPr>
-          <a:xfrm>
-            <a:off x="594360" y="5289804"/>
-            <a:ext cx="438912" cy="438912"/>
-          </a:xfrm>
-          <a:prstGeom prst="rect">
-            <a:avLst/>
-          </a:prstGeom>
-          <a:noFill/>
-        </p:spPr>
-        <p:txBody>
-          <a:bodyPr wrap="square" anchor="ctr"/>
-          <a:lstStyle/>
-          <a:p>
-            <a:pPr algn="ctr"/>
-            <a:r>
-              <a:rPr sz="1600" b="1" i="0">
-                <a:solidFill>
-                  <a:srgbClr val="FFFFFF"/>
-                </a:solidFill>
-                <a:latin typeface="Calibri"/>
-              </a:rPr>
-              <a:t>4</a:t>
-            </a:r>
-          </a:p>
-        </p:txBody>
-      </p:sp>
-      <p:sp>
-        <p:nvSpPr>
-          <p:cNvPr id="20" name="TextBox 19"/>
-          <p:cNvSpPr txBox="1"/>
-          <p:nvPr/>
-        </p:nvSpPr>
-        <p:spPr>
-          <a:xfrm>
-            <a:off x="1188720" y="5074920"/>
-            <a:ext cx="10271455" cy="886968"/>
-          </a:xfrm>
-          <a:prstGeom prst="rect">
-            <a:avLst/>
-          </a:prstGeom>
-          <a:noFill/>
-        </p:spPr>
-        <p:txBody>
-          <a:bodyPr wrap="square" anchor="ctr"/>
-          <a:lstStyle/>
-          <a:p>
-            <a:r>
-              <a:rPr sz="1500" b="1" i="0">
-                <a:solidFill>
-                  <a:srgbClr val="095292"/>
-                </a:solidFill>
-                <a:latin typeface="Calibri"/>
-              </a:rPr>
-              <a:t>Empaquetar borrador entrega final.</a:t>
-            </a:r>
-          </a:p>
-        </p:txBody>
-      </p:sp>
-      <p:sp>
-        <p:nvSpPr>
-          <p:cNvPr id="21" name="TextBox 20"/>
+          <a:bodyPr wrap="square">
+            <a:spAutoFit/>
+          </a:bodyPr>
+          <a:lstStyle/>
+          <a:p>
+            <a:pPr>
+              <a:spcAft>
+                <a:spcPts val="800"/>
+              </a:spcAft>
+            </a:pPr>
+            <a:r>
+              <a:rPr sz="2000" b="0" i="0">
+                <a:solidFill>
+                  <a:srgbClr val="333333"/>
+                </a:solidFill>
+                <a:latin typeface="Calibri"/>
+              </a:rPr>
+              <a:t>–   </a:t>
+            </a:r>
+            <a:r>
+              <a:rPr sz="2000" b="1" i="0">
+                <a:solidFill>
+                  <a:srgbClr val="333333"/>
+                </a:solidFill>
+                <a:latin typeface="Calibri"/>
+              </a:rPr>
+              <a:t>Objetivo:</a:t>
+            </a:r>
+            <a:r>
+              <a:rPr sz="2000" b="0" i="0">
+                <a:solidFill>
+                  <a:srgbClr val="333333"/>
+                </a:solidFill>
+                <a:latin typeface="Calibri"/>
+              </a:rPr>
+              <a:t> Contrato &gt;=3 ops + outline pitch 5-8 min.</a:t>
+            </a:r>
+          </a:p>
+          <a:p>
+            <a:pPr>
+              <a:spcAft>
+                <a:spcPts val="800"/>
+              </a:spcAft>
+            </a:pPr>
+            <a:r>
+              <a:rPr sz="2000" b="0" i="0">
+                <a:solidFill>
+                  <a:srgbClr val="333333"/>
+                </a:solidFill>
+                <a:latin typeface="Calibri"/>
+              </a:rPr>
+              <a:t>–   </a:t>
+            </a:r>
+            <a:r>
+              <a:rPr sz="2000" b="1" i="0">
+                <a:solidFill>
+                  <a:srgbClr val="333333"/>
+                </a:solidFill>
+                <a:latin typeface="Calibri"/>
+              </a:rPr>
+              <a:t>Exito:</a:t>
+            </a:r>
+            <a:r>
+              <a:rPr sz="2000" b="0" i="0">
+                <a:solidFill>
+                  <a:srgbClr val="333333"/>
+                </a:solidFill>
+                <a:latin typeface="Calibri"/>
+              </a:rPr>
+              <a:t> Contrato 3 ops.</a:t>
+            </a:r>
+          </a:p>
+          <a:p>
+            <a:pPr>
+              <a:spcAft>
+                <a:spcPts val="800"/>
+              </a:spcAft>
+            </a:pPr>
+            <a:r>
+              <a:rPr sz="2000" b="0" i="0">
+                <a:solidFill>
+                  <a:srgbClr val="333333"/>
+                </a:solidFill>
+                <a:latin typeface="Calibri"/>
+              </a:rPr>
+              <a:t>–   </a:t>
+            </a:r>
+            <a:r>
+              <a:rPr sz="2000" b="1" i="0">
+                <a:solidFill>
+                  <a:srgbClr val="333333"/>
+                </a:solidFill>
+                <a:latin typeface="Calibri"/>
+              </a:rPr>
+              <a:t>Exito:</a:t>
+            </a:r>
+            <a:r>
+              <a:rPr sz="2000" b="0" i="0">
+                <a:solidFill>
+                  <a:srgbClr val="333333"/>
+                </a:solidFill>
+                <a:latin typeface="Calibri"/>
+              </a:rPr>
+              <a:t> Parametros/errores/ejemplo.</a:t>
+            </a:r>
+          </a:p>
+          <a:p>
+            <a:pPr>
+              <a:spcAft>
+                <a:spcPts val="800"/>
+              </a:spcAft>
+            </a:pPr>
+            <a:r>
+              <a:rPr sz="2000" b="0" i="0">
+                <a:solidFill>
+                  <a:srgbClr val="333333"/>
+                </a:solidFill>
+                <a:latin typeface="Calibri"/>
+              </a:rPr>
+              <a:t>–   </a:t>
+            </a:r>
+            <a:r>
+              <a:rPr sz="2000" b="1" i="0">
+                <a:solidFill>
+                  <a:srgbClr val="333333"/>
+                </a:solidFill>
+                <a:latin typeface="Calibri"/>
+              </a:rPr>
+              <a:t>Exito:</a:t>
+            </a:r>
+            <a:r>
+              <a:rPr sz="2000" b="0" i="0">
+                <a:solidFill>
+                  <a:srgbClr val="333333"/>
+                </a:solidFill>
+                <a:latin typeface="Calibri"/>
+              </a:rPr>
+              <a:t> Outline pitch.</a:t>
+            </a:r>
+          </a:p>
+          <a:p>
+            <a:pPr>
+              <a:spcAft>
+                <a:spcPts val="800"/>
+              </a:spcAft>
+            </a:pPr>
+            <a:r>
+              <a:rPr sz="2000" b="0" i="0">
+                <a:solidFill>
+                  <a:srgbClr val="333333"/>
+                </a:solidFill>
+                <a:latin typeface="Calibri"/>
+              </a:rPr>
+              <a:t>–   </a:t>
+            </a:r>
+            <a:r>
+              <a:rPr sz="2000" b="1" i="0">
+                <a:solidFill>
+                  <a:srgbClr val="333333"/>
+                </a:solidFill>
+                <a:latin typeface="Calibri"/>
+              </a:rPr>
+              <a:t>Exito:</a:t>
+            </a:r>
+            <a:r>
+              <a:rPr sz="2000" b="0" i="0">
+                <a:solidFill>
+                  <a:srgbClr val="333333"/>
+                </a:solidFill>
+                <a:latin typeface="Calibri"/>
+              </a:rPr>
+              <a:t> Borrador final.</a:t>
+            </a:r>
+          </a:p>
+        </p:txBody>
+      </p:sp>
+      <p:sp>
+        <p:nvSpPr>
+          <p:cNvPr id="6" name="TextBox 5"/>
           <p:cNvSpPr txBox="1"/>
           <p:nvPr/>
         </p:nvSpPr>
@@ -12617,154 +12630,21 @@
                 </a:solidFill>
                 <a:latin typeface="Calibri"/>
               </a:rPr>
-              <a:t>Taller PI VetCare — pistas (checklist vacio)</a:t>
-            </a:r>
-          </a:p>
-        </p:txBody>
-      </p:sp>
-      <p:sp>
-        <p:nvSpPr>
-          <p:cNvPr id="5" name="Rounded Rectangle 4"/>
-          <p:cNvSpPr/>
-          <p:nvPr/>
-        </p:nvSpPr>
-        <p:spPr>
-          <a:xfrm>
-            <a:off x="457200" y="1261872"/>
-            <a:ext cx="11277295" cy="566928"/>
-          </a:xfrm>
-          <a:prstGeom prst="roundRect">
-            <a:avLst>
-              <a:gd name="adj" fmla="val 12000"/>
-            </a:avLst>
-          </a:prstGeom>
-          <a:solidFill>
-            <a:srgbClr val="F2F2F2"/>
-          </a:solidFill>
-          <a:ln>
-            <a:noFill/>
-          </a:ln>
-        </p:spPr>
-        <p:style>
-          <a:lnRef idx="1">
-            <a:schemeClr val="accent1"/>
-          </a:lnRef>
-          <a:fillRef idx="3">
-            <a:schemeClr val="accent1"/>
-          </a:fillRef>
-          <a:effectRef idx="2">
-            <a:schemeClr val="accent1"/>
-          </a:effectRef>
-          <a:fontRef idx="minor">
-            <a:schemeClr val="lt1"/>
-          </a:fontRef>
-        </p:style>
-        <p:txBody>
-          <a:bodyPr rtlCol="0" anchor="ctr"/>
-          <a:lstStyle/>
-          <a:p>
-            <a:pPr algn="ctr"/>
-          </a:p>
-        </p:txBody>
-      </p:sp>
-      <p:sp>
-        <p:nvSpPr>
-          <p:cNvPr id="6" name="Rectangle 5"/>
-          <p:cNvSpPr/>
-          <p:nvPr/>
-        </p:nvSpPr>
-        <p:spPr>
-          <a:xfrm>
-            <a:off x="640080" y="1408175"/>
-            <a:ext cx="274320" cy="274320"/>
-          </a:xfrm>
-          <a:prstGeom prst="rect">
-            <a:avLst/>
-          </a:prstGeom>
-          <a:solidFill>
-            <a:srgbClr val="FFFFFF"/>
-          </a:solidFill>
-          <a:ln>
-            <a:solidFill>
-              <a:srgbClr val="333333"/>
-            </a:solidFill>
-          </a:ln>
-        </p:spPr>
-        <p:style>
-          <a:lnRef idx="1">
-            <a:schemeClr val="accent1"/>
-          </a:lnRef>
-          <a:fillRef idx="3">
-            <a:schemeClr val="accent1"/>
-          </a:fillRef>
-          <a:effectRef idx="2">
-            <a:schemeClr val="accent1"/>
-          </a:effectRef>
-          <a:fontRef idx="minor">
-            <a:schemeClr val="lt1"/>
-          </a:fontRef>
-        </p:style>
-        <p:txBody>
-          <a:bodyPr rtlCol="0" anchor="ctr"/>
-          <a:lstStyle/>
-          <a:p>
-            <a:pPr algn="ctr"/>
-          </a:p>
-        </p:txBody>
-      </p:sp>
-      <p:sp>
-        <p:nvSpPr>
-          <p:cNvPr id="7" name="Rectangle 6"/>
-          <p:cNvSpPr/>
-          <p:nvPr/>
-        </p:nvSpPr>
-        <p:spPr>
-          <a:xfrm>
-            <a:off x="640080" y="1408175"/>
-            <a:ext cx="73152" cy="274320"/>
-          </a:xfrm>
-          <a:prstGeom prst="rect">
-            <a:avLst/>
-          </a:prstGeom>
-          <a:solidFill>
-            <a:srgbClr val="269CCB"/>
-          </a:solidFill>
-          <a:ln>
-            <a:noFill/>
-          </a:ln>
-        </p:spPr>
-        <p:style>
-          <a:lnRef idx="1">
-            <a:schemeClr val="accent1"/>
-          </a:lnRef>
-          <a:fillRef idx="3">
-            <a:schemeClr val="accent1"/>
-          </a:fillRef>
-          <a:effectRef idx="2">
-            <a:schemeClr val="accent1"/>
-          </a:effectRef>
-          <a:fontRef idx="minor">
-            <a:schemeClr val="lt1"/>
-          </a:fontRef>
-        </p:style>
-        <p:txBody>
-          <a:bodyPr rtlCol="0" anchor="ctr"/>
-          <a:lstStyle/>
-          <a:p>
-            <a:pPr algn="ctr"/>
-          </a:p>
-        </p:txBody>
-      </p:sp>
-      <p:sp>
-        <p:nvSpPr>
-          <p:cNvPr id="8" name="TextBox 7"/>
+              <a:t>Taller PI VetCare — escenario / datos de partida</a:t>
+            </a:r>
+          </a:p>
+        </p:txBody>
+      </p:sp>
+      <p:sp>
+        <p:nvSpPr>
+          <p:cNvPr id="5" name="TextBox 4"/>
           <p:cNvSpPr txBox="1"/>
           <p:nvPr/>
         </p:nvSpPr>
         <p:spPr>
           <a:xfrm>
-            <a:off x="1097280" y="1353312"/>
-            <a:ext cx="10362895" cy="402336"/>
+            <a:off x="457200" y="1170432"/>
+            <a:ext cx="11277295" cy="5230368"/>
           </a:xfrm>
           <a:prstGeom prst="rect">
             <a:avLst/>
@@ -12772,354 +12652,31 @@
           <a:noFill/>
         </p:spPr>
         <p:txBody>
-          <a:bodyPr wrap="square" anchor="ctr"/>
-          <a:lstStyle/>
-          <a:p>
-            <a:r>
-              <a:rPr sz="1500" b="0" i="0">
+          <a:bodyPr wrap="square">
+            <a:spAutoFit/>
+          </a:bodyPr>
+          <a:lstStyle/>
+          <a:p>
+            <a:pPr>
+              <a:spcAft>
+                <a:spcPts val="800"/>
+              </a:spcAft>
+            </a:pPr>
+            <a:r>
+              <a:rPr sz="2000" b="0" i="0">
                 <a:solidFill>
                   <a:srgbClr val="333333"/>
                 </a:solidFill>
                 <a:latin typeface="Calibri"/>
               </a:rPr>
-              <a:t>□ &gt;=3 ops?</a:t>
-            </a:r>
-          </a:p>
-        </p:txBody>
-      </p:sp>
-      <p:sp>
-        <p:nvSpPr>
-          <p:cNvPr id="9" name="Rounded Rectangle 8"/>
-          <p:cNvSpPr/>
-          <p:nvPr/>
-        </p:nvSpPr>
-        <p:spPr>
-          <a:xfrm>
-            <a:off x="457200" y="1938528"/>
-            <a:ext cx="11277295" cy="566928"/>
-          </a:xfrm>
-          <a:prstGeom prst="roundRect">
-            <a:avLst>
-              <a:gd name="adj" fmla="val 12000"/>
-            </a:avLst>
-          </a:prstGeom>
-          <a:solidFill>
-            <a:srgbClr val="F2F2F2"/>
-          </a:solidFill>
-          <a:ln>
-            <a:noFill/>
-          </a:ln>
-        </p:spPr>
-        <p:style>
-          <a:lnRef idx="1">
-            <a:schemeClr val="accent1"/>
-          </a:lnRef>
-          <a:fillRef idx="3">
-            <a:schemeClr val="accent1"/>
-          </a:fillRef>
-          <a:effectRef idx="2">
-            <a:schemeClr val="accent1"/>
-          </a:effectRef>
-          <a:fontRef idx="minor">
-            <a:schemeClr val="lt1"/>
-          </a:fontRef>
-        </p:style>
-        <p:txBody>
-          <a:bodyPr rtlCol="0" anchor="ctr"/>
-          <a:lstStyle/>
-          <a:p>
-            <a:pPr algn="ctr"/>
-          </a:p>
-        </p:txBody>
-      </p:sp>
-      <p:sp>
-        <p:nvSpPr>
-          <p:cNvPr id="10" name="Rectangle 9"/>
-          <p:cNvSpPr/>
-          <p:nvPr/>
-        </p:nvSpPr>
-        <p:spPr>
-          <a:xfrm>
-            <a:off x="640080" y="2084832"/>
-            <a:ext cx="274320" cy="274320"/>
-          </a:xfrm>
-          <a:prstGeom prst="rect">
-            <a:avLst/>
-          </a:prstGeom>
-          <a:solidFill>
-            <a:srgbClr val="FFFFFF"/>
-          </a:solidFill>
-          <a:ln>
-            <a:solidFill>
-              <a:srgbClr val="333333"/>
-            </a:solidFill>
-          </a:ln>
-        </p:spPr>
-        <p:style>
-          <a:lnRef idx="1">
-            <a:schemeClr val="accent1"/>
-          </a:lnRef>
-          <a:fillRef idx="3">
-            <a:schemeClr val="accent1"/>
-          </a:fillRef>
-          <a:effectRef idx="2">
-            <a:schemeClr val="accent1"/>
-          </a:effectRef>
-          <a:fontRef idx="minor">
-            <a:schemeClr val="lt1"/>
-          </a:fontRef>
-        </p:style>
-        <p:txBody>
-          <a:bodyPr rtlCol="0" anchor="ctr"/>
-          <a:lstStyle/>
-          <a:p>
-            <a:pPr algn="ctr"/>
-          </a:p>
-        </p:txBody>
-      </p:sp>
-      <p:sp>
-        <p:nvSpPr>
-          <p:cNvPr id="11" name="Rectangle 10"/>
-          <p:cNvSpPr/>
-          <p:nvPr/>
-        </p:nvSpPr>
-        <p:spPr>
-          <a:xfrm>
-            <a:off x="640080" y="2084832"/>
-            <a:ext cx="73152" cy="274320"/>
-          </a:xfrm>
-          <a:prstGeom prst="rect">
-            <a:avLst/>
-          </a:prstGeom>
-          <a:solidFill>
-            <a:srgbClr val="269CCB"/>
-          </a:solidFill>
-          <a:ln>
-            <a:noFill/>
-          </a:ln>
-        </p:spPr>
-        <p:style>
-          <a:lnRef idx="1">
-            <a:schemeClr val="accent1"/>
-          </a:lnRef>
-          <a:fillRef idx="3">
-            <a:schemeClr val="accent1"/>
-          </a:fillRef>
-          <a:effectRef idx="2">
-            <a:schemeClr val="accent1"/>
-          </a:effectRef>
-          <a:fontRef idx="minor">
-            <a:schemeClr val="lt1"/>
-          </a:fontRef>
-        </p:style>
-        <p:txBody>
-          <a:bodyPr rtlCol="0" anchor="ctr"/>
-          <a:lstStyle/>
-          <a:p>
-            <a:pPr algn="ctr"/>
-          </a:p>
-        </p:txBody>
-      </p:sp>
-      <p:sp>
-        <p:nvSpPr>
-          <p:cNvPr id="12" name="TextBox 11"/>
-          <p:cNvSpPr txBox="1"/>
-          <p:nvPr/>
-        </p:nvSpPr>
-        <p:spPr>
-          <a:xfrm>
-            <a:off x="1097280" y="2029968"/>
-            <a:ext cx="10362895" cy="402336"/>
-          </a:xfrm>
-          <a:prstGeom prst="rect">
-            <a:avLst/>
-          </a:prstGeom>
-          <a:noFill/>
-        </p:spPr>
-        <p:txBody>
-          <a:bodyPr wrap="square" anchor="ctr"/>
-          <a:lstStyle/>
-          <a:p>
-            <a:r>
-              <a:rPr sz="1500" b="0" i="0">
-                <a:solidFill>
-                  <a:srgbClr val="333333"/>
-                </a:solidFill>
-                <a:latin typeface="Calibri"/>
-              </a:rPr>
-              <a:t>□ Errores esperados?</a:t>
-            </a:r>
-          </a:p>
-        </p:txBody>
-      </p:sp>
-      <p:sp>
-        <p:nvSpPr>
-          <p:cNvPr id="13" name="Rounded Rectangle 12"/>
-          <p:cNvSpPr/>
-          <p:nvPr/>
-        </p:nvSpPr>
-        <p:spPr>
-          <a:xfrm>
-            <a:off x="457200" y="2615184"/>
-            <a:ext cx="11277295" cy="566928"/>
-          </a:xfrm>
-          <a:prstGeom prst="roundRect">
-            <a:avLst>
-              <a:gd name="adj" fmla="val 12000"/>
-            </a:avLst>
-          </a:prstGeom>
-          <a:solidFill>
-            <a:srgbClr val="F2F2F2"/>
-          </a:solidFill>
-          <a:ln>
-            <a:noFill/>
-          </a:ln>
-        </p:spPr>
-        <p:style>
-          <a:lnRef idx="1">
-            <a:schemeClr val="accent1"/>
-          </a:lnRef>
-          <a:fillRef idx="3">
-            <a:schemeClr val="accent1"/>
-          </a:fillRef>
-          <a:effectRef idx="2">
-            <a:schemeClr val="accent1"/>
-          </a:effectRef>
-          <a:fontRef idx="minor">
-            <a:schemeClr val="lt1"/>
-          </a:fontRef>
-        </p:style>
-        <p:txBody>
-          <a:bodyPr rtlCol="0" anchor="ctr"/>
-          <a:lstStyle/>
-          <a:p>
-            <a:pPr algn="ctr"/>
-          </a:p>
-        </p:txBody>
-      </p:sp>
-      <p:sp>
-        <p:nvSpPr>
-          <p:cNvPr id="14" name="Rectangle 13"/>
-          <p:cNvSpPr/>
-          <p:nvPr/>
-        </p:nvSpPr>
-        <p:spPr>
-          <a:xfrm>
-            <a:off x="640080" y="2761488"/>
-            <a:ext cx="274320" cy="274320"/>
-          </a:xfrm>
-          <a:prstGeom prst="rect">
-            <a:avLst/>
-          </a:prstGeom>
-          <a:solidFill>
-            <a:srgbClr val="FFFFFF"/>
-          </a:solidFill>
-          <a:ln>
-            <a:solidFill>
-              <a:srgbClr val="333333"/>
-            </a:solidFill>
-          </a:ln>
-        </p:spPr>
-        <p:style>
-          <a:lnRef idx="1">
-            <a:schemeClr val="accent1"/>
-          </a:lnRef>
-          <a:fillRef idx="3">
-            <a:schemeClr val="accent1"/>
-          </a:fillRef>
-          <a:effectRef idx="2">
-            <a:schemeClr val="accent1"/>
-          </a:effectRef>
-          <a:fontRef idx="minor">
-            <a:schemeClr val="lt1"/>
-          </a:fontRef>
-        </p:style>
-        <p:txBody>
-          <a:bodyPr rtlCol="0" anchor="ctr"/>
-          <a:lstStyle/>
-          <a:p>
-            <a:pPr algn="ctr"/>
-          </a:p>
-        </p:txBody>
-      </p:sp>
-      <p:sp>
-        <p:nvSpPr>
-          <p:cNvPr id="15" name="Rectangle 14"/>
-          <p:cNvSpPr/>
-          <p:nvPr/>
-        </p:nvSpPr>
-        <p:spPr>
-          <a:xfrm>
-            <a:off x="640080" y="2761488"/>
-            <a:ext cx="73152" cy="274320"/>
-          </a:xfrm>
-          <a:prstGeom prst="rect">
-            <a:avLst/>
-          </a:prstGeom>
-          <a:solidFill>
-            <a:srgbClr val="269CCB"/>
-          </a:solidFill>
-          <a:ln>
-            <a:noFill/>
-          </a:ln>
-        </p:spPr>
-        <p:style>
-          <a:lnRef idx="1">
-            <a:schemeClr val="accent1"/>
-          </a:lnRef>
-          <a:fillRef idx="3">
-            <a:schemeClr val="accent1"/>
-          </a:fillRef>
-          <a:effectRef idx="2">
-            <a:schemeClr val="accent1"/>
-          </a:effectRef>
-          <a:fontRef idx="minor">
-            <a:schemeClr val="lt1"/>
-          </a:fontRef>
-        </p:style>
-        <p:txBody>
-          <a:bodyPr rtlCol="0" anchor="ctr"/>
-          <a:lstStyle/>
-          <a:p>
-            <a:pPr algn="ctr"/>
-          </a:p>
-        </p:txBody>
-      </p:sp>
-      <p:sp>
-        <p:nvSpPr>
-          <p:cNvPr id="16" name="TextBox 15"/>
-          <p:cNvSpPr txBox="1"/>
-          <p:nvPr/>
-        </p:nvSpPr>
-        <p:spPr>
-          <a:xfrm>
-            <a:off x="1097280" y="2706624"/>
-            <a:ext cx="10362895" cy="402336"/>
-          </a:xfrm>
-          <a:prstGeom prst="rect">
-            <a:avLst/>
-          </a:prstGeom>
-          <a:noFill/>
-        </p:spPr>
-        <p:txBody>
-          <a:bodyPr wrap="square" anchor="ctr"/>
-          <a:lstStyle/>
-          <a:p>
-            <a:r>
-              <a:rPr sz="1500" b="0" i="0">
-                <a:solidFill>
-                  <a:srgbClr val="333333"/>
-                </a:solidFill>
-                <a:latin typeface="Calibri"/>
-              </a:rPr>
-              <a:t>□ Outline completo?</a:t>
-            </a:r>
-          </a:p>
-        </p:txBody>
-      </p:sp>
-      <p:sp>
-        <p:nvSpPr>
-          <p:cNvPr id="17" name="TextBox 16"/>
+              <a:t>–   Plantilla sp_agendar_cita / consulta / facturar.</a:t>
+            </a:r>
+          </a:p>
+        </p:txBody>
+      </p:sp>
+      <p:sp>
+        <p:nvSpPr>
+          <p:cNvPr id="6" name="TextBox 5"/>
           <p:cNvSpPr txBox="1"/>
           <p:nvPr/>
         </p:nvSpPr>
@@ -13293,21 +12850,111 @@
                 </a:solidFill>
                 <a:latin typeface="Calibri"/>
               </a:rPr>
-              <a:t>Criterios de exito / entregable</a:t>
-            </a:r>
-          </a:p>
-        </p:txBody>
-      </p:sp>
-      <p:sp>
-        <p:nvSpPr>
-          <p:cNvPr id="5" name="TextBox 4"/>
+              <a:t>Taller PI VetCare — pasos guiados</a:t>
+            </a:r>
+          </a:p>
+        </p:txBody>
+      </p:sp>
+      <p:sp>
+        <p:nvSpPr>
+          <p:cNvPr id="5" name="Rounded Rectangle 4"/>
+          <p:cNvSpPr/>
+          <p:nvPr/>
+        </p:nvSpPr>
+        <p:spPr>
+          <a:xfrm>
+            <a:off x="457200" y="1554480"/>
+            <a:ext cx="11277295" cy="1051560"/>
+          </a:xfrm>
+          <a:prstGeom prst="roundRect">
+            <a:avLst>
+              <a:gd name="adj" fmla="val 12000"/>
+            </a:avLst>
+          </a:prstGeom>
+          <a:solidFill>
+            <a:srgbClr val="F2F2F2"/>
+          </a:solidFill>
+          <a:ln>
+            <a:noFill/>
+          </a:ln>
+        </p:spPr>
+        <p:style>
+          <a:lnRef idx="1">
+            <a:schemeClr val="accent1"/>
+          </a:lnRef>
+          <a:fillRef idx="3">
+            <a:schemeClr val="accent1"/>
+          </a:fillRef>
+          <a:effectRef idx="2">
+            <a:schemeClr val="accent1"/>
+          </a:effectRef>
+          <a:fontRef idx="minor">
+            <a:schemeClr val="lt1"/>
+          </a:fontRef>
+        </p:style>
+        <p:txBody>
+          <a:bodyPr rtlCol="0" anchor="ctr"/>
+          <a:lstStyle/>
+          <a:p>
+            <a:pPr algn="ctr"/>
+          </a:p>
+        </p:txBody>
+      </p:sp>
+      <p:sp>
+        <p:nvSpPr>
+          <p:cNvPr id="6" name="Rounded Rectangle 5"/>
+          <p:cNvSpPr/>
+          <p:nvPr/>
+        </p:nvSpPr>
+        <p:spPr>
+          <a:xfrm>
+            <a:off x="594360" y="1860804"/>
+            <a:ext cx="438912" cy="438912"/>
+          </a:xfrm>
+          <a:prstGeom prst="roundRect">
+            <a:avLst>
+              <a:gd name="adj" fmla="val 12000"/>
+            </a:avLst>
+          </a:prstGeom>
+          <a:solidFill>
+            <a:srgbClr val="095292"/>
+          </a:solidFill>
+          <a:ln>
+            <a:noFill/>
+          </a:ln>
+        </p:spPr>
+        <p:style>
+          <a:lnRef idx="1">
+            <a:schemeClr val="accent1"/>
+          </a:lnRef>
+          <a:fillRef idx="3">
+            <a:schemeClr val="accent1"/>
+          </a:fillRef>
+          <a:effectRef idx="2">
+            <a:schemeClr val="accent1"/>
+          </a:effectRef>
+          <a:fontRef idx="minor">
+            <a:schemeClr val="lt1"/>
+          </a:fontRef>
+        </p:style>
+        <p:txBody>
+          <a:bodyPr rtlCol="0" anchor="ctr"/>
+          <a:lstStyle/>
+          <a:p>
+            <a:pPr algn="ctr"/>
+          </a:p>
+        </p:txBody>
+      </p:sp>
+      <p:sp>
+        <p:nvSpPr>
+          <p:cNvPr id="7" name="TextBox 6"/>
           <p:cNvSpPr txBox="1"/>
           <p:nvPr/>
         </p:nvSpPr>
         <p:spPr>
           <a:xfrm>
-            <a:off x="457200" y="1170432"/>
-            <a:ext cx="11277295" cy="5230368"/>
+            <a:off x="594360" y="1860804"/>
+            <a:ext cx="438912" cy="438912"/>
           </a:xfrm>
           <a:prstGeom prst="rect">
             <a:avLst/>
@@ -13315,131 +12962,522 @@
           <a:noFill/>
         </p:spPr>
         <p:txBody>
-          <a:bodyPr wrap="square">
-            <a:spAutoFit/>
-          </a:bodyPr>
-          <a:lstStyle/>
-          <a:p>
-            <a:pPr>
-              <a:spcAft>
-                <a:spcPts val="800"/>
-              </a:spcAft>
-            </a:pPr>
-            <a:r>
-              <a:rPr sz="2000" b="0" i="0">
-                <a:solidFill>
-                  <a:srgbClr val="333333"/>
-                </a:solidFill>
-                <a:latin typeface="Calibri"/>
-              </a:rPr>
-              <a:t>–   </a:t>
-            </a:r>
-            <a:r>
-              <a:rPr sz="2000" b="1" i="0">
-                <a:solidFill>
-                  <a:srgbClr val="333333"/>
-                </a:solidFill>
-                <a:latin typeface="Calibri"/>
-              </a:rPr>
-              <a:t>Entregable:</a:t>
-            </a:r>
-            <a:r>
-              <a:rPr sz="2000" b="0" i="0">
-                <a:solidFill>
-                  <a:srgbClr val="333333"/>
-                </a:solidFill>
-                <a:latin typeface="Calibri"/>
-              </a:rPr>
-              <a:t> Contrato app&lt;-&gt;BD + outline de slides de sustentacion (5-8 min)</a:t>
-            </a:r>
-          </a:p>
-          <a:p>
-            <a:pPr>
-              <a:spcAft>
-                <a:spcPts val="800"/>
-              </a:spcAft>
-            </a:pPr>
-            <a:r>
-              <a:rPr sz="2000" b="0" i="0">
-                <a:solidFill>
-                  <a:srgbClr val="333333"/>
-                </a:solidFill>
-                <a:latin typeface="Calibri"/>
-              </a:rPr>
-              <a:t>–   Evidencia: el SQL y su salida quedan guardados en cada pregunta de la plataforma del curso.</a:t>
-            </a:r>
-          </a:p>
-          <a:p>
-            <a:pPr>
-              <a:spcAft>
-                <a:spcPts val="800"/>
-              </a:spcAft>
-            </a:pPr>
-            <a:r>
-              <a:rPr sz="2000" b="0" i="0">
-                <a:solidFill>
-                  <a:srgbClr val="333333"/>
-                </a:solidFill>
-                <a:latin typeface="Calibri"/>
-              </a:rPr>
-              <a:t>–   Conserva copia en tu carpeta del PI (los .sql que pide el entregable).</a:t>
-            </a:r>
-          </a:p>
-          <a:p>
-            <a:pPr>
-              <a:spcAft>
-                <a:spcPts val="800"/>
-              </a:spcAft>
-            </a:pPr>
-            <a:r>
-              <a:rPr sz="2000" b="0" i="0">
-                <a:solidFill>
-                  <a:srgbClr val="333333"/>
-                </a:solidFill>
-                <a:latin typeface="Calibri"/>
-              </a:rPr>
-              <a:t>–   Actualizar checklist PI (que criterio de rubrica avanzo).</a:t>
-            </a:r>
-          </a:p>
-          <a:p>
-            <a:pPr>
-              <a:spcAft>
-                <a:spcPts val="800"/>
-              </a:spcAft>
-            </a:pPr>
-            <a:r>
-              <a:rPr sz="2000" b="0" i="0">
-                <a:solidFill>
-                  <a:srgbClr val="333333"/>
-                </a:solidFill>
-                <a:latin typeface="Calibri"/>
-              </a:rPr>
-              <a:t>–   </a:t>
-            </a:r>
-            <a:r>
-              <a:rPr sz="2000" b="1" i="0">
-                <a:solidFill>
-                  <a:srgbClr val="333333"/>
-                </a:solidFill>
-                <a:latin typeface="Calibri"/>
-              </a:rPr>
-              <a:t>Entrega en la plataforma del curso</a:t>
-            </a:r>
-            <a:r>
-              <a:rPr sz="2000" b="0" i="0">
-                <a:solidFill>
-                  <a:srgbClr val="333333"/>
-                </a:solidFill>
-                <a:latin typeface="Calibri"/>
-              </a:rPr>
-              <a:t> — en la fecha que indique el docente.</a:t>
-            </a:r>
-          </a:p>
-        </p:txBody>
-      </p:sp>
-      <p:sp>
-        <p:nvSpPr>
-          <p:cNvPr id="6" name="TextBox 5"/>
+          <a:bodyPr wrap="square" anchor="ctr"/>
+          <a:lstStyle/>
+          <a:p>
+            <a:pPr algn="ctr"/>
+            <a:r>
+              <a:rPr sz="1600" b="1" i="0">
+                <a:solidFill>
+                  <a:srgbClr val="FFFFFF"/>
+                </a:solidFill>
+                <a:latin typeface="Calibri"/>
+              </a:rPr>
+              <a:t>1</a:t>
+            </a:r>
+          </a:p>
+        </p:txBody>
+      </p:sp>
+      <p:sp>
+        <p:nvSpPr>
+          <p:cNvPr id="8" name="TextBox 7"/>
+          <p:cNvSpPr txBox="1"/>
+          <p:nvPr/>
+        </p:nvSpPr>
+        <p:spPr>
+          <a:xfrm>
+            <a:off x="1188720" y="1645920"/>
+            <a:ext cx="10271455" cy="886968"/>
+          </a:xfrm>
+          <a:prstGeom prst="rect">
+            <a:avLst/>
+          </a:prstGeom>
+          <a:noFill/>
+        </p:spPr>
+        <p:txBody>
+          <a:bodyPr wrap="square" anchor="ctr"/>
+          <a:lstStyle/>
+          <a:p>
+            <a:r>
+              <a:rPr sz="1500" b="1" i="0">
+                <a:solidFill>
+                  <a:srgbClr val="095292"/>
+                </a:solidFill>
+                <a:latin typeface="Calibri"/>
+              </a:rPr>
+              <a:t>Redactar contrato de &gt;=3 operaciones.</a:t>
+            </a:r>
+          </a:p>
+        </p:txBody>
+      </p:sp>
+      <p:sp>
+        <p:nvSpPr>
+          <p:cNvPr id="9" name="Rounded Rectangle 8"/>
+          <p:cNvSpPr/>
+          <p:nvPr/>
+        </p:nvSpPr>
+        <p:spPr>
+          <a:xfrm>
+            <a:off x="457200" y="2697480"/>
+            <a:ext cx="11277295" cy="1051560"/>
+          </a:xfrm>
+          <a:prstGeom prst="roundRect">
+            <a:avLst>
+              <a:gd name="adj" fmla="val 12000"/>
+            </a:avLst>
+          </a:prstGeom>
+          <a:solidFill>
+            <a:srgbClr val="E8F4FA"/>
+          </a:solidFill>
+          <a:ln>
+            <a:noFill/>
+          </a:ln>
+        </p:spPr>
+        <p:style>
+          <a:lnRef idx="1">
+            <a:schemeClr val="accent1"/>
+          </a:lnRef>
+          <a:fillRef idx="3">
+            <a:schemeClr val="accent1"/>
+          </a:fillRef>
+          <a:effectRef idx="2">
+            <a:schemeClr val="accent1"/>
+          </a:effectRef>
+          <a:fontRef idx="minor">
+            <a:schemeClr val="lt1"/>
+          </a:fontRef>
+        </p:style>
+        <p:txBody>
+          <a:bodyPr rtlCol="0" anchor="ctr"/>
+          <a:lstStyle/>
+          <a:p>
+            <a:pPr algn="ctr"/>
+          </a:p>
+        </p:txBody>
+      </p:sp>
+      <p:sp>
+        <p:nvSpPr>
+          <p:cNvPr id="10" name="Rounded Rectangle 9"/>
+          <p:cNvSpPr/>
+          <p:nvPr/>
+        </p:nvSpPr>
+        <p:spPr>
+          <a:xfrm>
+            <a:off x="594360" y="3003804"/>
+            <a:ext cx="438912" cy="438912"/>
+          </a:xfrm>
+          <a:prstGeom prst="roundRect">
+            <a:avLst>
+              <a:gd name="adj" fmla="val 12000"/>
+            </a:avLst>
+          </a:prstGeom>
+          <a:solidFill>
+            <a:srgbClr val="095292"/>
+          </a:solidFill>
+          <a:ln>
+            <a:noFill/>
+          </a:ln>
+        </p:spPr>
+        <p:style>
+          <a:lnRef idx="1">
+            <a:schemeClr val="accent1"/>
+          </a:lnRef>
+          <a:fillRef idx="3">
+            <a:schemeClr val="accent1"/>
+          </a:fillRef>
+          <a:effectRef idx="2">
+            <a:schemeClr val="accent1"/>
+          </a:effectRef>
+          <a:fontRef idx="minor">
+            <a:schemeClr val="lt1"/>
+          </a:fontRef>
+        </p:style>
+        <p:txBody>
+          <a:bodyPr rtlCol="0" anchor="ctr"/>
+          <a:lstStyle/>
+          <a:p>
+            <a:pPr algn="ctr"/>
+          </a:p>
+        </p:txBody>
+      </p:sp>
+      <p:sp>
+        <p:nvSpPr>
+          <p:cNvPr id="11" name="TextBox 10"/>
+          <p:cNvSpPr txBox="1"/>
+          <p:nvPr/>
+        </p:nvSpPr>
+        <p:spPr>
+          <a:xfrm>
+            <a:off x="594360" y="3003804"/>
+            <a:ext cx="438912" cy="438912"/>
+          </a:xfrm>
+          <a:prstGeom prst="rect">
+            <a:avLst/>
+          </a:prstGeom>
+          <a:noFill/>
+        </p:spPr>
+        <p:txBody>
+          <a:bodyPr wrap="square" anchor="ctr"/>
+          <a:lstStyle/>
+          <a:p>
+            <a:pPr algn="ctr"/>
+            <a:r>
+              <a:rPr sz="1600" b="1" i="0">
+                <a:solidFill>
+                  <a:srgbClr val="FFFFFF"/>
+                </a:solidFill>
+                <a:latin typeface="Calibri"/>
+              </a:rPr>
+              <a:t>2</a:t>
+            </a:r>
+          </a:p>
+        </p:txBody>
+      </p:sp>
+      <p:sp>
+        <p:nvSpPr>
+          <p:cNvPr id="12" name="TextBox 11"/>
+          <p:cNvSpPr txBox="1"/>
+          <p:nvPr/>
+        </p:nvSpPr>
+        <p:spPr>
+          <a:xfrm>
+            <a:off x="1188720" y="2788920"/>
+            <a:ext cx="10271455" cy="886968"/>
+          </a:xfrm>
+          <a:prstGeom prst="rect">
+            <a:avLst/>
+          </a:prstGeom>
+          <a:noFill/>
+        </p:spPr>
+        <p:txBody>
+          <a:bodyPr wrap="square" anchor="ctr"/>
+          <a:lstStyle/>
+          <a:p>
+            <a:r>
+              <a:rPr sz="1500" b="1" i="0">
+                <a:solidFill>
+                  <a:srgbClr val="095292"/>
+                </a:solidFill>
+                <a:latin typeface="Calibri"/>
+              </a:rPr>
+              <a:t>Diagrama flujo app-&gt;BD (Excalidraw) opcional.</a:t>
+            </a:r>
+          </a:p>
+        </p:txBody>
+      </p:sp>
+      <p:sp>
+        <p:nvSpPr>
+          <p:cNvPr id="13" name="Rounded Rectangle 12"/>
+          <p:cNvSpPr/>
+          <p:nvPr/>
+        </p:nvSpPr>
+        <p:spPr>
+          <a:xfrm>
+            <a:off x="457200" y="3840480"/>
+            <a:ext cx="11277295" cy="1051560"/>
+          </a:xfrm>
+          <a:prstGeom prst="roundRect">
+            <a:avLst>
+              <a:gd name="adj" fmla="val 12000"/>
+            </a:avLst>
+          </a:prstGeom>
+          <a:solidFill>
+            <a:srgbClr val="F2F2F2"/>
+          </a:solidFill>
+          <a:ln>
+            <a:noFill/>
+          </a:ln>
+        </p:spPr>
+        <p:style>
+          <a:lnRef idx="1">
+            <a:schemeClr val="accent1"/>
+          </a:lnRef>
+          <a:fillRef idx="3">
+            <a:schemeClr val="accent1"/>
+          </a:fillRef>
+          <a:effectRef idx="2">
+            <a:schemeClr val="accent1"/>
+          </a:effectRef>
+          <a:fontRef idx="minor">
+            <a:schemeClr val="lt1"/>
+          </a:fontRef>
+        </p:style>
+        <p:txBody>
+          <a:bodyPr rtlCol="0" anchor="ctr"/>
+          <a:lstStyle/>
+          <a:p>
+            <a:pPr algn="ctr"/>
+          </a:p>
+        </p:txBody>
+      </p:sp>
+      <p:sp>
+        <p:nvSpPr>
+          <p:cNvPr id="14" name="Rounded Rectangle 13"/>
+          <p:cNvSpPr/>
+          <p:nvPr/>
+        </p:nvSpPr>
+        <p:spPr>
+          <a:xfrm>
+            <a:off x="594360" y="4146804"/>
+            <a:ext cx="438912" cy="438912"/>
+          </a:xfrm>
+          <a:prstGeom prst="roundRect">
+            <a:avLst>
+              <a:gd name="adj" fmla="val 12000"/>
+            </a:avLst>
+          </a:prstGeom>
+          <a:solidFill>
+            <a:srgbClr val="095292"/>
+          </a:solidFill>
+          <a:ln>
+            <a:noFill/>
+          </a:ln>
+        </p:spPr>
+        <p:style>
+          <a:lnRef idx="1">
+            <a:schemeClr val="accent1"/>
+          </a:lnRef>
+          <a:fillRef idx="3">
+            <a:schemeClr val="accent1"/>
+          </a:fillRef>
+          <a:effectRef idx="2">
+            <a:schemeClr val="accent1"/>
+          </a:effectRef>
+          <a:fontRef idx="minor">
+            <a:schemeClr val="lt1"/>
+          </a:fontRef>
+        </p:style>
+        <p:txBody>
+          <a:bodyPr rtlCol="0" anchor="ctr"/>
+          <a:lstStyle/>
+          <a:p>
+            <a:pPr algn="ctr"/>
+          </a:p>
+        </p:txBody>
+      </p:sp>
+      <p:sp>
+        <p:nvSpPr>
+          <p:cNvPr id="15" name="TextBox 14"/>
+          <p:cNvSpPr txBox="1"/>
+          <p:nvPr/>
+        </p:nvSpPr>
+        <p:spPr>
+          <a:xfrm>
+            <a:off x="594360" y="4146804"/>
+            <a:ext cx="438912" cy="438912"/>
+          </a:xfrm>
+          <a:prstGeom prst="rect">
+            <a:avLst/>
+          </a:prstGeom>
+          <a:noFill/>
+        </p:spPr>
+        <p:txBody>
+          <a:bodyPr wrap="square" anchor="ctr"/>
+          <a:lstStyle/>
+          <a:p>
+            <a:pPr algn="ctr"/>
+            <a:r>
+              <a:rPr sz="1600" b="1" i="0">
+                <a:solidFill>
+                  <a:srgbClr val="FFFFFF"/>
+                </a:solidFill>
+                <a:latin typeface="Calibri"/>
+              </a:rPr>
+              <a:t>3</a:t>
+            </a:r>
+          </a:p>
+        </p:txBody>
+      </p:sp>
+      <p:sp>
+        <p:nvSpPr>
+          <p:cNvPr id="16" name="TextBox 15"/>
+          <p:cNvSpPr txBox="1"/>
+          <p:nvPr/>
+        </p:nvSpPr>
+        <p:spPr>
+          <a:xfrm>
+            <a:off x="1188720" y="3931920"/>
+            <a:ext cx="10271455" cy="886968"/>
+          </a:xfrm>
+          <a:prstGeom prst="rect">
+            <a:avLst/>
+          </a:prstGeom>
+          <a:noFill/>
+        </p:spPr>
+        <p:txBody>
+          <a:bodyPr wrap="square" anchor="ctr"/>
+          <a:lstStyle/>
+          <a:p>
+            <a:r>
+              <a:rPr sz="1500" b="1" i="0">
+                <a:solidFill>
+                  <a:srgbClr val="095292"/>
+                </a:solidFill>
+                <a:latin typeface="Calibri"/>
+              </a:rPr>
+              <a:t>Outline presentacion 5-8 min + quien habla que.</a:t>
+            </a:r>
+          </a:p>
+        </p:txBody>
+      </p:sp>
+      <p:sp>
+        <p:nvSpPr>
+          <p:cNvPr id="17" name="Rounded Rectangle 16"/>
+          <p:cNvSpPr/>
+          <p:nvPr/>
+        </p:nvSpPr>
+        <p:spPr>
+          <a:xfrm>
+            <a:off x="457200" y="4983480"/>
+            <a:ext cx="11277295" cy="1051560"/>
+          </a:xfrm>
+          <a:prstGeom prst="roundRect">
+            <a:avLst>
+              <a:gd name="adj" fmla="val 12000"/>
+            </a:avLst>
+          </a:prstGeom>
+          <a:solidFill>
+            <a:srgbClr val="E8F4FA"/>
+          </a:solidFill>
+          <a:ln>
+            <a:noFill/>
+          </a:ln>
+        </p:spPr>
+        <p:style>
+          <a:lnRef idx="1">
+            <a:schemeClr val="accent1"/>
+          </a:lnRef>
+          <a:fillRef idx="3">
+            <a:schemeClr val="accent1"/>
+          </a:fillRef>
+          <a:effectRef idx="2">
+            <a:schemeClr val="accent1"/>
+          </a:effectRef>
+          <a:fontRef idx="minor">
+            <a:schemeClr val="lt1"/>
+          </a:fontRef>
+        </p:style>
+        <p:txBody>
+          <a:bodyPr rtlCol="0" anchor="ctr"/>
+          <a:lstStyle/>
+          <a:p>
+            <a:pPr algn="ctr"/>
+          </a:p>
+        </p:txBody>
+      </p:sp>
+      <p:sp>
+        <p:nvSpPr>
+          <p:cNvPr id="18" name="Rounded Rectangle 17"/>
+          <p:cNvSpPr/>
+          <p:nvPr/>
+        </p:nvSpPr>
+        <p:spPr>
+          <a:xfrm>
+            <a:off x="594360" y="5289804"/>
+            <a:ext cx="438912" cy="438912"/>
+          </a:xfrm>
+          <a:prstGeom prst="roundRect">
+            <a:avLst>
+              <a:gd name="adj" fmla="val 12000"/>
+            </a:avLst>
+          </a:prstGeom>
+          <a:solidFill>
+            <a:srgbClr val="095292"/>
+          </a:solidFill>
+          <a:ln>
+            <a:noFill/>
+          </a:ln>
+        </p:spPr>
+        <p:style>
+          <a:lnRef idx="1">
+            <a:schemeClr val="accent1"/>
+          </a:lnRef>
+          <a:fillRef idx="3">
+            <a:schemeClr val="accent1"/>
+          </a:fillRef>
+          <a:effectRef idx="2">
+            <a:schemeClr val="accent1"/>
+          </a:effectRef>
+          <a:fontRef idx="minor">
+            <a:schemeClr val="lt1"/>
+          </a:fontRef>
+        </p:style>
+        <p:txBody>
+          <a:bodyPr rtlCol="0" anchor="ctr"/>
+          <a:lstStyle/>
+          <a:p>
+            <a:pPr algn="ctr"/>
+          </a:p>
+        </p:txBody>
+      </p:sp>
+      <p:sp>
+        <p:nvSpPr>
+          <p:cNvPr id="19" name="TextBox 18"/>
+          <p:cNvSpPr txBox="1"/>
+          <p:nvPr/>
+        </p:nvSpPr>
+        <p:spPr>
+          <a:xfrm>
+            <a:off x="594360" y="5289804"/>
+            <a:ext cx="438912" cy="438912"/>
+          </a:xfrm>
+          <a:prstGeom prst="rect">
+            <a:avLst/>
+          </a:prstGeom>
+          <a:noFill/>
+        </p:spPr>
+        <p:txBody>
+          <a:bodyPr wrap="square" anchor="ctr"/>
+          <a:lstStyle/>
+          <a:p>
+            <a:pPr algn="ctr"/>
+            <a:r>
+              <a:rPr sz="1600" b="1" i="0">
+                <a:solidFill>
+                  <a:srgbClr val="FFFFFF"/>
+                </a:solidFill>
+                <a:latin typeface="Calibri"/>
+              </a:rPr>
+              <a:t>4</a:t>
+            </a:r>
+          </a:p>
+        </p:txBody>
+      </p:sp>
+      <p:sp>
+        <p:nvSpPr>
+          <p:cNvPr id="20" name="TextBox 19"/>
+          <p:cNvSpPr txBox="1"/>
+          <p:nvPr/>
+        </p:nvSpPr>
+        <p:spPr>
+          <a:xfrm>
+            <a:off x="1188720" y="5074920"/>
+            <a:ext cx="10271455" cy="886968"/>
+          </a:xfrm>
+          <a:prstGeom prst="rect">
+            <a:avLst/>
+          </a:prstGeom>
+          <a:noFill/>
+        </p:spPr>
+        <p:txBody>
+          <a:bodyPr wrap="square" anchor="ctr"/>
+          <a:lstStyle/>
+          <a:p>
+            <a:r>
+              <a:rPr sz="1500" b="1" i="0">
+                <a:solidFill>
+                  <a:srgbClr val="095292"/>
+                </a:solidFill>
+                <a:latin typeface="Calibri"/>
+              </a:rPr>
+              <a:t>Empaquetar borrador entrega final.</a:t>
+            </a:r>
+          </a:p>
+        </p:txBody>
+      </p:sp>
+      <p:sp>
+        <p:nvSpPr>
+          <p:cNvPr id="21" name="TextBox 20"/>
           <p:cNvSpPr txBox="1"/>
           <p:nvPr/>
         </p:nvSpPr>
@@ -13613,7 +13651,7 @@
                 </a:solidFill>
                 <a:latin typeface="Calibri"/>
               </a:rPr>
-              <a:t>Para el PI esta semana</a:t>
+              <a:t>Taller PI VetCare — pistas (checklist vacio)</a:t>
             </a:r>
           </a:p>
         </p:txBody>
@@ -13627,7 +13665,7 @@
         <p:spPr>
           <a:xfrm>
             <a:off x="457200" y="1261872"/>
-            <a:ext cx="11277295" cy="1051560"/>
+            <a:ext cx="11277295" cy="566928"/>
           </a:xfrm>
           <a:prstGeom prst="roundRect">
             <a:avLst>
@@ -13635,7 +13673,7 @@
             </a:avLst>
           </a:prstGeom>
           <a:solidFill>
-            <a:srgbClr val="E8F4FA"/>
+            <a:srgbClr val="F2F2F2"/>
           </a:solidFill>
           <a:ln>
             <a:noFill/>
@@ -13671,8 +13709,53 @@
         </p:nvSpPr>
         <p:spPr>
           <a:xfrm>
-            <a:off x="457200" y="1261872"/>
-            <a:ext cx="128016" cy="1051560"/>
+            <a:off x="640080" y="1408175"/>
+            <a:ext cx="274320" cy="274320"/>
+          </a:xfrm>
+          <a:prstGeom prst="rect">
+            <a:avLst/>
+          </a:prstGeom>
+          <a:solidFill>
+            <a:srgbClr val="FFFFFF"/>
+          </a:solidFill>
+          <a:ln>
+            <a:solidFill>
+              <a:srgbClr val="333333"/>
+            </a:solidFill>
+          </a:ln>
+        </p:spPr>
+        <p:style>
+          <a:lnRef idx="1">
+            <a:schemeClr val="accent1"/>
+          </a:lnRef>
+          <a:fillRef idx="3">
+            <a:schemeClr val="accent1"/>
+          </a:fillRef>
+          <a:effectRef idx="2">
+            <a:schemeClr val="accent1"/>
+          </a:effectRef>
+          <a:fontRef idx="minor">
+            <a:schemeClr val="lt1"/>
+          </a:fontRef>
+        </p:style>
+        <p:txBody>
+          <a:bodyPr rtlCol="0" anchor="ctr"/>
+          <a:lstStyle/>
+          <a:p>
+            <a:pPr algn="ctr"/>
+          </a:p>
+        </p:txBody>
+      </p:sp>
+      <p:sp>
+        <p:nvSpPr>
+          <p:cNvPr id="7" name="Rectangle 6"/>
+          <p:cNvSpPr/>
+          <p:nvPr/>
+        </p:nvSpPr>
+        <p:spPr>
+          <a:xfrm>
+            <a:off x="640080" y="1408175"/>
+            <a:ext cx="73152" cy="274320"/>
           </a:xfrm>
           <a:prstGeom prst="rect">
             <a:avLst/>
@@ -13708,14 +13791,14 @@
       </p:sp>
       <p:sp>
         <p:nvSpPr>
-          <p:cNvPr id="7" name="TextBox 6"/>
+          <p:cNvPr id="8" name="TextBox 7"/>
           <p:cNvSpPr txBox="1"/>
           <p:nvPr/>
         </p:nvSpPr>
         <p:spPr>
           <a:xfrm>
-            <a:off x="777240" y="1399031"/>
-            <a:ext cx="10774375" cy="822959"/>
+            <a:off x="1097280" y="1353312"/>
+            <a:ext cx="10362895" cy="402336"/>
           </a:xfrm>
           <a:prstGeom prst="rect">
             <a:avLst/>
@@ -13723,49 +13806,31 @@
           <a:noFill/>
         </p:spPr>
         <p:txBody>
-          <a:bodyPr wrap="square">
-            <a:spAutoFit/>
-          </a:bodyPr>
-          <a:lstStyle/>
-          <a:p>
-            <a:r>
-              <a:rPr sz="1200" b="1" i="0">
-                <a:solidFill>
-                  <a:srgbClr val="269CCB"/>
-                </a:solidFill>
-                <a:latin typeface="Calibri"/>
-              </a:rPr>
-              <a:t>Info</a:t>
-            </a:r>
-          </a:p>
-          <a:p>
-            <a:pPr>
-              <a:spcBef>
-                <a:spcPts val="400"/>
-              </a:spcBef>
-            </a:pPr>
-            <a:r>
-              <a:rPr sz="1400" b="0" i="0">
+          <a:bodyPr wrap="square" anchor="ctr"/>
+          <a:lstStyle/>
+          <a:p>
+            <a:r>
+              <a:rPr sz="1500" b="0" i="0">
                 <a:solidFill>
                   <a:srgbClr val="333333"/>
                 </a:solidFill>
                 <a:latin typeface="Calibri"/>
               </a:rPr>
-              <a:t>Hito: Contrato integracion + preparacion de entrega/sustentacion</a:t>
-            </a:r>
-          </a:p>
-        </p:txBody>
-      </p:sp>
-      <p:sp>
-        <p:nvSpPr>
-          <p:cNvPr id="8" name="Rounded Rectangle 7"/>
+              <a:t>□ &gt;=3 ops?</a:t>
+            </a:r>
+          </a:p>
+        </p:txBody>
+      </p:sp>
+      <p:sp>
+        <p:nvSpPr>
+          <p:cNvPr id="9" name="Rounded Rectangle 8"/>
           <p:cNvSpPr/>
           <p:nvPr/>
         </p:nvSpPr>
         <p:spPr>
           <a:xfrm>
-            <a:off x="457200" y="2478024"/>
-            <a:ext cx="11277295" cy="1051560"/>
+            <a:off x="457200" y="1938528"/>
+            <a:ext cx="11277295" cy="566928"/>
           </a:xfrm>
           <a:prstGeom prst="roundRect">
             <a:avLst>
@@ -13773,7 +13838,7 @@
             </a:avLst>
           </a:prstGeom>
           <a:solidFill>
-            <a:srgbClr val="FFF8E1"/>
+            <a:srgbClr val="F2F2F2"/>
           </a:solidFill>
           <a:ln>
             <a:noFill/>
@@ -13803,23 +13868,25 @@
       </p:sp>
       <p:sp>
         <p:nvSpPr>
-          <p:cNvPr id="9" name="Rectangle 8"/>
+          <p:cNvPr id="10" name="Rectangle 9"/>
           <p:cNvSpPr/>
           <p:nvPr/>
         </p:nvSpPr>
         <p:spPr>
           <a:xfrm>
-            <a:off x="457200" y="2478024"/>
-            <a:ext cx="128016" cy="1051560"/>
+            <a:off x="640080" y="2084832"/>
+            <a:ext cx="274320" cy="274320"/>
           </a:xfrm>
           <a:prstGeom prst="rect">
             <a:avLst/>
           </a:prstGeom>
           <a:solidFill>
-            <a:srgbClr val="FFD000"/>
+            <a:srgbClr val="FFFFFF"/>
           </a:solidFill>
           <a:ln>
-            <a:noFill/>
+            <a:solidFill>
+              <a:srgbClr val="333333"/>
+            </a:solidFill>
           </a:ln>
         </p:spPr>
         <p:style>
@@ -13846,72 +13913,20 @@
       </p:sp>
       <p:sp>
         <p:nvSpPr>
-          <p:cNvPr id="10" name="TextBox 9"/>
-          <p:cNvSpPr txBox="1"/>
-          <p:nvPr/>
-        </p:nvSpPr>
-        <p:spPr>
-          <a:xfrm>
-            <a:off x="777240" y="2615184"/>
-            <a:ext cx="10774375" cy="822959"/>
-          </a:xfrm>
-          <a:prstGeom prst="rect">
-            <a:avLst/>
-          </a:prstGeom>
-          <a:noFill/>
-        </p:spPr>
-        <p:txBody>
-          <a:bodyPr wrap="square">
-            <a:spAutoFit/>
-          </a:bodyPr>
-          <a:lstStyle/>
-          <a:p>
-            <a:r>
-              <a:rPr sz="1200" b="1" i="0">
-                <a:solidFill>
-                  <a:srgbClr val="FFD000"/>
-                </a:solidFill>
-                <a:latin typeface="Calibri"/>
-              </a:rPr>
-              <a:t>Aclaración</a:t>
-            </a:r>
-          </a:p>
-          <a:p>
-            <a:pPr>
-              <a:spcBef>
-                <a:spcPts val="400"/>
-              </a:spcBef>
-            </a:pPr>
-            <a:r>
-              <a:rPr sz="1400" b="0" i="0">
-                <a:solidFill>
-                  <a:srgbClr val="333333"/>
-                </a:solidFill>
-                <a:latin typeface="Calibri"/>
-              </a:rPr>
-              <a:t>Enunciado completo: Clases/Proyecto Integrador/ (VetCare DB).</a:t>
-            </a:r>
-          </a:p>
-        </p:txBody>
-      </p:sp>
-      <p:sp>
-        <p:nvSpPr>
-          <p:cNvPr id="11" name="Rounded Rectangle 10"/>
+          <p:cNvPr id="11" name="Rectangle 10"/>
           <p:cNvSpPr/>
           <p:nvPr/>
         </p:nvSpPr>
         <p:spPr>
           <a:xfrm>
-            <a:off x="457200" y="3694176"/>
-            <a:ext cx="11277295" cy="1051560"/>
-          </a:xfrm>
-          <a:prstGeom prst="roundRect">
-            <a:avLst>
-              <a:gd name="adj" fmla="val 12000"/>
-            </a:avLst>
+            <a:off x="640080" y="2084832"/>
+            <a:ext cx="73152" cy="274320"/>
+          </a:xfrm>
+          <a:prstGeom prst="rect">
+            <a:avLst/>
           </a:prstGeom>
           <a:solidFill>
-            <a:srgbClr val="FBE4E4"/>
+            <a:srgbClr val="269CCB"/>
           </a:solidFill>
           <a:ln>
             <a:noFill/>
@@ -13941,20 +13956,54 @@
       </p:sp>
       <p:sp>
         <p:nvSpPr>
-          <p:cNvPr id="12" name="Rectangle 11"/>
+          <p:cNvPr id="12" name="TextBox 11"/>
+          <p:cNvSpPr txBox="1"/>
+          <p:nvPr/>
+        </p:nvSpPr>
+        <p:spPr>
+          <a:xfrm>
+            <a:off x="1097280" y="2029968"/>
+            <a:ext cx="10362895" cy="402336"/>
+          </a:xfrm>
+          <a:prstGeom prst="rect">
+            <a:avLst/>
+          </a:prstGeom>
+          <a:noFill/>
+        </p:spPr>
+        <p:txBody>
+          <a:bodyPr wrap="square" anchor="ctr"/>
+          <a:lstStyle/>
+          <a:p>
+            <a:r>
+              <a:rPr sz="1500" b="0" i="0">
+                <a:solidFill>
+                  <a:srgbClr val="333333"/>
+                </a:solidFill>
+                <a:latin typeface="Calibri"/>
+              </a:rPr>
+              <a:t>□ Errores esperados?</a:t>
+            </a:r>
+          </a:p>
+        </p:txBody>
+      </p:sp>
+      <p:sp>
+        <p:nvSpPr>
+          <p:cNvPr id="13" name="Rounded Rectangle 12"/>
           <p:cNvSpPr/>
           <p:nvPr/>
         </p:nvSpPr>
         <p:spPr>
           <a:xfrm>
-            <a:off x="457200" y="3694176"/>
-            <a:ext cx="128016" cy="1051560"/>
-          </a:xfrm>
-          <a:prstGeom prst="rect">
-            <a:avLst/>
+            <a:off x="457200" y="2615184"/>
+            <a:ext cx="11277295" cy="566928"/>
+          </a:xfrm>
+          <a:prstGeom prst="roundRect">
+            <a:avLst>
+              <a:gd name="adj" fmla="val 12000"/>
+            </a:avLst>
           </a:prstGeom>
           <a:solidFill>
-            <a:srgbClr val="A02030"/>
+            <a:srgbClr val="F2F2F2"/>
           </a:solidFill>
           <a:ln>
             <a:noFill/>
@@ -13984,14 +14033,102 @@
       </p:sp>
       <p:sp>
         <p:nvSpPr>
-          <p:cNvPr id="13" name="TextBox 12"/>
+          <p:cNvPr id="14" name="Rectangle 13"/>
+          <p:cNvSpPr/>
+          <p:nvPr/>
+        </p:nvSpPr>
+        <p:spPr>
+          <a:xfrm>
+            <a:off x="640080" y="2761488"/>
+            <a:ext cx="274320" cy="274320"/>
+          </a:xfrm>
+          <a:prstGeom prst="rect">
+            <a:avLst/>
+          </a:prstGeom>
+          <a:solidFill>
+            <a:srgbClr val="FFFFFF"/>
+          </a:solidFill>
+          <a:ln>
+            <a:solidFill>
+              <a:srgbClr val="333333"/>
+            </a:solidFill>
+          </a:ln>
+        </p:spPr>
+        <p:style>
+          <a:lnRef idx="1">
+            <a:schemeClr val="accent1"/>
+          </a:lnRef>
+          <a:fillRef idx="3">
+            <a:schemeClr val="accent1"/>
+          </a:fillRef>
+          <a:effectRef idx="2">
+            <a:schemeClr val="accent1"/>
+          </a:effectRef>
+          <a:fontRef idx="minor">
+            <a:schemeClr val="lt1"/>
+          </a:fontRef>
+        </p:style>
+        <p:txBody>
+          <a:bodyPr rtlCol="0" anchor="ctr"/>
+          <a:lstStyle/>
+          <a:p>
+            <a:pPr algn="ctr"/>
+          </a:p>
+        </p:txBody>
+      </p:sp>
+      <p:sp>
+        <p:nvSpPr>
+          <p:cNvPr id="15" name="Rectangle 14"/>
+          <p:cNvSpPr/>
+          <p:nvPr/>
+        </p:nvSpPr>
+        <p:spPr>
+          <a:xfrm>
+            <a:off x="640080" y="2761488"/>
+            <a:ext cx="73152" cy="274320"/>
+          </a:xfrm>
+          <a:prstGeom prst="rect">
+            <a:avLst/>
+          </a:prstGeom>
+          <a:solidFill>
+            <a:srgbClr val="269CCB"/>
+          </a:solidFill>
+          <a:ln>
+            <a:noFill/>
+          </a:ln>
+        </p:spPr>
+        <p:style>
+          <a:lnRef idx="1">
+            <a:schemeClr val="accent1"/>
+          </a:lnRef>
+          <a:fillRef idx="3">
+            <a:schemeClr val="accent1"/>
+          </a:fillRef>
+          <a:effectRef idx="2">
+            <a:schemeClr val="accent1"/>
+          </a:effectRef>
+          <a:fontRef idx="minor">
+            <a:schemeClr val="lt1"/>
+          </a:fontRef>
+        </p:style>
+        <p:txBody>
+          <a:bodyPr rtlCol="0" anchor="ctr"/>
+          <a:lstStyle/>
+          <a:p>
+            <a:pPr algn="ctr"/>
+          </a:p>
+        </p:txBody>
+      </p:sp>
+      <p:sp>
+        <p:nvSpPr>
+          <p:cNvPr id="16" name="TextBox 15"/>
           <p:cNvSpPr txBox="1"/>
           <p:nvPr/>
         </p:nvSpPr>
         <p:spPr>
           <a:xfrm>
-            <a:off x="777240" y="3831336"/>
-            <a:ext cx="10774375" cy="822959"/>
+            <a:off x="1097280" y="2706624"/>
+            <a:ext cx="10362895" cy="402336"/>
           </a:xfrm>
           <a:prstGeom prst="rect">
             <a:avLst/>
@@ -13999,42 +14136,24 @@
           <a:noFill/>
         </p:spPr>
         <p:txBody>
-          <a:bodyPr wrap="square">
-            <a:spAutoFit/>
-          </a:bodyPr>
-          <a:lstStyle/>
-          <a:p>
-            <a:r>
-              <a:rPr sz="1200" b="1" i="0">
-                <a:solidFill>
-                  <a:srgbClr val="A02030"/>
-                </a:solidFill>
-                <a:latin typeface="Calibri"/>
-              </a:rPr>
-              <a:t>Atención</a:t>
-            </a:r>
-          </a:p>
-          <a:p>
-            <a:pPr>
-              <a:spcBef>
-                <a:spcPts val="400"/>
-              </a:spcBef>
-            </a:pPr>
-            <a:r>
-              <a:rPr sz="1400" b="0" i="0">
+          <a:bodyPr wrap="square" anchor="ctr"/>
+          <a:lstStyle/>
+          <a:p>
+            <a:r>
+              <a:rPr sz="1500" b="0" i="0">
                 <a:solidFill>
                   <a:srgbClr val="333333"/>
                 </a:solidFill>
                 <a:latin typeface="Calibri"/>
               </a:rPr>
-              <a:t>Si el docente asigna taller esta semana, él indica el canal y la fecha.</a:t>
-            </a:r>
-          </a:p>
-        </p:txBody>
-      </p:sp>
-      <p:sp>
-        <p:nvSpPr>
-          <p:cNvPr id="14" name="TextBox 13"/>
+              <a:t>□ Outline completo?</a:t>
+            </a:r>
+          </a:p>
+        </p:txBody>
+      </p:sp>
+      <p:sp>
+        <p:nvSpPr>
+          <p:cNvPr id="17" name="TextBox 16"/>
           <p:cNvSpPr txBox="1"/>
           <p:nvPr/>
         </p:nvSpPr>
@@ -14076,6 +14195,921 @@
 </file>
 
 <file path=ppt/slides/slide34.xml><?xml version="1.0" encoding="utf-8"?>
+<p:sld xmlns:a="http://schemas.openxmlformats.org/drawingml/2006/main" xmlns:p="http://schemas.openxmlformats.org/presentationml/2006/main" xmlns:r="http://schemas.openxmlformats.org/officeDocument/2006/relationships">
+  <p:cSld>
+    <p:bg>
+      <p:bgPr>
+        <a:solidFill>
+          <a:srgbClr val="FFFFFF"/>
+        </a:solidFill>
+        <a:effectLst/>
+      </p:bgPr>
+    </p:bg>
+    <p:spTree>
+      <p:nvGrpSpPr>
+        <p:cNvPr id="1" name=""/>
+        <p:cNvGrpSpPr/>
+        <p:nvPr/>
+      </p:nvGrpSpPr>
+      <p:grpSpPr/>
+      <p:sp>
+        <p:nvSpPr>
+          <p:cNvPr id="2" name="Rectangle 1"/>
+          <p:cNvSpPr/>
+          <p:nvPr/>
+        </p:nvSpPr>
+        <p:spPr>
+          <a:xfrm>
+            <a:off x="0" y="0"/>
+            <a:ext cx="12191695" cy="960120"/>
+          </a:xfrm>
+          <a:prstGeom prst="rect">
+            <a:avLst/>
+          </a:prstGeom>
+          <a:solidFill>
+            <a:srgbClr val="095292"/>
+          </a:solidFill>
+          <a:ln>
+            <a:noFill/>
+          </a:ln>
+        </p:spPr>
+        <p:style>
+          <a:lnRef idx="1">
+            <a:schemeClr val="accent1"/>
+          </a:lnRef>
+          <a:fillRef idx="3">
+            <a:schemeClr val="accent1"/>
+          </a:fillRef>
+          <a:effectRef idx="2">
+            <a:schemeClr val="accent1"/>
+          </a:effectRef>
+          <a:fontRef idx="minor">
+            <a:schemeClr val="lt1"/>
+          </a:fontRef>
+        </p:style>
+        <p:txBody>
+          <a:bodyPr rtlCol="0" anchor="ctr"/>
+          <a:lstStyle/>
+          <a:p>
+            <a:pPr algn="ctr"/>
+          </a:p>
+        </p:txBody>
+      </p:sp>
+      <p:sp>
+        <p:nvSpPr>
+          <p:cNvPr id="3" name="Rectangle 2"/>
+          <p:cNvSpPr/>
+          <p:nvPr/>
+        </p:nvSpPr>
+        <p:spPr>
+          <a:xfrm>
+            <a:off x="0" y="960120"/>
+            <a:ext cx="12191695" cy="41148"/>
+          </a:xfrm>
+          <a:prstGeom prst="rect">
+            <a:avLst/>
+          </a:prstGeom>
+          <a:solidFill>
+            <a:srgbClr val="FFD000"/>
+          </a:solidFill>
+          <a:ln>
+            <a:noFill/>
+          </a:ln>
+        </p:spPr>
+        <p:style>
+          <a:lnRef idx="1">
+            <a:schemeClr val="accent1"/>
+          </a:lnRef>
+          <a:fillRef idx="3">
+            <a:schemeClr val="accent1"/>
+          </a:fillRef>
+          <a:effectRef idx="2">
+            <a:schemeClr val="accent1"/>
+          </a:effectRef>
+          <a:fontRef idx="minor">
+            <a:schemeClr val="lt1"/>
+          </a:fontRef>
+        </p:style>
+        <p:txBody>
+          <a:bodyPr rtlCol="0" anchor="ctr"/>
+          <a:lstStyle/>
+          <a:p>
+            <a:pPr algn="ctr"/>
+          </a:p>
+        </p:txBody>
+      </p:sp>
+      <p:sp>
+        <p:nvSpPr>
+          <p:cNvPr id="4" name="TextBox 3"/>
+          <p:cNvSpPr txBox="1"/>
+          <p:nvPr/>
+        </p:nvSpPr>
+        <p:spPr>
+          <a:xfrm>
+            <a:off x="457200" y="164592"/>
+            <a:ext cx="11277295" cy="502920"/>
+          </a:xfrm>
+          <a:prstGeom prst="rect">
+            <a:avLst/>
+          </a:prstGeom>
+          <a:noFill/>
+        </p:spPr>
+        <p:txBody>
+          <a:bodyPr wrap="square">
+            <a:spAutoFit/>
+          </a:bodyPr>
+          <a:lstStyle/>
+          <a:p>
+            <a:r>
+              <a:rPr sz="2600" b="1" i="0">
+                <a:solidFill>
+                  <a:srgbClr val="FFFFFF"/>
+                </a:solidFill>
+                <a:latin typeface="Calibri"/>
+              </a:rPr>
+              <a:t>Criterios de exito / entregable</a:t>
+            </a:r>
+          </a:p>
+        </p:txBody>
+      </p:sp>
+      <p:sp>
+        <p:nvSpPr>
+          <p:cNvPr id="5" name="TextBox 4"/>
+          <p:cNvSpPr txBox="1"/>
+          <p:nvPr/>
+        </p:nvSpPr>
+        <p:spPr>
+          <a:xfrm>
+            <a:off x="457200" y="1170432"/>
+            <a:ext cx="11277295" cy="5230368"/>
+          </a:xfrm>
+          <a:prstGeom prst="rect">
+            <a:avLst/>
+          </a:prstGeom>
+          <a:noFill/>
+        </p:spPr>
+        <p:txBody>
+          <a:bodyPr wrap="square">
+            <a:spAutoFit/>
+          </a:bodyPr>
+          <a:lstStyle/>
+          <a:p>
+            <a:pPr>
+              <a:spcAft>
+                <a:spcPts val="800"/>
+              </a:spcAft>
+            </a:pPr>
+            <a:r>
+              <a:rPr sz="2000" b="0" i="0">
+                <a:solidFill>
+                  <a:srgbClr val="333333"/>
+                </a:solidFill>
+                <a:latin typeface="Calibri"/>
+              </a:rPr>
+              <a:t>–   </a:t>
+            </a:r>
+            <a:r>
+              <a:rPr sz="2000" b="1" i="0">
+                <a:solidFill>
+                  <a:srgbClr val="333333"/>
+                </a:solidFill>
+                <a:latin typeface="Calibri"/>
+              </a:rPr>
+              <a:t>Entregable:</a:t>
+            </a:r>
+            <a:r>
+              <a:rPr sz="2000" b="0" i="0">
+                <a:solidFill>
+                  <a:srgbClr val="333333"/>
+                </a:solidFill>
+                <a:latin typeface="Calibri"/>
+              </a:rPr>
+              <a:t> Contrato app&lt;-&gt;BD + outline de slides de sustentacion (5-8 min)</a:t>
+            </a:r>
+          </a:p>
+          <a:p>
+            <a:pPr>
+              <a:spcAft>
+                <a:spcPts val="800"/>
+              </a:spcAft>
+            </a:pPr>
+            <a:r>
+              <a:rPr sz="2000" b="0" i="0">
+                <a:solidFill>
+                  <a:srgbClr val="333333"/>
+                </a:solidFill>
+                <a:latin typeface="Calibri"/>
+              </a:rPr>
+              <a:t>–   Evidencia: el SQL y su salida quedan guardados en cada pregunta de la plataforma del curso.</a:t>
+            </a:r>
+          </a:p>
+          <a:p>
+            <a:pPr>
+              <a:spcAft>
+                <a:spcPts val="800"/>
+              </a:spcAft>
+            </a:pPr>
+            <a:r>
+              <a:rPr sz="2000" b="0" i="0">
+                <a:solidFill>
+                  <a:srgbClr val="333333"/>
+                </a:solidFill>
+                <a:latin typeface="Calibri"/>
+              </a:rPr>
+              <a:t>–   Conserva copia en tu carpeta del PI (los .sql que pide el entregable).</a:t>
+            </a:r>
+          </a:p>
+          <a:p>
+            <a:pPr>
+              <a:spcAft>
+                <a:spcPts val="800"/>
+              </a:spcAft>
+            </a:pPr>
+            <a:r>
+              <a:rPr sz="2000" b="0" i="0">
+                <a:solidFill>
+                  <a:srgbClr val="333333"/>
+                </a:solidFill>
+                <a:latin typeface="Calibri"/>
+              </a:rPr>
+              <a:t>–   Actualizar checklist PI (que criterio de rubrica avanzo).</a:t>
+            </a:r>
+          </a:p>
+          <a:p>
+            <a:pPr>
+              <a:spcAft>
+                <a:spcPts val="800"/>
+              </a:spcAft>
+            </a:pPr>
+            <a:r>
+              <a:rPr sz="2000" b="0" i="0">
+                <a:solidFill>
+                  <a:srgbClr val="333333"/>
+                </a:solidFill>
+                <a:latin typeface="Calibri"/>
+              </a:rPr>
+              <a:t>–   </a:t>
+            </a:r>
+            <a:r>
+              <a:rPr sz="2000" b="1" i="0">
+                <a:solidFill>
+                  <a:srgbClr val="333333"/>
+                </a:solidFill>
+                <a:latin typeface="Calibri"/>
+              </a:rPr>
+              <a:t>Entrega en la plataforma del curso</a:t>
+            </a:r>
+            <a:r>
+              <a:rPr sz="2000" b="0" i="0">
+                <a:solidFill>
+                  <a:srgbClr val="333333"/>
+                </a:solidFill>
+                <a:latin typeface="Calibri"/>
+              </a:rPr>
+              <a:t> — en la fecha que indique el docente.</a:t>
+            </a:r>
+          </a:p>
+        </p:txBody>
+      </p:sp>
+      <p:sp>
+        <p:nvSpPr>
+          <p:cNvPr id="6" name="TextBox 5"/>
+          <p:cNvSpPr txBox="1"/>
+          <p:nvPr/>
+        </p:nvSpPr>
+        <p:spPr>
+          <a:xfrm>
+            <a:off x="11185855" y="6473952"/>
+            <a:ext cx="640080" cy="274320"/>
+          </a:xfrm>
+          <a:prstGeom prst="rect">
+            <a:avLst/>
+          </a:prstGeom>
+          <a:noFill/>
+        </p:spPr>
+        <p:txBody>
+          <a:bodyPr wrap="square">
+            <a:spAutoFit/>
+          </a:bodyPr>
+          <a:lstStyle/>
+          <a:p>
+            <a:pPr algn="r"/>
+            <a:r>
+              <a:rPr sz="1100" b="0" i="0">
+                <a:solidFill>
+                  <a:srgbClr val="666666"/>
+                </a:solidFill>
+                <a:latin typeface="Calibri"/>
+              </a:rPr>
+              <a:t>34</a:t>
+            </a:r>
+          </a:p>
+        </p:txBody>
+      </p:sp>
+    </p:spTree>
+  </p:cSld>
+  <p:clrMapOvr>
+    <a:masterClrMapping/>
+  </p:clrMapOvr>
+</p:sld>
+</file>
+
+<file path=ppt/slides/slide35.xml><?xml version="1.0" encoding="utf-8"?>
+<p:sld xmlns:a="http://schemas.openxmlformats.org/drawingml/2006/main" xmlns:p="http://schemas.openxmlformats.org/presentationml/2006/main" xmlns:r="http://schemas.openxmlformats.org/officeDocument/2006/relationships">
+  <p:cSld>
+    <p:bg>
+      <p:bgPr>
+        <a:solidFill>
+          <a:srgbClr val="FFFFFF"/>
+        </a:solidFill>
+        <a:effectLst/>
+      </p:bgPr>
+    </p:bg>
+    <p:spTree>
+      <p:nvGrpSpPr>
+        <p:cNvPr id="1" name=""/>
+        <p:cNvGrpSpPr/>
+        <p:nvPr/>
+      </p:nvGrpSpPr>
+      <p:grpSpPr/>
+      <p:sp>
+        <p:nvSpPr>
+          <p:cNvPr id="2" name="Rectangle 1"/>
+          <p:cNvSpPr/>
+          <p:nvPr/>
+        </p:nvSpPr>
+        <p:spPr>
+          <a:xfrm>
+            <a:off x="0" y="0"/>
+            <a:ext cx="12191695" cy="960120"/>
+          </a:xfrm>
+          <a:prstGeom prst="rect">
+            <a:avLst/>
+          </a:prstGeom>
+          <a:solidFill>
+            <a:srgbClr val="095292"/>
+          </a:solidFill>
+          <a:ln>
+            <a:noFill/>
+          </a:ln>
+        </p:spPr>
+        <p:style>
+          <a:lnRef idx="1">
+            <a:schemeClr val="accent1"/>
+          </a:lnRef>
+          <a:fillRef idx="3">
+            <a:schemeClr val="accent1"/>
+          </a:fillRef>
+          <a:effectRef idx="2">
+            <a:schemeClr val="accent1"/>
+          </a:effectRef>
+          <a:fontRef idx="minor">
+            <a:schemeClr val="lt1"/>
+          </a:fontRef>
+        </p:style>
+        <p:txBody>
+          <a:bodyPr rtlCol="0" anchor="ctr"/>
+          <a:lstStyle/>
+          <a:p>
+            <a:pPr algn="ctr"/>
+          </a:p>
+        </p:txBody>
+      </p:sp>
+      <p:sp>
+        <p:nvSpPr>
+          <p:cNvPr id="3" name="Rectangle 2"/>
+          <p:cNvSpPr/>
+          <p:nvPr/>
+        </p:nvSpPr>
+        <p:spPr>
+          <a:xfrm>
+            <a:off x="0" y="960120"/>
+            <a:ext cx="12191695" cy="41148"/>
+          </a:xfrm>
+          <a:prstGeom prst="rect">
+            <a:avLst/>
+          </a:prstGeom>
+          <a:solidFill>
+            <a:srgbClr val="FFD000"/>
+          </a:solidFill>
+          <a:ln>
+            <a:noFill/>
+          </a:ln>
+        </p:spPr>
+        <p:style>
+          <a:lnRef idx="1">
+            <a:schemeClr val="accent1"/>
+          </a:lnRef>
+          <a:fillRef idx="3">
+            <a:schemeClr val="accent1"/>
+          </a:fillRef>
+          <a:effectRef idx="2">
+            <a:schemeClr val="accent1"/>
+          </a:effectRef>
+          <a:fontRef idx="minor">
+            <a:schemeClr val="lt1"/>
+          </a:fontRef>
+        </p:style>
+        <p:txBody>
+          <a:bodyPr rtlCol="0" anchor="ctr"/>
+          <a:lstStyle/>
+          <a:p>
+            <a:pPr algn="ctr"/>
+          </a:p>
+        </p:txBody>
+      </p:sp>
+      <p:sp>
+        <p:nvSpPr>
+          <p:cNvPr id="4" name="TextBox 3"/>
+          <p:cNvSpPr txBox="1"/>
+          <p:nvPr/>
+        </p:nvSpPr>
+        <p:spPr>
+          <a:xfrm>
+            <a:off x="457200" y="164592"/>
+            <a:ext cx="11277295" cy="502920"/>
+          </a:xfrm>
+          <a:prstGeom prst="rect">
+            <a:avLst/>
+          </a:prstGeom>
+          <a:noFill/>
+        </p:spPr>
+        <p:txBody>
+          <a:bodyPr wrap="square">
+            <a:spAutoFit/>
+          </a:bodyPr>
+          <a:lstStyle/>
+          <a:p>
+            <a:r>
+              <a:rPr sz="2600" b="1" i="0">
+                <a:solidFill>
+                  <a:srgbClr val="FFFFFF"/>
+                </a:solidFill>
+                <a:latin typeface="Calibri"/>
+              </a:rPr>
+              <a:t>Para el PI esta semana</a:t>
+            </a:r>
+          </a:p>
+        </p:txBody>
+      </p:sp>
+      <p:sp>
+        <p:nvSpPr>
+          <p:cNvPr id="5" name="Rounded Rectangle 4"/>
+          <p:cNvSpPr/>
+          <p:nvPr/>
+        </p:nvSpPr>
+        <p:spPr>
+          <a:xfrm>
+            <a:off x="457200" y="1261872"/>
+            <a:ext cx="11277295" cy="1051560"/>
+          </a:xfrm>
+          <a:prstGeom prst="roundRect">
+            <a:avLst>
+              <a:gd name="adj" fmla="val 12000"/>
+            </a:avLst>
+          </a:prstGeom>
+          <a:solidFill>
+            <a:srgbClr val="E8F4FA"/>
+          </a:solidFill>
+          <a:ln>
+            <a:noFill/>
+          </a:ln>
+        </p:spPr>
+        <p:style>
+          <a:lnRef idx="1">
+            <a:schemeClr val="accent1"/>
+          </a:lnRef>
+          <a:fillRef idx="3">
+            <a:schemeClr val="accent1"/>
+          </a:fillRef>
+          <a:effectRef idx="2">
+            <a:schemeClr val="accent1"/>
+          </a:effectRef>
+          <a:fontRef idx="minor">
+            <a:schemeClr val="lt1"/>
+          </a:fontRef>
+        </p:style>
+        <p:txBody>
+          <a:bodyPr rtlCol="0" anchor="ctr"/>
+          <a:lstStyle/>
+          <a:p>
+            <a:pPr algn="ctr"/>
+          </a:p>
+        </p:txBody>
+      </p:sp>
+      <p:sp>
+        <p:nvSpPr>
+          <p:cNvPr id="6" name="Rectangle 5"/>
+          <p:cNvSpPr/>
+          <p:nvPr/>
+        </p:nvSpPr>
+        <p:spPr>
+          <a:xfrm>
+            <a:off x="457200" y="1261872"/>
+            <a:ext cx="128016" cy="1051560"/>
+          </a:xfrm>
+          <a:prstGeom prst="rect">
+            <a:avLst/>
+          </a:prstGeom>
+          <a:solidFill>
+            <a:srgbClr val="269CCB"/>
+          </a:solidFill>
+          <a:ln>
+            <a:noFill/>
+          </a:ln>
+        </p:spPr>
+        <p:style>
+          <a:lnRef idx="1">
+            <a:schemeClr val="accent1"/>
+          </a:lnRef>
+          <a:fillRef idx="3">
+            <a:schemeClr val="accent1"/>
+          </a:fillRef>
+          <a:effectRef idx="2">
+            <a:schemeClr val="accent1"/>
+          </a:effectRef>
+          <a:fontRef idx="minor">
+            <a:schemeClr val="lt1"/>
+          </a:fontRef>
+        </p:style>
+        <p:txBody>
+          <a:bodyPr rtlCol="0" anchor="ctr"/>
+          <a:lstStyle/>
+          <a:p>
+            <a:pPr algn="ctr"/>
+          </a:p>
+        </p:txBody>
+      </p:sp>
+      <p:sp>
+        <p:nvSpPr>
+          <p:cNvPr id="7" name="TextBox 6"/>
+          <p:cNvSpPr txBox="1"/>
+          <p:nvPr/>
+        </p:nvSpPr>
+        <p:spPr>
+          <a:xfrm>
+            <a:off x="777240" y="1399031"/>
+            <a:ext cx="10774375" cy="822959"/>
+          </a:xfrm>
+          <a:prstGeom prst="rect">
+            <a:avLst/>
+          </a:prstGeom>
+          <a:noFill/>
+        </p:spPr>
+        <p:txBody>
+          <a:bodyPr wrap="square">
+            <a:spAutoFit/>
+          </a:bodyPr>
+          <a:lstStyle/>
+          <a:p>
+            <a:r>
+              <a:rPr sz="1200" b="1" i="0">
+                <a:solidFill>
+                  <a:srgbClr val="269CCB"/>
+                </a:solidFill>
+                <a:latin typeface="Calibri"/>
+              </a:rPr>
+              <a:t>Info</a:t>
+            </a:r>
+          </a:p>
+          <a:p>
+            <a:pPr>
+              <a:spcBef>
+                <a:spcPts val="400"/>
+              </a:spcBef>
+            </a:pPr>
+            <a:r>
+              <a:rPr sz="1400" b="0" i="0">
+                <a:solidFill>
+                  <a:srgbClr val="333333"/>
+                </a:solidFill>
+                <a:latin typeface="Calibri"/>
+              </a:rPr>
+              <a:t>Hito: Contrato integracion + preparacion de entrega/sustentacion</a:t>
+            </a:r>
+          </a:p>
+        </p:txBody>
+      </p:sp>
+      <p:sp>
+        <p:nvSpPr>
+          <p:cNvPr id="8" name="Rounded Rectangle 7"/>
+          <p:cNvSpPr/>
+          <p:nvPr/>
+        </p:nvSpPr>
+        <p:spPr>
+          <a:xfrm>
+            <a:off x="457200" y="2478024"/>
+            <a:ext cx="11277295" cy="1051560"/>
+          </a:xfrm>
+          <a:prstGeom prst="roundRect">
+            <a:avLst>
+              <a:gd name="adj" fmla="val 12000"/>
+            </a:avLst>
+          </a:prstGeom>
+          <a:solidFill>
+            <a:srgbClr val="FFF8E1"/>
+          </a:solidFill>
+          <a:ln>
+            <a:noFill/>
+          </a:ln>
+        </p:spPr>
+        <p:style>
+          <a:lnRef idx="1">
+            <a:schemeClr val="accent1"/>
+          </a:lnRef>
+          <a:fillRef idx="3">
+            <a:schemeClr val="accent1"/>
+          </a:fillRef>
+          <a:effectRef idx="2">
+            <a:schemeClr val="accent1"/>
+          </a:effectRef>
+          <a:fontRef idx="minor">
+            <a:schemeClr val="lt1"/>
+          </a:fontRef>
+        </p:style>
+        <p:txBody>
+          <a:bodyPr rtlCol="0" anchor="ctr"/>
+          <a:lstStyle/>
+          <a:p>
+            <a:pPr algn="ctr"/>
+          </a:p>
+        </p:txBody>
+      </p:sp>
+      <p:sp>
+        <p:nvSpPr>
+          <p:cNvPr id="9" name="Rectangle 8"/>
+          <p:cNvSpPr/>
+          <p:nvPr/>
+        </p:nvSpPr>
+        <p:spPr>
+          <a:xfrm>
+            <a:off x="457200" y="2478024"/>
+            <a:ext cx="128016" cy="1051560"/>
+          </a:xfrm>
+          <a:prstGeom prst="rect">
+            <a:avLst/>
+          </a:prstGeom>
+          <a:solidFill>
+            <a:srgbClr val="FFD000"/>
+          </a:solidFill>
+          <a:ln>
+            <a:noFill/>
+          </a:ln>
+        </p:spPr>
+        <p:style>
+          <a:lnRef idx="1">
+            <a:schemeClr val="accent1"/>
+          </a:lnRef>
+          <a:fillRef idx="3">
+            <a:schemeClr val="accent1"/>
+          </a:fillRef>
+          <a:effectRef idx="2">
+            <a:schemeClr val="accent1"/>
+          </a:effectRef>
+          <a:fontRef idx="minor">
+            <a:schemeClr val="lt1"/>
+          </a:fontRef>
+        </p:style>
+        <p:txBody>
+          <a:bodyPr rtlCol="0" anchor="ctr"/>
+          <a:lstStyle/>
+          <a:p>
+            <a:pPr algn="ctr"/>
+          </a:p>
+        </p:txBody>
+      </p:sp>
+      <p:sp>
+        <p:nvSpPr>
+          <p:cNvPr id="10" name="TextBox 9"/>
+          <p:cNvSpPr txBox="1"/>
+          <p:nvPr/>
+        </p:nvSpPr>
+        <p:spPr>
+          <a:xfrm>
+            <a:off x="777240" y="2615184"/>
+            <a:ext cx="10774375" cy="822959"/>
+          </a:xfrm>
+          <a:prstGeom prst="rect">
+            <a:avLst/>
+          </a:prstGeom>
+          <a:noFill/>
+        </p:spPr>
+        <p:txBody>
+          <a:bodyPr wrap="square">
+            <a:spAutoFit/>
+          </a:bodyPr>
+          <a:lstStyle/>
+          <a:p>
+            <a:r>
+              <a:rPr sz="1200" b="1" i="0">
+                <a:solidFill>
+                  <a:srgbClr val="FFD000"/>
+                </a:solidFill>
+                <a:latin typeface="Calibri"/>
+              </a:rPr>
+              <a:t>Aclaración</a:t>
+            </a:r>
+          </a:p>
+          <a:p>
+            <a:pPr>
+              <a:spcBef>
+                <a:spcPts val="400"/>
+              </a:spcBef>
+            </a:pPr>
+            <a:r>
+              <a:rPr sz="1400" b="0" i="0">
+                <a:solidFill>
+                  <a:srgbClr val="333333"/>
+                </a:solidFill>
+                <a:latin typeface="Calibri"/>
+              </a:rPr>
+              <a:t>Enunciado completo: Clases/Proyecto Integrador/ (VetCare DB).</a:t>
+            </a:r>
+          </a:p>
+        </p:txBody>
+      </p:sp>
+      <p:sp>
+        <p:nvSpPr>
+          <p:cNvPr id="11" name="Rounded Rectangle 10"/>
+          <p:cNvSpPr/>
+          <p:nvPr/>
+        </p:nvSpPr>
+        <p:spPr>
+          <a:xfrm>
+            <a:off x="457200" y="3694176"/>
+            <a:ext cx="11277295" cy="1051560"/>
+          </a:xfrm>
+          <a:prstGeom prst="roundRect">
+            <a:avLst>
+              <a:gd name="adj" fmla="val 12000"/>
+            </a:avLst>
+          </a:prstGeom>
+          <a:solidFill>
+            <a:srgbClr val="FBE4E4"/>
+          </a:solidFill>
+          <a:ln>
+            <a:noFill/>
+          </a:ln>
+        </p:spPr>
+        <p:style>
+          <a:lnRef idx="1">
+            <a:schemeClr val="accent1"/>
+          </a:lnRef>
+          <a:fillRef idx="3">
+            <a:schemeClr val="accent1"/>
+          </a:fillRef>
+          <a:effectRef idx="2">
+            <a:schemeClr val="accent1"/>
+          </a:effectRef>
+          <a:fontRef idx="minor">
+            <a:schemeClr val="lt1"/>
+          </a:fontRef>
+        </p:style>
+        <p:txBody>
+          <a:bodyPr rtlCol="0" anchor="ctr"/>
+          <a:lstStyle/>
+          <a:p>
+            <a:pPr algn="ctr"/>
+          </a:p>
+        </p:txBody>
+      </p:sp>
+      <p:sp>
+        <p:nvSpPr>
+          <p:cNvPr id="12" name="Rectangle 11"/>
+          <p:cNvSpPr/>
+          <p:nvPr/>
+        </p:nvSpPr>
+        <p:spPr>
+          <a:xfrm>
+            <a:off x="457200" y="3694176"/>
+            <a:ext cx="128016" cy="1051560"/>
+          </a:xfrm>
+          <a:prstGeom prst="rect">
+            <a:avLst/>
+          </a:prstGeom>
+          <a:solidFill>
+            <a:srgbClr val="A02030"/>
+          </a:solidFill>
+          <a:ln>
+            <a:noFill/>
+          </a:ln>
+        </p:spPr>
+        <p:style>
+          <a:lnRef idx="1">
+            <a:schemeClr val="accent1"/>
+          </a:lnRef>
+          <a:fillRef idx="3">
+            <a:schemeClr val="accent1"/>
+          </a:fillRef>
+          <a:effectRef idx="2">
+            <a:schemeClr val="accent1"/>
+          </a:effectRef>
+          <a:fontRef idx="minor">
+            <a:schemeClr val="lt1"/>
+          </a:fontRef>
+        </p:style>
+        <p:txBody>
+          <a:bodyPr rtlCol="0" anchor="ctr"/>
+          <a:lstStyle/>
+          <a:p>
+            <a:pPr algn="ctr"/>
+          </a:p>
+        </p:txBody>
+      </p:sp>
+      <p:sp>
+        <p:nvSpPr>
+          <p:cNvPr id="13" name="TextBox 12"/>
+          <p:cNvSpPr txBox="1"/>
+          <p:nvPr/>
+        </p:nvSpPr>
+        <p:spPr>
+          <a:xfrm>
+            <a:off x="777240" y="3831336"/>
+            <a:ext cx="10774375" cy="822959"/>
+          </a:xfrm>
+          <a:prstGeom prst="rect">
+            <a:avLst/>
+          </a:prstGeom>
+          <a:noFill/>
+        </p:spPr>
+        <p:txBody>
+          <a:bodyPr wrap="square">
+            <a:spAutoFit/>
+          </a:bodyPr>
+          <a:lstStyle/>
+          <a:p>
+            <a:r>
+              <a:rPr sz="1200" b="1" i="0">
+                <a:solidFill>
+                  <a:srgbClr val="A02030"/>
+                </a:solidFill>
+                <a:latin typeface="Calibri"/>
+              </a:rPr>
+              <a:t>Atención</a:t>
+            </a:r>
+          </a:p>
+          <a:p>
+            <a:pPr>
+              <a:spcBef>
+                <a:spcPts val="400"/>
+              </a:spcBef>
+            </a:pPr>
+            <a:r>
+              <a:rPr sz="1400" b="0" i="0">
+                <a:solidFill>
+                  <a:srgbClr val="333333"/>
+                </a:solidFill>
+                <a:latin typeface="Calibri"/>
+              </a:rPr>
+              <a:t>Si el docente asigna taller esta semana, él indica el canal y la fecha.</a:t>
+            </a:r>
+          </a:p>
+        </p:txBody>
+      </p:sp>
+      <p:sp>
+        <p:nvSpPr>
+          <p:cNvPr id="14" name="TextBox 13"/>
+          <p:cNvSpPr txBox="1"/>
+          <p:nvPr/>
+        </p:nvSpPr>
+        <p:spPr>
+          <a:xfrm>
+            <a:off x="11185855" y="6473952"/>
+            <a:ext cx="640080" cy="274320"/>
+          </a:xfrm>
+          <a:prstGeom prst="rect">
+            <a:avLst/>
+          </a:prstGeom>
+          <a:noFill/>
+        </p:spPr>
+        <p:txBody>
+          <a:bodyPr wrap="square">
+            <a:spAutoFit/>
+          </a:bodyPr>
+          <a:lstStyle/>
+          <a:p>
+            <a:pPr algn="r"/>
+            <a:r>
+              <a:rPr sz="1100" b="0" i="0">
+                <a:solidFill>
+                  <a:srgbClr val="666666"/>
+                </a:solidFill>
+                <a:latin typeface="Calibri"/>
+              </a:rPr>
+              <a:t>35</a:t>
+            </a:r>
+          </a:p>
+        </p:txBody>
+      </p:sp>
+    </p:spTree>
+  </p:cSld>
+  <p:clrMapOvr>
+    <a:masterClrMapping/>
+  </p:clrMapOvr>
+</p:sld>
+</file>
+
+<file path=ppt/slides/slide36.xml><?xml version="1.0" encoding="utf-8"?>
 <p:sld xmlns:a="http://schemas.openxmlformats.org/drawingml/2006/main" xmlns:p="http://schemas.openxmlformats.org/presentationml/2006/main" xmlns:r="http://schemas.openxmlformats.org/officeDocument/2006/relationships">
   <p:cSld>
     <p:bg>

--- a/Bases de Datos II/Clases/Clase 12 - Integracion y preparacion final/Presentacion.pptx
+++ b/Bases de Datos II/Clases/Clase 12 - Integracion y preparacion final/Presentacion.pptx
@@ -9,38 +9,30 @@
     <p:sldId id="257" r:id="rId8"/>
     <p:sldId id="258" r:id="rId9"/>
     <p:sldId id="259" r:id="rId10"/>
-    <p:sldId id="260" r:id="rId11"/>
-    <p:sldId id="261" r:id="rId12"/>
-    <p:sldId id="262" r:id="rId13"/>
-    <p:sldId id="263" r:id="rId14"/>
-    <p:sldId id="264" r:id="rId15"/>
-    <p:sldId id="265" r:id="rId16"/>
-    <p:sldId id="266" r:id="rId17"/>
-    <p:sldId id="267" r:id="rId18"/>
-    <p:sldId id="268" r:id="rId19"/>
-    <p:sldId id="269" r:id="rId20"/>
-    <p:sldId id="270" r:id="rId21"/>
-    <p:sldId id="271" r:id="rId22"/>
-    <p:sldId id="272" r:id="rId23"/>
-    <p:sldId id="273" r:id="rId24"/>
-    <p:sldId id="274" r:id="rId25"/>
-    <p:sldId id="275" r:id="rId26"/>
-    <p:sldId id="276" r:id="rId27"/>
-    <p:sldId id="277" r:id="rId28"/>
-    <p:sldId id="278" r:id="rId29"/>
-    <p:sldId id="279" r:id="rId30"/>
-    <p:sldId id="280" r:id="rId31"/>
-    <p:sldId id="281" r:id="rId32"/>
-    <p:sldId id="282" r:id="rId33"/>
-    <p:sldId id="283" r:id="rId34"/>
-    <p:sldId id="284" r:id="rId35"/>
-    <p:sldId id="285" r:id="rId36"/>
-    <p:sldId id="286" r:id="rId37"/>
-    <p:sldId id="287" r:id="rId38"/>
-    <p:sldId id="288" r:id="rId39"/>
-    <p:sldId id="289" r:id="rId40"/>
-    <p:sldId id="290" r:id="rId41"/>
-    <p:sldId id="291" r:id="rId42"/>
+    <p:sldId id="260" r:id="rId12"/>
+    <p:sldId id="261" r:id="rId13"/>
+    <p:sldId id="262" r:id="rId14"/>
+    <p:sldId id="263" r:id="rId15"/>
+    <p:sldId id="264" r:id="rId16"/>
+    <p:sldId id="265" r:id="rId17"/>
+    <p:sldId id="266" r:id="rId18"/>
+    <p:sldId id="267" r:id="rId19"/>
+    <p:sldId id="268" r:id="rId20"/>
+    <p:sldId id="269" r:id="rId21"/>
+    <p:sldId id="270" r:id="rId22"/>
+    <p:sldId id="271" r:id="rId23"/>
+    <p:sldId id="272" r:id="rId24"/>
+    <p:sldId id="273" r:id="rId25"/>
+    <p:sldId id="274" r:id="rId26"/>
+    <p:sldId id="275" r:id="rId27"/>
+    <p:sldId id="276" r:id="rId28"/>
+    <p:sldId id="277" r:id="rId29"/>
+    <p:sldId id="278" r:id="rId30"/>
+    <p:sldId id="279" r:id="rId31"/>
+    <p:sldId id="280" r:id="rId32"/>
+    <p:sldId id="281" r:id="rId33"/>
+    <p:sldId id="282" r:id="rId34"/>
+    <p:sldId id="283" r:id="rId35"/>
   </p:sldIdLst>
   <p:sldSz cx="12191695" cy="6858000" type="screen4x3"/>
   <p:notesSz cx="6858000" cy="9144000"/>
@@ -140,6 +132,991 @@
     </a:lvl9pPr>
   </p:defaultTextStyle>
 </p:presentation>
+</file>
+
+<file path=ppt/notesMasters/notesMaster1.xml><?xml version="1.0" encoding="utf-8"?>
+<p:notesMaster xmlns:a="http://schemas.openxmlformats.org/drawingml/2006/main" xmlns:p="http://schemas.openxmlformats.org/presentationml/2006/main" xmlns:r="http://schemas.openxmlformats.org/officeDocument/2006/relationships">
+  <p:cSld>
+    <p:bg>
+      <p:bgRef idx="1001">
+        <a:schemeClr val="bg1"/>
+      </p:bgRef>
+    </p:bg>
+    <p:spTree>
+      <p:nvGrpSpPr>
+        <p:cNvPr id="1" name=""/>
+        <p:cNvGrpSpPr/>
+        <p:nvPr/>
+      </p:nvGrpSpPr>
+      <p:grpSpPr>
+        <a:xfrm>
+          <a:off x="0" y="0"/>
+          <a:ext cx="0" cy="0"/>
+          <a:chOff x="0" y="0"/>
+          <a:chExt cx="0" cy="0"/>
+        </a:xfrm>
+      </p:grpSpPr>
+      <p:sp>
+        <p:nvSpPr>
+          <p:cNvPr id="2" name="Header Placeholder 1"/>
+          <p:cNvSpPr>
+            <a:spLocks noGrp="1"/>
+          </p:cNvSpPr>
+          <p:nvPr>
+            <p:ph type="hdr" sz="quarter"/>
+          </p:nvPr>
+        </p:nvSpPr>
+        <p:spPr>
+          <a:xfrm>
+            <a:off x="0" y="0"/>
+            <a:ext cx="2971800" cy="457200"/>
+          </a:xfrm>
+          <a:prstGeom prst="rect">
+            <a:avLst/>
+          </a:prstGeom>
+        </p:spPr>
+        <p:txBody>
+          <a:bodyPr vert="horz" lIns="91440" tIns="45720" rIns="91440" bIns="45720" rtlCol="0"/>
+          <a:lstStyle>
+            <a:lvl1pPr algn="l">
+              <a:defRPr sz="1200"/>
+            </a:lvl1pPr>
+          </a:lstStyle>
+          <a:p>
+            <a:endParaRPr lang="en-US"/>
+          </a:p>
+        </p:txBody>
+      </p:sp>
+      <p:sp>
+        <p:nvSpPr>
+          <p:cNvPr id="3" name="Date Placeholder 2"/>
+          <p:cNvSpPr>
+            <a:spLocks noGrp="1"/>
+          </p:cNvSpPr>
+          <p:nvPr>
+            <p:ph type="dt" idx="1"/>
+          </p:nvPr>
+        </p:nvSpPr>
+        <p:spPr>
+          <a:xfrm>
+            <a:off x="3884613" y="0"/>
+            <a:ext cx="2971800" cy="457200"/>
+          </a:xfrm>
+          <a:prstGeom prst="rect">
+            <a:avLst/>
+          </a:prstGeom>
+        </p:spPr>
+        <p:txBody>
+          <a:bodyPr vert="horz" lIns="91440" tIns="45720" rIns="91440" bIns="45720" rtlCol="0"/>
+          <a:lstStyle>
+            <a:lvl1pPr algn="r">
+              <a:defRPr sz="1200"/>
+            </a:lvl1pPr>
+          </a:lstStyle>
+          <a:p>
+            <a:fld id="{0F89C1C7-3DCD-1040-A9CF-14679D8B5DDD}" type="datetimeFigureOut">
+              <a:rPr lang="en-US" smtClean="0"/>
+              <a:t>10/17/16</a:t>
+            </a:fld>
+            <a:endParaRPr lang="en-US"/>
+          </a:p>
+        </p:txBody>
+      </p:sp>
+      <p:sp>
+        <p:nvSpPr>
+          <p:cNvPr id="4" name="Slide Image Placeholder 3"/>
+          <p:cNvSpPr>
+            <a:spLocks noGrp="1" noRot="1" noChangeAspect="1"/>
+          </p:cNvSpPr>
+          <p:nvPr>
+            <p:ph type="sldImg" idx="2"/>
+          </p:nvPr>
+        </p:nvSpPr>
+        <p:spPr>
+          <a:xfrm>
+            <a:off x="1143000" y="685800"/>
+            <a:ext cx="4572000" cy="3429000"/>
+          </a:xfrm>
+          <a:prstGeom prst="rect">
+            <a:avLst/>
+          </a:prstGeom>
+          <a:noFill/>
+          <a:ln w="12700">
+            <a:solidFill>
+              <a:prstClr val="black"/>
+            </a:solidFill>
+          </a:ln>
+        </p:spPr>
+        <p:txBody>
+          <a:bodyPr vert="horz" lIns="91440" tIns="45720" rIns="91440" bIns="45720" rtlCol="0" anchor="ctr"/>
+          <a:lstStyle/>
+          <a:p>
+            <a:endParaRPr lang="en-US"/>
+          </a:p>
+        </p:txBody>
+      </p:sp>
+      <p:sp>
+        <p:nvSpPr>
+          <p:cNvPr id="5" name="Notes Placeholder 4"/>
+          <p:cNvSpPr>
+            <a:spLocks noGrp="1"/>
+          </p:cNvSpPr>
+          <p:nvPr>
+            <p:ph type="body" sz="quarter" idx="3"/>
+          </p:nvPr>
+        </p:nvSpPr>
+        <p:spPr>
+          <a:xfrm>
+            <a:off x="685800" y="4343400"/>
+            <a:ext cx="5486400" cy="4114800"/>
+          </a:xfrm>
+          <a:prstGeom prst="rect">
+            <a:avLst/>
+          </a:prstGeom>
+        </p:spPr>
+        <p:txBody>
+          <a:bodyPr vert="horz" lIns="91440" tIns="45720" rIns="91440" bIns="45720" rtlCol="0"/>
+          <a:lstStyle/>
+          <a:p>
+            <a:pPr lvl="0"/>
+            <a:r>
+              <a:rPr lang="en-US" smtClean="0"/>
+              <a:t>Click to edit Master text styles</a:t>
+            </a:r>
+          </a:p>
+          <a:p>
+            <a:pPr lvl="1"/>
+            <a:r>
+              <a:rPr lang="en-US" smtClean="0"/>
+              <a:t>Second level</a:t>
+            </a:r>
+          </a:p>
+          <a:p>
+            <a:pPr lvl="2"/>
+            <a:r>
+              <a:rPr lang="en-US" smtClean="0"/>
+              <a:t>Third level</a:t>
+            </a:r>
+          </a:p>
+          <a:p>
+            <a:pPr lvl="3"/>
+            <a:r>
+              <a:rPr lang="en-US" smtClean="0"/>
+              <a:t>Fourth level</a:t>
+            </a:r>
+          </a:p>
+          <a:p>
+            <a:pPr lvl="4"/>
+            <a:r>
+              <a:rPr lang="en-US" smtClean="0"/>
+              <a:t>Fifth level</a:t>
+            </a:r>
+            <a:endParaRPr lang="en-US"/>
+          </a:p>
+        </p:txBody>
+      </p:sp>
+      <p:sp>
+        <p:nvSpPr>
+          <p:cNvPr id="6" name="Footer Placeholder 5"/>
+          <p:cNvSpPr>
+            <a:spLocks noGrp="1"/>
+          </p:cNvSpPr>
+          <p:nvPr>
+            <p:ph type="ftr" sz="quarter" idx="4"/>
+          </p:nvPr>
+        </p:nvSpPr>
+        <p:spPr>
+          <a:xfrm>
+            <a:off x="0" y="8685213"/>
+            <a:ext cx="2971800" cy="457200"/>
+          </a:xfrm>
+          <a:prstGeom prst="rect">
+            <a:avLst/>
+          </a:prstGeom>
+        </p:spPr>
+        <p:txBody>
+          <a:bodyPr vert="horz" lIns="91440" tIns="45720" rIns="91440" bIns="45720" rtlCol="0" anchor="b"/>
+          <a:lstStyle>
+            <a:lvl1pPr algn="l">
+              <a:defRPr sz="1200"/>
+            </a:lvl1pPr>
+          </a:lstStyle>
+          <a:p>
+            <a:endParaRPr lang="en-US"/>
+          </a:p>
+        </p:txBody>
+      </p:sp>
+      <p:sp>
+        <p:nvSpPr>
+          <p:cNvPr id="7" name="Slide Number Placeholder 6"/>
+          <p:cNvSpPr>
+            <a:spLocks noGrp="1"/>
+          </p:cNvSpPr>
+          <p:nvPr>
+            <p:ph type="sldNum" sz="quarter" idx="5"/>
+          </p:nvPr>
+        </p:nvSpPr>
+        <p:spPr>
+          <a:xfrm>
+            <a:off x="3884613" y="8685213"/>
+            <a:ext cx="2971800" cy="457200"/>
+          </a:xfrm>
+          <a:prstGeom prst="rect">
+            <a:avLst/>
+          </a:prstGeom>
+        </p:spPr>
+        <p:txBody>
+          <a:bodyPr vert="horz" lIns="91440" tIns="45720" rIns="91440" bIns="45720" rtlCol="0" anchor="b"/>
+          <a:lstStyle>
+            <a:lvl1pPr algn="r">
+              <a:defRPr sz="1200"/>
+            </a:lvl1pPr>
+          </a:lstStyle>
+          <a:p>
+            <a:fld id="{BB5E49A5-4136-284D-997B-48E1D791AD67}" type="slidenum">
+              <a:rPr lang="en-US" smtClean="0"/>
+              <a:t>‹#›</a:t>
+            </a:fld>
+            <a:endParaRPr lang="en-US"/>
+          </a:p>
+        </p:txBody>
+      </p:sp>
+    </p:spTree>
+    <p:extLst>
+      <p:ext uri="{BB962C8B-B14F-4D97-AF65-F5344CB8AC3E}">
+        <p14:creationId xmlns:p14="http://schemas.microsoft.com/office/powerpoint/2010/main" val="2623252185"/>
+      </p:ext>
+    </p:extLst>
+  </p:cSld>
+  <p:clrMap bg1="lt1" tx1="dk1" bg2="lt2" tx2="dk2" accent1="accent1" accent2="accent2" accent3="accent3" accent4="accent4" accent5="accent5" accent6="accent6" hlink="hlink" folHlink="folHlink"/>
+  <p:notesStyle>
+    <a:lvl1pPr marL="0" algn="l" defTabSz="457200" rtl="0" eaLnBrk="1" latinLnBrk="0" hangingPunct="1">
+      <a:defRPr sz="1200" kern="1200">
+        <a:solidFill>
+          <a:schemeClr val="tx1"/>
+        </a:solidFill>
+        <a:latin typeface="+mn-lt"/>
+        <a:ea typeface="+mn-ea"/>
+        <a:cs typeface="+mn-cs"/>
+      </a:defRPr>
+    </a:lvl1pPr>
+    <a:lvl2pPr marL="457200" algn="l" defTabSz="457200" rtl="0" eaLnBrk="1" latinLnBrk="0" hangingPunct="1">
+      <a:defRPr sz="1200" kern="1200">
+        <a:solidFill>
+          <a:schemeClr val="tx1"/>
+        </a:solidFill>
+        <a:latin typeface="+mn-lt"/>
+        <a:ea typeface="+mn-ea"/>
+        <a:cs typeface="+mn-cs"/>
+      </a:defRPr>
+    </a:lvl2pPr>
+    <a:lvl3pPr marL="914400" algn="l" defTabSz="457200" rtl="0" eaLnBrk="1" latinLnBrk="0" hangingPunct="1">
+      <a:defRPr sz="1200" kern="1200">
+        <a:solidFill>
+          <a:schemeClr val="tx1"/>
+        </a:solidFill>
+        <a:latin typeface="+mn-lt"/>
+        <a:ea typeface="+mn-ea"/>
+        <a:cs typeface="+mn-cs"/>
+      </a:defRPr>
+    </a:lvl3pPr>
+    <a:lvl4pPr marL="1371600" algn="l" defTabSz="457200" rtl="0" eaLnBrk="1" latinLnBrk="0" hangingPunct="1">
+      <a:defRPr sz="1200" kern="1200">
+        <a:solidFill>
+          <a:schemeClr val="tx1"/>
+        </a:solidFill>
+        <a:latin typeface="+mn-lt"/>
+        <a:ea typeface="+mn-ea"/>
+        <a:cs typeface="+mn-cs"/>
+      </a:defRPr>
+    </a:lvl4pPr>
+    <a:lvl5pPr marL="1828800" algn="l" defTabSz="457200" rtl="0" eaLnBrk="1" latinLnBrk="0" hangingPunct="1">
+      <a:defRPr sz="1200" kern="1200">
+        <a:solidFill>
+          <a:schemeClr val="tx1"/>
+        </a:solidFill>
+        <a:latin typeface="+mn-lt"/>
+        <a:ea typeface="+mn-ea"/>
+        <a:cs typeface="+mn-cs"/>
+      </a:defRPr>
+    </a:lvl5pPr>
+    <a:lvl6pPr marL="2286000" algn="l" defTabSz="457200" rtl="0" eaLnBrk="1" latinLnBrk="0" hangingPunct="1">
+      <a:defRPr sz="1200" kern="1200">
+        <a:solidFill>
+          <a:schemeClr val="tx1"/>
+        </a:solidFill>
+        <a:latin typeface="+mn-lt"/>
+        <a:ea typeface="+mn-ea"/>
+        <a:cs typeface="+mn-cs"/>
+      </a:defRPr>
+    </a:lvl6pPr>
+    <a:lvl7pPr marL="2743200" algn="l" defTabSz="457200" rtl="0" eaLnBrk="1" latinLnBrk="0" hangingPunct="1">
+      <a:defRPr sz="1200" kern="1200">
+        <a:solidFill>
+          <a:schemeClr val="tx1"/>
+        </a:solidFill>
+        <a:latin typeface="+mn-lt"/>
+        <a:ea typeface="+mn-ea"/>
+        <a:cs typeface="+mn-cs"/>
+      </a:defRPr>
+    </a:lvl7pPr>
+    <a:lvl8pPr marL="3200400" algn="l" defTabSz="457200" rtl="0" eaLnBrk="1" latinLnBrk="0" hangingPunct="1">
+      <a:defRPr sz="1200" kern="1200">
+        <a:solidFill>
+          <a:schemeClr val="tx1"/>
+        </a:solidFill>
+        <a:latin typeface="+mn-lt"/>
+        <a:ea typeface="+mn-ea"/>
+        <a:cs typeface="+mn-cs"/>
+      </a:defRPr>
+    </a:lvl8pPr>
+    <a:lvl9pPr marL="3657600" algn="l" defTabSz="457200" rtl="0" eaLnBrk="1" latinLnBrk="0" hangingPunct="1">
+      <a:defRPr sz="1200" kern="1200">
+        <a:solidFill>
+          <a:schemeClr val="tx1"/>
+        </a:solidFill>
+        <a:latin typeface="+mn-lt"/>
+        <a:ea typeface="+mn-ea"/>
+        <a:cs typeface="+mn-cs"/>
+      </a:defRPr>
+    </a:lvl9pPr>
+  </p:notesStyle>
+</p:notesMaster>
+</file>
+
+<file path=ppt/notesSlides/notesSlide1.xml><?xml version="1.0" encoding="utf-8"?>
+<p:notes xmlns:a="http://schemas.openxmlformats.org/drawingml/2006/main" xmlns:p="http://schemas.openxmlformats.org/presentationml/2006/main" xmlns:r="http://schemas.openxmlformats.org/officeDocument/2006/relationships">
+  <p:cSld>
+    <p:spTree>
+      <p:nvGrpSpPr>
+        <p:cNvPr id="1" name=""/>
+        <p:cNvGrpSpPr/>
+        <p:nvPr/>
+      </p:nvGrpSpPr>
+      <p:grpSpPr>
+        <a:xfrm>
+          <a:off x="0" y="0"/>
+          <a:ext cx="0" cy="0"/>
+          <a:chOff x="0" y="0"/>
+          <a:chExt cx="0" cy="0"/>
+        </a:xfrm>
+      </p:grpSpPr>
+      <p:sp>
+        <p:nvSpPr>
+          <p:cNvPr id="2" name="Slide Image Placeholder 1"/>
+          <p:cNvSpPr>
+            <a:spLocks noGrp="1"/>
+          </p:cNvSpPr>
+          <p:nvPr>
+            <p:ph type="sldImg" idx="2"/>
+          </p:nvPr>
+        </p:nvSpPr>
+        <p:spPr/>
+      </p:sp>
+      <p:sp>
+        <p:nvSpPr>
+          <p:cNvPr id="3" name="Notes Placeholder 2"/>
+          <p:cNvSpPr>
+            <a:spLocks noGrp="1"/>
+          </p:cNvSpPr>
+          <p:nvPr>
+            <p:ph type="body" idx="3" sz="quarter"/>
+          </p:nvPr>
+        </p:nvSpPr>
+        <p:spPr/>
+        <p:txBody>
+          <a:bodyPr/>
+          <a:lstStyle/>
+          <a:p>
+            <a:r>
+              <a:t>Esa puerta es la interfaz app-BD y el documento que la describe es el contrato.</a:t>
+            </a:r>
+          </a:p>
+          <a:p>
+            <a:r>
+              <a:t>Hay exactamente dos formas de construirla.</a:t>
+            </a:r>
+          </a:p>
+          <a:p>
+            <a:r>
+              <a:t>Todo lo demas de esta clase se deriva de esa decision.</a:t>
+            </a:r>
+          </a:p>
+        </p:txBody>
+      </p:sp>
+      <p:sp>
+        <p:nvSpPr>
+          <p:cNvPr id="4" name="Slide Number Placeholder 3"/>
+          <p:cNvSpPr>
+            <a:spLocks noGrp="1"/>
+          </p:cNvSpPr>
+          <p:nvPr>
+            <p:ph type="sldNum" idx="5" sz="quarter"/>
+          </p:nvPr>
+        </p:nvSpPr>
+        <p:spPr/>
+      </p:sp>
+    </p:spTree>
+  </p:cSld>
+  <p:clrMapOvr>
+    <a:masterClrMapping/>
+  </p:clrMapOvr>
+</p:notes>
+</file>
+
+<file path=ppt/notesSlides/notesSlide2.xml><?xml version="1.0" encoding="utf-8"?>
+<p:notes xmlns:a="http://schemas.openxmlformats.org/drawingml/2006/main" xmlns:p="http://schemas.openxmlformats.org/presentationml/2006/main" xmlns:r="http://schemas.openxmlformats.org/officeDocument/2006/relationships">
+  <p:cSld>
+    <p:spTree>
+      <p:nvGrpSpPr>
+        <p:cNvPr id="1" name=""/>
+        <p:cNvGrpSpPr/>
+        <p:nvPr/>
+      </p:nvGrpSpPr>
+      <p:grpSpPr>
+        <a:xfrm>
+          <a:off x="0" y="0"/>
+          <a:ext cx="0" cy="0"/>
+          <a:chOff x="0" y="0"/>
+          <a:chExt cx="0" cy="0"/>
+        </a:xfrm>
+      </p:grpSpPr>
+      <p:sp>
+        <p:nvSpPr>
+          <p:cNvPr id="2" name="Slide Image Placeholder 1"/>
+          <p:cNvSpPr>
+            <a:spLocks noGrp="1"/>
+          </p:cNvSpPr>
+          <p:nvPr>
+            <p:ph type="sldImg" idx="2"/>
+          </p:nvPr>
+        </p:nvSpPr>
+        <p:spPr/>
+      </p:sp>
+      <p:sp>
+        <p:nvSpPr>
+          <p:cNvPr id="3" name="Notes Placeholder 2"/>
+          <p:cNvSpPr>
+            <a:spLocks noGrp="1"/>
+          </p:cNvSpPr>
+          <p:nvPr>
+            <p:ph type="body" idx="3" sz="quarter"/>
+          </p:nvPr>
+        </p:nvSpPr>
+        <p:spPr/>
+        <p:txBody>
+          <a:bodyPr/>
+          <a:lstStyle/>
+          <a:p>
+            <a:r>
+              <a:t>Concretemoslo en VetCare.</a:t>
+            </a:r>
+          </a:p>
+          <a:p>
+            <a:r>
+              <a:t>El buscador de mascotas de la recepcion arma la consulta pegando la entrada del usuario, de modo que el motor recibe</a:t>
+            </a:r>
+          </a:p>
+          <a:p>
+            <a:r>
+              <a:t>Si la recepcionista escribe Luna, el motor recibe WHERE nombre = 'Luna', devuelve una fila, todo parece correcto y la aplicacion pasa a produccion.</a:t>
+            </a:r>
+          </a:p>
+          <a:p>
+            <a:r>
+              <a:t>Conviene una precision honesta, porque la hara un estudiante: en Oracle no se apilan dos sentencias en una misma llamada, asi que el clasico punto y coma seguido de DROP TABLE Cita no se comporta como en otros motores; lo que si funciona, y basta para un incidente reportable, es leer datos ajenos, saltarse un acceso o modificar informacion cuando la aplicacion ejecuta PL/SQL dinamico.</a:t>
+            </a:r>
+          </a:p>
+        </p:txBody>
+      </p:sp>
+      <p:sp>
+        <p:nvSpPr>
+          <p:cNvPr id="4" name="Slide Number Placeholder 3"/>
+          <p:cNvSpPr>
+            <a:spLocks noGrp="1"/>
+          </p:cNvSpPr>
+          <p:nvPr>
+            <p:ph type="sldNum" idx="5" sz="quarter"/>
+          </p:nvPr>
+        </p:nvSpPr>
+        <p:spPr/>
+      </p:sp>
+    </p:spTree>
+  </p:cSld>
+  <p:clrMapOvr>
+    <a:masterClrMapping/>
+  </p:clrMapOvr>
+</p:notes>
+</file>
+
+<file path=ppt/notesSlides/notesSlide3.xml><?xml version="1.0" encoding="utf-8"?>
+<p:notes xmlns:a="http://schemas.openxmlformats.org/drawingml/2006/main" xmlns:p="http://schemas.openxmlformats.org/presentationml/2006/main" xmlns:r="http://schemas.openxmlformats.org/officeDocument/2006/relationships">
+  <p:cSld>
+    <p:spTree>
+      <p:nvGrpSpPr>
+        <p:cNvPr id="1" name=""/>
+        <p:cNvGrpSpPr/>
+        <p:nvPr/>
+      </p:nvGrpSpPr>
+      <p:grpSpPr>
+        <a:xfrm>
+          <a:off x="0" y="0"/>
+          <a:ext cx="0" cy="0"/>
+          <a:chOff x="0" y="0"/>
+          <a:chExt cx="0" cy="0"/>
+        </a:xfrm>
+      </p:grpSpPr>
+      <p:sp>
+        <p:nvSpPr>
+          <p:cNvPr id="2" name="Slide Image Placeholder 1"/>
+          <p:cNvSpPr>
+            <a:spLocks noGrp="1"/>
+          </p:cNvSpPr>
+          <p:nvPr>
+            <p:ph type="sldImg" idx="2"/>
+          </p:nvPr>
+        </p:nvSpPr>
+        <p:spPr/>
+      </p:sp>
+      <p:sp>
+        <p:nvSpPr>
+          <p:cNvPr id="3" name="Notes Placeholder 2"/>
+          <p:cNvSpPr>
+            <a:spLocks noGrp="1"/>
+          </p:cNvSpPr>
+          <p:nvPr>
+            <p:ph type="body" idx="3" sz="quarter"/>
+          </p:nvPr>
+        </p:nvSpPr>
+        <p:spPr/>
+        <p:txBody>
+          <a:bodyPr/>
+          <a:lstStyle/>
+          <a:p>
+            <a:r>
+              <a:t>La inyeccion queda imposible, no improbable, y esa diferencia entre imposible e improbable es la que hay que instalar.</a:t>
+            </a:r>
+          </a:p>
+          <a:p>
+            <a:r>
+              <a:t>La respuesta honesta es que si mientras use los metodos del ORM o consultas con parametros nombrados, y que no en el momento en que arme una consulta nativa concatenando texto, porque el ORM no revisa lo que usted le entrega.</a:t>
+            </a:r>
+          </a:p>
+          <a:p>
+            <a:r>
+              <a:t>La vulnerabilidad no la produce la tecnologia sino la concatenacion.</a:t>
+            </a:r>
+          </a:p>
+        </p:txBody>
+      </p:sp>
+      <p:sp>
+        <p:nvSpPr>
+          <p:cNvPr id="4" name="Slide Number Placeholder 3"/>
+          <p:cNvSpPr>
+            <a:spLocks noGrp="1"/>
+          </p:cNvSpPr>
+          <p:nvPr>
+            <p:ph type="sldNum" idx="5" sz="quarter"/>
+          </p:nvPr>
+        </p:nvSpPr>
+        <p:spPr/>
+      </p:sp>
+    </p:spTree>
+  </p:cSld>
+  <p:clrMapOvr>
+    <a:masterClrMapping/>
+  </p:clrMapOvr>
+</p:notes>
+</file>
+
+<file path=ppt/notesSlides/notesSlide4.xml><?xml version="1.0" encoding="utf-8"?>
+<p:notes xmlns:a="http://schemas.openxmlformats.org/drawingml/2006/main" xmlns:p="http://schemas.openxmlformats.org/presentationml/2006/main" xmlns:r="http://schemas.openxmlformats.org/officeDocument/2006/relationships">
+  <p:cSld>
+    <p:spTree>
+      <p:nvGrpSpPr>
+        <p:cNvPr id="1" name=""/>
+        <p:cNvGrpSpPr/>
+        <p:nvPr/>
+      </p:nvGrpSpPr>
+      <p:grpSpPr>
+        <a:xfrm>
+          <a:off x="0" y="0"/>
+          <a:ext cx="0" cy="0"/>
+          <a:chOff x="0" y="0"/>
+          <a:chExt cx="0" cy="0"/>
+        </a:xfrm>
+      </p:grpSpPr>
+      <p:sp>
+        <p:nvSpPr>
+          <p:cNvPr id="2" name="Slide Image Placeholder 1"/>
+          <p:cNvSpPr>
+            <a:spLocks noGrp="1"/>
+          </p:cNvSpPr>
+          <p:nvPr>
+            <p:ph type="sldImg" idx="2"/>
+          </p:nvPr>
+        </p:nvSpPr>
+        <p:spPr/>
+      </p:sp>
+      <p:sp>
+        <p:nvSpPr>
+          <p:cNvPr id="3" name="Notes Placeholder 2"/>
+          <p:cNvSpPr>
+            <a:spLocks noGrp="1"/>
+          </p:cNvSpPr>
+          <p:nvPr>
+            <p:ph type="body" idx="3" sz="quarter"/>
+          </p:nvPr>
+        </p:nvSpPr>
+        <p:spPr/>
+        <p:txBody>
+          <a:bodyPr/>
+          <a:lstStyle/>
+          <a:p>
+            <a:r>
+              <a:t>La lista de errores posibles con codigo y significado.</a:t>
+            </a:r>
+          </a:p>
+          <a:p>
+            <a:r>
+              <a:t>Y la version.</a:t>
+            </a:r>
+          </a:p>
+          <a:p>
+            <a:r>
+              <a:t>Idempotente significa que ejecutar la operacion dos veces con los mismos datos deja el sistema igual que ejecutarla una sola vez.</a:t>
+            </a:r>
+          </a:p>
+        </p:txBody>
+      </p:sp>
+      <p:sp>
+        <p:nvSpPr>
+          <p:cNvPr id="4" name="Slide Number Placeholder 3"/>
+          <p:cNvSpPr>
+            <a:spLocks noGrp="1"/>
+          </p:cNvSpPr>
+          <p:nvPr>
+            <p:ph type="sldNum" idx="5" sz="quarter"/>
+          </p:nvPr>
+        </p:nvSpPr>
+        <p:spPr/>
+      </p:sp>
+    </p:spTree>
+  </p:cSld>
+  <p:clrMapOvr>
+    <a:masterClrMapping/>
+  </p:clrMapOvr>
+</p:notes>
+</file>
+
+<file path=ppt/notesSlides/notesSlide5.xml><?xml version="1.0" encoding="utf-8"?>
+<p:notes xmlns:a="http://schemas.openxmlformats.org/drawingml/2006/main" xmlns:p="http://schemas.openxmlformats.org/presentationml/2006/main" xmlns:r="http://schemas.openxmlformats.org/officeDocument/2006/relationships">
+  <p:cSld>
+    <p:spTree>
+      <p:nvGrpSpPr>
+        <p:cNvPr id="1" name=""/>
+        <p:cNvGrpSpPr/>
+        <p:nvPr/>
+      </p:nvGrpSpPr>
+      <p:grpSpPr>
+        <a:xfrm>
+          <a:off x="0" y="0"/>
+          <a:ext cx="0" cy="0"/>
+          <a:chOff x="0" y="0"/>
+          <a:chExt cx="0" cy="0"/>
+        </a:xfrm>
+      </p:grpSpPr>
+      <p:sp>
+        <p:nvSpPr>
+          <p:cNvPr id="2" name="Slide Image Placeholder 1"/>
+          <p:cNvSpPr>
+            <a:spLocks noGrp="1"/>
+          </p:cNvSpPr>
+          <p:nvPr>
+            <p:ph type="sldImg" idx="2"/>
+          </p:nvPr>
+        </p:nvSpPr>
+        <p:spPr/>
+      </p:sp>
+      <p:sp>
+        <p:nvSpPr>
+          <p:cNvPr id="3" name="Notes Placeholder 2"/>
+          <p:cNvSpPr>
+            <a:spLocks noGrp="1"/>
+          </p:cNvSpPr>
+          <p:nvPr>
+            <p:ph type="body" idx="3" sz="quarter"/>
+          </p:nvPr>
+        </p:nvSpPr>
+        <p:spPr/>
+        <p:txBody>
+          <a:bodyPr/>
+          <a:lstStyle/>
+          <a:p>
+            <a:r>
+              <a:t>El manejo de errores entre capas se resuelve con tres reglas.</a:t>
+            </a:r>
+          </a:p>
+          <a:p>
+            <a:r>
+              <a:t>La operacion de negocio completa, con todas sus validaciones y sus insercciones, vive dentro de un solo procedimiento, y ese procedimiento hace COMMIT si todo salio bien o ROLLBACK si algo fallo; la aplicacion no confirma a la mitad.</a:t>
+            </a:r>
+          </a:p>
+        </p:txBody>
+      </p:sp>
+      <p:sp>
+        <p:nvSpPr>
+          <p:cNvPr id="4" name="Slide Number Placeholder 3"/>
+          <p:cNvSpPr>
+            <a:spLocks noGrp="1"/>
+          </p:cNvSpPr>
+          <p:nvPr>
+            <p:ph type="sldNum" idx="5" sz="quarter"/>
+          </p:nvPr>
+        </p:nvSpPr>
+        <p:spPr/>
+      </p:sp>
+    </p:spTree>
+  </p:cSld>
+  <p:clrMapOvr>
+    <a:masterClrMapping/>
+  </p:clrMapOvr>
+</p:notes>
+</file>
+
+<file path=ppt/notesSlides/notesSlide6.xml><?xml version="1.0" encoding="utf-8"?>
+<p:notes xmlns:a="http://schemas.openxmlformats.org/drawingml/2006/main" xmlns:p="http://schemas.openxmlformats.org/presentationml/2006/main" xmlns:r="http://schemas.openxmlformats.org/officeDocument/2006/relationships">
+  <p:cSld>
+    <p:spTree>
+      <p:nvGrpSpPr>
+        <p:cNvPr id="1" name=""/>
+        <p:cNvGrpSpPr/>
+        <p:nvPr/>
+      </p:nvGrpSpPr>
+      <p:grpSpPr>
+        <a:xfrm>
+          <a:off x="0" y="0"/>
+          <a:ext cx="0" cy="0"/>
+          <a:chOff x="0" y="0"/>
+          <a:chExt cx="0" cy="0"/>
+        </a:xfrm>
+      </p:grpSpPr>
+      <p:sp>
+        <p:nvSpPr>
+          <p:cNvPr id="2" name="Slide Image Placeholder 1"/>
+          <p:cNvSpPr>
+            <a:spLocks noGrp="1"/>
+          </p:cNvSpPr>
+          <p:nvPr>
+            <p:ph type="sldImg" idx="2"/>
+          </p:nvPr>
+        </p:nvSpPr>
+        <p:spPr/>
+      </p:sp>
+      <p:sp>
+        <p:nvSpPr>
+          <p:cNvPr id="3" name="Notes Placeholder 2"/>
+          <p:cNvSpPr>
+            <a:spLocks noGrp="1"/>
+          </p:cNvSpPr>
+          <p:nvPr>
+            <p:ph type="body" idx="3" sz="quarter"/>
+          </p:nvPr>
+        </p:nvSpPr>
+        <p:spPr/>
+        <p:txBody>
+          <a:bodyPr/>
+          <a:lstStyle/>
+          <a:p>
+            <a:r>
+              <a:t>Tomar una conexion prestada del pool cuesta una fraccion de milisegundo.</a:t>
+            </a:r>
+          </a:p>
+          <a:p>
+            <a:r>
+              <a:t>De ahi salen dos consecuencias.</a:t>
+            </a:r>
+          </a:p>
+        </p:txBody>
+      </p:sp>
+      <p:sp>
+        <p:nvSpPr>
+          <p:cNvPr id="4" name="Slide Number Placeholder 3"/>
+          <p:cNvSpPr>
+            <a:spLocks noGrp="1"/>
+          </p:cNvSpPr>
+          <p:nvPr>
+            <p:ph type="sldNum" idx="5" sz="quarter"/>
+          </p:nvPr>
+        </p:nvSpPr>
+        <p:spPr/>
+      </p:sp>
+    </p:spTree>
+  </p:cSld>
+  <p:clrMapOvr>
+    <a:masterClrMapping/>
+  </p:clrMapOvr>
+</p:notes>
+</file>
+
+<file path=ppt/notesSlides/notesSlide7.xml><?xml version="1.0" encoding="utf-8"?>
+<p:notes xmlns:a="http://schemas.openxmlformats.org/drawingml/2006/main" xmlns:p="http://schemas.openxmlformats.org/presentationml/2006/main" xmlns:r="http://schemas.openxmlformats.org/officeDocument/2006/relationships">
+  <p:cSld>
+    <p:spTree>
+      <p:nvGrpSpPr>
+        <p:cNvPr id="1" name=""/>
+        <p:cNvGrpSpPr/>
+        <p:nvPr/>
+      </p:nvGrpSpPr>
+      <p:grpSpPr>
+        <a:xfrm>
+          <a:off x="0" y="0"/>
+          <a:ext cx="0" cy="0"/>
+          <a:chOff x="0" y="0"/>
+          <a:chExt cx="0" cy="0"/>
+        </a:xfrm>
+      </p:grpSpPr>
+      <p:sp>
+        <p:nvSpPr>
+          <p:cNvPr id="2" name="Slide Image Placeholder 1"/>
+          <p:cNvSpPr>
+            <a:spLocks noGrp="1"/>
+          </p:cNvSpPr>
+          <p:nvPr>
+            <p:ph type="sldImg" idx="2"/>
+          </p:nvPr>
+        </p:nvSpPr>
+        <p:spPr/>
+      </p:sp>
+      <p:sp>
+        <p:nvSpPr>
+          <p:cNvPr id="3" name="Notes Placeholder 2"/>
+          <p:cNvSpPr>
+            <a:spLocks noGrp="1"/>
+          </p:cNvSpPr>
+          <p:nvPr>
+            <p:ph type="body" idx="3" sz="quarter"/>
+          </p:nvPr>
+        </p:nvSpPr>
+        <p:spPr/>
+        <p:txBody>
+          <a:bodyPr/>
+          <a:lstStyle/>
+          <a:p>
+            <a:r>
+              <a:t>El trade-off de poner logica en la base o en la aplicacion merece honestidad y no propaganda, porque el estudiante encontrara equipos reales que defienden lo contrario de lo que oye hoy.</a:t>
+            </a:r>
+          </a:p>
+          <a:p>
+            <a:r>
+              <a:t>La orquestacion, la presentacion, los formatos de fecha y el envio de correos van en la aplicacion.</a:t>
+            </a:r>
+          </a:p>
+        </p:txBody>
+      </p:sp>
+      <p:sp>
+        <p:nvSpPr>
+          <p:cNvPr id="4" name="Slide Number Placeholder 3"/>
+          <p:cNvSpPr>
+            <a:spLocks noGrp="1"/>
+          </p:cNvSpPr>
+          <p:nvPr>
+            <p:ph type="sldNum" idx="5" sz="quarter"/>
+          </p:nvPr>
+        </p:nvSpPr>
+        <p:spPr/>
+      </p:sp>
+    </p:spTree>
+  </p:cSld>
+  <p:clrMapOvr>
+    <a:masterClrMapping/>
+  </p:clrMapOvr>
+</p:notes>
+</file>
+
+<file path=ppt/notesSlides/notesSlide8.xml><?xml version="1.0" encoding="utf-8"?>
+<p:notes xmlns:a="http://schemas.openxmlformats.org/drawingml/2006/main" xmlns:p="http://schemas.openxmlformats.org/presentationml/2006/main" xmlns:r="http://schemas.openxmlformats.org/officeDocument/2006/relationships">
+  <p:cSld>
+    <p:spTree>
+      <p:nvGrpSpPr>
+        <p:cNvPr id="1" name=""/>
+        <p:cNvGrpSpPr/>
+        <p:nvPr/>
+      </p:nvGrpSpPr>
+      <p:grpSpPr>
+        <a:xfrm>
+          <a:off x="0" y="0"/>
+          <a:ext cx="0" cy="0"/>
+          <a:chOff x="0" y="0"/>
+          <a:chExt cx="0" cy="0"/>
+        </a:xfrm>
+      </p:grpSpPr>
+      <p:sp>
+        <p:nvSpPr>
+          <p:cNvPr id="2" name="Slide Image Placeholder 1"/>
+          <p:cNvSpPr>
+            <a:spLocks noGrp="1"/>
+          </p:cNvSpPr>
+          <p:nvPr>
+            <p:ph type="sldImg" idx="2"/>
+          </p:nvPr>
+        </p:nvSpPr>
+        <p:spPr/>
+      </p:sp>
+      <p:sp>
+        <p:nvSpPr>
+          <p:cNvPr id="3" name="Notes Placeholder 2"/>
+          <p:cNvSpPr>
+            <a:spLocks noGrp="1"/>
+          </p:cNvSpPr>
+          <p:nvPr>
+            <p:ph type="body" idx="3" sz="quarter"/>
+          </p:nvPr>
+        </p:nvSpPr>
+        <p:spPr/>
+        <p:txBody>
+          <a:bodyPr/>
+          <a:lstStyle/>
+          <a:p>
+            <a:r>
+              <a:t>Suponga que VetCare necesita registrar la fecha en que una mascota fue inactivada, dato que hoy no existe.</a:t>
+            </a:r>
+          </a:p>
+          <a:p>
+            <a:r>
+              <a:t>Cuatro, mover lecturas y reportes a la columna nueva.</a:t>
+            </a:r>
+          </a:p>
+          <a:p>
+            <a:r>
+              <a:t>Cada paso deja funcionando al mismo tiempo la version vieja y la nueva.</a:t>
+            </a:r>
+          </a:p>
+          <a:p>
+            <a:r>
+              <a:t>Eso mismo entra en el informe y en el pitch de hoy, porque el estudiante no muestra pantallas: muestra su contrato, un caso de exito, un caso de error visto por el usuario y su plan de cambio de esquema, que es lo que la Clase 13 mirara desde el lado de los fallos reales y lo que la Clase 15 va a evaluar.</a:t>
+            </a:r>
+          </a:p>
+        </p:txBody>
+      </p:sp>
+      <p:sp>
+        <p:nvSpPr>
+          <p:cNvPr id="4" name="Slide Number Placeholder 3"/>
+          <p:cNvSpPr>
+            <a:spLocks noGrp="1"/>
+          </p:cNvSpPr>
+          <p:nvPr>
+            <p:ph type="sldNum" idx="5" sz="quarter"/>
+          </p:nvPr>
+        </p:nvSpPr>
+        <p:spPr/>
+      </p:sp>
+    </p:spTree>
+  </p:cSld>
+  <p:clrMapOvr>
+    <a:masterClrMapping/>
+  </p:clrMapOvr>
+</p:notes>
 </file>
 
 <file path=ppt/slideLayouts/slideLayout1.xml><?xml version="1.0" encoding="utf-8"?>
@@ -3909,7 +4886,7 @@
                 </a:solidFill>
                 <a:latin typeface="Calibri"/>
               </a:rPr>
-              <a:t>El contrato y sus seis partes, que se exigen en el entregable (1/2)</a:t>
+              <a:t>El contrato y sus seis partes (1/2)</a:t>
             </a:r>
           </a:p>
         </p:txBody>
@@ -4209,7 +5186,7 @@
                 </a:solidFill>
                 <a:latin typeface="Calibri"/>
               </a:rPr>
-              <a:t>El contrato y sus seis partes, que se exigen en el entregable (2/2)</a:t>
+              <a:t>El contrato y sus seis partes (2/2)</a:t>
             </a:r>
           </a:p>
         </p:txBody>
@@ -6369,7 +7346,7 @@
                 </a:solidFill>
                 <a:latin typeface="Calibri"/>
               </a:rPr>
-              <a:t>Encuadre de hoy · Objetivo PI</a:t>
+              <a:t>Encuadre de hoy · Tema y objetivo</a:t>
             </a:r>
           </a:p>
         </p:txBody>
@@ -6417,7 +7394,7 @@
                 </a:solidFill>
                 <a:latin typeface="Calibri"/>
               </a:rPr>
-              <a:t>Hoy avanzamos el PI en:</a:t>
+              <a:t>Tema de hoy:</a:t>
             </a:r>
             <a:r>
               <a:rPr sz="2000" b="0" i="0">
@@ -6426,7 +7403,7 @@
                 </a:solidFill>
                 <a:latin typeface="Calibri"/>
               </a:rPr>
-              <a:t> Contrato integracion + preparacion de entrega/sustentacion</a:t>
+              <a:t> Integracion app &lt;-&gt; BD · Prep. presentacion</a:t>
             </a:r>
           </a:p>
           <a:p>
@@ -6471,15 +7448,6 @@
               </a:rPr>
               <a:t>120 min</a:t>
             </a:r>
-            <a:r>
-              <a:rPr sz="2000" b="0" i="0">
-                <a:solidFill>
-                  <a:srgbClr val="333333"/>
-                </a:solidFill>
-                <a:latin typeface="Calibri"/>
-              </a:rPr>
-              <a:t> · Teoría breve · Taller PI</a:t>
-            </a:r>
           </a:p>
           <a:p>
             <a:pPr>
@@ -6494,25 +7462,7 @@
                 </a:solidFill>
                 <a:latin typeface="Calibri"/>
               </a:rPr>
-              <a:t>–   </a:t>
-            </a:r>
-            <a:r>
-              <a:rPr sz="2000" b="1" i="0">
-                <a:solidFill>
-                  <a:srgbClr val="333333"/>
-                </a:solidFill>
-                <a:latin typeface="Calibri"/>
-              </a:rPr>
-              <a:t>Entregable de hoy:</a:t>
-            </a:r>
-            <a:r>
-              <a:rPr sz="2000" b="0" i="0">
-                <a:solidFill>
-                  <a:srgbClr val="333333"/>
-                </a:solidFill>
-                <a:latin typeface="Calibri"/>
-              </a:rPr>
-              <a:t> Contrato app&lt;-&gt;BD + outline de slides de sustentacion (5-8 min)</a:t>
+              <a:t>–   Gratis + navegador · free tier · sin software de pago obligatorio.</a:t>
             </a:r>
           </a:p>
           <a:p>
@@ -6528,7 +7478,7 @@
                 </a:solidFill>
                 <a:latin typeface="Calibri"/>
               </a:rPr>
-              <a:t>–   Gratis + navegador · free tier · sin software de pago obligatorio.</a:t>
+              <a:t>–   Recorrido: teoría del tema, una lámina por concepto, y demo del docente sobre VetCare DB.</a:t>
             </a:r>
           </a:p>
           <a:p>
@@ -6544,23 +7494,7 @@
                 </a:solidFill>
                 <a:latin typeface="Calibri"/>
               </a:rPr>
-              <a:t>–   La teoría no es un tema aislado: alimenta evidencias de la rúbrica del PI.</a:t>
-            </a:r>
-          </a:p>
-          <a:p>
-            <a:pPr>
-              <a:spcAft>
-                <a:spcPts val="800"/>
-              </a:spcAft>
-            </a:pPr>
-            <a:r>
-              <a:rPr sz="2000" b="0" i="0">
-                <a:solidFill>
-                  <a:srgbClr val="333333"/>
-                </a:solidFill>
-                <a:latin typeface="Calibri"/>
-              </a:rPr>
-              <a:t>–   Al salir: avance concreto en su paquete VetCare.</a:t>
+              <a:t>–   Cada lámina se sostiene sola: sirve para repasar aunque hayas faltado.</a:t>
             </a:r>
           </a:p>
         </p:txBody>
@@ -9424,7 +10358,7 @@
                 </a:solidFill>
                 <a:latin typeface="Calibri"/>
               </a:rPr>
-              <a:t>Herramientas de hoy</a:t>
+              <a:t>Del boceto a la plataforma del curso (diagrama)</a:t>
             </a:r>
           </a:p>
         </p:txBody>
@@ -9458,7 +10392,7 @@
                 </a:solidFill>
                 <a:latin typeface="Calibri"/>
               </a:rPr>
-              <a:t>Gratis · navegador o free tier</a:t>
+              <a:t>El diagrama se entrega como codigo Mermaid dentro de la plataforma del curso, no como imagen</a:t>
             </a:r>
           </a:p>
         </p:txBody>
@@ -9471,8 +10405,8 @@
         </p:nvSpPr>
         <p:spPr>
           <a:xfrm>
-            <a:off x="457200" y="1591056"/>
-            <a:ext cx="3624986" cy="2331720"/>
+            <a:off x="457200" y="1659636"/>
+            <a:ext cx="11277295" cy="1051560"/>
           </a:xfrm>
           <a:prstGeom prst="roundRect">
             <a:avLst>
@@ -9510,17 +10444,19 @@
       </p:sp>
       <p:sp>
         <p:nvSpPr>
-          <p:cNvPr id="7" name="Rectangle 6"/>
+          <p:cNvPr id="7" name="Rounded Rectangle 6"/>
           <p:cNvSpPr/>
           <p:nvPr/>
         </p:nvSpPr>
         <p:spPr>
           <a:xfrm>
-            <a:off x="457200" y="1591056"/>
-            <a:ext cx="3624986" cy="64008"/>
-          </a:xfrm>
-          <a:prstGeom prst="rect">
-            <a:avLst/>
+            <a:off x="594360" y="1965960"/>
+            <a:ext cx="438912" cy="438912"/>
+          </a:xfrm>
+          <a:prstGeom prst="roundRect">
+            <a:avLst>
+              <a:gd name="adj" fmla="val 12000"/>
+            </a:avLst>
           </a:prstGeom>
           <a:solidFill>
             <a:srgbClr val="095292"/>
@@ -9553,20 +10489,103 @@
       </p:sp>
       <p:sp>
         <p:nvSpPr>
-          <p:cNvPr id="8" name="Rectangle 7"/>
+          <p:cNvPr id="8" name="TextBox 7"/>
+          <p:cNvSpPr txBox="1"/>
+          <p:nvPr/>
+        </p:nvSpPr>
+        <p:spPr>
+          <a:xfrm>
+            <a:off x="594360" y="1965960"/>
+            <a:ext cx="438912" cy="438912"/>
+          </a:xfrm>
+          <a:prstGeom prst="rect">
+            <a:avLst/>
+          </a:prstGeom>
+          <a:noFill/>
+        </p:spPr>
+        <p:txBody>
+          <a:bodyPr wrap="square" anchor="ctr"/>
+          <a:lstStyle/>
+          <a:p>
+            <a:pPr algn="ctr"/>
+            <a:r>
+              <a:rPr sz="1600" b="1" i="0">
+                <a:solidFill>
+                  <a:srgbClr val="FFFFFF"/>
+                </a:solidFill>
+                <a:latin typeface="Calibri"/>
+              </a:rPr>
+              <a:t>1</a:t>
+            </a:r>
+          </a:p>
+        </p:txBody>
+      </p:sp>
+      <p:sp>
+        <p:nvSpPr>
+          <p:cNvPr id="9" name="TextBox 8"/>
+          <p:cNvSpPr txBox="1"/>
+          <p:nvPr/>
+        </p:nvSpPr>
+        <p:spPr>
+          <a:xfrm>
+            <a:off x="1188720" y="1751076"/>
+            <a:ext cx="10271455" cy="886968"/>
+          </a:xfrm>
+          <a:prstGeom prst="rect">
+            <a:avLst/>
+          </a:prstGeom>
+          <a:noFill/>
+        </p:spPr>
+        <p:txBody>
+          <a:bodyPr wrap="square" anchor="ctr"/>
+          <a:lstStyle/>
+          <a:p>
+            <a:r>
+              <a:rPr sz="1500" b="1" i="0">
+                <a:solidFill>
+                  <a:srgbClr val="095292"/>
+                </a:solidFill>
+                <a:latin typeface="Calibri"/>
+              </a:rPr>
+              <a:t>Disena visual</a:t>
+            </a:r>
+          </a:p>
+          <a:p>
+            <a:pPr>
+              <a:spcBef>
+                <a:spcPts val="200"/>
+              </a:spcBef>
+            </a:pPr>
+            <a:r>
+              <a:rPr sz="1300" b="0" i="0">
+                <a:solidFill>
+                  <a:srgbClr val="333333"/>
+                </a:solidFill>
+                <a:latin typeface="Calibri"/>
+              </a:rPr>
+              <a:t>Dibuja el diagrama como quieras en Excalidraw o draw.io: es mas rapido arrastrar cajas que escribir codigo, y ahi es donde piensas el modelo.</a:t>
+            </a:r>
+          </a:p>
+        </p:txBody>
+      </p:sp>
+      <p:sp>
+        <p:nvSpPr>
+          <p:cNvPr id="10" name="Rounded Rectangle 9"/>
           <p:cNvSpPr/>
           <p:nvPr/>
         </p:nvSpPr>
         <p:spPr>
           <a:xfrm>
-            <a:off x="457200" y="1655064"/>
-            <a:ext cx="3624986" cy="27432"/>
-          </a:xfrm>
-          <a:prstGeom prst="rect">
-            <a:avLst/>
+            <a:off x="457200" y="2802636"/>
+            <a:ext cx="11277295" cy="1051560"/>
+          </a:xfrm>
+          <a:prstGeom prst="roundRect">
+            <a:avLst>
+              <a:gd name="adj" fmla="val 12000"/>
+            </a:avLst>
           </a:prstGeom>
           <a:solidFill>
-            <a:srgbClr val="FFD000"/>
+            <a:srgbClr val="E8F4FA"/>
           </a:solidFill>
           <a:ln>
             <a:noFill/>
@@ -9594,40 +10613,61 @@
           </a:p>
         </p:txBody>
       </p:sp>
-      <p:pic>
-        <p:nvPicPr>
-          <p:cNvPr id="9" name="Picture 8" descr="google_docs.png"/>
-          <p:cNvPicPr>
-            <a:picLocks noChangeAspect="1"/>
-          </p:cNvPicPr>
-          <p:nvPr/>
-        </p:nvPicPr>
-        <p:blipFill>
-          <a:blip r:embed="rId2"/>
-          <a:stretch>
-            <a:fillRect/>
-          </a:stretch>
-        </p:blipFill>
-        <p:spPr>
-          <a:xfrm>
-            <a:off x="1643329" y="1847087"/>
-            <a:ext cx="1252728" cy="1252728"/>
-          </a:xfrm>
-          <a:prstGeom prst="rect">
-            <a:avLst/>
-          </a:prstGeom>
-        </p:spPr>
-      </p:pic>
-      <p:sp>
-        <p:nvSpPr>
-          <p:cNvPr id="10" name="TextBox 9"/>
+      <p:sp>
+        <p:nvSpPr>
+          <p:cNvPr id="11" name="Rounded Rectangle 10"/>
+          <p:cNvSpPr/>
+          <p:nvPr/>
+        </p:nvSpPr>
+        <p:spPr>
+          <a:xfrm>
+            <a:off x="594360" y="3108960"/>
+            <a:ext cx="438912" cy="438912"/>
+          </a:xfrm>
+          <a:prstGeom prst="roundRect">
+            <a:avLst>
+              <a:gd name="adj" fmla="val 12000"/>
+            </a:avLst>
+          </a:prstGeom>
+          <a:solidFill>
+            <a:srgbClr val="095292"/>
+          </a:solidFill>
+          <a:ln>
+            <a:noFill/>
+          </a:ln>
+        </p:spPr>
+        <p:style>
+          <a:lnRef idx="1">
+            <a:schemeClr val="accent1"/>
+          </a:lnRef>
+          <a:fillRef idx="3">
+            <a:schemeClr val="accent1"/>
+          </a:fillRef>
+          <a:effectRef idx="2">
+            <a:schemeClr val="accent1"/>
+          </a:effectRef>
+          <a:fontRef idx="minor">
+            <a:schemeClr val="lt1"/>
+          </a:fontRef>
+        </p:style>
+        <p:txBody>
+          <a:bodyPr rtlCol="0" anchor="ctr"/>
+          <a:lstStyle/>
+          <a:p>
+            <a:pPr algn="ctr"/>
+          </a:p>
+        </p:txBody>
+      </p:sp>
+      <p:sp>
+        <p:nvSpPr>
+          <p:cNvPr id="12" name="TextBox 11"/>
           <p:cNvSpPr txBox="1"/>
           <p:nvPr/>
         </p:nvSpPr>
         <p:spPr>
           <a:xfrm>
-            <a:off x="530352" y="3191256"/>
-            <a:ext cx="3478682" cy="621792"/>
+            <a:off x="594360" y="3108960"/>
+            <a:ext cx="438912" cy="438912"/>
           </a:xfrm>
           <a:prstGeom prst="rect">
             <a:avLst/>
@@ -9635,48 +10675,80 @@
           <a:noFill/>
         </p:spPr>
         <p:txBody>
-          <a:bodyPr wrap="square" anchor="t"/>
+          <a:bodyPr wrap="square" anchor="ctr"/>
           <a:lstStyle/>
           <a:p>
             <a:pPr algn="ctr"/>
             <a:r>
-              <a:rPr sz="1300" b="1" i="0">
+              <a:rPr sz="1600" b="1" i="0">
+                <a:solidFill>
+                  <a:srgbClr val="FFFFFF"/>
+                </a:solidFill>
+                <a:latin typeface="Calibri"/>
+              </a:rPr>
+              <a:t>2</a:t>
+            </a:r>
+          </a:p>
+        </p:txBody>
+      </p:sp>
+      <p:sp>
+        <p:nvSpPr>
+          <p:cNvPr id="13" name="TextBox 12"/>
+          <p:cNvSpPr txBox="1"/>
+          <p:nvPr/>
+        </p:nvSpPr>
+        <p:spPr>
+          <a:xfrm>
+            <a:off x="1188720" y="2894076"/>
+            <a:ext cx="10271455" cy="886968"/>
+          </a:xfrm>
+          <a:prstGeom prst="rect">
+            <a:avLst/>
+          </a:prstGeom>
+          <a:noFill/>
+        </p:spPr>
+        <p:txBody>
+          <a:bodyPr wrap="square" anchor="ctr"/>
+          <a:lstStyle/>
+          <a:p>
+            <a:r>
+              <a:rPr sz="1500" b="1" i="0">
                 <a:solidFill>
                   <a:srgbClr val="095292"/>
                 </a:solidFill>
                 <a:latin typeface="Calibri"/>
               </a:rPr>
-              <a:t>Google Docs</a:t>
-            </a:r>
-          </a:p>
-          <a:p>
-            <a:pPr algn="ctr">
+              <a:t>Traduce con IA</a:t>
+            </a:r>
+          </a:p>
+          <a:p>
+            <a:pPr>
               <a:spcBef>
                 <a:spcPts val="200"/>
               </a:spcBef>
             </a:pPr>
             <a:r>
-              <a:rPr sz="1000" b="0" i="0">
-                <a:solidFill>
-                  <a:srgbClr val="666666"/>
-                </a:solidFill>
-                <a:latin typeface="Calibri"/>
-              </a:rPr>
-              <a:t>Contrato app-BD</a:t>
-            </a:r>
-          </a:p>
-        </p:txBody>
-      </p:sp>
-      <p:sp>
-        <p:nvSpPr>
-          <p:cNvPr id="11" name="Rounded Rectangle 10"/>
+              <a:rPr sz="1300" b="0" i="0">
+                <a:solidFill>
+                  <a:srgbClr val="333333"/>
+                </a:solidFill>
+                <a:latin typeface="Calibri"/>
+              </a:rPr>
+              <a:t>Copia o describe tu boceto a una IA y pidele el codigo Mermaid: «convierte este diagrama a Mermaid usando sequenceDiagram». Revisa el resultado: la IA acierta la sintaxis, no tu modelo.</a:t>
+            </a:r>
+          </a:p>
+        </p:txBody>
+      </p:sp>
+      <p:sp>
+        <p:nvSpPr>
+          <p:cNvPr id="14" name="Rounded Rectangle 13"/>
           <p:cNvSpPr/>
           <p:nvPr/>
         </p:nvSpPr>
         <p:spPr>
           <a:xfrm>
-            <a:off x="4283354" y="1591056"/>
-            <a:ext cx="3624986" cy="2331720"/>
+            <a:off x="457200" y="3945636"/>
+            <a:ext cx="11277295" cy="1051560"/>
           </a:xfrm>
           <a:prstGeom prst="roundRect">
             <a:avLst>
@@ -9714,17 +10786,19 @@
       </p:sp>
       <p:sp>
         <p:nvSpPr>
-          <p:cNvPr id="12" name="Rectangle 11"/>
+          <p:cNvPr id="15" name="Rounded Rectangle 14"/>
           <p:cNvSpPr/>
           <p:nvPr/>
         </p:nvSpPr>
         <p:spPr>
           <a:xfrm>
-            <a:off x="4283354" y="1591056"/>
-            <a:ext cx="3624986" cy="64008"/>
-          </a:xfrm>
-          <a:prstGeom prst="rect">
-            <a:avLst/>
+            <a:off x="594360" y="4251960"/>
+            <a:ext cx="438912" cy="438912"/>
+          </a:xfrm>
+          <a:prstGeom prst="roundRect">
+            <a:avLst>
+              <a:gd name="adj" fmla="val 12000"/>
+            </a:avLst>
           </a:prstGeom>
           <a:solidFill>
             <a:srgbClr val="095292"/>
@@ -9757,20 +10831,103 @@
       </p:sp>
       <p:sp>
         <p:nvSpPr>
-          <p:cNvPr id="13" name="Rectangle 12"/>
+          <p:cNvPr id="16" name="TextBox 15"/>
+          <p:cNvSpPr txBox="1"/>
+          <p:nvPr/>
+        </p:nvSpPr>
+        <p:spPr>
+          <a:xfrm>
+            <a:off x="594360" y="4251960"/>
+            <a:ext cx="438912" cy="438912"/>
+          </a:xfrm>
+          <a:prstGeom prst="rect">
+            <a:avLst/>
+          </a:prstGeom>
+          <a:noFill/>
+        </p:spPr>
+        <p:txBody>
+          <a:bodyPr wrap="square" anchor="ctr"/>
+          <a:lstStyle/>
+          <a:p>
+            <a:pPr algn="ctr"/>
+            <a:r>
+              <a:rPr sz="1600" b="1" i="0">
+                <a:solidFill>
+                  <a:srgbClr val="FFFFFF"/>
+                </a:solidFill>
+                <a:latin typeface="Calibri"/>
+              </a:rPr>
+              <a:t>3</a:t>
+            </a:r>
+          </a:p>
+        </p:txBody>
+      </p:sp>
+      <p:sp>
+        <p:nvSpPr>
+          <p:cNvPr id="17" name="TextBox 16"/>
+          <p:cNvSpPr txBox="1"/>
+          <p:nvPr/>
+        </p:nvSpPr>
+        <p:spPr>
+          <a:xfrm>
+            <a:off x="1188720" y="4037076"/>
+            <a:ext cx="10271455" cy="886968"/>
+          </a:xfrm>
+          <a:prstGeom prst="rect">
+            <a:avLst/>
+          </a:prstGeom>
+          <a:noFill/>
+        </p:spPr>
+        <p:txBody>
+          <a:bodyPr wrap="square" anchor="ctr"/>
+          <a:lstStyle/>
+          <a:p>
+            <a:r>
+              <a:rPr sz="1500" b="1" i="0">
+                <a:solidFill>
+                  <a:srgbClr val="095292"/>
+                </a:solidFill>
+                <a:latin typeface="Calibri"/>
+              </a:rPr>
+              <a:t>Pega y renderiza en la plataforma del curso</a:t>
+            </a:r>
+          </a:p>
+          <a:p>
+            <a:pPr>
+              <a:spcBef>
+                <a:spcPts val="200"/>
+              </a:spcBef>
+            </a:pPr>
+            <a:r>
+              <a:rPr sz="1300" b="0" i="0">
+                <a:solidFill>
+                  <a:srgbClr val="333333"/>
+                </a:solidFill>
+                <a:latin typeface="Calibri"/>
+              </a:rPr>
+              <a:t>Pega ese codigo en la caja de texto de la pregunta y mira como lo dibuja la plataforma. Si no renderiza, corrige ahi mismo: lo que se califica es el diagrama renderizado dentro de la plataforma del curso.</a:t>
+            </a:r>
+          </a:p>
+        </p:txBody>
+      </p:sp>
+      <p:sp>
+        <p:nvSpPr>
+          <p:cNvPr id="18" name="Rounded Rectangle 17"/>
           <p:cNvSpPr/>
           <p:nvPr/>
         </p:nvSpPr>
         <p:spPr>
           <a:xfrm>
-            <a:off x="4283354" y="1655064"/>
-            <a:ext cx="3624986" cy="27432"/>
-          </a:xfrm>
-          <a:prstGeom prst="rect">
-            <a:avLst/>
+            <a:off x="457200" y="5088636"/>
+            <a:ext cx="11277295" cy="1051560"/>
+          </a:xfrm>
+          <a:prstGeom prst="roundRect">
+            <a:avLst>
+              <a:gd name="adj" fmla="val 12000"/>
+            </a:avLst>
           </a:prstGeom>
           <a:solidFill>
-            <a:srgbClr val="FFD000"/>
+            <a:srgbClr val="E8F4FA"/>
           </a:solidFill>
           <a:ln>
             <a:noFill/>
@@ -9798,137 +10955,21 @@
           </a:p>
         </p:txBody>
       </p:sp>
-      <p:pic>
-        <p:nvPicPr>
-          <p:cNvPr id="14" name="Picture 13" descr="oracle_livesql.png"/>
-          <p:cNvPicPr>
-            <a:picLocks noChangeAspect="1"/>
-          </p:cNvPicPr>
-          <p:nvPr/>
-        </p:nvPicPr>
-        <p:blipFill>
-          <a:blip r:embed="rId3"/>
-          <a:stretch>
-            <a:fillRect/>
-          </a:stretch>
-        </p:blipFill>
-        <p:spPr>
-          <a:xfrm>
-            <a:off x="5469483" y="1847087"/>
-            <a:ext cx="1252728" cy="1252728"/>
-          </a:xfrm>
-          <a:prstGeom prst="rect">
-            <a:avLst/>
-          </a:prstGeom>
-        </p:spPr>
-      </p:pic>
-      <p:sp>
-        <p:nvSpPr>
-          <p:cNvPr id="15" name="TextBox 14"/>
-          <p:cNvSpPr txBox="1"/>
-          <p:nvPr/>
-        </p:nvSpPr>
-        <p:spPr>
-          <a:xfrm>
-            <a:off x="4356506" y="3191256"/>
-            <a:ext cx="3478682" cy="621792"/>
-          </a:xfrm>
-          <a:prstGeom prst="rect">
-            <a:avLst/>
-          </a:prstGeom>
-          <a:noFill/>
-        </p:spPr>
-        <p:txBody>
-          <a:bodyPr wrap="square" anchor="t"/>
-          <a:lstStyle/>
-          <a:p>
-            <a:pPr algn="ctr"/>
-            <a:r>
-              <a:rPr sz="1300" b="1" i="0">
-                <a:solidFill>
-                  <a:srgbClr val="095292"/>
-                </a:solidFill>
-                <a:latin typeface="Calibri"/>
-              </a:rPr>
-              <a:t>Oracle Live SQL</a:t>
-            </a:r>
-          </a:p>
-          <a:p>
-            <a:pPr algn="ctr">
-              <a:spcBef>
-                <a:spcPts val="200"/>
-              </a:spcBef>
-            </a:pPr>
-            <a:r>
-              <a:rPr sz="1000" b="0" i="0">
-                <a:solidFill>
-                  <a:srgbClr val="666666"/>
-                </a:solidFill>
-                <a:latin typeface="Calibri"/>
-              </a:rPr>
-              <a:t>Ops</a:t>
-            </a:r>
-          </a:p>
-        </p:txBody>
-      </p:sp>
-      <p:sp>
-        <p:nvSpPr>
-          <p:cNvPr id="16" name="Rounded Rectangle 15"/>
+      <p:sp>
+        <p:nvSpPr>
+          <p:cNvPr id="19" name="Rounded Rectangle 18"/>
           <p:cNvSpPr/>
           <p:nvPr/>
         </p:nvSpPr>
         <p:spPr>
           <a:xfrm>
-            <a:off x="8109508" y="1591056"/>
-            <a:ext cx="3624986" cy="2331720"/>
+            <a:off x="594360" y="5394960"/>
+            <a:ext cx="438912" cy="438912"/>
           </a:xfrm>
           <a:prstGeom prst="roundRect">
             <a:avLst>
               <a:gd name="adj" fmla="val 12000"/>
             </a:avLst>
-          </a:prstGeom>
-          <a:solidFill>
-            <a:srgbClr val="F2F2F2"/>
-          </a:solidFill>
-          <a:ln>
-            <a:noFill/>
-          </a:ln>
-        </p:spPr>
-        <p:style>
-          <a:lnRef idx="1">
-            <a:schemeClr val="accent1"/>
-          </a:lnRef>
-          <a:fillRef idx="3">
-            <a:schemeClr val="accent1"/>
-          </a:fillRef>
-          <a:effectRef idx="2">
-            <a:schemeClr val="accent1"/>
-          </a:effectRef>
-          <a:fontRef idx="minor">
-            <a:schemeClr val="lt1"/>
-          </a:fontRef>
-        </p:style>
-        <p:txBody>
-          <a:bodyPr rtlCol="0" anchor="ctr"/>
-          <a:lstStyle/>
-          <a:p>
-            <a:pPr algn="ctr"/>
-          </a:p>
-        </p:txBody>
-      </p:sp>
-      <p:sp>
-        <p:nvSpPr>
-          <p:cNvPr id="17" name="Rectangle 16"/>
-          <p:cNvSpPr/>
-          <p:nvPr/>
-        </p:nvSpPr>
-        <p:spPr>
-          <a:xfrm>
-            <a:off x="8109508" y="1591056"/>
-            <a:ext cx="3624986" cy="64008"/>
-          </a:xfrm>
-          <a:prstGeom prst="rect">
-            <a:avLst/>
           </a:prstGeom>
           <a:solidFill>
             <a:srgbClr val="095292"/>
@@ -9961,81 +11002,14 @@
       </p:sp>
       <p:sp>
         <p:nvSpPr>
-          <p:cNvPr id="18" name="Rectangle 17"/>
-          <p:cNvSpPr/>
-          <p:nvPr/>
-        </p:nvSpPr>
-        <p:spPr>
-          <a:xfrm>
-            <a:off x="8109508" y="1655064"/>
-            <a:ext cx="3624986" cy="27432"/>
-          </a:xfrm>
-          <a:prstGeom prst="rect">
-            <a:avLst/>
-          </a:prstGeom>
-          <a:solidFill>
-            <a:srgbClr val="FFD000"/>
-          </a:solidFill>
-          <a:ln>
-            <a:noFill/>
-          </a:ln>
-        </p:spPr>
-        <p:style>
-          <a:lnRef idx="1">
-            <a:schemeClr val="accent1"/>
-          </a:lnRef>
-          <a:fillRef idx="3">
-            <a:schemeClr val="accent1"/>
-          </a:fillRef>
-          <a:effectRef idx="2">
-            <a:schemeClr val="accent1"/>
-          </a:effectRef>
-          <a:fontRef idx="minor">
-            <a:schemeClr val="lt1"/>
-          </a:fontRef>
-        </p:style>
-        <p:txBody>
-          <a:bodyPr rtlCol="0" anchor="ctr"/>
-          <a:lstStyle/>
-          <a:p>
-            <a:pPr algn="ctr"/>
-          </a:p>
-        </p:txBody>
-      </p:sp>
-      <p:pic>
-        <p:nvPicPr>
-          <p:cNvPr id="19" name="Picture 18" descr="drawio.png"/>
-          <p:cNvPicPr>
-            <a:picLocks noChangeAspect="1"/>
-          </p:cNvPicPr>
-          <p:nvPr/>
-        </p:nvPicPr>
-        <p:blipFill>
-          <a:blip r:embed="rId4"/>
-          <a:stretch>
-            <a:fillRect/>
-          </a:stretch>
-        </p:blipFill>
-        <p:spPr>
-          <a:xfrm>
-            <a:off x="9295638" y="1847087"/>
-            <a:ext cx="1252728" cy="1252728"/>
-          </a:xfrm>
-          <a:prstGeom prst="rect">
-            <a:avLst/>
-          </a:prstGeom>
-        </p:spPr>
-      </p:pic>
-      <p:sp>
-        <p:nvSpPr>
           <p:cNvPr id="20" name="TextBox 19"/>
           <p:cNvSpPr txBox="1"/>
           <p:nvPr/>
         </p:nvSpPr>
         <p:spPr>
           <a:xfrm>
-            <a:off x="8182660" y="3191256"/>
-            <a:ext cx="3478682" cy="621792"/>
+            <a:off x="594360" y="5394960"/>
+            <a:ext cx="438912" cy="438912"/>
           </a:xfrm>
           <a:prstGeom prst="rect">
             <a:avLst/>
@@ -10043,41 +11017,73 @@
           <a:noFill/>
         </p:spPr>
         <p:txBody>
-          <a:bodyPr wrap="square" anchor="t"/>
+          <a:bodyPr wrap="square" anchor="ctr"/>
           <a:lstStyle/>
           <a:p>
             <a:pPr algn="ctr"/>
             <a:r>
-              <a:rPr sz="1300" b="1" i="0">
+              <a:rPr sz="1600" b="1" i="0">
+                <a:solidFill>
+                  <a:srgbClr val="FFFFFF"/>
+                </a:solidFill>
+                <a:latin typeface="Calibri"/>
+              </a:rPr>
+              <a:t>4</a:t>
+            </a:r>
+          </a:p>
+        </p:txBody>
+      </p:sp>
+      <p:sp>
+        <p:nvSpPr>
+          <p:cNvPr id="21" name="TextBox 20"/>
+          <p:cNvSpPr txBox="1"/>
+          <p:nvPr/>
+        </p:nvSpPr>
+        <p:spPr>
+          <a:xfrm>
+            <a:off x="1188720" y="5180076"/>
+            <a:ext cx="10271455" cy="886968"/>
+          </a:xfrm>
+          <a:prstGeom prst="rect">
+            <a:avLst/>
+          </a:prstGeom>
+          <a:noFill/>
+        </p:spPr>
+        <p:txBody>
+          <a:bodyPr wrap="square" anchor="ctr"/>
+          <a:lstStyle/>
+          <a:p>
+            <a:r>
+              <a:rPr sz="1500" b="1" i="0">
                 <a:solidFill>
                   <a:srgbClr val="095292"/>
                 </a:solidFill>
                 <a:latin typeface="Calibri"/>
               </a:rPr>
-              <a:t>draw.io</a:t>
-            </a:r>
-          </a:p>
-          <a:p>
-            <a:pPr algn="ctr">
+              <a:t>Guarda el PNG para tu PI</a:t>
+            </a:r>
+          </a:p>
+          <a:p>
+            <a:pPr>
               <a:spcBef>
                 <a:spcPts val="200"/>
               </a:spcBef>
             </a:pPr>
             <a:r>
-              <a:rPr sz="1000" b="0" i="0">
-                <a:solidFill>
-                  <a:srgbClr val="666666"/>
-                </a:solidFill>
-                <a:latin typeface="Calibri"/>
-              </a:rPr>
-              <a:t>Flujo</a:t>
-            </a:r>
-          </a:p>
-        </p:txBody>
-      </p:sp>
-      <p:sp>
-        <p:nvSpPr>
-          <p:cNvPr id="21" name="TextBox 20"/>
+              <a:rPr sz="1300" b="0" i="0">
+                <a:solidFill>
+                  <a:srgbClr val="333333"/>
+                </a:solidFill>
+                <a:latin typeface="Calibri"/>
+              </a:rPr>
+              <a:t>Exporta tambien la imagen a la carpeta de tu Proyecto Integrador. Esa copia es para tu informe; no reemplaza la respuesta en la plataforma.</a:t>
+            </a:r>
+          </a:p>
+        </p:txBody>
+      </p:sp>
+      <p:sp>
+        <p:nvSpPr>
+          <p:cNvPr id="22" name="TextBox 21"/>
           <p:cNvSpPr txBox="1"/>
           <p:nvPr/>
         </p:nvSpPr>
@@ -10145,13 +11151,13 @@
         <p:spPr>
           <a:xfrm>
             <a:off x="0" y="0"/>
-            <a:ext cx="12191695" cy="1170432"/>
+            <a:ext cx="12191695" cy="164592"/>
           </a:xfrm>
           <a:prstGeom prst="rect">
             <a:avLst/>
           </a:prstGeom>
           <a:solidFill>
-            <a:srgbClr val="095292"/>
+            <a:srgbClr val="269CCB"/>
           </a:solidFill>
           <a:ln>
             <a:noFill/>
@@ -10179,49 +11185,30 @@
           </a:p>
         </p:txBody>
       </p:sp>
-      <p:sp>
-        <p:nvSpPr>
-          <p:cNvPr id="3" name="Rectangle 2"/>
-          <p:cNvSpPr/>
-          <p:nvPr/>
-        </p:nvSpPr>
-        <p:spPr>
-          <a:xfrm>
-            <a:off x="0" y="1170432"/>
-            <a:ext cx="12191695" cy="41148"/>
-          </a:xfrm>
-          <a:prstGeom prst="rect">
-            <a:avLst/>
-          </a:prstGeom>
-          <a:solidFill>
-            <a:srgbClr val="FFD000"/>
-          </a:solidFill>
-          <a:ln>
-            <a:noFill/>
-          </a:ln>
-        </p:spPr>
-        <p:style>
-          <a:lnRef idx="1">
-            <a:schemeClr val="accent1"/>
-          </a:lnRef>
-          <a:fillRef idx="3">
-            <a:schemeClr val="accent1"/>
-          </a:fillRef>
-          <a:effectRef idx="2">
-            <a:schemeClr val="accent1"/>
-          </a:effectRef>
-          <a:fontRef idx="minor">
-            <a:schemeClr val="lt1"/>
-          </a:fontRef>
-        </p:style>
-        <p:txBody>
-          <a:bodyPr rtlCol="0" anchor="ctr"/>
-          <a:lstStyle/>
-          <a:p>
-            <a:pPr algn="ctr"/>
-          </a:p>
-        </p:txBody>
-      </p:sp>
+      <p:pic>
+        <p:nvPicPr>
+          <p:cNvPr id="3" name="Picture 2" descr="logo_uniajc_color.png"/>
+          <p:cNvPicPr>
+            <a:picLocks noChangeAspect="1"/>
+          </p:cNvPicPr>
+          <p:nvPr/>
+        </p:nvPicPr>
+        <p:blipFill>
+          <a:blip r:embed="rId2"/>
+          <a:stretch>
+            <a:fillRect/>
+          </a:stretch>
+        </p:blipFill>
+        <p:spPr>
+          <a:xfrm>
+            <a:off x="10271455" y="5998464"/>
+            <a:ext cx="1463040" cy="643233"/>
+          </a:xfrm>
+          <a:prstGeom prst="rect">
+            <a:avLst/>
+          </a:prstGeom>
+        </p:spPr>
+      </p:pic>
       <p:sp>
         <p:nvSpPr>
           <p:cNvPr id="4" name="TextBox 3"/>
@@ -10230,8 +11217,41 @@
         </p:nvSpPr>
         <p:spPr>
           <a:xfrm>
-            <a:off x="457200" y="164592"/>
-            <a:ext cx="11277295" cy="384048"/>
+            <a:off x="457200" y="1737360"/>
+            <a:ext cx="11277295" cy="1097280"/>
+          </a:xfrm>
+          <a:prstGeom prst="rect">
+            <a:avLst/>
+          </a:prstGeom>
+          <a:noFill/>
+        </p:spPr>
+        <p:txBody>
+          <a:bodyPr wrap="square" anchor="ctr"/>
+          <a:lstStyle/>
+          <a:p>
+            <a:pPr algn="ctr"/>
+            <a:r>
+              <a:rPr sz="3400" b="1" i="0">
+                <a:solidFill>
+                  <a:srgbClr val="095292"/>
+                </a:solidFill>
+                <a:latin typeface="Calibri"/>
+              </a:rPr>
+              <a:t>Clase 12 · Integracion app &lt;-&gt; BD · Prep. presentacion</a:t>
+            </a:r>
+          </a:p>
+        </p:txBody>
+      </p:sp>
+      <p:sp>
+        <p:nvSpPr>
+          <p:cNvPr id="5" name="TextBox 4"/>
+          <p:cNvSpPr txBox="1"/>
+          <p:nvPr/>
+        </p:nvSpPr>
+        <p:spPr>
+          <a:xfrm>
+            <a:off x="457200" y="3017520"/>
+            <a:ext cx="11277295" cy="1645920"/>
           </a:xfrm>
           <a:prstGeom prst="rect">
             <a:avLst/>
@@ -10244,28 +11264,65 @@
           </a:bodyPr>
           <a:lstStyle/>
           <a:p>
-            <a:r>
-              <a:rPr sz="2600" b="1" i="0">
-                <a:solidFill>
-                  <a:srgbClr val="FFFFFF"/>
-                </a:solidFill>
-                <a:latin typeface="Calibri"/>
-              </a:rPr>
-              <a:t>Del boceto a la plataforma del curso (diagrama)</a:t>
-            </a:r>
-          </a:p>
-        </p:txBody>
-      </p:sp>
-      <p:sp>
-        <p:nvSpPr>
-          <p:cNvPr id="5" name="TextBox 4"/>
+            <a:pPr algn="ctr">
+              <a:spcAft>
+                <a:spcPts val="600"/>
+              </a:spcAft>
+            </a:pPr>
+            <a:r>
+              <a:rPr sz="1600" b="0" i="0">
+                <a:solidFill>
+                  <a:srgbClr val="333333"/>
+                </a:solidFill>
+                <a:latin typeface="Calibri"/>
+              </a:rPr>
+              <a:t>Integrar no es conectarse</a:t>
+            </a:r>
+          </a:p>
+          <a:p>
+            <a:pPr algn="ctr">
+              <a:spcAft>
+                <a:spcPts val="600"/>
+              </a:spcAft>
+            </a:pPr>
+            <a:r>
+              <a:rPr sz="1600" b="0" i="0">
+                <a:solidFill>
+                  <a:srgbClr val="333333"/>
+                </a:solidFill>
+                <a:latin typeface="Calibri"/>
+              </a:rPr>
+              <a:t>Inyeccion SQL</a:t>
+            </a:r>
+          </a:p>
+          <a:p>
+            <a:pPr algn="ctr">
+              <a:spcAft>
+                <a:spcPts val="600"/>
+              </a:spcAft>
+            </a:pPr>
+            <a:r>
+              <a:rPr sz="1600" b="0" i="0">
+                <a:solidFill>
+                  <a:srgbClr val="333333"/>
+                </a:solidFill>
+                <a:latin typeface="Calibri"/>
+              </a:rPr>
+              <a:t>Por que el parametro lo evita por construccion</a:t>
+            </a:r>
+          </a:p>
+        </p:txBody>
+      </p:sp>
+      <p:sp>
+        <p:nvSpPr>
+          <p:cNvPr id="6" name="TextBox 5"/>
           <p:cNvSpPr txBox="1"/>
           <p:nvPr/>
         </p:nvSpPr>
         <p:spPr>
           <a:xfrm>
-            <a:off x="457200" y="566928"/>
-            <a:ext cx="11277295" cy="411480"/>
+            <a:off x="457200" y="4754880"/>
+            <a:ext cx="11277295" cy="640080"/>
           </a:xfrm>
           <a:prstGeom prst="rect">
             <a:avLst/>
@@ -10278,987 +11335,15 @@
           </a:bodyPr>
           <a:lstStyle/>
           <a:p>
-            <a:r>
-              <a:rPr sz="1400" b="0" i="0">
-                <a:solidFill>
-                  <a:srgbClr val="B8D8EE"/>
-                </a:solidFill>
-                <a:latin typeface="Calibri"/>
-              </a:rPr>
-              <a:t>El diagrama se entrega como codigo Mermaid dentro de la plataforma del curso, no como imagen</a:t>
-            </a:r>
-          </a:p>
-        </p:txBody>
-      </p:sp>
-      <p:sp>
-        <p:nvSpPr>
-          <p:cNvPr id="6" name="Rounded Rectangle 5"/>
-          <p:cNvSpPr/>
-          <p:nvPr/>
-        </p:nvSpPr>
-        <p:spPr>
-          <a:xfrm>
-            <a:off x="457200" y="1659636"/>
-            <a:ext cx="11277295" cy="1051560"/>
-          </a:xfrm>
-          <a:prstGeom prst="roundRect">
-            <a:avLst>
-              <a:gd name="adj" fmla="val 12000"/>
-            </a:avLst>
-          </a:prstGeom>
-          <a:solidFill>
-            <a:srgbClr val="F2F2F2"/>
-          </a:solidFill>
-          <a:ln>
-            <a:noFill/>
-          </a:ln>
-        </p:spPr>
-        <p:style>
-          <a:lnRef idx="1">
-            <a:schemeClr val="accent1"/>
-          </a:lnRef>
-          <a:fillRef idx="3">
-            <a:schemeClr val="accent1"/>
-          </a:fillRef>
-          <a:effectRef idx="2">
-            <a:schemeClr val="accent1"/>
-          </a:effectRef>
-          <a:fontRef idx="minor">
-            <a:schemeClr val="lt1"/>
-          </a:fontRef>
-        </p:style>
-        <p:txBody>
-          <a:bodyPr rtlCol="0" anchor="ctr"/>
-          <a:lstStyle/>
-          <a:p>
             <a:pPr algn="ctr"/>
-          </a:p>
-        </p:txBody>
-      </p:sp>
-      <p:sp>
-        <p:nvSpPr>
-          <p:cNvPr id="7" name="Rounded Rectangle 6"/>
-          <p:cNvSpPr/>
-          <p:nvPr/>
-        </p:nvSpPr>
-        <p:spPr>
-          <a:xfrm>
-            <a:off x="594360" y="1965960"/>
-            <a:ext cx="438912" cy="438912"/>
-          </a:xfrm>
-          <a:prstGeom prst="roundRect">
-            <a:avLst>
-              <a:gd name="adj" fmla="val 12000"/>
-            </a:avLst>
-          </a:prstGeom>
-          <a:solidFill>
-            <a:srgbClr val="095292"/>
-          </a:solidFill>
-          <a:ln>
-            <a:noFill/>
-          </a:ln>
-        </p:spPr>
-        <p:style>
-          <a:lnRef idx="1">
-            <a:schemeClr val="accent1"/>
-          </a:lnRef>
-          <a:fillRef idx="3">
-            <a:schemeClr val="accent1"/>
-          </a:fillRef>
-          <a:effectRef idx="2">
-            <a:schemeClr val="accent1"/>
-          </a:effectRef>
-          <a:fontRef idx="minor">
-            <a:schemeClr val="lt1"/>
-          </a:fontRef>
-        </p:style>
-        <p:txBody>
-          <a:bodyPr rtlCol="0" anchor="ctr"/>
-          <a:lstStyle/>
-          <a:p>
-            <a:pPr algn="ctr"/>
-          </a:p>
-        </p:txBody>
-      </p:sp>
-      <p:sp>
-        <p:nvSpPr>
-          <p:cNvPr id="8" name="TextBox 7"/>
-          <p:cNvSpPr txBox="1"/>
-          <p:nvPr/>
-        </p:nvSpPr>
-        <p:spPr>
-          <a:xfrm>
-            <a:off x="594360" y="1965960"/>
-            <a:ext cx="438912" cy="438912"/>
-          </a:xfrm>
-          <a:prstGeom prst="rect">
-            <a:avLst/>
-          </a:prstGeom>
-          <a:noFill/>
-        </p:spPr>
-        <p:txBody>
-          <a:bodyPr wrap="square" anchor="ctr"/>
-          <a:lstStyle/>
-          <a:p>
-            <a:pPr algn="ctr"/>
-            <a:r>
-              <a:rPr sz="1600" b="1" i="0">
-                <a:solidFill>
-                  <a:srgbClr val="FFFFFF"/>
-                </a:solidFill>
-                <a:latin typeface="Calibri"/>
-              </a:rPr>
-              <a:t>1</a:t>
-            </a:r>
-          </a:p>
-        </p:txBody>
-      </p:sp>
-      <p:sp>
-        <p:nvSpPr>
-          <p:cNvPr id="9" name="TextBox 8"/>
-          <p:cNvSpPr txBox="1"/>
-          <p:nvPr/>
-        </p:nvSpPr>
-        <p:spPr>
-          <a:xfrm>
-            <a:off x="1188720" y="1751076"/>
-            <a:ext cx="10271455" cy="886968"/>
-          </a:xfrm>
-          <a:prstGeom prst="rect">
-            <a:avLst/>
-          </a:prstGeom>
-          <a:noFill/>
-        </p:spPr>
-        <p:txBody>
-          <a:bodyPr wrap="square" anchor="ctr"/>
-          <a:lstStyle/>
-          <a:p>
-            <a:r>
-              <a:rPr sz="1500" b="1" i="0">
-                <a:solidFill>
-                  <a:srgbClr val="095292"/>
-                </a:solidFill>
-                <a:latin typeface="Calibri"/>
-              </a:rPr>
-              <a:t>Disena visual</a:t>
-            </a:r>
-          </a:p>
-          <a:p>
-            <a:pPr>
-              <a:spcBef>
-                <a:spcPts val="200"/>
-              </a:spcBef>
-            </a:pPr>
-            <a:r>
-              <a:rPr sz="1300" b="0" i="0">
-                <a:solidFill>
-                  <a:srgbClr val="333333"/>
-                </a:solidFill>
-                <a:latin typeface="Calibri"/>
-              </a:rPr>
-              <a:t>Dibuja el diagrama como quieras en Excalidraw o draw.io: es mas rapido arrastrar cajas que escribir codigo, y ahi es donde piensas el modelo.</a:t>
-            </a:r>
-          </a:p>
-        </p:txBody>
-      </p:sp>
-      <p:sp>
-        <p:nvSpPr>
-          <p:cNvPr id="10" name="Rounded Rectangle 9"/>
-          <p:cNvSpPr/>
-          <p:nvPr/>
-        </p:nvSpPr>
-        <p:spPr>
-          <a:xfrm>
-            <a:off x="457200" y="2802636"/>
-            <a:ext cx="11277295" cy="1051560"/>
-          </a:xfrm>
-          <a:prstGeom prst="roundRect">
-            <a:avLst>
-              <a:gd name="adj" fmla="val 12000"/>
-            </a:avLst>
-          </a:prstGeom>
-          <a:solidFill>
-            <a:srgbClr val="E8F4FA"/>
-          </a:solidFill>
-          <a:ln>
-            <a:noFill/>
-          </a:ln>
-        </p:spPr>
-        <p:style>
-          <a:lnRef idx="1">
-            <a:schemeClr val="accent1"/>
-          </a:lnRef>
-          <a:fillRef idx="3">
-            <a:schemeClr val="accent1"/>
-          </a:fillRef>
-          <a:effectRef idx="2">
-            <a:schemeClr val="accent1"/>
-          </a:effectRef>
-          <a:fontRef idx="minor">
-            <a:schemeClr val="lt1"/>
-          </a:fontRef>
-        </p:style>
-        <p:txBody>
-          <a:bodyPr rtlCol="0" anchor="ctr"/>
-          <a:lstStyle/>
-          <a:p>
-            <a:pPr algn="ctr"/>
-          </a:p>
-        </p:txBody>
-      </p:sp>
-      <p:sp>
-        <p:nvSpPr>
-          <p:cNvPr id="11" name="Rounded Rectangle 10"/>
-          <p:cNvSpPr/>
-          <p:nvPr/>
-        </p:nvSpPr>
-        <p:spPr>
-          <a:xfrm>
-            <a:off x="594360" y="3108960"/>
-            <a:ext cx="438912" cy="438912"/>
-          </a:xfrm>
-          <a:prstGeom prst="roundRect">
-            <a:avLst>
-              <a:gd name="adj" fmla="val 12000"/>
-            </a:avLst>
-          </a:prstGeom>
-          <a:solidFill>
-            <a:srgbClr val="095292"/>
-          </a:solidFill>
-          <a:ln>
-            <a:noFill/>
-          </a:ln>
-        </p:spPr>
-        <p:style>
-          <a:lnRef idx="1">
-            <a:schemeClr val="accent1"/>
-          </a:lnRef>
-          <a:fillRef idx="3">
-            <a:schemeClr val="accent1"/>
-          </a:fillRef>
-          <a:effectRef idx="2">
-            <a:schemeClr val="accent1"/>
-          </a:effectRef>
-          <a:fontRef idx="minor">
-            <a:schemeClr val="lt1"/>
-          </a:fontRef>
-        </p:style>
-        <p:txBody>
-          <a:bodyPr rtlCol="0" anchor="ctr"/>
-          <a:lstStyle/>
-          <a:p>
-            <a:pPr algn="ctr"/>
-          </a:p>
-        </p:txBody>
-      </p:sp>
-      <p:sp>
-        <p:nvSpPr>
-          <p:cNvPr id="12" name="TextBox 11"/>
-          <p:cNvSpPr txBox="1"/>
-          <p:nvPr/>
-        </p:nvSpPr>
-        <p:spPr>
-          <a:xfrm>
-            <a:off x="594360" y="3108960"/>
-            <a:ext cx="438912" cy="438912"/>
-          </a:xfrm>
-          <a:prstGeom prst="rect">
-            <a:avLst/>
-          </a:prstGeom>
-          <a:noFill/>
-        </p:spPr>
-        <p:txBody>
-          <a:bodyPr wrap="square" anchor="ctr"/>
-          <a:lstStyle/>
-          <a:p>
-            <a:pPr algn="ctr"/>
-            <a:r>
-              <a:rPr sz="1600" b="1" i="0">
-                <a:solidFill>
-                  <a:srgbClr val="FFFFFF"/>
-                </a:solidFill>
-                <a:latin typeface="Calibri"/>
-              </a:rPr>
-              <a:t>2</a:t>
-            </a:r>
-          </a:p>
-        </p:txBody>
-      </p:sp>
-      <p:sp>
-        <p:nvSpPr>
-          <p:cNvPr id="13" name="TextBox 12"/>
-          <p:cNvSpPr txBox="1"/>
-          <p:nvPr/>
-        </p:nvSpPr>
-        <p:spPr>
-          <a:xfrm>
-            <a:off x="1188720" y="2894076"/>
-            <a:ext cx="10271455" cy="886968"/>
-          </a:xfrm>
-          <a:prstGeom prst="rect">
-            <a:avLst/>
-          </a:prstGeom>
-          <a:noFill/>
-        </p:spPr>
-        <p:txBody>
-          <a:bodyPr wrap="square" anchor="ctr"/>
-          <a:lstStyle/>
-          <a:p>
-            <a:r>
-              <a:rPr sz="1500" b="1" i="0">
-                <a:solidFill>
-                  <a:srgbClr val="095292"/>
-                </a:solidFill>
-                <a:latin typeface="Calibri"/>
-              </a:rPr>
-              <a:t>Traduce con IA</a:t>
-            </a:r>
-          </a:p>
-          <a:p>
-            <a:pPr>
-              <a:spcBef>
-                <a:spcPts val="200"/>
-              </a:spcBef>
-            </a:pPr>
-            <a:r>
-              <a:rPr sz="1300" b="0" i="0">
-                <a:solidFill>
-                  <a:srgbClr val="333333"/>
-                </a:solidFill>
-                <a:latin typeface="Calibri"/>
-              </a:rPr>
-              <a:t>Copia o describe tu boceto a una IA y pidele el codigo Mermaid: «convierte este diagrama a Mermaid usando sequenceDiagram». Revisa el resultado: la IA acierta la sintaxis, no tu modelo.</a:t>
-            </a:r>
-          </a:p>
-        </p:txBody>
-      </p:sp>
-      <p:sp>
-        <p:nvSpPr>
-          <p:cNvPr id="14" name="Rounded Rectangle 13"/>
-          <p:cNvSpPr/>
-          <p:nvPr/>
-        </p:nvSpPr>
-        <p:spPr>
-          <a:xfrm>
-            <a:off x="457200" y="3945636"/>
-            <a:ext cx="11277295" cy="1051560"/>
-          </a:xfrm>
-          <a:prstGeom prst="roundRect">
-            <a:avLst>
-              <a:gd name="adj" fmla="val 12000"/>
-            </a:avLst>
-          </a:prstGeom>
-          <a:solidFill>
-            <a:srgbClr val="F2F2F2"/>
-          </a:solidFill>
-          <a:ln>
-            <a:noFill/>
-          </a:ln>
-        </p:spPr>
-        <p:style>
-          <a:lnRef idx="1">
-            <a:schemeClr val="accent1"/>
-          </a:lnRef>
-          <a:fillRef idx="3">
-            <a:schemeClr val="accent1"/>
-          </a:fillRef>
-          <a:effectRef idx="2">
-            <a:schemeClr val="accent1"/>
-          </a:effectRef>
-          <a:fontRef idx="minor">
-            <a:schemeClr val="lt1"/>
-          </a:fontRef>
-        </p:style>
-        <p:txBody>
-          <a:bodyPr rtlCol="0" anchor="ctr"/>
-          <a:lstStyle/>
-          <a:p>
-            <a:pPr algn="ctr"/>
-          </a:p>
-        </p:txBody>
-      </p:sp>
-      <p:sp>
-        <p:nvSpPr>
-          <p:cNvPr id="15" name="Rounded Rectangle 14"/>
-          <p:cNvSpPr/>
-          <p:nvPr/>
-        </p:nvSpPr>
-        <p:spPr>
-          <a:xfrm>
-            <a:off x="594360" y="4251960"/>
-            <a:ext cx="438912" cy="438912"/>
-          </a:xfrm>
-          <a:prstGeom prst="roundRect">
-            <a:avLst>
-              <a:gd name="adj" fmla="val 12000"/>
-            </a:avLst>
-          </a:prstGeom>
-          <a:solidFill>
-            <a:srgbClr val="095292"/>
-          </a:solidFill>
-          <a:ln>
-            <a:noFill/>
-          </a:ln>
-        </p:spPr>
-        <p:style>
-          <a:lnRef idx="1">
-            <a:schemeClr val="accent1"/>
-          </a:lnRef>
-          <a:fillRef idx="3">
-            <a:schemeClr val="accent1"/>
-          </a:fillRef>
-          <a:effectRef idx="2">
-            <a:schemeClr val="accent1"/>
-          </a:effectRef>
-          <a:fontRef idx="minor">
-            <a:schemeClr val="lt1"/>
-          </a:fontRef>
-        </p:style>
-        <p:txBody>
-          <a:bodyPr rtlCol="0" anchor="ctr"/>
-          <a:lstStyle/>
-          <a:p>
-            <a:pPr algn="ctr"/>
-          </a:p>
-        </p:txBody>
-      </p:sp>
-      <p:sp>
-        <p:nvSpPr>
-          <p:cNvPr id="16" name="TextBox 15"/>
-          <p:cNvSpPr txBox="1"/>
-          <p:nvPr/>
-        </p:nvSpPr>
-        <p:spPr>
-          <a:xfrm>
-            <a:off x="594360" y="4251960"/>
-            <a:ext cx="438912" cy="438912"/>
-          </a:xfrm>
-          <a:prstGeom prst="rect">
-            <a:avLst/>
-          </a:prstGeom>
-          <a:noFill/>
-        </p:spPr>
-        <p:txBody>
-          <a:bodyPr wrap="square" anchor="ctr"/>
-          <a:lstStyle/>
-          <a:p>
-            <a:pPr algn="ctr"/>
-            <a:r>
-              <a:rPr sz="1600" b="1" i="0">
-                <a:solidFill>
-                  <a:srgbClr val="FFFFFF"/>
-                </a:solidFill>
-                <a:latin typeface="Calibri"/>
-              </a:rPr>
-              <a:t>3</a:t>
-            </a:r>
-          </a:p>
-        </p:txBody>
-      </p:sp>
-      <p:sp>
-        <p:nvSpPr>
-          <p:cNvPr id="17" name="TextBox 16"/>
-          <p:cNvSpPr txBox="1"/>
-          <p:nvPr/>
-        </p:nvSpPr>
-        <p:spPr>
-          <a:xfrm>
-            <a:off x="1188720" y="4037076"/>
-            <a:ext cx="10271455" cy="886968"/>
-          </a:xfrm>
-          <a:prstGeom prst="rect">
-            <a:avLst/>
-          </a:prstGeom>
-          <a:noFill/>
-        </p:spPr>
-        <p:txBody>
-          <a:bodyPr wrap="square" anchor="ctr"/>
-          <a:lstStyle/>
-          <a:p>
-            <a:r>
-              <a:rPr sz="1500" b="1" i="0">
-                <a:solidFill>
-                  <a:srgbClr val="095292"/>
-                </a:solidFill>
-                <a:latin typeface="Calibri"/>
-              </a:rPr>
-              <a:t>Pega y renderiza en la plataforma del curso</a:t>
-            </a:r>
-          </a:p>
-          <a:p>
-            <a:pPr>
-              <a:spcBef>
-                <a:spcPts val="200"/>
-              </a:spcBef>
-            </a:pPr>
-            <a:r>
-              <a:rPr sz="1300" b="0" i="0">
-                <a:solidFill>
-                  <a:srgbClr val="333333"/>
-                </a:solidFill>
-                <a:latin typeface="Calibri"/>
-              </a:rPr>
-              <a:t>Pega ese codigo en la caja de texto de la pregunta y mira como lo dibuja la plataforma. Si no renderiza, corrige ahi mismo: lo que se califica es el diagrama renderizado dentro de la plataforma del curso.</a:t>
-            </a:r>
-          </a:p>
-        </p:txBody>
-      </p:sp>
-      <p:sp>
-        <p:nvSpPr>
-          <p:cNvPr id="18" name="Rounded Rectangle 17"/>
-          <p:cNvSpPr/>
-          <p:nvPr/>
-        </p:nvSpPr>
-        <p:spPr>
-          <a:xfrm>
-            <a:off x="457200" y="5088636"/>
-            <a:ext cx="11277295" cy="1051560"/>
-          </a:xfrm>
-          <a:prstGeom prst="roundRect">
-            <a:avLst>
-              <a:gd name="adj" fmla="val 12000"/>
-            </a:avLst>
-          </a:prstGeom>
-          <a:solidFill>
-            <a:srgbClr val="E8F4FA"/>
-          </a:solidFill>
-          <a:ln>
-            <a:noFill/>
-          </a:ln>
-        </p:spPr>
-        <p:style>
-          <a:lnRef idx="1">
-            <a:schemeClr val="accent1"/>
-          </a:lnRef>
-          <a:fillRef idx="3">
-            <a:schemeClr val="accent1"/>
-          </a:fillRef>
-          <a:effectRef idx="2">
-            <a:schemeClr val="accent1"/>
-          </a:effectRef>
-          <a:fontRef idx="minor">
-            <a:schemeClr val="lt1"/>
-          </a:fontRef>
-        </p:style>
-        <p:txBody>
-          <a:bodyPr rtlCol="0" anchor="ctr"/>
-          <a:lstStyle/>
-          <a:p>
-            <a:pPr algn="ctr"/>
-          </a:p>
-        </p:txBody>
-      </p:sp>
-      <p:sp>
-        <p:nvSpPr>
-          <p:cNvPr id="19" name="Rounded Rectangle 18"/>
-          <p:cNvSpPr/>
-          <p:nvPr/>
-        </p:nvSpPr>
-        <p:spPr>
-          <a:xfrm>
-            <a:off x="594360" y="5394960"/>
-            <a:ext cx="438912" cy="438912"/>
-          </a:xfrm>
-          <a:prstGeom prst="roundRect">
-            <a:avLst>
-              <a:gd name="adj" fmla="val 12000"/>
-            </a:avLst>
-          </a:prstGeom>
-          <a:solidFill>
-            <a:srgbClr val="095292"/>
-          </a:solidFill>
-          <a:ln>
-            <a:noFill/>
-          </a:ln>
-        </p:spPr>
-        <p:style>
-          <a:lnRef idx="1">
-            <a:schemeClr val="accent1"/>
-          </a:lnRef>
-          <a:fillRef idx="3">
-            <a:schemeClr val="accent1"/>
-          </a:fillRef>
-          <a:effectRef idx="2">
-            <a:schemeClr val="accent1"/>
-          </a:effectRef>
-          <a:fontRef idx="minor">
-            <a:schemeClr val="lt1"/>
-          </a:fontRef>
-        </p:style>
-        <p:txBody>
-          <a:bodyPr rtlCol="0" anchor="ctr"/>
-          <a:lstStyle/>
-          <a:p>
-            <a:pPr algn="ctr"/>
-          </a:p>
-        </p:txBody>
-      </p:sp>
-      <p:sp>
-        <p:nvSpPr>
-          <p:cNvPr id="20" name="TextBox 19"/>
-          <p:cNvSpPr txBox="1"/>
-          <p:nvPr/>
-        </p:nvSpPr>
-        <p:spPr>
-          <a:xfrm>
-            <a:off x="594360" y="5394960"/>
-            <a:ext cx="438912" cy="438912"/>
-          </a:xfrm>
-          <a:prstGeom prst="rect">
-            <a:avLst/>
-          </a:prstGeom>
-          <a:noFill/>
-        </p:spPr>
-        <p:txBody>
-          <a:bodyPr wrap="square" anchor="ctr"/>
-          <a:lstStyle/>
-          <a:p>
-            <a:pPr algn="ctr"/>
-            <a:r>
-              <a:rPr sz="1600" b="1" i="0">
-                <a:solidFill>
-                  <a:srgbClr val="FFFFFF"/>
-                </a:solidFill>
-                <a:latin typeface="Calibri"/>
-              </a:rPr>
-              <a:t>4</a:t>
-            </a:r>
-          </a:p>
-        </p:txBody>
-      </p:sp>
-      <p:sp>
-        <p:nvSpPr>
-          <p:cNvPr id="21" name="TextBox 20"/>
-          <p:cNvSpPr txBox="1"/>
-          <p:nvPr/>
-        </p:nvSpPr>
-        <p:spPr>
-          <a:xfrm>
-            <a:off x="1188720" y="5180076"/>
-            <a:ext cx="10271455" cy="886968"/>
-          </a:xfrm>
-          <a:prstGeom prst="rect">
-            <a:avLst/>
-          </a:prstGeom>
-          <a:noFill/>
-        </p:spPr>
-        <p:txBody>
-          <a:bodyPr wrap="square" anchor="ctr"/>
-          <a:lstStyle/>
-          <a:p>
-            <a:r>
-              <a:rPr sz="1500" b="1" i="0">
-                <a:solidFill>
-                  <a:srgbClr val="095292"/>
-                </a:solidFill>
-                <a:latin typeface="Calibri"/>
-              </a:rPr>
-              <a:t>Guarda el PNG para tu PI</a:t>
-            </a:r>
-          </a:p>
-          <a:p>
-            <a:pPr>
-              <a:spcBef>
-                <a:spcPts val="200"/>
-              </a:spcBef>
-            </a:pPr>
-            <a:r>
-              <a:rPr sz="1300" b="0" i="0">
-                <a:solidFill>
-                  <a:srgbClr val="333333"/>
-                </a:solidFill>
-                <a:latin typeface="Calibri"/>
-              </a:rPr>
-              <a:t>Exporta tambien la imagen a la carpeta de tu Proyecto Integrador. Esa copia es para tu informe; no reemplaza la respuesta en la plataforma.</a:t>
-            </a:r>
-          </a:p>
-        </p:txBody>
-      </p:sp>
-      <p:sp>
-        <p:nvSpPr>
-          <p:cNvPr id="22" name="TextBox 21"/>
-          <p:cNvSpPr txBox="1"/>
-          <p:nvPr/>
-        </p:nvSpPr>
-        <p:spPr>
-          <a:xfrm>
-            <a:off x="11185855" y="6473952"/>
-            <a:ext cx="640080" cy="274320"/>
-          </a:xfrm>
-          <a:prstGeom prst="rect">
-            <a:avLst/>
-          </a:prstGeom>
-          <a:noFill/>
-        </p:spPr>
-        <p:txBody>
-          <a:bodyPr wrap="square">
-            <a:spAutoFit/>
-          </a:bodyPr>
-          <a:lstStyle/>
-          <a:p>
-            <a:pPr algn="r"/>
-            <a:r>
-              <a:rPr sz="1100" b="0" i="0">
-                <a:solidFill>
-                  <a:srgbClr val="666666"/>
-                </a:solidFill>
-                <a:latin typeface="Calibri"/>
-              </a:rPr>
-              <a:t>28</a:t>
-            </a:r>
-          </a:p>
-        </p:txBody>
-      </p:sp>
-    </p:spTree>
-  </p:cSld>
-  <p:clrMapOvr>
-    <a:masterClrMapping/>
-  </p:clrMapOvr>
-</p:sld>
-</file>
-
-<file path=ppt/slides/slide29.xml><?xml version="1.0" encoding="utf-8"?>
-<p:sld xmlns:a="http://schemas.openxmlformats.org/drawingml/2006/main" xmlns:p="http://schemas.openxmlformats.org/presentationml/2006/main" xmlns:r="http://schemas.openxmlformats.org/officeDocument/2006/relationships">
-  <p:cSld>
-    <p:bg>
-      <p:bgPr>
-        <a:solidFill>
-          <a:srgbClr val="FFFFFF"/>
-        </a:solidFill>
-        <a:effectLst/>
-      </p:bgPr>
-    </p:bg>
-    <p:spTree>
-      <p:nvGrpSpPr>
-        <p:cNvPr id="1" name=""/>
-        <p:cNvGrpSpPr/>
-        <p:nvPr/>
-      </p:nvGrpSpPr>
-      <p:grpSpPr/>
-      <p:sp>
-        <p:nvSpPr>
-          <p:cNvPr id="2" name="Rectangle 1"/>
-          <p:cNvSpPr/>
-          <p:nvPr/>
-        </p:nvSpPr>
-        <p:spPr>
-          <a:xfrm>
-            <a:off x="0" y="0"/>
-            <a:ext cx="12191695" cy="960120"/>
-          </a:xfrm>
-          <a:prstGeom prst="rect">
-            <a:avLst/>
-          </a:prstGeom>
-          <a:solidFill>
-            <a:srgbClr val="095292"/>
-          </a:solidFill>
-          <a:ln>
-            <a:noFill/>
-          </a:ln>
-        </p:spPr>
-        <p:style>
-          <a:lnRef idx="1">
-            <a:schemeClr val="accent1"/>
-          </a:lnRef>
-          <a:fillRef idx="3">
-            <a:schemeClr val="accent1"/>
-          </a:fillRef>
-          <a:effectRef idx="2">
-            <a:schemeClr val="accent1"/>
-          </a:effectRef>
-          <a:fontRef idx="minor">
-            <a:schemeClr val="lt1"/>
-          </a:fontRef>
-        </p:style>
-        <p:txBody>
-          <a:bodyPr rtlCol="0" anchor="ctr"/>
-          <a:lstStyle/>
-          <a:p>
-            <a:pPr algn="ctr"/>
-          </a:p>
-        </p:txBody>
-      </p:sp>
-      <p:sp>
-        <p:nvSpPr>
-          <p:cNvPr id="3" name="Rectangle 2"/>
-          <p:cNvSpPr/>
-          <p:nvPr/>
-        </p:nvSpPr>
-        <p:spPr>
-          <a:xfrm>
-            <a:off x="0" y="960120"/>
-            <a:ext cx="12191695" cy="41148"/>
-          </a:xfrm>
-          <a:prstGeom prst="rect">
-            <a:avLst/>
-          </a:prstGeom>
-          <a:solidFill>
-            <a:srgbClr val="FFD000"/>
-          </a:solidFill>
-          <a:ln>
-            <a:noFill/>
-          </a:ln>
-        </p:spPr>
-        <p:style>
-          <a:lnRef idx="1">
-            <a:schemeClr val="accent1"/>
-          </a:lnRef>
-          <a:fillRef idx="3">
-            <a:schemeClr val="accent1"/>
-          </a:fillRef>
-          <a:effectRef idx="2">
-            <a:schemeClr val="accent1"/>
-          </a:effectRef>
-          <a:fontRef idx="minor">
-            <a:schemeClr val="lt1"/>
-          </a:fontRef>
-        </p:style>
-        <p:txBody>
-          <a:bodyPr rtlCol="0" anchor="ctr"/>
-          <a:lstStyle/>
-          <a:p>
-            <a:pPr algn="ctr"/>
-          </a:p>
-        </p:txBody>
-      </p:sp>
-      <p:sp>
-        <p:nvSpPr>
-          <p:cNvPr id="4" name="TextBox 3"/>
-          <p:cNvSpPr txBox="1"/>
-          <p:nvPr/>
-        </p:nvSpPr>
-        <p:spPr>
-          <a:xfrm>
-            <a:off x="457200" y="164592"/>
-            <a:ext cx="11277295" cy="502920"/>
-          </a:xfrm>
-          <a:prstGeom prst="rect">
-            <a:avLst/>
-          </a:prstGeom>
-          <a:noFill/>
-        </p:spPr>
-        <p:txBody>
-          <a:bodyPr wrap="square">
-            <a:spAutoFit/>
-          </a:bodyPr>
-          <a:lstStyle/>
-          <a:p>
-            <a:r>
-              <a:rPr sz="2600" b="1" i="0">
-                <a:solidFill>
-                  <a:srgbClr val="FFFFFF"/>
-                </a:solidFill>
-                <a:latin typeface="Calibri"/>
-              </a:rPr>
-              <a:t>Taller PI VetCare — contexto / por que importa</a:t>
-            </a:r>
-          </a:p>
-        </p:txBody>
-      </p:sp>
-      <p:sp>
-        <p:nvSpPr>
-          <p:cNvPr id="5" name="TextBox 4"/>
-          <p:cNvSpPr txBox="1"/>
-          <p:nvPr/>
-        </p:nvSpPr>
-        <p:spPr>
-          <a:xfrm>
-            <a:off x="457200" y="1170432"/>
-            <a:ext cx="11277295" cy="5230368"/>
-          </a:xfrm>
-          <a:prstGeom prst="rect">
-            <a:avLst/>
-          </a:prstGeom>
-          <a:noFill/>
-        </p:spPr>
-        <p:txBody>
-          <a:bodyPr wrap="square">
-            <a:spAutoFit/>
-          </a:bodyPr>
-          <a:lstStyle/>
-          <a:p>
-            <a:pPr>
-              <a:spcAft>
-                <a:spcPts val="800"/>
-              </a:spcAft>
-            </a:pPr>
-            <a:r>
-              <a:rPr sz="2000" b="0" i="0">
-                <a:solidFill>
-                  <a:srgbClr val="333333"/>
-                </a:solidFill>
-                <a:latin typeface="Calibri"/>
-              </a:rPr>
-              <a:t>–   </a:t>
-            </a:r>
             <a:r>
               <a:rPr sz="2000" b="1" i="0">
                 <a:solidFill>
-                  <a:srgbClr val="333333"/>
-                </a:solidFill>
-                <a:latin typeface="Calibri"/>
-              </a:rPr>
-              <a:t>Por qué importa al PI:</a:t>
-            </a:r>
-            <a:r>
-              <a:rPr sz="2000" b="0" i="0">
-                <a:solidFill>
-                  <a:srgbClr val="333333"/>
-                </a:solidFill>
-                <a:latin typeface="Calibri"/>
-              </a:rPr>
-              <a:t> app llama contrato, no SQL suelto.</a:t>
-            </a:r>
-          </a:p>
-          <a:p>
-            <a:pPr>
-              <a:spcAft>
-                <a:spcPts val="800"/>
-              </a:spcAft>
-            </a:pPr>
-            <a:r>
-              <a:rPr sz="2000" b="0" i="0">
-                <a:solidFill>
-                  <a:srgbClr val="333333"/>
-                </a:solidFill>
-                <a:latin typeface="Calibri"/>
-              </a:rPr>
-              <a:t>–   Preparar sustentacion.</a:t>
-            </a:r>
-          </a:p>
-        </p:txBody>
-      </p:sp>
-      <p:sp>
-        <p:nvSpPr>
-          <p:cNvPr id="6" name="TextBox 5"/>
-          <p:cNvSpPr txBox="1"/>
-          <p:nvPr/>
-        </p:nvSpPr>
-        <p:spPr>
-          <a:xfrm>
-            <a:off x="11185855" y="6473952"/>
-            <a:ext cx="640080" cy="274320"/>
-          </a:xfrm>
-          <a:prstGeom prst="rect">
-            <a:avLst/>
-          </a:prstGeom>
-          <a:noFill/>
-        </p:spPr>
-        <p:txBody>
-          <a:bodyPr wrap="square">
-            <a:spAutoFit/>
-          </a:bodyPr>
-          <a:lstStyle/>
-          <a:p>
-            <a:pPr algn="r"/>
-            <a:r>
-              <a:rPr sz="1100" b="0" i="0">
-                <a:solidFill>
-                  <a:srgbClr val="666666"/>
-                </a:solidFill>
-                <a:latin typeface="Calibri"/>
-              </a:rPr>
-              <a:t>29</a:t>
+                  <a:srgbClr val="269CCB"/>
+                </a:solidFill>
+                <a:latin typeface="Calibri"/>
+              </a:rPr>
+              <a:t>Todo lo visto queda proyectado para repasar</a:t>
             </a:r>
           </a:p>
         </p:txBody>
@@ -11907,7 +11992,7 @@
                 </a:solidFill>
                 <a:latin typeface="Calibri"/>
               </a:rPr>
-              <a:t>Taller guiado = tarea del PI</a:t>
+              <a:t>Práctica (opcional, guía en la carpeta)</a:t>
             </a:r>
           </a:p>
         </p:txBody>
@@ -12022,7 +12107,7 @@
                 </a:solidFill>
                 <a:latin typeface="Calibri"/>
               </a:rPr>
-              <a:t>Criterios de exito · cierre · dudas del PI</a:t>
+              <a:t>Cierre conceptual · dudas</a:t>
             </a:r>
           </a:p>
         </p:txBody>
@@ -12111,3224 +12196,6 @@
                 <a:latin typeface="Calibri"/>
               </a:rPr>
               <a:t>3</a:t>
-            </a:r>
-          </a:p>
-        </p:txBody>
-      </p:sp>
-    </p:spTree>
-  </p:cSld>
-  <p:clrMapOvr>
-    <a:masterClrMapping/>
-  </p:clrMapOvr>
-</p:sld>
-</file>
-
-<file path=ppt/slides/slide30.xml><?xml version="1.0" encoding="utf-8"?>
-<p:sld xmlns:a="http://schemas.openxmlformats.org/drawingml/2006/main" xmlns:p="http://schemas.openxmlformats.org/presentationml/2006/main" xmlns:r="http://schemas.openxmlformats.org/officeDocument/2006/relationships">
-  <p:cSld>
-    <p:bg>
-      <p:bgPr>
-        <a:solidFill>
-          <a:srgbClr val="FFFFFF"/>
-        </a:solidFill>
-        <a:effectLst/>
-      </p:bgPr>
-    </p:bg>
-    <p:spTree>
-      <p:nvGrpSpPr>
-        <p:cNvPr id="1" name=""/>
-        <p:cNvGrpSpPr/>
-        <p:nvPr/>
-      </p:nvGrpSpPr>
-      <p:grpSpPr/>
-      <p:sp>
-        <p:nvSpPr>
-          <p:cNvPr id="2" name="Rectangle 1"/>
-          <p:cNvSpPr/>
-          <p:nvPr/>
-        </p:nvSpPr>
-        <p:spPr>
-          <a:xfrm>
-            <a:off x="0" y="0"/>
-            <a:ext cx="12191695" cy="960120"/>
-          </a:xfrm>
-          <a:prstGeom prst="rect">
-            <a:avLst/>
-          </a:prstGeom>
-          <a:solidFill>
-            <a:srgbClr val="095292"/>
-          </a:solidFill>
-          <a:ln>
-            <a:noFill/>
-          </a:ln>
-        </p:spPr>
-        <p:style>
-          <a:lnRef idx="1">
-            <a:schemeClr val="accent1"/>
-          </a:lnRef>
-          <a:fillRef idx="3">
-            <a:schemeClr val="accent1"/>
-          </a:fillRef>
-          <a:effectRef idx="2">
-            <a:schemeClr val="accent1"/>
-          </a:effectRef>
-          <a:fontRef idx="minor">
-            <a:schemeClr val="lt1"/>
-          </a:fontRef>
-        </p:style>
-        <p:txBody>
-          <a:bodyPr rtlCol="0" anchor="ctr"/>
-          <a:lstStyle/>
-          <a:p>
-            <a:pPr algn="ctr"/>
-          </a:p>
-        </p:txBody>
-      </p:sp>
-      <p:sp>
-        <p:nvSpPr>
-          <p:cNvPr id="3" name="Rectangle 2"/>
-          <p:cNvSpPr/>
-          <p:nvPr/>
-        </p:nvSpPr>
-        <p:spPr>
-          <a:xfrm>
-            <a:off x="0" y="960120"/>
-            <a:ext cx="12191695" cy="41148"/>
-          </a:xfrm>
-          <a:prstGeom prst="rect">
-            <a:avLst/>
-          </a:prstGeom>
-          <a:solidFill>
-            <a:srgbClr val="FFD000"/>
-          </a:solidFill>
-          <a:ln>
-            <a:noFill/>
-          </a:ln>
-        </p:spPr>
-        <p:style>
-          <a:lnRef idx="1">
-            <a:schemeClr val="accent1"/>
-          </a:lnRef>
-          <a:fillRef idx="3">
-            <a:schemeClr val="accent1"/>
-          </a:fillRef>
-          <a:effectRef idx="2">
-            <a:schemeClr val="accent1"/>
-          </a:effectRef>
-          <a:fontRef idx="minor">
-            <a:schemeClr val="lt1"/>
-          </a:fontRef>
-        </p:style>
-        <p:txBody>
-          <a:bodyPr rtlCol="0" anchor="ctr"/>
-          <a:lstStyle/>
-          <a:p>
-            <a:pPr algn="ctr"/>
-          </a:p>
-        </p:txBody>
-      </p:sp>
-      <p:sp>
-        <p:nvSpPr>
-          <p:cNvPr id="4" name="TextBox 3"/>
-          <p:cNvSpPr txBox="1"/>
-          <p:nvPr/>
-        </p:nvSpPr>
-        <p:spPr>
-          <a:xfrm>
-            <a:off x="457200" y="164592"/>
-            <a:ext cx="11277295" cy="502920"/>
-          </a:xfrm>
-          <a:prstGeom prst="rect">
-            <a:avLst/>
-          </a:prstGeom>
-          <a:noFill/>
-        </p:spPr>
-        <p:txBody>
-          <a:bodyPr wrap="square">
-            <a:spAutoFit/>
-          </a:bodyPr>
-          <a:lstStyle/>
-          <a:p>
-            <a:r>
-              <a:rPr sz="2600" b="1" i="0">
-                <a:solidFill>
-                  <a:srgbClr val="FFFFFF"/>
-                </a:solidFill>
-                <a:latin typeface="Calibri"/>
-              </a:rPr>
-              <a:t>Taller PI VetCare — objetivo y criterios</a:t>
-            </a:r>
-          </a:p>
-        </p:txBody>
-      </p:sp>
-      <p:sp>
-        <p:nvSpPr>
-          <p:cNvPr id="5" name="TextBox 4"/>
-          <p:cNvSpPr txBox="1"/>
-          <p:nvPr/>
-        </p:nvSpPr>
-        <p:spPr>
-          <a:xfrm>
-            <a:off x="457200" y="1170432"/>
-            <a:ext cx="11277295" cy="5230368"/>
-          </a:xfrm>
-          <a:prstGeom prst="rect">
-            <a:avLst/>
-          </a:prstGeom>
-          <a:noFill/>
-        </p:spPr>
-        <p:txBody>
-          <a:bodyPr wrap="square">
-            <a:spAutoFit/>
-          </a:bodyPr>
-          <a:lstStyle/>
-          <a:p>
-            <a:pPr>
-              <a:spcAft>
-                <a:spcPts val="800"/>
-              </a:spcAft>
-            </a:pPr>
-            <a:r>
-              <a:rPr sz="2000" b="0" i="0">
-                <a:solidFill>
-                  <a:srgbClr val="333333"/>
-                </a:solidFill>
-                <a:latin typeface="Calibri"/>
-              </a:rPr>
-              <a:t>–   </a:t>
-            </a:r>
-            <a:r>
-              <a:rPr sz="2000" b="1" i="0">
-                <a:solidFill>
-                  <a:srgbClr val="333333"/>
-                </a:solidFill>
-                <a:latin typeface="Calibri"/>
-              </a:rPr>
-              <a:t>Objetivo:</a:t>
-            </a:r>
-            <a:r>
-              <a:rPr sz="2000" b="0" i="0">
-                <a:solidFill>
-                  <a:srgbClr val="333333"/>
-                </a:solidFill>
-                <a:latin typeface="Calibri"/>
-              </a:rPr>
-              <a:t> Contrato &gt;=3 ops + outline pitch 5-8 min.</a:t>
-            </a:r>
-          </a:p>
-          <a:p>
-            <a:pPr>
-              <a:spcAft>
-                <a:spcPts val="800"/>
-              </a:spcAft>
-            </a:pPr>
-            <a:r>
-              <a:rPr sz="2000" b="0" i="0">
-                <a:solidFill>
-                  <a:srgbClr val="333333"/>
-                </a:solidFill>
-                <a:latin typeface="Calibri"/>
-              </a:rPr>
-              <a:t>–   </a:t>
-            </a:r>
-            <a:r>
-              <a:rPr sz="2000" b="1" i="0">
-                <a:solidFill>
-                  <a:srgbClr val="333333"/>
-                </a:solidFill>
-                <a:latin typeface="Calibri"/>
-              </a:rPr>
-              <a:t>Exito:</a:t>
-            </a:r>
-            <a:r>
-              <a:rPr sz="2000" b="0" i="0">
-                <a:solidFill>
-                  <a:srgbClr val="333333"/>
-                </a:solidFill>
-                <a:latin typeface="Calibri"/>
-              </a:rPr>
-              <a:t> Contrato 3 ops.</a:t>
-            </a:r>
-          </a:p>
-          <a:p>
-            <a:pPr>
-              <a:spcAft>
-                <a:spcPts val="800"/>
-              </a:spcAft>
-            </a:pPr>
-            <a:r>
-              <a:rPr sz="2000" b="0" i="0">
-                <a:solidFill>
-                  <a:srgbClr val="333333"/>
-                </a:solidFill>
-                <a:latin typeface="Calibri"/>
-              </a:rPr>
-              <a:t>–   </a:t>
-            </a:r>
-            <a:r>
-              <a:rPr sz="2000" b="1" i="0">
-                <a:solidFill>
-                  <a:srgbClr val="333333"/>
-                </a:solidFill>
-                <a:latin typeface="Calibri"/>
-              </a:rPr>
-              <a:t>Exito:</a:t>
-            </a:r>
-            <a:r>
-              <a:rPr sz="2000" b="0" i="0">
-                <a:solidFill>
-                  <a:srgbClr val="333333"/>
-                </a:solidFill>
-                <a:latin typeface="Calibri"/>
-              </a:rPr>
-              <a:t> Parametros/errores/ejemplo.</a:t>
-            </a:r>
-          </a:p>
-          <a:p>
-            <a:pPr>
-              <a:spcAft>
-                <a:spcPts val="800"/>
-              </a:spcAft>
-            </a:pPr>
-            <a:r>
-              <a:rPr sz="2000" b="0" i="0">
-                <a:solidFill>
-                  <a:srgbClr val="333333"/>
-                </a:solidFill>
-                <a:latin typeface="Calibri"/>
-              </a:rPr>
-              <a:t>–   </a:t>
-            </a:r>
-            <a:r>
-              <a:rPr sz="2000" b="1" i="0">
-                <a:solidFill>
-                  <a:srgbClr val="333333"/>
-                </a:solidFill>
-                <a:latin typeface="Calibri"/>
-              </a:rPr>
-              <a:t>Exito:</a:t>
-            </a:r>
-            <a:r>
-              <a:rPr sz="2000" b="0" i="0">
-                <a:solidFill>
-                  <a:srgbClr val="333333"/>
-                </a:solidFill>
-                <a:latin typeface="Calibri"/>
-              </a:rPr>
-              <a:t> Outline pitch.</a:t>
-            </a:r>
-          </a:p>
-          <a:p>
-            <a:pPr>
-              <a:spcAft>
-                <a:spcPts val="800"/>
-              </a:spcAft>
-            </a:pPr>
-            <a:r>
-              <a:rPr sz="2000" b="0" i="0">
-                <a:solidFill>
-                  <a:srgbClr val="333333"/>
-                </a:solidFill>
-                <a:latin typeface="Calibri"/>
-              </a:rPr>
-              <a:t>–   </a:t>
-            </a:r>
-            <a:r>
-              <a:rPr sz="2000" b="1" i="0">
-                <a:solidFill>
-                  <a:srgbClr val="333333"/>
-                </a:solidFill>
-                <a:latin typeface="Calibri"/>
-              </a:rPr>
-              <a:t>Exito:</a:t>
-            </a:r>
-            <a:r>
-              <a:rPr sz="2000" b="0" i="0">
-                <a:solidFill>
-                  <a:srgbClr val="333333"/>
-                </a:solidFill>
-                <a:latin typeface="Calibri"/>
-              </a:rPr>
-              <a:t> Borrador final.</a:t>
-            </a:r>
-          </a:p>
-        </p:txBody>
-      </p:sp>
-      <p:sp>
-        <p:nvSpPr>
-          <p:cNvPr id="6" name="TextBox 5"/>
-          <p:cNvSpPr txBox="1"/>
-          <p:nvPr/>
-        </p:nvSpPr>
-        <p:spPr>
-          <a:xfrm>
-            <a:off x="11185855" y="6473952"/>
-            <a:ext cx="640080" cy="274320"/>
-          </a:xfrm>
-          <a:prstGeom prst="rect">
-            <a:avLst/>
-          </a:prstGeom>
-          <a:noFill/>
-        </p:spPr>
-        <p:txBody>
-          <a:bodyPr wrap="square">
-            <a:spAutoFit/>
-          </a:bodyPr>
-          <a:lstStyle/>
-          <a:p>
-            <a:pPr algn="r"/>
-            <a:r>
-              <a:rPr sz="1100" b="0" i="0">
-                <a:solidFill>
-                  <a:srgbClr val="666666"/>
-                </a:solidFill>
-                <a:latin typeface="Calibri"/>
-              </a:rPr>
-              <a:t>30</a:t>
-            </a:r>
-          </a:p>
-        </p:txBody>
-      </p:sp>
-    </p:spTree>
-  </p:cSld>
-  <p:clrMapOvr>
-    <a:masterClrMapping/>
-  </p:clrMapOvr>
-</p:sld>
-</file>
-
-<file path=ppt/slides/slide31.xml><?xml version="1.0" encoding="utf-8"?>
-<p:sld xmlns:a="http://schemas.openxmlformats.org/drawingml/2006/main" xmlns:p="http://schemas.openxmlformats.org/presentationml/2006/main" xmlns:r="http://schemas.openxmlformats.org/officeDocument/2006/relationships">
-  <p:cSld>
-    <p:bg>
-      <p:bgPr>
-        <a:solidFill>
-          <a:srgbClr val="FFFFFF"/>
-        </a:solidFill>
-        <a:effectLst/>
-      </p:bgPr>
-    </p:bg>
-    <p:spTree>
-      <p:nvGrpSpPr>
-        <p:cNvPr id="1" name=""/>
-        <p:cNvGrpSpPr/>
-        <p:nvPr/>
-      </p:nvGrpSpPr>
-      <p:grpSpPr/>
-      <p:sp>
-        <p:nvSpPr>
-          <p:cNvPr id="2" name="Rectangle 1"/>
-          <p:cNvSpPr/>
-          <p:nvPr/>
-        </p:nvSpPr>
-        <p:spPr>
-          <a:xfrm>
-            <a:off x="0" y="0"/>
-            <a:ext cx="12191695" cy="960120"/>
-          </a:xfrm>
-          <a:prstGeom prst="rect">
-            <a:avLst/>
-          </a:prstGeom>
-          <a:solidFill>
-            <a:srgbClr val="095292"/>
-          </a:solidFill>
-          <a:ln>
-            <a:noFill/>
-          </a:ln>
-        </p:spPr>
-        <p:style>
-          <a:lnRef idx="1">
-            <a:schemeClr val="accent1"/>
-          </a:lnRef>
-          <a:fillRef idx="3">
-            <a:schemeClr val="accent1"/>
-          </a:fillRef>
-          <a:effectRef idx="2">
-            <a:schemeClr val="accent1"/>
-          </a:effectRef>
-          <a:fontRef idx="minor">
-            <a:schemeClr val="lt1"/>
-          </a:fontRef>
-        </p:style>
-        <p:txBody>
-          <a:bodyPr rtlCol="0" anchor="ctr"/>
-          <a:lstStyle/>
-          <a:p>
-            <a:pPr algn="ctr"/>
-          </a:p>
-        </p:txBody>
-      </p:sp>
-      <p:sp>
-        <p:nvSpPr>
-          <p:cNvPr id="3" name="Rectangle 2"/>
-          <p:cNvSpPr/>
-          <p:nvPr/>
-        </p:nvSpPr>
-        <p:spPr>
-          <a:xfrm>
-            <a:off x="0" y="960120"/>
-            <a:ext cx="12191695" cy="41148"/>
-          </a:xfrm>
-          <a:prstGeom prst="rect">
-            <a:avLst/>
-          </a:prstGeom>
-          <a:solidFill>
-            <a:srgbClr val="FFD000"/>
-          </a:solidFill>
-          <a:ln>
-            <a:noFill/>
-          </a:ln>
-        </p:spPr>
-        <p:style>
-          <a:lnRef idx="1">
-            <a:schemeClr val="accent1"/>
-          </a:lnRef>
-          <a:fillRef idx="3">
-            <a:schemeClr val="accent1"/>
-          </a:fillRef>
-          <a:effectRef idx="2">
-            <a:schemeClr val="accent1"/>
-          </a:effectRef>
-          <a:fontRef idx="minor">
-            <a:schemeClr val="lt1"/>
-          </a:fontRef>
-        </p:style>
-        <p:txBody>
-          <a:bodyPr rtlCol="0" anchor="ctr"/>
-          <a:lstStyle/>
-          <a:p>
-            <a:pPr algn="ctr"/>
-          </a:p>
-        </p:txBody>
-      </p:sp>
-      <p:sp>
-        <p:nvSpPr>
-          <p:cNvPr id="4" name="TextBox 3"/>
-          <p:cNvSpPr txBox="1"/>
-          <p:nvPr/>
-        </p:nvSpPr>
-        <p:spPr>
-          <a:xfrm>
-            <a:off x="457200" y="164592"/>
-            <a:ext cx="11277295" cy="502920"/>
-          </a:xfrm>
-          <a:prstGeom prst="rect">
-            <a:avLst/>
-          </a:prstGeom>
-          <a:noFill/>
-        </p:spPr>
-        <p:txBody>
-          <a:bodyPr wrap="square">
-            <a:spAutoFit/>
-          </a:bodyPr>
-          <a:lstStyle/>
-          <a:p>
-            <a:r>
-              <a:rPr sz="2600" b="1" i="0">
-                <a:solidFill>
-                  <a:srgbClr val="FFFFFF"/>
-                </a:solidFill>
-                <a:latin typeface="Calibri"/>
-              </a:rPr>
-              <a:t>Taller PI VetCare — escenario / datos de partida</a:t>
-            </a:r>
-          </a:p>
-        </p:txBody>
-      </p:sp>
-      <p:sp>
-        <p:nvSpPr>
-          <p:cNvPr id="5" name="TextBox 4"/>
-          <p:cNvSpPr txBox="1"/>
-          <p:nvPr/>
-        </p:nvSpPr>
-        <p:spPr>
-          <a:xfrm>
-            <a:off x="457200" y="1170432"/>
-            <a:ext cx="11277295" cy="5230368"/>
-          </a:xfrm>
-          <a:prstGeom prst="rect">
-            <a:avLst/>
-          </a:prstGeom>
-          <a:noFill/>
-        </p:spPr>
-        <p:txBody>
-          <a:bodyPr wrap="square">
-            <a:spAutoFit/>
-          </a:bodyPr>
-          <a:lstStyle/>
-          <a:p>
-            <a:pPr>
-              <a:spcAft>
-                <a:spcPts val="800"/>
-              </a:spcAft>
-            </a:pPr>
-            <a:r>
-              <a:rPr sz="2000" b="0" i="0">
-                <a:solidFill>
-                  <a:srgbClr val="333333"/>
-                </a:solidFill>
-                <a:latin typeface="Calibri"/>
-              </a:rPr>
-              <a:t>–   Plantilla sp_agendar_cita / consulta / facturar.</a:t>
-            </a:r>
-          </a:p>
-        </p:txBody>
-      </p:sp>
-      <p:sp>
-        <p:nvSpPr>
-          <p:cNvPr id="6" name="TextBox 5"/>
-          <p:cNvSpPr txBox="1"/>
-          <p:nvPr/>
-        </p:nvSpPr>
-        <p:spPr>
-          <a:xfrm>
-            <a:off x="11185855" y="6473952"/>
-            <a:ext cx="640080" cy="274320"/>
-          </a:xfrm>
-          <a:prstGeom prst="rect">
-            <a:avLst/>
-          </a:prstGeom>
-          <a:noFill/>
-        </p:spPr>
-        <p:txBody>
-          <a:bodyPr wrap="square">
-            <a:spAutoFit/>
-          </a:bodyPr>
-          <a:lstStyle/>
-          <a:p>
-            <a:pPr algn="r"/>
-            <a:r>
-              <a:rPr sz="1100" b="0" i="0">
-                <a:solidFill>
-                  <a:srgbClr val="666666"/>
-                </a:solidFill>
-                <a:latin typeface="Calibri"/>
-              </a:rPr>
-              <a:t>31</a:t>
-            </a:r>
-          </a:p>
-        </p:txBody>
-      </p:sp>
-    </p:spTree>
-  </p:cSld>
-  <p:clrMapOvr>
-    <a:masterClrMapping/>
-  </p:clrMapOvr>
-</p:sld>
-</file>
-
-<file path=ppt/slides/slide32.xml><?xml version="1.0" encoding="utf-8"?>
-<p:sld xmlns:a="http://schemas.openxmlformats.org/drawingml/2006/main" xmlns:p="http://schemas.openxmlformats.org/presentationml/2006/main" xmlns:r="http://schemas.openxmlformats.org/officeDocument/2006/relationships">
-  <p:cSld>
-    <p:bg>
-      <p:bgPr>
-        <a:solidFill>
-          <a:srgbClr val="FFFFFF"/>
-        </a:solidFill>
-        <a:effectLst/>
-      </p:bgPr>
-    </p:bg>
-    <p:spTree>
-      <p:nvGrpSpPr>
-        <p:cNvPr id="1" name=""/>
-        <p:cNvGrpSpPr/>
-        <p:nvPr/>
-      </p:nvGrpSpPr>
-      <p:grpSpPr/>
-      <p:sp>
-        <p:nvSpPr>
-          <p:cNvPr id="2" name="Rectangle 1"/>
-          <p:cNvSpPr/>
-          <p:nvPr/>
-        </p:nvSpPr>
-        <p:spPr>
-          <a:xfrm>
-            <a:off x="0" y="0"/>
-            <a:ext cx="12191695" cy="960120"/>
-          </a:xfrm>
-          <a:prstGeom prst="rect">
-            <a:avLst/>
-          </a:prstGeom>
-          <a:solidFill>
-            <a:srgbClr val="095292"/>
-          </a:solidFill>
-          <a:ln>
-            <a:noFill/>
-          </a:ln>
-        </p:spPr>
-        <p:style>
-          <a:lnRef idx="1">
-            <a:schemeClr val="accent1"/>
-          </a:lnRef>
-          <a:fillRef idx="3">
-            <a:schemeClr val="accent1"/>
-          </a:fillRef>
-          <a:effectRef idx="2">
-            <a:schemeClr val="accent1"/>
-          </a:effectRef>
-          <a:fontRef idx="minor">
-            <a:schemeClr val="lt1"/>
-          </a:fontRef>
-        </p:style>
-        <p:txBody>
-          <a:bodyPr rtlCol="0" anchor="ctr"/>
-          <a:lstStyle/>
-          <a:p>
-            <a:pPr algn="ctr"/>
-          </a:p>
-        </p:txBody>
-      </p:sp>
-      <p:sp>
-        <p:nvSpPr>
-          <p:cNvPr id="3" name="Rectangle 2"/>
-          <p:cNvSpPr/>
-          <p:nvPr/>
-        </p:nvSpPr>
-        <p:spPr>
-          <a:xfrm>
-            <a:off x="0" y="960120"/>
-            <a:ext cx="12191695" cy="41148"/>
-          </a:xfrm>
-          <a:prstGeom prst="rect">
-            <a:avLst/>
-          </a:prstGeom>
-          <a:solidFill>
-            <a:srgbClr val="FFD000"/>
-          </a:solidFill>
-          <a:ln>
-            <a:noFill/>
-          </a:ln>
-        </p:spPr>
-        <p:style>
-          <a:lnRef idx="1">
-            <a:schemeClr val="accent1"/>
-          </a:lnRef>
-          <a:fillRef idx="3">
-            <a:schemeClr val="accent1"/>
-          </a:fillRef>
-          <a:effectRef idx="2">
-            <a:schemeClr val="accent1"/>
-          </a:effectRef>
-          <a:fontRef idx="minor">
-            <a:schemeClr val="lt1"/>
-          </a:fontRef>
-        </p:style>
-        <p:txBody>
-          <a:bodyPr rtlCol="0" anchor="ctr"/>
-          <a:lstStyle/>
-          <a:p>
-            <a:pPr algn="ctr"/>
-          </a:p>
-        </p:txBody>
-      </p:sp>
-      <p:sp>
-        <p:nvSpPr>
-          <p:cNvPr id="4" name="TextBox 3"/>
-          <p:cNvSpPr txBox="1"/>
-          <p:nvPr/>
-        </p:nvSpPr>
-        <p:spPr>
-          <a:xfrm>
-            <a:off x="457200" y="164592"/>
-            <a:ext cx="11277295" cy="502920"/>
-          </a:xfrm>
-          <a:prstGeom prst="rect">
-            <a:avLst/>
-          </a:prstGeom>
-          <a:noFill/>
-        </p:spPr>
-        <p:txBody>
-          <a:bodyPr wrap="square">
-            <a:spAutoFit/>
-          </a:bodyPr>
-          <a:lstStyle/>
-          <a:p>
-            <a:r>
-              <a:rPr sz="2600" b="1" i="0">
-                <a:solidFill>
-                  <a:srgbClr val="FFFFFF"/>
-                </a:solidFill>
-                <a:latin typeface="Calibri"/>
-              </a:rPr>
-              <a:t>Taller PI VetCare — pasos guiados</a:t>
-            </a:r>
-          </a:p>
-        </p:txBody>
-      </p:sp>
-      <p:sp>
-        <p:nvSpPr>
-          <p:cNvPr id="5" name="Rounded Rectangle 4"/>
-          <p:cNvSpPr/>
-          <p:nvPr/>
-        </p:nvSpPr>
-        <p:spPr>
-          <a:xfrm>
-            <a:off x="457200" y="1554480"/>
-            <a:ext cx="11277295" cy="1051560"/>
-          </a:xfrm>
-          <a:prstGeom prst="roundRect">
-            <a:avLst>
-              <a:gd name="adj" fmla="val 12000"/>
-            </a:avLst>
-          </a:prstGeom>
-          <a:solidFill>
-            <a:srgbClr val="F2F2F2"/>
-          </a:solidFill>
-          <a:ln>
-            <a:noFill/>
-          </a:ln>
-        </p:spPr>
-        <p:style>
-          <a:lnRef idx="1">
-            <a:schemeClr val="accent1"/>
-          </a:lnRef>
-          <a:fillRef idx="3">
-            <a:schemeClr val="accent1"/>
-          </a:fillRef>
-          <a:effectRef idx="2">
-            <a:schemeClr val="accent1"/>
-          </a:effectRef>
-          <a:fontRef idx="minor">
-            <a:schemeClr val="lt1"/>
-          </a:fontRef>
-        </p:style>
-        <p:txBody>
-          <a:bodyPr rtlCol="0" anchor="ctr"/>
-          <a:lstStyle/>
-          <a:p>
-            <a:pPr algn="ctr"/>
-          </a:p>
-        </p:txBody>
-      </p:sp>
-      <p:sp>
-        <p:nvSpPr>
-          <p:cNvPr id="6" name="Rounded Rectangle 5"/>
-          <p:cNvSpPr/>
-          <p:nvPr/>
-        </p:nvSpPr>
-        <p:spPr>
-          <a:xfrm>
-            <a:off x="594360" y="1860804"/>
-            <a:ext cx="438912" cy="438912"/>
-          </a:xfrm>
-          <a:prstGeom prst="roundRect">
-            <a:avLst>
-              <a:gd name="adj" fmla="val 12000"/>
-            </a:avLst>
-          </a:prstGeom>
-          <a:solidFill>
-            <a:srgbClr val="095292"/>
-          </a:solidFill>
-          <a:ln>
-            <a:noFill/>
-          </a:ln>
-        </p:spPr>
-        <p:style>
-          <a:lnRef idx="1">
-            <a:schemeClr val="accent1"/>
-          </a:lnRef>
-          <a:fillRef idx="3">
-            <a:schemeClr val="accent1"/>
-          </a:fillRef>
-          <a:effectRef idx="2">
-            <a:schemeClr val="accent1"/>
-          </a:effectRef>
-          <a:fontRef idx="minor">
-            <a:schemeClr val="lt1"/>
-          </a:fontRef>
-        </p:style>
-        <p:txBody>
-          <a:bodyPr rtlCol="0" anchor="ctr"/>
-          <a:lstStyle/>
-          <a:p>
-            <a:pPr algn="ctr"/>
-          </a:p>
-        </p:txBody>
-      </p:sp>
-      <p:sp>
-        <p:nvSpPr>
-          <p:cNvPr id="7" name="TextBox 6"/>
-          <p:cNvSpPr txBox="1"/>
-          <p:nvPr/>
-        </p:nvSpPr>
-        <p:spPr>
-          <a:xfrm>
-            <a:off x="594360" y="1860804"/>
-            <a:ext cx="438912" cy="438912"/>
-          </a:xfrm>
-          <a:prstGeom prst="rect">
-            <a:avLst/>
-          </a:prstGeom>
-          <a:noFill/>
-        </p:spPr>
-        <p:txBody>
-          <a:bodyPr wrap="square" anchor="ctr"/>
-          <a:lstStyle/>
-          <a:p>
-            <a:pPr algn="ctr"/>
-            <a:r>
-              <a:rPr sz="1600" b="1" i="0">
-                <a:solidFill>
-                  <a:srgbClr val="FFFFFF"/>
-                </a:solidFill>
-                <a:latin typeface="Calibri"/>
-              </a:rPr>
-              <a:t>1</a:t>
-            </a:r>
-          </a:p>
-        </p:txBody>
-      </p:sp>
-      <p:sp>
-        <p:nvSpPr>
-          <p:cNvPr id="8" name="TextBox 7"/>
-          <p:cNvSpPr txBox="1"/>
-          <p:nvPr/>
-        </p:nvSpPr>
-        <p:spPr>
-          <a:xfrm>
-            <a:off x="1188720" y="1645920"/>
-            <a:ext cx="10271455" cy="886968"/>
-          </a:xfrm>
-          <a:prstGeom prst="rect">
-            <a:avLst/>
-          </a:prstGeom>
-          <a:noFill/>
-        </p:spPr>
-        <p:txBody>
-          <a:bodyPr wrap="square" anchor="ctr"/>
-          <a:lstStyle/>
-          <a:p>
-            <a:r>
-              <a:rPr sz="1500" b="1" i="0">
-                <a:solidFill>
-                  <a:srgbClr val="095292"/>
-                </a:solidFill>
-                <a:latin typeface="Calibri"/>
-              </a:rPr>
-              <a:t>Redactar contrato de &gt;=3 operaciones.</a:t>
-            </a:r>
-          </a:p>
-        </p:txBody>
-      </p:sp>
-      <p:sp>
-        <p:nvSpPr>
-          <p:cNvPr id="9" name="Rounded Rectangle 8"/>
-          <p:cNvSpPr/>
-          <p:nvPr/>
-        </p:nvSpPr>
-        <p:spPr>
-          <a:xfrm>
-            <a:off x="457200" y="2697480"/>
-            <a:ext cx="11277295" cy="1051560"/>
-          </a:xfrm>
-          <a:prstGeom prst="roundRect">
-            <a:avLst>
-              <a:gd name="adj" fmla="val 12000"/>
-            </a:avLst>
-          </a:prstGeom>
-          <a:solidFill>
-            <a:srgbClr val="E8F4FA"/>
-          </a:solidFill>
-          <a:ln>
-            <a:noFill/>
-          </a:ln>
-        </p:spPr>
-        <p:style>
-          <a:lnRef idx="1">
-            <a:schemeClr val="accent1"/>
-          </a:lnRef>
-          <a:fillRef idx="3">
-            <a:schemeClr val="accent1"/>
-          </a:fillRef>
-          <a:effectRef idx="2">
-            <a:schemeClr val="accent1"/>
-          </a:effectRef>
-          <a:fontRef idx="minor">
-            <a:schemeClr val="lt1"/>
-          </a:fontRef>
-        </p:style>
-        <p:txBody>
-          <a:bodyPr rtlCol="0" anchor="ctr"/>
-          <a:lstStyle/>
-          <a:p>
-            <a:pPr algn="ctr"/>
-          </a:p>
-        </p:txBody>
-      </p:sp>
-      <p:sp>
-        <p:nvSpPr>
-          <p:cNvPr id="10" name="Rounded Rectangle 9"/>
-          <p:cNvSpPr/>
-          <p:nvPr/>
-        </p:nvSpPr>
-        <p:spPr>
-          <a:xfrm>
-            <a:off x="594360" y="3003804"/>
-            <a:ext cx="438912" cy="438912"/>
-          </a:xfrm>
-          <a:prstGeom prst="roundRect">
-            <a:avLst>
-              <a:gd name="adj" fmla="val 12000"/>
-            </a:avLst>
-          </a:prstGeom>
-          <a:solidFill>
-            <a:srgbClr val="095292"/>
-          </a:solidFill>
-          <a:ln>
-            <a:noFill/>
-          </a:ln>
-        </p:spPr>
-        <p:style>
-          <a:lnRef idx="1">
-            <a:schemeClr val="accent1"/>
-          </a:lnRef>
-          <a:fillRef idx="3">
-            <a:schemeClr val="accent1"/>
-          </a:fillRef>
-          <a:effectRef idx="2">
-            <a:schemeClr val="accent1"/>
-          </a:effectRef>
-          <a:fontRef idx="minor">
-            <a:schemeClr val="lt1"/>
-          </a:fontRef>
-        </p:style>
-        <p:txBody>
-          <a:bodyPr rtlCol="0" anchor="ctr"/>
-          <a:lstStyle/>
-          <a:p>
-            <a:pPr algn="ctr"/>
-          </a:p>
-        </p:txBody>
-      </p:sp>
-      <p:sp>
-        <p:nvSpPr>
-          <p:cNvPr id="11" name="TextBox 10"/>
-          <p:cNvSpPr txBox="1"/>
-          <p:nvPr/>
-        </p:nvSpPr>
-        <p:spPr>
-          <a:xfrm>
-            <a:off x="594360" y="3003804"/>
-            <a:ext cx="438912" cy="438912"/>
-          </a:xfrm>
-          <a:prstGeom prst="rect">
-            <a:avLst/>
-          </a:prstGeom>
-          <a:noFill/>
-        </p:spPr>
-        <p:txBody>
-          <a:bodyPr wrap="square" anchor="ctr"/>
-          <a:lstStyle/>
-          <a:p>
-            <a:pPr algn="ctr"/>
-            <a:r>
-              <a:rPr sz="1600" b="1" i="0">
-                <a:solidFill>
-                  <a:srgbClr val="FFFFFF"/>
-                </a:solidFill>
-                <a:latin typeface="Calibri"/>
-              </a:rPr>
-              <a:t>2</a:t>
-            </a:r>
-          </a:p>
-        </p:txBody>
-      </p:sp>
-      <p:sp>
-        <p:nvSpPr>
-          <p:cNvPr id="12" name="TextBox 11"/>
-          <p:cNvSpPr txBox="1"/>
-          <p:nvPr/>
-        </p:nvSpPr>
-        <p:spPr>
-          <a:xfrm>
-            <a:off x="1188720" y="2788920"/>
-            <a:ext cx="10271455" cy="886968"/>
-          </a:xfrm>
-          <a:prstGeom prst="rect">
-            <a:avLst/>
-          </a:prstGeom>
-          <a:noFill/>
-        </p:spPr>
-        <p:txBody>
-          <a:bodyPr wrap="square" anchor="ctr"/>
-          <a:lstStyle/>
-          <a:p>
-            <a:r>
-              <a:rPr sz="1500" b="1" i="0">
-                <a:solidFill>
-                  <a:srgbClr val="095292"/>
-                </a:solidFill>
-                <a:latin typeface="Calibri"/>
-              </a:rPr>
-              <a:t>Diagrama flujo app-&gt;BD (Excalidraw) opcional.</a:t>
-            </a:r>
-          </a:p>
-        </p:txBody>
-      </p:sp>
-      <p:sp>
-        <p:nvSpPr>
-          <p:cNvPr id="13" name="Rounded Rectangle 12"/>
-          <p:cNvSpPr/>
-          <p:nvPr/>
-        </p:nvSpPr>
-        <p:spPr>
-          <a:xfrm>
-            <a:off x="457200" y="3840480"/>
-            <a:ext cx="11277295" cy="1051560"/>
-          </a:xfrm>
-          <a:prstGeom prst="roundRect">
-            <a:avLst>
-              <a:gd name="adj" fmla="val 12000"/>
-            </a:avLst>
-          </a:prstGeom>
-          <a:solidFill>
-            <a:srgbClr val="F2F2F2"/>
-          </a:solidFill>
-          <a:ln>
-            <a:noFill/>
-          </a:ln>
-        </p:spPr>
-        <p:style>
-          <a:lnRef idx="1">
-            <a:schemeClr val="accent1"/>
-          </a:lnRef>
-          <a:fillRef idx="3">
-            <a:schemeClr val="accent1"/>
-          </a:fillRef>
-          <a:effectRef idx="2">
-            <a:schemeClr val="accent1"/>
-          </a:effectRef>
-          <a:fontRef idx="minor">
-            <a:schemeClr val="lt1"/>
-          </a:fontRef>
-        </p:style>
-        <p:txBody>
-          <a:bodyPr rtlCol="0" anchor="ctr"/>
-          <a:lstStyle/>
-          <a:p>
-            <a:pPr algn="ctr"/>
-          </a:p>
-        </p:txBody>
-      </p:sp>
-      <p:sp>
-        <p:nvSpPr>
-          <p:cNvPr id="14" name="Rounded Rectangle 13"/>
-          <p:cNvSpPr/>
-          <p:nvPr/>
-        </p:nvSpPr>
-        <p:spPr>
-          <a:xfrm>
-            <a:off x="594360" y="4146804"/>
-            <a:ext cx="438912" cy="438912"/>
-          </a:xfrm>
-          <a:prstGeom prst="roundRect">
-            <a:avLst>
-              <a:gd name="adj" fmla="val 12000"/>
-            </a:avLst>
-          </a:prstGeom>
-          <a:solidFill>
-            <a:srgbClr val="095292"/>
-          </a:solidFill>
-          <a:ln>
-            <a:noFill/>
-          </a:ln>
-        </p:spPr>
-        <p:style>
-          <a:lnRef idx="1">
-            <a:schemeClr val="accent1"/>
-          </a:lnRef>
-          <a:fillRef idx="3">
-            <a:schemeClr val="accent1"/>
-          </a:fillRef>
-          <a:effectRef idx="2">
-            <a:schemeClr val="accent1"/>
-          </a:effectRef>
-          <a:fontRef idx="minor">
-            <a:schemeClr val="lt1"/>
-          </a:fontRef>
-        </p:style>
-        <p:txBody>
-          <a:bodyPr rtlCol="0" anchor="ctr"/>
-          <a:lstStyle/>
-          <a:p>
-            <a:pPr algn="ctr"/>
-          </a:p>
-        </p:txBody>
-      </p:sp>
-      <p:sp>
-        <p:nvSpPr>
-          <p:cNvPr id="15" name="TextBox 14"/>
-          <p:cNvSpPr txBox="1"/>
-          <p:nvPr/>
-        </p:nvSpPr>
-        <p:spPr>
-          <a:xfrm>
-            <a:off x="594360" y="4146804"/>
-            <a:ext cx="438912" cy="438912"/>
-          </a:xfrm>
-          <a:prstGeom prst="rect">
-            <a:avLst/>
-          </a:prstGeom>
-          <a:noFill/>
-        </p:spPr>
-        <p:txBody>
-          <a:bodyPr wrap="square" anchor="ctr"/>
-          <a:lstStyle/>
-          <a:p>
-            <a:pPr algn="ctr"/>
-            <a:r>
-              <a:rPr sz="1600" b="1" i="0">
-                <a:solidFill>
-                  <a:srgbClr val="FFFFFF"/>
-                </a:solidFill>
-                <a:latin typeface="Calibri"/>
-              </a:rPr>
-              <a:t>3</a:t>
-            </a:r>
-          </a:p>
-        </p:txBody>
-      </p:sp>
-      <p:sp>
-        <p:nvSpPr>
-          <p:cNvPr id="16" name="TextBox 15"/>
-          <p:cNvSpPr txBox="1"/>
-          <p:nvPr/>
-        </p:nvSpPr>
-        <p:spPr>
-          <a:xfrm>
-            <a:off x="1188720" y="3931920"/>
-            <a:ext cx="10271455" cy="886968"/>
-          </a:xfrm>
-          <a:prstGeom prst="rect">
-            <a:avLst/>
-          </a:prstGeom>
-          <a:noFill/>
-        </p:spPr>
-        <p:txBody>
-          <a:bodyPr wrap="square" anchor="ctr"/>
-          <a:lstStyle/>
-          <a:p>
-            <a:r>
-              <a:rPr sz="1500" b="1" i="0">
-                <a:solidFill>
-                  <a:srgbClr val="095292"/>
-                </a:solidFill>
-                <a:latin typeface="Calibri"/>
-              </a:rPr>
-              <a:t>Outline presentacion 5-8 min + quien habla que.</a:t>
-            </a:r>
-          </a:p>
-        </p:txBody>
-      </p:sp>
-      <p:sp>
-        <p:nvSpPr>
-          <p:cNvPr id="17" name="Rounded Rectangle 16"/>
-          <p:cNvSpPr/>
-          <p:nvPr/>
-        </p:nvSpPr>
-        <p:spPr>
-          <a:xfrm>
-            <a:off x="457200" y="4983480"/>
-            <a:ext cx="11277295" cy="1051560"/>
-          </a:xfrm>
-          <a:prstGeom prst="roundRect">
-            <a:avLst>
-              <a:gd name="adj" fmla="val 12000"/>
-            </a:avLst>
-          </a:prstGeom>
-          <a:solidFill>
-            <a:srgbClr val="E8F4FA"/>
-          </a:solidFill>
-          <a:ln>
-            <a:noFill/>
-          </a:ln>
-        </p:spPr>
-        <p:style>
-          <a:lnRef idx="1">
-            <a:schemeClr val="accent1"/>
-          </a:lnRef>
-          <a:fillRef idx="3">
-            <a:schemeClr val="accent1"/>
-          </a:fillRef>
-          <a:effectRef idx="2">
-            <a:schemeClr val="accent1"/>
-          </a:effectRef>
-          <a:fontRef idx="minor">
-            <a:schemeClr val="lt1"/>
-          </a:fontRef>
-        </p:style>
-        <p:txBody>
-          <a:bodyPr rtlCol="0" anchor="ctr"/>
-          <a:lstStyle/>
-          <a:p>
-            <a:pPr algn="ctr"/>
-          </a:p>
-        </p:txBody>
-      </p:sp>
-      <p:sp>
-        <p:nvSpPr>
-          <p:cNvPr id="18" name="Rounded Rectangle 17"/>
-          <p:cNvSpPr/>
-          <p:nvPr/>
-        </p:nvSpPr>
-        <p:spPr>
-          <a:xfrm>
-            <a:off x="594360" y="5289804"/>
-            <a:ext cx="438912" cy="438912"/>
-          </a:xfrm>
-          <a:prstGeom prst="roundRect">
-            <a:avLst>
-              <a:gd name="adj" fmla="val 12000"/>
-            </a:avLst>
-          </a:prstGeom>
-          <a:solidFill>
-            <a:srgbClr val="095292"/>
-          </a:solidFill>
-          <a:ln>
-            <a:noFill/>
-          </a:ln>
-        </p:spPr>
-        <p:style>
-          <a:lnRef idx="1">
-            <a:schemeClr val="accent1"/>
-          </a:lnRef>
-          <a:fillRef idx="3">
-            <a:schemeClr val="accent1"/>
-          </a:fillRef>
-          <a:effectRef idx="2">
-            <a:schemeClr val="accent1"/>
-          </a:effectRef>
-          <a:fontRef idx="minor">
-            <a:schemeClr val="lt1"/>
-          </a:fontRef>
-        </p:style>
-        <p:txBody>
-          <a:bodyPr rtlCol="0" anchor="ctr"/>
-          <a:lstStyle/>
-          <a:p>
-            <a:pPr algn="ctr"/>
-          </a:p>
-        </p:txBody>
-      </p:sp>
-      <p:sp>
-        <p:nvSpPr>
-          <p:cNvPr id="19" name="TextBox 18"/>
-          <p:cNvSpPr txBox="1"/>
-          <p:nvPr/>
-        </p:nvSpPr>
-        <p:spPr>
-          <a:xfrm>
-            <a:off x="594360" y="5289804"/>
-            <a:ext cx="438912" cy="438912"/>
-          </a:xfrm>
-          <a:prstGeom prst="rect">
-            <a:avLst/>
-          </a:prstGeom>
-          <a:noFill/>
-        </p:spPr>
-        <p:txBody>
-          <a:bodyPr wrap="square" anchor="ctr"/>
-          <a:lstStyle/>
-          <a:p>
-            <a:pPr algn="ctr"/>
-            <a:r>
-              <a:rPr sz="1600" b="1" i="0">
-                <a:solidFill>
-                  <a:srgbClr val="FFFFFF"/>
-                </a:solidFill>
-                <a:latin typeface="Calibri"/>
-              </a:rPr>
-              <a:t>4</a:t>
-            </a:r>
-          </a:p>
-        </p:txBody>
-      </p:sp>
-      <p:sp>
-        <p:nvSpPr>
-          <p:cNvPr id="20" name="TextBox 19"/>
-          <p:cNvSpPr txBox="1"/>
-          <p:nvPr/>
-        </p:nvSpPr>
-        <p:spPr>
-          <a:xfrm>
-            <a:off x="1188720" y="5074920"/>
-            <a:ext cx="10271455" cy="886968"/>
-          </a:xfrm>
-          <a:prstGeom prst="rect">
-            <a:avLst/>
-          </a:prstGeom>
-          <a:noFill/>
-        </p:spPr>
-        <p:txBody>
-          <a:bodyPr wrap="square" anchor="ctr"/>
-          <a:lstStyle/>
-          <a:p>
-            <a:r>
-              <a:rPr sz="1500" b="1" i="0">
-                <a:solidFill>
-                  <a:srgbClr val="095292"/>
-                </a:solidFill>
-                <a:latin typeface="Calibri"/>
-              </a:rPr>
-              <a:t>Empaquetar borrador entrega final.</a:t>
-            </a:r>
-          </a:p>
-        </p:txBody>
-      </p:sp>
-      <p:sp>
-        <p:nvSpPr>
-          <p:cNvPr id="21" name="TextBox 20"/>
-          <p:cNvSpPr txBox="1"/>
-          <p:nvPr/>
-        </p:nvSpPr>
-        <p:spPr>
-          <a:xfrm>
-            <a:off x="11185855" y="6473952"/>
-            <a:ext cx="640080" cy="274320"/>
-          </a:xfrm>
-          <a:prstGeom prst="rect">
-            <a:avLst/>
-          </a:prstGeom>
-          <a:noFill/>
-        </p:spPr>
-        <p:txBody>
-          <a:bodyPr wrap="square">
-            <a:spAutoFit/>
-          </a:bodyPr>
-          <a:lstStyle/>
-          <a:p>
-            <a:pPr algn="r"/>
-            <a:r>
-              <a:rPr sz="1100" b="0" i="0">
-                <a:solidFill>
-                  <a:srgbClr val="666666"/>
-                </a:solidFill>
-                <a:latin typeface="Calibri"/>
-              </a:rPr>
-              <a:t>32</a:t>
-            </a:r>
-          </a:p>
-        </p:txBody>
-      </p:sp>
-    </p:spTree>
-  </p:cSld>
-  <p:clrMapOvr>
-    <a:masterClrMapping/>
-  </p:clrMapOvr>
-</p:sld>
-</file>
-
-<file path=ppt/slides/slide33.xml><?xml version="1.0" encoding="utf-8"?>
-<p:sld xmlns:a="http://schemas.openxmlformats.org/drawingml/2006/main" xmlns:p="http://schemas.openxmlformats.org/presentationml/2006/main" xmlns:r="http://schemas.openxmlformats.org/officeDocument/2006/relationships">
-  <p:cSld>
-    <p:bg>
-      <p:bgPr>
-        <a:solidFill>
-          <a:srgbClr val="FFFFFF"/>
-        </a:solidFill>
-        <a:effectLst/>
-      </p:bgPr>
-    </p:bg>
-    <p:spTree>
-      <p:nvGrpSpPr>
-        <p:cNvPr id="1" name=""/>
-        <p:cNvGrpSpPr/>
-        <p:nvPr/>
-      </p:nvGrpSpPr>
-      <p:grpSpPr/>
-      <p:sp>
-        <p:nvSpPr>
-          <p:cNvPr id="2" name="Rectangle 1"/>
-          <p:cNvSpPr/>
-          <p:nvPr/>
-        </p:nvSpPr>
-        <p:spPr>
-          <a:xfrm>
-            <a:off x="0" y="0"/>
-            <a:ext cx="12191695" cy="960120"/>
-          </a:xfrm>
-          <a:prstGeom prst="rect">
-            <a:avLst/>
-          </a:prstGeom>
-          <a:solidFill>
-            <a:srgbClr val="095292"/>
-          </a:solidFill>
-          <a:ln>
-            <a:noFill/>
-          </a:ln>
-        </p:spPr>
-        <p:style>
-          <a:lnRef idx="1">
-            <a:schemeClr val="accent1"/>
-          </a:lnRef>
-          <a:fillRef idx="3">
-            <a:schemeClr val="accent1"/>
-          </a:fillRef>
-          <a:effectRef idx="2">
-            <a:schemeClr val="accent1"/>
-          </a:effectRef>
-          <a:fontRef idx="minor">
-            <a:schemeClr val="lt1"/>
-          </a:fontRef>
-        </p:style>
-        <p:txBody>
-          <a:bodyPr rtlCol="0" anchor="ctr"/>
-          <a:lstStyle/>
-          <a:p>
-            <a:pPr algn="ctr"/>
-          </a:p>
-        </p:txBody>
-      </p:sp>
-      <p:sp>
-        <p:nvSpPr>
-          <p:cNvPr id="3" name="Rectangle 2"/>
-          <p:cNvSpPr/>
-          <p:nvPr/>
-        </p:nvSpPr>
-        <p:spPr>
-          <a:xfrm>
-            <a:off x="0" y="960120"/>
-            <a:ext cx="12191695" cy="41148"/>
-          </a:xfrm>
-          <a:prstGeom prst="rect">
-            <a:avLst/>
-          </a:prstGeom>
-          <a:solidFill>
-            <a:srgbClr val="FFD000"/>
-          </a:solidFill>
-          <a:ln>
-            <a:noFill/>
-          </a:ln>
-        </p:spPr>
-        <p:style>
-          <a:lnRef idx="1">
-            <a:schemeClr val="accent1"/>
-          </a:lnRef>
-          <a:fillRef idx="3">
-            <a:schemeClr val="accent1"/>
-          </a:fillRef>
-          <a:effectRef idx="2">
-            <a:schemeClr val="accent1"/>
-          </a:effectRef>
-          <a:fontRef idx="minor">
-            <a:schemeClr val="lt1"/>
-          </a:fontRef>
-        </p:style>
-        <p:txBody>
-          <a:bodyPr rtlCol="0" anchor="ctr"/>
-          <a:lstStyle/>
-          <a:p>
-            <a:pPr algn="ctr"/>
-          </a:p>
-        </p:txBody>
-      </p:sp>
-      <p:sp>
-        <p:nvSpPr>
-          <p:cNvPr id="4" name="TextBox 3"/>
-          <p:cNvSpPr txBox="1"/>
-          <p:nvPr/>
-        </p:nvSpPr>
-        <p:spPr>
-          <a:xfrm>
-            <a:off x="457200" y="164592"/>
-            <a:ext cx="11277295" cy="502920"/>
-          </a:xfrm>
-          <a:prstGeom prst="rect">
-            <a:avLst/>
-          </a:prstGeom>
-          <a:noFill/>
-        </p:spPr>
-        <p:txBody>
-          <a:bodyPr wrap="square">
-            <a:spAutoFit/>
-          </a:bodyPr>
-          <a:lstStyle/>
-          <a:p>
-            <a:r>
-              <a:rPr sz="2600" b="1" i="0">
-                <a:solidFill>
-                  <a:srgbClr val="FFFFFF"/>
-                </a:solidFill>
-                <a:latin typeface="Calibri"/>
-              </a:rPr>
-              <a:t>Taller PI VetCare — pistas (checklist vacio)</a:t>
-            </a:r>
-          </a:p>
-        </p:txBody>
-      </p:sp>
-      <p:sp>
-        <p:nvSpPr>
-          <p:cNvPr id="5" name="Rounded Rectangle 4"/>
-          <p:cNvSpPr/>
-          <p:nvPr/>
-        </p:nvSpPr>
-        <p:spPr>
-          <a:xfrm>
-            <a:off x="457200" y="1261872"/>
-            <a:ext cx="11277295" cy="566928"/>
-          </a:xfrm>
-          <a:prstGeom prst="roundRect">
-            <a:avLst>
-              <a:gd name="adj" fmla="val 12000"/>
-            </a:avLst>
-          </a:prstGeom>
-          <a:solidFill>
-            <a:srgbClr val="F2F2F2"/>
-          </a:solidFill>
-          <a:ln>
-            <a:noFill/>
-          </a:ln>
-        </p:spPr>
-        <p:style>
-          <a:lnRef idx="1">
-            <a:schemeClr val="accent1"/>
-          </a:lnRef>
-          <a:fillRef idx="3">
-            <a:schemeClr val="accent1"/>
-          </a:fillRef>
-          <a:effectRef idx="2">
-            <a:schemeClr val="accent1"/>
-          </a:effectRef>
-          <a:fontRef idx="minor">
-            <a:schemeClr val="lt1"/>
-          </a:fontRef>
-        </p:style>
-        <p:txBody>
-          <a:bodyPr rtlCol="0" anchor="ctr"/>
-          <a:lstStyle/>
-          <a:p>
-            <a:pPr algn="ctr"/>
-          </a:p>
-        </p:txBody>
-      </p:sp>
-      <p:sp>
-        <p:nvSpPr>
-          <p:cNvPr id="6" name="Rectangle 5"/>
-          <p:cNvSpPr/>
-          <p:nvPr/>
-        </p:nvSpPr>
-        <p:spPr>
-          <a:xfrm>
-            <a:off x="640080" y="1408175"/>
-            <a:ext cx="274320" cy="274320"/>
-          </a:xfrm>
-          <a:prstGeom prst="rect">
-            <a:avLst/>
-          </a:prstGeom>
-          <a:solidFill>
-            <a:srgbClr val="FFFFFF"/>
-          </a:solidFill>
-          <a:ln>
-            <a:solidFill>
-              <a:srgbClr val="333333"/>
-            </a:solidFill>
-          </a:ln>
-        </p:spPr>
-        <p:style>
-          <a:lnRef idx="1">
-            <a:schemeClr val="accent1"/>
-          </a:lnRef>
-          <a:fillRef idx="3">
-            <a:schemeClr val="accent1"/>
-          </a:fillRef>
-          <a:effectRef idx="2">
-            <a:schemeClr val="accent1"/>
-          </a:effectRef>
-          <a:fontRef idx="minor">
-            <a:schemeClr val="lt1"/>
-          </a:fontRef>
-        </p:style>
-        <p:txBody>
-          <a:bodyPr rtlCol="0" anchor="ctr"/>
-          <a:lstStyle/>
-          <a:p>
-            <a:pPr algn="ctr"/>
-          </a:p>
-        </p:txBody>
-      </p:sp>
-      <p:sp>
-        <p:nvSpPr>
-          <p:cNvPr id="7" name="Rectangle 6"/>
-          <p:cNvSpPr/>
-          <p:nvPr/>
-        </p:nvSpPr>
-        <p:spPr>
-          <a:xfrm>
-            <a:off x="640080" y="1408175"/>
-            <a:ext cx="73152" cy="274320"/>
-          </a:xfrm>
-          <a:prstGeom prst="rect">
-            <a:avLst/>
-          </a:prstGeom>
-          <a:solidFill>
-            <a:srgbClr val="269CCB"/>
-          </a:solidFill>
-          <a:ln>
-            <a:noFill/>
-          </a:ln>
-        </p:spPr>
-        <p:style>
-          <a:lnRef idx="1">
-            <a:schemeClr val="accent1"/>
-          </a:lnRef>
-          <a:fillRef idx="3">
-            <a:schemeClr val="accent1"/>
-          </a:fillRef>
-          <a:effectRef idx="2">
-            <a:schemeClr val="accent1"/>
-          </a:effectRef>
-          <a:fontRef idx="minor">
-            <a:schemeClr val="lt1"/>
-          </a:fontRef>
-        </p:style>
-        <p:txBody>
-          <a:bodyPr rtlCol="0" anchor="ctr"/>
-          <a:lstStyle/>
-          <a:p>
-            <a:pPr algn="ctr"/>
-          </a:p>
-        </p:txBody>
-      </p:sp>
-      <p:sp>
-        <p:nvSpPr>
-          <p:cNvPr id="8" name="TextBox 7"/>
-          <p:cNvSpPr txBox="1"/>
-          <p:nvPr/>
-        </p:nvSpPr>
-        <p:spPr>
-          <a:xfrm>
-            <a:off x="1097280" y="1353312"/>
-            <a:ext cx="10362895" cy="402336"/>
-          </a:xfrm>
-          <a:prstGeom prst="rect">
-            <a:avLst/>
-          </a:prstGeom>
-          <a:noFill/>
-        </p:spPr>
-        <p:txBody>
-          <a:bodyPr wrap="square" anchor="ctr"/>
-          <a:lstStyle/>
-          <a:p>
-            <a:r>
-              <a:rPr sz="1500" b="0" i="0">
-                <a:solidFill>
-                  <a:srgbClr val="333333"/>
-                </a:solidFill>
-                <a:latin typeface="Calibri"/>
-              </a:rPr>
-              <a:t>□ &gt;=3 ops?</a:t>
-            </a:r>
-          </a:p>
-        </p:txBody>
-      </p:sp>
-      <p:sp>
-        <p:nvSpPr>
-          <p:cNvPr id="9" name="Rounded Rectangle 8"/>
-          <p:cNvSpPr/>
-          <p:nvPr/>
-        </p:nvSpPr>
-        <p:spPr>
-          <a:xfrm>
-            <a:off x="457200" y="1938528"/>
-            <a:ext cx="11277295" cy="566928"/>
-          </a:xfrm>
-          <a:prstGeom prst="roundRect">
-            <a:avLst>
-              <a:gd name="adj" fmla="val 12000"/>
-            </a:avLst>
-          </a:prstGeom>
-          <a:solidFill>
-            <a:srgbClr val="F2F2F2"/>
-          </a:solidFill>
-          <a:ln>
-            <a:noFill/>
-          </a:ln>
-        </p:spPr>
-        <p:style>
-          <a:lnRef idx="1">
-            <a:schemeClr val="accent1"/>
-          </a:lnRef>
-          <a:fillRef idx="3">
-            <a:schemeClr val="accent1"/>
-          </a:fillRef>
-          <a:effectRef idx="2">
-            <a:schemeClr val="accent1"/>
-          </a:effectRef>
-          <a:fontRef idx="minor">
-            <a:schemeClr val="lt1"/>
-          </a:fontRef>
-        </p:style>
-        <p:txBody>
-          <a:bodyPr rtlCol="0" anchor="ctr"/>
-          <a:lstStyle/>
-          <a:p>
-            <a:pPr algn="ctr"/>
-          </a:p>
-        </p:txBody>
-      </p:sp>
-      <p:sp>
-        <p:nvSpPr>
-          <p:cNvPr id="10" name="Rectangle 9"/>
-          <p:cNvSpPr/>
-          <p:nvPr/>
-        </p:nvSpPr>
-        <p:spPr>
-          <a:xfrm>
-            <a:off x="640080" y="2084832"/>
-            <a:ext cx="274320" cy="274320"/>
-          </a:xfrm>
-          <a:prstGeom prst="rect">
-            <a:avLst/>
-          </a:prstGeom>
-          <a:solidFill>
-            <a:srgbClr val="FFFFFF"/>
-          </a:solidFill>
-          <a:ln>
-            <a:solidFill>
-              <a:srgbClr val="333333"/>
-            </a:solidFill>
-          </a:ln>
-        </p:spPr>
-        <p:style>
-          <a:lnRef idx="1">
-            <a:schemeClr val="accent1"/>
-          </a:lnRef>
-          <a:fillRef idx="3">
-            <a:schemeClr val="accent1"/>
-          </a:fillRef>
-          <a:effectRef idx="2">
-            <a:schemeClr val="accent1"/>
-          </a:effectRef>
-          <a:fontRef idx="minor">
-            <a:schemeClr val="lt1"/>
-          </a:fontRef>
-        </p:style>
-        <p:txBody>
-          <a:bodyPr rtlCol="0" anchor="ctr"/>
-          <a:lstStyle/>
-          <a:p>
-            <a:pPr algn="ctr"/>
-          </a:p>
-        </p:txBody>
-      </p:sp>
-      <p:sp>
-        <p:nvSpPr>
-          <p:cNvPr id="11" name="Rectangle 10"/>
-          <p:cNvSpPr/>
-          <p:nvPr/>
-        </p:nvSpPr>
-        <p:spPr>
-          <a:xfrm>
-            <a:off x="640080" y="2084832"/>
-            <a:ext cx="73152" cy="274320"/>
-          </a:xfrm>
-          <a:prstGeom prst="rect">
-            <a:avLst/>
-          </a:prstGeom>
-          <a:solidFill>
-            <a:srgbClr val="269CCB"/>
-          </a:solidFill>
-          <a:ln>
-            <a:noFill/>
-          </a:ln>
-        </p:spPr>
-        <p:style>
-          <a:lnRef idx="1">
-            <a:schemeClr val="accent1"/>
-          </a:lnRef>
-          <a:fillRef idx="3">
-            <a:schemeClr val="accent1"/>
-          </a:fillRef>
-          <a:effectRef idx="2">
-            <a:schemeClr val="accent1"/>
-          </a:effectRef>
-          <a:fontRef idx="minor">
-            <a:schemeClr val="lt1"/>
-          </a:fontRef>
-        </p:style>
-        <p:txBody>
-          <a:bodyPr rtlCol="0" anchor="ctr"/>
-          <a:lstStyle/>
-          <a:p>
-            <a:pPr algn="ctr"/>
-          </a:p>
-        </p:txBody>
-      </p:sp>
-      <p:sp>
-        <p:nvSpPr>
-          <p:cNvPr id="12" name="TextBox 11"/>
-          <p:cNvSpPr txBox="1"/>
-          <p:nvPr/>
-        </p:nvSpPr>
-        <p:spPr>
-          <a:xfrm>
-            <a:off x="1097280" y="2029968"/>
-            <a:ext cx="10362895" cy="402336"/>
-          </a:xfrm>
-          <a:prstGeom prst="rect">
-            <a:avLst/>
-          </a:prstGeom>
-          <a:noFill/>
-        </p:spPr>
-        <p:txBody>
-          <a:bodyPr wrap="square" anchor="ctr"/>
-          <a:lstStyle/>
-          <a:p>
-            <a:r>
-              <a:rPr sz="1500" b="0" i="0">
-                <a:solidFill>
-                  <a:srgbClr val="333333"/>
-                </a:solidFill>
-                <a:latin typeface="Calibri"/>
-              </a:rPr>
-              <a:t>□ Errores esperados?</a:t>
-            </a:r>
-          </a:p>
-        </p:txBody>
-      </p:sp>
-      <p:sp>
-        <p:nvSpPr>
-          <p:cNvPr id="13" name="Rounded Rectangle 12"/>
-          <p:cNvSpPr/>
-          <p:nvPr/>
-        </p:nvSpPr>
-        <p:spPr>
-          <a:xfrm>
-            <a:off x="457200" y="2615184"/>
-            <a:ext cx="11277295" cy="566928"/>
-          </a:xfrm>
-          <a:prstGeom prst="roundRect">
-            <a:avLst>
-              <a:gd name="adj" fmla="val 12000"/>
-            </a:avLst>
-          </a:prstGeom>
-          <a:solidFill>
-            <a:srgbClr val="F2F2F2"/>
-          </a:solidFill>
-          <a:ln>
-            <a:noFill/>
-          </a:ln>
-        </p:spPr>
-        <p:style>
-          <a:lnRef idx="1">
-            <a:schemeClr val="accent1"/>
-          </a:lnRef>
-          <a:fillRef idx="3">
-            <a:schemeClr val="accent1"/>
-          </a:fillRef>
-          <a:effectRef idx="2">
-            <a:schemeClr val="accent1"/>
-          </a:effectRef>
-          <a:fontRef idx="minor">
-            <a:schemeClr val="lt1"/>
-          </a:fontRef>
-        </p:style>
-        <p:txBody>
-          <a:bodyPr rtlCol="0" anchor="ctr"/>
-          <a:lstStyle/>
-          <a:p>
-            <a:pPr algn="ctr"/>
-          </a:p>
-        </p:txBody>
-      </p:sp>
-      <p:sp>
-        <p:nvSpPr>
-          <p:cNvPr id="14" name="Rectangle 13"/>
-          <p:cNvSpPr/>
-          <p:nvPr/>
-        </p:nvSpPr>
-        <p:spPr>
-          <a:xfrm>
-            <a:off x="640080" y="2761488"/>
-            <a:ext cx="274320" cy="274320"/>
-          </a:xfrm>
-          <a:prstGeom prst="rect">
-            <a:avLst/>
-          </a:prstGeom>
-          <a:solidFill>
-            <a:srgbClr val="FFFFFF"/>
-          </a:solidFill>
-          <a:ln>
-            <a:solidFill>
-              <a:srgbClr val="333333"/>
-            </a:solidFill>
-          </a:ln>
-        </p:spPr>
-        <p:style>
-          <a:lnRef idx="1">
-            <a:schemeClr val="accent1"/>
-          </a:lnRef>
-          <a:fillRef idx="3">
-            <a:schemeClr val="accent1"/>
-          </a:fillRef>
-          <a:effectRef idx="2">
-            <a:schemeClr val="accent1"/>
-          </a:effectRef>
-          <a:fontRef idx="minor">
-            <a:schemeClr val="lt1"/>
-          </a:fontRef>
-        </p:style>
-        <p:txBody>
-          <a:bodyPr rtlCol="0" anchor="ctr"/>
-          <a:lstStyle/>
-          <a:p>
-            <a:pPr algn="ctr"/>
-          </a:p>
-        </p:txBody>
-      </p:sp>
-      <p:sp>
-        <p:nvSpPr>
-          <p:cNvPr id="15" name="Rectangle 14"/>
-          <p:cNvSpPr/>
-          <p:nvPr/>
-        </p:nvSpPr>
-        <p:spPr>
-          <a:xfrm>
-            <a:off x="640080" y="2761488"/>
-            <a:ext cx="73152" cy="274320"/>
-          </a:xfrm>
-          <a:prstGeom prst="rect">
-            <a:avLst/>
-          </a:prstGeom>
-          <a:solidFill>
-            <a:srgbClr val="269CCB"/>
-          </a:solidFill>
-          <a:ln>
-            <a:noFill/>
-          </a:ln>
-        </p:spPr>
-        <p:style>
-          <a:lnRef idx="1">
-            <a:schemeClr val="accent1"/>
-          </a:lnRef>
-          <a:fillRef idx="3">
-            <a:schemeClr val="accent1"/>
-          </a:fillRef>
-          <a:effectRef idx="2">
-            <a:schemeClr val="accent1"/>
-          </a:effectRef>
-          <a:fontRef idx="minor">
-            <a:schemeClr val="lt1"/>
-          </a:fontRef>
-        </p:style>
-        <p:txBody>
-          <a:bodyPr rtlCol="0" anchor="ctr"/>
-          <a:lstStyle/>
-          <a:p>
-            <a:pPr algn="ctr"/>
-          </a:p>
-        </p:txBody>
-      </p:sp>
-      <p:sp>
-        <p:nvSpPr>
-          <p:cNvPr id="16" name="TextBox 15"/>
-          <p:cNvSpPr txBox="1"/>
-          <p:nvPr/>
-        </p:nvSpPr>
-        <p:spPr>
-          <a:xfrm>
-            <a:off x="1097280" y="2706624"/>
-            <a:ext cx="10362895" cy="402336"/>
-          </a:xfrm>
-          <a:prstGeom prst="rect">
-            <a:avLst/>
-          </a:prstGeom>
-          <a:noFill/>
-        </p:spPr>
-        <p:txBody>
-          <a:bodyPr wrap="square" anchor="ctr"/>
-          <a:lstStyle/>
-          <a:p>
-            <a:r>
-              <a:rPr sz="1500" b="0" i="0">
-                <a:solidFill>
-                  <a:srgbClr val="333333"/>
-                </a:solidFill>
-                <a:latin typeface="Calibri"/>
-              </a:rPr>
-              <a:t>□ Outline completo?</a:t>
-            </a:r>
-          </a:p>
-        </p:txBody>
-      </p:sp>
-      <p:sp>
-        <p:nvSpPr>
-          <p:cNvPr id="17" name="TextBox 16"/>
-          <p:cNvSpPr txBox="1"/>
-          <p:nvPr/>
-        </p:nvSpPr>
-        <p:spPr>
-          <a:xfrm>
-            <a:off x="11185855" y="6473952"/>
-            <a:ext cx="640080" cy="274320"/>
-          </a:xfrm>
-          <a:prstGeom prst="rect">
-            <a:avLst/>
-          </a:prstGeom>
-          <a:noFill/>
-        </p:spPr>
-        <p:txBody>
-          <a:bodyPr wrap="square">
-            <a:spAutoFit/>
-          </a:bodyPr>
-          <a:lstStyle/>
-          <a:p>
-            <a:pPr algn="r"/>
-            <a:r>
-              <a:rPr sz="1100" b="0" i="0">
-                <a:solidFill>
-                  <a:srgbClr val="666666"/>
-                </a:solidFill>
-                <a:latin typeface="Calibri"/>
-              </a:rPr>
-              <a:t>33</a:t>
-            </a:r>
-          </a:p>
-        </p:txBody>
-      </p:sp>
-    </p:spTree>
-  </p:cSld>
-  <p:clrMapOvr>
-    <a:masterClrMapping/>
-  </p:clrMapOvr>
-</p:sld>
-</file>
-
-<file path=ppt/slides/slide34.xml><?xml version="1.0" encoding="utf-8"?>
-<p:sld xmlns:a="http://schemas.openxmlformats.org/drawingml/2006/main" xmlns:p="http://schemas.openxmlformats.org/presentationml/2006/main" xmlns:r="http://schemas.openxmlformats.org/officeDocument/2006/relationships">
-  <p:cSld>
-    <p:bg>
-      <p:bgPr>
-        <a:solidFill>
-          <a:srgbClr val="FFFFFF"/>
-        </a:solidFill>
-        <a:effectLst/>
-      </p:bgPr>
-    </p:bg>
-    <p:spTree>
-      <p:nvGrpSpPr>
-        <p:cNvPr id="1" name=""/>
-        <p:cNvGrpSpPr/>
-        <p:nvPr/>
-      </p:nvGrpSpPr>
-      <p:grpSpPr/>
-      <p:sp>
-        <p:nvSpPr>
-          <p:cNvPr id="2" name="Rectangle 1"/>
-          <p:cNvSpPr/>
-          <p:nvPr/>
-        </p:nvSpPr>
-        <p:spPr>
-          <a:xfrm>
-            <a:off x="0" y="0"/>
-            <a:ext cx="12191695" cy="960120"/>
-          </a:xfrm>
-          <a:prstGeom prst="rect">
-            <a:avLst/>
-          </a:prstGeom>
-          <a:solidFill>
-            <a:srgbClr val="095292"/>
-          </a:solidFill>
-          <a:ln>
-            <a:noFill/>
-          </a:ln>
-        </p:spPr>
-        <p:style>
-          <a:lnRef idx="1">
-            <a:schemeClr val="accent1"/>
-          </a:lnRef>
-          <a:fillRef idx="3">
-            <a:schemeClr val="accent1"/>
-          </a:fillRef>
-          <a:effectRef idx="2">
-            <a:schemeClr val="accent1"/>
-          </a:effectRef>
-          <a:fontRef idx="minor">
-            <a:schemeClr val="lt1"/>
-          </a:fontRef>
-        </p:style>
-        <p:txBody>
-          <a:bodyPr rtlCol="0" anchor="ctr"/>
-          <a:lstStyle/>
-          <a:p>
-            <a:pPr algn="ctr"/>
-          </a:p>
-        </p:txBody>
-      </p:sp>
-      <p:sp>
-        <p:nvSpPr>
-          <p:cNvPr id="3" name="Rectangle 2"/>
-          <p:cNvSpPr/>
-          <p:nvPr/>
-        </p:nvSpPr>
-        <p:spPr>
-          <a:xfrm>
-            <a:off x="0" y="960120"/>
-            <a:ext cx="12191695" cy="41148"/>
-          </a:xfrm>
-          <a:prstGeom prst="rect">
-            <a:avLst/>
-          </a:prstGeom>
-          <a:solidFill>
-            <a:srgbClr val="FFD000"/>
-          </a:solidFill>
-          <a:ln>
-            <a:noFill/>
-          </a:ln>
-        </p:spPr>
-        <p:style>
-          <a:lnRef idx="1">
-            <a:schemeClr val="accent1"/>
-          </a:lnRef>
-          <a:fillRef idx="3">
-            <a:schemeClr val="accent1"/>
-          </a:fillRef>
-          <a:effectRef idx="2">
-            <a:schemeClr val="accent1"/>
-          </a:effectRef>
-          <a:fontRef idx="minor">
-            <a:schemeClr val="lt1"/>
-          </a:fontRef>
-        </p:style>
-        <p:txBody>
-          <a:bodyPr rtlCol="0" anchor="ctr"/>
-          <a:lstStyle/>
-          <a:p>
-            <a:pPr algn="ctr"/>
-          </a:p>
-        </p:txBody>
-      </p:sp>
-      <p:sp>
-        <p:nvSpPr>
-          <p:cNvPr id="4" name="TextBox 3"/>
-          <p:cNvSpPr txBox="1"/>
-          <p:nvPr/>
-        </p:nvSpPr>
-        <p:spPr>
-          <a:xfrm>
-            <a:off x="457200" y="164592"/>
-            <a:ext cx="11277295" cy="502920"/>
-          </a:xfrm>
-          <a:prstGeom prst="rect">
-            <a:avLst/>
-          </a:prstGeom>
-          <a:noFill/>
-        </p:spPr>
-        <p:txBody>
-          <a:bodyPr wrap="square">
-            <a:spAutoFit/>
-          </a:bodyPr>
-          <a:lstStyle/>
-          <a:p>
-            <a:r>
-              <a:rPr sz="2600" b="1" i="0">
-                <a:solidFill>
-                  <a:srgbClr val="FFFFFF"/>
-                </a:solidFill>
-                <a:latin typeface="Calibri"/>
-              </a:rPr>
-              <a:t>Criterios de exito / entregable</a:t>
-            </a:r>
-          </a:p>
-        </p:txBody>
-      </p:sp>
-      <p:sp>
-        <p:nvSpPr>
-          <p:cNvPr id="5" name="TextBox 4"/>
-          <p:cNvSpPr txBox="1"/>
-          <p:nvPr/>
-        </p:nvSpPr>
-        <p:spPr>
-          <a:xfrm>
-            <a:off x="457200" y="1170432"/>
-            <a:ext cx="11277295" cy="5230368"/>
-          </a:xfrm>
-          <a:prstGeom prst="rect">
-            <a:avLst/>
-          </a:prstGeom>
-          <a:noFill/>
-        </p:spPr>
-        <p:txBody>
-          <a:bodyPr wrap="square">
-            <a:spAutoFit/>
-          </a:bodyPr>
-          <a:lstStyle/>
-          <a:p>
-            <a:pPr>
-              <a:spcAft>
-                <a:spcPts val="800"/>
-              </a:spcAft>
-            </a:pPr>
-            <a:r>
-              <a:rPr sz="2000" b="0" i="0">
-                <a:solidFill>
-                  <a:srgbClr val="333333"/>
-                </a:solidFill>
-                <a:latin typeface="Calibri"/>
-              </a:rPr>
-              <a:t>–   </a:t>
-            </a:r>
-            <a:r>
-              <a:rPr sz="2000" b="1" i="0">
-                <a:solidFill>
-                  <a:srgbClr val="333333"/>
-                </a:solidFill>
-                <a:latin typeface="Calibri"/>
-              </a:rPr>
-              <a:t>Entregable:</a:t>
-            </a:r>
-            <a:r>
-              <a:rPr sz="2000" b="0" i="0">
-                <a:solidFill>
-                  <a:srgbClr val="333333"/>
-                </a:solidFill>
-                <a:latin typeface="Calibri"/>
-              </a:rPr>
-              <a:t> Contrato app&lt;-&gt;BD + outline de slides de sustentacion (5-8 min)</a:t>
-            </a:r>
-          </a:p>
-          <a:p>
-            <a:pPr>
-              <a:spcAft>
-                <a:spcPts val="800"/>
-              </a:spcAft>
-            </a:pPr>
-            <a:r>
-              <a:rPr sz="2000" b="0" i="0">
-                <a:solidFill>
-                  <a:srgbClr val="333333"/>
-                </a:solidFill>
-                <a:latin typeface="Calibri"/>
-              </a:rPr>
-              <a:t>–   Evidencia: el SQL y su salida quedan guardados en cada pregunta de la plataforma del curso.</a:t>
-            </a:r>
-          </a:p>
-          <a:p>
-            <a:pPr>
-              <a:spcAft>
-                <a:spcPts val="800"/>
-              </a:spcAft>
-            </a:pPr>
-            <a:r>
-              <a:rPr sz="2000" b="0" i="0">
-                <a:solidFill>
-                  <a:srgbClr val="333333"/>
-                </a:solidFill>
-                <a:latin typeface="Calibri"/>
-              </a:rPr>
-              <a:t>–   Conserva copia en tu carpeta del PI (los .sql que pide el entregable).</a:t>
-            </a:r>
-          </a:p>
-          <a:p>
-            <a:pPr>
-              <a:spcAft>
-                <a:spcPts val="800"/>
-              </a:spcAft>
-            </a:pPr>
-            <a:r>
-              <a:rPr sz="2000" b="0" i="0">
-                <a:solidFill>
-                  <a:srgbClr val="333333"/>
-                </a:solidFill>
-                <a:latin typeface="Calibri"/>
-              </a:rPr>
-              <a:t>–   Actualizar checklist PI (que criterio de rubrica avanzo).</a:t>
-            </a:r>
-          </a:p>
-          <a:p>
-            <a:pPr>
-              <a:spcAft>
-                <a:spcPts val="800"/>
-              </a:spcAft>
-            </a:pPr>
-            <a:r>
-              <a:rPr sz="2000" b="0" i="0">
-                <a:solidFill>
-                  <a:srgbClr val="333333"/>
-                </a:solidFill>
-                <a:latin typeface="Calibri"/>
-              </a:rPr>
-              <a:t>–   </a:t>
-            </a:r>
-            <a:r>
-              <a:rPr sz="2000" b="1" i="0">
-                <a:solidFill>
-                  <a:srgbClr val="333333"/>
-                </a:solidFill>
-                <a:latin typeface="Calibri"/>
-              </a:rPr>
-              <a:t>Entrega en la plataforma del curso</a:t>
-            </a:r>
-            <a:r>
-              <a:rPr sz="2000" b="0" i="0">
-                <a:solidFill>
-                  <a:srgbClr val="333333"/>
-                </a:solidFill>
-                <a:latin typeface="Calibri"/>
-              </a:rPr>
-              <a:t> — en la fecha que indique el docente.</a:t>
-            </a:r>
-          </a:p>
-        </p:txBody>
-      </p:sp>
-      <p:sp>
-        <p:nvSpPr>
-          <p:cNvPr id="6" name="TextBox 5"/>
-          <p:cNvSpPr txBox="1"/>
-          <p:nvPr/>
-        </p:nvSpPr>
-        <p:spPr>
-          <a:xfrm>
-            <a:off x="11185855" y="6473952"/>
-            <a:ext cx="640080" cy="274320"/>
-          </a:xfrm>
-          <a:prstGeom prst="rect">
-            <a:avLst/>
-          </a:prstGeom>
-          <a:noFill/>
-        </p:spPr>
-        <p:txBody>
-          <a:bodyPr wrap="square">
-            <a:spAutoFit/>
-          </a:bodyPr>
-          <a:lstStyle/>
-          <a:p>
-            <a:pPr algn="r"/>
-            <a:r>
-              <a:rPr sz="1100" b="0" i="0">
-                <a:solidFill>
-                  <a:srgbClr val="666666"/>
-                </a:solidFill>
-                <a:latin typeface="Calibri"/>
-              </a:rPr>
-              <a:t>34</a:t>
-            </a:r>
-          </a:p>
-        </p:txBody>
-      </p:sp>
-    </p:spTree>
-  </p:cSld>
-  <p:clrMapOvr>
-    <a:masterClrMapping/>
-  </p:clrMapOvr>
-</p:sld>
-</file>
-
-<file path=ppt/slides/slide35.xml><?xml version="1.0" encoding="utf-8"?>
-<p:sld xmlns:a="http://schemas.openxmlformats.org/drawingml/2006/main" xmlns:p="http://schemas.openxmlformats.org/presentationml/2006/main" xmlns:r="http://schemas.openxmlformats.org/officeDocument/2006/relationships">
-  <p:cSld>
-    <p:bg>
-      <p:bgPr>
-        <a:solidFill>
-          <a:srgbClr val="FFFFFF"/>
-        </a:solidFill>
-        <a:effectLst/>
-      </p:bgPr>
-    </p:bg>
-    <p:spTree>
-      <p:nvGrpSpPr>
-        <p:cNvPr id="1" name=""/>
-        <p:cNvGrpSpPr/>
-        <p:nvPr/>
-      </p:nvGrpSpPr>
-      <p:grpSpPr/>
-      <p:sp>
-        <p:nvSpPr>
-          <p:cNvPr id="2" name="Rectangle 1"/>
-          <p:cNvSpPr/>
-          <p:nvPr/>
-        </p:nvSpPr>
-        <p:spPr>
-          <a:xfrm>
-            <a:off x="0" y="0"/>
-            <a:ext cx="12191695" cy="960120"/>
-          </a:xfrm>
-          <a:prstGeom prst="rect">
-            <a:avLst/>
-          </a:prstGeom>
-          <a:solidFill>
-            <a:srgbClr val="095292"/>
-          </a:solidFill>
-          <a:ln>
-            <a:noFill/>
-          </a:ln>
-        </p:spPr>
-        <p:style>
-          <a:lnRef idx="1">
-            <a:schemeClr val="accent1"/>
-          </a:lnRef>
-          <a:fillRef idx="3">
-            <a:schemeClr val="accent1"/>
-          </a:fillRef>
-          <a:effectRef idx="2">
-            <a:schemeClr val="accent1"/>
-          </a:effectRef>
-          <a:fontRef idx="minor">
-            <a:schemeClr val="lt1"/>
-          </a:fontRef>
-        </p:style>
-        <p:txBody>
-          <a:bodyPr rtlCol="0" anchor="ctr"/>
-          <a:lstStyle/>
-          <a:p>
-            <a:pPr algn="ctr"/>
-          </a:p>
-        </p:txBody>
-      </p:sp>
-      <p:sp>
-        <p:nvSpPr>
-          <p:cNvPr id="3" name="Rectangle 2"/>
-          <p:cNvSpPr/>
-          <p:nvPr/>
-        </p:nvSpPr>
-        <p:spPr>
-          <a:xfrm>
-            <a:off x="0" y="960120"/>
-            <a:ext cx="12191695" cy="41148"/>
-          </a:xfrm>
-          <a:prstGeom prst="rect">
-            <a:avLst/>
-          </a:prstGeom>
-          <a:solidFill>
-            <a:srgbClr val="FFD000"/>
-          </a:solidFill>
-          <a:ln>
-            <a:noFill/>
-          </a:ln>
-        </p:spPr>
-        <p:style>
-          <a:lnRef idx="1">
-            <a:schemeClr val="accent1"/>
-          </a:lnRef>
-          <a:fillRef idx="3">
-            <a:schemeClr val="accent1"/>
-          </a:fillRef>
-          <a:effectRef idx="2">
-            <a:schemeClr val="accent1"/>
-          </a:effectRef>
-          <a:fontRef idx="minor">
-            <a:schemeClr val="lt1"/>
-          </a:fontRef>
-        </p:style>
-        <p:txBody>
-          <a:bodyPr rtlCol="0" anchor="ctr"/>
-          <a:lstStyle/>
-          <a:p>
-            <a:pPr algn="ctr"/>
-          </a:p>
-        </p:txBody>
-      </p:sp>
-      <p:sp>
-        <p:nvSpPr>
-          <p:cNvPr id="4" name="TextBox 3"/>
-          <p:cNvSpPr txBox="1"/>
-          <p:nvPr/>
-        </p:nvSpPr>
-        <p:spPr>
-          <a:xfrm>
-            <a:off x="457200" y="164592"/>
-            <a:ext cx="11277295" cy="502920"/>
-          </a:xfrm>
-          <a:prstGeom prst="rect">
-            <a:avLst/>
-          </a:prstGeom>
-          <a:noFill/>
-        </p:spPr>
-        <p:txBody>
-          <a:bodyPr wrap="square">
-            <a:spAutoFit/>
-          </a:bodyPr>
-          <a:lstStyle/>
-          <a:p>
-            <a:r>
-              <a:rPr sz="2600" b="1" i="0">
-                <a:solidFill>
-                  <a:srgbClr val="FFFFFF"/>
-                </a:solidFill>
-                <a:latin typeface="Calibri"/>
-              </a:rPr>
-              <a:t>Para el PI esta semana</a:t>
-            </a:r>
-          </a:p>
-        </p:txBody>
-      </p:sp>
-      <p:sp>
-        <p:nvSpPr>
-          <p:cNvPr id="5" name="Rounded Rectangle 4"/>
-          <p:cNvSpPr/>
-          <p:nvPr/>
-        </p:nvSpPr>
-        <p:spPr>
-          <a:xfrm>
-            <a:off x="457200" y="1261872"/>
-            <a:ext cx="11277295" cy="1051560"/>
-          </a:xfrm>
-          <a:prstGeom prst="roundRect">
-            <a:avLst>
-              <a:gd name="adj" fmla="val 12000"/>
-            </a:avLst>
-          </a:prstGeom>
-          <a:solidFill>
-            <a:srgbClr val="E8F4FA"/>
-          </a:solidFill>
-          <a:ln>
-            <a:noFill/>
-          </a:ln>
-        </p:spPr>
-        <p:style>
-          <a:lnRef idx="1">
-            <a:schemeClr val="accent1"/>
-          </a:lnRef>
-          <a:fillRef idx="3">
-            <a:schemeClr val="accent1"/>
-          </a:fillRef>
-          <a:effectRef idx="2">
-            <a:schemeClr val="accent1"/>
-          </a:effectRef>
-          <a:fontRef idx="minor">
-            <a:schemeClr val="lt1"/>
-          </a:fontRef>
-        </p:style>
-        <p:txBody>
-          <a:bodyPr rtlCol="0" anchor="ctr"/>
-          <a:lstStyle/>
-          <a:p>
-            <a:pPr algn="ctr"/>
-          </a:p>
-        </p:txBody>
-      </p:sp>
-      <p:sp>
-        <p:nvSpPr>
-          <p:cNvPr id="6" name="Rectangle 5"/>
-          <p:cNvSpPr/>
-          <p:nvPr/>
-        </p:nvSpPr>
-        <p:spPr>
-          <a:xfrm>
-            <a:off x="457200" y="1261872"/>
-            <a:ext cx="128016" cy="1051560"/>
-          </a:xfrm>
-          <a:prstGeom prst="rect">
-            <a:avLst/>
-          </a:prstGeom>
-          <a:solidFill>
-            <a:srgbClr val="269CCB"/>
-          </a:solidFill>
-          <a:ln>
-            <a:noFill/>
-          </a:ln>
-        </p:spPr>
-        <p:style>
-          <a:lnRef idx="1">
-            <a:schemeClr val="accent1"/>
-          </a:lnRef>
-          <a:fillRef idx="3">
-            <a:schemeClr val="accent1"/>
-          </a:fillRef>
-          <a:effectRef idx="2">
-            <a:schemeClr val="accent1"/>
-          </a:effectRef>
-          <a:fontRef idx="minor">
-            <a:schemeClr val="lt1"/>
-          </a:fontRef>
-        </p:style>
-        <p:txBody>
-          <a:bodyPr rtlCol="0" anchor="ctr"/>
-          <a:lstStyle/>
-          <a:p>
-            <a:pPr algn="ctr"/>
-          </a:p>
-        </p:txBody>
-      </p:sp>
-      <p:sp>
-        <p:nvSpPr>
-          <p:cNvPr id="7" name="TextBox 6"/>
-          <p:cNvSpPr txBox="1"/>
-          <p:nvPr/>
-        </p:nvSpPr>
-        <p:spPr>
-          <a:xfrm>
-            <a:off x="777240" y="1399031"/>
-            <a:ext cx="10774375" cy="822959"/>
-          </a:xfrm>
-          <a:prstGeom prst="rect">
-            <a:avLst/>
-          </a:prstGeom>
-          <a:noFill/>
-        </p:spPr>
-        <p:txBody>
-          <a:bodyPr wrap="square">
-            <a:spAutoFit/>
-          </a:bodyPr>
-          <a:lstStyle/>
-          <a:p>
-            <a:r>
-              <a:rPr sz="1200" b="1" i="0">
-                <a:solidFill>
-                  <a:srgbClr val="269CCB"/>
-                </a:solidFill>
-                <a:latin typeface="Calibri"/>
-              </a:rPr>
-              <a:t>Info</a:t>
-            </a:r>
-          </a:p>
-          <a:p>
-            <a:pPr>
-              <a:spcBef>
-                <a:spcPts val="400"/>
-              </a:spcBef>
-            </a:pPr>
-            <a:r>
-              <a:rPr sz="1400" b="0" i="0">
-                <a:solidFill>
-                  <a:srgbClr val="333333"/>
-                </a:solidFill>
-                <a:latin typeface="Calibri"/>
-              </a:rPr>
-              <a:t>Hito: Contrato integracion + preparacion de entrega/sustentacion</a:t>
-            </a:r>
-          </a:p>
-        </p:txBody>
-      </p:sp>
-      <p:sp>
-        <p:nvSpPr>
-          <p:cNvPr id="8" name="Rounded Rectangle 7"/>
-          <p:cNvSpPr/>
-          <p:nvPr/>
-        </p:nvSpPr>
-        <p:spPr>
-          <a:xfrm>
-            <a:off x="457200" y="2478024"/>
-            <a:ext cx="11277295" cy="1051560"/>
-          </a:xfrm>
-          <a:prstGeom prst="roundRect">
-            <a:avLst>
-              <a:gd name="adj" fmla="val 12000"/>
-            </a:avLst>
-          </a:prstGeom>
-          <a:solidFill>
-            <a:srgbClr val="FFF8E1"/>
-          </a:solidFill>
-          <a:ln>
-            <a:noFill/>
-          </a:ln>
-        </p:spPr>
-        <p:style>
-          <a:lnRef idx="1">
-            <a:schemeClr val="accent1"/>
-          </a:lnRef>
-          <a:fillRef idx="3">
-            <a:schemeClr val="accent1"/>
-          </a:fillRef>
-          <a:effectRef idx="2">
-            <a:schemeClr val="accent1"/>
-          </a:effectRef>
-          <a:fontRef idx="minor">
-            <a:schemeClr val="lt1"/>
-          </a:fontRef>
-        </p:style>
-        <p:txBody>
-          <a:bodyPr rtlCol="0" anchor="ctr"/>
-          <a:lstStyle/>
-          <a:p>
-            <a:pPr algn="ctr"/>
-          </a:p>
-        </p:txBody>
-      </p:sp>
-      <p:sp>
-        <p:nvSpPr>
-          <p:cNvPr id="9" name="Rectangle 8"/>
-          <p:cNvSpPr/>
-          <p:nvPr/>
-        </p:nvSpPr>
-        <p:spPr>
-          <a:xfrm>
-            <a:off x="457200" y="2478024"/>
-            <a:ext cx="128016" cy="1051560"/>
-          </a:xfrm>
-          <a:prstGeom prst="rect">
-            <a:avLst/>
-          </a:prstGeom>
-          <a:solidFill>
-            <a:srgbClr val="FFD000"/>
-          </a:solidFill>
-          <a:ln>
-            <a:noFill/>
-          </a:ln>
-        </p:spPr>
-        <p:style>
-          <a:lnRef idx="1">
-            <a:schemeClr val="accent1"/>
-          </a:lnRef>
-          <a:fillRef idx="3">
-            <a:schemeClr val="accent1"/>
-          </a:fillRef>
-          <a:effectRef idx="2">
-            <a:schemeClr val="accent1"/>
-          </a:effectRef>
-          <a:fontRef idx="minor">
-            <a:schemeClr val="lt1"/>
-          </a:fontRef>
-        </p:style>
-        <p:txBody>
-          <a:bodyPr rtlCol="0" anchor="ctr"/>
-          <a:lstStyle/>
-          <a:p>
-            <a:pPr algn="ctr"/>
-          </a:p>
-        </p:txBody>
-      </p:sp>
-      <p:sp>
-        <p:nvSpPr>
-          <p:cNvPr id="10" name="TextBox 9"/>
-          <p:cNvSpPr txBox="1"/>
-          <p:nvPr/>
-        </p:nvSpPr>
-        <p:spPr>
-          <a:xfrm>
-            <a:off x="777240" y="2615184"/>
-            <a:ext cx="10774375" cy="822959"/>
-          </a:xfrm>
-          <a:prstGeom prst="rect">
-            <a:avLst/>
-          </a:prstGeom>
-          <a:noFill/>
-        </p:spPr>
-        <p:txBody>
-          <a:bodyPr wrap="square">
-            <a:spAutoFit/>
-          </a:bodyPr>
-          <a:lstStyle/>
-          <a:p>
-            <a:r>
-              <a:rPr sz="1200" b="1" i="0">
-                <a:solidFill>
-                  <a:srgbClr val="FFD000"/>
-                </a:solidFill>
-                <a:latin typeface="Calibri"/>
-              </a:rPr>
-              <a:t>Aclaración</a:t>
-            </a:r>
-          </a:p>
-          <a:p>
-            <a:pPr>
-              <a:spcBef>
-                <a:spcPts val="400"/>
-              </a:spcBef>
-            </a:pPr>
-            <a:r>
-              <a:rPr sz="1400" b="0" i="0">
-                <a:solidFill>
-                  <a:srgbClr val="333333"/>
-                </a:solidFill>
-                <a:latin typeface="Calibri"/>
-              </a:rPr>
-              <a:t>Enunciado completo: Clases/Proyecto Integrador/ (VetCare DB).</a:t>
-            </a:r>
-          </a:p>
-        </p:txBody>
-      </p:sp>
-      <p:sp>
-        <p:nvSpPr>
-          <p:cNvPr id="11" name="Rounded Rectangle 10"/>
-          <p:cNvSpPr/>
-          <p:nvPr/>
-        </p:nvSpPr>
-        <p:spPr>
-          <a:xfrm>
-            <a:off x="457200" y="3694176"/>
-            <a:ext cx="11277295" cy="1051560"/>
-          </a:xfrm>
-          <a:prstGeom prst="roundRect">
-            <a:avLst>
-              <a:gd name="adj" fmla="val 12000"/>
-            </a:avLst>
-          </a:prstGeom>
-          <a:solidFill>
-            <a:srgbClr val="FBE4E4"/>
-          </a:solidFill>
-          <a:ln>
-            <a:noFill/>
-          </a:ln>
-        </p:spPr>
-        <p:style>
-          <a:lnRef idx="1">
-            <a:schemeClr val="accent1"/>
-          </a:lnRef>
-          <a:fillRef idx="3">
-            <a:schemeClr val="accent1"/>
-          </a:fillRef>
-          <a:effectRef idx="2">
-            <a:schemeClr val="accent1"/>
-          </a:effectRef>
-          <a:fontRef idx="minor">
-            <a:schemeClr val="lt1"/>
-          </a:fontRef>
-        </p:style>
-        <p:txBody>
-          <a:bodyPr rtlCol="0" anchor="ctr"/>
-          <a:lstStyle/>
-          <a:p>
-            <a:pPr algn="ctr"/>
-          </a:p>
-        </p:txBody>
-      </p:sp>
-      <p:sp>
-        <p:nvSpPr>
-          <p:cNvPr id="12" name="Rectangle 11"/>
-          <p:cNvSpPr/>
-          <p:nvPr/>
-        </p:nvSpPr>
-        <p:spPr>
-          <a:xfrm>
-            <a:off x="457200" y="3694176"/>
-            <a:ext cx="128016" cy="1051560"/>
-          </a:xfrm>
-          <a:prstGeom prst="rect">
-            <a:avLst/>
-          </a:prstGeom>
-          <a:solidFill>
-            <a:srgbClr val="A02030"/>
-          </a:solidFill>
-          <a:ln>
-            <a:noFill/>
-          </a:ln>
-        </p:spPr>
-        <p:style>
-          <a:lnRef idx="1">
-            <a:schemeClr val="accent1"/>
-          </a:lnRef>
-          <a:fillRef idx="3">
-            <a:schemeClr val="accent1"/>
-          </a:fillRef>
-          <a:effectRef idx="2">
-            <a:schemeClr val="accent1"/>
-          </a:effectRef>
-          <a:fontRef idx="minor">
-            <a:schemeClr val="lt1"/>
-          </a:fontRef>
-        </p:style>
-        <p:txBody>
-          <a:bodyPr rtlCol="0" anchor="ctr"/>
-          <a:lstStyle/>
-          <a:p>
-            <a:pPr algn="ctr"/>
-          </a:p>
-        </p:txBody>
-      </p:sp>
-      <p:sp>
-        <p:nvSpPr>
-          <p:cNvPr id="13" name="TextBox 12"/>
-          <p:cNvSpPr txBox="1"/>
-          <p:nvPr/>
-        </p:nvSpPr>
-        <p:spPr>
-          <a:xfrm>
-            <a:off x="777240" y="3831336"/>
-            <a:ext cx="10774375" cy="822959"/>
-          </a:xfrm>
-          <a:prstGeom prst="rect">
-            <a:avLst/>
-          </a:prstGeom>
-          <a:noFill/>
-        </p:spPr>
-        <p:txBody>
-          <a:bodyPr wrap="square">
-            <a:spAutoFit/>
-          </a:bodyPr>
-          <a:lstStyle/>
-          <a:p>
-            <a:r>
-              <a:rPr sz="1200" b="1" i="0">
-                <a:solidFill>
-                  <a:srgbClr val="A02030"/>
-                </a:solidFill>
-                <a:latin typeface="Calibri"/>
-              </a:rPr>
-              <a:t>Atención</a:t>
-            </a:r>
-          </a:p>
-          <a:p>
-            <a:pPr>
-              <a:spcBef>
-                <a:spcPts val="400"/>
-              </a:spcBef>
-            </a:pPr>
-            <a:r>
-              <a:rPr sz="1400" b="0" i="0">
-                <a:solidFill>
-                  <a:srgbClr val="333333"/>
-                </a:solidFill>
-                <a:latin typeface="Calibri"/>
-              </a:rPr>
-              <a:t>Si el docente asigna taller esta semana, él indica el canal y la fecha.</a:t>
-            </a:r>
-          </a:p>
-        </p:txBody>
-      </p:sp>
-      <p:sp>
-        <p:nvSpPr>
-          <p:cNvPr id="14" name="TextBox 13"/>
-          <p:cNvSpPr txBox="1"/>
-          <p:nvPr/>
-        </p:nvSpPr>
-        <p:spPr>
-          <a:xfrm>
-            <a:off x="11185855" y="6473952"/>
-            <a:ext cx="640080" cy="274320"/>
-          </a:xfrm>
-          <a:prstGeom prst="rect">
-            <a:avLst/>
-          </a:prstGeom>
-          <a:noFill/>
-        </p:spPr>
-        <p:txBody>
-          <a:bodyPr wrap="square">
-            <a:spAutoFit/>
-          </a:bodyPr>
-          <a:lstStyle/>
-          <a:p>
-            <a:pPr algn="r"/>
-            <a:r>
-              <a:rPr sz="1100" b="0" i="0">
-                <a:solidFill>
-                  <a:srgbClr val="666666"/>
-                </a:solidFill>
-                <a:latin typeface="Calibri"/>
-              </a:rPr>
-              <a:t>35</a:t>
-            </a:r>
-          </a:p>
-        </p:txBody>
-      </p:sp>
-    </p:spTree>
-  </p:cSld>
-  <p:clrMapOvr>
-    <a:masterClrMapping/>
-  </p:clrMapOvr>
-</p:sld>
-</file>
-
-<file path=ppt/slides/slide36.xml><?xml version="1.0" encoding="utf-8"?>
-<p:sld xmlns:a="http://schemas.openxmlformats.org/drawingml/2006/main" xmlns:p="http://schemas.openxmlformats.org/presentationml/2006/main" xmlns:r="http://schemas.openxmlformats.org/officeDocument/2006/relationships">
-  <p:cSld>
-    <p:bg>
-      <p:bgPr>
-        <a:solidFill>
-          <a:srgbClr val="FFFFFF"/>
-        </a:solidFill>
-        <a:effectLst/>
-      </p:bgPr>
-    </p:bg>
-    <p:spTree>
-      <p:nvGrpSpPr>
-        <p:cNvPr id="1" name=""/>
-        <p:cNvGrpSpPr/>
-        <p:nvPr/>
-      </p:nvGrpSpPr>
-      <p:grpSpPr/>
-      <p:sp>
-        <p:nvSpPr>
-          <p:cNvPr id="2" name="Rectangle 1"/>
-          <p:cNvSpPr/>
-          <p:nvPr/>
-        </p:nvSpPr>
-        <p:spPr>
-          <a:xfrm>
-            <a:off x="0" y="0"/>
-            <a:ext cx="12191695" cy="164592"/>
-          </a:xfrm>
-          <a:prstGeom prst="rect">
-            <a:avLst/>
-          </a:prstGeom>
-          <a:solidFill>
-            <a:srgbClr val="269CCB"/>
-          </a:solidFill>
-          <a:ln>
-            <a:noFill/>
-          </a:ln>
-        </p:spPr>
-        <p:style>
-          <a:lnRef idx="1">
-            <a:schemeClr val="accent1"/>
-          </a:lnRef>
-          <a:fillRef idx="3">
-            <a:schemeClr val="accent1"/>
-          </a:fillRef>
-          <a:effectRef idx="2">
-            <a:schemeClr val="accent1"/>
-          </a:effectRef>
-          <a:fontRef idx="minor">
-            <a:schemeClr val="lt1"/>
-          </a:fontRef>
-        </p:style>
-        <p:txBody>
-          <a:bodyPr rtlCol="0" anchor="ctr"/>
-          <a:lstStyle/>
-          <a:p>
-            <a:pPr algn="ctr"/>
-          </a:p>
-        </p:txBody>
-      </p:sp>
-      <p:pic>
-        <p:nvPicPr>
-          <p:cNvPr id="3" name="Picture 2" descr="logo_uniajc_color.png"/>
-          <p:cNvPicPr>
-            <a:picLocks noChangeAspect="1"/>
-          </p:cNvPicPr>
-          <p:nvPr/>
-        </p:nvPicPr>
-        <p:blipFill>
-          <a:blip r:embed="rId2"/>
-          <a:stretch>
-            <a:fillRect/>
-          </a:stretch>
-        </p:blipFill>
-        <p:spPr>
-          <a:xfrm>
-            <a:off x="10271455" y="5998464"/>
-            <a:ext cx="1463040" cy="643233"/>
-          </a:xfrm>
-          <a:prstGeom prst="rect">
-            <a:avLst/>
-          </a:prstGeom>
-        </p:spPr>
-      </p:pic>
-      <p:sp>
-        <p:nvSpPr>
-          <p:cNvPr id="4" name="TextBox 3"/>
-          <p:cNvSpPr txBox="1"/>
-          <p:nvPr/>
-        </p:nvSpPr>
-        <p:spPr>
-          <a:xfrm>
-            <a:off x="457200" y="1737360"/>
-            <a:ext cx="11277295" cy="1097280"/>
-          </a:xfrm>
-          <a:prstGeom prst="rect">
-            <a:avLst/>
-          </a:prstGeom>
-          <a:noFill/>
-        </p:spPr>
-        <p:txBody>
-          <a:bodyPr wrap="square" anchor="ctr"/>
-          <a:lstStyle/>
-          <a:p>
-            <a:pPr algn="ctr"/>
-            <a:r>
-              <a:rPr sz="3400" b="1" i="0">
-                <a:solidFill>
-                  <a:srgbClr val="095292"/>
-                </a:solidFill>
-                <a:latin typeface="Calibri"/>
-              </a:rPr>
-              <a:t>Clase 12 · VetCare avanza</a:t>
-            </a:r>
-          </a:p>
-        </p:txBody>
-      </p:sp>
-      <p:sp>
-        <p:nvSpPr>
-          <p:cNvPr id="5" name="TextBox 4"/>
-          <p:cNvSpPr txBox="1"/>
-          <p:nvPr/>
-        </p:nvSpPr>
-        <p:spPr>
-          <a:xfrm>
-            <a:off x="457200" y="3017520"/>
-            <a:ext cx="11277295" cy="1645920"/>
-          </a:xfrm>
-          <a:prstGeom prst="rect">
-            <a:avLst/>
-          </a:prstGeom>
-          <a:noFill/>
-        </p:spPr>
-        <p:txBody>
-          <a:bodyPr wrap="square">
-            <a:spAutoFit/>
-          </a:bodyPr>
-          <a:lstStyle/>
-          <a:p>
-            <a:pPr algn="ctr">
-              <a:spcAft>
-                <a:spcPts val="600"/>
-              </a:spcAft>
-            </a:pPr>
-            <a:r>
-              <a:rPr sz="1600" b="0" i="0">
-                <a:solidFill>
-                  <a:srgbClr val="333333"/>
-                </a:solidFill>
-                <a:latin typeface="Calibri"/>
-              </a:rPr>
-              <a:t>Contrato integracion + preparacion de entrega/sustentacion</a:t>
-            </a:r>
-          </a:p>
-          <a:p>
-            <a:pPr algn="ctr">
-              <a:spcAft>
-                <a:spcPts val="600"/>
-              </a:spcAft>
-            </a:pPr>
-            <a:r>
-              <a:rPr sz="1600" b="0" i="0">
-                <a:solidFill>
-                  <a:srgbClr val="333333"/>
-                </a:solidFill>
-                <a:latin typeface="Calibri"/>
-              </a:rPr>
-              <a:t>Entregable: Contrato app&lt;-&gt;BD + outline de slides de sustentacion (5-8 min)</a:t>
-            </a:r>
-          </a:p>
-          <a:p>
-            <a:pPr algn="ctr">
-              <a:spcAft>
-                <a:spcPts val="600"/>
-              </a:spcAft>
-            </a:pPr>
-            <a:r>
-              <a:rPr sz="1600" b="0" i="0">
-                <a:solidFill>
-                  <a:srgbClr val="333333"/>
-                </a:solidFill>
-                <a:latin typeface="Calibri"/>
-              </a:rPr>
-              <a:t>Siguiente clase: continuar el hilo del PI segun plan</a:t>
-            </a:r>
-          </a:p>
-        </p:txBody>
-      </p:sp>
-      <p:sp>
-        <p:nvSpPr>
-          <p:cNvPr id="6" name="TextBox 5"/>
-          <p:cNvSpPr txBox="1"/>
-          <p:nvPr/>
-        </p:nvSpPr>
-        <p:spPr>
-          <a:xfrm>
-            <a:off x="457200" y="4754880"/>
-            <a:ext cx="11277295" cy="640080"/>
-          </a:xfrm>
-          <a:prstGeom prst="rect">
-            <a:avLst/>
-          </a:prstGeom>
-          <a:noFill/>
-        </p:spPr>
-        <p:txBody>
-          <a:bodyPr wrap="square">
-            <a:spAutoFit/>
-          </a:bodyPr>
-          <a:lstStyle/>
-          <a:p>
-            <a:pPr algn="ctr"/>
-            <a:r>
-              <a:rPr sz="2000" b="1" i="0">
-                <a:solidFill>
-                  <a:srgbClr val="269CCB"/>
-                </a:solidFill>
-                <a:latin typeface="Calibri"/>
-              </a:rPr>
-              <a:t>Teoria breve · practica = PI</a:t>
             </a:r>
           </a:p>
         </p:txBody>
@@ -17355,4 +14222,324 @@
   </a:objectDefaults>
   <a:extraClrSchemeLst/>
 </a:theme>
+</file>
+
+<file path=ppt/theme/theme2.xml><?xml version="1.0" encoding="utf-8"?>
+<a:theme xmlns:a="http://schemas.openxmlformats.org/drawingml/2006/main" name="Office Theme">
+  <a:themeElements>
+    <a:clrScheme name="Office">
+      <a:dk1>
+        <a:sysClr val="windowText" lastClr="000000"/>
+      </a:dk1>
+      <a:lt1>
+        <a:sysClr val="window" lastClr="FFFFFF"/>
+      </a:lt1>
+      <a:dk2>
+        <a:srgbClr val="1F497D"/>
+      </a:dk2>
+      <a:lt2>
+        <a:srgbClr val="EEECE1"/>
+      </a:lt2>
+      <a:accent1>
+        <a:srgbClr val="4F81BD"/>
+      </a:accent1>
+      <a:accent2>
+        <a:srgbClr val="C0504D"/>
+      </a:accent2>
+      <a:accent3>
+        <a:srgbClr val="9BBB59"/>
+      </a:accent3>
+      <a:accent4>
+        <a:srgbClr val="8064A2"/>
+      </a:accent4>
+      <a:accent5>
+        <a:srgbClr val="4BACC6"/>
+      </a:accent5>
+      <a:accent6>
+        <a:srgbClr val="F79646"/>
+      </a:accent6>
+      <a:hlink>
+        <a:srgbClr val="0000FF"/>
+      </a:hlink>
+      <a:folHlink>
+        <a:srgbClr val="800080"/>
+      </a:folHlink>
+    </a:clrScheme>
+    <a:fontScheme name="Office">
+      <a:majorFont>
+        <a:latin typeface="Calibri"/>
+        <a:ea typeface=""/>
+        <a:cs typeface=""/>
+        <a:font script="Jpan" typeface="ＭＳ Ｐゴシック"/>
+        <a:font script="Hang" typeface="맑은 고딕"/>
+        <a:font script="Hans" typeface="宋体"/>
+        <a:font script="Hant" typeface="新細明體"/>
+        <a:font script="Arab" typeface="Times New Roman"/>
+        <a:font script="Hebr" typeface="Times New Roman"/>
+        <a:font script="Thai" typeface="Angsana New"/>
+        <a:font script="Ethi" typeface="Nyala"/>
+        <a:font script="Beng" typeface="Vrinda"/>
+        <a:font script="Gujr" typeface="Shruti"/>
+        <a:font script="Khmr" typeface="MoolBoran"/>
+        <a:font script="Knda" typeface="Tunga"/>
+        <a:font script="Guru" typeface="Raavi"/>
+        <a:font script="Cans" typeface="Euphemia"/>
+        <a:font script="Cher" typeface="Plantagenet Cherokee"/>
+        <a:font script="Yiii" typeface="Microsoft Yi Baiti"/>
+        <a:font script="Tibt" typeface="Microsoft Himalaya"/>
+        <a:font script="Thaa" typeface="MV Boli"/>
+        <a:font script="Deva" typeface="Mangal"/>
+        <a:font script="Telu" typeface="Gautami"/>
+        <a:font script="Taml" typeface="Latha"/>
+        <a:font script="Syrc" typeface="Estrangelo Edessa"/>
+        <a:font script="Orya" typeface="Kalinga"/>
+        <a:font script="Mlym" typeface="Kartika"/>
+        <a:font script="Laoo" typeface="DokChampa"/>
+        <a:font script="Sinh" typeface="Iskoola Pota"/>
+        <a:font script="Mong" typeface="Mongolian Baiti"/>
+        <a:font script="Viet" typeface="Times New Roman"/>
+        <a:font script="Uigh" typeface="Microsoft Uighur"/>
+        <a:font script="Geor" typeface="Sylfaen"/>
+      </a:majorFont>
+      <a:minorFont>
+        <a:latin typeface="Calibri"/>
+        <a:ea typeface=""/>
+        <a:cs typeface=""/>
+        <a:font script="Jpan" typeface="ＭＳ Ｐゴシック"/>
+        <a:font script="Hang" typeface="맑은 고딕"/>
+        <a:font script="Hans" typeface="宋体"/>
+        <a:font script="Hant" typeface="新細明體"/>
+        <a:font script="Arab" typeface="Arial"/>
+        <a:font script="Hebr" typeface="Arial"/>
+        <a:font script="Thai" typeface="Cordia New"/>
+        <a:font script="Ethi" typeface="Nyala"/>
+        <a:font script="Beng" typeface="Vrinda"/>
+        <a:font script="Gujr" typeface="Shruti"/>
+        <a:font script="Khmr" typeface="DaunPenh"/>
+        <a:font script="Knda" typeface="Tunga"/>
+        <a:font script="Guru" typeface="Raavi"/>
+        <a:font script="Cans" typeface="Euphemia"/>
+        <a:font script="Cher" typeface="Plantagenet Cherokee"/>
+        <a:font script="Yiii" typeface="Microsoft Yi Baiti"/>
+        <a:font script="Tibt" typeface="Microsoft Himalaya"/>
+        <a:font script="Thaa" typeface="MV Boli"/>
+        <a:font script="Deva" typeface="Mangal"/>
+        <a:font script="Telu" typeface="Gautami"/>
+        <a:font script="Taml" typeface="Latha"/>
+        <a:font script="Syrc" typeface="Estrangelo Edessa"/>
+        <a:font script="Orya" typeface="Kalinga"/>
+        <a:font script="Mlym" typeface="Kartika"/>
+        <a:font script="Laoo" typeface="DokChampa"/>
+        <a:font script="Sinh" typeface="Iskoola Pota"/>
+        <a:font script="Mong" typeface="Mongolian Baiti"/>
+        <a:font script="Viet" typeface="Arial"/>
+        <a:font script="Uigh" typeface="Microsoft Uighur"/>
+        <a:font script="Geor" typeface="Sylfaen"/>
+      </a:minorFont>
+    </a:fontScheme>
+    <a:fmtScheme name="Office">
+      <a:fillStyleLst>
+        <a:solidFill>
+          <a:schemeClr val="phClr"/>
+        </a:solidFill>
+        <a:gradFill rotWithShape="1">
+          <a:gsLst>
+            <a:gs pos="0">
+              <a:schemeClr val="phClr">
+                <a:tint val="50000"/>
+                <a:satMod val="300000"/>
+              </a:schemeClr>
+            </a:gs>
+            <a:gs pos="35000">
+              <a:schemeClr val="phClr">
+                <a:tint val="37000"/>
+                <a:satMod val="300000"/>
+              </a:schemeClr>
+            </a:gs>
+            <a:gs pos="100000">
+              <a:schemeClr val="phClr">
+                <a:tint val="15000"/>
+                <a:satMod val="350000"/>
+              </a:schemeClr>
+            </a:gs>
+          </a:gsLst>
+          <a:lin ang="16200000" scaled="1"/>
+        </a:gradFill>
+        <a:gradFill rotWithShape="1">
+          <a:gsLst>
+            <a:gs pos="0">
+              <a:schemeClr val="phClr">
+                <a:tint val="100000"/>
+                <a:shade val="100000"/>
+                <a:satMod val="130000"/>
+              </a:schemeClr>
+            </a:gs>
+            <a:gs pos="100000">
+              <a:schemeClr val="phClr">
+                <a:tint val="50000"/>
+                <a:shade val="100000"/>
+                <a:satMod val="350000"/>
+              </a:schemeClr>
+            </a:gs>
+          </a:gsLst>
+          <a:lin ang="16200000" scaled="0"/>
+        </a:gradFill>
+      </a:fillStyleLst>
+      <a:lnStyleLst>
+        <a:ln w="9525" cap="flat" cmpd="sng" algn="ctr">
+          <a:solidFill>
+            <a:schemeClr val="phClr">
+              <a:shade val="95000"/>
+              <a:satMod val="105000"/>
+            </a:schemeClr>
+          </a:solidFill>
+          <a:prstDash val="solid"/>
+        </a:ln>
+        <a:ln w="25400" cap="flat" cmpd="sng" algn="ctr">
+          <a:solidFill>
+            <a:schemeClr val="phClr"/>
+          </a:solidFill>
+          <a:prstDash val="solid"/>
+        </a:ln>
+        <a:ln w="38100" cap="flat" cmpd="sng" algn="ctr">
+          <a:solidFill>
+            <a:schemeClr val="phClr"/>
+          </a:solidFill>
+          <a:prstDash val="solid"/>
+        </a:ln>
+      </a:lnStyleLst>
+      <a:effectStyleLst>
+        <a:effectStyle>
+          <a:effectLst>
+            <a:outerShdw blurRad="40000" dist="20000" dir="5400000" rotWithShape="0">
+              <a:srgbClr val="000000">
+                <a:alpha val="38000"/>
+              </a:srgbClr>
+            </a:outerShdw>
+          </a:effectLst>
+        </a:effectStyle>
+        <a:effectStyle>
+          <a:effectLst>
+            <a:outerShdw blurRad="40000" dist="23000" dir="5400000" rotWithShape="0">
+              <a:srgbClr val="000000">
+                <a:alpha val="35000"/>
+              </a:srgbClr>
+            </a:outerShdw>
+          </a:effectLst>
+        </a:effectStyle>
+        <a:effectStyle>
+          <a:effectLst>
+            <a:outerShdw blurRad="40000" dist="23000" dir="5400000" rotWithShape="0">
+              <a:srgbClr val="000000">
+                <a:alpha val="35000"/>
+              </a:srgbClr>
+            </a:outerShdw>
+          </a:effectLst>
+          <a:scene3d>
+            <a:camera prst="orthographicFront">
+              <a:rot lat="0" lon="0" rev="0"/>
+            </a:camera>
+            <a:lightRig rig="threePt" dir="t">
+              <a:rot lat="0" lon="0" rev="1200000"/>
+            </a:lightRig>
+          </a:scene3d>
+          <a:sp3d>
+            <a:bevelT w="63500" h="25400"/>
+          </a:sp3d>
+        </a:effectStyle>
+      </a:effectStyleLst>
+      <a:bgFillStyleLst>
+        <a:solidFill>
+          <a:schemeClr val="phClr"/>
+        </a:solidFill>
+        <a:gradFill rotWithShape="1">
+          <a:gsLst>
+            <a:gs pos="0">
+              <a:schemeClr val="phClr">
+                <a:tint val="40000"/>
+                <a:satMod val="350000"/>
+              </a:schemeClr>
+            </a:gs>
+            <a:gs pos="40000">
+              <a:schemeClr val="phClr">
+                <a:tint val="45000"/>
+                <a:shade val="99000"/>
+                <a:satMod val="350000"/>
+              </a:schemeClr>
+            </a:gs>
+            <a:gs pos="100000">
+              <a:schemeClr val="phClr">
+                <a:shade val="20000"/>
+                <a:satMod val="255000"/>
+              </a:schemeClr>
+            </a:gs>
+          </a:gsLst>
+          <a:path path="circle">
+            <a:fillToRect l="50000" t="-80000" r="50000" b="180000"/>
+          </a:path>
+        </a:gradFill>
+        <a:gradFill rotWithShape="1">
+          <a:gsLst>
+            <a:gs pos="0">
+              <a:schemeClr val="phClr">
+                <a:tint val="80000"/>
+                <a:satMod val="300000"/>
+              </a:schemeClr>
+            </a:gs>
+            <a:gs pos="100000">
+              <a:schemeClr val="phClr">
+                <a:shade val="30000"/>
+                <a:satMod val="200000"/>
+              </a:schemeClr>
+            </a:gs>
+          </a:gsLst>
+          <a:path path="circle">
+            <a:fillToRect l="50000" t="50000" r="50000" b="50000"/>
+          </a:path>
+        </a:gradFill>
+      </a:bgFillStyleLst>
+    </a:fmtScheme>
+  </a:themeElements>
+  <a:objectDefaults>
+    <a:spDef>
+      <a:spPr/>
+      <a:bodyPr/>
+      <a:lstStyle/>
+      <a:style>
+        <a:lnRef idx="1">
+          <a:schemeClr val="accent1"/>
+        </a:lnRef>
+        <a:fillRef idx="3">
+          <a:schemeClr val="accent1"/>
+        </a:fillRef>
+        <a:effectRef idx="2">
+          <a:schemeClr val="accent1"/>
+        </a:effectRef>
+        <a:fontRef idx="minor">
+          <a:schemeClr val="lt1"/>
+        </a:fontRef>
+      </a:style>
+    </a:spDef>
+    <a:lnDef>
+      <a:spPr/>
+      <a:bodyPr/>
+      <a:lstStyle/>
+      <a:style>
+        <a:lnRef idx="2">
+          <a:schemeClr val="accent1"/>
+        </a:lnRef>
+        <a:fillRef idx="0">
+          <a:schemeClr val="accent1"/>
+        </a:fillRef>
+        <a:effectRef idx="1">
+          <a:schemeClr val="accent1"/>
+        </a:effectRef>
+        <a:fontRef idx="minor">
+          <a:schemeClr val="tx1"/>
+        </a:fontRef>
+      </a:style>
+    </a:lnDef>
+  </a:objectDefaults>
+  <a:extraClrSchemeLst/>
+</a:theme>
 </file>
--- a/Bases de Datos II/Clases/Clase 12 - Integracion y preparacion final/Presentacion.pptx
+++ b/Bases de Datos II/Clases/Clase 12 - Integracion y preparacion final/Presentacion.pptx
@@ -772,6 +772,17 @@
         <p:txBody>
           <a:bodyPr/>
           <a:lstStyle/>
+          <a:p>
+            <a:r>
+              <a:t>Fuera de la lamina (habla de la practica, no del tema):</a:t>
+            </a:r>
+          </a:p>
+          <a:p>
+            <a:r>
+              <a:t>- Contrato, dicho en serio, es mucho mas que el nombre del procedimiento, y tiene seis partes que hay que exigir en el entregable de hoy.</a:t>
+            </a:r>
+          </a:p>
+          <a:p/>
           <a:p>
             <a:r>
               <a:t>La lista de errores posibles con codigo y significado.</a:t>
@@ -4925,7 +4936,7 @@
                 </a:solidFill>
                 <a:latin typeface="Calibri"/>
               </a:rPr>
-              <a:t>–   Contrato, dicho en serio, es mucho mas que el nombre del procedimiento, y tiene seis partes que hay que exigir en el entregable de hoy.</a:t>
+              <a:t>–   Contrato, dicho en serio, es mucho mas que el nombre del procedimiento.</a:t>
             </a:r>
           </a:p>
           <a:p>
@@ -10358,7 +10369,7 @@
                 </a:solidFill>
                 <a:latin typeface="Calibri"/>
               </a:rPr>
-              <a:t>Del boceto a la plataforma del curso (diagrama)</a:t>
+              <a:t>Del boceto al código Mermaid</a:t>
             </a:r>
           </a:p>
         </p:txBody>
@@ -10392,7 +10403,7 @@
                 </a:solidFill>
                 <a:latin typeface="Calibri"/>
               </a:rPr>
-              <a:t>El diagrama se entrega como codigo Mermaid dentro de la plataforma del curso, no como imagen</a:t>
+              <a:t>El diagrama es texto Mermaid: la imagen sale del codigo, no al reves</a:t>
             </a:r>
           </a:p>
         </p:txBody>
@@ -10734,7 +10745,7 @@
                 </a:solidFill>
                 <a:latin typeface="Calibri"/>
               </a:rPr>
-              <a:t>Copia o describe tu boceto a una IA y pidele el codigo Mermaid: «convierte este diagrama a Mermaid usando sequenceDiagram». Revisa el resultado: la IA acierta la sintaxis, no tu modelo.</a:t>
+              <a:t>Copia o describe tu boceto a una IA y pidele el codigo Mermaid usando sequenceDiagram. Revisa el resultado: la IA acierta la sintaxis, no tu modelo.</a:t>
             </a:r>
           </a:p>
         </p:txBody>
@@ -10889,7 +10900,7 @@
                 </a:solidFill>
                 <a:latin typeface="Calibri"/>
               </a:rPr>
-              <a:t>Pega y renderiza en la plataforma del curso</a:t>
+              <a:t>Renderiza y corrige</a:t>
             </a:r>
           </a:p>
           <a:p>
@@ -10905,7 +10916,7 @@
                 </a:solidFill>
                 <a:latin typeface="Calibri"/>
               </a:rPr>
-              <a:t>Pega ese codigo en la caja de texto de la pregunta y mira como lo dibuja la plataforma. Si no renderiza, corrige ahi mismo: lo que se califica es el diagrama renderizado dentro de la plataforma del curso.</a:t>
+              <a:t>Pega el codigo en un visor Mermaid (por ejemplo mermaid.live) y mira como lo dibuja. Si no renderiza, corrige ahi mismo: un diagrama que no renderiza no comunica nada.</a:t>
             </a:r>
           </a:p>
         </p:txBody>
@@ -11060,7 +11071,7 @@
                 </a:solidFill>
                 <a:latin typeface="Calibri"/>
               </a:rPr>
-              <a:t>Guarda el PNG para tu PI</a:t>
+              <a:t>Guarda codigo e imagen</a:t>
             </a:r>
           </a:p>
           <a:p>
@@ -11076,7 +11087,7 @@
                 </a:solidFill>
                 <a:latin typeface="Calibri"/>
               </a:rPr>
-              <a:t>Exporta tambien la imagen a la carpeta de tu Proyecto Integrador. Esa copia es para tu informe; no reemplaza la respuesta en la plataforma.</a:t>
+              <a:t>Conserva el texto Mermaid, que es la fuente, y exporta el PNG para tu informe del Proyecto Integrador.</a:t>
             </a:r>
           </a:p>
         </p:txBody>

--- a/Bases de Datos II/Clases/Clase 12 - Integracion y preparacion final/Presentacion.pptx
+++ b/Bases de Datos II/Clases/Clase 12 - Integracion y preparacion final/Presentacion.pptx
@@ -774,17 +774,6 @@
           <a:lstStyle/>
           <a:p>
             <a:r>
-              <a:t>Fuera de la lamina (habla de la practica, no del tema):</a:t>
-            </a:r>
-          </a:p>
-          <a:p>
-            <a:r>
-              <a:t>- Contrato, dicho en serio, es mucho mas que el nombre del procedimiento, y tiene seis partes que hay que exigir en el entregable de hoy.</a:t>
-            </a:r>
-          </a:p>
-          <a:p/>
-          <a:p>
-            <a:r>
               <a:t>La lista de errores posibles con codigo y significado.</a:t>
             </a:r>
           </a:p>
@@ -796,6 +785,11 @@
           <a:p>
             <a:r>
               <a:t>Idempotente significa que ejecutar la operacion dos veces con los mismos datos deja el sistema igual que ejecutarla una sola vez.</a:t>
+            </a:r>
+          </a:p>
+          <a:p>
+            <a:r>
+              <a:t>Fuera de la lamina (habla de la practica): Contrato, dicho en serio, es mucho mas que el nombre del procedimiento, y tiene seis partes que hay que exigir en el entregable de hoy.</a:t>
             </a:r>
           </a:p>
         </p:txBody>
@@ -7508,6 +7502,40 @@
               <a:t>–   Cada lámina se sostiene sola: sirve para repasar aunque hayas faltado.</a:t>
             </a:r>
           </a:p>
+          <a:p>
+            <a:pPr>
+              <a:spcAft>
+                <a:spcPts val="800"/>
+              </a:spcAft>
+            </a:pPr>
+            <a:r>
+              <a:rPr sz="2000" b="0" i="0">
+                <a:solidFill>
+                  <a:srgbClr val="333333"/>
+                </a:solidFill>
+                <a:latin typeface="Calibri"/>
+              </a:rPr>
+              <a:t>–   </a:t>
+            </a:r>
+            <a:r>
+              <a:rPr sz="2000" b="1" i="0">
+                <a:solidFill>
+                  <a:srgbClr val="333333"/>
+                </a:solidFill>
+                <a:latin typeface="Calibri"/>
+              </a:rPr>
+              <a:t>Conceptos de hoy:</a:t>
+            </a:r>
+            <a:r>
+              <a:rPr sz="2000" b="0" i="0">
+                <a:solidFill>
+                  <a:srgbClr val="333333"/>
+                </a:solidFill>
+                <a:latin typeface="Calibri"/>
+              </a:rPr>
+              <a:t> Integrar no es conectarse · Inyeccion SQL · Por que el parametro lo evita por construccion · El contrato y sus seis partes.</a:t>
+            </a:r>
+          </a:p>
         </p:txBody>
       </p:sp>
       <p:sp>
@@ -9769,7 +9797,7 @@
                 </a:solidFill>
                 <a:latin typeface="Calibri"/>
               </a:rPr>
-              <a:t>sp_agendar_cita(</a:t>
+              <a:t>-- Firma: lo unico que la aplicacion conoce de la base</a:t>
             </a:r>
           </a:p>
           <a:p>
@@ -9785,7 +9813,7 @@
                 </a:solidFill>
                 <a:latin typeface="Calibri"/>
               </a:rPr>
-              <a:t>   p_id_cita     IN  NUMBER,</a:t>
+              <a:t>CALL sp_agendar_cita(</a:t>
             </a:r>
           </a:p>
           <a:p>
@@ -9801,7 +9829,7 @@
                 </a:solidFill>
                 <a:latin typeface="Calibri"/>
               </a:rPr>
-              <a:t>   p_id_mascota  IN  NUMBER,</a:t>
+              <a:t>  p_id_mascota     =&gt; 3,</a:t>
             </a:r>
           </a:p>
           <a:p>
@@ -9817,7 +9845,7 @@
                 </a:solidFill>
                 <a:latin typeface="Calibri"/>
               </a:rPr>
-              <a:t>   p_fecha       IN  TIMESTAMP,</a:t>
+              <a:t>  p_id_veterinario =&gt; 1,</a:t>
             </a:r>
           </a:p>
           <a:p>
@@ -9833,7 +9861,7 @@
                 </a:solidFill>
                 <a:latin typeface="Calibri"/>
               </a:rPr>
-              <a:t>   p_msg         OUT VARCHAR2   -- 'OK: ...' | 'ERROR: ...'</a:t>
+              <a:t>  p_fecha_hora     =&gt; TIMESTAMP '2026-09-01 09:00:00');</a:t>
             </a:r>
           </a:p>
           <a:p>
@@ -9849,7 +9877,39 @@
                 </a:solidFill>
                 <a:latin typeface="Calibri"/>
               </a:rPr>
-              <a:t>)</a:t>
+              <a:t/>
+            </a:r>
+          </a:p>
+          <a:p>
+            <a:pPr>
+              <a:spcAft>
+                <a:spcPts val="400"/>
+              </a:spcAft>
+            </a:pPr>
+            <a:r>
+              <a:rPr sz="1400" b="0" i="0">
+                <a:solidFill>
+                  <a:srgbClr val="FFFFFF"/>
+                </a:solidFill>
+                <a:latin typeface="Calibri"/>
+              </a:rPr>
+              <a:t>-- Si una regla falla, el CALL aborta con un mensaje literal:</a:t>
+            </a:r>
+          </a:p>
+          <a:p>
+            <a:pPr>
+              <a:spcAft>
+                <a:spcPts val="400"/>
+              </a:spcAft>
+            </a:pPr>
+            <a:r>
+              <a:rPr sz="1400" b="0" i="0">
+                <a:solidFill>
+                  <a:srgbClr val="FFFFFF"/>
+                </a:solidFill>
+                <a:latin typeface="Calibri"/>
+              </a:rPr>
+              <a:t>-- ERROR:  ERROR: la mascota 3 esta inactiva</a:t>
             </a:r>
           </a:p>
         </p:txBody>
@@ -9884,7 +9944,7 @@
                 </a:solidFill>
                 <a:latin typeface="Calibri"/>
               </a:rPr>
-              <a:t>La app llama el proc con parametros tipados: por eso no hay inyeccion SQL.</a:t>
+              <a:t>La aplicacion llama el procedimiento con parametros tipados, no arma SQL con texto: por eso no hay inyeccion. El contrato fija la firma, el ejemplo de llamada, los mensajes de error literales y que queda en la base si la llamada falla (nada).</a:t>
             </a:r>
           </a:p>
         </p:txBody>
@@ -10188,7 +10248,59 @@
                 </a:solidFill>
                 <a:latin typeface="Calibri"/>
               </a:rPr>
-              <a:t>–   Al final de la demo: dejar enlace/script compartible al grupo.</a:t>
+              <a:t>–   </a:t>
+            </a:r>
+            <a:r>
+              <a:rPr sz="2000" b="1" i="0">
+                <a:solidFill>
+                  <a:srgbClr val="333333"/>
+                </a:solidFill>
+                <a:latin typeface="Calibri"/>
+              </a:rPr>
+              <a:t>Qué observar:</a:t>
+            </a:r>
+            <a:r>
+              <a:rPr sz="2000" b="0" i="0">
+                <a:solidFill>
+                  <a:srgbClr val="333333"/>
+                </a:solidFill>
+                <a:latin typeface="Calibri"/>
+              </a:rPr>
+              <a:t> el parametro viaja como dato: el texto «Luna' OR '1'='1» se busca literal y no devuelve todas las mascotas.</a:t>
+            </a:r>
+          </a:p>
+          <a:p>
+            <a:pPr>
+              <a:spcAft>
+                <a:spcPts val="800"/>
+              </a:spcAft>
+            </a:pPr>
+            <a:r>
+              <a:rPr sz="2000" b="0" i="0">
+                <a:solidFill>
+                  <a:srgbClr val="333333"/>
+                </a:solidFill>
+                <a:latin typeface="Calibri"/>
+              </a:rPr>
+              <a:t>–   </a:t>
+            </a:r>
+            <a:r>
+              <a:rPr sz="2000" b="1" i="0">
+                <a:solidFill>
+                  <a:srgbClr val="333333"/>
+                </a:solidFill>
+                <a:latin typeface="Calibri"/>
+              </a:rPr>
+              <a:t>Qué observar:</a:t>
+            </a:r>
+            <a:r>
+              <a:rPr sz="2000" b="0" i="0">
+                <a:solidFill>
+                  <a:srgbClr val="333333"/>
+                </a:solidFill>
+                <a:latin typeface="Calibri"/>
+              </a:rPr>
+              <a:t> la aplicacion solo conoce la firma del procedimiento y sus mensajes de error: no ve tablas ni arma SQL con texto.</a:t>
             </a:r>
           </a:p>
         </p:txBody>

--- a/Bases de Datos II/Clases/Clase 12 - Integracion y preparacion final/Presentacion.pptx
+++ b/Bases de Datos II/Clases/Clase 12 - Integracion y preparacion final/Presentacion.pptx
@@ -609,7 +609,7 @@
           <a:lstStyle/>
           <a:p>
             <a:r>
-              <a:t>Concretemoslo en VetCare.</a:t>
+              <a:t>Concretemoslo en la clínica.</a:t>
             </a:r>
           </a:p>
           <a:p>
@@ -1084,7 +1084,7 @@
           <a:lstStyle/>
           <a:p>
             <a:r>
-              <a:t>Suponga que VetCare necesita registrar la fecha en que una mascota fue inactivada, dato que hoy no existe.</a:t>
+              <a:t>Suponga que la clínica necesita registrar la fecha en que una mascota fue inactivada, dato que hoy no existe.</a:t>
             </a:r>
           </a:p>
           <a:p>
@@ -4442,7 +4442,7 @@
                 </a:solidFill>
                 <a:latin typeface="Calibri"/>
               </a:rPr>
-              <a:t>Contrato de operaciones + ensayo PI</a:t>
+              <a:t>Contrato de operaciones + ensayo proyecto</a:t>
             </a:r>
           </a:p>
         </p:txBody>
@@ -5010,7 +5010,7 @@
                 </a:solidFill>
                 <a:latin typeface="Calibri"/>
               </a:rPr>
-              <a:t>–   En VetCare el contrato de agendamiento se escribe asi: sp_agendar_cita(p_id_mascota IN NUMBER, p_id_veterinario IN NUMBER, p_fecha_hora IN TIMESTAMP, p_motivo IN VARCHAR2, p_id_cita OUT NUMBER)</a:t>
+              <a:t>–   En la clínica el contrato de agendamiento se escribe asi: sp_agendar_cita(p_id_mascota IN NUMBER, p_id_veterinario IN NUMBER, p_fecha_hora IN TIMESTAMP, p_motivo IN VARCHAR2, p_id_cita OUT NUMBER)</a:t>
             </a:r>
           </a:p>
         </p:txBody>
@@ -7154,7 +7154,7 @@
                 </a:solidFill>
                 <a:latin typeface="Calibri"/>
               </a:rPr>
-              <a:t>–   Y en VetCare son exactamente las tres reglas del proyecto, que una mascota inactiva no agende cita, que el stock de Insumo nunca quede negativo y que los cambios sensibles queden auditados.</a:t>
+              <a:t>–   Y en la clínica son exactamente las tres reglas del proyecto, que una mascota inactiva no agende cita, que el stock de Insumo nunca quede negativo y que los cambios sensibles queden auditados.</a:t>
             </a:r>
           </a:p>
           <a:p>
@@ -7483,7 +7483,7 @@
                 </a:solidFill>
                 <a:latin typeface="Calibri"/>
               </a:rPr>
-              <a:t>–   Recorrido: teoría del tema, una lámina por concepto, y demo del docente sobre VetCare DB.</a:t>
+              <a:t>–   Recorrido: teoría del tema, una lámina por concepto, y demo del docente sobre la base de la clínica.</a:t>
             </a:r>
           </a:p>
           <a:p>
@@ -10232,7 +10232,7 @@
                 </a:solidFill>
                 <a:latin typeface="Calibri"/>
               </a:rPr>
-              <a:t>–   Sigan el mismo dominio VetCare (no inventen otro caso).</a:t>
+              <a:t>–   Sigan el mismo dominio de la clínica (no inventen otro caso).</a:t>
             </a:r>
           </a:p>
           <a:p>
@@ -11199,7 +11199,7 @@
                 </a:solidFill>
                 <a:latin typeface="Calibri"/>
               </a:rPr>
-              <a:t>Conserva el texto Mermaid, que es la fuente, y exporta el PNG para tu informe del Proyecto Integrador.</a:t>
+              <a:t>Conserva el texto Mermaid, que es la fuente, y exporta el PNG para tu informe.</a:t>
             </a:r>
           </a:p>
         </p:txBody>
@@ -11770,7 +11770,7 @@
                 </a:solidFill>
                 <a:latin typeface="Calibri"/>
               </a:rPr>
-              <a:t>Encuadre · clase regular · VetCare</a:t>
+              <a:t>Encuadre · clase regular · la clínica</a:t>
             </a:r>
           </a:p>
         </p:txBody>
@@ -11885,7 +11885,7 @@
                 </a:solidFill>
                 <a:latin typeface="Calibri"/>
               </a:rPr>
-              <a:t>Teoría Core breve (al servicio del PI)</a:t>
+              <a:t>Teoría Core breve (al servicio del proyecto)</a:t>
             </a:r>
           </a:p>
         </p:txBody>

--- a/Bases de Datos II/Clases/Clase 12 - Integracion y preparacion final/Presentacion.pptx
+++ b/Bases de Datos II/Clases/Clase 12 - Integracion y preparacion final/Presentacion.pptx
@@ -7,8 +7,8 @@
   <p:sldIdLst>
     <p:sldId id="256" r:id="rId7"/>
     <p:sldId id="257" r:id="rId8"/>
-    <p:sldId id="258" r:id="rId10"/>
-    <p:sldId id="259" r:id="rId11"/>
+    <p:sldId id="258" r:id="rId9"/>
+    <p:sldId id="259" r:id="rId10"/>
     <p:sldId id="260" r:id="rId12"/>
     <p:sldId id="261" r:id="rId13"/>
     <p:sldId id="262" r:id="rId14"/>
@@ -518,143 +518,67 @@
           <a:lstStyle/>
           <a:p>
             <a:r>
-              <a:t>TEXTO COMPLETO DE LA LÁMINA (se proyecta resumido):</a:t>
-            </a:r>
-          </a:p>
-          <a:p/>
-          <a:p>
-            <a:r>
-              <a:t>Tema de hoy: Integracion app &lt;-&gt; BD · Prep. presentacion</a:t>
-            </a:r>
-          </a:p>
-          <a:p/>
-          <a:p>
-            <a:r>
-              <a:t>Herramienta: Google Docs + Live SQL + Excalidraw · Bloque 120 min</a:t>
-            </a:r>
-          </a:p>
-          <a:p/>
-          <a:p>
-            <a:r>
-              <a:t>Gratis + navegador · free tier · sin software de pago obligatorio.</a:t>
-            </a:r>
-          </a:p>
-          <a:p/>
-          <a:p>
-            <a:r>
-              <a:t>Recorrido: teoría del tema, una lámina por concepto, y demo del docente sobre la base de la clínica.</a:t>
-            </a:r>
-          </a:p>
-          <a:p/>
-          <a:p>
-            <a:r>
-              <a:t>Cada lámina se sostiene sola: sirve para repasar aunque hayas faltado.</a:t>
-            </a:r>
-          </a:p>
-          <a:p/>
-          <a:p>
-            <a:r>
-              <a:t>Conceptos de hoy: Integrar no es conectarse · Inyeccion SQL · La inyeccion de SQL, explicada con las dos versiones · Por que el parametro lo evita por construccion.</a:t>
-            </a:r>
-          </a:p>
-        </p:txBody>
-      </p:sp>
-      <p:sp>
-        <p:nvSpPr>
-          <p:cNvPr id="4" name="Slide Number Placeholder 3"/>
-          <p:cNvSpPr>
-            <a:spLocks noGrp="1"/>
-          </p:cNvSpPr>
-          <p:nvPr>
-            <p:ph type="sldNum" idx="5" sz="quarter"/>
-          </p:nvPr>
-        </p:nvSpPr>
-        <p:spPr/>
-      </p:sp>
-    </p:spTree>
-  </p:cSld>
-  <p:clrMapOvr>
-    <a:masterClrMapping/>
-  </p:clrMapOvr>
-</p:notes>
-</file>
-
-<file path=ppt/notesSlides/notesSlide10.xml><?xml version="1.0" encoding="utf-8"?>
-<p:notes xmlns:a="http://schemas.openxmlformats.org/drawingml/2006/main" xmlns:p="http://schemas.openxmlformats.org/presentationml/2006/main" xmlns:r="http://schemas.openxmlformats.org/officeDocument/2006/relationships">
-  <p:cSld>
-    <p:spTree>
-      <p:nvGrpSpPr>
-        <p:cNvPr id="1" name=""/>
-        <p:cNvGrpSpPr/>
-        <p:nvPr/>
-      </p:nvGrpSpPr>
-      <p:grpSpPr>
-        <a:xfrm>
-          <a:off x="0" y="0"/>
-          <a:ext cx="0" cy="0"/>
-          <a:chOff x="0" y="0"/>
-          <a:chExt cx="0" cy="0"/>
-        </a:xfrm>
-      </p:grpSpPr>
-      <p:sp>
-        <p:nvSpPr>
-          <p:cNvPr id="2" name="Slide Image Placeholder 1"/>
-          <p:cNvSpPr>
-            <a:spLocks noGrp="1"/>
-          </p:cNvSpPr>
-          <p:nvPr>
-            <p:ph type="sldImg" idx="2"/>
-          </p:nvPr>
-        </p:nvSpPr>
-        <p:spPr/>
-      </p:sp>
-      <p:sp>
-        <p:nvSpPr>
-          <p:cNvPr id="3" name="Notes Placeholder 2"/>
-          <p:cNvSpPr>
-            <a:spLocks noGrp="1"/>
-          </p:cNvSpPr>
-          <p:nvPr>
-            <p:ph type="body" idx="3" sz="quarter"/>
-          </p:nvPr>
-        </p:nvSpPr>
-        <p:spPr/>
-        <p:txBody>
-          <a:bodyPr/>
-          <a:lstStyle/>
-          <a:p>
-            <a:r>
-              <a:t>TEXTO COMPLETO DE LA LÁMINA (se proyecta resumido):</a:t>
-            </a:r>
-          </a:p>
-          <a:p/>
-          <a:p>
-            <a:r>
-              <a:t>Herramienta: Google Docs + Live SQL + Excalidraw</a:t>
-            </a:r>
-          </a:p>
-          <a:p/>
-          <a:p>
-            <a:r>
-              <a:t>Demo: Plantilla contrato sp_agendar_cita + storyboard 6 slides.</a:t>
-            </a:r>
-          </a:p>
-          <a:p/>
-          <a:p>
-            <a:r>
-              <a:t>Sigan el mismo dominio de la clínica (no inventen otro caso).</a:t>
-            </a:r>
-          </a:p>
-          <a:p/>
-          <a:p>
-            <a:r>
-              <a:t>Qué observar: el parametro viaja como dato: el texto `Luna' OR '1'='1` se busca literal y no devuelve todas las mascotas.</a:t>
-            </a:r>
-          </a:p>
-          <a:p/>
-          <a:p>
-            <a:r>
-              <a:t>Qué observar: la aplicacion solo conoce la firma del procedimiento y sus mensajes de error: no ve tablas ni arma SQL con texto.</a:t>
+              <a:t>DESARROLLO (para explicarlo, no se proyecta):</a:t>
+            </a:r>
+          </a:p>
+          <a:p>
+            <a:r>
+              <a:t>Integrar la aplicacion con la base de datos no es conectarse: conectarse son dos lineas de configuracion.</a:t>
+            </a:r>
+          </a:p>
+          <a:p>
+            <a:r>
+              <a:t>Integrar es decidir cual es la unica puerta por la que la aplicacion puede tocar los datos, y dejar esa puerta escrita en un documento que las dos partes respetan.</a:t>
+            </a:r>
+          </a:p>
+          <a:p>
+            <a:r>
+              <a:t>En la primera, la aplicacion arma texto SQL contra las tablas: SELECT, INSERT y UPDATE escritos dentro del codigo Java o Python, apuntando directo a Mascota, Cita o Insumo.</a:t>
+            </a:r>
+          </a:p>
+          <a:p>
+            <a:r>
+              <a:t>En la segunda, la aplicacion no conoce las tablas y solo puede invocar procedimientos y funciones ya construidos dentro de la base, los mismos que este curso escribio en las Clases 3 y 4.</a:t>
+            </a:r>
+          </a:p>
+          <a:p>
+            <a:r>
+              <a:t>La eleccion no es de gusto.</a:t>
+            </a:r>
+          </a:p>
+          <a:p>
+            <a:r>
+              <a:t>La primera abre la puerta a la inyeccion SQL, reparte la regla de negocio en tantos lugares como pantallas tenga el sistema y amarra el esquema fisico al codigo.</a:t>
+            </a:r>
+          </a:p>
+          <a:p>
+            <a:r>
+              <a:t>La segunda concentra cada regla en un unico punto, permite reorganizar las tablas por dentro sin tocar la aplicacion mientras el contrato se mantenga igual</a:t>
+            </a:r>
+          </a:p>
+          <a:p>
+            <a:r>
+              <a:t>Y habilita algo que la primera hace imposible: quitarle al usuario de la aplicacion todo permiso de leer o escribir tablas y dejarle solo EXECUTE sobre los procedimientos, que es el privilegio minimo trabajado en la Clase 2.</a:t>
+            </a:r>
+          </a:p>
+          <a:p>
+            <a:r>
+              <a:t>NOTAS:</a:t>
+            </a:r>
+          </a:p>
+          <a:p>
+            <a:r>
+              <a:t>Esa puerta es la interfaz app-BD y el documento que la describe es el contrato.</a:t>
+            </a:r>
+          </a:p>
+          <a:p>
+            <a:r>
+              <a:t>Hay exactamente dos formas de construirla.</a:t>
+            </a:r>
+          </a:p>
+          <a:p>
+            <a:r>
+              <a:t>Todo lo demas de esta clase se deriva de esa decision.</a:t>
             </a:r>
           </a:p>
         </p:txBody>
@@ -729,42 +653,37 @@
           </a:p>
           <a:p>
             <a:r>
-              <a:t>Integrar la aplicacion con la base de datos no es conectarse: conectarse son dos lineas de configuracion.</a:t>
-            </a:r>
-          </a:p>
-          <a:p>
-            <a:r>
-              <a:t>Integrar es decidir cual es la unica puerta por la que la aplicacion puede tocar los datos, y dejar esa puerta escrita en un documento que las dos partes respetan.</a:t>
-            </a:r>
-          </a:p>
-          <a:p>
-            <a:r>
-              <a:t>En la primera, la aplicacion arma texto SQL contra las tablas: SELECT, INSERT y UPDATE escritos dentro del codigo Java o Python, apuntando directo a Mascota, Cita o Insumo.</a:t>
-            </a:r>
-          </a:p>
-          <a:p>
-            <a:r>
-              <a:t>En la segunda, la aplicacion no conoce las tablas y solo puede invocar procedimientos y funciones ya construidos dentro de la base, los mismos que este curso escribio en las Clases 3 y 4.</a:t>
-            </a:r>
-          </a:p>
-          <a:p>
-            <a:r>
-              <a:t>La eleccion no es de gusto.</a:t>
-            </a:r>
-          </a:p>
-          <a:p>
-            <a:r>
-              <a:t>La primera abre la puerta a la inyeccion SQL, reparte la regla de negocio en tantos lugares como pantallas tenga el sistema y amarra el esquema fisico al codigo.</a:t>
-            </a:r>
-          </a:p>
-          <a:p>
-            <a:r>
-              <a:t>La segunda concentra cada regla en un unico punto, permite reorganizar las tablas por dentro sin tocar la aplicacion mientras el contrato se mantenga igual</a:t>
-            </a:r>
-          </a:p>
-          <a:p>
-            <a:r>
-              <a:t>Y habilita algo que la primera hace imposible: quitarle al usuario de la aplicacion todo permiso de leer o escribir tablas y dejarle solo EXECUTE sobre los procedimientos, que es el privilegio minimo trabajado en la Clase 2.</a:t>
+              <a:t>La inyeccion SQL es lo que ocurre cuando un dato que escribio un usuario termina siendo interpretado como codigo por el motor.</a:t>
+            </a:r>
+          </a:p>
+          <a:p>
+            <a:r>
+              <a:t>El motor no puede distinguir que parte del texto la escribio el programador y que parte el usuario: recibe una cadena, la analiza completa y ejecuta lo que esa cadena diga.</a:t>
+            </a:r>
+          </a:p>
+          <a:p>
+            <a:r>
+              <a:t>Si alguien escribe la secuencia comilla, espacio, OR 1=1, espacio, doble guion, el motor recibe WHERE nombre = '' OR 1=1 -- ' y devuelve la tabla Mascota completa</a:t>
+            </a:r>
+          </a:p>
+          <a:p>
+            <a:r>
+              <a:t>Porque 1=1 es verdadero para toda fila y el doble guion comenta el resto de la linea, incluida la comilla que quedo sobrando.</a:t>
+            </a:r>
+          </a:p>
+          <a:p>
+            <a:r>
+              <a:t>El mismo truco en el formulario de acceso permite entrar sin conocer ninguna clave: si la validacion es SELECT COUNT(*) FROM Usuario WHERE usuario = 'U' AND clave = 'C'</a:t>
+            </a:r>
+          </a:p>
+          <a:p>
+            <a:r>
+              <a:t>Una clave que cierre la comilla y agregue OR 1=1 hace verdadera la condicion para todas las filas.</a:t>
+            </a:r>
+          </a:p>
+          <a:p>
+            <a:r>
+              <a:t>La inyeccion aparece en todas las ediciones del OWASP Top Ten: fue la categoria numero uno en 2010, 2013 y 2017, y en 2021 quedo tercera ya fusionada con otras inyecciones.</a:t>
             </a:r>
           </a:p>
           <a:p>
@@ -774,17 +693,32 @@
           </a:p>
           <a:p>
             <a:r>
-              <a:t>Esa puerta es la interfaz app-BD y el documento que la describe es el contrato.</a:t>
-            </a:r>
-          </a:p>
-          <a:p>
-            <a:r>
-              <a:t>Hay exactamente dos formas de construirla.</a:t>
-            </a:r>
-          </a:p>
-          <a:p>
-            <a:r>
-              <a:t>Todo lo demas de esta clase se deriva de esa decision.</a:t>
+              <a:t>Concretemoslo en la clínica.</a:t>
+            </a:r>
+          </a:p>
+          <a:p>
+            <a:r>
+              <a:t>El buscador de mascotas de la recepcion arma la consulta pegando la entrada del usuario, de modo que el motor recibe</a:t>
+            </a:r>
+          </a:p>
+          <a:p>
+            <a:r>
+              <a:t>Si la recepcionista escribe Luna, el motor recibe WHERE nombre = 'Luna', devuelve una fila, todo parece correcto y la aplicacion pasa a produccion.</a:t>
+            </a:r>
+          </a:p>
+          <a:p>
+            <a:r>
+              <a:t>Conviene una precision honesta, porque la hara un estudiante: en Oracle no se apilan dos sentencias en una misma llamada, asi que el clasico punto y coma seguido de DROP TABLE Cita no se comporta como en otros motores; lo que si funciona, y basta para un incidente reportable, es leer datos ajenos, saltarse un acceso o modificar informacion cuando la aplicacion ejecuta PL/SQL dinamico.</a:t>
+            </a:r>
+          </a:p>
+          <a:p>
+            <a:r>
+              <a:t>CÓDIGO CITADO (referencia):</a:t>
+            </a:r>
+          </a:p>
+          <a:p>
+            <a:r>
+              <a:t>SELECT id_mascota, nombre FROM Mascota WHERE nombre = 'ENTRADA'</a:t>
             </a:r>
           </a:p>
         </p:txBody>
@@ -859,37 +793,37 @@
           </a:p>
           <a:p>
             <a:r>
-              <a:t>La inyeccion SQL es lo que ocurre cuando un dato que escribio un usuario termina siendo interpretado como codigo por el motor.</a:t>
-            </a:r>
-          </a:p>
-          <a:p>
-            <a:r>
-              <a:t>El motor no puede distinguir que parte del texto la escribio el programador y que parte el usuario: recibe una cadena, la analiza completa y ejecuta lo que esa cadena diga.</a:t>
-            </a:r>
-          </a:p>
-          <a:p>
-            <a:r>
-              <a:t>Si alguien escribe la secuencia comilla, espacio, OR 1=1, espacio, doble guion, el motor recibe WHERE nombre = '' OR 1=1 -- ' y devuelve la tabla Mascota completa</a:t>
-            </a:r>
-          </a:p>
-          <a:p>
-            <a:r>
-              <a:t>Porque 1=1 es verdadero para toda fila y el doble guion comenta el resto de la linea, incluida la comilla que quedo sobrando.</a:t>
-            </a:r>
-          </a:p>
-          <a:p>
-            <a:r>
-              <a:t>El mismo truco en el formulario de acceso permite entrar sin conocer ninguna clave: si la validacion es SELECT COUNT(*) FROM Usuario WHERE usuario = 'U' AND clave = 'C'</a:t>
-            </a:r>
-          </a:p>
-          <a:p>
-            <a:r>
-              <a:t>Una clave que cierre la comilla y agregue OR 1=1 hace verdadera la condicion para todas las filas.</a:t>
-            </a:r>
-          </a:p>
-          <a:p>
-            <a:r>
-              <a:t>La inyeccion aparece en todas las ediciones del OWASP Top Ten: fue la categoria numero uno en 2010, 2013 y 2017, y en 2021 quedo tercera ya fusionada con otras inyecciones.</a:t>
+              <a:t>Cuando la aplicacion envia la sentencia con marcadores de posicion (en PostgreSQL $1 en una sentencia preparada, en JDBC el signo de interrogacion</a:t>
+            </a:r>
+          </a:p>
+          <a:p>
+            <a:r>
+              <a:t>Oracle escribe:p_nombre, solo como contraste) el motor analiza primero la sentencia sin los valores, construye el plan de ejecucion, y solo despues recibe cada valor como un dato tipado que se acomoda en una casilla ya reservada.</a:t>
+            </a:r>
+          </a:p>
+          <a:p>
+            <a:r>
+              <a:t>Ese valor nunca vuelve al analizador sintactico: si el usuario escribio comilla OR 1=1 doble guion, el motor busca literalmente una mascota cuyo nombre sea esa cadena, no la encuentra y devuelve cero filas.</a:t>
+            </a:r>
+          </a:p>
+          <a:p>
+            <a:r>
+              <a:t>Llamar un procedimiento con parametros hereda esa proteccion y agrega dos cosas: el usuario de la aplicacion puede tener EXECUTE sobre sp_agendar_cita y ninguna posibilidad de SELECT ni UPDATE sobre las tablas</a:t>
+            </a:r>
+          </a:p>
+          <a:p>
+            <a:r>
+              <a:t>De modo que aunque alguien controle la entrada no tiene sobre que ejercerla</a:t>
+            </a:r>
+          </a:p>
+          <a:p>
+            <a:r>
+              <a:t>Y el motor reutiliza el plan porque la sentencia es siempre la misma cadena, lo que enlaza con el analisis de planes de las Clases 6 y 8.</a:t>
+            </a:r>
+          </a:p>
+          <a:p>
+            <a:r>
+              <a:t>Aqui llega la primera pregunta previsible: si uso un ORM como JPA, ya estoy protegido.</a:t>
             </a:r>
           </a:p>
           <a:p>
@@ -899,32 +833,22 @@
           </a:p>
           <a:p>
             <a:r>
-              <a:t>Concretemoslo en la clínica.</a:t>
-            </a:r>
-          </a:p>
-          <a:p>
-            <a:r>
-              <a:t>El buscador de mascotas de la recepcion arma la consulta pegando la entrada del usuario, de modo que el motor recibe</a:t>
-            </a:r>
-          </a:p>
-          <a:p>
-            <a:r>
-              <a:t>Si la recepcionista escribe Luna, el motor recibe WHERE nombre = 'Luna', devuelve una fila, todo parece correcto y la aplicacion pasa a produccion.</a:t>
-            </a:r>
-          </a:p>
-          <a:p>
-            <a:r>
-              <a:t>Conviene una precision honesta, porque la hara un estudiante: en Oracle no se apilan dos sentencias en una misma llamada, asi que el clasico punto y coma seguido de DROP TABLE Cita no se comporta como en otros motores; lo que si funciona, y basta para un incidente reportable, es leer datos ajenos, saltarse un acceso o modificar informacion cuando la aplicacion ejecuta PL/SQL dinamico.</a:t>
-            </a:r>
-          </a:p>
-          <a:p>
-            <a:r>
-              <a:t>CÓDIGO CITADO (referencia):</a:t>
-            </a:r>
-          </a:p>
-          <a:p>
-            <a:r>
-              <a:t>SELECT id_mascota, nombre FROM Mascota WHERE nombre = 'ENTRADA'</a:t>
+              <a:t>El parametro evita esto por construccion, y hay que explicar el mecanismo y no solo la receta.</a:t>
+            </a:r>
+          </a:p>
+          <a:p>
+            <a:r>
+              <a:t>La inyeccion queda imposible, no improbable, y esa diferencia entre imposible e improbable es la que hay que instalar.</a:t>
+            </a:r>
+          </a:p>
+          <a:p>
+            <a:r>
+              <a:t>La respuesta honesta es que si mientras use los metodos del ORM o consultas con parametros nombrados, y que no en el momento en que arme una consulta nativa concatenando texto, porque el ORM no revisa lo que usted le entrega.</a:t>
+            </a:r>
+          </a:p>
+          <a:p>
+            <a:r>
+              <a:t>La vulnerabilidad no la produce la tecnologia sino la concatenacion.</a:t>
             </a:r>
           </a:p>
         </p:txBody>
@@ -999,37 +923,57 @@
           </a:p>
           <a:p>
             <a:r>
-              <a:t>Cuando la aplicacion envia la sentencia con marcadores de posicion (en PostgreSQL $1 en una sentencia preparada, en JDBC el signo de interrogacion</a:t>
-            </a:r>
-          </a:p>
-          <a:p>
-            <a:r>
-              <a:t>Oracle escribe:p_nombre, solo como contraste) el motor analiza primero la sentencia sin los valores, construye el plan de ejecucion, y solo despues recibe cada valor como un dato tipado que se acomoda en una casilla ya reservada.</a:t>
-            </a:r>
-          </a:p>
-          <a:p>
-            <a:r>
-              <a:t>Ese valor nunca vuelve al analizador sintactico: si el usuario escribio comilla OR 1=1 doble guion, el motor busca literalmente una mascota cuyo nombre sea esa cadena, no la encuentra y devuelve cero filas.</a:t>
-            </a:r>
-          </a:p>
-          <a:p>
-            <a:r>
-              <a:t>Llamar un procedimiento con parametros hereda esa proteccion y agrega dos cosas: el usuario de la aplicacion puede tener EXECUTE sobre sp_agendar_cita y ninguna posibilidad de SELECT ni UPDATE sobre las tablas</a:t>
-            </a:r>
-          </a:p>
-          <a:p>
-            <a:r>
-              <a:t>De modo que aunque alguien controle la entrada no tiene sobre que ejercerla</a:t>
-            </a:r>
-          </a:p>
-          <a:p>
-            <a:r>
-              <a:t>Y el motor reutiliza el plan porque la sentencia es siempre la misma cadena, lo que enlaza con el analisis de planes de las Clases 6 y 8.</a:t>
-            </a:r>
-          </a:p>
-          <a:p>
-            <a:r>
-              <a:t>Aqui llega la primera pregunta previsible: si uso un ORM como JPA, ya estoy protegido.</a:t>
+              <a:t>Contrato, dicho en serio, es mucho mas que el nombre del procedimiento.</a:t>
+            </a:r>
+          </a:p>
+          <a:p>
+            <a:r>
+              <a:t>La firma: nombre y lista ordenada de parametros con su tipo y su direccion, donde IN significa que el dato entra, OUT que el procedimiento lo devuelve e IN OUT que entra y sale modificado.</a:t>
+            </a:r>
+          </a:p>
+          <a:p>
+            <a:r>
+              <a:t>Las precondiciones: lo que debe ser verdadero antes de llamar.</a:t>
+            </a:r>
+          </a:p>
+          <a:p>
+            <a:r>
+              <a:t>El efecto o postcondicion: que quedo distinto en la base despues de la llamada.</a:t>
+            </a:r>
+          </a:p>
+          <a:p>
+            <a:r>
+              <a:t>Si la operacion es idempotente.</a:t>
+            </a:r>
+          </a:p>
+          <a:p>
+            <a:r>
+              <a:t>En la clínica el contrato de agendamiento se escribe asi: sp_agendar_cita(p_id_mascota IN NUMBER, p_id_veterinario IN NUMBER, p_fecha_hora IN TIMESTAMP, p_motivo IN VARCHAR2, p_id_cita OUT NUMBER)</a:t>
+            </a:r>
+          </a:p>
+          <a:p>
+            <a:r>
+              <a:t>Precondicion, la mascota existe y esta activa; efecto, inserta una fila en Cita en estado PROGRAMADA y devuelve su identificador; errores, -20010 mascota inexistente, -20011 mascota inactiva, -20012 franja ocupada; idempotente, no.</a:t>
+            </a:r>
+          </a:p>
+          <a:p>
+            <a:r>
+              <a:t>Agendar no lo es, y eso tiene consecuencia inmediata: si la recepcionista da doble clic, o si la red corta la respuesta y la aplicacion reintenta, quedan dos citas identicas.</a:t>
+            </a:r>
+          </a:p>
+          <a:p>
+            <a:r>
+              <a:t>La solucion no es pedirle al usuario que no haga doble clic: es una restriccion UNIQUE sobre (id_veterinario</a:t>
+            </a:r>
+          </a:p>
+          <a:p>
+            <a:r>
+              <a:t>Fecha_hora) que hace fallar el segundo intento en la base y no en la interfaz, o una clave de idempotencia que la aplicacion genera y la base guarda como unica.</a:t>
+            </a:r>
+          </a:p>
+          <a:p>
+            <a:r>
+              <a:t>Esto conecta con la Clase 10, donde dos recepcionistas simultaneas producian el mismo dano sin que ninguna sentencia fallara.</a:t>
             </a:r>
           </a:p>
           <a:p>
@@ -1039,22 +983,22 @@
           </a:p>
           <a:p>
             <a:r>
-              <a:t>El parametro evita esto por construccion, y hay que explicar el mecanismo y no solo la receta.</a:t>
-            </a:r>
-          </a:p>
-          <a:p>
-            <a:r>
-              <a:t>La inyeccion queda imposible, no improbable, y esa diferencia entre imposible e improbable es la que hay que instalar.</a:t>
-            </a:r>
-          </a:p>
-          <a:p>
-            <a:r>
-              <a:t>La respuesta honesta es que si mientras use los metodos del ORM o consultas con parametros nombrados, y que no en el momento en que arme una consulta nativa concatenando texto, porque el ORM no revisa lo que usted le entrega.</a:t>
-            </a:r>
-          </a:p>
-          <a:p>
-            <a:r>
-              <a:t>La vulnerabilidad no la produce la tecnologia sino la concatenacion.</a:t>
+              <a:t>La lista de errores posibles con codigo y significado.</a:t>
+            </a:r>
+          </a:p>
+          <a:p>
+            <a:r>
+              <a:t>Y la version.</a:t>
+            </a:r>
+          </a:p>
+          <a:p>
+            <a:r>
+              <a:t>Idempotente significa que ejecutar la operacion dos veces con los mismos datos deja el sistema igual que ejecutarla una sola vez.</a:t>
+            </a:r>
+          </a:p>
+          <a:p>
+            <a:r>
+              <a:t>Fuera de la lamina (habla de la practica): Contrato, dicho en serio, es mucho mas que el nombre del procedimiento, y tiene seis partes que hay que exigir en el entregable de hoy.</a:t>
             </a:r>
           </a:p>
         </p:txBody>
@@ -1129,57 +1073,67 @@
           </a:p>
           <a:p>
             <a:r>
-              <a:t>Contrato, dicho en serio, es mucho mas que el nombre del procedimiento.</a:t>
-            </a:r>
-          </a:p>
-          <a:p>
-            <a:r>
-              <a:t>La firma: nombre y lista ordenada de parametros con su tipo y su direccion, donde IN significa que el dato entra, OUT que el procedimiento lo devuelve e IN OUT que entra y sale modificado.</a:t>
-            </a:r>
-          </a:p>
-          <a:p>
-            <a:r>
-              <a:t>Las precondiciones: lo que debe ser verdadero antes de llamar.</a:t>
-            </a:r>
-          </a:p>
-          <a:p>
-            <a:r>
-              <a:t>El efecto o postcondicion: que quedo distinto en la base despues de la llamada.</a:t>
-            </a:r>
-          </a:p>
-          <a:p>
-            <a:r>
-              <a:t>Si la operacion es idempotente.</a:t>
-            </a:r>
-          </a:p>
-          <a:p>
-            <a:r>
-              <a:t>En la clínica el contrato de agendamiento se escribe asi: sp_agendar_cita(p_id_mascota IN NUMBER, p_id_veterinario IN NUMBER, p_fecha_hora IN TIMESTAMP, p_motivo IN VARCHAR2, p_id_cita OUT NUMBER)</a:t>
-            </a:r>
-          </a:p>
-          <a:p>
-            <a:r>
-              <a:t>Precondicion, la mascota existe y esta activa; efecto, inserta una fila en Cita en estado PROGRAMADA y devuelve su identificador; errores, -20010 mascota inexistente, -20011 mascota inactiva, -20012 franja ocupada; idempotente, no.</a:t>
-            </a:r>
-          </a:p>
-          <a:p>
-            <a:r>
-              <a:t>Agendar no lo es, y eso tiene consecuencia inmediata: si la recepcionista da doble clic, o si la red corta la respuesta y la aplicacion reintenta, quedan dos citas identicas.</a:t>
-            </a:r>
-          </a:p>
-          <a:p>
-            <a:r>
-              <a:t>La solucion no es pedirle al usuario que no haga doble clic: es una restriccion UNIQUE sobre (id_veterinario</a:t>
-            </a:r>
-          </a:p>
-          <a:p>
-            <a:r>
-              <a:t>Fecha_hora) que hace fallar el segundo intento en la base y no en la interfaz, o una clave de idempotencia que la aplicacion genera y la base guarda como unica.</a:t>
-            </a:r>
-          </a:p>
-          <a:p>
-            <a:r>
-              <a:t>Esto conecta con la Clase 10, donde dos recepcionistas simultaneas producian el mismo dano sin que ninguna sentencia fallara.</a:t>
+              <a:t>Primera: el procedimiento nunca informa un fallo devolviendo cero o menos uno en un parametro de salida</a:t>
+            </a:r>
+          </a:p>
+          <a:p>
+            <a:r>
+              <a:t>Porque quien llama puede ignorarlo y seguir; lanza el error con RAISE EXCEPTION y le pone un codigo propio con USING ERRCODE</a:t>
+            </a:r>
+          </a:p>
+          <a:p>
+            <a:r>
+              <a:t>Un SQLSTATE de cinco caracteres: RAISE EXCEPTION 'la mascota % esta inactiva', p_id USING ERRCODE = 'MA001'; la aplicacion recibe MA001 y el mensaje.</a:t>
+            </a:r>
+          </a:p>
+          <a:p>
+            <a:r>
+              <a:t>Sin USING ERRCODE el codigo es P0001, el mismo para todos los errores propios.</a:t>
+            </a:r>
+          </a:p>
+          <a:p>
+            <a:r>
+              <a:t>Repartir los codigos por modulo, por ejemplo MA para mascotas e IN para inventario, es convencion propia del proyecto.</a:t>
+            </a:r>
+          </a:p>
+          <a:p>
+            <a:r>
+              <a:t>En Oracle el equivalente es RAISE_APPLICATION_ERROR con el rango -20000 a -20999, solo como contraste.</a:t>
+            </a:r>
+          </a:p>
+          <a:p>
+            <a:r>
+              <a:t>Segunda: la aplicacion captura el codigo, lo traduce a un mensaje en lenguaje de recepcion y jamas muestra el texto crudo del motor</a:t>
+            </a:r>
+          </a:p>
+          <a:p>
+            <a:r>
+              <a:t>Porque un relation "cita" does not exist le regala al atacante el nombre de los objetos y al recepcionista no le dice nada</a:t>
+            </a:r>
+          </a:p>
+          <a:p>
+            <a:r>
+              <a:t>El error tecnico completo se registra en el log del servidor con un identificador de correlacion que permita encontrar despues ese evento exacto.</a:t>
+            </a:r>
+          </a:p>
+          <a:p>
+            <a:r>
+              <a:t>Tercera, la mas discutida: quien decide COMMIT.</a:t>
+            </a:r>
+          </a:p>
+          <a:p>
+            <a:r>
+              <a:t>La operacion de negocio completa, con todas sus validaciones y sus inserciones, vive dentro de un solo procedimiento</a:t>
+            </a:r>
+          </a:p>
+          <a:p>
+            <a:r>
+              <a:t>Y en PostgreSQL ese CALL es su propia transaccion: si una validacion lanza el error, la excepcion sale del CALL y deshace todo lo que alcanzo a escribir sin que nadie escriba ROLLBACK; la aplicacion no confirma a la mitad.</a:t>
+            </a:r>
+          </a:p>
+          <a:p>
+            <a:r>
+              <a:t>Si el procedimiento captura una excepcion, el bloque termina con RAISE para que el error suba, y nunca WHEN OTHERS THEN NULL, que es la forma mas eficaz que existe de perder datos sin enterarse.</a:t>
             </a:r>
           </a:p>
           <a:p>
@@ -1189,22 +1143,7 @@
           </a:p>
           <a:p>
             <a:r>
-              <a:t>La lista de errores posibles con codigo y significado.</a:t>
-            </a:r>
-          </a:p>
-          <a:p>
-            <a:r>
-              <a:t>Y la version.</a:t>
-            </a:r>
-          </a:p>
-          <a:p>
-            <a:r>
-              <a:t>Idempotente significa que ejecutar la operacion dos veces con los mismos datos deja el sistema igual que ejecutarla una sola vez.</a:t>
-            </a:r>
-          </a:p>
-          <a:p>
-            <a:r>
-              <a:t>Fuera de la lamina (habla de la practica): Contrato, dicho en serio, es mucho mas que el nombre del procedimiento, y tiene seis partes que hay que exigir en el entregable de hoy.</a:t>
+              <a:t>El manejo de errores entre capas se resuelve con tres reglas.</a:t>
             </a:r>
           </a:p>
         </p:txBody>
@@ -1279,67 +1218,62 @@
           </a:p>
           <a:p>
             <a:r>
-              <a:t>Primera: el procedimiento nunca informa un fallo devolviendo cero o menos uno en un parametro de salida</a:t>
-            </a:r>
-          </a:p>
-          <a:p>
-            <a:r>
-              <a:t>Porque quien llama puede ignorarlo y seguir; lanza el error con RAISE EXCEPTION y le pone un codigo propio con USING ERRCODE</a:t>
-            </a:r>
-          </a:p>
-          <a:p>
-            <a:r>
-              <a:t>Un SQLSTATE de cinco caracteres: RAISE EXCEPTION 'la mascota % esta inactiva', p_id USING ERRCODE = 'MA001'; la aplicacion recibe MA001 y el mensaje.</a:t>
-            </a:r>
-          </a:p>
-          <a:p>
-            <a:r>
-              <a:t>Sin USING ERRCODE el codigo es P0001, el mismo para todos los errores propios.</a:t>
-            </a:r>
-          </a:p>
-          <a:p>
-            <a:r>
-              <a:t>Repartir los codigos por modulo, por ejemplo MA para mascotas e IN para inventario, es convencion propia del proyecto.</a:t>
-            </a:r>
-          </a:p>
-          <a:p>
-            <a:r>
-              <a:t>En Oracle el equivalente es RAISE_APPLICATION_ERROR con el rango -20000 a -20999, solo como contraste.</a:t>
-            </a:r>
-          </a:p>
-          <a:p>
-            <a:r>
-              <a:t>Segunda: la aplicacion captura el codigo, lo traduce a un mensaje en lenguaje de recepcion y jamas muestra el texto crudo del motor</a:t>
-            </a:r>
-          </a:p>
-          <a:p>
-            <a:r>
-              <a:t>Porque un relation "cita" does not exist le regala al atacante el nombre de los objetos y al recepcionista no le dice nada</a:t>
-            </a:r>
-          </a:p>
-          <a:p>
-            <a:r>
-              <a:t>El error tecnico completo se registra en el log del servidor con un identificador de correlacion que permita encontrar despues ese evento exacto.</a:t>
-            </a:r>
-          </a:p>
-          <a:p>
-            <a:r>
-              <a:t>Tercera, la mas discutida: quien decide COMMIT.</a:t>
-            </a:r>
-          </a:p>
-          <a:p>
-            <a:r>
-              <a:t>La operacion de negocio completa, con todas sus validaciones y sus inserciones, vive dentro de un solo procedimiento</a:t>
-            </a:r>
-          </a:p>
-          <a:p>
-            <a:r>
-              <a:t>Y en PostgreSQL ese CALL es su propia transaccion: si una validacion lanza el error, la excepcion sale del CALL y deshace todo lo que alcanzo a escribir sin que nadie escriba ROLLBACK; la aplicacion no confirma a la mitad.</a:t>
-            </a:r>
-          </a:p>
-          <a:p>
-            <a:r>
-              <a:t>Si el procedimiento captura una excepcion, el bloque termina con RAISE para que el error suba, y nunca WHEN OTHERS THEN NULL, que es la forma mas eficaz que existe de perder datos sin enterarse.</a:t>
+              <a:t>Un pool de conexiones es un conjunto de conexiones ya abiertas y autenticadas que la aplicacion mantiene vivas, presta a cada peticion mientras dura y recupera al terminar.</a:t>
+            </a:r>
+          </a:p>
+          <a:p>
+            <a:r>
+              <a:t>Abrir una conexion implica saludo TCP, autenticacion del usuario, creacion de la sesion y reserva de memoria privada</a:t>
+            </a:r>
+          </a:p>
+          <a:p>
+            <a:r>
+              <a:t>En un motor como Oracle sobre una red de oficina eso cuesta del orden de decenas de milisegundos, digamos entre 20 y 100 segun red y configuracion.</a:t>
+            </a:r>
+          </a:p>
+          <a:p>
+            <a:r>
+              <a:t>Un SELECT bien indexado sobre Cita se resuelve en 2 o 3 milisegundos.</a:t>
+            </a:r>
+          </a:p>
+          <a:p>
+            <a:r>
+              <a:t>Si por cada consulta se abre y se cierra la conexion, la aplicacion gasta cincuenta milisegundos en el tramite y tres en el trabajo: mas del noventa por ciento del tiempo de respuesta es protocolo.</a:t>
+            </a:r>
+          </a:p>
+          <a:p>
+            <a:r>
+              <a:t>Los valores exactos dependen del entorno y hay que medirlos; lo que si es regla dura es la direccion de la desigualdad.</a:t>
+            </a:r>
+          </a:p>
+          <a:p>
+            <a:r>
+              <a:t>El tamano del pool no se maximiza, porque cada sesion consume memoria del servidor y mas conexiones simultaneas que nucleos de CPU no aumentan el trabajo hecho</a:t>
+            </a:r>
+          </a:p>
+          <a:p>
+            <a:r>
+              <a:t>Solo la cola: la convencion difundida, no ley, es partir de unas diez conexiones para una aplicacion de este tamano y subir solo con mediciones.</a:t>
+            </a:r>
+          </a:p>
+          <a:p>
+            <a:r>
+              <a:t>Y la fuga de conexiones es el fallo tipico: si una ruta del codigo no devuelve la conexion porque falto el finally o el try con recursos, el pool se agota y la aplicacion se congela esperando</a:t>
+            </a:r>
+          </a:p>
+          <a:p>
+            <a:r>
+              <a:t>El sintoma es un sistema que funciona media hora y despues no responde.</a:t>
+            </a:r>
+          </a:p>
+          <a:p>
+            <a:r>
+              <a:t>Segunda pregunta previsible: no es mas lento llamar un procedimiento que consultar directo.</a:t>
+            </a:r>
+          </a:p>
+          <a:p>
+            <a:r>
+              <a:t>Normalmente es mas rapido, porque una llamada resuelve en el servidor lo que la aplicacion haria en tres o cuatro viajes de red; en todo caso la respuesta profesional es medir, con las herramientas de la Clase 8.</a:t>
             </a:r>
           </a:p>
           <a:p>
@@ -1349,7 +1283,17 @@
           </a:p>
           <a:p>
             <a:r>
-              <a:t>El manejo de errores entre capas se resuelve con tres reglas.</a:t>
+              <a:t>Existe por una asimetria que conviene dar con numeros: abrir una conexion es caro y ejecutar una consulta es barato.</a:t>
+            </a:r>
+          </a:p>
+          <a:p>
+            <a:r>
+              <a:t>Tomar una conexion prestada del pool cuesta una fraccion de milisegundo.</a:t>
+            </a:r>
+          </a:p>
+          <a:p>
+            <a:r>
+              <a:t>De ahi salen dos consecuencias.</a:t>
             </a:r>
           </a:p>
         </p:txBody>
@@ -1424,62 +1368,37 @@
           </a:p>
           <a:p>
             <a:r>
-              <a:t>Un pool de conexiones es un conjunto de conexiones ya abiertas y autenticadas que la aplicacion mantiene vivas, presta a cada peticion mientras dura y recupera al terminar.</a:t>
-            </a:r>
-          </a:p>
-          <a:p>
-            <a:r>
-              <a:t>Abrir una conexion implica saludo TCP, autenticacion del usuario, creacion de la sesion y reserva de memoria privada</a:t>
-            </a:r>
-          </a:p>
-          <a:p>
-            <a:r>
-              <a:t>En un motor como Oracle sobre una red de oficina eso cuesta del orden de decenas de milisegundos, digamos entre 20 y 100 segun red y configuracion.</a:t>
-            </a:r>
-          </a:p>
-          <a:p>
-            <a:r>
-              <a:t>Un SELECT bien indexado sobre Cita se resuelve en 2 o 3 milisegundos.</a:t>
-            </a:r>
-          </a:p>
-          <a:p>
-            <a:r>
-              <a:t>Si por cada consulta se abre y se cierra la conexion, la aplicacion gasta cincuenta milisegundos en el tramite y tres en el trabajo: mas del noventa por ciento del tiempo de respuesta es protocolo.</a:t>
-            </a:r>
-          </a:p>
-          <a:p>
-            <a:r>
-              <a:t>Los valores exactos dependen del entorno y hay que medirlos; lo que si es regla dura es la direccion de la desigualdad.</a:t>
-            </a:r>
-          </a:p>
-          <a:p>
-            <a:r>
-              <a:t>El tamano del pool no se maximiza, porque cada sesion consume memoria del servidor y mas conexiones simultaneas que nucleos de CPU no aumentan el trabajo hecho</a:t>
-            </a:r>
-          </a:p>
-          <a:p>
-            <a:r>
-              <a:t>Solo la cola: la convencion difundida, no ley, es partir de unas diez conexiones para una aplicacion de este tamano y subir solo con mediciones.</a:t>
-            </a:r>
-          </a:p>
-          <a:p>
-            <a:r>
-              <a:t>Y la fuga de conexiones es el fallo tipico: si una ruta del codigo no devuelve la conexion porque falto el finally o el try con recursos, el pool se agota y la aplicacion se congela esperando</a:t>
-            </a:r>
-          </a:p>
-          <a:p>
-            <a:r>
-              <a:t>El sintoma es un sistema que funciona media hora y despues no responde.</a:t>
-            </a:r>
-          </a:p>
-          <a:p>
-            <a:r>
-              <a:t>Segunda pregunta previsible: no es mas lento llamar un procedimiento que consultar directo.</a:t>
-            </a:r>
-          </a:p>
-          <a:p>
-            <a:r>
-              <a:t>Normalmente es mas rapido, porque una llamada resuelve en el servidor lo que la aplicacion haria en tres o cuatro viajes de red; en todo caso la respuesta profesional es medir, con las herramientas de la Clase 8.</a:t>
+              <a:t>A favor de la base: la regla queda escrita una sola vez y la cumplen todos los clientes, incluida la consola del administrador, el reporte de Excel y el script que alguien correra a las once de la noche</a:t>
+            </a:r>
+          </a:p>
+          <a:p>
+            <a:r>
+              <a:t>Queda dentro de la misma transaccion que los datos, sin ventana entre validar y escribir; y ahorra viajes de red.</a:t>
+            </a:r>
+          </a:p>
+          <a:p>
+            <a:r>
+              <a:t>En contra: PL/SQL es mas dificil de probar de forma automatizada, sus cambios no se versionan tan naturalmente en un repositorio como el codigo de la aplicacion, hay menos programadores que lo dominen, ata el proyecto al motor elegido</a:t>
+            </a:r>
+          </a:p>
+          <a:p>
+            <a:r>
+              <a:t>Y la CPU de la base suele ser el recurso mas escaso y mas caro de escalar, porque se agrega servidor de aplicacion con facilidad y no se agrega servidor de base de datos con la misma facilidad.</a:t>
+            </a:r>
+          </a:p>
+          <a:p>
+            <a:r>
+              <a:t>El criterio de decision que conviene entregar es este: las invariantes que protegen la integridad de los datos van en la base, porque son las que no pueden depender de que todos los clientes se porten bien</a:t>
+            </a:r>
+          </a:p>
+          <a:p>
+            <a:r>
+              <a:t>Y en la clínica son exactamente las tres reglas del proyecto, que una mascota inactiva no agende cita, que el stock de Insumo nunca quede negativo y que los cambios sensibles queden auditados.</a:t>
+            </a:r>
+          </a:p>
+          <a:p>
+            <a:r>
+              <a:t>Cuando pregunten cual es mejor, la respuesta es que depende de donde caiga el costo del error, y para datos que no se pueden reconstruir ese costo cae siempre del lado de la base.</a:t>
             </a:r>
           </a:p>
           <a:p>
@@ -1489,17 +1408,12 @@
           </a:p>
           <a:p>
             <a:r>
-              <a:t>Existe por una asimetria que conviene dar con numeros: abrir una conexion es caro y ejecutar una consulta es barato.</a:t>
-            </a:r>
-          </a:p>
-          <a:p>
-            <a:r>
-              <a:t>Tomar una conexion prestada del pool cuesta una fraccion de milisegundo.</a:t>
-            </a:r>
-          </a:p>
-          <a:p>
-            <a:r>
-              <a:t>De ahi salen dos consecuencias.</a:t>
+              <a:t>El trade-off de poner logica en la base o en la aplicacion merece honestidad y no propaganda, porque el estudiante encontrara equipos reales que defienden lo contrario de lo que oye hoy.</a:t>
+            </a:r>
+          </a:p>
+          <a:p>
+            <a:r>
+              <a:t>La orquestacion, la presentacion, los formatos de fecha y el envio de correos van en la aplicacion.</a:t>
             </a:r>
           </a:p>
         </p:txBody>
@@ -1525,126 +1439,6 @@
 </file>
 
 <file path=ppt/notesSlides/notesSlide8.xml><?xml version="1.0" encoding="utf-8"?>
-<p:notes xmlns:a="http://schemas.openxmlformats.org/drawingml/2006/main" xmlns:p="http://schemas.openxmlformats.org/presentationml/2006/main" xmlns:r="http://schemas.openxmlformats.org/officeDocument/2006/relationships">
-  <p:cSld>
-    <p:spTree>
-      <p:nvGrpSpPr>
-        <p:cNvPr id="1" name=""/>
-        <p:cNvGrpSpPr/>
-        <p:nvPr/>
-      </p:nvGrpSpPr>
-      <p:grpSpPr>
-        <a:xfrm>
-          <a:off x="0" y="0"/>
-          <a:ext cx="0" cy="0"/>
-          <a:chOff x="0" y="0"/>
-          <a:chExt cx="0" cy="0"/>
-        </a:xfrm>
-      </p:grpSpPr>
-      <p:sp>
-        <p:nvSpPr>
-          <p:cNvPr id="2" name="Slide Image Placeholder 1"/>
-          <p:cNvSpPr>
-            <a:spLocks noGrp="1"/>
-          </p:cNvSpPr>
-          <p:nvPr>
-            <p:ph type="sldImg" idx="2"/>
-          </p:nvPr>
-        </p:nvSpPr>
-        <p:spPr/>
-      </p:sp>
-      <p:sp>
-        <p:nvSpPr>
-          <p:cNvPr id="3" name="Notes Placeholder 2"/>
-          <p:cNvSpPr>
-            <a:spLocks noGrp="1"/>
-          </p:cNvSpPr>
-          <p:nvPr>
-            <p:ph type="body" idx="3" sz="quarter"/>
-          </p:nvPr>
-        </p:nvSpPr>
-        <p:spPr/>
-        <p:txBody>
-          <a:bodyPr/>
-          <a:lstStyle/>
-          <a:p>
-            <a:r>
-              <a:t>DESARROLLO (para explicarlo, no se proyecta):</a:t>
-            </a:r>
-          </a:p>
-          <a:p>
-            <a:r>
-              <a:t>A favor de la base: la regla queda escrita una sola vez y la cumplen todos los clientes, incluida la consola del administrador, el reporte de Excel y el script que alguien correra a las once de la noche</a:t>
-            </a:r>
-          </a:p>
-          <a:p>
-            <a:r>
-              <a:t>Queda dentro de la misma transaccion que los datos, sin ventana entre validar y escribir; y ahorra viajes de red.</a:t>
-            </a:r>
-          </a:p>
-          <a:p>
-            <a:r>
-              <a:t>En contra: PL/SQL es mas dificil de probar de forma automatizada, sus cambios no se versionan tan naturalmente en un repositorio como el codigo de la aplicacion, hay menos programadores que lo dominen, ata el proyecto al motor elegido</a:t>
-            </a:r>
-          </a:p>
-          <a:p>
-            <a:r>
-              <a:t>Y la CPU de la base suele ser el recurso mas escaso y mas caro de escalar, porque se agrega servidor de aplicacion con facilidad y no se agrega servidor de base de datos con la misma facilidad.</a:t>
-            </a:r>
-          </a:p>
-          <a:p>
-            <a:r>
-              <a:t>El criterio de decision que conviene entregar es este: las invariantes que protegen la integridad de los datos van en la base, porque son las que no pueden depender de que todos los clientes se porten bien</a:t>
-            </a:r>
-          </a:p>
-          <a:p>
-            <a:r>
-              <a:t>Y en la clínica son exactamente las tres reglas del proyecto, que una mascota inactiva no agende cita, que el stock de Insumo nunca quede negativo y que los cambios sensibles queden auditados.</a:t>
-            </a:r>
-          </a:p>
-          <a:p>
-            <a:r>
-              <a:t>Cuando pregunten cual es mejor, la respuesta es que depende de donde caiga el costo del error, y para datos que no se pueden reconstruir ese costo cae siempre del lado de la base.</a:t>
-            </a:r>
-          </a:p>
-          <a:p>
-            <a:r>
-              <a:t>NOTAS:</a:t>
-            </a:r>
-          </a:p>
-          <a:p>
-            <a:r>
-              <a:t>El trade-off de poner logica en la base o en la aplicacion merece honestidad y no propaganda, porque el estudiante encontrara equipos reales que defienden lo contrario de lo que oye hoy.</a:t>
-            </a:r>
-          </a:p>
-          <a:p>
-            <a:r>
-              <a:t>La orquestacion, la presentacion, los formatos de fecha y el envio de correos van en la aplicacion.</a:t>
-            </a:r>
-          </a:p>
-        </p:txBody>
-      </p:sp>
-      <p:sp>
-        <p:nvSpPr>
-          <p:cNvPr id="4" name="Slide Number Placeholder 3"/>
-          <p:cNvSpPr>
-            <a:spLocks noGrp="1"/>
-          </p:cNvSpPr>
-          <p:nvPr>
-            <p:ph type="sldNum" idx="5" sz="quarter"/>
-          </p:nvPr>
-        </p:nvSpPr>
-        <p:spPr/>
-      </p:sp>
-    </p:spTree>
-  </p:cSld>
-  <p:clrMapOvr>
-    <a:masterClrMapping/>
-  </p:clrMapOvr>
-</p:notes>
-</file>
-
-<file path=ppt/notesSlides/notesSlide9.xml><?xml version="1.0" encoding="utf-8"?>
 <p:notes xmlns:a="http://schemas.openxmlformats.org/drawingml/2006/main" xmlns:p="http://schemas.openxmlformats.org/presentationml/2006/main" xmlns:r="http://schemas.openxmlformats.org/officeDocument/2006/relationships">
   <p:cSld>
     <p:spTree>
@@ -8413,118 +8207,14 @@
       </p:sp>
       <p:sp>
         <p:nvSpPr>
-          <p:cNvPr id="5" name="Rounded Rectangle 4"/>
-          <p:cNvSpPr/>
-          <p:nvPr/>
-        </p:nvSpPr>
-        <p:spPr>
-          <a:xfrm>
-            <a:off x="5797149" y="1573813"/>
-            <a:ext cx="6010497" cy="4057845"/>
-          </a:xfrm>
-          <a:prstGeom prst="roundRect">
-            <a:avLst>
-              <a:gd name="adj" fmla="val 4000"/>
-            </a:avLst>
-          </a:prstGeom>
-          <a:solidFill>
-            <a:srgbClr val="E8EEF4"/>
-          </a:solidFill>
-          <a:ln>
-            <a:noFill/>
-          </a:ln>
-        </p:spPr>
-        <p:style>
-          <a:lnRef idx="1">
-            <a:schemeClr val="accent1"/>
-          </a:lnRef>
-          <a:fillRef idx="3">
-            <a:schemeClr val="accent1"/>
-          </a:fillRef>
-          <a:effectRef idx="2">
-            <a:schemeClr val="accent1"/>
-          </a:effectRef>
-          <a:fontRef idx="minor">
-            <a:schemeClr val="lt1"/>
-          </a:fontRef>
-        </p:style>
-        <p:txBody>
-          <a:bodyPr rtlCol="0" anchor="ctr"/>
-          <a:lstStyle/>
-          <a:p>
-            <a:pPr algn="ctr"/>
-          </a:p>
-        </p:txBody>
-      </p:sp>
-      <p:pic>
-        <p:nvPicPr>
-          <p:cNvPr id="6" name="Picture 5" descr="laptop-code-live-demo.jpg"/>
-          <p:cNvPicPr>
-            <a:picLocks noChangeAspect="1"/>
-          </p:cNvPicPr>
-          <p:nvPr/>
-        </p:nvPicPr>
-        <p:blipFill>
-          <a:blip r:embed="rId2"/>
-          <a:stretch>
-            <a:fillRect/>
-          </a:stretch>
-        </p:blipFill>
-        <p:spPr>
-          <a:xfrm>
-            <a:off x="5870301" y="1646965"/>
-            <a:ext cx="5864193" cy="3911541"/>
-          </a:xfrm>
-          <a:prstGeom prst="rect">
-            <a:avLst/>
-          </a:prstGeom>
-        </p:spPr>
-      </p:pic>
-      <p:sp>
-        <p:nvSpPr>
-          <p:cNvPr id="7" name="TextBox 6"/>
+          <p:cNvPr id="5" name="TextBox 4"/>
           <p:cNvSpPr txBox="1"/>
           <p:nvPr/>
         </p:nvSpPr>
         <p:spPr>
           <a:xfrm>
-            <a:off x="5870301" y="5961888"/>
-            <a:ext cx="5864193" cy="320040"/>
-          </a:xfrm>
-          <a:prstGeom prst="rect">
-            <a:avLst/>
-          </a:prstGeom>
-          <a:noFill/>
-        </p:spPr>
-        <p:txBody>
-          <a:bodyPr wrap="square">
-            <a:spAutoFit/>
-          </a:bodyPr>
-          <a:lstStyle/>
-          <a:p>
-            <a:pPr algn="ctr"/>
-            <a:r>
-              <a:rPr sz="1100" b="0" i="1">
-                <a:solidFill>
-                  <a:srgbClr val="666666"/>
-                </a:solidFill>
-                <a:latin typeface="Calibri"/>
-              </a:rPr>
-              <a:t>Foto: olia danilevich · Pexels</a:t>
-            </a:r>
-          </a:p>
-        </p:txBody>
-      </p:sp>
-      <p:sp>
-        <p:nvSpPr>
-          <p:cNvPr id="8" name="TextBox 7"/>
-          <p:cNvSpPr txBox="1"/>
-          <p:nvPr/>
-        </p:nvSpPr>
-        <p:spPr>
-          <a:xfrm>
-            <a:off x="457200" y="1353312"/>
-            <a:ext cx="5093061" cy="5047488"/>
+            <a:off x="457200" y="1170432"/>
+            <a:ext cx="11277295" cy="5230368"/>
           </a:xfrm>
           <a:prstGeom prst="rect">
             <a:avLst/>
@@ -8651,14 +8341,48 @@
                 </a:solidFill>
                 <a:latin typeface="Calibri"/>
               </a:rPr>
-              <a:t> el parametro viaja como dato:</a:t>
-            </a:r>
-          </a:p>
-        </p:txBody>
-      </p:sp>
-      <p:sp>
-        <p:nvSpPr>
-          <p:cNvPr id="9" name="TextBox 8"/>
+              <a:t> el parametro viaja como dato: el texto «Luna' OR '1'='1» se busca literal y no devuelve todas las mascotas.</a:t>
+            </a:r>
+          </a:p>
+          <a:p>
+            <a:pPr>
+              <a:spcAft>
+                <a:spcPts val="800"/>
+              </a:spcAft>
+            </a:pPr>
+            <a:r>
+              <a:rPr sz="2000" b="0" i="0">
+                <a:solidFill>
+                  <a:srgbClr val="333333"/>
+                </a:solidFill>
+                <a:latin typeface="Calibri"/>
+              </a:rPr>
+              <a:t>–   </a:t>
+            </a:r>
+            <a:r>
+              <a:rPr sz="2000" b="1" i="0">
+                <a:solidFill>
+                  <a:srgbClr val="333333"/>
+                </a:solidFill>
+                <a:latin typeface="Calibri"/>
+              </a:rPr>
+              <a:t>Qué observar:</a:t>
+            </a:r>
+            <a:r>
+              <a:rPr sz="2000" b="0" i="0">
+                <a:solidFill>
+                  <a:srgbClr val="333333"/>
+                </a:solidFill>
+                <a:latin typeface="Calibri"/>
+              </a:rPr>
+              <a:t> la aplicacion solo conoce la firma del procedimiento y sus mensajes de error: no ve tablas ni arma SQL con texto.</a:t>
+            </a:r>
+          </a:p>
+        </p:txBody>
+      </p:sp>
+      <p:sp>
+        <p:nvSpPr>
+          <p:cNvPr id="6" name="TextBox 5"/>
           <p:cNvSpPr txBox="1"/>
           <p:nvPr/>
         </p:nvSpPr>
@@ -9970,118 +9694,14 @@
       </p:sp>
       <p:sp>
         <p:nvSpPr>
-          <p:cNvPr id="5" name="Rounded Rectangle 4"/>
-          <p:cNvSpPr/>
-          <p:nvPr/>
-        </p:nvSpPr>
-        <p:spPr>
-          <a:xfrm>
-            <a:off x="5797149" y="1573813"/>
-            <a:ext cx="6010497" cy="4057845"/>
-          </a:xfrm>
-          <a:prstGeom prst="roundRect">
-            <a:avLst>
-              <a:gd name="adj" fmla="val 4000"/>
-            </a:avLst>
-          </a:prstGeom>
-          <a:solidFill>
-            <a:srgbClr val="E8EEF4"/>
-          </a:solidFill>
-          <a:ln>
-            <a:noFill/>
-          </a:ln>
-        </p:spPr>
-        <p:style>
-          <a:lnRef idx="1">
-            <a:schemeClr val="accent1"/>
-          </a:lnRef>
-          <a:fillRef idx="3">
-            <a:schemeClr val="accent1"/>
-          </a:fillRef>
-          <a:effectRef idx="2">
-            <a:schemeClr val="accent1"/>
-          </a:effectRef>
-          <a:fontRef idx="minor">
-            <a:schemeClr val="lt1"/>
-          </a:fontRef>
-        </p:style>
-        <p:txBody>
-          <a:bodyPr rtlCol="0" anchor="ctr"/>
-          <a:lstStyle/>
-          <a:p>
-            <a:pPr algn="ctr"/>
-          </a:p>
-        </p:txBody>
-      </p:sp>
-      <p:pic>
-        <p:nvPicPr>
-          <p:cNvPr id="6" name="Picture 5" descr="notebook-planning-desk-coffee.jpg"/>
-          <p:cNvPicPr>
-            <a:picLocks noChangeAspect="1"/>
-          </p:cNvPicPr>
-          <p:nvPr/>
-        </p:nvPicPr>
-        <p:blipFill>
-          <a:blip r:embed="rId2"/>
-          <a:stretch>
-            <a:fillRect/>
-          </a:stretch>
-        </p:blipFill>
-        <p:spPr>
-          <a:xfrm>
-            <a:off x="5870301" y="1646965"/>
-            <a:ext cx="5864193" cy="3911541"/>
-          </a:xfrm>
-          <a:prstGeom prst="rect">
-            <a:avLst/>
-          </a:prstGeom>
-        </p:spPr>
-      </p:pic>
-      <p:sp>
-        <p:nvSpPr>
-          <p:cNvPr id="7" name="TextBox 6"/>
+          <p:cNvPr id="5" name="TextBox 4"/>
           <p:cNvSpPr txBox="1"/>
           <p:nvPr/>
         </p:nvSpPr>
         <p:spPr>
           <a:xfrm>
-            <a:off x="5870301" y="5961888"/>
-            <a:ext cx="5864193" cy="320040"/>
-          </a:xfrm>
-          <a:prstGeom prst="rect">
-            <a:avLst/>
-          </a:prstGeom>
-          <a:noFill/>
-        </p:spPr>
-        <p:txBody>
-          <a:bodyPr wrap="square">
-            <a:spAutoFit/>
-          </a:bodyPr>
-          <a:lstStyle/>
-          <a:p>
-            <a:pPr algn="ctr"/>
-            <a:r>
-              <a:rPr sz="1100" b="0" i="1">
-                <a:solidFill>
-                  <a:srgbClr val="666666"/>
-                </a:solidFill>
-                <a:latin typeface="Calibri"/>
-              </a:rPr>
-              <a:t>Foto: Cup of  Couple · Pexels</a:t>
-            </a:r>
-          </a:p>
-        </p:txBody>
-      </p:sp>
-      <p:sp>
-        <p:nvSpPr>
-          <p:cNvPr id="8" name="TextBox 7"/>
-          <p:cNvSpPr txBox="1"/>
-          <p:nvPr/>
-        </p:nvSpPr>
-        <p:spPr>
-          <a:xfrm>
-            <a:off x="457200" y="1353312"/>
-            <a:ext cx="5093061" cy="5047488"/>
+            <a:off x="457200" y="1170432"/>
+            <a:ext cx="11277295" cy="5230368"/>
           </a:xfrm>
           <a:prstGeom prst="rect">
             <a:avLst/>
@@ -10124,7 +9744,7 @@
                 </a:solidFill>
                 <a:latin typeface="Calibri"/>
               </a:rPr>
-              <a:t> Integracion app &lt;-&gt; BD · Prep.</a:t>
+              <a:t> Integracion app &lt;-&gt; BD · Prep. presentacion</a:t>
             </a:r>
           </a:p>
           <a:p>
@@ -10202,11 +9822,61 @@
               <a:t>–   Recorrido: teoría del tema, una lámina por concepto, y demo del docente sobre la base de la clínica.</a:t>
             </a:r>
           </a:p>
-        </p:txBody>
-      </p:sp>
-      <p:sp>
-        <p:nvSpPr>
-          <p:cNvPr id="9" name="TextBox 8"/>
+          <a:p>
+            <a:pPr>
+              <a:spcAft>
+                <a:spcPts val="800"/>
+              </a:spcAft>
+            </a:pPr>
+            <a:r>
+              <a:rPr sz="2000" b="0" i="0">
+                <a:solidFill>
+                  <a:srgbClr val="333333"/>
+                </a:solidFill>
+                <a:latin typeface="Calibri"/>
+              </a:rPr>
+              <a:t>–   Cada lámina se sostiene sola: sirve para repasar aunque hayas faltado.</a:t>
+            </a:r>
+          </a:p>
+          <a:p>
+            <a:pPr>
+              <a:spcAft>
+                <a:spcPts val="800"/>
+              </a:spcAft>
+            </a:pPr>
+            <a:r>
+              <a:rPr sz="2000" b="0" i="0">
+                <a:solidFill>
+                  <a:srgbClr val="333333"/>
+                </a:solidFill>
+                <a:latin typeface="Calibri"/>
+              </a:rPr>
+              <a:t>–   </a:t>
+            </a:r>
+            <a:r>
+              <a:rPr sz="2000" b="1" i="0">
+                <a:solidFill>
+                  <a:srgbClr val="333333"/>
+                </a:solidFill>
+                <a:latin typeface="Calibri"/>
+              </a:rPr>
+              <a:t>Conceptos de hoy:</a:t>
+            </a:r>
+            <a:r>
+              <a:rPr sz="2000" b="0" i="0">
+                <a:solidFill>
+                  <a:srgbClr val="333333"/>
+                </a:solidFill>
+                <a:latin typeface="Calibri"/>
+              </a:rPr>
+              <a:t> Integrar no es conectarse · Inyeccion SQL · La inyeccion de SQL, explicada con las dos versiones · Por que el parametro lo evita por construccion.</a:t>
+            </a:r>
+          </a:p>
+        </p:txBody>
+      </p:sp>
+      <p:sp>
+        <p:nvSpPr>
+          <p:cNvPr id="6" name="TextBox 5"/>
           <p:cNvSpPr txBox="1"/>
           <p:nvPr/>
         </p:nvSpPr>

--- a/Bases de Datos II/Clases/Clase 12 - Integracion y preparacion final/Presentacion.pptx
+++ b/Bases de Datos II/Clases/Clase 12 - Integracion y preparacion final/Presentacion.pptx
@@ -22,6 +22,8 @@
     <p:sldId id="270" r:id="rId22"/>
     <p:sldId id="271" r:id="rId23"/>
     <p:sldId id="272" r:id="rId24"/>
+    <p:sldId id="273" r:id="rId25"/>
+    <p:sldId id="274" r:id="rId26"/>
   </p:sldIdLst>
   <p:sldSz cx="12191695" cy="6858000" type="screen4x3"/>
   <p:notesSz cx="6858000" cy="9144000"/>
@@ -518,67 +520,1109 @@
           <a:lstStyle/>
           <a:p>
             <a:r>
-              <a:t>DESARROLLO (para explicarlo, no se proyecta):</a:t>
-            </a:r>
-          </a:p>
-          <a:p>
-            <a:r>
-              <a:t>Integrar la aplicacion con la base de datos no es conectarse: conectarse son dos lineas de configuracion.</a:t>
-            </a:r>
-          </a:p>
-          <a:p>
-            <a:r>
-              <a:t>Integrar es decidir cual es la unica puerta por la que la aplicacion puede tocar los datos, y dejar esa puerta escrita en un documento que las dos partes respetan.</a:t>
-            </a:r>
-          </a:p>
-          <a:p>
-            <a:r>
-              <a:t>En la primera, la aplicacion arma texto SQL contra las tablas: SELECT, INSERT y UPDATE escritos dentro del codigo Java o Python, apuntando directo a Mascota, Cita o Insumo.</a:t>
-            </a:r>
-          </a:p>
-          <a:p>
-            <a:r>
-              <a:t>En la segunda, la aplicacion no conoce las tablas y solo puede invocar procedimientos y funciones ya construidos dentro de la base, los mismos que este curso escribio en las Clases 3 y 4.</a:t>
-            </a:r>
-          </a:p>
-          <a:p>
-            <a:r>
-              <a:t>La eleccion no es de gusto.</a:t>
-            </a:r>
-          </a:p>
-          <a:p>
-            <a:r>
-              <a:t>La primera abre la puerta a la inyeccion SQL, reparte la regla de negocio en tantos lugares como pantallas tenga el sistema y amarra el esquema fisico al codigo.</a:t>
-            </a:r>
-          </a:p>
-          <a:p>
-            <a:r>
-              <a:t>La segunda concentra cada regla en un unico punto, permite reorganizar las tablas por dentro sin tocar la aplicacion mientras el contrato se mantenga igual</a:t>
-            </a:r>
-          </a:p>
-          <a:p>
-            <a:r>
-              <a:t>Y habilita algo que la primera hace imposible: quitarle al usuario de la aplicacion todo permiso de leer o escribir tablas y dejarle solo EXECUTE sobre los procedimientos, que es el privilegio minimo trabajado en la Clase 2.</a:t>
-            </a:r>
-          </a:p>
-          <a:p>
-            <a:r>
-              <a:t>NOTAS:</a:t>
-            </a:r>
-          </a:p>
-          <a:p>
-            <a:r>
-              <a:t>Esa puerta es la interfaz app-BD y el documento que la describe es el contrato.</a:t>
-            </a:r>
-          </a:p>
-          <a:p>
-            <a:r>
-              <a:t>Hay exactamente dos formas de construirla.</a:t>
-            </a:r>
-          </a:p>
-          <a:p>
-            <a:r>
-              <a:t>Todo lo demas de esta clase se deriva de esa decision.</a:t>
+              <a:t>QUÉ ES (dilo así): Integrar la aplicación con la base no es abrir una conexión: es decidir cuál es la única puerta por la que la aplicación toca los datos y dejarla escrita en un contrato. Hay dos formas de construirla, y la elección decide la seguridad, dónde vive cada regla y qué tan fácil es cambiar el esquema.</a:t>
+            </a:r>
+          </a:p>
+          <a:p/>
+          <a:p>
+            <a:r>
+              <a:t>CÓMO DARLA (≈4 min):</a:t>
+            </a:r>
+          </a:p>
+          <a:p>
+            <a:r>
+              <a:t>  • Al entrar: Primera forma: la aplicación escribe SELECT, INSERT y UPDATE contra dueno, mascota, cita e insumo. Consecuencias: inyección SQL posible, la regla de negocio repetida en cada pantalla y las tablas atadas al código.</a:t>
+            </a:r>
+          </a:p>
+          <a:p>
+            <a:r>
+              <a:t>  • Clic 1: Segunda forma: la aplicación solo llama procedimientos y funciones (los de las Clases 3 y 4), descritos en un contrato. Cada regla vive en un lugar, las tablas pueden reorganizarse por dentro y al rol de la aplicación se le deja solo EXECUTE, el mínimo privilegio de la Clase 2.</a:t>
+            </a:r>
+          </a:p>
+          <a:p>
+            <a:r>
+              <a:t>  • Clic 2: La frase: conectarse son dos líneas; integrar es elegir la puerta. Todo lo demás de hoy sale de esta decisión.</a:t>
+            </a:r>
+          </a:p>
+          <a:p/>
+          <a:p>
+            <a:r>
+              <a:t>EJEMPLO: Con la segunda forma, el rol de la aplicación recibe GRANT EXECUTE ON PROCEDURE sp_agendar_cita(INT, INT, TIMESTAMP) y ningún INSERT sobre cita: aunque alguien tome el control de la aplicación, no puede escribir en la tabla sino a través de la regla.</a:t>
+            </a:r>
+          </a:p>
+          <a:p/>
+          <a:p>
+            <a:r>
+              <a:t>SI PREGUNTAN:</a:t>
+            </a:r>
+          </a:p>
+          <a:p>
+            <a:r>
+              <a:t>  • «¿Y las consultas de solo lectura, también por función?» → Pueden ir por función (como api_agenda_del_dia, más adelante) o con SELECT sobre las tablas o vistas que la pantalla necesita. Lo que no se da es escritura directa.</a:t>
+            </a:r>
+          </a:p>
+          <a:p/>
+          <a:p>
+            <a:r>
+              <a:t>CUIDADO: En PostgreSQL una función o un procedimiento nuevo queda con EXECUTE para PUBLIC: si no se revoca, cualquier rol puede llamarlo. El mínimo privilegio exige REVOKE EXECUTE … FROM PUBLIC y luego el GRANT al rol de la aplicación.</a:t>
+            </a:r>
+          </a:p>
+          <a:p/>
+          <a:p>
+            <a:r>
+              <a:t>PASA A LA SIGUIENTE: La primera consecuencia de la puerta equivocada tiene nombre: inyección SQL.</a:t>
+            </a:r>
+          </a:p>
+        </p:txBody>
+      </p:sp>
+      <p:sp>
+        <p:nvSpPr>
+          <p:cNvPr id="4" name="Slide Number Placeholder 3"/>
+          <p:cNvSpPr>
+            <a:spLocks noGrp="1"/>
+          </p:cNvSpPr>
+          <p:nvPr>
+            <p:ph type="sldNum" idx="5" sz="quarter"/>
+          </p:nvPr>
+        </p:nvSpPr>
+        <p:spPr/>
+      </p:sp>
+    </p:spTree>
+  </p:cSld>
+  <p:clrMapOvr>
+    <a:masterClrMapping/>
+  </p:clrMapOvr>
+</p:notes>
+</file>
+
+<file path=ppt/notesSlides/notesSlide10.xml><?xml version="1.0" encoding="utf-8"?>
+<p:notes xmlns:a="http://schemas.openxmlformats.org/drawingml/2006/main" xmlns:p="http://schemas.openxmlformats.org/presentationml/2006/main" xmlns:r="http://schemas.openxmlformats.org/officeDocument/2006/relationships">
+  <p:cSld>
+    <p:spTree>
+      <p:nvGrpSpPr>
+        <p:cNvPr id="1" name=""/>
+        <p:cNvGrpSpPr/>
+        <p:nvPr/>
+      </p:nvGrpSpPr>
+      <p:grpSpPr>
+        <a:xfrm>
+          <a:off x="0" y="0"/>
+          <a:ext cx="0" cy="0"/>
+          <a:chOff x="0" y="0"/>
+          <a:chExt cx="0" cy="0"/>
+        </a:xfrm>
+      </p:grpSpPr>
+      <p:sp>
+        <p:nvSpPr>
+          <p:cNvPr id="2" name="Slide Image Placeholder 1"/>
+          <p:cNvSpPr>
+            <a:spLocks noGrp="1"/>
+          </p:cNvSpPr>
+          <p:nvPr>
+            <p:ph type="sldImg" idx="2"/>
+          </p:nvPr>
+        </p:nvSpPr>
+        <p:spPr/>
+      </p:sp>
+      <p:sp>
+        <p:nvSpPr>
+          <p:cNvPr id="3" name="Notes Placeholder 2"/>
+          <p:cNvSpPr>
+            <a:spLocks noGrp="1"/>
+          </p:cNvSpPr>
+          <p:nvPr>
+            <p:ph type="body" idx="3" sz="quarter"/>
+          </p:nvPr>
+        </p:nvSpPr>
+        <p:spPr/>
+        <p:txBody>
+          <a:bodyPr/>
+          <a:lstStyle/>
+          <a:p>
+            <a:r>
+              <a:t>QUÉ ES (dilo así): El recorrido del bloque: teoría con una lámina por concepto, demo sobre la base de la clínica y práctica opcional.</a:t>
+            </a:r>
+          </a:p>
+          <a:p/>
+          <a:p>
+            <a:r>
+              <a:t>CÓMO DARLA (≈1 min):</a:t>
+            </a:r>
+          </a:p>
+          <a:p>
+            <a:r>
+              <a:t>  • Al entrar: Señala solo los tramos; no te detengas. La práctica está en la carpeta de la clase y es opcional.</a:t>
+            </a:r>
+          </a:p>
+        </p:txBody>
+      </p:sp>
+      <p:sp>
+        <p:nvSpPr>
+          <p:cNvPr id="4" name="Slide Number Placeholder 3"/>
+          <p:cNvSpPr>
+            <a:spLocks noGrp="1"/>
+          </p:cNvSpPr>
+          <p:nvPr>
+            <p:ph type="sldNum" idx="5" sz="quarter"/>
+          </p:nvPr>
+        </p:nvSpPr>
+        <p:spPr/>
+      </p:sp>
+    </p:spTree>
+  </p:cSld>
+  <p:clrMapOvr>
+    <a:masterClrMapping/>
+  </p:clrMapOvr>
+</p:notes>
+</file>
+
+<file path=ppt/notesSlides/notesSlide11.xml><?xml version="1.0" encoding="utf-8"?>
+<p:notes xmlns:a="http://schemas.openxmlformats.org/drawingml/2006/main" xmlns:p="http://schemas.openxmlformats.org/presentationml/2006/main" xmlns:r="http://schemas.openxmlformats.org/officeDocument/2006/relationships">
+  <p:cSld>
+    <p:spTree>
+      <p:nvGrpSpPr>
+        <p:cNvPr id="1" name=""/>
+        <p:cNvGrpSpPr/>
+        <p:nvPr/>
+      </p:nvGrpSpPr>
+      <p:grpSpPr>
+        <a:xfrm>
+          <a:off x="0" y="0"/>
+          <a:ext cx="0" cy="0"/>
+          <a:chOff x="0" y="0"/>
+          <a:chExt cx="0" cy="0"/>
+        </a:xfrm>
+      </p:grpSpPr>
+      <p:sp>
+        <p:nvSpPr>
+          <p:cNvPr id="2" name="Slide Image Placeholder 1"/>
+          <p:cNvSpPr>
+            <a:spLocks noGrp="1"/>
+          </p:cNvSpPr>
+          <p:nvPr>
+            <p:ph type="sldImg" idx="2"/>
+          </p:nvPr>
+        </p:nvSpPr>
+        <p:spPr/>
+      </p:sp>
+      <p:sp>
+        <p:nvSpPr>
+          <p:cNvPr id="3" name="Notes Placeholder 2"/>
+          <p:cNvSpPr>
+            <a:spLocks noGrp="1"/>
+          </p:cNvSpPr>
+          <p:nvPr>
+            <p:ph type="body" idx="3" sz="quarter"/>
+          </p:nvPr>
+        </p:nvSpPr>
+        <p:spPr/>
+        <p:txBody>
+          <a:bodyPr/>
+          <a:lstStyle/>
+          <a:p>
+            <a:r>
+              <a:t>QUÉ ES (dilo así): La misma búsqueda de dueños armada de las dos maneras. La mala pega la entrada al texto; la buena prepara la sentencia con un marcador $1 y manda el valor aparte.</a:t>
+            </a:r>
+          </a:p>
+          <a:p/>
+          <a:p>
+            <a:r>
+              <a:t>CÓMO DARLA (≈3 min):</a:t>
+            </a:r>
+          </a:p>
+          <a:p>
+            <a:r>
+              <a:t>  • Líneas 1-4: Versión mala: si alguien escribe x'; UPDATE cita SET estado = 'CANCELADA'; -- el motor recibe dos sentencias, la búsqueda y un UPDATE sin WHERE, y ejecuta las dos: toda la agenda queda cancelada. En PostgreSQL, apilar sentencias con punto y coma funciona cuando el texto se envía sin parámetros.</a:t>
+            </a:r>
+          </a:p>
+          <a:p>
+            <a:r>
+              <a:t>  • Líneas 6-8: Versión buena: PREPARE buscar_dueno (VARCHAR) deja la sentencia analizada, con $1 como casilla para un valor de texto.</a:t>
+            </a:r>
+          </a:p>
+          <a:p>
+            <a:r>
+              <a:t>  • Líneas 10-12: EXECUTE buscar_dueno('Ana Gomez') devuelve 1 fila (1 | Ana Gomez | 3001112233). Con la entrada maliciosa devuelve 0 filas: busca un dueño que se llame literalmente así y el UPDATE nunca se ejecuta. Las comillas dobladas ('') son solo la forma de escribir una comilla dentro de un texto SQL.</a:t>
+            </a:r>
+          </a:p>
+          <a:p/>
+          <a:p>
+            <a:r>
+              <a:t>EJEMPLO: SELECT COUNT(*) FROM cita WHERE estado = 'CANCELADA'; da 1 antes y después del EXECUTE malicioso: nada cambió. Con la versión concatenada, el UPDATE responde UPDATE 10 y el conteo pasa a 10.</a:t>
+            </a:r>
+          </a:p>
+          <a:p/>
+          <a:p>
+            <a:r>
+              <a:t>SI PREGUNTAN:</a:t>
+            </a:r>
+          </a:p>
+          <a:p>
+            <a:r>
+              <a:t>  • «¿Y un DROP TABLE cita?» → Apilado también se intentaría, pero en esta base lo detiene la clave foránea de consulta («cannot drop table cita because other objects depend on it»). Un UPDATE sin WHERE no tiene ese freno.</a:t>
+            </a:r>
+          </a:p>
+          <a:p>
+            <a:r>
+              <a:t>  • «¿Cómo se ve en el código de la aplicación?» → En Python con psycopg2: cur.execute("SELECT … WHERE nombre = %s", (entrada,)). El valor va en la tupla, nunca dentro de la cadena.</a:t>
+            </a:r>
+          </a:p>
+          <a:p/>
+          <a:p>
+            <a:r>
+              <a:t>CUIDADO: PREPARE y EXECUTE son la versión en SQL del mecanismo; en la aplicación lo hace el driver con parámetros. La idea es la misma: el valor viaja separado del texto.</a:t>
+            </a:r>
+          </a:p>
+          <a:p/>
+          <a:p>
+            <a:r>
+              <a:t>PASA A LA SIGUIENTE: ¿Por qué el parámetro lo evita siempre, y no casi siempre?</a:t>
+            </a:r>
+          </a:p>
+        </p:txBody>
+      </p:sp>
+      <p:sp>
+        <p:nvSpPr>
+          <p:cNvPr id="4" name="Slide Number Placeholder 3"/>
+          <p:cNvSpPr>
+            <a:spLocks noGrp="1"/>
+          </p:cNvSpPr>
+          <p:nvPr>
+            <p:ph type="sldNum" idx="5" sz="quarter"/>
+          </p:nvPr>
+        </p:nvSpPr>
+        <p:spPr/>
+      </p:sp>
+    </p:spTree>
+  </p:cSld>
+  <p:clrMapOvr>
+    <a:masterClrMapping/>
+  </p:clrMapOvr>
+</p:notes>
+</file>
+
+<file path=ppt/notesSlides/notesSlide12.xml><?xml version="1.0" encoding="utf-8"?>
+<p:notes xmlns:a="http://schemas.openxmlformats.org/drawingml/2006/main" xmlns:p="http://schemas.openxmlformats.org/presentationml/2006/main" xmlns:r="http://schemas.openxmlformats.org/officeDocument/2006/relationships">
+  <p:cSld>
+    <p:spTree>
+      <p:nvGrpSpPr>
+        <p:cNvPr id="1" name=""/>
+        <p:cNvGrpSpPr/>
+        <p:nvPr/>
+      </p:nvGrpSpPr>
+      <p:grpSpPr>
+        <a:xfrm>
+          <a:off x="0" y="0"/>
+          <a:ext cx="0" cy="0"/>
+          <a:chOff x="0" y="0"/>
+          <a:chExt cx="0" cy="0"/>
+        </a:xfrm>
+      </p:grpSpPr>
+      <p:sp>
+        <p:nvSpPr>
+          <p:cNvPr id="2" name="Slide Image Placeholder 1"/>
+          <p:cNvSpPr>
+            <a:spLocks noGrp="1"/>
+          </p:cNvSpPr>
+          <p:nvPr>
+            <p:ph type="sldImg" idx="2"/>
+          </p:nvPr>
+        </p:nvSpPr>
+        <p:spPr/>
+      </p:sp>
+      <p:sp>
+        <p:nvSpPr>
+          <p:cNvPr id="3" name="Notes Placeholder 2"/>
+          <p:cNvSpPr>
+            <a:spLocks noGrp="1"/>
+          </p:cNvSpPr>
+          <p:nvPr>
+            <p:ph type="body" idx="3" sz="quarter"/>
+          </p:nvPr>
+        </p:nvSpPr>
+        <p:spPr/>
+        <p:txBody>
+          <a:bodyPr/>
+          <a:lstStyle/>
+          <a:p>
+            <a:r>
+              <a:t>QUÉ ES (dilo así): Una operación de lectura de la capa de API: la agenda de un día. La aplicación no conoce las tablas cita, mascota ni dueno; llama api_agenda_del_dia con una fecha y recibe filas con columnas fijas.</a:t>
+            </a:r>
+          </a:p>
+          <a:p/>
+          <a:p>
+            <a:r>
+              <a:t>CÓMO DARLA (≈3 min):</a:t>
+            </a:r>
+          </a:p>
+          <a:p>
+            <a:r>
+              <a:t>  • Líneas 2-5: La firma: un parámetro DATE, RETURNS TABLE con las cuatro columnas que la pantalla recibe, LANGUAGE sql porque es una sola consulta y STABLE porque lee tablas sin modificarlas.</a:t>
+            </a:r>
+          </a:p>
+          <a:p>
+            <a:r>
+              <a:t>  • Líneas 7-10: El cuerpo une cita con mascota y dueno por sus claves foráneas.</a:t>
+            </a:r>
+          </a:p>
+          <a:p>
+            <a:r>
+              <a:t>  • Líneas 11-12: Filtra por rango, desde el día (p_dia) hasta el siguiente (p_dia + 1), sin función sobre la columna, para que un índice sobre fecha_hora sirva. Ordena por hora.</a:t>
+            </a:r>
+          </a:p>
+          <a:p/>
+          <a:p>
+            <a:r>
+              <a:t>EJEMPLO: SELECT * FROM api_agenda_del_dia(DATE '2026-09-01'); devuelve 3 filas: la cita 1 de Firulais a las 08:00 y la 2 de Luna a las 09:00 (dueña Ana Gomez), y la 3 de Mishi a las 10:00 (dueña Marcela Diaz).</a:t>
+            </a:r>
+          </a:p>
+          <a:p/>
+          <a:p>
+            <a:r>
+              <a:t>SI PREGUNTAN:</a:t>
+            </a:r>
+          </a:p>
+          <a:p>
+            <a:r>
+              <a:t>  • «¿Por qué STABLE y no IMMUTABLE?» → Porque lee tablas: si alguien agenda, el resultado cambia. IMMUTABLE prometería que nunca cambia (Clase 4).</a:t>
+            </a:r>
+          </a:p>
+          <a:p>
+            <a:r>
+              <a:t>  • «Las columnas se declaran VARCHAR y en la tabla son TEXT: ¿falla?» → No: PostgreSQL convierte el resultado al tipo declarado. Aun así, lo limpio es declarar el mismo tipo de la tabla.</a:t>
+            </a:r>
+          </a:p>
+          <a:p/>
+          <a:p>
+            <a:r>
+              <a:t>CUIDADO: La aplicación la llama con parámetro: SELECT * FROM api_agenda_del_dia(%s), con la fecha en la tupla, nunca pegada en el texto.</a:t>
+            </a:r>
+          </a:p>
+          <a:p/>
+          <a:p>
+            <a:r>
+              <a:t>PASA A LA SIGUIENTE: Y una operación de escritura: el contrato que la aplicación consume.</a:t>
+            </a:r>
+          </a:p>
+        </p:txBody>
+      </p:sp>
+      <p:sp>
+        <p:nvSpPr>
+          <p:cNvPr id="4" name="Slide Number Placeholder 3"/>
+          <p:cNvSpPr>
+            <a:spLocks noGrp="1"/>
+          </p:cNvSpPr>
+          <p:nvPr>
+            <p:ph type="sldNum" idx="5" sz="quarter"/>
+          </p:nvPr>
+        </p:nvSpPr>
+        <p:spPr/>
+      </p:sp>
+    </p:spTree>
+  </p:cSld>
+  <p:clrMapOvr>
+    <a:masterClrMapping/>
+  </p:clrMapOvr>
+</p:notes>
+</file>
+
+<file path=ppt/notesSlides/notesSlide13.xml><?xml version="1.0" encoding="utf-8"?>
+<p:notes xmlns:a="http://schemas.openxmlformats.org/drawingml/2006/main" xmlns:p="http://schemas.openxmlformats.org/presentationml/2006/main" xmlns:r="http://schemas.openxmlformats.org/officeDocument/2006/relationships">
+  <p:cSld>
+    <p:spTree>
+      <p:nvGrpSpPr>
+        <p:cNvPr id="1" name=""/>
+        <p:cNvGrpSpPr/>
+        <p:nvPr/>
+      </p:nvGrpSpPr>
+      <p:grpSpPr>
+        <a:xfrm>
+          <a:off x="0" y="0"/>
+          <a:ext cx="0" cy="0"/>
+          <a:chOff x="0" y="0"/>
+          <a:chExt cx="0" cy="0"/>
+        </a:xfrm>
+      </p:grpSpPr>
+      <p:sp>
+        <p:nvSpPr>
+          <p:cNvPr id="2" name="Slide Image Placeholder 1"/>
+          <p:cNvSpPr>
+            <a:spLocks noGrp="1"/>
+          </p:cNvSpPr>
+          <p:nvPr>
+            <p:ph type="sldImg" idx="2"/>
+          </p:nvPr>
+        </p:nvSpPr>
+        <p:spPr/>
+      </p:sp>
+      <p:sp>
+        <p:nvSpPr>
+          <p:cNvPr id="3" name="Notes Placeholder 2"/>
+          <p:cNvSpPr>
+            <a:spLocks noGrp="1"/>
+          </p:cNvSpPr>
+          <p:nvPr>
+            <p:ph type="body" idx="3" sz="quarter"/>
+          </p:nvPr>
+        </p:nvSpPr>
+        <p:spPr/>
+        <p:txBody>
+          <a:bodyPr/>
+          <a:lstStyle/>
+          <a:p>
+            <a:r>
+              <a:t>QUÉ ES (dilo así): Lo único que la aplicación conoce de la base para agendar: el nombre del procedimiento, sus parámetros y los mensajes con que puede fallar.</a:t>
+            </a:r>
+          </a:p>
+          <a:p/>
+          <a:p>
+            <a:r>
+              <a:t>CÓMO DARLA (≈3 min):</a:t>
+            </a:r>
+          </a:p>
+          <a:p>
+            <a:r>
+              <a:t>  • Líneas 1-5: La llamada con parámetros nombrados (p_id_mascota =&gt; 3): no depende del orden y se lee sola. Los valores viajan tipados, no como texto pegado.</a:t>
+            </a:r>
+          </a:p>
+          <a:p>
+            <a:r>
+              <a:t>  • Líneas 7-8: La mascota 3 (Rocky) está inactiva: el CALL aborta. El mensaje completo del procedimiento de la clase es «ERROR: la mascota 3 esta inactiva; no se agenda cita»: el primer ERROR lo pone el cliente y el segundo es parte del texto del RAISE.</a:t>
+            </a:r>
+          </a:p>
+          <a:p>
+            <a:r>
+              <a:t>  • Leyenda: El contrato fija la firma, un ejemplo de llamada, los mensajes literales y qué queda en la base si la llamada falla: nada.</a:t>
+            </a:r>
+          </a:p>
+          <a:p/>
+          <a:p>
+            <a:r>
+              <a:t>EJEMPLO: SELECT COUNT(*) FROM cita; da lo mismo antes y después del CALL fallido.</a:t>
+            </a:r>
+          </a:p>
+          <a:p/>
+          <a:p>
+            <a:r>
+              <a:t>SI PREGUNTAN:</a:t>
+            </a:r>
+          </a:p>
+          <a:p>
+            <a:r>
+              <a:t>  • «¿Por qué el mensaje dice ERROR dos veces?» → El cliente antepone «ERROR:» a todo error, y el procedimiento escribió «ERROR:» dentro de su mensaje. Con USING ERRCODE la aplicación reconoce el caso por el código, sin leer el texto.</a:t>
+            </a:r>
+          </a:p>
+          <a:p/>
+          <a:p>
+            <a:r>
+              <a:t>CUIDADO: Mostrar este mensaje al usuario está bien porque es de negocio; lo que nunca se muestra es un error técnico del motor, como «relation "cita" does not exist».</a:t>
+            </a:r>
+          </a:p>
+          <a:p/>
+          <a:p>
+            <a:r>
+              <a:t>PASA A LA SIGUIENTE: ¿Qué hace cada capa cuando algo falla? Tres reglas.</a:t>
+            </a:r>
+          </a:p>
+        </p:txBody>
+      </p:sp>
+      <p:sp>
+        <p:nvSpPr>
+          <p:cNvPr id="4" name="Slide Number Placeholder 3"/>
+          <p:cNvSpPr>
+            <a:spLocks noGrp="1"/>
+          </p:cNvSpPr>
+          <p:nvPr>
+            <p:ph type="sldNum" idx="5" sz="quarter"/>
+          </p:nvPr>
+        </p:nvSpPr>
+        <p:spPr/>
+      </p:sp>
+    </p:spTree>
+  </p:cSld>
+  <p:clrMapOvr>
+    <a:masterClrMapping/>
+  </p:clrMapOvr>
+</p:notes>
+</file>
+
+<file path=ppt/notesSlides/notesSlide14.xml><?xml version="1.0" encoding="utf-8"?>
+<p:notes xmlns:a="http://schemas.openxmlformats.org/drawingml/2006/main" xmlns:p="http://schemas.openxmlformats.org/presentationml/2006/main" xmlns:r="http://schemas.openxmlformats.org/officeDocument/2006/relationships">
+  <p:cSld>
+    <p:spTree>
+      <p:nvGrpSpPr>
+        <p:cNvPr id="1" name=""/>
+        <p:cNvGrpSpPr/>
+        <p:nvPr/>
+      </p:nvGrpSpPr>
+      <p:grpSpPr>
+        <a:xfrm>
+          <a:off x="0" y="0"/>
+          <a:ext cx="0" cy="0"/>
+          <a:chOff x="0" y="0"/>
+          <a:chExt cx="0" cy="0"/>
+        </a:xfrm>
+      </p:grpSpPr>
+      <p:sp>
+        <p:nvSpPr>
+          <p:cNvPr id="2" name="Slide Image Placeholder 1"/>
+          <p:cNvSpPr>
+            <a:spLocks noGrp="1"/>
+          </p:cNvSpPr>
+          <p:nvPr>
+            <p:ph type="sldImg" idx="2"/>
+          </p:nvPr>
+        </p:nvSpPr>
+        <p:spPr/>
+      </p:sp>
+      <p:sp>
+        <p:nvSpPr>
+          <p:cNvPr id="3" name="Notes Placeholder 2"/>
+          <p:cNvSpPr>
+            <a:spLocks noGrp="1"/>
+          </p:cNvSpPr>
+          <p:nvPr>
+            <p:ph type="body" idx="3" sz="quarter"/>
+          </p:nvPr>
+        </p:nvSpPr>
+        <p:spPr/>
+        <p:txBody>
+          <a:bodyPr/>
+          <a:lstStyle/>
+          <a:p>
+            <a:r>
+              <a:t>QUÉ ES (dilo así): Una función de la capa de API con contrato de retorno: siempre devuelve una fila con ok, mensaje e id_generado. Los rechazos de negocio salen como ok = false con su mensaje; lo inesperado se captura, se deshace y también sale como ok = false. La aplicación nunca recibe una excepción cruda, pero está obligada a revisar ok.</a:t>
+            </a:r>
+          </a:p>
+          <a:p/>
+          <a:p>
+            <a:r>
+              <a:t>CÓMO DARLA (≈3 min):</a:t>
+            </a:r>
+          </a:p>
+          <a:p>
+            <a:r>
+              <a:t>  • Líneas 1-3: La firma: un parámetro y RETURNS TABLE (ok BOOLEAN, mensaje TEXT, id_generado INT). Ese es el contrato de retorno, igual para todas las operaciones de la capa.</a:t>
+            </a:r>
+          </a:p>
+          <a:p>
+            <a:r>
+              <a:t>  • Líneas 5-10: El UPDATE solo toca la cita si está PROGRAMADA. Si no tocó nada (IF NOT FOUND) es un rechazo de negocio esperado: devuelve FALSE, 'No se puede cancelar' y NULL en id_generado, y termina con RETURN.</a:t>
+            </a:r>
+          </a:p>
+          <a:p>
+            <a:r>
+              <a:t>  • Línea 11: Camino feliz: TRUE, 'Cita cancelada' y el id de la cita afectada.</a:t>
+            </a:r>
+          </a:p>
+          <a:p>
+            <a:r>
+              <a:t>  • Líneas 12-13: Lo inesperado: EXCEPTION WHEN OTHERS deshace lo que el bloque alcanzó a escribir y devuelve FALSE con SQLERRM. Informa; no se traga el error.</a:t>
+            </a:r>
+          </a:p>
+          <a:p>
+            <a:r>
+              <a:t>  • Líneas 16-17: La primera llamada cancela la cita 3 (t | Cita cancelada | 3); la segunda ya no la encuentra programada (f | No se puede cancelar | NULL).</a:t>
+            </a:r>
+          </a:p>
+          <a:p/>
+          <a:p>
+            <a:r>
+              <a:t>EJEMPLO: Si un trigger fallara después del UPDATE, la función devolvería f con el mensaje del trigger y la cita seguiría PROGRAMADA: el bloque EXCEPTION deshizo el UPDATE.</a:t>
+            </a:r>
+          </a:p>
+          <a:p/>
+          <a:p>
+            <a:r>
+              <a:t>SI PREGUNTAN:</a:t>
+            </a:r>
+          </a:p>
+          <a:p>
+            <a:r>
+              <a:t>  • «¿Por qué se llama id_generado si aquí no se genera nada?» → Es el nombre fijo del contrato para toda la capa: en una operación que crea trae el id nuevo; en cancelar, el de la cita afectada; si ok es falso, NULL.</a:t>
+            </a:r>
+          </a:p>
+          <a:p>
+            <a:r>
+              <a:t>  • «¿Quién hace COMMIT?» → La aplicación, según ok: si es verdadero confirma; si es falso hace rollback de lo que llevaba en su transacción.</a:t>
+            </a:r>
+          </a:p>
+          <a:p/>
+          <a:p>
+            <a:r>
+              <a:t>CUIDADO: Este diseño solo funciona si la aplicación revisa ok en cada llamada: una aplicación que ignora la fila repite el problema del -1.</a:t>
+            </a:r>
+          </a:p>
+          <a:p/>
+          <a:p>
+            <a:r>
+              <a:t>PASA A LA SIGUIENTE: La misma operación, dibujada como diagrama de secuencia.</a:t>
+            </a:r>
+          </a:p>
+        </p:txBody>
+      </p:sp>
+      <p:sp>
+        <p:nvSpPr>
+          <p:cNvPr id="4" name="Slide Number Placeholder 3"/>
+          <p:cNvSpPr>
+            <a:spLocks noGrp="1"/>
+          </p:cNvSpPr>
+          <p:nvPr>
+            <p:ph type="sldNum" idx="5" sz="quarter"/>
+          </p:nvPr>
+        </p:nvSpPr>
+        <p:spPr/>
+      </p:sp>
+    </p:spTree>
+  </p:cSld>
+  <p:clrMapOvr>
+    <a:masterClrMapping/>
+  </p:clrMapOvr>
+</p:notes>
+</file>
+
+<file path=ppt/notesSlides/notesSlide15.xml><?xml version="1.0" encoding="utf-8"?>
+<p:notes xmlns:a="http://schemas.openxmlformats.org/drawingml/2006/main" xmlns:p="http://schemas.openxmlformats.org/presentationml/2006/main" xmlns:r="http://schemas.openxmlformats.org/officeDocument/2006/relationships">
+  <p:cSld>
+    <p:spTree>
+      <p:nvGrpSpPr>
+        <p:cNvPr id="1" name=""/>
+        <p:cNvGrpSpPr/>
+        <p:nvPr/>
+      </p:nvGrpSpPr>
+      <p:grpSpPr>
+        <a:xfrm>
+          <a:off x="0" y="0"/>
+          <a:ext cx="0" cy="0"/>
+          <a:chOff x="0" y="0"/>
+          <a:chExt cx="0" cy="0"/>
+        </a:xfrm>
+      </p:grpSpPr>
+      <p:sp>
+        <p:nvSpPr>
+          <p:cNvPr id="2" name="Slide Image Placeholder 1"/>
+          <p:cNvSpPr>
+            <a:spLocks noGrp="1"/>
+          </p:cNvSpPr>
+          <p:nvPr>
+            <p:ph type="sldImg" idx="2"/>
+          </p:nvPr>
+        </p:nvSpPr>
+        <p:spPr/>
+      </p:sp>
+      <p:sp>
+        <p:nvSpPr>
+          <p:cNvPr id="3" name="Notes Placeholder 2"/>
+          <p:cNvSpPr>
+            <a:spLocks noGrp="1"/>
+          </p:cNvSpPr>
+          <p:nvPr>
+            <p:ph type="body" idx="3" sz="quarter"/>
+          </p:nvPr>
+        </p:nvSpPr>
+        <p:spPr/>
+        <p:txBody>
+          <a:bodyPr/>
+          <a:lstStyle/>
+          <a:p>
+            <a:r>
+              <a:t>QUÉ ES (dilo así): El diagrama de secuencia documenta quién llama a quién y qué responde, en orden de arriba abajo. La rama de error se dibuja con alt … else … end, y una nota fija la regla de acceso.</a:t>
+            </a:r>
+          </a:p>
+          <a:p/>
+          <a:p>
+            <a:r>
+              <a:t>CÓMO DARLA (≈3 min):</a:t>
+            </a:r>
+          </a:p>
+          <a:p>
+            <a:r>
+              <a:t>  • Líneas 1-5: sequenceDiagram y los participantes: actor para la persona (Recepcionista) y participant para cada sistema (Aplicacion, Capa de API, Tabla cita). Lo que va después de as es el nombre que se dibuja.</a:t>
+            </a:r>
+          </a:p>
+          <a:p>
+            <a:r>
+              <a:t>  • Líneas 6-8: Las llamadas: -&gt;&gt; es una flecha sólida de quien llama a quien responde, con el mensaje después de los dos puntos. La aplicación pasa el id como parámetro y la capa hace el UPDATE.</a:t>
+            </a:r>
+          </a:p>
+          <a:p>
+            <a:r>
+              <a:t>  • Líneas 9-15: alt abre la rama ok = false: la respuesta (--&gt;&gt; es la línea punteada, la de vuelta) y la aplicación muestra el mensaje y no sigue. else abre la rama ok = true. end cierra el bloque.</a:t>
+            </a:r>
+          </a:p>
+          <a:p>
+            <a:r>
+              <a:t>  • Línea 16: Note over A,B pone una nota que abarca de la aplicación a la capa: la aplicación no hace UPDATE directo.</a:t>
+            </a:r>
+          </a:p>
+          <a:p/>
+          <a:p>
+            <a:r>
+              <a:t>EJEMPLO: Pegado en mermaid.live dibuja cuatro columnas, las flechas en orden y un recuadro alt con sus dos compartimentos.</a:t>
+            </a:r>
+          </a:p>
+          <a:p/>
+          <a:p>
+            <a:r>
+              <a:t>SI PREGUNTAN:</a:t>
+            </a:r>
+          </a:p>
+          <a:p>
+            <a:r>
+              <a:t>  • «¿Puedo usar punto y coma dentro de un mensaje?» → No: en Mermaid el punto y coma corta la línea y el diagrama da error de sintaxis. Los dos puntos dentro del mensaje sí se aceptan.</a:t>
+            </a:r>
+          </a:p>
+          <a:p>
+            <a:r>
+              <a:t>  • «¿Y si quiero un paso opcional, sin rama de error?» → Se usa opt … end, que dibuja una sola rama.</a:t>
+            </a:r>
+          </a:p>
+          <a:p/>
+          <a:p>
+            <a:r>
+              <a:t>CUIDADO: Un diagrama que solo tiene el camino feliz no dice qué hace la aplicación cuando la base rechaza: la rama alt es la mitad importante.</a:t>
+            </a:r>
+          </a:p>
+          <a:p/>
+          <a:p>
+            <a:r>
+              <a:t>PASA A LA SIGUIENTE: Un tema de la aplicación que afecta a la base: cómo se abren las conexiones.</a:t>
+            </a:r>
+          </a:p>
+        </p:txBody>
+      </p:sp>
+      <p:sp>
+        <p:nvSpPr>
+          <p:cNvPr id="4" name="Slide Number Placeholder 3"/>
+          <p:cNvSpPr>
+            <a:spLocks noGrp="1"/>
+          </p:cNvSpPr>
+          <p:nvPr>
+            <p:ph type="sldNum" idx="5" sz="quarter"/>
+          </p:nvPr>
+        </p:nvSpPr>
+        <p:spPr/>
+      </p:sp>
+    </p:spTree>
+  </p:cSld>
+  <p:clrMapOvr>
+    <a:masterClrMapping/>
+  </p:clrMapOvr>
+</p:notes>
+</file>
+
+<file path=ppt/notesSlides/notesSlide16.xml><?xml version="1.0" encoding="utf-8"?>
+<p:notes xmlns:a="http://schemas.openxmlformats.org/drawingml/2006/main" xmlns:p="http://schemas.openxmlformats.org/presentationml/2006/main" xmlns:r="http://schemas.openxmlformats.org/officeDocument/2006/relationships">
+  <p:cSld>
+    <p:spTree>
+      <p:nvGrpSpPr>
+        <p:cNvPr id="1" name=""/>
+        <p:cNvGrpSpPr/>
+        <p:nvPr/>
+      </p:nvGrpSpPr>
+      <p:grpSpPr>
+        <a:xfrm>
+          <a:off x="0" y="0"/>
+          <a:ext cx="0" cy="0"/>
+          <a:chOff x="0" y="0"/>
+          <a:chExt cx="0" cy="0"/>
+        </a:xfrm>
+      </p:grpSpPr>
+      <p:sp>
+        <p:nvSpPr>
+          <p:cNvPr id="2" name="Slide Image Placeholder 1"/>
+          <p:cNvSpPr>
+            <a:spLocks noGrp="1"/>
+          </p:cNvSpPr>
+          <p:nvPr>
+            <p:ph type="sldImg" idx="2"/>
+          </p:nvPr>
+        </p:nvSpPr>
+        <p:spPr/>
+      </p:sp>
+      <p:sp>
+        <p:nvSpPr>
+          <p:cNvPr id="3" name="Notes Placeholder 2"/>
+          <p:cNvSpPr>
+            <a:spLocks noGrp="1"/>
+          </p:cNvSpPr>
+          <p:nvPr>
+            <p:ph type="body" idx="3" sz="quarter"/>
+          </p:nvPr>
+        </p:nvSpPr>
+        <p:spPr/>
+        <p:txBody>
+          <a:bodyPr/>
+          <a:lstStyle/>
+          <a:p>
+            <a:r>
+              <a:t>QUÉ ES (dilo así): La demo pone en pantalla las dos maneras de entrar a la base: la puerta equivocada, que deja que el dato se vuelva código, y la correcta, que solo acepta valores y responde con su contrato.</a:t>
+            </a:r>
+          </a:p>
+          <a:p/>
+          <a:p>
+            <a:r>
+              <a:t>CÓMO DARLA (≈15 min):</a:t>
+            </a:r>
+          </a:p>
+          <a:p>
+            <a:r>
+              <a:t>  • 1 · Concatenado: Ejecuta SELECT id_mascota, nombre FROM mascota WHERE nombre = '' OR 1=1 --' como si lo hubiera armado la aplicación: 8 filas. Muestra cómo quedó la cadena.</a:t>
+            </a:r>
+          </a:p>
+          <a:p>
+            <a:r>
+              <a:t>  • 2 · Parámetro: PREPARE buscar_mascota (VARCHAR) AS SELECT id_mascota, nombre FROM mascota WHERE nombre = $1; y EXECUTE buscar_mascota(''' OR 1=1 --'): 0 filas. Repite con 'Luna': 1 fila (2 | Luna).</a:t>
+            </a:r>
+          </a:p>
+          <a:p>
+            <a:r>
+              <a:t>  • 3 · Contrato: CALL sp_agendar_cita(3, 1, TIMESTAMP '2026-09-01 09:00:00'): aborta con «ERROR: la mascota 3 esta inactiva; no se agenda cita». SELECT COUNT(*) FROM cita antes y después: igual.</a:t>
+            </a:r>
+          </a:p>
+          <a:p>
+            <a:r>
+              <a:t>  • 4 · Cierre: Pregunta: «¿qué privilegios necesita el rol de la aplicación para todo esto?». Respuesta: EXECUTE sobre las operaciones y SELECT de lectura; nada de INSERT directo.</a:t>
+            </a:r>
+          </a:p>
+          <a:p/>
+          <a:p>
+            <a:r>
+              <a:t>EJEMPLO: Tiempos sugeridos: concatenado 4 min, parámetro 4 min, contrato 4 min, cierre 3 min.</a:t>
+            </a:r>
+          </a:p>
+          <a:p/>
+          <a:p>
+            <a:r>
+              <a:t>SI PREGUNTAN:</a:t>
+            </a:r>
+          </a:p>
+          <a:p>
+            <a:r>
+              <a:t>  • «¿Por qué se escribe la cadena a mano?» → Porque la base no tiene aplicación: escribir el texto que la aplicación habría armado muestra exactamente lo que recibiría el motor.</a:t>
+            </a:r>
+          </a:p>
+          <a:p/>
+          <a:p>
+            <a:r>
+              <a:t>CUIDADO: Una comilla dentro de un texto SQL se escribe doblada (''). Si te equivocas en vivo, el error de sintaxis distrae del punto: lleva las sentencias preparadas.</a:t>
+            </a:r>
+          </a:p>
+          <a:p/>
+          <a:p>
+            <a:r>
+              <a:t>PASA A LA SIGUIENTE: Para el diagrama del flujo: del boceto al código Mermaid.</a:t>
+            </a:r>
+          </a:p>
+        </p:txBody>
+      </p:sp>
+      <p:sp>
+        <p:nvSpPr>
+          <p:cNvPr id="4" name="Slide Number Placeholder 3"/>
+          <p:cNvSpPr>
+            <a:spLocks noGrp="1"/>
+          </p:cNvSpPr>
+          <p:nvPr>
+            <p:ph type="sldNum" idx="5" sz="quarter"/>
+          </p:nvPr>
+        </p:nvSpPr>
+        <p:spPr/>
+      </p:sp>
+    </p:spTree>
+  </p:cSld>
+  <p:clrMapOvr>
+    <a:masterClrMapping/>
+  </p:clrMapOvr>
+</p:notes>
+</file>
+
+<file path=ppt/notesSlides/notesSlide17.xml><?xml version="1.0" encoding="utf-8"?>
+<p:notes xmlns:a="http://schemas.openxmlformats.org/drawingml/2006/main" xmlns:p="http://schemas.openxmlformats.org/presentationml/2006/main" xmlns:r="http://schemas.openxmlformats.org/officeDocument/2006/relationships">
+  <p:cSld>
+    <p:spTree>
+      <p:nvGrpSpPr>
+        <p:cNvPr id="1" name=""/>
+        <p:cNvGrpSpPr/>
+        <p:nvPr/>
+      </p:nvGrpSpPr>
+      <p:grpSpPr>
+        <a:xfrm>
+          <a:off x="0" y="0"/>
+          <a:ext cx="0" cy="0"/>
+          <a:chOff x="0" y="0"/>
+          <a:chExt cx="0" cy="0"/>
+        </a:xfrm>
+      </p:grpSpPr>
+      <p:sp>
+        <p:nvSpPr>
+          <p:cNvPr id="2" name="Slide Image Placeholder 1"/>
+          <p:cNvSpPr>
+            <a:spLocks noGrp="1"/>
+          </p:cNvSpPr>
+          <p:nvPr>
+            <p:ph type="sldImg" idx="2"/>
+          </p:nvPr>
+        </p:nvSpPr>
+        <p:spPr/>
+      </p:sp>
+      <p:sp>
+        <p:nvSpPr>
+          <p:cNvPr id="3" name="Notes Placeholder 2"/>
+          <p:cNvSpPr>
+            <a:spLocks noGrp="1"/>
+          </p:cNvSpPr>
+          <p:nvPr>
+            <p:ph type="body" idx="3" sz="quarter"/>
+          </p:nvPr>
+        </p:nvSpPr>
+        <p:spPr/>
+        <p:txBody>
+          <a:bodyPr/>
+          <a:lstStyle/>
+          <a:p>
+            <a:r>
+              <a:t>QUÉ ES (dilo así): El diagrama de secuencia se entrega como texto Mermaid, no como imagen: la imagen sale del código. Se piensa dibujando, se traduce a texto, se comprueba que dibuje y se guardan las dos cosas.</a:t>
+            </a:r>
+          </a:p>
+          <a:p/>
+          <a:p>
+            <a:r>
+              <a:t>CÓMO DARLA (≈3 min):</a:t>
+            </a:r>
+          </a:p>
+          <a:p>
+            <a:r>
+              <a:t>  • Paso 1: Diseña visual: en Excalidraw o draw.io se dibuja quién llama a quién, en orden de arriba abajo.</a:t>
+            </a:r>
+          </a:p>
+          <a:p>
+            <a:r>
+              <a:t>  • Paso 2: Traduce con IA: pide el código sequenceDiagram a partir del boceto. Revisa el resultado: la IA acierta la sintaxis, no el flujo; los nombres de las operaciones tienen que ser los del contrato.</a:t>
+            </a:r>
+          </a:p>
+          <a:p>
+            <a:r>
+              <a:t>  • Paso 3: Renderiza y corrige en un visor Mermaid (mermaid.live): si no dibuja, no comunica.</a:t>
+            </a:r>
+          </a:p>
+          <a:p>
+            <a:r>
+              <a:t>  • Paso 4: Guarda el texto Mermaid, que es la fuente, y exporta el PNG.</a:t>
+            </a:r>
+          </a:p>
+          <a:p/>
+          <a:p>
+            <a:r>
+              <a:t>EJEMPLO: El diagrama de la operación de cancelar, proyectado antes en la lámina del flujo en sequenceDiagram, es el modelo: participantes, -&gt;&gt; para la llamada, --&gt;&gt; para la respuesta y alt … else … end para la rama de error.</a:t>
+            </a:r>
+          </a:p>
+          <a:p/>
+          <a:p>
+            <a:r>
+              <a:t>SI PREGUNTAN:</a:t>
+            </a:r>
+          </a:p>
+          <a:p>
+            <a:r>
+              <a:t>  • «¿Por qué no basta una imagen del diagrama?» → Porque el texto se puede revisar, comparar con el contrato y versionar; una imagen no se corrige sin volver a dibujarla.</a:t>
+            </a:r>
+          </a:p>
+          <a:p/>
+          <a:p>
+            <a:r>
+              <a:t>CUIDADO: El diagrama debe mostrar la rama de error: un flujo que solo tiene el camino feliz no dice qué hace la aplicación cuando la base rechaza.</a:t>
+            </a:r>
+          </a:p>
+          <a:p/>
+          <a:p>
+            <a:r>
+              <a:t>PASA A LA SIGUIENTE: Cierre de la clase.</a:t>
+            </a:r>
+          </a:p>
+        </p:txBody>
+      </p:sp>
+      <p:sp>
+        <p:nvSpPr>
+          <p:cNvPr id="4" name="Slide Number Placeholder 3"/>
+          <p:cNvSpPr>
+            <a:spLocks noGrp="1"/>
+          </p:cNvSpPr>
+          <p:nvPr>
+            <p:ph type="sldNum" idx="5" sz="quarter"/>
+          </p:nvPr>
+        </p:nvSpPr>
+        <p:spPr/>
+      </p:sp>
+    </p:spTree>
+  </p:cSld>
+  <p:clrMapOvr>
+    <a:masterClrMapping/>
+  </p:clrMapOvr>
+</p:notes>
+</file>
+
+<file path=ppt/notesSlides/notesSlide18.xml><?xml version="1.0" encoding="utf-8"?>
+<p:notes xmlns:a="http://schemas.openxmlformats.org/drawingml/2006/main" xmlns:p="http://schemas.openxmlformats.org/presentationml/2006/main" xmlns:r="http://schemas.openxmlformats.org/officeDocument/2006/relationships">
+  <p:cSld>
+    <p:spTree>
+      <p:nvGrpSpPr>
+        <p:cNvPr id="1" name=""/>
+        <p:cNvGrpSpPr/>
+        <p:nvPr/>
+      </p:nvGrpSpPr>
+      <p:grpSpPr>
+        <a:xfrm>
+          <a:off x="0" y="0"/>
+          <a:ext cx="0" cy="0"/>
+          <a:chOff x="0" y="0"/>
+          <a:chExt cx="0" cy="0"/>
+        </a:xfrm>
+      </p:grpSpPr>
+      <p:sp>
+        <p:nvSpPr>
+          <p:cNvPr id="2" name="Slide Image Placeholder 1"/>
+          <p:cNvSpPr>
+            <a:spLocks noGrp="1"/>
+          </p:cNvSpPr>
+          <p:nvPr>
+            <p:ph type="sldImg" idx="2"/>
+          </p:nvPr>
+        </p:nvSpPr>
+        <p:spPr/>
+      </p:sp>
+      <p:sp>
+        <p:nvSpPr>
+          <p:cNvPr id="3" name="Notes Placeholder 2"/>
+          <p:cNvSpPr>
+            <a:spLocks noGrp="1"/>
+          </p:cNvSpPr>
+          <p:nvPr>
+            <p:ph type="body" idx="3" sz="quarter"/>
+          </p:nvPr>
+        </p:nvSpPr>
+        <p:spPr/>
+        <p:txBody>
+          <a:bodyPr/>
+          <a:lstStyle/>
+          <a:p>
+            <a:r>
+              <a:t>QUÉ ES (dilo así): Cierre: la aplicación entra por una sola puerta, las operaciones con su contrato; el valor viaja como parámetro y por eso la inyección es imposible; y cuando algo falla, la base lo dice y nadie confirma a medias.</a:t>
+            </a:r>
+          </a:p>
+          <a:p/>
+          <a:p>
+            <a:r>
+              <a:t>CÓMO DARLA (≈3 min):</a:t>
+            </a:r>
+          </a:p>
+          <a:p>
+            <a:r>
+              <a:t>  • Al entrar: Pregunta de salida: «¿por qué un parámetro hace imposible la inyección, y no solo improbable?». Respuesta esperada: el valor nunca pasa por el analizador; la estructura de la sentencia ya estaba fijada.</a:t>
+            </a:r>
+          </a:p>
+          <a:p>
+            <a:r>
+              <a:t>  • Después: Amarre: la Clase 13 mira fallos reales desde este mismo lado, y en la sustentación se muestra el contrato, un caso de éxito y uno de error visto por el usuario.</a:t>
             </a:r>
           </a:p>
         </p:txBody>
@@ -648,77 +1692,62 @@
           <a:lstStyle/>
           <a:p>
             <a:r>
-              <a:t>DESARROLLO (para explicarlo, no se proyecta):</a:t>
-            </a:r>
-          </a:p>
-          <a:p>
-            <a:r>
-              <a:t>La inyeccion SQL es lo que ocurre cuando un dato que escribio un usuario termina siendo interpretado como codigo por el motor.</a:t>
-            </a:r>
-          </a:p>
-          <a:p>
-            <a:r>
-              <a:t>El motor no puede distinguir que parte del texto la escribio el programador y que parte el usuario: recibe una cadena, la analiza completa y ejecuta lo que esa cadena diga.</a:t>
-            </a:r>
-          </a:p>
-          <a:p>
-            <a:r>
-              <a:t>Si alguien escribe la secuencia comilla, espacio, OR 1=1, espacio, doble guion, el motor recibe WHERE nombre = '' OR 1=1 -- ' y devuelve la tabla Mascota completa</a:t>
-            </a:r>
-          </a:p>
-          <a:p>
-            <a:r>
-              <a:t>Porque 1=1 es verdadero para toda fila y el doble guion comenta el resto de la linea, incluida la comilla que quedo sobrando.</a:t>
-            </a:r>
-          </a:p>
-          <a:p>
-            <a:r>
-              <a:t>El mismo truco en el formulario de acceso permite entrar sin conocer ninguna clave: si la validacion es SELECT COUNT(*) FROM Usuario WHERE usuario = 'U' AND clave = 'C'</a:t>
-            </a:r>
-          </a:p>
-          <a:p>
-            <a:r>
-              <a:t>Una clave que cierre la comilla y agregue OR 1=1 hace verdadera la condicion para todas las filas.</a:t>
-            </a:r>
-          </a:p>
-          <a:p>
-            <a:r>
-              <a:t>La inyeccion aparece en todas las ediciones del OWASP Top Ten: fue la categoria numero uno en 2010, 2013 y 2017, y en 2021 quedo tercera ya fusionada con otras inyecciones.</a:t>
-            </a:r>
-          </a:p>
-          <a:p>
-            <a:r>
-              <a:t>NOTAS:</a:t>
-            </a:r>
-          </a:p>
-          <a:p>
-            <a:r>
-              <a:t>Concretemoslo en la clínica.</a:t>
-            </a:r>
-          </a:p>
-          <a:p>
-            <a:r>
-              <a:t>El buscador de mascotas de la recepcion arma la consulta pegando la entrada del usuario, de modo que el motor recibe</a:t>
-            </a:r>
-          </a:p>
-          <a:p>
-            <a:r>
-              <a:t>Si la recepcionista escribe Luna, el motor recibe WHERE nombre = 'Luna', devuelve una fila, todo parece correcto y la aplicacion pasa a produccion.</a:t>
-            </a:r>
-          </a:p>
-          <a:p>
-            <a:r>
-              <a:t>Conviene una precision honesta, porque la hara un estudiante: en Oracle no se apilan dos sentencias en una misma llamada, asi que el clasico punto y coma seguido de DROP TABLE Cita no se comporta como en otros motores; lo que si funciona, y basta para un incidente reportable, es leer datos ajenos, saltarse un acceso o modificar informacion cuando la aplicacion ejecuta PL/SQL dinamico.</a:t>
-            </a:r>
-          </a:p>
-          <a:p>
-            <a:r>
-              <a:t>CÓDIGO CITADO (referencia):</a:t>
-            </a:r>
-          </a:p>
-          <a:p>
-            <a:r>
-              <a:t>SELECT id_mascota, nombre FROM Mascota WHERE nombre = 'ENTRADA'</a:t>
+              <a:t>QUÉ ES (dilo así): La inyección SQL pasa cuando la aplicación pega dentro del texto de la consulta lo que escribió el usuario. El motor recibe una cadena, la analiza completa y ejecuta lo que diga: no puede saber qué parte puso el programador y qué parte el usuario.</a:t>
+            </a:r>
+          </a:p>
+          <a:p/>
+          <a:p>
+            <a:r>
+              <a:t>CÓMO DARLA (≈5 min):</a:t>
+            </a:r>
+          </a:p>
+          <a:p>
+            <a:r>
+              <a:t>  • Al entrar: La aplicación arma sql = "… WHERE nombre = '" + entrada + "'". Con «Luna» el motor recibe WHERE nombre = 'Luna' y devuelve una fila: todo parece correcto. El usuario malicioso escribe ' OR 1=1 --.</a:t>
+            </a:r>
+          </a:p>
+          <a:p>
+            <a:r>
+              <a:t>  • Clic 1: Lo que recibe el motor: WHERE nombre = '' OR 1=1 --'. La comilla del usuario cierra el texto, OR 1=1 es verdadero para toda fila y el doble guion convierte en comentario la comilla que sobraba.</a:t>
+            </a:r>
+          </a:p>
+          <a:p>
+            <a:r>
+              <a:t>  • Clic 2: Resultado: las 8 mascotas de la tabla, no una. El mismo truco en un formulario de acceso (WHERE usuario = 'U' AND clave = 'C') deja entrar sin conocer ninguna clave.</a:t>
+            </a:r>
+          </a:p>
+          <a:p/>
+          <a:p>
+            <a:r>
+              <a:t>EJEMPLO: SELECT id_mascota, nombre FROM mascota WHERE nombre = '' OR 1=1 --' devuelve 8 filas: Firulais, Luna, Rocky, Mishi, Bobby, Nube, Toby y Kiara.</a:t>
+            </a:r>
+          </a:p>
+          <a:p/>
+          <a:p>
+            <a:r>
+              <a:t>SI PREGUNTAN:</a:t>
+            </a:r>
+          </a:p>
+          <a:p>
+            <a:r>
+              <a:t>  • «¿Basta con quitar las comillas de la entrada?» → No: filtrar caracteres es una carrera que se pierde (números sin comillas, ORDER BY armado con texto, otras codificaciones). La defensa es que el dato nunca forme parte del texto: parámetros.</a:t>
+            </a:r>
+          </a:p>
+          <a:p>
+            <a:r>
+              <a:t>  • «¿Esto sigue pasando hoy?» → Sí: la inyección ha estado en todas las ediciones del Top 10 de OWASP y fue la número uno en 2010, 2013 y 2017.</a:t>
+            </a:r>
+          </a:p>
+          <a:p/>
+          <a:p>
+            <a:r>
+              <a:t>CUIDADO: No reduzcas la clase a «usen parámetros» sin mostrar la cadena rompiéndose: quien no vio el mecanismo vuelve a concatenar justo donde el parámetro le estorba, como en un ORDER BY o una lista IN.</a:t>
+            </a:r>
+          </a:p>
+          <a:p/>
+          <a:p>
+            <a:r>
+              <a:t>PASA A LA SIGUIENTE: Las dos versiones en código, una al lado de la otra.</a:t>
             </a:r>
           </a:p>
         </p:txBody>
@@ -788,67 +1817,62 @@
           <a:lstStyle/>
           <a:p>
             <a:r>
-              <a:t>DESARROLLO (para explicarlo, no se proyecta):</a:t>
-            </a:r>
-          </a:p>
-          <a:p>
-            <a:r>
-              <a:t>Cuando la aplicacion envia la sentencia con marcadores de posicion (en PostgreSQL $1 en una sentencia preparada, en JDBC el signo de interrogacion</a:t>
-            </a:r>
-          </a:p>
-          <a:p>
-            <a:r>
-              <a:t>Oracle escribe:p_nombre, solo como contraste) el motor analiza primero la sentencia sin los valores, construye el plan de ejecucion, y solo despues recibe cada valor como un dato tipado que se acomoda en una casilla ya reservada.</a:t>
-            </a:r>
-          </a:p>
-          <a:p>
-            <a:r>
-              <a:t>Ese valor nunca vuelve al analizador sintactico: si el usuario escribio comilla OR 1=1 doble guion, el motor busca literalmente una mascota cuyo nombre sea esa cadena, no la encuentra y devuelve cero filas.</a:t>
-            </a:r>
-          </a:p>
-          <a:p>
-            <a:r>
-              <a:t>Llamar un procedimiento con parametros hereda esa proteccion y agrega dos cosas: el usuario de la aplicacion puede tener EXECUTE sobre sp_agendar_cita y ninguna posibilidad de SELECT ni UPDATE sobre las tablas</a:t>
-            </a:r>
-          </a:p>
-          <a:p>
-            <a:r>
-              <a:t>De modo que aunque alguien controle la entrada no tiene sobre que ejercerla</a:t>
-            </a:r>
-          </a:p>
-          <a:p>
-            <a:r>
-              <a:t>Y el motor reutiliza el plan porque la sentencia es siempre la misma cadena, lo que enlaza con el analisis de planes de las Clases 6 y 8.</a:t>
-            </a:r>
-          </a:p>
-          <a:p>
-            <a:r>
-              <a:t>Aqui llega la primera pregunta previsible: si uso un ORM como JPA, ya estoy protegido.</a:t>
-            </a:r>
-          </a:p>
-          <a:p>
-            <a:r>
-              <a:t>NOTAS:</a:t>
-            </a:r>
-          </a:p>
-          <a:p>
-            <a:r>
-              <a:t>El parametro evita esto por construccion, y hay que explicar el mecanismo y no solo la receta.</a:t>
-            </a:r>
-          </a:p>
-          <a:p>
-            <a:r>
-              <a:t>La inyeccion queda imposible, no improbable, y esa diferencia entre imposible e improbable es la que hay que instalar.</a:t>
-            </a:r>
-          </a:p>
-          <a:p>
-            <a:r>
-              <a:t>La respuesta honesta es que si mientras use los metodos del ORM o consultas con parametros nombrados, y que no en el momento en que arme una consulta nativa concatenando texto, porque el ORM no revisa lo que usted le entrega.</a:t>
-            </a:r>
-          </a:p>
-          <a:p>
-            <a:r>
-              <a:t>La vulnerabilidad no la produce la tecnologia sino la concatenacion.</a:t>
+              <a:t>QUÉ ES (dilo así): El parámetro no limpia la entrada: cambia el orden en que el motor trabaja. Primero analiza la sentencia con un marcador y fija su estructura; después recibe el valor como dato. Como el valor nunca pasa por el analizador, no puede cambiar la estructura de la sentencia.</a:t>
+            </a:r>
+          </a:p>
+          <a:p/>
+          <a:p>
+            <a:r>
+              <a:t>CÓMO DARLA (≈4 min):</a:t>
+            </a:r>
+          </a:p>
+          <a:p>
+            <a:r>
+              <a:t>  • Al entrar: Llega la sentencia sola: SELECT id_mascota, nombre FROM mascota WHERE nombre = $1. El analizador fija su estructura: una comparación de nombre con una casilla.</a:t>
+            </a:r>
+          </a:p>
+          <a:p>
+            <a:r>
+              <a:t>  • Clic 1: Después llega el valor, ' OR 1=1 --, y entra en la casilla como texto literal. No vuelve al analizador: no hay forma de que se convierta en un OR.</a:t>
+            </a:r>
+          </a:p>
+          <a:p>
+            <a:r>
+              <a:t>  • Clic 2: Resultado: 0 filas, ninguna mascota se llama así. No se filtró nada: la estructura ya estaba cerrada cuando llegó el dato.</a:t>
+            </a:r>
+          </a:p>
+          <a:p/>
+          <a:p>
+            <a:r>
+              <a:t>EJEMPLO: Marcadores según la tecnología: $1 en una sentencia preparada de PostgreSQL, ? en JDBC, %s en psycopg2 de Python. Oracle escribe :p_nombre, solo como contraste.</a:t>
+            </a:r>
+          </a:p>
+          <a:p/>
+          <a:p>
+            <a:r>
+              <a:t>SI PREGUNTAN:</a:t>
+            </a:r>
+          </a:p>
+          <a:p>
+            <a:r>
+              <a:t>  • «Si uso un ORM como JPA, ¿ya estoy protegido?» → Sí mientras uses sus métodos o consultas con parámetros nombrados; no en el momento en que armes una consulta nativa concatenando texto. La vulnerabilidad la produce la concatenación, no la tecnología.</a:t>
+            </a:r>
+          </a:p>
+          <a:p>
+            <a:r>
+              <a:t>  • «¿psycopg2 también manda el valor aparte?» → psycopg2 escapa el valor de forma segura en el cliente antes de enviarlo; psycopg 3 lo envía separado al servidor. En los dos casos, usando %s con la tupla, la entrada no puede cambiar la sentencia.</a:t>
+            </a:r>
+          </a:p>
+          <a:p/>
+          <a:p>
+            <a:r>
+              <a:t>CUIDADO: No lo expliques como «limpiar la entrada»: con un parámetro del servidor ($1) el valor nunca se analiza como código, y por eso la protección no se puede saltar.</a:t>
+            </a:r>
+          </a:p>
+          <a:p/>
+          <a:p>
+            <a:r>
+              <a:t>PASA A LA SIGUIENTE: Si la aplicación solo llama operaciones, cada operación necesita su contrato.</a:t>
             </a:r>
           </a:p>
         </p:txBody>
@@ -918,87 +1942,62 @@
           <a:lstStyle/>
           <a:p>
             <a:r>
-              <a:t>DESARROLLO (para explicarlo, no se proyecta):</a:t>
-            </a:r>
-          </a:p>
-          <a:p>
-            <a:r>
-              <a:t>Contrato, dicho en serio, es mucho mas que el nombre del procedimiento.</a:t>
-            </a:r>
-          </a:p>
-          <a:p>
-            <a:r>
-              <a:t>La firma: nombre y lista ordenada de parametros con su tipo y su direccion, donde IN significa que el dato entra, OUT que el procedimiento lo devuelve e IN OUT que entra y sale modificado.</a:t>
-            </a:r>
-          </a:p>
-          <a:p>
-            <a:r>
-              <a:t>Las precondiciones: lo que debe ser verdadero antes de llamar.</a:t>
-            </a:r>
-          </a:p>
-          <a:p>
-            <a:r>
-              <a:t>El efecto o postcondicion: que quedo distinto en la base despues de la llamada.</a:t>
-            </a:r>
-          </a:p>
-          <a:p>
-            <a:r>
-              <a:t>Si la operacion es idempotente.</a:t>
-            </a:r>
-          </a:p>
-          <a:p>
-            <a:r>
-              <a:t>En la clínica el contrato de agendamiento se escribe asi: sp_agendar_cita(p_id_mascota IN NUMBER, p_id_veterinario IN NUMBER, p_fecha_hora IN TIMESTAMP, p_motivo IN VARCHAR2, p_id_cita OUT NUMBER)</a:t>
-            </a:r>
-          </a:p>
-          <a:p>
-            <a:r>
-              <a:t>Precondicion, la mascota existe y esta activa; efecto, inserta una fila en Cita en estado PROGRAMADA y devuelve su identificador; errores, -20010 mascota inexistente, -20011 mascota inactiva, -20012 franja ocupada; idempotente, no.</a:t>
-            </a:r>
-          </a:p>
-          <a:p>
-            <a:r>
-              <a:t>Agendar no lo es, y eso tiene consecuencia inmediata: si la recepcionista da doble clic, o si la red corta la respuesta y la aplicacion reintenta, quedan dos citas identicas.</a:t>
-            </a:r>
-          </a:p>
-          <a:p>
-            <a:r>
-              <a:t>La solucion no es pedirle al usuario que no haga doble clic: es una restriccion UNIQUE sobre (id_veterinario</a:t>
-            </a:r>
-          </a:p>
-          <a:p>
-            <a:r>
-              <a:t>Fecha_hora) que hace fallar el segundo intento en la base y no en la interfaz, o una clave de idempotencia que la aplicacion genera y la base guarda como unica.</a:t>
-            </a:r>
-          </a:p>
-          <a:p>
-            <a:r>
-              <a:t>Esto conecta con la Clase 10, donde dos recepcionistas simultaneas producian el mismo dano sin que ninguna sentencia fallara.</a:t>
-            </a:r>
-          </a:p>
-          <a:p>
-            <a:r>
-              <a:t>NOTAS:</a:t>
-            </a:r>
-          </a:p>
-          <a:p>
-            <a:r>
-              <a:t>La lista de errores posibles con codigo y significado.</a:t>
-            </a:r>
-          </a:p>
-          <a:p>
-            <a:r>
-              <a:t>Y la version.</a:t>
-            </a:r>
-          </a:p>
-          <a:p>
-            <a:r>
-              <a:t>Idempotente significa que ejecutar la operacion dos veces con los mismos datos deja el sistema igual que ejecutarla una sola vez.</a:t>
-            </a:r>
-          </a:p>
-          <a:p>
-            <a:r>
-              <a:t>Fuera de la lamina (habla de la practica): Contrato, dicho en serio, es mucho mas que el nombre del procedimiento, y tiene seis partes que hay que exigir en el entregable de hoy.</a:t>
+              <a:t>QUÉ ES (dilo así): El contrato es el documento de la puerta: lo que una operación recibe, lo que exige, lo que cambia, cómo falla, si se puede repetir y cómo evoluciona. Con él, un desarrollador que nunca vio la base puede usarla sin adivinar.</a:t>
+            </a:r>
+          </a:p>
+          <a:p/>
+          <a:p>
+            <a:r>
+              <a:t>CÓMO DARLA (≈5 min):</a:t>
+            </a:r>
+          </a:p>
+          <a:p>
+            <a:r>
+              <a:t>  • Al entrar: Solo el nombre, sp_agendar_cita(…), no es contrato. Las tres primeras partes: la firma (parámetros con tipo y dirección IN, OUT o INOUT, y lo que devuelve), las precondiciones (la mascota existe y está activa, la franja está libre) y el efecto (inserta una fila en cita en estado PROGRAMADA). En una función de la capa de API, la firma incluye el contrato de retorno: RETURNS TABLE (ok, mensaje, id_generado).</a:t>
+            </a:r>
+          </a:p>
+          <a:p>
+            <a:r>
+              <a:t>  • Clic 1: Las otras tres: los errores, cada uno con su mensaje o código (mascota inexistente, mascota inactiva, franja ocupada); la idempotencia (¿dos llamadas iguales dejan lo mismo que una?); y la versión (cómo cambia sin romper a quien ya la llama).</a:t>
+            </a:r>
+          </a:p>
+          <a:p>
+            <a:r>
+              <a:t>  • Clic 2: Lo respetan las dos partes. Y el ejemplo de idempotencia: agendar no lo es; si la recepcionista da doble clic, o la red corta la respuesta y la aplicación reintenta, quedan dos citas, salvo que el UNIQUE (id_veterinario, fecha_hora) haga fallar el segundo intento en la base.</a:t>
+            </a:r>
+          </a:p>
+          <a:p/>
+          <a:p>
+            <a:r>
+              <a:t>EJEMPLO: El contrato de agendar en PostgreSQL: sp_agendar_cita(p_id_mascota INT, p_id_veterinario INT, p_fecha_hora TIMESTAMP), invocado con CALL; si una regla falla, aborta con un mensaje literal y no deja nada escrito.</a:t>
+            </a:r>
+          </a:p>
+          <a:p/>
+          <a:p>
+            <a:r>
+              <a:t>SI PREGUNTAN:</a:t>
+            </a:r>
+          </a:p>
+          <a:p>
+            <a:r>
+              <a:t>  • «¿Qué es idempotente, con un ejemplo de la clínica?» → Una operación que repetida deja lo mismo que una vez. Marcar la cita 7 como ATENDIDA lo es; agendar una cita, no.</a:t>
+            </a:r>
+          </a:p>
+          <a:p>
+            <a:r>
+              <a:t>  • «¿Cómo se hace idempotente agendar?» → Con una restricción única que absorba el duplicado, o con una clave de idempotencia que la aplicación genera y la base guarda como única.</a:t>
+            </a:r>
+          </a:p>
+          <a:p/>
+          <a:p>
+            <a:r>
+              <a:t>CUIDADO: Un contrato que es solo una tabla con nombres de procedimientos y una descripción vaga no sirve: sin tipos, errores e idempotencia, quien integra no sabe qué hacer cuando la llamada falla.</a:t>
+            </a:r>
+          </a:p>
+          <a:p/>
+          <a:p>
+            <a:r>
+              <a:t>PASA A LA SIGUIENTE: Así se ve una operación de la capa de API en código.</a:t>
             </a:r>
           </a:p>
         </p:txBody>
@@ -1068,82 +2067,62 @@
           <a:lstStyle/>
           <a:p>
             <a:r>
-              <a:t>DESARROLLO (para explicarlo, no se proyecta):</a:t>
-            </a:r>
-          </a:p>
-          <a:p>
-            <a:r>
-              <a:t>Primera: el procedimiento nunca informa un fallo devolviendo cero o menos uno en un parametro de salida</a:t>
-            </a:r>
-          </a:p>
-          <a:p>
-            <a:r>
-              <a:t>Porque quien llama puede ignorarlo y seguir; lanza el error con RAISE EXCEPTION y le pone un codigo propio con USING ERRCODE</a:t>
-            </a:r>
-          </a:p>
-          <a:p>
-            <a:r>
-              <a:t>Un SQLSTATE de cinco caracteres: RAISE EXCEPTION 'la mascota % esta inactiva', p_id USING ERRCODE = 'MA001'; la aplicacion recibe MA001 y el mensaje.</a:t>
-            </a:r>
-          </a:p>
-          <a:p>
-            <a:r>
-              <a:t>Sin USING ERRCODE el codigo es P0001, el mismo para todos los errores propios.</a:t>
-            </a:r>
-          </a:p>
-          <a:p>
-            <a:r>
-              <a:t>Repartir los codigos por modulo, por ejemplo MA para mascotas e IN para inventario, es convencion propia del proyecto.</a:t>
-            </a:r>
-          </a:p>
-          <a:p>
-            <a:r>
-              <a:t>En Oracle el equivalente es RAISE_APPLICATION_ERROR con el rango -20000 a -20999, solo como contraste.</a:t>
-            </a:r>
-          </a:p>
-          <a:p>
-            <a:r>
-              <a:t>Segunda: la aplicacion captura el codigo, lo traduce a un mensaje en lenguaje de recepcion y jamas muestra el texto crudo del motor</a:t>
-            </a:r>
-          </a:p>
-          <a:p>
-            <a:r>
-              <a:t>Porque un relation "cita" does not exist le regala al atacante el nombre de los objetos y al recepcionista no le dice nada</a:t>
-            </a:r>
-          </a:p>
-          <a:p>
-            <a:r>
-              <a:t>El error tecnico completo se registra en el log del servidor con un identificador de correlacion que permita encontrar despues ese evento exacto.</a:t>
-            </a:r>
-          </a:p>
-          <a:p>
-            <a:r>
-              <a:t>Tercera, la mas discutida: quien decide COMMIT.</a:t>
-            </a:r>
-          </a:p>
-          <a:p>
-            <a:r>
-              <a:t>La operacion de negocio completa, con todas sus validaciones y sus inserciones, vive dentro de un solo procedimiento</a:t>
-            </a:r>
-          </a:p>
-          <a:p>
-            <a:r>
-              <a:t>Y en PostgreSQL ese CALL es su propia transaccion: si una validacion lanza el error, la excepcion sale del CALL y deshace todo lo que alcanzo a escribir sin que nadie escriba ROLLBACK; la aplicacion no confirma a la mitad.</a:t>
-            </a:r>
-          </a:p>
-          <a:p>
-            <a:r>
-              <a:t>Si el procedimiento captura una excepcion, el bloque termina con RAISE para que el error suba, y nunca WHEN OTHERS THEN NULL, que es la forma mas eficaz que existe de perder datos sin enterarse.</a:t>
-            </a:r>
-          </a:p>
-          <a:p>
-            <a:r>
-              <a:t>NOTAS:</a:t>
-            </a:r>
-          </a:p>
-          <a:p>
-            <a:r>
-              <a:t>El manejo de errores entre capas se resuelve con tres reglas.</a:t>
+              <a:t>QUÉ ES (dilo así): Cuando algo falla, cada capa tiene una tarea: la base informa de una forma que no se pueda pasar por alto, la aplicación lo traduce para el usuario y registra el detalle técnico, y nadie confirma a medias. La base tiene dos formas correctas de informar, y se elige por la clase de fallo.</a:t>
+            </a:r>
+          </a:p>
+          <a:p/>
+          <a:p>
+            <a:r>
+              <a:t>CÓMO DARLA (≈4 min):</a:t>
+            </a:r>
+          </a:p>
+          <a:p>
+            <a:r>
+              <a:t>  • Al entrar: Regla 1: un p_resultado := -1 en un parámetro de salida se ignora fácil. Un rechazo de negocio esperado (mascota inactiva, franja ocupada, sin stock) se devuelve en la fila del contrato: RETURN QUERY SELECT FALSE, 'Franja ocupada', NULL, y la aplicación está obligada a leer ok. Un error que debe abortar (una regla rota a mitad de una operación de varios pasos, una llamada desde otro procedimiento o un trigger, un dato imposible) se lanza: RAISE EXCEPTION … USING ERRCODE = 'MA001'. Sin USING ERRCODE todos los errores propios salen con el código genérico P0001.</a:t>
+            </a:r>
+          </a:p>
+          <a:p>
+            <a:r>
+              <a:t>  • Clic 1: Regla 2: la aplicación muestra «La mascota está inactiva» (lo traduce del mensaje o del código MA001) y guarda en el log del servidor el error técnico con un identificador de correlación. Nunca muestra el texto crudo del motor: un «relation "cita" does not exist» le regala al atacante el nombre de las tablas.</a:t>
+            </a:r>
+          </a:p>
+          <a:p>
+            <a:r>
+              <a:t>  • Clic 2: Regla 3: la operación de negocio completa vive en un procedimiento o una función. Si lanza el error, la excepción sale del CALL y deshace todo sin que nadie escriba ROLLBACK; si devuelve ok = false, la aplicación hace rollback de lo suyo. Nadie confirma a la mitad.</a:t>
+            </a:r>
+          </a:p>
+          <a:p/>
+          <a:p>
+            <a:r>
+              <a:t>EJEMPLO: DO $$ BEGIN RAISE EXCEPTION 'la mascota % esta inactiva', 3 USING ERRCODE = 'MA001'; END $$; responde ERROR: la mascota 3 esta inactiva, con SQLSTATE MA001; sin el USING, el mismo mensaje sale con P0001.</a:t>
+            </a:r>
+          </a:p>
+          <a:p/>
+          <a:p>
+            <a:r>
+              <a:t>SI PREGUNTAN:</a:t>
+            </a:r>
+          </a:p>
+          <a:p>
+            <a:r>
+              <a:t>  • «¿Cuándo devuelvo y cuándo lanzo?» → Se devuelve lo que la aplicación debe manejar como respuesta normal de la operación (el usuario puede elegir otra franja). Se lanza lo que debe deshacer todo y no dejar seguir a nadie por descuido.</a:t>
+            </a:r>
+          </a:p>
+          <a:p>
+            <a:r>
+              <a:t>  • «¿Y un WHEN OTHERS dentro de una función de la capa de API?» → Vale si devuelve ok = false con SQLERRM: el bloque EXCEPTION deshace lo que alcanzó a escribir y la aplicación recibe una fila que debe revisar. Lo que nunca vale es WHEN OTHERS THEN NULL, que captura y no informa.</a:t>
+            </a:r>
+          </a:p>
+          <a:p/>
+          <a:p>
+            <a:r>
+              <a:t>CUIDADO: El error que arruina proyectos es capturar toda excepción, no informar nada y continuar: las citas se pierden en silencio y el informe deja de coincidir con la base.</a:t>
+            </a:r>
+          </a:p>
+          <a:p/>
+          <a:p>
+            <a:r>
+              <a:t>PASA A LA SIGUIENTE: Así se ve una operación que devuelve su resultado en la fila del contrato.</a:t>
             </a:r>
           </a:p>
         </p:txBody>
@@ -1213,87 +2192,62 @@
           <a:lstStyle/>
           <a:p>
             <a:r>
-              <a:t>DESARROLLO (para explicarlo, no se proyecta):</a:t>
-            </a:r>
-          </a:p>
-          <a:p>
-            <a:r>
-              <a:t>Un pool de conexiones es un conjunto de conexiones ya abiertas y autenticadas que la aplicacion mantiene vivas, presta a cada peticion mientras dura y recupera al terminar.</a:t>
-            </a:r>
-          </a:p>
-          <a:p>
-            <a:r>
-              <a:t>Abrir una conexion implica saludo TCP, autenticacion del usuario, creacion de la sesion y reserva de memoria privada</a:t>
-            </a:r>
-          </a:p>
-          <a:p>
-            <a:r>
-              <a:t>En un motor como Oracle sobre una red de oficina eso cuesta del orden de decenas de milisegundos, digamos entre 20 y 100 segun red y configuracion.</a:t>
-            </a:r>
-          </a:p>
-          <a:p>
-            <a:r>
-              <a:t>Un SELECT bien indexado sobre Cita se resuelve en 2 o 3 milisegundos.</a:t>
-            </a:r>
-          </a:p>
-          <a:p>
-            <a:r>
-              <a:t>Si por cada consulta se abre y se cierra la conexion, la aplicacion gasta cincuenta milisegundos en el tramite y tres en el trabajo: mas del noventa por ciento del tiempo de respuesta es protocolo.</a:t>
-            </a:r>
-          </a:p>
-          <a:p>
-            <a:r>
-              <a:t>Los valores exactos dependen del entorno y hay que medirlos; lo que si es regla dura es la direccion de la desigualdad.</a:t>
-            </a:r>
-          </a:p>
-          <a:p>
-            <a:r>
-              <a:t>El tamano del pool no se maximiza, porque cada sesion consume memoria del servidor y mas conexiones simultaneas que nucleos de CPU no aumentan el trabajo hecho</a:t>
-            </a:r>
-          </a:p>
-          <a:p>
-            <a:r>
-              <a:t>Solo la cola: la convencion difundida, no ley, es partir de unas diez conexiones para una aplicacion de este tamano y subir solo con mediciones.</a:t>
-            </a:r>
-          </a:p>
-          <a:p>
-            <a:r>
-              <a:t>Y la fuga de conexiones es el fallo tipico: si una ruta del codigo no devuelve la conexion porque falto el finally o el try con recursos, el pool se agota y la aplicacion se congela esperando</a:t>
-            </a:r>
-          </a:p>
-          <a:p>
-            <a:r>
-              <a:t>El sintoma es un sistema que funciona media hora y despues no responde.</a:t>
-            </a:r>
-          </a:p>
-          <a:p>
-            <a:r>
-              <a:t>Segunda pregunta previsible: no es mas lento llamar un procedimiento que consultar directo.</a:t>
-            </a:r>
-          </a:p>
-          <a:p>
-            <a:r>
-              <a:t>Normalmente es mas rapido, porque una llamada resuelve en el servidor lo que la aplicacion haria en tres o cuatro viajes de red; en todo caso la respuesta profesional es medir, con las herramientas de la Clase 8.</a:t>
-            </a:r>
-          </a:p>
-          <a:p>
-            <a:r>
-              <a:t>NOTAS:</a:t>
-            </a:r>
-          </a:p>
-          <a:p>
-            <a:r>
-              <a:t>Existe por una asimetria que conviene dar con numeros: abrir una conexion es caro y ejecutar una consulta es barato.</a:t>
-            </a:r>
-          </a:p>
-          <a:p>
-            <a:r>
-              <a:t>Tomar una conexion prestada del pool cuesta una fraccion de milisegundo.</a:t>
-            </a:r>
-          </a:p>
-          <a:p>
-            <a:r>
-              <a:t>De ahi salen dos consecuencias.</a:t>
+              <a:t>QUÉ ES (dilo así): Un pool de conexiones es un conjunto de conexiones abiertas y autenticadas que la aplicación reutiliza. Existe por una asimetría: abrir una conexión es caro y ejecutar una consulta es barato.</a:t>
+            </a:r>
+          </a:p>
+          <a:p/>
+          <a:p>
+            <a:r>
+              <a:t>CÓMO DARLA (≈4 min):</a:t>
+            </a:r>
+          </a:p>
+          <a:p>
+            <a:r>
+              <a:t>  • Al entrar: Abrir y cerrar en cada consulta: saludo TCP, autenticación, creación de la sesión (en PostgreSQL, un proceso nuevo en el servidor por cada conexión) y memoria. Decenas de milisegundos de trámite contra 2 o 3 de trabajo: casi todo el tiempo de respuesta es protocolo. Los valores exactos se miden; la dirección de la desigualdad es la regla.</a:t>
+            </a:r>
+          </a:p>
+          <a:p>
+            <a:r>
+              <a:t>  • Clic 1: El pool: diez conexiones ya abiertas que se prestan y se devuelven; tomar una prestada cuesta una fracción de milisegundo. No se maximiza: cada sesión consume memoria del servidor y más conexiones activas que núcleos de CPU solo alargan la cola. Unas diez para una aplicación de este tamaño es una convención, no una ley.</a:t>
+            </a:r>
+          </a:p>
+          <a:p>
+            <a:r>
+              <a:t>  • Clic 2: La fuga: si una ruta del código no devuelve la conexión (faltó el finally o el try con recursos), se van perdiendo hasta que no queda ninguna y las peticiones esperan. El síntoma: funciona media hora y después no responde.</a:t>
+            </a:r>
+          </a:p>
+          <a:p/>
+          <a:p>
+            <a:r>
+              <a:t>EJEMPLO: En Java: try (Connection c = ds.getConnection()) { … } devuelve la conexión al pool al salir del bloque, aunque haya una excepción; un getConnection() sin su close() en un finally es una fuga.</a:t>
+            </a:r>
+          </a:p>
+          <a:p/>
+          <a:p>
+            <a:r>
+              <a:t>SI PREGUNTAN:</a:t>
+            </a:r>
+          </a:p>
+          <a:p>
+            <a:r>
+              <a:t>  • «¿No es más lento llamar un procedimiento que consultar directo?» → Normalmente es más rápido: una llamada resuelve en el servidor lo que la aplicación haría en tres o cuatro viajes de red. En todo caso, se mide (Clase 8).</a:t>
+            </a:r>
+          </a:p>
+          <a:p>
+            <a:r>
+              <a:t>  • «¿Cuántas conexiones aguanta PostgreSQL?» → Por omisión, max_connections es 100. Por eso cada aplicación usa un pool pequeño en vez de una conexión por usuario.</a:t>
+            </a:r>
+          </a:p>
+          <a:p/>
+          <a:p>
+            <a:r>
+              <a:t>CUIDADO: No digas «el pool más grande es el más rápido»: pasado el número de núcleos, más conexiones solo agregan espera y memoria.</a:t>
+            </a:r>
+          </a:p>
+          <a:p/>
+          <a:p>
+            <a:r>
+              <a:t>PASA A LA SIGUIENTE: ¿Cuánta lógica conviene poner en la base? Con honestidad.</a:t>
             </a:r>
           </a:p>
         </p:txBody>
@@ -1363,57 +2317,57 @@
           <a:lstStyle/>
           <a:p>
             <a:r>
-              <a:t>DESARROLLO (para explicarlo, no se proyecta):</a:t>
-            </a:r>
-          </a:p>
-          <a:p>
-            <a:r>
-              <a:t>A favor de la base: la regla queda escrita una sola vez y la cumplen todos los clientes, incluida la consola del administrador, el reporte de Excel y el script que alguien correra a las once de la noche</a:t>
-            </a:r>
-          </a:p>
-          <a:p>
-            <a:r>
-              <a:t>Queda dentro de la misma transaccion que los datos, sin ventana entre validar y escribir; y ahorra viajes de red.</a:t>
-            </a:r>
-          </a:p>
-          <a:p>
-            <a:r>
-              <a:t>En contra: PL/SQL es mas dificil de probar de forma automatizada, sus cambios no se versionan tan naturalmente en un repositorio como el codigo de la aplicacion, hay menos programadores que lo dominen, ata el proyecto al motor elegido</a:t>
-            </a:r>
-          </a:p>
-          <a:p>
-            <a:r>
-              <a:t>Y la CPU de la base suele ser el recurso mas escaso y mas caro de escalar, porque se agrega servidor de aplicacion con facilidad y no se agrega servidor de base de datos con la misma facilidad.</a:t>
-            </a:r>
-          </a:p>
-          <a:p>
-            <a:r>
-              <a:t>El criterio de decision que conviene entregar es este: las invariantes que protegen la integridad de los datos van en la base, porque son las que no pueden depender de que todos los clientes se porten bien</a:t>
-            </a:r>
-          </a:p>
-          <a:p>
-            <a:r>
-              <a:t>Y en la clínica son exactamente las tres reglas del proyecto, que una mascota inactiva no agende cita, que el stock de Insumo nunca quede negativo y que los cambios sensibles queden auditados.</a:t>
-            </a:r>
-          </a:p>
-          <a:p>
-            <a:r>
-              <a:t>Cuando pregunten cual es mejor, la respuesta es que depende de donde caiga el costo del error, y para datos que no se pueden reconstruir ese costo cae siempre del lado de la base.</a:t>
-            </a:r>
-          </a:p>
-          <a:p>
-            <a:r>
-              <a:t>NOTAS:</a:t>
-            </a:r>
-          </a:p>
-          <a:p>
-            <a:r>
-              <a:t>El trade-off de poner logica en la base o en la aplicacion merece honestidad y no propaganda, porque el estudiante encontrara equipos reales que defienden lo contrario de lo que oye hoy.</a:t>
-            </a:r>
-          </a:p>
-          <a:p>
-            <a:r>
-              <a:t>La orquestacion, la presentacion, los formatos de fecha y el envio de correos van en la aplicacion.</a:t>
+              <a:t>QUÉ ES (dilo así): Poner lógica en la base tiene ventajas reales y costos reales, y el estudiante va a encontrar equipos que defienden lo contrario de lo que oye hoy. El criterio no es de gusto: depende de dónde cae el costo del error.</a:t>
+            </a:r>
+          </a:p>
+          <a:p/>
+          <a:p>
+            <a:r>
+              <a:t>CÓMO DARLA (≈4 min):</a:t>
+            </a:r>
+          </a:p>
+          <a:p>
+            <a:r>
+              <a:t>  • Al entrar: A favor de la base: la regla escrita una vez la cumplen todos los clientes, incluida la consola del administrador y el script de las once de la noche; queda en la misma transacción que los datos, sin ventana entre validar y escribir; y ahorra viajes de red. La balanza se inclina.</a:t>
+            </a:r>
+          </a:p>
+          <a:p>
+            <a:r>
+              <a:t>  • Clic 1: En contra: PL/pgSQL es más difícil de probar de forma automática y de versionar, hay menos gente que lo domine, ata el proyecto al motor, y la CPU de la base es el recurso más caro de escalar (agregar servidores de aplicación es fácil; de base, no). La balanza se equilibra.</a:t>
+            </a:r>
+          </a:p>
+          <a:p>
+            <a:r>
+              <a:t>  • Clic 2: El criterio: las reglas que protegen la integridad van en la base, porque no pueden depender de que todos los clientes se porten bien; en la clínica, que una mascota inactiva no agende, que el stock nunca quede negativo y que los cambios sensibles queden auditados. La orquestación, la presentación, los formatos y los correos van en la aplicación.</a:t>
+            </a:r>
+          </a:p>
+          <a:p/>
+          <a:p>
+            <a:r>
+              <a:t>EJEMPLO: Enviar el recordatorio de la cita por correo va en la aplicación (un servicio externo no debe correr dentro de la transacción); impedir que se agende a Rocky, que está inactiva, va en la base.</a:t>
+            </a:r>
+          </a:p>
+          <a:p/>
+          <a:p>
+            <a:r>
+              <a:t>SI PREGUNTAN:</a:t>
+            </a:r>
+          </a:p>
+          <a:p>
+            <a:r>
+              <a:t>  • «Entonces, ¿cuál es mejor?» → Depende de dónde caiga el costo del error. Para datos que no se pueden reconstruir, ese costo cae del lado de la base.</a:t>
+            </a:r>
+          </a:p>
+          <a:p/>
+          <a:p>
+            <a:r>
+              <a:t>CUIDADO: No hagas propaganda de un solo lado: si solo se dicen las ventajas, el estudiante no sabe defender la decisión cuando se la discutan.</a:t>
+            </a:r>
+          </a:p>
+          <a:p/>
+          <a:p>
+            <a:r>
+              <a:t>PASA A LA SIGUIENTE: Último tema: cambiar el esquema sin romper la aplicación que ya corre.</a:t>
             </a:r>
           </a:p>
         </p:txBody>
@@ -1483,87 +2437,175 @@
           <a:lstStyle/>
           <a:p>
             <a:r>
-              <a:t>DESARROLLO (para explicarlo, no se proyecta):</a:t>
-            </a:r>
-          </a:p>
-          <a:p>
-            <a:r>
-              <a:t>Queda el problema mas subestimado: cambiar el esquema sin romper la aplicacion que ya esta corriendo.</a:t>
-            </a:r>
-          </a:p>
-          <a:p>
-            <a:r>
-              <a:t>La regla es que nunca se cambia una cosa en su lugar, se expande, se migra y despues se contrae.</a:t>
-            </a:r>
-          </a:p>
-          <a:p>
-            <a:r>
-              <a:t>Uno, expandir:, sin tocar ningun procedimiento; la aplicacion vieja ignora la columna y sigue igual porque admite nulos.</a:t>
-            </a:r>
-          </a:p>
-          <a:p>
-            <a:r>
-              <a:t>Dos, escribir en ambos lados: sp_inactivar_mascota se actualiza para llenar tambien la columna nueva.</a:t>
-            </a:r>
-          </a:p>
-          <a:p>
-            <a:r>
-              <a:t>Tres, rellenar el historico con UPDATE por lotes y no en una sentencia gigante sobre la tabla completa, para no bloquear a nadie por minutos, lo que enlaza con la Clase 10.</a:t>
-            </a:r>
-          </a:p>
-          <a:p>
-            <a:r>
-              <a:t>Cinco, contraer: eliminar lo viejo solo cuando ninguna version desplegada lo use.</a:t>
-            </a:r>
-          </a:p>
-          <a:p>
-            <a:r>
-              <a:t>Con los procedimientos aplica la misma logica: agregar un parametro al final con valor DEFAULT es compatible, porque las llamadas existentes siguen valiendo; cambiar el orden de los parametros, su tipo o el significado de un codigo de error rompe</a:t>
-            </a:r>
-          </a:p>
-          <a:p>
-            <a:r>
-              <a:t>Y ahi se publica sp_agendar_cita_v2 y se conserva la anterior como envoltura hasta que la aplicacion migre.</a:t>
-            </a:r>
-          </a:p>
-          <a:p>
-            <a:r>
-              <a:t>Los scripts de migracion se numeran, se guardan en el repositorio y jamas se editan despues de aplicados: si algo quedo mal, se escribe el siguiente numero.</a:t>
-            </a:r>
-          </a:p>
-          <a:p>
-            <a:r>
-              <a:t>NOTAS:</a:t>
-            </a:r>
-          </a:p>
-          <a:p>
-            <a:r>
-              <a:t>Suponga que la clínica necesita registrar la fecha en que una mascota fue inactivada, dato que hoy no existe.</a:t>
-            </a:r>
-          </a:p>
-          <a:p>
-            <a:r>
-              <a:t>Cuatro, mover lecturas y reportes a la columna nueva.</a:t>
-            </a:r>
-          </a:p>
-          <a:p>
-            <a:r>
-              <a:t>Cada paso deja funcionando al mismo tiempo la version vieja y la nueva.</a:t>
-            </a:r>
-          </a:p>
-          <a:p>
-            <a:r>
-              <a:t>Eso mismo entra en el informe y en el pitch de hoy, porque el estudiante no muestra pantallas: muestra su contrato, un caso de exito, un caso de error visto por el usuario y su plan de cambio de esquema, que es lo que la Clase 13 mirara desde el lado de los fallos reales y lo que la Clase 15 va a evaluar.</a:t>
-            </a:r>
-          </a:p>
-          <a:p>
-            <a:r>
-              <a:t>CÓDIGO CITADO (referencia):</a:t>
-            </a:r>
-          </a:p>
-          <a:p>
-            <a:r>
-              <a:t>ALTER TABLE Mascota ADD (fecha_inactivacion DATE NULL)</a:t>
+              <a:t>QUÉ ES (dilo así): Cambiar el esquema de una base que ya usa una aplicación no se hace de un golpe. Se agrega lo nuevo al lado de lo viejo, se migra por pasos y se borra lo viejo al final; en cada paso funcionan a la vez la versión vieja y la nueva de la aplicación.</a:t>
+            </a:r>
+          </a:p>
+          <a:p/>
+          <a:p>
+            <a:r>
+              <a:t>CÓMO DARLA (≈6 min):</a:t>
+            </a:r>
+          </a:p>
+          <a:p>
+            <a:r>
+              <a:t>  • Al entrar: El caso: registrar la fecha en que una mascota se inactivó. Fase 1, expandir: ALTER TABLE mascota ADD COLUMN fecha_inactivacion DATE; admite nulos, ningún procedimiento cambia y la aplicación vieja la ignora (visto). La nueva todavía no existe.</a:t>
+            </a:r>
+          </a:p>
+          <a:p>
+            <a:r>
+              <a:t>  • Clic 1: Fase 2, escribir en ambos lados: sp_inactivar_mascota se actualiza para poner activa = 'N' y además llenar la fecha. Las dos versiones funcionan.</a:t>
+            </a:r>
+          </a:p>
+          <a:p>
+            <a:r>
+              <a:t>  • Clic 2: Fase 3, rellenar el histórico: las mascotas que ya estaban inactivas reciben su fecha con UPDATE por lotes, nunca uno gigante que bloquee la tabla por minutos (los bloqueos de la Clase 10).</a:t>
+            </a:r>
+          </a:p>
+          <a:p>
+            <a:r>
+              <a:t>  • Clic 3: Fase 4, mover las lecturas: reportes y pantallas pasan a leer la columna nueva.</a:t>
+            </a:r>
+          </a:p>
+          <a:p>
+            <a:r>
+              <a:t>  • Clic 4: Fase 5, contraer: si la fecha reemplaza al indicador activa, activa se borra solo cuando ninguna versión desplegada la lee. La vieja queda retirada.</a:t>
+            </a:r>
+          </a:p>
+          <a:p>
+            <a:r>
+              <a:t>  • Clic 5: La regla, y lo mismo con procedimientos: un parámetro nuevo al final con valor DEFAULT no rompe las llamadas existentes; cambiar el orden, el tipo o el significado de un error sí, y entonces se publica sp_agendar_cita_v2 y la anterior se conserva hasta que la aplicación migre.</a:t>
+            </a:r>
+          </a:p>
+          <a:p/>
+          <a:p>
+            <a:r>
+              <a:t>EJEMPLO: Tras la fase 1, SELECT nombre, activa, fecha_inactivacion FROM mascota WHERE activa = 'N'; devuelve Rocky y Kiara con la fecha en NULL: eso es lo que la fase 3 rellena.</a:t>
+            </a:r>
+          </a:p>
+          <a:p/>
+          <a:p>
+            <a:r>
+              <a:t>SI PREGUNTAN:</a:t>
+            </a:r>
+          </a:p>
+          <a:p>
+            <a:r>
+              <a:t>  • «¿Por qué no un solo ALTER TABLE que cambie todo?» → Porque la aplicación que está corriendo espera el esquema viejo: en el instante del cambio, todo lo que la usa se rompe. Expandir primero deja funcionando las dos versiones.</a:t>
+            </a:r>
+          </a:p>
+          <a:p>
+            <a:r>
+              <a:t>  • «¿Dónde se guardan estos cambios?» → En scripts de migración numerados en el repositorio, que no se editan después de aplicados: si algo quedó mal, se escribe el siguiente número.</a:t>
+            </a:r>
+          </a:p>
+          <a:p/>
+          <a:p>
+            <a:r>
+              <a:t>CUIDADO: Agregar la columna como NOT NULL de entrada falla en una tabla con filas («column "fecha_inactivacion" of relation "mascota" contains null values»): por eso la fase 1 la agrega admitiendo nulos.</a:t>
+            </a:r>
+          </a:p>
+          <a:p/>
+          <a:p>
+            <a:r>
+              <a:t>PASA A LA SIGUIENTE: Veamos en la demo la puerta, la inyección y el contrato.</a:t>
+            </a:r>
+          </a:p>
+        </p:txBody>
+      </p:sp>
+      <p:sp>
+        <p:nvSpPr>
+          <p:cNvPr id="4" name="Slide Number Placeholder 3"/>
+          <p:cNvSpPr>
+            <a:spLocks noGrp="1"/>
+          </p:cNvSpPr>
+          <p:nvPr>
+            <p:ph type="sldNum" idx="5" sz="quarter"/>
+          </p:nvPr>
+        </p:nvSpPr>
+        <p:spPr/>
+      </p:sp>
+    </p:spTree>
+  </p:cSld>
+  <p:clrMapOvr>
+    <a:masterClrMapping/>
+  </p:clrMapOvr>
+</p:notes>
+</file>
+
+<file path=ppt/notesSlides/notesSlide9.xml><?xml version="1.0" encoding="utf-8"?>
+<p:notes xmlns:a="http://schemas.openxmlformats.org/drawingml/2006/main" xmlns:p="http://schemas.openxmlformats.org/presentationml/2006/main" xmlns:r="http://schemas.openxmlformats.org/officeDocument/2006/relationships">
+  <p:cSld>
+    <p:spTree>
+      <p:nvGrpSpPr>
+        <p:cNvPr id="1" name=""/>
+        <p:cNvGrpSpPr/>
+        <p:nvPr/>
+      </p:nvGrpSpPr>
+      <p:grpSpPr>
+        <a:xfrm>
+          <a:off x="0" y="0"/>
+          <a:ext cx="0" cy="0"/>
+          <a:chOff x="0" y="0"/>
+          <a:chExt cx="0" cy="0"/>
+        </a:xfrm>
+      </p:grpSpPr>
+      <p:sp>
+        <p:nvSpPr>
+          <p:cNvPr id="2" name="Slide Image Placeholder 1"/>
+          <p:cNvSpPr>
+            <a:spLocks noGrp="1"/>
+          </p:cNvSpPr>
+          <p:nvPr>
+            <p:ph type="sldImg" idx="2"/>
+          </p:nvPr>
+        </p:nvSpPr>
+        <p:spPr/>
+      </p:sp>
+      <p:sp>
+        <p:nvSpPr>
+          <p:cNvPr id="3" name="Notes Placeholder 2"/>
+          <p:cNvSpPr>
+            <a:spLocks noGrp="1"/>
+          </p:cNvSpPr>
+          <p:nvPr>
+            <p:ph type="body" idx="3" sz="quarter"/>
+          </p:nvPr>
+        </p:nvSpPr>
+        <p:spPr/>
+        <p:txBody>
+          <a:bodyPr/>
+          <a:lstStyle/>
+          <a:p>
+            <a:r>
+              <a:t>QUÉ ES (dilo así): Hasta hoy la base se usó desde un editor de SQL. Hoy la usa una aplicación, y la pregunta es por dónde entra: si arma texto SQL contra las tablas o si llama operaciones con un contrato.</a:t>
+            </a:r>
+          </a:p>
+          <a:p/>
+          <a:p>
+            <a:r>
+              <a:t>CÓMO DARLA (≈4 min):</a:t>
+            </a:r>
+          </a:p>
+          <a:p>
+            <a:r>
+              <a:t>  • Al entrar: Lee el tema y pregunta: «si la recepcionista escribe un nombre raro en el buscador de mascotas, ¿podría borrar o cambiar algo?». Deja la pregunta abierta: se responde en la lámina de la inyección.</a:t>
+            </a:r>
+          </a:p>
+          <a:p>
+            <a:r>
+              <a:t>  • Después: Cierra: «al final van a poder explicar por qué un parámetro hace imposible la inyección y qué lleva el contrato de una operación».</a:t>
+            </a:r>
+          </a:p>
+          <a:p/>
+          <a:p>
+            <a:r>
+              <a:t>CUIDADO: Esta sesión es doble con la Clase 11: si la revisión se alargó, recorta el pool de conexiones, no la inyección ni el contrato.</a:t>
+            </a:r>
+          </a:p>
+          <a:p/>
+          <a:p>
+            <a:r>
+              <a:t>PASA A LA SIGUIENTE: Empezamos por la decisión de la que sale todo lo demás: la puerta.</a:t>
             </a:r>
           </a:p>
         </p:txBody>
@@ -4906,7 +5948,7 @@
                 </a:solidFill>
                 <a:latin typeface="Calibri"/>
               </a:rPr>
-              <a:t>Contrato de operaciones + ensayo proyecto</a:t>
+              <a:t>Contrato de operaciones + ensayo de la presentacion</a:t>
             </a:r>
           </a:p>
         </p:txBody>
@@ -5792,7 +6834,7 @@
                 </a:solidFill>
                 <a:latin typeface="Consolas"/>
               </a:rPr>
-              <a:t>-- ERROR:  ERROR: la mascota 3 esta inactiva</a:t>
+              <a:t>-- ERROR:  ERROR: la mascota 3 esta inactiva; no se agenda cita</a:t>
             </a:r>
           </a:p>
         </p:txBody>
@@ -6199,7 +7241,25 @@
                 </a:solidFill>
                 <a:latin typeface="Calibri"/>
               </a:rPr>
-              <a:t>–   Primera: el procedimiento nunca informa un fallo devolviendo cero o menos uno en un parametro de salida</a:t>
+              <a:t>–   Un fallo nunca se esconde en un </a:t>
+            </a:r>
+            <a:r>
+              <a:rPr sz="2000" b="1" i="0">
+                <a:solidFill>
+                  <a:srgbClr val="333333"/>
+                </a:solidFill>
+                <a:latin typeface="Calibri"/>
+              </a:rPr>
+              <a:t>-1</a:t>
+            </a:r>
+            <a:r>
+              <a:rPr sz="2000" b="0" i="0">
+                <a:solidFill>
+                  <a:srgbClr val="333333"/>
+                </a:solidFill>
+                <a:latin typeface="Calibri"/>
+              </a:rPr>
+              <a:t> suelto que nadie está obligado a revisar.</a:t>
             </a:r>
           </a:p>
           <a:p>
@@ -6215,7 +7275,25 @@
                 </a:solidFill>
                 <a:latin typeface="Calibri"/>
               </a:rPr>
-              <a:t>–   Porque quien llama puede ignorarlo y seguir; lanza el error con RAISE EXCEPTION y le pone un codigo propio con USING ERRCODE</a:t>
+              <a:t>–   El rechazo de negocio esperado se </a:t>
+            </a:r>
+            <a:r>
+              <a:rPr sz="2000" b="1" i="0">
+                <a:solidFill>
+                  <a:srgbClr val="333333"/>
+                </a:solidFill>
+                <a:latin typeface="Calibri"/>
+              </a:rPr>
+              <a:t>devuelve</a:t>
+            </a:r>
+            <a:r>
+              <a:rPr sz="2000" b="0" i="0">
+                <a:solidFill>
+                  <a:srgbClr val="333333"/>
+                </a:solidFill>
+                <a:latin typeface="Calibri"/>
+              </a:rPr>
+              <a:t> en la fila del contrato: ok falso y su mensaje.</a:t>
             </a:r>
           </a:p>
           <a:p>
@@ -6231,7 +7309,59 @@
                 </a:solidFill>
                 <a:latin typeface="Calibri"/>
               </a:rPr>
-              <a:t>–   Un SQLSTATE de cinco caracteres: RAISE EXCEPTION 'la mascota % esta inactiva', p_id USING ERRCODE = 'MA001'; la aplicacion recibe MA001 y el mensaje.</a:t>
+              <a:t>–   El error que debe abortar se </a:t>
+            </a:r>
+            <a:r>
+              <a:rPr sz="2000" b="1" i="0">
+                <a:solidFill>
+                  <a:srgbClr val="333333"/>
+                </a:solidFill>
+                <a:latin typeface="Calibri"/>
+              </a:rPr>
+              <a:t>lanza</a:t>
+            </a:r>
+            <a:r>
+              <a:rPr sz="2000" b="0" i="0">
+                <a:solidFill>
+                  <a:srgbClr val="333333"/>
+                </a:solidFill>
+                <a:latin typeface="Calibri"/>
+              </a:rPr>
+              <a:t> con RAISE EXCEPTION y un código propio con USING ERRCODE.</a:t>
+            </a:r>
+          </a:p>
+          <a:p>
+            <a:pPr>
+              <a:spcAft>
+                <a:spcPts val="800"/>
+              </a:spcAft>
+            </a:pPr>
+            <a:r>
+              <a:rPr sz="2000" b="0" i="0">
+                <a:solidFill>
+                  <a:srgbClr val="333333"/>
+                </a:solidFill>
+                <a:latin typeface="Calibri"/>
+              </a:rPr>
+              <a:t>–   La aplicación </a:t>
+            </a:r>
+            <a:r>
+              <a:rPr sz="2000" b="1" i="0">
+                <a:solidFill>
+                  <a:srgbClr val="333333"/>
+                </a:solidFill>
+                <a:latin typeface="Calibri"/>
+              </a:rPr>
+              <a:t>traduce</a:t>
+            </a:r>
+            <a:r>
+              <a:rPr sz="2000" b="0" i="0">
+                <a:solidFill>
+                  <a:srgbClr val="333333"/>
+                </a:solidFill>
+                <a:latin typeface="Calibri"/>
+              </a:rPr>
+              <a:t> el mensaje, guarda el error técnico en su log y no confirma a medias.</a:t>
             </a:r>
           </a:p>
         </p:txBody>
@@ -6548,7 +7678,7 @@
                 </a:solidFill>
                 <a:latin typeface="Calibri"/>
               </a:rPr>
-              <a:t>El pool de conexiones: que es y por que se agota</a:t>
+              <a:t>El contrato como fila: ok, mensaje e id_generado</a:t>
             </a:r>
           </a:p>
         </p:txBody>
@@ -6561,8 +7691,8 @@
         </p:nvSpPr>
         <p:spPr>
           <a:xfrm>
-            <a:off x="5803166" y="1188719"/>
-            <a:ext cx="5998464" cy="4828032"/>
+            <a:off x="457200" y="1261872"/>
+            <a:ext cx="11277295" cy="5076537"/>
           </a:xfrm>
           <a:prstGeom prst="roundRect">
             <a:avLst>
@@ -6570,7 +7700,7 @@
             </a:avLst>
           </a:prstGeom>
           <a:solidFill>
-            <a:srgbClr val="E8EEF4"/>
+            <a:srgbClr val="1E1E1E"/>
           </a:solidFill>
           <a:ln>
             <a:noFill/>
@@ -6598,88 +7728,188 @@
           </a:p>
         </p:txBody>
       </p:sp>
-      <p:pic>
-        <p:nvPicPr>
-          <p:cNvPr id="6" name="Picture 5" descr="pool-conexiones-paso1.png"/>
-          <p:cNvPicPr>
-            <a:picLocks noChangeAspect="1"/>
-          </p:cNvPicPr>
+      <p:sp>
+        <p:nvSpPr>
+          <p:cNvPr id="6" name="Rectangle 5"/>
+          <p:cNvSpPr/>
           <p:nvPr/>
-        </p:nvPicPr>
-        <p:blipFill>
-          <a:blip r:embed="rId2"/>
-          <a:stretch>
-            <a:fillRect/>
-          </a:stretch>
-        </p:blipFill>
-        <p:spPr>
-          <a:xfrm>
-            <a:off x="5876318" y="1261872"/>
-            <a:ext cx="5852160" cy="4681728"/>
+        </p:nvSpPr>
+        <p:spPr>
+          <a:xfrm>
+            <a:off x="457200" y="1261872"/>
+            <a:ext cx="11277295" cy="365760"/>
           </a:xfrm>
           <a:prstGeom prst="rect">
             <a:avLst/>
           </a:prstGeom>
-        </p:spPr>
-      </p:pic>
-      <p:pic>
-        <p:nvPicPr>
-          <p:cNvPr id="7" name="Picture 6" descr="pool-conexiones-paso2.png"/>
-          <p:cNvPicPr>
-            <a:picLocks noChangeAspect="1"/>
-          </p:cNvPicPr>
+          <a:solidFill>
+            <a:srgbClr val="2D2D30"/>
+          </a:solidFill>
+          <a:ln>
+            <a:noFill/>
+          </a:ln>
+        </p:spPr>
+        <p:style>
+          <a:lnRef idx="1">
+            <a:schemeClr val="accent1"/>
+          </a:lnRef>
+          <a:fillRef idx="3">
+            <a:schemeClr val="accent1"/>
+          </a:fillRef>
+          <a:effectRef idx="2">
+            <a:schemeClr val="accent1"/>
+          </a:effectRef>
+          <a:fontRef idx="minor">
+            <a:schemeClr val="lt1"/>
+          </a:fontRef>
+        </p:style>
+        <p:txBody>
+          <a:bodyPr rtlCol="0" anchor="ctr"/>
+          <a:lstStyle/>
+          <a:p>
+            <a:pPr algn="ctr"/>
+          </a:p>
+        </p:txBody>
+      </p:sp>
+      <p:sp>
+        <p:nvSpPr>
+          <p:cNvPr id="7" name="Oval 6"/>
+          <p:cNvSpPr/>
           <p:nvPr/>
-        </p:nvPicPr>
-        <p:blipFill>
-          <a:blip r:embed="rId3"/>
-          <a:stretch>
-            <a:fillRect/>
-          </a:stretch>
-        </p:blipFill>
-        <p:spPr>
-          <a:xfrm>
-            <a:off x="5876318" y="1261872"/>
-            <a:ext cx="5852160" cy="4681728"/>
-          </a:xfrm>
-          <a:prstGeom prst="rect">
+        </p:nvSpPr>
+        <p:spPr>
+          <a:xfrm>
+            <a:off x="658368" y="1380743"/>
+            <a:ext cx="128016" cy="128016"/>
+          </a:xfrm>
+          <a:prstGeom prst="ellipse">
             <a:avLst/>
           </a:prstGeom>
-        </p:spPr>
-      </p:pic>
-      <p:pic>
-        <p:nvPicPr>
-          <p:cNvPr id="8" name="Picture 7" descr="pool-conexiones-paso3.png"/>
-          <p:cNvPicPr>
-            <a:picLocks noChangeAspect="1"/>
-          </p:cNvPicPr>
+          <a:solidFill>
+            <a:srgbClr val="FF5F56"/>
+          </a:solidFill>
+          <a:ln>
+            <a:noFill/>
+          </a:ln>
+        </p:spPr>
+        <p:style>
+          <a:lnRef idx="1">
+            <a:schemeClr val="accent1"/>
+          </a:lnRef>
+          <a:fillRef idx="3">
+            <a:schemeClr val="accent1"/>
+          </a:fillRef>
+          <a:effectRef idx="2">
+            <a:schemeClr val="accent1"/>
+          </a:effectRef>
+          <a:fontRef idx="minor">
+            <a:schemeClr val="lt1"/>
+          </a:fontRef>
+        </p:style>
+        <p:txBody>
+          <a:bodyPr rtlCol="0" anchor="ctr"/>
+          <a:lstStyle/>
+          <a:p>
+            <a:pPr algn="ctr"/>
+          </a:p>
+        </p:txBody>
+      </p:sp>
+      <p:sp>
+        <p:nvSpPr>
+          <p:cNvPr id="8" name="Oval 7"/>
+          <p:cNvSpPr/>
           <p:nvPr/>
-        </p:nvPicPr>
-        <p:blipFill>
-          <a:blip r:embed="rId4"/>
-          <a:stretch>
-            <a:fillRect/>
-          </a:stretch>
-        </p:blipFill>
-        <p:spPr>
-          <a:xfrm>
-            <a:off x="5876318" y="1261872"/>
-            <a:ext cx="5852160" cy="4681728"/>
-          </a:xfrm>
-          <a:prstGeom prst="rect">
+        </p:nvSpPr>
+        <p:spPr>
+          <a:xfrm>
+            <a:off x="877824" y="1380743"/>
+            <a:ext cx="128016" cy="128016"/>
+          </a:xfrm>
+          <a:prstGeom prst="ellipse">
             <a:avLst/>
           </a:prstGeom>
-        </p:spPr>
-      </p:pic>
-      <p:sp>
-        <p:nvSpPr>
-          <p:cNvPr id="13" name="TextBox 12"/>
+          <a:solidFill>
+            <a:srgbClr val="FFBD2E"/>
+          </a:solidFill>
+          <a:ln>
+            <a:noFill/>
+          </a:ln>
+        </p:spPr>
+        <p:style>
+          <a:lnRef idx="1">
+            <a:schemeClr val="accent1"/>
+          </a:lnRef>
+          <a:fillRef idx="3">
+            <a:schemeClr val="accent1"/>
+          </a:fillRef>
+          <a:effectRef idx="2">
+            <a:schemeClr val="accent1"/>
+          </a:effectRef>
+          <a:fontRef idx="minor">
+            <a:schemeClr val="lt1"/>
+          </a:fontRef>
+        </p:style>
+        <p:txBody>
+          <a:bodyPr rtlCol="0" anchor="ctr"/>
+          <a:lstStyle/>
+          <a:p>
+            <a:pPr algn="ctr"/>
+          </a:p>
+        </p:txBody>
+      </p:sp>
+      <p:sp>
+        <p:nvSpPr>
+          <p:cNvPr id="9" name="Oval 8"/>
+          <p:cNvSpPr/>
+          <p:nvPr/>
+        </p:nvSpPr>
+        <p:spPr>
+          <a:xfrm>
+            <a:off x="1097280" y="1380743"/>
+            <a:ext cx="128016" cy="128016"/>
+          </a:xfrm>
+          <a:prstGeom prst="ellipse">
+            <a:avLst/>
+          </a:prstGeom>
+          <a:solidFill>
+            <a:srgbClr val="27C93F"/>
+          </a:solidFill>
+          <a:ln>
+            <a:noFill/>
+          </a:ln>
+        </p:spPr>
+        <p:style>
+          <a:lnRef idx="1">
+            <a:schemeClr val="accent1"/>
+          </a:lnRef>
+          <a:fillRef idx="3">
+            <a:schemeClr val="accent1"/>
+          </a:fillRef>
+          <a:effectRef idx="2">
+            <a:schemeClr val="accent1"/>
+          </a:effectRef>
+          <a:fontRef idx="minor">
+            <a:schemeClr val="lt1"/>
+          </a:fontRef>
+        </p:style>
+        <p:txBody>
+          <a:bodyPr rtlCol="0" anchor="ctr"/>
+          <a:lstStyle/>
+          <a:p>
+            <a:pPr algn="ctr"/>
+          </a:p>
+        </p:txBody>
+      </p:sp>
+      <p:sp>
+        <p:nvSpPr>
+          <p:cNvPr id="10" name="TextBox 9"/>
           <p:cNvSpPr txBox="1"/>
           <p:nvPr/>
         </p:nvSpPr>
         <p:spPr>
           <a:xfrm>
-            <a:off x="5870301" y="5961888"/>
-            <a:ext cx="5864193" cy="320040"/>
+            <a:off x="1371600" y="1298448"/>
+            <a:ext cx="10180015" cy="292608"/>
           </a:xfrm>
           <a:prstGeom prst="rect">
             <a:avLst/>
@@ -6687,34 +7917,32 @@
           <a:noFill/>
         </p:spPr>
         <p:txBody>
-          <a:bodyPr wrap="square">
-            <a:spAutoFit/>
-          </a:bodyPr>
-          <a:lstStyle/>
-          <a:p>
-            <a:pPr algn="ctr"/>
-            <a:r>
-              <a:rPr sz="1100" b="0" i="1">
-                <a:solidFill>
-                  <a:srgbClr val="666666"/>
+          <a:bodyPr wrap="square" anchor="ctr"/>
+          <a:lstStyle/>
+          <a:p>
+            <a:pPr algn="r"/>
+            <a:r>
+              <a:rPr sz="1100" b="1" i="0">
+                <a:solidFill>
+                  <a:srgbClr val="BBBBBB"/>
                 </a:solidFill>
                 <a:latin typeface="Calibri"/>
               </a:rPr>
-              <a:t>Clic para avanzar la animación</a:t>
-            </a:r>
-          </a:p>
-        </p:txBody>
-      </p:sp>
-      <p:sp>
-        <p:nvSpPr>
-          <p:cNvPr id="14" name="TextBox 13"/>
+              <a:t>SQL · PostgreSQL</a:t>
+            </a:r>
+          </a:p>
+        </p:txBody>
+      </p:sp>
+      <p:sp>
+        <p:nvSpPr>
+          <p:cNvPr id="11" name="TextBox 10"/>
           <p:cNvSpPr txBox="1"/>
           <p:nvPr/>
         </p:nvSpPr>
         <p:spPr>
           <a:xfrm>
-            <a:off x="457200" y="1353312"/>
-            <a:ext cx="5093061" cy="5047488"/>
+            <a:off x="685800" y="1719072"/>
+            <a:ext cx="502920" cy="4482177"/>
           </a:xfrm>
           <a:prstGeom prst="rect">
             <a:avLst/>
@@ -6727,58 +7955,1810 @@
           </a:bodyPr>
           <a:lstStyle/>
           <a:p>
+            <a:pPr algn="r">
+              <a:spcAft>
+                <a:spcPts val="300"/>
+              </a:spcAft>
+            </a:pPr>
+            <a:r>
+              <a:rPr sz="1400" i="0" b="0">
+                <a:solidFill>
+                  <a:srgbClr val="858585"/>
+                </a:solidFill>
+                <a:latin typeface="Consolas"/>
+              </a:rPr>
+              <a:t>1</a:t>
+            </a:r>
+          </a:p>
+          <a:p>
+            <a:pPr algn="r">
+              <a:spcAft>
+                <a:spcPts val="300"/>
+              </a:spcAft>
+            </a:pPr>
+            <a:r>
+              <a:rPr sz="1400" i="0" b="0">
+                <a:solidFill>
+                  <a:srgbClr val="858585"/>
+                </a:solidFill>
+                <a:latin typeface="Consolas"/>
+              </a:rPr>
+              <a:t>2</a:t>
+            </a:r>
+          </a:p>
+          <a:p>
+            <a:pPr algn="r">
+              <a:spcAft>
+                <a:spcPts val="300"/>
+              </a:spcAft>
+            </a:pPr>
+            <a:r>
+              <a:rPr sz="1400" i="0" b="0">
+                <a:solidFill>
+                  <a:srgbClr val="858585"/>
+                </a:solidFill>
+                <a:latin typeface="Consolas"/>
+              </a:rPr>
+              <a:t>3</a:t>
+            </a:r>
+          </a:p>
+          <a:p>
+            <a:pPr algn="r">
+              <a:spcAft>
+                <a:spcPts val="300"/>
+              </a:spcAft>
+            </a:pPr>
+            <a:r>
+              <a:rPr sz="1400" i="0" b="0">
+                <a:solidFill>
+                  <a:srgbClr val="858585"/>
+                </a:solidFill>
+                <a:latin typeface="Consolas"/>
+              </a:rPr>
+              <a:t>4</a:t>
+            </a:r>
+          </a:p>
+          <a:p>
+            <a:pPr algn="r">
+              <a:spcAft>
+                <a:spcPts val="300"/>
+              </a:spcAft>
+            </a:pPr>
+            <a:r>
+              <a:rPr sz="1400" i="0" b="0">
+                <a:solidFill>
+                  <a:srgbClr val="858585"/>
+                </a:solidFill>
+                <a:latin typeface="Consolas"/>
+              </a:rPr>
+              <a:t>5</a:t>
+            </a:r>
+          </a:p>
+          <a:p>
+            <a:pPr algn="r">
+              <a:spcAft>
+                <a:spcPts val="300"/>
+              </a:spcAft>
+            </a:pPr>
+            <a:r>
+              <a:rPr sz="1400" i="0" b="0">
+                <a:solidFill>
+                  <a:srgbClr val="858585"/>
+                </a:solidFill>
+                <a:latin typeface="Consolas"/>
+              </a:rPr>
+              <a:t>6</a:t>
+            </a:r>
+          </a:p>
+          <a:p>
+            <a:pPr algn="r">
+              <a:spcAft>
+                <a:spcPts val="300"/>
+              </a:spcAft>
+            </a:pPr>
+            <a:r>
+              <a:rPr sz="1400" i="0" b="0">
+                <a:solidFill>
+                  <a:srgbClr val="858585"/>
+                </a:solidFill>
+                <a:latin typeface="Consolas"/>
+              </a:rPr>
+              <a:t>7</a:t>
+            </a:r>
+          </a:p>
+          <a:p>
+            <a:pPr algn="r">
+              <a:spcAft>
+                <a:spcPts val="300"/>
+              </a:spcAft>
+            </a:pPr>
+            <a:r>
+              <a:rPr sz="1400" i="0" b="0">
+                <a:solidFill>
+                  <a:srgbClr val="858585"/>
+                </a:solidFill>
+                <a:latin typeface="Consolas"/>
+              </a:rPr>
+              <a:t>8</a:t>
+            </a:r>
+          </a:p>
+          <a:p>
+            <a:pPr algn="r">
+              <a:spcAft>
+                <a:spcPts val="300"/>
+              </a:spcAft>
+            </a:pPr>
+            <a:r>
+              <a:rPr sz="1400" i="0" b="0">
+                <a:solidFill>
+                  <a:srgbClr val="858585"/>
+                </a:solidFill>
+                <a:latin typeface="Consolas"/>
+              </a:rPr>
+              <a:t>9</a:t>
+            </a:r>
+          </a:p>
+          <a:p>
+            <a:pPr algn="r">
+              <a:spcAft>
+                <a:spcPts val="300"/>
+              </a:spcAft>
+            </a:pPr>
+            <a:r>
+              <a:rPr sz="1400" i="0" b="0">
+                <a:solidFill>
+                  <a:srgbClr val="858585"/>
+                </a:solidFill>
+                <a:latin typeface="Consolas"/>
+              </a:rPr>
+              <a:t>10</a:t>
+            </a:r>
+          </a:p>
+          <a:p>
+            <a:pPr algn="r">
+              <a:spcAft>
+                <a:spcPts val="300"/>
+              </a:spcAft>
+            </a:pPr>
+            <a:r>
+              <a:rPr sz="1400" i="0" b="0">
+                <a:solidFill>
+                  <a:srgbClr val="858585"/>
+                </a:solidFill>
+                <a:latin typeface="Consolas"/>
+              </a:rPr>
+              <a:t>11</a:t>
+            </a:r>
+          </a:p>
+          <a:p>
+            <a:pPr algn="r">
+              <a:spcAft>
+                <a:spcPts val="300"/>
+              </a:spcAft>
+            </a:pPr>
+            <a:r>
+              <a:rPr sz="1400" i="0" b="0">
+                <a:solidFill>
+                  <a:srgbClr val="858585"/>
+                </a:solidFill>
+                <a:latin typeface="Consolas"/>
+              </a:rPr>
+              <a:t>12</a:t>
+            </a:r>
+          </a:p>
+          <a:p>
+            <a:pPr algn="r">
+              <a:spcAft>
+                <a:spcPts val="300"/>
+              </a:spcAft>
+            </a:pPr>
+            <a:r>
+              <a:rPr sz="1400" i="0" b="0">
+                <a:solidFill>
+                  <a:srgbClr val="858585"/>
+                </a:solidFill>
+                <a:latin typeface="Consolas"/>
+              </a:rPr>
+              <a:t>13</a:t>
+            </a:r>
+          </a:p>
+          <a:p>
+            <a:pPr algn="r">
+              <a:spcAft>
+                <a:spcPts val="300"/>
+              </a:spcAft>
+            </a:pPr>
+            <a:r>
+              <a:rPr sz="1400" i="0" b="0">
+                <a:solidFill>
+                  <a:srgbClr val="858585"/>
+                </a:solidFill>
+                <a:latin typeface="Consolas"/>
+              </a:rPr>
+              <a:t>14</a:t>
+            </a:r>
+          </a:p>
+          <a:p>
+            <a:pPr algn="r">
+              <a:spcAft>
+                <a:spcPts val="300"/>
+              </a:spcAft>
+            </a:pPr>
+            <a:r>
+              <a:rPr sz="1400" i="0" b="0">
+                <a:solidFill>
+                  <a:srgbClr val="858585"/>
+                </a:solidFill>
+                <a:latin typeface="Consolas"/>
+              </a:rPr>
+              <a:t>15</a:t>
+            </a:r>
+          </a:p>
+          <a:p>
+            <a:pPr algn="r">
+              <a:spcAft>
+                <a:spcPts val="300"/>
+              </a:spcAft>
+            </a:pPr>
+            <a:r>
+              <a:rPr sz="1400" i="0" b="0">
+                <a:solidFill>
+                  <a:srgbClr val="858585"/>
+                </a:solidFill>
+                <a:latin typeface="Consolas"/>
+              </a:rPr>
+              <a:t>16</a:t>
+            </a:r>
+          </a:p>
+          <a:p>
+            <a:pPr algn="r">
+              <a:spcAft>
+                <a:spcPts val="300"/>
+              </a:spcAft>
+            </a:pPr>
+            <a:r>
+              <a:rPr sz="1400" i="0" b="0">
+                <a:solidFill>
+                  <a:srgbClr val="858585"/>
+                </a:solidFill>
+                <a:latin typeface="Consolas"/>
+              </a:rPr>
+              <a:t>17</a:t>
+            </a:r>
+          </a:p>
+        </p:txBody>
+      </p:sp>
+      <p:sp>
+        <p:nvSpPr>
+          <p:cNvPr id="12" name="TextBox 11"/>
+          <p:cNvSpPr txBox="1"/>
+          <p:nvPr/>
+        </p:nvSpPr>
+        <p:spPr>
+          <a:xfrm>
+            <a:off x="1188720" y="1719072"/>
+            <a:ext cx="10271455" cy="4482177"/>
+          </a:xfrm>
+          <a:prstGeom prst="rect">
+            <a:avLst/>
+          </a:prstGeom>
+          <a:noFill/>
+        </p:spPr>
+        <p:txBody>
+          <a:bodyPr wrap="square">
+            <a:spAutoFit/>
+          </a:bodyPr>
+          <a:lstStyle/>
+          <a:p>
             <a:pPr>
               <a:spcAft>
-                <a:spcPts val="800"/>
+                <a:spcPts val="300"/>
               </a:spcAft>
             </a:pPr>
             <a:r>
-              <a:rPr sz="2000" b="0" i="0">
-                <a:solidFill>
-                  <a:srgbClr val="333333"/>
-                </a:solidFill>
-                <a:latin typeface="Calibri"/>
-              </a:rPr>
-              <a:t>–   Un pool de conexiones es un conjunto de conexiones ya abiertas y autenticadas que la aplicacion mantiene vivas.</a:t>
+              <a:rPr sz="1400" i="0" b="0">
+                <a:solidFill>
+                  <a:srgbClr val="569CD6"/>
+                </a:solidFill>
+                <a:latin typeface="Consolas"/>
+              </a:rPr>
+              <a:t>CREATE</a:t>
+            </a:r>
+            <a:r>
+              <a:rPr sz="1400" i="0" b="0">
+                <a:solidFill>
+                  <a:srgbClr val="D4D4D4"/>
+                </a:solidFill>
+                <a:latin typeface="Consolas"/>
+              </a:rPr>
+              <a:t> </a:t>
+            </a:r>
+            <a:r>
+              <a:rPr sz="1400" i="0" b="0">
+                <a:solidFill>
+                  <a:srgbClr val="569CD6"/>
+                </a:solidFill>
+                <a:latin typeface="Consolas"/>
+              </a:rPr>
+              <a:t>OR</a:t>
+            </a:r>
+            <a:r>
+              <a:rPr sz="1400" i="0" b="0">
+                <a:solidFill>
+                  <a:srgbClr val="D4D4D4"/>
+                </a:solidFill>
+                <a:latin typeface="Consolas"/>
+              </a:rPr>
+              <a:t> </a:t>
+            </a:r>
+            <a:r>
+              <a:rPr sz="1400" i="0" b="0">
+                <a:solidFill>
+                  <a:srgbClr val="569CD6"/>
+                </a:solidFill>
+                <a:latin typeface="Consolas"/>
+              </a:rPr>
+              <a:t>REPLACE</a:t>
+            </a:r>
+            <a:r>
+              <a:rPr sz="1400" i="0" b="0">
+                <a:solidFill>
+                  <a:srgbClr val="D4D4D4"/>
+                </a:solidFill>
+                <a:latin typeface="Consolas"/>
+              </a:rPr>
+              <a:t> </a:t>
+            </a:r>
+            <a:r>
+              <a:rPr sz="1400" i="0" b="0">
+                <a:solidFill>
+                  <a:srgbClr val="569CD6"/>
+                </a:solidFill>
+                <a:latin typeface="Consolas"/>
+              </a:rPr>
+              <a:t>FUNCTION</a:t>
+            </a:r>
+            <a:r>
+              <a:rPr sz="1400" i="0" b="0">
+                <a:solidFill>
+                  <a:srgbClr val="D4D4D4"/>
+                </a:solidFill>
+                <a:latin typeface="Consolas"/>
+              </a:rPr>
+              <a:t> </a:t>
+            </a:r>
+            <a:r>
+              <a:rPr sz="1400" i="0" b="0">
+                <a:solidFill>
+                  <a:srgbClr val="DCDCAA"/>
+                </a:solidFill>
+                <a:latin typeface="Consolas"/>
+              </a:rPr>
+              <a:t>api_cancelar_cita</a:t>
+            </a:r>
+            <a:r>
+              <a:rPr sz="1400" i="0" b="0">
+                <a:solidFill>
+                  <a:srgbClr val="D4D4D4"/>
+                </a:solidFill>
+                <a:latin typeface="Consolas"/>
+              </a:rPr>
+              <a:t>(</a:t>
+            </a:r>
+            <a:r>
+              <a:rPr sz="1400" i="0" b="0">
+                <a:solidFill>
+                  <a:srgbClr val="D4D4D4"/>
+                </a:solidFill>
+                <a:latin typeface="Consolas"/>
+              </a:rPr>
+              <a:t>p_id_cita</a:t>
+            </a:r>
+            <a:r>
+              <a:rPr sz="1400" i="0" b="0">
+                <a:solidFill>
+                  <a:srgbClr val="D4D4D4"/>
+                </a:solidFill>
+                <a:latin typeface="Consolas"/>
+              </a:rPr>
+              <a:t> </a:t>
+            </a:r>
+            <a:r>
+              <a:rPr sz="1400" i="0" b="0">
+                <a:solidFill>
+                  <a:srgbClr val="4EC9B0"/>
+                </a:solidFill>
+                <a:latin typeface="Consolas"/>
+              </a:rPr>
+              <a:t>INT</a:t>
+            </a:r>
+            <a:r>
+              <a:rPr sz="1400" i="0" b="0">
+                <a:solidFill>
+                  <a:srgbClr val="D4D4D4"/>
+                </a:solidFill>
+                <a:latin typeface="Consolas"/>
+              </a:rPr>
+              <a:t>)</a:t>
             </a:r>
           </a:p>
           <a:p>
             <a:pPr>
               <a:spcAft>
-                <a:spcPts val="800"/>
+                <a:spcPts val="300"/>
               </a:spcAft>
             </a:pPr>
             <a:r>
-              <a:rPr sz="2000" b="0" i="0">
-                <a:solidFill>
-                  <a:srgbClr val="333333"/>
-                </a:solidFill>
-                <a:latin typeface="Calibri"/>
-              </a:rPr>
-              <a:t>–   Abrir una conexion implica saludo TCP, autenticacion del usuario, creacion de la sesion y reserva de memoria privada</a:t>
+              <a:rPr sz="1400" i="0" b="0">
+                <a:solidFill>
+                  <a:srgbClr val="569CD6"/>
+                </a:solidFill>
+                <a:latin typeface="Consolas"/>
+              </a:rPr>
+              <a:t>RETURNS</a:t>
+            </a:r>
+            <a:r>
+              <a:rPr sz="1400" i="0" b="0">
+                <a:solidFill>
+                  <a:srgbClr val="D4D4D4"/>
+                </a:solidFill>
+                <a:latin typeface="Consolas"/>
+              </a:rPr>
+              <a:t> </a:t>
+            </a:r>
+            <a:r>
+              <a:rPr sz="1400" i="0" b="0">
+                <a:solidFill>
+                  <a:srgbClr val="569CD6"/>
+                </a:solidFill>
+                <a:latin typeface="Consolas"/>
+              </a:rPr>
+              <a:t>TABLE</a:t>
+            </a:r>
+            <a:r>
+              <a:rPr sz="1400" i="0" b="0">
+                <a:solidFill>
+                  <a:srgbClr val="D4D4D4"/>
+                </a:solidFill>
+                <a:latin typeface="Consolas"/>
+              </a:rPr>
+              <a:t> (</a:t>
+            </a:r>
+            <a:r>
+              <a:rPr sz="1400" i="0" b="0">
+                <a:solidFill>
+                  <a:srgbClr val="D4D4D4"/>
+                </a:solidFill>
+                <a:latin typeface="Consolas"/>
+              </a:rPr>
+              <a:t>ok</a:t>
+            </a:r>
+            <a:r>
+              <a:rPr sz="1400" i="0" b="0">
+                <a:solidFill>
+                  <a:srgbClr val="D4D4D4"/>
+                </a:solidFill>
+                <a:latin typeface="Consolas"/>
+              </a:rPr>
+              <a:t> </a:t>
+            </a:r>
+            <a:r>
+              <a:rPr sz="1400" i="0" b="0">
+                <a:solidFill>
+                  <a:srgbClr val="4EC9B0"/>
+                </a:solidFill>
+                <a:latin typeface="Consolas"/>
+              </a:rPr>
+              <a:t>BOOLEAN</a:t>
+            </a:r>
+            <a:r>
+              <a:rPr sz="1400" i="0" b="0">
+                <a:solidFill>
+                  <a:srgbClr val="D4D4D4"/>
+                </a:solidFill>
+                <a:latin typeface="Consolas"/>
+              </a:rPr>
+              <a:t>, </a:t>
+            </a:r>
+            <a:r>
+              <a:rPr sz="1400" i="0" b="0">
+                <a:solidFill>
+                  <a:srgbClr val="D4D4D4"/>
+                </a:solidFill>
+                <a:latin typeface="Consolas"/>
+              </a:rPr>
+              <a:t>mensaje</a:t>
+            </a:r>
+            <a:r>
+              <a:rPr sz="1400" i="0" b="0">
+                <a:solidFill>
+                  <a:srgbClr val="D4D4D4"/>
+                </a:solidFill>
+                <a:latin typeface="Consolas"/>
+              </a:rPr>
+              <a:t> </a:t>
+            </a:r>
+            <a:r>
+              <a:rPr sz="1400" i="0" b="0">
+                <a:solidFill>
+                  <a:srgbClr val="4EC9B0"/>
+                </a:solidFill>
+                <a:latin typeface="Consolas"/>
+              </a:rPr>
+              <a:t>TEXT</a:t>
+            </a:r>
+            <a:r>
+              <a:rPr sz="1400" i="0" b="0">
+                <a:solidFill>
+                  <a:srgbClr val="D4D4D4"/>
+                </a:solidFill>
+                <a:latin typeface="Consolas"/>
+              </a:rPr>
+              <a:t>, </a:t>
+            </a:r>
+            <a:r>
+              <a:rPr sz="1400" i="0" b="0">
+                <a:solidFill>
+                  <a:srgbClr val="D4D4D4"/>
+                </a:solidFill>
+                <a:latin typeface="Consolas"/>
+              </a:rPr>
+              <a:t>id_generado</a:t>
+            </a:r>
+            <a:r>
+              <a:rPr sz="1400" i="0" b="0">
+                <a:solidFill>
+                  <a:srgbClr val="D4D4D4"/>
+                </a:solidFill>
+                <a:latin typeface="Consolas"/>
+              </a:rPr>
+              <a:t> </a:t>
+            </a:r>
+            <a:r>
+              <a:rPr sz="1400" i="0" b="0">
+                <a:solidFill>
+                  <a:srgbClr val="4EC9B0"/>
+                </a:solidFill>
+                <a:latin typeface="Consolas"/>
+              </a:rPr>
+              <a:t>INT</a:t>
+            </a:r>
+            <a:r>
+              <a:rPr sz="1400" i="0" b="0">
+                <a:solidFill>
+                  <a:srgbClr val="D4D4D4"/>
+                </a:solidFill>
+                <a:latin typeface="Consolas"/>
+              </a:rPr>
+              <a:t>)</a:t>
             </a:r>
           </a:p>
           <a:p>
             <a:pPr>
               <a:spcAft>
-                <a:spcPts val="800"/>
+                <a:spcPts val="300"/>
               </a:spcAft>
             </a:pPr>
             <a:r>
-              <a:rPr sz="2000" b="0" i="0">
-                <a:solidFill>
-                  <a:srgbClr val="333333"/>
-                </a:solidFill>
-                <a:latin typeface="Calibri"/>
-              </a:rPr>
-              <a:t>–   En un motor como Oracle sobre una red de oficina eso cuesta del orden de decenas de milisegundos, digamos entre 20 y 100 segun red y configuracion.</a:t>
-            </a:r>
-          </a:p>
-        </p:txBody>
-      </p:sp>
-      <p:sp>
-        <p:nvSpPr>
-          <p:cNvPr id="15" name="TextBox 14"/>
+              <a:rPr sz="1400" i="0" b="0">
+                <a:solidFill>
+                  <a:srgbClr val="569CD6"/>
+                </a:solidFill>
+                <a:latin typeface="Consolas"/>
+              </a:rPr>
+              <a:t>LANGUAGE</a:t>
+            </a:r>
+            <a:r>
+              <a:rPr sz="1400" i="0" b="0">
+                <a:solidFill>
+                  <a:srgbClr val="D4D4D4"/>
+                </a:solidFill>
+                <a:latin typeface="Consolas"/>
+              </a:rPr>
+              <a:t> </a:t>
+            </a:r>
+            <a:r>
+              <a:rPr sz="1400" i="0" b="0">
+                <a:solidFill>
+                  <a:srgbClr val="569CD6"/>
+                </a:solidFill>
+                <a:latin typeface="Consolas"/>
+              </a:rPr>
+              <a:t>plpgsql</a:t>
+            </a:r>
+            <a:r>
+              <a:rPr sz="1400" i="0" b="0">
+                <a:solidFill>
+                  <a:srgbClr val="D4D4D4"/>
+                </a:solidFill>
+                <a:latin typeface="Consolas"/>
+              </a:rPr>
+              <a:t> </a:t>
+            </a:r>
+            <a:r>
+              <a:rPr sz="1400" i="0" b="0">
+                <a:solidFill>
+                  <a:srgbClr val="569CD6"/>
+                </a:solidFill>
+                <a:latin typeface="Consolas"/>
+              </a:rPr>
+              <a:t>AS</a:t>
+            </a:r>
+            <a:r>
+              <a:rPr sz="1400" i="0" b="0">
+                <a:solidFill>
+                  <a:srgbClr val="D4D4D4"/>
+                </a:solidFill>
+                <a:latin typeface="Consolas"/>
+              </a:rPr>
+              <a:t> </a:t>
+            </a:r>
+            <a:r>
+              <a:rPr sz="1400" i="0" b="0">
+                <a:solidFill>
+                  <a:srgbClr val="569CD6"/>
+                </a:solidFill>
+                <a:latin typeface="Consolas"/>
+              </a:rPr>
+              <a:t>$fn$</a:t>
+            </a:r>
+          </a:p>
+          <a:p>
+            <a:pPr>
+              <a:spcAft>
+                <a:spcPts val="300"/>
+              </a:spcAft>
+            </a:pPr>
+            <a:r>
+              <a:rPr sz="1400" i="0" b="0">
+                <a:solidFill>
+                  <a:srgbClr val="569CD6"/>
+                </a:solidFill>
+                <a:latin typeface="Consolas"/>
+              </a:rPr>
+              <a:t>BEGIN</a:t>
+            </a:r>
+          </a:p>
+          <a:p>
+            <a:pPr>
+              <a:spcAft>
+                <a:spcPts val="300"/>
+              </a:spcAft>
+            </a:pPr>
+            <a:r>
+              <a:rPr sz="1400" i="0" b="0">
+                <a:solidFill>
+                  <a:srgbClr val="D4D4D4"/>
+                </a:solidFill>
+                <a:latin typeface="Consolas"/>
+              </a:rPr>
+              <a:t>  </a:t>
+            </a:r>
+            <a:r>
+              <a:rPr sz="1400" i="0" b="0">
+                <a:solidFill>
+                  <a:srgbClr val="569CD6"/>
+                </a:solidFill>
+                <a:latin typeface="Consolas"/>
+              </a:rPr>
+              <a:t>UPDATE</a:t>
+            </a:r>
+            <a:r>
+              <a:rPr sz="1400" i="0" b="0">
+                <a:solidFill>
+                  <a:srgbClr val="D4D4D4"/>
+                </a:solidFill>
+                <a:latin typeface="Consolas"/>
+              </a:rPr>
+              <a:t> </a:t>
+            </a:r>
+            <a:r>
+              <a:rPr sz="1400" i="0" b="0">
+                <a:solidFill>
+                  <a:srgbClr val="D4D4D4"/>
+                </a:solidFill>
+                <a:latin typeface="Consolas"/>
+              </a:rPr>
+              <a:t>cita</a:t>
+            </a:r>
+            <a:r>
+              <a:rPr sz="1400" i="0" b="0">
+                <a:solidFill>
+                  <a:srgbClr val="D4D4D4"/>
+                </a:solidFill>
+                <a:latin typeface="Consolas"/>
+              </a:rPr>
+              <a:t> </a:t>
+            </a:r>
+            <a:r>
+              <a:rPr sz="1400" i="0" b="0">
+                <a:solidFill>
+                  <a:srgbClr val="569CD6"/>
+                </a:solidFill>
+                <a:latin typeface="Consolas"/>
+              </a:rPr>
+              <a:t>SET</a:t>
+            </a:r>
+            <a:r>
+              <a:rPr sz="1400" i="0" b="0">
+                <a:solidFill>
+                  <a:srgbClr val="D4D4D4"/>
+                </a:solidFill>
+                <a:latin typeface="Consolas"/>
+              </a:rPr>
+              <a:t> </a:t>
+            </a:r>
+            <a:r>
+              <a:rPr sz="1400" i="0" b="0">
+                <a:solidFill>
+                  <a:srgbClr val="D4D4D4"/>
+                </a:solidFill>
+                <a:latin typeface="Consolas"/>
+              </a:rPr>
+              <a:t>estado</a:t>
+            </a:r>
+            <a:r>
+              <a:rPr sz="1400" i="0" b="0">
+                <a:solidFill>
+                  <a:srgbClr val="D4D4D4"/>
+                </a:solidFill>
+                <a:latin typeface="Consolas"/>
+              </a:rPr>
+              <a:t> = </a:t>
+            </a:r>
+            <a:r>
+              <a:rPr sz="1400" i="0" b="0">
+                <a:solidFill>
+                  <a:srgbClr val="CE9178"/>
+                </a:solidFill>
+                <a:latin typeface="Consolas"/>
+              </a:rPr>
+              <a:t>'CANCELADA'</a:t>
+            </a:r>
+          </a:p>
+          <a:p>
+            <a:pPr>
+              <a:spcAft>
+                <a:spcPts val="300"/>
+              </a:spcAft>
+            </a:pPr>
+            <a:r>
+              <a:rPr sz="1400" i="0" b="0">
+                <a:solidFill>
+                  <a:srgbClr val="D4D4D4"/>
+                </a:solidFill>
+                <a:latin typeface="Consolas"/>
+              </a:rPr>
+              <a:t>   </a:t>
+            </a:r>
+            <a:r>
+              <a:rPr sz="1400" i="0" b="0">
+                <a:solidFill>
+                  <a:srgbClr val="569CD6"/>
+                </a:solidFill>
+                <a:latin typeface="Consolas"/>
+              </a:rPr>
+              <a:t>WHERE</a:t>
+            </a:r>
+            <a:r>
+              <a:rPr sz="1400" i="0" b="0">
+                <a:solidFill>
+                  <a:srgbClr val="D4D4D4"/>
+                </a:solidFill>
+                <a:latin typeface="Consolas"/>
+              </a:rPr>
+              <a:t> </a:t>
+            </a:r>
+            <a:r>
+              <a:rPr sz="1400" i="0" b="0">
+                <a:solidFill>
+                  <a:srgbClr val="D4D4D4"/>
+                </a:solidFill>
+                <a:latin typeface="Consolas"/>
+              </a:rPr>
+              <a:t>id_cita</a:t>
+            </a:r>
+            <a:r>
+              <a:rPr sz="1400" i="0" b="0">
+                <a:solidFill>
+                  <a:srgbClr val="D4D4D4"/>
+                </a:solidFill>
+                <a:latin typeface="Consolas"/>
+              </a:rPr>
+              <a:t> = </a:t>
+            </a:r>
+            <a:r>
+              <a:rPr sz="1400" i="0" b="0">
+                <a:solidFill>
+                  <a:srgbClr val="D4D4D4"/>
+                </a:solidFill>
+                <a:latin typeface="Consolas"/>
+              </a:rPr>
+              <a:t>p_id_cita</a:t>
+            </a:r>
+            <a:r>
+              <a:rPr sz="1400" i="0" b="0">
+                <a:solidFill>
+                  <a:srgbClr val="D4D4D4"/>
+                </a:solidFill>
+                <a:latin typeface="Consolas"/>
+              </a:rPr>
+              <a:t> </a:t>
+            </a:r>
+            <a:r>
+              <a:rPr sz="1400" i="0" b="0">
+                <a:solidFill>
+                  <a:srgbClr val="569CD6"/>
+                </a:solidFill>
+                <a:latin typeface="Consolas"/>
+              </a:rPr>
+              <a:t>AND</a:t>
+            </a:r>
+            <a:r>
+              <a:rPr sz="1400" i="0" b="0">
+                <a:solidFill>
+                  <a:srgbClr val="D4D4D4"/>
+                </a:solidFill>
+                <a:latin typeface="Consolas"/>
+              </a:rPr>
+              <a:t> </a:t>
+            </a:r>
+            <a:r>
+              <a:rPr sz="1400" i="0" b="0">
+                <a:solidFill>
+                  <a:srgbClr val="D4D4D4"/>
+                </a:solidFill>
+                <a:latin typeface="Consolas"/>
+              </a:rPr>
+              <a:t>estado</a:t>
+            </a:r>
+            <a:r>
+              <a:rPr sz="1400" i="0" b="0">
+                <a:solidFill>
+                  <a:srgbClr val="D4D4D4"/>
+                </a:solidFill>
+                <a:latin typeface="Consolas"/>
+              </a:rPr>
+              <a:t> = </a:t>
+            </a:r>
+            <a:r>
+              <a:rPr sz="1400" i="0" b="0">
+                <a:solidFill>
+                  <a:srgbClr val="CE9178"/>
+                </a:solidFill>
+                <a:latin typeface="Consolas"/>
+              </a:rPr>
+              <a:t>'PROGRAMADA'</a:t>
+            </a:r>
+            <a:r>
+              <a:rPr sz="1400" i="0" b="0">
+                <a:solidFill>
+                  <a:srgbClr val="D4D4D4"/>
+                </a:solidFill>
+                <a:latin typeface="Consolas"/>
+              </a:rPr>
+              <a:t>;</a:t>
+            </a:r>
+          </a:p>
+          <a:p>
+            <a:pPr>
+              <a:spcAft>
+                <a:spcPts val="300"/>
+              </a:spcAft>
+            </a:pPr>
+            <a:r>
+              <a:rPr sz="1400" i="0" b="0">
+                <a:solidFill>
+                  <a:srgbClr val="D4D4D4"/>
+                </a:solidFill>
+                <a:latin typeface="Consolas"/>
+              </a:rPr>
+              <a:t>  </a:t>
+            </a:r>
+            <a:r>
+              <a:rPr sz="1400" i="0" b="0">
+                <a:solidFill>
+                  <a:srgbClr val="569CD6"/>
+                </a:solidFill>
+                <a:latin typeface="Consolas"/>
+              </a:rPr>
+              <a:t>IF</a:t>
+            </a:r>
+            <a:r>
+              <a:rPr sz="1400" i="0" b="0">
+                <a:solidFill>
+                  <a:srgbClr val="D4D4D4"/>
+                </a:solidFill>
+                <a:latin typeface="Consolas"/>
+              </a:rPr>
+              <a:t> </a:t>
+            </a:r>
+            <a:r>
+              <a:rPr sz="1400" i="0" b="0">
+                <a:solidFill>
+                  <a:srgbClr val="569CD6"/>
+                </a:solidFill>
+                <a:latin typeface="Consolas"/>
+              </a:rPr>
+              <a:t>NOT</a:t>
+            </a:r>
+            <a:r>
+              <a:rPr sz="1400" i="0" b="0">
+                <a:solidFill>
+                  <a:srgbClr val="D4D4D4"/>
+                </a:solidFill>
+                <a:latin typeface="Consolas"/>
+              </a:rPr>
+              <a:t> </a:t>
+            </a:r>
+            <a:r>
+              <a:rPr sz="1400" i="0" b="0">
+                <a:solidFill>
+                  <a:srgbClr val="569CD6"/>
+                </a:solidFill>
+                <a:latin typeface="Consolas"/>
+              </a:rPr>
+              <a:t>FOUND</a:t>
+            </a:r>
+            <a:r>
+              <a:rPr sz="1400" i="0" b="0">
+                <a:solidFill>
+                  <a:srgbClr val="D4D4D4"/>
+                </a:solidFill>
+                <a:latin typeface="Consolas"/>
+              </a:rPr>
+              <a:t> </a:t>
+            </a:r>
+            <a:r>
+              <a:rPr sz="1400" i="0" b="0">
+                <a:solidFill>
+                  <a:srgbClr val="569CD6"/>
+                </a:solidFill>
+                <a:latin typeface="Consolas"/>
+              </a:rPr>
+              <a:t>THEN</a:t>
+            </a:r>
+            <a:r>
+              <a:rPr sz="1400" i="0" b="0">
+                <a:solidFill>
+                  <a:srgbClr val="D4D4D4"/>
+                </a:solidFill>
+                <a:latin typeface="Consolas"/>
+              </a:rPr>
+              <a:t>         </a:t>
+            </a:r>
+            <a:r>
+              <a:rPr sz="1400" i="1" b="0">
+                <a:solidFill>
+                  <a:srgbClr val="6A9955"/>
+                </a:solidFill>
+                <a:latin typeface="Consolas"/>
+              </a:rPr>
+              <a:t>-- rechazo de negocio esperado: se devuelve</a:t>
+            </a:r>
+          </a:p>
+          <a:p>
+            <a:pPr>
+              <a:spcAft>
+                <a:spcPts val="300"/>
+              </a:spcAft>
+            </a:pPr>
+            <a:r>
+              <a:rPr sz="1400" i="0" b="0">
+                <a:solidFill>
+                  <a:srgbClr val="D4D4D4"/>
+                </a:solidFill>
+                <a:latin typeface="Consolas"/>
+              </a:rPr>
+              <a:t>    </a:t>
+            </a:r>
+            <a:r>
+              <a:rPr sz="1400" i="0" b="0">
+                <a:solidFill>
+                  <a:srgbClr val="569CD6"/>
+                </a:solidFill>
+                <a:latin typeface="Consolas"/>
+              </a:rPr>
+              <a:t>RETURN</a:t>
+            </a:r>
+            <a:r>
+              <a:rPr sz="1400" i="0" b="0">
+                <a:solidFill>
+                  <a:srgbClr val="D4D4D4"/>
+                </a:solidFill>
+                <a:latin typeface="Consolas"/>
+              </a:rPr>
+              <a:t> </a:t>
+            </a:r>
+            <a:r>
+              <a:rPr sz="1400" i="0" b="0">
+                <a:solidFill>
+                  <a:srgbClr val="D4D4D4"/>
+                </a:solidFill>
+                <a:latin typeface="Consolas"/>
+              </a:rPr>
+              <a:t>QUERY</a:t>
+            </a:r>
+            <a:r>
+              <a:rPr sz="1400" i="0" b="0">
+                <a:solidFill>
+                  <a:srgbClr val="D4D4D4"/>
+                </a:solidFill>
+                <a:latin typeface="Consolas"/>
+              </a:rPr>
+              <a:t> </a:t>
+            </a:r>
+            <a:r>
+              <a:rPr sz="1400" i="0" b="0">
+                <a:solidFill>
+                  <a:srgbClr val="569CD6"/>
+                </a:solidFill>
+                <a:latin typeface="Consolas"/>
+              </a:rPr>
+              <a:t>SELECT</a:t>
+            </a:r>
+            <a:r>
+              <a:rPr sz="1400" i="0" b="0">
+                <a:solidFill>
+                  <a:srgbClr val="D4D4D4"/>
+                </a:solidFill>
+                <a:latin typeface="Consolas"/>
+              </a:rPr>
+              <a:t> </a:t>
+            </a:r>
+            <a:r>
+              <a:rPr sz="1400" i="0" b="0">
+                <a:solidFill>
+                  <a:srgbClr val="569CD6"/>
+                </a:solidFill>
+                <a:latin typeface="Consolas"/>
+              </a:rPr>
+              <a:t>FALSE</a:t>
+            </a:r>
+            <a:r>
+              <a:rPr sz="1400" i="0" b="0">
+                <a:solidFill>
+                  <a:srgbClr val="D4D4D4"/>
+                </a:solidFill>
+                <a:latin typeface="Consolas"/>
+              </a:rPr>
+              <a:t>, </a:t>
+            </a:r>
+            <a:r>
+              <a:rPr sz="1400" i="0" b="0">
+                <a:solidFill>
+                  <a:srgbClr val="CE9178"/>
+                </a:solidFill>
+                <a:latin typeface="Consolas"/>
+              </a:rPr>
+              <a:t>'No se puede cancelar'</a:t>
+            </a:r>
+            <a:r>
+              <a:rPr sz="1400" i="0" b="0">
+                <a:solidFill>
+                  <a:srgbClr val="D4D4D4"/>
+                </a:solidFill>
+                <a:latin typeface="Consolas"/>
+              </a:rPr>
+              <a:t>, </a:t>
+            </a:r>
+            <a:r>
+              <a:rPr sz="1400" i="0" b="0">
+                <a:solidFill>
+                  <a:srgbClr val="569CD6"/>
+                </a:solidFill>
+                <a:latin typeface="Consolas"/>
+              </a:rPr>
+              <a:t>NULL</a:t>
+            </a:r>
+            <a:r>
+              <a:rPr sz="1400" i="0" b="0">
+                <a:solidFill>
+                  <a:srgbClr val="D4D4D4"/>
+                </a:solidFill>
+                <a:latin typeface="Consolas"/>
+              </a:rPr>
+              <a:t>::</a:t>
+            </a:r>
+            <a:r>
+              <a:rPr sz="1400" i="0" b="0">
+                <a:solidFill>
+                  <a:srgbClr val="4EC9B0"/>
+                </a:solidFill>
+                <a:latin typeface="Consolas"/>
+              </a:rPr>
+              <a:t>INT</a:t>
+            </a:r>
+            <a:r>
+              <a:rPr sz="1400" i="0" b="0">
+                <a:solidFill>
+                  <a:srgbClr val="D4D4D4"/>
+                </a:solidFill>
+                <a:latin typeface="Consolas"/>
+              </a:rPr>
+              <a:t>;</a:t>
+            </a:r>
+          </a:p>
+          <a:p>
+            <a:pPr>
+              <a:spcAft>
+                <a:spcPts val="300"/>
+              </a:spcAft>
+            </a:pPr>
+            <a:r>
+              <a:rPr sz="1400" i="0" b="0">
+                <a:solidFill>
+                  <a:srgbClr val="D4D4D4"/>
+                </a:solidFill>
+                <a:latin typeface="Consolas"/>
+              </a:rPr>
+              <a:t>    </a:t>
+            </a:r>
+            <a:r>
+              <a:rPr sz="1400" i="0" b="0">
+                <a:solidFill>
+                  <a:srgbClr val="569CD6"/>
+                </a:solidFill>
+                <a:latin typeface="Consolas"/>
+              </a:rPr>
+              <a:t>RETURN</a:t>
+            </a:r>
+            <a:r>
+              <a:rPr sz="1400" i="0" b="0">
+                <a:solidFill>
+                  <a:srgbClr val="D4D4D4"/>
+                </a:solidFill>
+                <a:latin typeface="Consolas"/>
+              </a:rPr>
+              <a:t>;</a:t>
+            </a:r>
+          </a:p>
+          <a:p>
+            <a:pPr>
+              <a:spcAft>
+                <a:spcPts val="300"/>
+              </a:spcAft>
+            </a:pPr>
+            <a:r>
+              <a:rPr sz="1400" i="0" b="0">
+                <a:solidFill>
+                  <a:srgbClr val="D4D4D4"/>
+                </a:solidFill>
+                <a:latin typeface="Consolas"/>
+              </a:rPr>
+              <a:t>  </a:t>
+            </a:r>
+            <a:r>
+              <a:rPr sz="1400" i="0" b="0">
+                <a:solidFill>
+                  <a:srgbClr val="569CD6"/>
+                </a:solidFill>
+                <a:latin typeface="Consolas"/>
+              </a:rPr>
+              <a:t>END</a:t>
+            </a:r>
+            <a:r>
+              <a:rPr sz="1400" i="0" b="0">
+                <a:solidFill>
+                  <a:srgbClr val="D4D4D4"/>
+                </a:solidFill>
+                <a:latin typeface="Consolas"/>
+              </a:rPr>
+              <a:t> </a:t>
+            </a:r>
+            <a:r>
+              <a:rPr sz="1400" i="0" b="0">
+                <a:solidFill>
+                  <a:srgbClr val="569CD6"/>
+                </a:solidFill>
+                <a:latin typeface="Consolas"/>
+              </a:rPr>
+              <a:t>IF</a:t>
+            </a:r>
+            <a:r>
+              <a:rPr sz="1400" i="0" b="0">
+                <a:solidFill>
+                  <a:srgbClr val="D4D4D4"/>
+                </a:solidFill>
+                <a:latin typeface="Consolas"/>
+              </a:rPr>
+              <a:t>;</a:t>
+            </a:r>
+          </a:p>
+          <a:p>
+            <a:pPr>
+              <a:spcAft>
+                <a:spcPts val="300"/>
+              </a:spcAft>
+            </a:pPr>
+            <a:r>
+              <a:rPr sz="1400" i="0" b="0">
+                <a:solidFill>
+                  <a:srgbClr val="D4D4D4"/>
+                </a:solidFill>
+                <a:latin typeface="Consolas"/>
+              </a:rPr>
+              <a:t>  </a:t>
+            </a:r>
+            <a:r>
+              <a:rPr sz="1400" i="0" b="0">
+                <a:solidFill>
+                  <a:srgbClr val="569CD6"/>
+                </a:solidFill>
+                <a:latin typeface="Consolas"/>
+              </a:rPr>
+              <a:t>RETURN</a:t>
+            </a:r>
+            <a:r>
+              <a:rPr sz="1400" i="0" b="0">
+                <a:solidFill>
+                  <a:srgbClr val="D4D4D4"/>
+                </a:solidFill>
+                <a:latin typeface="Consolas"/>
+              </a:rPr>
+              <a:t> </a:t>
+            </a:r>
+            <a:r>
+              <a:rPr sz="1400" i="0" b="0">
+                <a:solidFill>
+                  <a:srgbClr val="D4D4D4"/>
+                </a:solidFill>
+                <a:latin typeface="Consolas"/>
+              </a:rPr>
+              <a:t>QUERY</a:t>
+            </a:r>
+            <a:r>
+              <a:rPr sz="1400" i="0" b="0">
+                <a:solidFill>
+                  <a:srgbClr val="D4D4D4"/>
+                </a:solidFill>
+                <a:latin typeface="Consolas"/>
+              </a:rPr>
+              <a:t> </a:t>
+            </a:r>
+            <a:r>
+              <a:rPr sz="1400" i="0" b="0">
+                <a:solidFill>
+                  <a:srgbClr val="569CD6"/>
+                </a:solidFill>
+                <a:latin typeface="Consolas"/>
+              </a:rPr>
+              <a:t>SELECT</a:t>
+            </a:r>
+            <a:r>
+              <a:rPr sz="1400" i="0" b="0">
+                <a:solidFill>
+                  <a:srgbClr val="D4D4D4"/>
+                </a:solidFill>
+                <a:latin typeface="Consolas"/>
+              </a:rPr>
+              <a:t> </a:t>
+            </a:r>
+            <a:r>
+              <a:rPr sz="1400" i="0" b="0">
+                <a:solidFill>
+                  <a:srgbClr val="569CD6"/>
+                </a:solidFill>
+                <a:latin typeface="Consolas"/>
+              </a:rPr>
+              <a:t>TRUE</a:t>
+            </a:r>
+            <a:r>
+              <a:rPr sz="1400" i="0" b="0">
+                <a:solidFill>
+                  <a:srgbClr val="D4D4D4"/>
+                </a:solidFill>
+                <a:latin typeface="Consolas"/>
+              </a:rPr>
+              <a:t>, </a:t>
+            </a:r>
+            <a:r>
+              <a:rPr sz="1400" i="0" b="0">
+                <a:solidFill>
+                  <a:srgbClr val="CE9178"/>
+                </a:solidFill>
+                <a:latin typeface="Consolas"/>
+              </a:rPr>
+              <a:t>'Cita cancelada'</a:t>
+            </a:r>
+            <a:r>
+              <a:rPr sz="1400" i="0" b="0">
+                <a:solidFill>
+                  <a:srgbClr val="D4D4D4"/>
+                </a:solidFill>
+                <a:latin typeface="Consolas"/>
+              </a:rPr>
+              <a:t>, </a:t>
+            </a:r>
+            <a:r>
+              <a:rPr sz="1400" i="0" b="0">
+                <a:solidFill>
+                  <a:srgbClr val="D4D4D4"/>
+                </a:solidFill>
+                <a:latin typeface="Consolas"/>
+              </a:rPr>
+              <a:t>p_id_cita</a:t>
+            </a:r>
+            <a:r>
+              <a:rPr sz="1400" i="0" b="0">
+                <a:solidFill>
+                  <a:srgbClr val="D4D4D4"/>
+                </a:solidFill>
+                <a:latin typeface="Consolas"/>
+              </a:rPr>
+              <a:t>;</a:t>
+            </a:r>
+          </a:p>
+          <a:p>
+            <a:pPr>
+              <a:spcAft>
+                <a:spcPts val="300"/>
+              </a:spcAft>
+            </a:pPr>
+            <a:r>
+              <a:rPr sz="1400" i="0" b="0">
+                <a:solidFill>
+                  <a:srgbClr val="569CD6"/>
+                </a:solidFill>
+                <a:latin typeface="Consolas"/>
+              </a:rPr>
+              <a:t>EXCEPTION</a:t>
+            </a:r>
+            <a:r>
+              <a:rPr sz="1400" i="0" b="0">
+                <a:solidFill>
+                  <a:srgbClr val="D4D4D4"/>
+                </a:solidFill>
+                <a:latin typeface="Consolas"/>
+              </a:rPr>
+              <a:t> </a:t>
+            </a:r>
+            <a:r>
+              <a:rPr sz="1400" i="0" b="0">
+                <a:solidFill>
+                  <a:srgbClr val="569CD6"/>
+                </a:solidFill>
+                <a:latin typeface="Consolas"/>
+              </a:rPr>
+              <a:t>WHEN</a:t>
+            </a:r>
+            <a:r>
+              <a:rPr sz="1400" i="0" b="0">
+                <a:solidFill>
+                  <a:srgbClr val="D4D4D4"/>
+                </a:solidFill>
+                <a:latin typeface="Consolas"/>
+              </a:rPr>
+              <a:t> </a:t>
+            </a:r>
+            <a:r>
+              <a:rPr sz="1400" i="0" b="0">
+                <a:solidFill>
+                  <a:srgbClr val="D4D4D4"/>
+                </a:solidFill>
+                <a:latin typeface="Consolas"/>
+              </a:rPr>
+              <a:t>OTHERS</a:t>
+            </a:r>
+            <a:r>
+              <a:rPr sz="1400" i="0" b="0">
+                <a:solidFill>
+                  <a:srgbClr val="D4D4D4"/>
+                </a:solidFill>
+                <a:latin typeface="Consolas"/>
+              </a:rPr>
+              <a:t> </a:t>
+            </a:r>
+            <a:r>
+              <a:rPr sz="1400" i="0" b="0">
+                <a:solidFill>
+                  <a:srgbClr val="569CD6"/>
+                </a:solidFill>
+                <a:latin typeface="Consolas"/>
+              </a:rPr>
+              <a:t>THEN</a:t>
+            </a:r>
+            <a:r>
+              <a:rPr sz="1400" i="0" b="0">
+                <a:solidFill>
+                  <a:srgbClr val="D4D4D4"/>
+                </a:solidFill>
+                <a:latin typeface="Consolas"/>
+              </a:rPr>
+              <a:t>  </a:t>
+            </a:r>
+            <a:r>
+              <a:rPr sz="1400" i="1" b="0">
+                <a:solidFill>
+                  <a:srgbClr val="6A9955"/>
+                </a:solidFill>
+                <a:latin typeface="Consolas"/>
+              </a:rPr>
+              <a:t>-- lo inesperado: se deshace y se informa</a:t>
+            </a:r>
+          </a:p>
+          <a:p>
+            <a:pPr>
+              <a:spcAft>
+                <a:spcPts val="300"/>
+              </a:spcAft>
+            </a:pPr>
+            <a:r>
+              <a:rPr sz="1400" i="0" b="0">
+                <a:solidFill>
+                  <a:srgbClr val="D4D4D4"/>
+                </a:solidFill>
+                <a:latin typeface="Consolas"/>
+              </a:rPr>
+              <a:t>  </a:t>
+            </a:r>
+            <a:r>
+              <a:rPr sz="1400" i="0" b="0">
+                <a:solidFill>
+                  <a:srgbClr val="569CD6"/>
+                </a:solidFill>
+                <a:latin typeface="Consolas"/>
+              </a:rPr>
+              <a:t>RETURN</a:t>
+            </a:r>
+            <a:r>
+              <a:rPr sz="1400" i="0" b="0">
+                <a:solidFill>
+                  <a:srgbClr val="D4D4D4"/>
+                </a:solidFill>
+                <a:latin typeface="Consolas"/>
+              </a:rPr>
+              <a:t> </a:t>
+            </a:r>
+            <a:r>
+              <a:rPr sz="1400" i="0" b="0">
+                <a:solidFill>
+                  <a:srgbClr val="D4D4D4"/>
+                </a:solidFill>
+                <a:latin typeface="Consolas"/>
+              </a:rPr>
+              <a:t>QUERY</a:t>
+            </a:r>
+            <a:r>
+              <a:rPr sz="1400" i="0" b="0">
+                <a:solidFill>
+                  <a:srgbClr val="D4D4D4"/>
+                </a:solidFill>
+                <a:latin typeface="Consolas"/>
+              </a:rPr>
+              <a:t> </a:t>
+            </a:r>
+            <a:r>
+              <a:rPr sz="1400" i="0" b="0">
+                <a:solidFill>
+                  <a:srgbClr val="569CD6"/>
+                </a:solidFill>
+                <a:latin typeface="Consolas"/>
+              </a:rPr>
+              <a:t>SELECT</a:t>
+            </a:r>
+            <a:r>
+              <a:rPr sz="1400" i="0" b="0">
+                <a:solidFill>
+                  <a:srgbClr val="D4D4D4"/>
+                </a:solidFill>
+                <a:latin typeface="Consolas"/>
+              </a:rPr>
+              <a:t> </a:t>
+            </a:r>
+            <a:r>
+              <a:rPr sz="1400" i="0" b="0">
+                <a:solidFill>
+                  <a:srgbClr val="569CD6"/>
+                </a:solidFill>
+                <a:latin typeface="Consolas"/>
+              </a:rPr>
+              <a:t>FALSE</a:t>
+            </a:r>
+            <a:r>
+              <a:rPr sz="1400" i="0" b="0">
+                <a:solidFill>
+                  <a:srgbClr val="D4D4D4"/>
+                </a:solidFill>
+                <a:latin typeface="Consolas"/>
+              </a:rPr>
+              <a:t>, </a:t>
+            </a:r>
+            <a:r>
+              <a:rPr sz="1400" i="0" b="0">
+                <a:solidFill>
+                  <a:srgbClr val="D4D4D4"/>
+                </a:solidFill>
+                <a:latin typeface="Consolas"/>
+              </a:rPr>
+              <a:t>SQLERRM</a:t>
+            </a:r>
+            <a:r>
+              <a:rPr sz="1400" i="0" b="0">
+                <a:solidFill>
+                  <a:srgbClr val="D4D4D4"/>
+                </a:solidFill>
+                <a:latin typeface="Consolas"/>
+              </a:rPr>
+              <a:t>, </a:t>
+            </a:r>
+            <a:r>
+              <a:rPr sz="1400" i="0" b="0">
+                <a:solidFill>
+                  <a:srgbClr val="569CD6"/>
+                </a:solidFill>
+                <a:latin typeface="Consolas"/>
+              </a:rPr>
+              <a:t>NULL</a:t>
+            </a:r>
+            <a:r>
+              <a:rPr sz="1400" i="0" b="0">
+                <a:solidFill>
+                  <a:srgbClr val="D4D4D4"/>
+                </a:solidFill>
+                <a:latin typeface="Consolas"/>
+              </a:rPr>
+              <a:t>::</a:t>
+            </a:r>
+            <a:r>
+              <a:rPr sz="1400" i="0" b="0">
+                <a:solidFill>
+                  <a:srgbClr val="4EC9B0"/>
+                </a:solidFill>
+                <a:latin typeface="Consolas"/>
+              </a:rPr>
+              <a:t>INT</a:t>
+            </a:r>
+            <a:r>
+              <a:rPr sz="1400" i="0" b="0">
+                <a:solidFill>
+                  <a:srgbClr val="D4D4D4"/>
+                </a:solidFill>
+                <a:latin typeface="Consolas"/>
+              </a:rPr>
+              <a:t>;</a:t>
+            </a:r>
+          </a:p>
+          <a:p>
+            <a:pPr>
+              <a:spcAft>
+                <a:spcPts val="300"/>
+              </a:spcAft>
+            </a:pPr>
+            <a:r>
+              <a:rPr sz="1400" i="0" b="0">
+                <a:solidFill>
+                  <a:srgbClr val="569CD6"/>
+                </a:solidFill>
+                <a:latin typeface="Consolas"/>
+              </a:rPr>
+              <a:t>END</a:t>
+            </a:r>
+            <a:r>
+              <a:rPr sz="1400" i="0" b="0">
+                <a:solidFill>
+                  <a:srgbClr val="D4D4D4"/>
+                </a:solidFill>
+                <a:latin typeface="Consolas"/>
+              </a:rPr>
+              <a:t>; </a:t>
+            </a:r>
+            <a:r>
+              <a:rPr sz="1400" i="0" b="0">
+                <a:solidFill>
+                  <a:srgbClr val="569CD6"/>
+                </a:solidFill>
+                <a:latin typeface="Consolas"/>
+              </a:rPr>
+              <a:t>$fn$</a:t>
+            </a:r>
+            <a:r>
+              <a:rPr sz="1400" i="0" b="0">
+                <a:solidFill>
+                  <a:srgbClr val="D4D4D4"/>
+                </a:solidFill>
+                <a:latin typeface="Consolas"/>
+              </a:rPr>
+              <a:t>;</a:t>
+            </a:r>
+          </a:p>
+          <a:p>
+            <a:pPr>
+              <a:spcAft>
+                <a:spcPts val="300"/>
+              </a:spcAft>
+            </a:pPr>
+            <a:r>
+              <a:rPr sz="1400" i="0" b="0">
+                <a:solidFill>
+                  <a:srgbClr val="D4D4D4"/>
+                </a:solidFill>
+                <a:latin typeface="Consolas"/>
+              </a:rPr>
+              <a:t/>
+            </a:r>
+          </a:p>
+          <a:p>
+            <a:pPr>
+              <a:spcAft>
+                <a:spcPts val="300"/>
+              </a:spcAft>
+            </a:pPr>
+            <a:r>
+              <a:rPr sz="1400" i="0" b="0">
+                <a:solidFill>
+                  <a:srgbClr val="569CD6"/>
+                </a:solidFill>
+                <a:latin typeface="Consolas"/>
+              </a:rPr>
+              <a:t>SELECT</a:t>
+            </a:r>
+            <a:r>
+              <a:rPr sz="1400" i="0" b="0">
+                <a:solidFill>
+                  <a:srgbClr val="D4D4D4"/>
+                </a:solidFill>
+                <a:latin typeface="Consolas"/>
+              </a:rPr>
+              <a:t> * </a:t>
+            </a:r>
+            <a:r>
+              <a:rPr sz="1400" i="0" b="0">
+                <a:solidFill>
+                  <a:srgbClr val="569CD6"/>
+                </a:solidFill>
+                <a:latin typeface="Consolas"/>
+              </a:rPr>
+              <a:t>FROM</a:t>
+            </a:r>
+            <a:r>
+              <a:rPr sz="1400" i="0" b="0">
+                <a:solidFill>
+                  <a:srgbClr val="D4D4D4"/>
+                </a:solidFill>
+                <a:latin typeface="Consolas"/>
+              </a:rPr>
+              <a:t> </a:t>
+            </a:r>
+            <a:r>
+              <a:rPr sz="1400" i="0" b="0">
+                <a:solidFill>
+                  <a:srgbClr val="DCDCAA"/>
+                </a:solidFill>
+                <a:latin typeface="Consolas"/>
+              </a:rPr>
+              <a:t>api_cancelar_cita</a:t>
+            </a:r>
+            <a:r>
+              <a:rPr sz="1400" i="0" b="0">
+                <a:solidFill>
+                  <a:srgbClr val="D4D4D4"/>
+                </a:solidFill>
+                <a:latin typeface="Consolas"/>
+              </a:rPr>
+              <a:t>(</a:t>
+            </a:r>
+            <a:r>
+              <a:rPr sz="1400" i="0" b="0">
+                <a:solidFill>
+                  <a:srgbClr val="B5CEA8"/>
+                </a:solidFill>
+                <a:latin typeface="Consolas"/>
+              </a:rPr>
+              <a:t>3</a:t>
+            </a:r>
+            <a:r>
+              <a:rPr sz="1400" i="0" b="0">
+                <a:solidFill>
+                  <a:srgbClr val="D4D4D4"/>
+                </a:solidFill>
+                <a:latin typeface="Consolas"/>
+              </a:rPr>
+              <a:t>);   </a:t>
+            </a:r>
+            <a:r>
+              <a:rPr sz="1400" i="1" b="0">
+                <a:solidFill>
+                  <a:srgbClr val="6A9955"/>
+                </a:solidFill>
+                <a:latin typeface="Consolas"/>
+              </a:rPr>
+              <a:t>-- t | Cita cancelada       | 3</a:t>
+            </a:r>
+          </a:p>
+          <a:p>
+            <a:pPr>
+              <a:spcAft>
+                <a:spcPts val="300"/>
+              </a:spcAft>
+            </a:pPr>
+            <a:r>
+              <a:rPr sz="1400" i="0" b="0">
+                <a:solidFill>
+                  <a:srgbClr val="569CD6"/>
+                </a:solidFill>
+                <a:latin typeface="Consolas"/>
+              </a:rPr>
+              <a:t>SELECT</a:t>
+            </a:r>
+            <a:r>
+              <a:rPr sz="1400" i="0" b="0">
+                <a:solidFill>
+                  <a:srgbClr val="D4D4D4"/>
+                </a:solidFill>
+                <a:latin typeface="Consolas"/>
+              </a:rPr>
+              <a:t> * </a:t>
+            </a:r>
+            <a:r>
+              <a:rPr sz="1400" i="0" b="0">
+                <a:solidFill>
+                  <a:srgbClr val="569CD6"/>
+                </a:solidFill>
+                <a:latin typeface="Consolas"/>
+              </a:rPr>
+              <a:t>FROM</a:t>
+            </a:r>
+            <a:r>
+              <a:rPr sz="1400" i="0" b="0">
+                <a:solidFill>
+                  <a:srgbClr val="D4D4D4"/>
+                </a:solidFill>
+                <a:latin typeface="Consolas"/>
+              </a:rPr>
+              <a:t> </a:t>
+            </a:r>
+            <a:r>
+              <a:rPr sz="1400" i="0" b="0">
+                <a:solidFill>
+                  <a:srgbClr val="DCDCAA"/>
+                </a:solidFill>
+                <a:latin typeface="Consolas"/>
+              </a:rPr>
+              <a:t>api_cancelar_cita</a:t>
+            </a:r>
+            <a:r>
+              <a:rPr sz="1400" i="0" b="0">
+                <a:solidFill>
+                  <a:srgbClr val="D4D4D4"/>
+                </a:solidFill>
+                <a:latin typeface="Consolas"/>
+              </a:rPr>
+              <a:t>(</a:t>
+            </a:r>
+            <a:r>
+              <a:rPr sz="1400" i="0" b="0">
+                <a:solidFill>
+                  <a:srgbClr val="B5CEA8"/>
+                </a:solidFill>
+                <a:latin typeface="Consolas"/>
+              </a:rPr>
+              <a:t>3</a:t>
+            </a:r>
+            <a:r>
+              <a:rPr sz="1400" i="0" b="0">
+                <a:solidFill>
+                  <a:srgbClr val="D4D4D4"/>
+                </a:solidFill>
+                <a:latin typeface="Consolas"/>
+              </a:rPr>
+              <a:t>);   </a:t>
+            </a:r>
+            <a:r>
+              <a:rPr sz="1400" i="1" b="0">
+                <a:solidFill>
+                  <a:srgbClr val="6A9955"/>
+                </a:solidFill>
+                <a:latin typeface="Consolas"/>
+              </a:rPr>
+              <a:t>-- f | No se puede cancelar | NULL</a:t>
+            </a:r>
+          </a:p>
+        </p:txBody>
+      </p:sp>
+      <p:sp>
+        <p:nvSpPr>
+          <p:cNvPr id="13" name="TextBox 12"/>
           <p:cNvSpPr txBox="1"/>
           <p:nvPr/>
         </p:nvSpPr>
@@ -6816,142 +9796,6 @@
   <p:clrMapOvr>
     <a:masterClrMapping/>
   </p:clrMapOvr>
-  <p:timing>
-    <p:tnLst>
-      <p:par>
-        <p:cTn id="1" dur="indefinite" restart="never" nodeType="tmRoot">
-          <p:childTnLst>
-            <p:seq concurrent="1" nextAc="seek">
-              <p:cTn id="2" dur="indefinite" nodeType="mainSeq">
-                <p:childTnLst>
-                  <p:par>
-                    <p:cTn id="3" fill="hold">
-                      <p:stCondLst>
-                        <p:cond delay="indefinite"/>
-                      </p:stCondLst>
-                      <p:childTnLst>
-                        <p:par>
-                          <p:cTn id="4" fill="hold">
-                            <p:stCondLst>
-                              <p:cond delay="0"/>
-                            </p:stCondLst>
-                            <p:childTnLst>
-                              <p:par>
-                                <p:cTn id="5" presetID="10" presetClass="entr" presetSubtype="0" fill="hold" nodeType="clickEffect">
-                                  <p:stCondLst>
-                                    <p:cond delay="0"/>
-                                  </p:stCondLst>
-                                  <p:childTnLst>
-                                    <p:set>
-                                      <p:cBhvr>
-                                        <p:cTn id="6" dur="1" fill="hold">
-                                          <p:stCondLst>
-                                            <p:cond delay="0"/>
-                                          </p:stCondLst>
-                                        </p:cTn>
-                                        <p:tgtEl>
-                                          <p:spTgt spid="7"/>
-                                        </p:tgtEl>
-                                        <p:attrNameLst>
-                                          <p:attrName>style.visibility</p:attrName>
-                                        </p:attrNameLst>
-                                      </p:cBhvr>
-                                      <p:to>
-                                        <p:strVal val="visible"/>
-                                      </p:to>
-                                    </p:set>
-                                    <p:animEffect transition="in" filter="fade">
-                                      <p:cBhvr>
-                                        <p:cTn id="7" dur="450"/>
-                                        <p:tgtEl>
-                                          <p:spTgt spid="7"/>
-                                        </p:tgtEl>
-                                      </p:cBhvr>
-                                    </p:animEffect>
-                                  </p:childTnLst>
-                                </p:cTn>
-                              </p:par>
-                            </p:childTnLst>
-                          </p:cTn>
-                        </p:par>
-                      </p:childTnLst>
-                    </p:cTn>
-                  </p:par>
-                  <p:par>
-                    <p:cTn id="8" fill="hold">
-                      <p:stCondLst>
-                        <p:cond delay="indefinite"/>
-                      </p:stCondLst>
-                      <p:childTnLst>
-                        <p:par>
-                          <p:cTn id="9" fill="hold">
-                            <p:stCondLst>
-                              <p:cond delay="0"/>
-                            </p:stCondLst>
-                            <p:childTnLst>
-                              <p:par>
-                                <p:cTn id="10" presetID="10" presetClass="entr" presetSubtype="0" fill="hold" nodeType="clickEffect">
-                                  <p:stCondLst>
-                                    <p:cond delay="0"/>
-                                  </p:stCondLst>
-                                  <p:childTnLst>
-                                    <p:set>
-                                      <p:cBhvr>
-                                        <p:cTn id="11" dur="1" fill="hold">
-                                          <p:stCondLst>
-                                            <p:cond delay="0"/>
-                                          </p:stCondLst>
-                                        </p:cTn>
-                                        <p:tgtEl>
-                                          <p:spTgt spid="8"/>
-                                        </p:tgtEl>
-                                        <p:attrNameLst>
-                                          <p:attrName>style.visibility</p:attrName>
-                                        </p:attrNameLst>
-                                      </p:cBhvr>
-                                      <p:to>
-                                        <p:strVal val="visible"/>
-                                      </p:to>
-                                    </p:set>
-                                    <p:animEffect transition="in" filter="fade">
-                                      <p:cBhvr>
-                                        <p:cTn id="12" dur="450"/>
-                                        <p:tgtEl>
-                                          <p:spTgt spid="8"/>
-                                        </p:tgtEl>
-                                      </p:cBhvr>
-                                    </p:animEffect>
-                                  </p:childTnLst>
-                                </p:cTn>
-                              </p:par>
-                            </p:childTnLst>
-                          </p:cTn>
-                        </p:par>
-                      </p:childTnLst>
-                    </p:cTn>
-                  </p:par>
-                </p:childTnLst>
-              </p:cTn>
-              <p:prevCondLst>
-                <p:cond evt="onPrev" delay="0">
-                  <p:tgtEl>
-                    <p:sldTgt/>
-                  </p:tgtEl>
-                </p:cond>
-              </p:prevCondLst>
-              <p:nextCondLst>
-                <p:cond evt="onNext" delay="0">
-                  <p:tgtEl>
-                    <p:sldTgt/>
-                  </p:tgtEl>
-                </p:cond>
-              </p:nextCondLst>
-            </p:seq>
-          </p:childTnLst>
-        </p:cTn>
-      </p:par>
-    </p:tnLst>
-  </p:timing>
 </p:sld>
 </file>
 
@@ -7088,7 +9932,7 @@
                 </a:solidFill>
                 <a:latin typeface="Calibri"/>
               </a:rPr>
-              <a:t>Logica en la base o en la aplicacion: honestidad y no propaganda</a:t>
+              <a:t>El flujo de la operacion en sequenceDiagram, con alt y else</a:t>
             </a:r>
           </a:p>
         </p:txBody>
@@ -7101,8 +9945,8 @@
         </p:nvSpPr>
         <p:spPr>
           <a:xfrm>
-            <a:off x="5803166" y="1188719"/>
-            <a:ext cx="5998464" cy="4828032"/>
+            <a:off x="457200" y="1261872"/>
+            <a:ext cx="11277295" cy="5069443"/>
           </a:xfrm>
           <a:prstGeom prst="roundRect">
             <a:avLst>
@@ -7110,7 +9954,7 @@
             </a:avLst>
           </a:prstGeom>
           <a:solidFill>
-            <a:srgbClr val="E8EEF4"/>
+            <a:srgbClr val="1E1E1E"/>
           </a:solidFill>
           <a:ln>
             <a:noFill/>
@@ -7138,88 +9982,188 @@
           </a:p>
         </p:txBody>
       </p:sp>
-      <p:pic>
-        <p:nvPicPr>
-          <p:cNvPr id="6" name="Picture 5" descr="logica-base-app-paso1.png"/>
-          <p:cNvPicPr>
-            <a:picLocks noChangeAspect="1"/>
-          </p:cNvPicPr>
+      <p:sp>
+        <p:nvSpPr>
+          <p:cNvPr id="6" name="Rectangle 5"/>
+          <p:cNvSpPr/>
           <p:nvPr/>
-        </p:nvPicPr>
-        <p:blipFill>
-          <a:blip r:embed="rId2"/>
-          <a:stretch>
-            <a:fillRect/>
-          </a:stretch>
-        </p:blipFill>
-        <p:spPr>
-          <a:xfrm>
-            <a:off x="5876318" y="1261872"/>
-            <a:ext cx="5852160" cy="4681728"/>
+        </p:nvSpPr>
+        <p:spPr>
+          <a:xfrm>
+            <a:off x="457200" y="1261872"/>
+            <a:ext cx="11277295" cy="365760"/>
           </a:xfrm>
           <a:prstGeom prst="rect">
             <a:avLst/>
           </a:prstGeom>
-        </p:spPr>
-      </p:pic>
-      <p:pic>
-        <p:nvPicPr>
-          <p:cNvPr id="7" name="Picture 6" descr="logica-base-app-paso2.png"/>
-          <p:cNvPicPr>
-            <a:picLocks noChangeAspect="1"/>
-          </p:cNvPicPr>
+          <a:solidFill>
+            <a:srgbClr val="2D2D30"/>
+          </a:solidFill>
+          <a:ln>
+            <a:noFill/>
+          </a:ln>
+        </p:spPr>
+        <p:style>
+          <a:lnRef idx="1">
+            <a:schemeClr val="accent1"/>
+          </a:lnRef>
+          <a:fillRef idx="3">
+            <a:schemeClr val="accent1"/>
+          </a:fillRef>
+          <a:effectRef idx="2">
+            <a:schemeClr val="accent1"/>
+          </a:effectRef>
+          <a:fontRef idx="minor">
+            <a:schemeClr val="lt1"/>
+          </a:fontRef>
+        </p:style>
+        <p:txBody>
+          <a:bodyPr rtlCol="0" anchor="ctr"/>
+          <a:lstStyle/>
+          <a:p>
+            <a:pPr algn="ctr"/>
+          </a:p>
+        </p:txBody>
+      </p:sp>
+      <p:sp>
+        <p:nvSpPr>
+          <p:cNvPr id="7" name="Oval 6"/>
+          <p:cNvSpPr/>
           <p:nvPr/>
-        </p:nvPicPr>
-        <p:blipFill>
-          <a:blip r:embed="rId3"/>
-          <a:stretch>
-            <a:fillRect/>
-          </a:stretch>
-        </p:blipFill>
-        <p:spPr>
-          <a:xfrm>
-            <a:off x="5876318" y="1261872"/>
-            <a:ext cx="5852160" cy="4681728"/>
-          </a:xfrm>
-          <a:prstGeom prst="rect">
+        </p:nvSpPr>
+        <p:spPr>
+          <a:xfrm>
+            <a:off x="658368" y="1380743"/>
+            <a:ext cx="128016" cy="128016"/>
+          </a:xfrm>
+          <a:prstGeom prst="ellipse">
             <a:avLst/>
           </a:prstGeom>
-        </p:spPr>
-      </p:pic>
-      <p:pic>
-        <p:nvPicPr>
-          <p:cNvPr id="8" name="Picture 7" descr="logica-base-app-paso3.png"/>
-          <p:cNvPicPr>
-            <a:picLocks noChangeAspect="1"/>
-          </p:cNvPicPr>
+          <a:solidFill>
+            <a:srgbClr val="FF5F56"/>
+          </a:solidFill>
+          <a:ln>
+            <a:noFill/>
+          </a:ln>
+        </p:spPr>
+        <p:style>
+          <a:lnRef idx="1">
+            <a:schemeClr val="accent1"/>
+          </a:lnRef>
+          <a:fillRef idx="3">
+            <a:schemeClr val="accent1"/>
+          </a:fillRef>
+          <a:effectRef idx="2">
+            <a:schemeClr val="accent1"/>
+          </a:effectRef>
+          <a:fontRef idx="minor">
+            <a:schemeClr val="lt1"/>
+          </a:fontRef>
+        </p:style>
+        <p:txBody>
+          <a:bodyPr rtlCol="0" anchor="ctr"/>
+          <a:lstStyle/>
+          <a:p>
+            <a:pPr algn="ctr"/>
+          </a:p>
+        </p:txBody>
+      </p:sp>
+      <p:sp>
+        <p:nvSpPr>
+          <p:cNvPr id="8" name="Oval 7"/>
+          <p:cNvSpPr/>
           <p:nvPr/>
-        </p:nvPicPr>
-        <p:blipFill>
-          <a:blip r:embed="rId4"/>
-          <a:stretch>
-            <a:fillRect/>
-          </a:stretch>
-        </p:blipFill>
-        <p:spPr>
-          <a:xfrm>
-            <a:off x="5876318" y="1261872"/>
-            <a:ext cx="5852160" cy="4681728"/>
-          </a:xfrm>
-          <a:prstGeom prst="rect">
+        </p:nvSpPr>
+        <p:spPr>
+          <a:xfrm>
+            <a:off x="877824" y="1380743"/>
+            <a:ext cx="128016" cy="128016"/>
+          </a:xfrm>
+          <a:prstGeom prst="ellipse">
             <a:avLst/>
           </a:prstGeom>
-        </p:spPr>
-      </p:pic>
-      <p:sp>
-        <p:nvSpPr>
-          <p:cNvPr id="13" name="TextBox 12"/>
+          <a:solidFill>
+            <a:srgbClr val="FFBD2E"/>
+          </a:solidFill>
+          <a:ln>
+            <a:noFill/>
+          </a:ln>
+        </p:spPr>
+        <p:style>
+          <a:lnRef idx="1">
+            <a:schemeClr val="accent1"/>
+          </a:lnRef>
+          <a:fillRef idx="3">
+            <a:schemeClr val="accent1"/>
+          </a:fillRef>
+          <a:effectRef idx="2">
+            <a:schemeClr val="accent1"/>
+          </a:effectRef>
+          <a:fontRef idx="minor">
+            <a:schemeClr val="lt1"/>
+          </a:fontRef>
+        </p:style>
+        <p:txBody>
+          <a:bodyPr rtlCol="0" anchor="ctr"/>
+          <a:lstStyle/>
+          <a:p>
+            <a:pPr algn="ctr"/>
+          </a:p>
+        </p:txBody>
+      </p:sp>
+      <p:sp>
+        <p:nvSpPr>
+          <p:cNvPr id="9" name="Oval 8"/>
+          <p:cNvSpPr/>
+          <p:nvPr/>
+        </p:nvSpPr>
+        <p:spPr>
+          <a:xfrm>
+            <a:off x="1097280" y="1380743"/>
+            <a:ext cx="128016" cy="128016"/>
+          </a:xfrm>
+          <a:prstGeom prst="ellipse">
+            <a:avLst/>
+          </a:prstGeom>
+          <a:solidFill>
+            <a:srgbClr val="27C93F"/>
+          </a:solidFill>
+          <a:ln>
+            <a:noFill/>
+          </a:ln>
+        </p:spPr>
+        <p:style>
+          <a:lnRef idx="1">
+            <a:schemeClr val="accent1"/>
+          </a:lnRef>
+          <a:fillRef idx="3">
+            <a:schemeClr val="accent1"/>
+          </a:fillRef>
+          <a:effectRef idx="2">
+            <a:schemeClr val="accent1"/>
+          </a:effectRef>
+          <a:fontRef idx="minor">
+            <a:schemeClr val="lt1"/>
+          </a:fontRef>
+        </p:style>
+        <p:txBody>
+          <a:bodyPr rtlCol="0" anchor="ctr"/>
+          <a:lstStyle/>
+          <a:p>
+            <a:pPr algn="ctr"/>
+          </a:p>
+        </p:txBody>
+      </p:sp>
+      <p:sp>
+        <p:nvSpPr>
+          <p:cNvPr id="10" name="TextBox 9"/>
           <p:cNvSpPr txBox="1"/>
           <p:nvPr/>
         </p:nvSpPr>
         <p:spPr>
           <a:xfrm>
-            <a:off x="5870301" y="5961888"/>
-            <a:ext cx="5864193" cy="320040"/>
+            <a:off x="1371600" y="1298448"/>
+            <a:ext cx="10180015" cy="292608"/>
           </a:xfrm>
           <a:prstGeom prst="rect">
             <a:avLst/>
@@ -7227,34 +10171,32 @@
           <a:noFill/>
         </p:spPr>
         <p:txBody>
-          <a:bodyPr wrap="square">
-            <a:spAutoFit/>
-          </a:bodyPr>
-          <a:lstStyle/>
-          <a:p>
-            <a:pPr algn="ctr"/>
-            <a:r>
-              <a:rPr sz="1100" b="0" i="1">
-                <a:solidFill>
-                  <a:srgbClr val="666666"/>
+          <a:bodyPr wrap="square" anchor="ctr"/>
+          <a:lstStyle/>
+          <a:p>
+            <a:pPr algn="r"/>
+            <a:r>
+              <a:rPr sz="1100" b="1" i="0">
+                <a:solidFill>
+                  <a:srgbClr val="BBBBBB"/>
                 </a:solidFill>
                 <a:latin typeface="Calibri"/>
               </a:rPr>
-              <a:t>Clic para avanzar la animación</a:t>
-            </a:r>
-          </a:p>
-        </p:txBody>
-      </p:sp>
-      <p:sp>
-        <p:nvSpPr>
-          <p:cNvPr id="14" name="TextBox 13"/>
+              <a:t>Mermaid</a:t>
+            </a:r>
+          </a:p>
+        </p:txBody>
+      </p:sp>
+      <p:sp>
+        <p:nvSpPr>
+          <p:cNvPr id="11" name="TextBox 10"/>
           <p:cNvSpPr txBox="1"/>
           <p:nvPr/>
         </p:nvSpPr>
         <p:spPr>
           <a:xfrm>
-            <a:off x="457200" y="1353312"/>
-            <a:ext cx="5093061" cy="5047488"/>
+            <a:off x="685800" y="1719072"/>
+            <a:ext cx="502920" cy="4475083"/>
           </a:xfrm>
           <a:prstGeom prst="rect">
             <a:avLst/>
@@ -7267,74 +10209,1904 @@
           </a:bodyPr>
           <a:lstStyle/>
           <a:p>
+            <a:pPr algn="r">
+              <a:spcAft>
+                <a:spcPts val="321"/>
+              </a:spcAft>
+            </a:pPr>
+            <a:r>
+              <a:rPr sz="1500" i="0" b="0">
+                <a:solidFill>
+                  <a:srgbClr val="858585"/>
+                </a:solidFill>
+                <a:latin typeface="Consolas"/>
+              </a:rPr>
+              <a:t>1</a:t>
+            </a:r>
+          </a:p>
+          <a:p>
+            <a:pPr algn="r">
+              <a:spcAft>
+                <a:spcPts val="321"/>
+              </a:spcAft>
+            </a:pPr>
+            <a:r>
+              <a:rPr sz="1500" i="0" b="0">
+                <a:solidFill>
+                  <a:srgbClr val="858585"/>
+                </a:solidFill>
+                <a:latin typeface="Consolas"/>
+              </a:rPr>
+              <a:t>2</a:t>
+            </a:r>
+          </a:p>
+          <a:p>
+            <a:pPr algn="r">
+              <a:spcAft>
+                <a:spcPts val="321"/>
+              </a:spcAft>
+            </a:pPr>
+            <a:r>
+              <a:rPr sz="1500" i="0" b="0">
+                <a:solidFill>
+                  <a:srgbClr val="858585"/>
+                </a:solidFill>
+                <a:latin typeface="Consolas"/>
+              </a:rPr>
+              <a:t>3</a:t>
+            </a:r>
+          </a:p>
+          <a:p>
+            <a:pPr algn="r">
+              <a:spcAft>
+                <a:spcPts val="321"/>
+              </a:spcAft>
+            </a:pPr>
+            <a:r>
+              <a:rPr sz="1500" i="0" b="0">
+                <a:solidFill>
+                  <a:srgbClr val="858585"/>
+                </a:solidFill>
+                <a:latin typeface="Consolas"/>
+              </a:rPr>
+              <a:t>4</a:t>
+            </a:r>
+          </a:p>
+          <a:p>
+            <a:pPr algn="r">
+              <a:spcAft>
+                <a:spcPts val="321"/>
+              </a:spcAft>
+            </a:pPr>
+            <a:r>
+              <a:rPr sz="1500" i="0" b="0">
+                <a:solidFill>
+                  <a:srgbClr val="858585"/>
+                </a:solidFill>
+                <a:latin typeface="Consolas"/>
+              </a:rPr>
+              <a:t>5</a:t>
+            </a:r>
+          </a:p>
+          <a:p>
+            <a:pPr algn="r">
+              <a:spcAft>
+                <a:spcPts val="321"/>
+              </a:spcAft>
+            </a:pPr>
+            <a:r>
+              <a:rPr sz="1500" i="0" b="0">
+                <a:solidFill>
+                  <a:srgbClr val="858585"/>
+                </a:solidFill>
+                <a:latin typeface="Consolas"/>
+              </a:rPr>
+              <a:t>6</a:t>
+            </a:r>
+          </a:p>
+          <a:p>
+            <a:pPr algn="r">
+              <a:spcAft>
+                <a:spcPts val="321"/>
+              </a:spcAft>
+            </a:pPr>
+            <a:r>
+              <a:rPr sz="1500" i="0" b="0">
+                <a:solidFill>
+                  <a:srgbClr val="858585"/>
+                </a:solidFill>
+                <a:latin typeface="Consolas"/>
+              </a:rPr>
+              <a:t>7</a:t>
+            </a:r>
+          </a:p>
+          <a:p>
+            <a:pPr algn="r">
+              <a:spcAft>
+                <a:spcPts val="321"/>
+              </a:spcAft>
+            </a:pPr>
+            <a:r>
+              <a:rPr sz="1500" i="0" b="0">
+                <a:solidFill>
+                  <a:srgbClr val="858585"/>
+                </a:solidFill>
+                <a:latin typeface="Consolas"/>
+              </a:rPr>
+              <a:t>8</a:t>
+            </a:r>
+          </a:p>
+          <a:p>
+            <a:pPr algn="r">
+              <a:spcAft>
+                <a:spcPts val="321"/>
+              </a:spcAft>
+            </a:pPr>
+            <a:r>
+              <a:rPr sz="1500" i="0" b="0">
+                <a:solidFill>
+                  <a:srgbClr val="858585"/>
+                </a:solidFill>
+                <a:latin typeface="Consolas"/>
+              </a:rPr>
+              <a:t>9</a:t>
+            </a:r>
+          </a:p>
+          <a:p>
+            <a:pPr algn="r">
+              <a:spcAft>
+                <a:spcPts val="321"/>
+              </a:spcAft>
+            </a:pPr>
+            <a:r>
+              <a:rPr sz="1500" i="0" b="0">
+                <a:solidFill>
+                  <a:srgbClr val="858585"/>
+                </a:solidFill>
+                <a:latin typeface="Consolas"/>
+              </a:rPr>
+              <a:t>10</a:t>
+            </a:r>
+          </a:p>
+          <a:p>
+            <a:pPr algn="r">
+              <a:spcAft>
+                <a:spcPts val="321"/>
+              </a:spcAft>
+            </a:pPr>
+            <a:r>
+              <a:rPr sz="1500" i="0" b="0">
+                <a:solidFill>
+                  <a:srgbClr val="858585"/>
+                </a:solidFill>
+                <a:latin typeface="Consolas"/>
+              </a:rPr>
+              <a:t>11</a:t>
+            </a:r>
+          </a:p>
+          <a:p>
+            <a:pPr algn="r">
+              <a:spcAft>
+                <a:spcPts val="321"/>
+              </a:spcAft>
+            </a:pPr>
+            <a:r>
+              <a:rPr sz="1500" i="0" b="0">
+                <a:solidFill>
+                  <a:srgbClr val="858585"/>
+                </a:solidFill>
+                <a:latin typeface="Consolas"/>
+              </a:rPr>
+              <a:t>12</a:t>
+            </a:r>
+          </a:p>
+          <a:p>
+            <a:pPr algn="r">
+              <a:spcAft>
+                <a:spcPts val="321"/>
+              </a:spcAft>
+            </a:pPr>
+            <a:r>
+              <a:rPr sz="1500" i="0" b="0">
+                <a:solidFill>
+                  <a:srgbClr val="858585"/>
+                </a:solidFill>
+                <a:latin typeface="Consolas"/>
+              </a:rPr>
+              <a:t>13</a:t>
+            </a:r>
+          </a:p>
+          <a:p>
+            <a:pPr algn="r">
+              <a:spcAft>
+                <a:spcPts val="321"/>
+              </a:spcAft>
+            </a:pPr>
+            <a:r>
+              <a:rPr sz="1500" i="0" b="0">
+                <a:solidFill>
+                  <a:srgbClr val="858585"/>
+                </a:solidFill>
+                <a:latin typeface="Consolas"/>
+              </a:rPr>
+              <a:t>14</a:t>
+            </a:r>
+          </a:p>
+          <a:p>
+            <a:pPr algn="r">
+              <a:spcAft>
+                <a:spcPts val="321"/>
+              </a:spcAft>
+            </a:pPr>
+            <a:r>
+              <a:rPr sz="1500" i="0" b="0">
+                <a:solidFill>
+                  <a:srgbClr val="858585"/>
+                </a:solidFill>
+                <a:latin typeface="Consolas"/>
+              </a:rPr>
+              <a:t>15</a:t>
+            </a:r>
+          </a:p>
+          <a:p>
+            <a:pPr algn="r">
+              <a:spcAft>
+                <a:spcPts val="321"/>
+              </a:spcAft>
+            </a:pPr>
+            <a:r>
+              <a:rPr sz="1500" i="0" b="0">
+                <a:solidFill>
+                  <a:srgbClr val="858585"/>
+                </a:solidFill>
+                <a:latin typeface="Consolas"/>
+              </a:rPr>
+              <a:t>16</a:t>
+            </a:r>
+          </a:p>
+        </p:txBody>
+      </p:sp>
+      <p:sp>
+        <p:nvSpPr>
+          <p:cNvPr id="12" name="TextBox 11"/>
+          <p:cNvSpPr txBox="1"/>
+          <p:nvPr/>
+        </p:nvSpPr>
+        <p:spPr>
+          <a:xfrm>
+            <a:off x="1188720" y="1719072"/>
+            <a:ext cx="10271455" cy="4475083"/>
+          </a:xfrm>
+          <a:prstGeom prst="rect">
+            <a:avLst/>
+          </a:prstGeom>
+          <a:noFill/>
+        </p:spPr>
+        <p:txBody>
+          <a:bodyPr wrap="square">
+            <a:spAutoFit/>
+          </a:bodyPr>
+          <a:lstStyle/>
+          <a:p>
             <a:pPr>
               <a:spcAft>
-                <a:spcPts val="800"/>
+                <a:spcPts val="321"/>
               </a:spcAft>
             </a:pPr>
             <a:r>
-              <a:rPr sz="2000" b="0" i="0">
-                <a:solidFill>
-                  <a:srgbClr val="333333"/>
-                </a:solidFill>
-                <a:latin typeface="Calibri"/>
-              </a:rPr>
-              <a:t>–   A favor de la base: la regla queda escrita una sola vez y la cumplen todos los clientes.</a:t>
+              <a:rPr sz="1500" i="0" b="0">
+                <a:solidFill>
+                  <a:srgbClr val="D4D4D4"/>
+                </a:solidFill>
+                <a:latin typeface="Consolas"/>
+              </a:rPr>
+              <a:t>sequenceDiagram</a:t>
             </a:r>
           </a:p>
           <a:p>
             <a:pPr>
               <a:spcAft>
-                <a:spcPts val="800"/>
+                <a:spcPts val="321"/>
               </a:spcAft>
             </a:pPr>
             <a:r>
-              <a:rPr sz="2000" b="0" i="0">
-                <a:solidFill>
-                  <a:srgbClr val="333333"/>
-                </a:solidFill>
-                <a:latin typeface="Calibri"/>
-              </a:rPr>
-              <a:t>–   Queda dentro de la misma transaccion que los datos, sin ventana entre validar y escribir; y ahorra viajes de red.</a:t>
+              <a:rPr sz="1500" i="0" b="0">
+                <a:solidFill>
+                  <a:srgbClr val="D4D4D4"/>
+                </a:solidFill>
+                <a:latin typeface="Consolas"/>
+              </a:rPr>
+              <a:t>  </a:t>
+            </a:r>
+            <a:r>
+              <a:rPr sz="1500" i="0" b="0">
+                <a:solidFill>
+                  <a:srgbClr val="D4D4D4"/>
+                </a:solidFill>
+                <a:latin typeface="Consolas"/>
+              </a:rPr>
+              <a:t>actor</a:t>
+            </a:r>
+            <a:r>
+              <a:rPr sz="1500" i="0" b="0">
+                <a:solidFill>
+                  <a:srgbClr val="D4D4D4"/>
+                </a:solidFill>
+                <a:latin typeface="Consolas"/>
+              </a:rPr>
+              <a:t> </a:t>
+            </a:r>
+            <a:r>
+              <a:rPr sz="1500" i="0" b="0">
+                <a:solidFill>
+                  <a:srgbClr val="D4D4D4"/>
+                </a:solidFill>
+                <a:latin typeface="Consolas"/>
+              </a:rPr>
+              <a:t>R</a:t>
+            </a:r>
+            <a:r>
+              <a:rPr sz="1500" i="0" b="0">
+                <a:solidFill>
+                  <a:srgbClr val="D4D4D4"/>
+                </a:solidFill>
+                <a:latin typeface="Consolas"/>
+              </a:rPr>
+              <a:t> </a:t>
+            </a:r>
+            <a:r>
+              <a:rPr sz="1500" i="0" b="0">
+                <a:solidFill>
+                  <a:srgbClr val="D4D4D4"/>
+                </a:solidFill>
+                <a:latin typeface="Consolas"/>
+              </a:rPr>
+              <a:t>as</a:t>
+            </a:r>
+            <a:r>
+              <a:rPr sz="1500" i="0" b="0">
+                <a:solidFill>
+                  <a:srgbClr val="D4D4D4"/>
+                </a:solidFill>
+                <a:latin typeface="Consolas"/>
+              </a:rPr>
+              <a:t> </a:t>
+            </a:r>
+            <a:r>
+              <a:rPr sz="1500" i="0" b="0">
+                <a:solidFill>
+                  <a:srgbClr val="D4D4D4"/>
+                </a:solidFill>
+                <a:latin typeface="Consolas"/>
+              </a:rPr>
+              <a:t>Recepcionista</a:t>
             </a:r>
           </a:p>
           <a:p>
             <a:pPr>
               <a:spcAft>
-                <a:spcPts val="800"/>
+                <a:spcPts val="321"/>
               </a:spcAft>
             </a:pPr>
             <a:r>
-              <a:rPr sz="2000" b="0" i="0">
-                <a:solidFill>
-                  <a:srgbClr val="333333"/>
-                </a:solidFill>
-                <a:latin typeface="Calibri"/>
-              </a:rPr>
-              <a:t>–   En contra: PL/SQL es mas dificil de probar de forma automatizada.</a:t>
+              <a:rPr sz="1500" i="0" b="0">
+                <a:solidFill>
+                  <a:srgbClr val="D4D4D4"/>
+                </a:solidFill>
+                <a:latin typeface="Consolas"/>
+              </a:rPr>
+              <a:t>  </a:t>
+            </a:r>
+            <a:r>
+              <a:rPr sz="1500" i="0" b="0">
+                <a:solidFill>
+                  <a:srgbClr val="D4D4D4"/>
+                </a:solidFill>
+                <a:latin typeface="Consolas"/>
+              </a:rPr>
+              <a:t>participant</a:t>
+            </a:r>
+            <a:r>
+              <a:rPr sz="1500" i="0" b="0">
+                <a:solidFill>
+                  <a:srgbClr val="D4D4D4"/>
+                </a:solidFill>
+                <a:latin typeface="Consolas"/>
+              </a:rPr>
+              <a:t> </a:t>
+            </a:r>
+            <a:r>
+              <a:rPr sz="1500" i="0" b="0">
+                <a:solidFill>
+                  <a:srgbClr val="D4D4D4"/>
+                </a:solidFill>
+                <a:latin typeface="Consolas"/>
+              </a:rPr>
+              <a:t>A</a:t>
+            </a:r>
+            <a:r>
+              <a:rPr sz="1500" i="0" b="0">
+                <a:solidFill>
+                  <a:srgbClr val="D4D4D4"/>
+                </a:solidFill>
+                <a:latin typeface="Consolas"/>
+              </a:rPr>
+              <a:t> </a:t>
+            </a:r>
+            <a:r>
+              <a:rPr sz="1500" i="0" b="0">
+                <a:solidFill>
+                  <a:srgbClr val="D4D4D4"/>
+                </a:solidFill>
+                <a:latin typeface="Consolas"/>
+              </a:rPr>
+              <a:t>as</a:t>
+            </a:r>
+            <a:r>
+              <a:rPr sz="1500" i="0" b="0">
+                <a:solidFill>
+                  <a:srgbClr val="D4D4D4"/>
+                </a:solidFill>
+                <a:latin typeface="Consolas"/>
+              </a:rPr>
+              <a:t> </a:t>
+            </a:r>
+            <a:r>
+              <a:rPr sz="1500" i="0" b="0">
+                <a:solidFill>
+                  <a:srgbClr val="D4D4D4"/>
+                </a:solidFill>
+                <a:latin typeface="Consolas"/>
+              </a:rPr>
+              <a:t>Aplicacion</a:t>
             </a:r>
           </a:p>
           <a:p>
             <a:pPr>
               <a:spcAft>
-                <a:spcPts val="800"/>
+                <a:spcPts val="321"/>
               </a:spcAft>
             </a:pPr>
             <a:r>
-              <a:rPr sz="2000" b="0" i="0">
-                <a:solidFill>
-                  <a:srgbClr val="333333"/>
-                </a:solidFill>
-                <a:latin typeface="Calibri"/>
-              </a:rPr>
-              <a:t>–   Y la CPU de la base suele ser el recurso mas escaso y mas caro de escalar.</a:t>
-            </a:r>
-          </a:p>
-        </p:txBody>
-      </p:sp>
-      <p:sp>
-        <p:nvSpPr>
-          <p:cNvPr id="15" name="TextBox 14"/>
+              <a:rPr sz="1500" i="0" b="0">
+                <a:solidFill>
+                  <a:srgbClr val="D4D4D4"/>
+                </a:solidFill>
+                <a:latin typeface="Consolas"/>
+              </a:rPr>
+              <a:t>  </a:t>
+            </a:r>
+            <a:r>
+              <a:rPr sz="1500" i="0" b="0">
+                <a:solidFill>
+                  <a:srgbClr val="D4D4D4"/>
+                </a:solidFill>
+                <a:latin typeface="Consolas"/>
+              </a:rPr>
+              <a:t>participant</a:t>
+            </a:r>
+            <a:r>
+              <a:rPr sz="1500" i="0" b="0">
+                <a:solidFill>
+                  <a:srgbClr val="D4D4D4"/>
+                </a:solidFill>
+                <a:latin typeface="Consolas"/>
+              </a:rPr>
+              <a:t> </a:t>
+            </a:r>
+            <a:r>
+              <a:rPr sz="1500" i="0" b="0">
+                <a:solidFill>
+                  <a:srgbClr val="D4D4D4"/>
+                </a:solidFill>
+                <a:latin typeface="Consolas"/>
+              </a:rPr>
+              <a:t>B</a:t>
+            </a:r>
+            <a:r>
+              <a:rPr sz="1500" i="0" b="0">
+                <a:solidFill>
+                  <a:srgbClr val="D4D4D4"/>
+                </a:solidFill>
+                <a:latin typeface="Consolas"/>
+              </a:rPr>
+              <a:t> </a:t>
+            </a:r>
+            <a:r>
+              <a:rPr sz="1500" i="0" b="0">
+                <a:solidFill>
+                  <a:srgbClr val="D4D4D4"/>
+                </a:solidFill>
+                <a:latin typeface="Consolas"/>
+              </a:rPr>
+              <a:t>as</a:t>
+            </a:r>
+            <a:r>
+              <a:rPr sz="1500" i="0" b="0">
+                <a:solidFill>
+                  <a:srgbClr val="D4D4D4"/>
+                </a:solidFill>
+                <a:latin typeface="Consolas"/>
+              </a:rPr>
+              <a:t> </a:t>
+            </a:r>
+            <a:r>
+              <a:rPr sz="1500" i="0" b="0">
+                <a:solidFill>
+                  <a:srgbClr val="D4D4D4"/>
+                </a:solidFill>
+                <a:latin typeface="Consolas"/>
+              </a:rPr>
+              <a:t>Capa</a:t>
+            </a:r>
+            <a:r>
+              <a:rPr sz="1500" i="0" b="0">
+                <a:solidFill>
+                  <a:srgbClr val="D4D4D4"/>
+                </a:solidFill>
+                <a:latin typeface="Consolas"/>
+              </a:rPr>
+              <a:t> </a:t>
+            </a:r>
+            <a:r>
+              <a:rPr sz="1500" i="0" b="0">
+                <a:solidFill>
+                  <a:srgbClr val="D4D4D4"/>
+                </a:solidFill>
+                <a:latin typeface="Consolas"/>
+              </a:rPr>
+              <a:t>de</a:t>
+            </a:r>
+            <a:r>
+              <a:rPr sz="1500" i="0" b="0">
+                <a:solidFill>
+                  <a:srgbClr val="D4D4D4"/>
+                </a:solidFill>
+                <a:latin typeface="Consolas"/>
+              </a:rPr>
+              <a:t> </a:t>
+            </a:r>
+            <a:r>
+              <a:rPr sz="1500" i="0" b="0">
+                <a:solidFill>
+                  <a:srgbClr val="D4D4D4"/>
+                </a:solidFill>
+                <a:latin typeface="Consolas"/>
+              </a:rPr>
+              <a:t>API</a:t>
+            </a:r>
+          </a:p>
+          <a:p>
+            <a:pPr>
+              <a:spcAft>
+                <a:spcPts val="321"/>
+              </a:spcAft>
+            </a:pPr>
+            <a:r>
+              <a:rPr sz="1500" i="0" b="0">
+                <a:solidFill>
+                  <a:srgbClr val="D4D4D4"/>
+                </a:solidFill>
+                <a:latin typeface="Consolas"/>
+              </a:rPr>
+              <a:t>  </a:t>
+            </a:r>
+            <a:r>
+              <a:rPr sz="1500" i="0" b="0">
+                <a:solidFill>
+                  <a:srgbClr val="D4D4D4"/>
+                </a:solidFill>
+                <a:latin typeface="Consolas"/>
+              </a:rPr>
+              <a:t>participant</a:t>
+            </a:r>
+            <a:r>
+              <a:rPr sz="1500" i="0" b="0">
+                <a:solidFill>
+                  <a:srgbClr val="D4D4D4"/>
+                </a:solidFill>
+                <a:latin typeface="Consolas"/>
+              </a:rPr>
+              <a:t> </a:t>
+            </a:r>
+            <a:r>
+              <a:rPr sz="1500" i="0" b="0">
+                <a:solidFill>
+                  <a:srgbClr val="D4D4D4"/>
+                </a:solidFill>
+                <a:latin typeface="Consolas"/>
+              </a:rPr>
+              <a:t>T</a:t>
+            </a:r>
+            <a:r>
+              <a:rPr sz="1500" i="0" b="0">
+                <a:solidFill>
+                  <a:srgbClr val="D4D4D4"/>
+                </a:solidFill>
+                <a:latin typeface="Consolas"/>
+              </a:rPr>
+              <a:t> </a:t>
+            </a:r>
+            <a:r>
+              <a:rPr sz="1500" i="0" b="0">
+                <a:solidFill>
+                  <a:srgbClr val="D4D4D4"/>
+                </a:solidFill>
+                <a:latin typeface="Consolas"/>
+              </a:rPr>
+              <a:t>as</a:t>
+            </a:r>
+            <a:r>
+              <a:rPr sz="1500" i="0" b="0">
+                <a:solidFill>
+                  <a:srgbClr val="D4D4D4"/>
+                </a:solidFill>
+                <a:latin typeface="Consolas"/>
+              </a:rPr>
+              <a:t> </a:t>
+            </a:r>
+            <a:r>
+              <a:rPr sz="1500" i="0" b="0">
+                <a:solidFill>
+                  <a:srgbClr val="D4D4D4"/>
+                </a:solidFill>
+                <a:latin typeface="Consolas"/>
+              </a:rPr>
+              <a:t>Tabla</a:t>
+            </a:r>
+            <a:r>
+              <a:rPr sz="1500" i="0" b="0">
+                <a:solidFill>
+                  <a:srgbClr val="D4D4D4"/>
+                </a:solidFill>
+                <a:latin typeface="Consolas"/>
+              </a:rPr>
+              <a:t> </a:t>
+            </a:r>
+            <a:r>
+              <a:rPr sz="1500" i="0" b="0">
+                <a:solidFill>
+                  <a:srgbClr val="D4D4D4"/>
+                </a:solidFill>
+                <a:latin typeface="Consolas"/>
+              </a:rPr>
+              <a:t>cita</a:t>
+            </a:r>
+          </a:p>
+          <a:p>
+            <a:pPr>
+              <a:spcAft>
+                <a:spcPts val="321"/>
+              </a:spcAft>
+            </a:pPr>
+            <a:r>
+              <a:rPr sz="1500" i="0" b="0">
+                <a:solidFill>
+                  <a:srgbClr val="D4D4D4"/>
+                </a:solidFill>
+                <a:latin typeface="Consolas"/>
+              </a:rPr>
+              <a:t>  </a:t>
+            </a:r>
+            <a:r>
+              <a:rPr sz="1500" i="0" b="0">
+                <a:solidFill>
+                  <a:srgbClr val="D4D4D4"/>
+                </a:solidFill>
+                <a:latin typeface="Consolas"/>
+              </a:rPr>
+              <a:t>R</a:t>
+            </a:r>
+            <a:r>
+              <a:rPr sz="1500" i="0" b="0">
+                <a:solidFill>
+                  <a:srgbClr val="D4D4D4"/>
+                </a:solidFill>
+                <a:latin typeface="Consolas"/>
+              </a:rPr>
+              <a:t>-&gt;&gt;</a:t>
+            </a:r>
+            <a:r>
+              <a:rPr sz="1500" i="0" b="0">
+                <a:solidFill>
+                  <a:srgbClr val="D4D4D4"/>
+                </a:solidFill>
+                <a:latin typeface="Consolas"/>
+              </a:rPr>
+              <a:t>A</a:t>
+            </a:r>
+            <a:r>
+              <a:rPr sz="1500" i="0" b="0">
+                <a:solidFill>
+                  <a:srgbClr val="D4D4D4"/>
+                </a:solidFill>
+                <a:latin typeface="Consolas"/>
+              </a:rPr>
+              <a:t>: </a:t>
+            </a:r>
+            <a:r>
+              <a:rPr sz="1500" i="0" b="0">
+                <a:solidFill>
+                  <a:srgbClr val="D4D4D4"/>
+                </a:solidFill>
+                <a:latin typeface="Consolas"/>
+              </a:rPr>
+              <a:t>Cancelar</a:t>
+            </a:r>
+            <a:r>
+              <a:rPr sz="1500" i="0" b="0">
+                <a:solidFill>
+                  <a:srgbClr val="D4D4D4"/>
+                </a:solidFill>
+                <a:latin typeface="Consolas"/>
+              </a:rPr>
+              <a:t> </a:t>
+            </a:r>
+            <a:r>
+              <a:rPr sz="1500" i="0" b="0">
+                <a:solidFill>
+                  <a:srgbClr val="D4D4D4"/>
+                </a:solidFill>
+                <a:latin typeface="Consolas"/>
+              </a:rPr>
+              <a:t>la</a:t>
+            </a:r>
+            <a:r>
+              <a:rPr sz="1500" i="0" b="0">
+                <a:solidFill>
+                  <a:srgbClr val="D4D4D4"/>
+                </a:solidFill>
+                <a:latin typeface="Consolas"/>
+              </a:rPr>
+              <a:t> </a:t>
+            </a:r>
+            <a:r>
+              <a:rPr sz="1500" i="0" b="0">
+                <a:solidFill>
+                  <a:srgbClr val="D4D4D4"/>
+                </a:solidFill>
+                <a:latin typeface="Consolas"/>
+              </a:rPr>
+              <a:t>cita</a:t>
+            </a:r>
+            <a:r>
+              <a:rPr sz="1500" i="0" b="0">
+                <a:solidFill>
+                  <a:srgbClr val="D4D4D4"/>
+                </a:solidFill>
+                <a:latin typeface="Consolas"/>
+              </a:rPr>
+              <a:t> </a:t>
+            </a:r>
+            <a:r>
+              <a:rPr sz="1500" i="0" b="0">
+                <a:solidFill>
+                  <a:srgbClr val="B5CEA8"/>
+                </a:solidFill>
+                <a:latin typeface="Consolas"/>
+              </a:rPr>
+              <a:t>3</a:t>
+            </a:r>
+          </a:p>
+          <a:p>
+            <a:pPr>
+              <a:spcAft>
+                <a:spcPts val="321"/>
+              </a:spcAft>
+            </a:pPr>
+            <a:r>
+              <a:rPr sz="1500" i="0" b="0">
+                <a:solidFill>
+                  <a:srgbClr val="D4D4D4"/>
+                </a:solidFill>
+                <a:latin typeface="Consolas"/>
+              </a:rPr>
+              <a:t>  </a:t>
+            </a:r>
+            <a:r>
+              <a:rPr sz="1500" i="0" b="0">
+                <a:solidFill>
+                  <a:srgbClr val="D4D4D4"/>
+                </a:solidFill>
+                <a:latin typeface="Consolas"/>
+              </a:rPr>
+              <a:t>A</a:t>
+            </a:r>
+            <a:r>
+              <a:rPr sz="1500" i="0" b="0">
+                <a:solidFill>
+                  <a:srgbClr val="D4D4D4"/>
+                </a:solidFill>
+                <a:latin typeface="Consolas"/>
+              </a:rPr>
+              <a:t>-&gt;&gt;</a:t>
+            </a:r>
+            <a:r>
+              <a:rPr sz="1500" i="0" b="0">
+                <a:solidFill>
+                  <a:srgbClr val="D4D4D4"/>
+                </a:solidFill>
+                <a:latin typeface="Consolas"/>
+              </a:rPr>
+              <a:t>B</a:t>
+            </a:r>
+            <a:r>
+              <a:rPr sz="1500" i="0" b="0">
+                <a:solidFill>
+                  <a:srgbClr val="D4D4D4"/>
+                </a:solidFill>
+                <a:latin typeface="Consolas"/>
+              </a:rPr>
+              <a:t>: </a:t>
+            </a:r>
+            <a:r>
+              <a:rPr sz="1500" i="0" b="0">
+                <a:solidFill>
+                  <a:srgbClr val="DCDCAA"/>
+                </a:solidFill>
+                <a:latin typeface="Consolas"/>
+              </a:rPr>
+              <a:t>api_cancelar_cita</a:t>
+            </a:r>
+            <a:r>
+              <a:rPr sz="1500" i="0" b="0">
+                <a:solidFill>
+                  <a:srgbClr val="D4D4D4"/>
+                </a:solidFill>
+                <a:latin typeface="Consolas"/>
+              </a:rPr>
+              <a:t>(</a:t>
+            </a:r>
+            <a:r>
+              <a:rPr sz="1500" i="0" b="0">
+                <a:solidFill>
+                  <a:srgbClr val="B5CEA8"/>
+                </a:solidFill>
+                <a:latin typeface="Consolas"/>
+              </a:rPr>
+              <a:t>3</a:t>
+            </a:r>
+            <a:r>
+              <a:rPr sz="1500" i="0" b="0">
+                <a:solidFill>
+                  <a:srgbClr val="D4D4D4"/>
+                </a:solidFill>
+                <a:latin typeface="Consolas"/>
+              </a:rPr>
+              <a:t>) </a:t>
+            </a:r>
+            <a:r>
+              <a:rPr sz="1500" i="0" b="0">
+                <a:solidFill>
+                  <a:srgbClr val="D4D4D4"/>
+                </a:solidFill>
+                <a:latin typeface="Consolas"/>
+              </a:rPr>
+              <a:t>como</a:t>
+            </a:r>
+            <a:r>
+              <a:rPr sz="1500" i="0" b="0">
+                <a:solidFill>
+                  <a:srgbClr val="D4D4D4"/>
+                </a:solidFill>
+                <a:latin typeface="Consolas"/>
+              </a:rPr>
+              <a:t> </a:t>
+            </a:r>
+            <a:r>
+              <a:rPr sz="1500" i="0" b="0">
+                <a:solidFill>
+                  <a:srgbClr val="D4D4D4"/>
+                </a:solidFill>
+                <a:latin typeface="Consolas"/>
+              </a:rPr>
+              <a:t>parametro</a:t>
+            </a:r>
+          </a:p>
+          <a:p>
+            <a:pPr>
+              <a:spcAft>
+                <a:spcPts val="321"/>
+              </a:spcAft>
+            </a:pPr>
+            <a:r>
+              <a:rPr sz="1500" i="0" b="0">
+                <a:solidFill>
+                  <a:srgbClr val="D4D4D4"/>
+                </a:solidFill>
+                <a:latin typeface="Consolas"/>
+              </a:rPr>
+              <a:t>  </a:t>
+            </a:r>
+            <a:r>
+              <a:rPr sz="1500" i="0" b="0">
+                <a:solidFill>
+                  <a:srgbClr val="D4D4D4"/>
+                </a:solidFill>
+                <a:latin typeface="Consolas"/>
+              </a:rPr>
+              <a:t>B</a:t>
+            </a:r>
+            <a:r>
+              <a:rPr sz="1500" i="0" b="0">
+                <a:solidFill>
+                  <a:srgbClr val="D4D4D4"/>
+                </a:solidFill>
+                <a:latin typeface="Consolas"/>
+              </a:rPr>
+              <a:t>-&gt;&gt;</a:t>
+            </a:r>
+            <a:r>
+              <a:rPr sz="1500" i="0" b="0">
+                <a:solidFill>
+                  <a:srgbClr val="D4D4D4"/>
+                </a:solidFill>
+                <a:latin typeface="Consolas"/>
+              </a:rPr>
+              <a:t>T</a:t>
+            </a:r>
+            <a:r>
+              <a:rPr sz="1500" i="0" b="0">
+                <a:solidFill>
+                  <a:srgbClr val="D4D4D4"/>
+                </a:solidFill>
+                <a:latin typeface="Consolas"/>
+              </a:rPr>
+              <a:t>: </a:t>
+            </a:r>
+            <a:r>
+              <a:rPr sz="1500" i="0" b="0">
+                <a:solidFill>
+                  <a:srgbClr val="D4D4D4"/>
+                </a:solidFill>
+                <a:latin typeface="Consolas"/>
+              </a:rPr>
+              <a:t>UPDATE</a:t>
+            </a:r>
+            <a:r>
+              <a:rPr sz="1500" i="0" b="0">
+                <a:solidFill>
+                  <a:srgbClr val="D4D4D4"/>
+                </a:solidFill>
+                <a:latin typeface="Consolas"/>
+              </a:rPr>
+              <a:t> </a:t>
+            </a:r>
+            <a:r>
+              <a:rPr sz="1500" i="0" b="0">
+                <a:solidFill>
+                  <a:srgbClr val="D4D4D4"/>
+                </a:solidFill>
+                <a:latin typeface="Consolas"/>
+              </a:rPr>
+              <a:t>solo</a:t>
+            </a:r>
+            <a:r>
+              <a:rPr sz="1500" i="0" b="0">
+                <a:solidFill>
+                  <a:srgbClr val="D4D4D4"/>
+                </a:solidFill>
+                <a:latin typeface="Consolas"/>
+              </a:rPr>
+              <a:t> </a:t>
+            </a:r>
+            <a:r>
+              <a:rPr sz="1500" i="0" b="0">
+                <a:solidFill>
+                  <a:srgbClr val="D4D4D4"/>
+                </a:solidFill>
+                <a:latin typeface="Consolas"/>
+              </a:rPr>
+              <a:t>si</a:t>
+            </a:r>
+            <a:r>
+              <a:rPr sz="1500" i="0" b="0">
+                <a:solidFill>
+                  <a:srgbClr val="D4D4D4"/>
+                </a:solidFill>
+                <a:latin typeface="Consolas"/>
+              </a:rPr>
+              <a:t> </a:t>
+            </a:r>
+            <a:r>
+              <a:rPr sz="1500" i="0" b="0">
+                <a:solidFill>
+                  <a:srgbClr val="D4D4D4"/>
+                </a:solidFill>
+                <a:latin typeface="Consolas"/>
+              </a:rPr>
+              <a:t>esta</a:t>
+            </a:r>
+            <a:r>
+              <a:rPr sz="1500" i="0" b="0">
+                <a:solidFill>
+                  <a:srgbClr val="D4D4D4"/>
+                </a:solidFill>
+                <a:latin typeface="Consolas"/>
+              </a:rPr>
+              <a:t> </a:t>
+            </a:r>
+            <a:r>
+              <a:rPr sz="1500" i="0" b="0">
+                <a:solidFill>
+                  <a:srgbClr val="D4D4D4"/>
+                </a:solidFill>
+                <a:latin typeface="Consolas"/>
+              </a:rPr>
+              <a:t>PROGRAMADA</a:t>
+            </a:r>
+          </a:p>
+          <a:p>
+            <a:pPr>
+              <a:spcAft>
+                <a:spcPts val="321"/>
+              </a:spcAft>
+            </a:pPr>
+            <a:r>
+              <a:rPr sz="1500" i="0" b="0">
+                <a:solidFill>
+                  <a:srgbClr val="D4D4D4"/>
+                </a:solidFill>
+                <a:latin typeface="Consolas"/>
+              </a:rPr>
+              <a:t>  </a:t>
+            </a:r>
+            <a:r>
+              <a:rPr sz="1500" i="0" b="0">
+                <a:solidFill>
+                  <a:srgbClr val="D4D4D4"/>
+                </a:solidFill>
+                <a:latin typeface="Consolas"/>
+              </a:rPr>
+              <a:t>alt</a:t>
+            </a:r>
+            <a:r>
+              <a:rPr sz="1500" i="0" b="0">
+                <a:solidFill>
+                  <a:srgbClr val="D4D4D4"/>
+                </a:solidFill>
+                <a:latin typeface="Consolas"/>
+              </a:rPr>
+              <a:t> </a:t>
+            </a:r>
+            <a:r>
+              <a:rPr sz="1500" i="0" b="0">
+                <a:solidFill>
+                  <a:srgbClr val="D4D4D4"/>
+                </a:solidFill>
+                <a:latin typeface="Consolas"/>
+              </a:rPr>
+              <a:t>ok</a:t>
+            </a:r>
+            <a:r>
+              <a:rPr sz="1500" i="0" b="0">
+                <a:solidFill>
+                  <a:srgbClr val="D4D4D4"/>
+                </a:solidFill>
+                <a:latin typeface="Consolas"/>
+              </a:rPr>
+              <a:t> = </a:t>
+            </a:r>
+            <a:r>
+              <a:rPr sz="1500" i="0" b="0">
+                <a:solidFill>
+                  <a:srgbClr val="D4D4D4"/>
+                </a:solidFill>
+                <a:latin typeface="Consolas"/>
+              </a:rPr>
+              <a:t>false</a:t>
+            </a:r>
+          </a:p>
+          <a:p>
+            <a:pPr>
+              <a:spcAft>
+                <a:spcPts val="321"/>
+              </a:spcAft>
+            </a:pPr>
+            <a:r>
+              <a:rPr sz="1500" i="0" b="0">
+                <a:solidFill>
+                  <a:srgbClr val="D4D4D4"/>
+                </a:solidFill>
+                <a:latin typeface="Consolas"/>
+              </a:rPr>
+              <a:t>    </a:t>
+            </a:r>
+            <a:r>
+              <a:rPr sz="1500" i="0" b="0">
+                <a:solidFill>
+                  <a:srgbClr val="D4D4D4"/>
+                </a:solidFill>
+                <a:latin typeface="Consolas"/>
+              </a:rPr>
+              <a:t>B</a:t>
+            </a:r>
+            <a:r>
+              <a:rPr sz="1500" i="0" b="0">
+                <a:solidFill>
+                  <a:srgbClr val="D4D4D4"/>
+                </a:solidFill>
+                <a:latin typeface="Consolas"/>
+              </a:rPr>
+              <a:t>--&gt;&gt;</a:t>
+            </a:r>
+            <a:r>
+              <a:rPr sz="1500" i="0" b="0">
+                <a:solidFill>
+                  <a:srgbClr val="D4D4D4"/>
+                </a:solidFill>
+                <a:latin typeface="Consolas"/>
+              </a:rPr>
+              <a:t>A</a:t>
+            </a:r>
+            <a:r>
+              <a:rPr sz="1500" i="0" b="0">
+                <a:solidFill>
+                  <a:srgbClr val="D4D4D4"/>
+                </a:solidFill>
+                <a:latin typeface="Consolas"/>
+              </a:rPr>
+              <a:t>: </a:t>
+            </a:r>
+            <a:r>
+              <a:rPr sz="1500" i="0" b="0">
+                <a:solidFill>
+                  <a:srgbClr val="D4D4D4"/>
+                </a:solidFill>
+                <a:latin typeface="Consolas"/>
+              </a:rPr>
+              <a:t>false</a:t>
+            </a:r>
+            <a:r>
+              <a:rPr sz="1500" i="0" b="0">
+                <a:solidFill>
+                  <a:srgbClr val="D4D4D4"/>
+                </a:solidFill>
+                <a:latin typeface="Consolas"/>
+              </a:rPr>
+              <a:t>, </a:t>
+            </a:r>
+            <a:r>
+              <a:rPr sz="1500" i="0" b="0">
+                <a:solidFill>
+                  <a:srgbClr val="D4D4D4"/>
+                </a:solidFill>
+                <a:latin typeface="Consolas"/>
+              </a:rPr>
+              <a:t>No</a:t>
+            </a:r>
+            <a:r>
+              <a:rPr sz="1500" i="0" b="0">
+                <a:solidFill>
+                  <a:srgbClr val="D4D4D4"/>
+                </a:solidFill>
+                <a:latin typeface="Consolas"/>
+              </a:rPr>
+              <a:t> </a:t>
+            </a:r>
+            <a:r>
+              <a:rPr sz="1500" i="0" b="0">
+                <a:solidFill>
+                  <a:srgbClr val="D4D4D4"/>
+                </a:solidFill>
+                <a:latin typeface="Consolas"/>
+              </a:rPr>
+              <a:t>se</a:t>
+            </a:r>
+            <a:r>
+              <a:rPr sz="1500" i="0" b="0">
+                <a:solidFill>
+                  <a:srgbClr val="D4D4D4"/>
+                </a:solidFill>
+                <a:latin typeface="Consolas"/>
+              </a:rPr>
+              <a:t> </a:t>
+            </a:r>
+            <a:r>
+              <a:rPr sz="1500" i="0" b="0">
+                <a:solidFill>
+                  <a:srgbClr val="D4D4D4"/>
+                </a:solidFill>
+                <a:latin typeface="Consolas"/>
+              </a:rPr>
+              <a:t>puede</a:t>
+            </a:r>
+            <a:r>
+              <a:rPr sz="1500" i="0" b="0">
+                <a:solidFill>
+                  <a:srgbClr val="D4D4D4"/>
+                </a:solidFill>
+                <a:latin typeface="Consolas"/>
+              </a:rPr>
+              <a:t> </a:t>
+            </a:r>
+            <a:r>
+              <a:rPr sz="1500" i="0" b="0">
+                <a:solidFill>
+                  <a:srgbClr val="D4D4D4"/>
+                </a:solidFill>
+                <a:latin typeface="Consolas"/>
+              </a:rPr>
+              <a:t>cancelar</a:t>
+            </a:r>
+          </a:p>
+          <a:p>
+            <a:pPr>
+              <a:spcAft>
+                <a:spcPts val="321"/>
+              </a:spcAft>
+            </a:pPr>
+            <a:r>
+              <a:rPr sz="1500" i="0" b="0">
+                <a:solidFill>
+                  <a:srgbClr val="D4D4D4"/>
+                </a:solidFill>
+                <a:latin typeface="Consolas"/>
+              </a:rPr>
+              <a:t>    </a:t>
+            </a:r>
+            <a:r>
+              <a:rPr sz="1500" i="0" b="0">
+                <a:solidFill>
+                  <a:srgbClr val="D4D4D4"/>
+                </a:solidFill>
+                <a:latin typeface="Consolas"/>
+              </a:rPr>
+              <a:t>A</a:t>
+            </a:r>
+            <a:r>
+              <a:rPr sz="1500" i="0" b="0">
+                <a:solidFill>
+                  <a:srgbClr val="D4D4D4"/>
+                </a:solidFill>
+                <a:latin typeface="Consolas"/>
+              </a:rPr>
+              <a:t>--&gt;&gt;</a:t>
+            </a:r>
+            <a:r>
+              <a:rPr sz="1500" i="0" b="0">
+                <a:solidFill>
+                  <a:srgbClr val="D4D4D4"/>
+                </a:solidFill>
+                <a:latin typeface="Consolas"/>
+              </a:rPr>
+              <a:t>R</a:t>
+            </a:r>
+            <a:r>
+              <a:rPr sz="1500" i="0" b="0">
+                <a:solidFill>
+                  <a:srgbClr val="D4D4D4"/>
+                </a:solidFill>
+                <a:latin typeface="Consolas"/>
+              </a:rPr>
+              <a:t>: </a:t>
+            </a:r>
+            <a:r>
+              <a:rPr sz="1500" i="0" b="0">
+                <a:solidFill>
+                  <a:srgbClr val="D4D4D4"/>
+                </a:solidFill>
+                <a:latin typeface="Consolas"/>
+              </a:rPr>
+              <a:t>Muestra</a:t>
+            </a:r>
+            <a:r>
+              <a:rPr sz="1500" i="0" b="0">
+                <a:solidFill>
+                  <a:srgbClr val="D4D4D4"/>
+                </a:solidFill>
+                <a:latin typeface="Consolas"/>
+              </a:rPr>
+              <a:t> </a:t>
+            </a:r>
+            <a:r>
+              <a:rPr sz="1500" i="0" b="0">
+                <a:solidFill>
+                  <a:srgbClr val="D4D4D4"/>
+                </a:solidFill>
+                <a:latin typeface="Consolas"/>
+              </a:rPr>
+              <a:t>el</a:t>
+            </a:r>
+            <a:r>
+              <a:rPr sz="1500" i="0" b="0">
+                <a:solidFill>
+                  <a:srgbClr val="D4D4D4"/>
+                </a:solidFill>
+                <a:latin typeface="Consolas"/>
+              </a:rPr>
+              <a:t> </a:t>
+            </a:r>
+            <a:r>
+              <a:rPr sz="1500" i="0" b="0">
+                <a:solidFill>
+                  <a:srgbClr val="D4D4D4"/>
+                </a:solidFill>
+                <a:latin typeface="Consolas"/>
+              </a:rPr>
+              <a:t>mensaje</a:t>
+            </a:r>
+            <a:r>
+              <a:rPr sz="1500" i="0" b="0">
+                <a:solidFill>
+                  <a:srgbClr val="D4D4D4"/>
+                </a:solidFill>
+                <a:latin typeface="Consolas"/>
+              </a:rPr>
+              <a:t> </a:t>
+            </a:r>
+            <a:r>
+              <a:rPr sz="1500" i="0" b="0">
+                <a:solidFill>
+                  <a:srgbClr val="D4D4D4"/>
+                </a:solidFill>
+                <a:latin typeface="Consolas"/>
+              </a:rPr>
+              <a:t>y</a:t>
+            </a:r>
+            <a:r>
+              <a:rPr sz="1500" i="0" b="0">
+                <a:solidFill>
+                  <a:srgbClr val="D4D4D4"/>
+                </a:solidFill>
+                <a:latin typeface="Consolas"/>
+              </a:rPr>
+              <a:t> </a:t>
+            </a:r>
+            <a:r>
+              <a:rPr sz="1500" i="0" b="0">
+                <a:solidFill>
+                  <a:srgbClr val="D4D4D4"/>
+                </a:solidFill>
+                <a:latin typeface="Consolas"/>
+              </a:rPr>
+              <a:t>no</a:t>
+            </a:r>
+            <a:r>
+              <a:rPr sz="1500" i="0" b="0">
+                <a:solidFill>
+                  <a:srgbClr val="D4D4D4"/>
+                </a:solidFill>
+                <a:latin typeface="Consolas"/>
+              </a:rPr>
+              <a:t> </a:t>
+            </a:r>
+            <a:r>
+              <a:rPr sz="1500" i="0" b="0">
+                <a:solidFill>
+                  <a:srgbClr val="D4D4D4"/>
+                </a:solidFill>
+                <a:latin typeface="Consolas"/>
+              </a:rPr>
+              <a:t>sigue</a:t>
+            </a:r>
+          </a:p>
+          <a:p>
+            <a:pPr>
+              <a:spcAft>
+                <a:spcPts val="321"/>
+              </a:spcAft>
+            </a:pPr>
+            <a:r>
+              <a:rPr sz="1500" i="0" b="0">
+                <a:solidFill>
+                  <a:srgbClr val="D4D4D4"/>
+                </a:solidFill>
+                <a:latin typeface="Consolas"/>
+              </a:rPr>
+              <a:t>  </a:t>
+            </a:r>
+            <a:r>
+              <a:rPr sz="1500" i="0" b="0">
+                <a:solidFill>
+                  <a:srgbClr val="D4D4D4"/>
+                </a:solidFill>
+                <a:latin typeface="Consolas"/>
+              </a:rPr>
+              <a:t>else</a:t>
+            </a:r>
+            <a:r>
+              <a:rPr sz="1500" i="0" b="0">
+                <a:solidFill>
+                  <a:srgbClr val="D4D4D4"/>
+                </a:solidFill>
+                <a:latin typeface="Consolas"/>
+              </a:rPr>
+              <a:t> </a:t>
+            </a:r>
+            <a:r>
+              <a:rPr sz="1500" i="0" b="0">
+                <a:solidFill>
+                  <a:srgbClr val="D4D4D4"/>
+                </a:solidFill>
+                <a:latin typeface="Consolas"/>
+              </a:rPr>
+              <a:t>ok</a:t>
+            </a:r>
+            <a:r>
+              <a:rPr sz="1500" i="0" b="0">
+                <a:solidFill>
+                  <a:srgbClr val="D4D4D4"/>
+                </a:solidFill>
+                <a:latin typeface="Consolas"/>
+              </a:rPr>
+              <a:t> = </a:t>
+            </a:r>
+            <a:r>
+              <a:rPr sz="1500" i="0" b="0">
+                <a:solidFill>
+                  <a:srgbClr val="D4D4D4"/>
+                </a:solidFill>
+                <a:latin typeface="Consolas"/>
+              </a:rPr>
+              <a:t>true</a:t>
+            </a:r>
+          </a:p>
+          <a:p>
+            <a:pPr>
+              <a:spcAft>
+                <a:spcPts val="321"/>
+              </a:spcAft>
+            </a:pPr>
+            <a:r>
+              <a:rPr sz="1500" i="0" b="0">
+                <a:solidFill>
+                  <a:srgbClr val="D4D4D4"/>
+                </a:solidFill>
+                <a:latin typeface="Consolas"/>
+              </a:rPr>
+              <a:t>    </a:t>
+            </a:r>
+            <a:r>
+              <a:rPr sz="1500" i="0" b="0">
+                <a:solidFill>
+                  <a:srgbClr val="D4D4D4"/>
+                </a:solidFill>
+                <a:latin typeface="Consolas"/>
+              </a:rPr>
+              <a:t>B</a:t>
+            </a:r>
+            <a:r>
+              <a:rPr sz="1500" i="0" b="0">
+                <a:solidFill>
+                  <a:srgbClr val="D4D4D4"/>
+                </a:solidFill>
+                <a:latin typeface="Consolas"/>
+              </a:rPr>
+              <a:t>--&gt;&gt;</a:t>
+            </a:r>
+            <a:r>
+              <a:rPr sz="1500" i="0" b="0">
+                <a:solidFill>
+                  <a:srgbClr val="D4D4D4"/>
+                </a:solidFill>
+                <a:latin typeface="Consolas"/>
+              </a:rPr>
+              <a:t>A</a:t>
+            </a:r>
+            <a:r>
+              <a:rPr sz="1500" i="0" b="0">
+                <a:solidFill>
+                  <a:srgbClr val="D4D4D4"/>
+                </a:solidFill>
+                <a:latin typeface="Consolas"/>
+              </a:rPr>
+              <a:t>: </a:t>
+            </a:r>
+            <a:r>
+              <a:rPr sz="1500" i="0" b="0">
+                <a:solidFill>
+                  <a:srgbClr val="D4D4D4"/>
+                </a:solidFill>
+                <a:latin typeface="Consolas"/>
+              </a:rPr>
+              <a:t>true</a:t>
+            </a:r>
+            <a:r>
+              <a:rPr sz="1500" i="0" b="0">
+                <a:solidFill>
+                  <a:srgbClr val="D4D4D4"/>
+                </a:solidFill>
+                <a:latin typeface="Consolas"/>
+              </a:rPr>
+              <a:t>, </a:t>
+            </a:r>
+            <a:r>
+              <a:rPr sz="1500" i="0" b="0">
+                <a:solidFill>
+                  <a:srgbClr val="D4D4D4"/>
+                </a:solidFill>
+                <a:latin typeface="Consolas"/>
+              </a:rPr>
+              <a:t>Cita</a:t>
+            </a:r>
+            <a:r>
+              <a:rPr sz="1500" i="0" b="0">
+                <a:solidFill>
+                  <a:srgbClr val="D4D4D4"/>
+                </a:solidFill>
+                <a:latin typeface="Consolas"/>
+              </a:rPr>
+              <a:t> </a:t>
+            </a:r>
+            <a:r>
+              <a:rPr sz="1500" i="0" b="0">
+                <a:solidFill>
+                  <a:srgbClr val="D4D4D4"/>
+                </a:solidFill>
+                <a:latin typeface="Consolas"/>
+              </a:rPr>
+              <a:t>cancelada</a:t>
+            </a:r>
+            <a:r>
+              <a:rPr sz="1500" i="0" b="0">
+                <a:solidFill>
+                  <a:srgbClr val="D4D4D4"/>
+                </a:solidFill>
+                <a:latin typeface="Consolas"/>
+              </a:rPr>
+              <a:t>, </a:t>
+            </a:r>
+            <a:r>
+              <a:rPr sz="1500" i="0" b="0">
+                <a:solidFill>
+                  <a:srgbClr val="B5CEA8"/>
+                </a:solidFill>
+                <a:latin typeface="Consolas"/>
+              </a:rPr>
+              <a:t>3</a:t>
+            </a:r>
+          </a:p>
+          <a:p>
+            <a:pPr>
+              <a:spcAft>
+                <a:spcPts val="321"/>
+              </a:spcAft>
+            </a:pPr>
+            <a:r>
+              <a:rPr sz="1500" i="0" b="0">
+                <a:solidFill>
+                  <a:srgbClr val="D4D4D4"/>
+                </a:solidFill>
+                <a:latin typeface="Consolas"/>
+              </a:rPr>
+              <a:t>    </a:t>
+            </a:r>
+            <a:r>
+              <a:rPr sz="1500" i="0" b="0">
+                <a:solidFill>
+                  <a:srgbClr val="D4D4D4"/>
+                </a:solidFill>
+                <a:latin typeface="Consolas"/>
+              </a:rPr>
+              <a:t>A</a:t>
+            </a:r>
+            <a:r>
+              <a:rPr sz="1500" i="0" b="0">
+                <a:solidFill>
+                  <a:srgbClr val="D4D4D4"/>
+                </a:solidFill>
+                <a:latin typeface="Consolas"/>
+              </a:rPr>
+              <a:t>--&gt;&gt;</a:t>
+            </a:r>
+            <a:r>
+              <a:rPr sz="1500" i="0" b="0">
+                <a:solidFill>
+                  <a:srgbClr val="D4D4D4"/>
+                </a:solidFill>
+                <a:latin typeface="Consolas"/>
+              </a:rPr>
+              <a:t>R</a:t>
+            </a:r>
+            <a:r>
+              <a:rPr sz="1500" i="0" b="0">
+                <a:solidFill>
+                  <a:srgbClr val="D4D4D4"/>
+                </a:solidFill>
+                <a:latin typeface="Consolas"/>
+              </a:rPr>
+              <a:t>: </a:t>
+            </a:r>
+            <a:r>
+              <a:rPr sz="1500" i="0" b="0">
+                <a:solidFill>
+                  <a:srgbClr val="D4D4D4"/>
+                </a:solidFill>
+                <a:latin typeface="Consolas"/>
+              </a:rPr>
+              <a:t>Confirma</a:t>
+            </a:r>
+            <a:r>
+              <a:rPr sz="1500" i="0" b="0">
+                <a:solidFill>
+                  <a:srgbClr val="D4D4D4"/>
+                </a:solidFill>
+                <a:latin typeface="Consolas"/>
+              </a:rPr>
+              <a:t> </a:t>
+            </a:r>
+            <a:r>
+              <a:rPr sz="1500" i="0" b="0">
+                <a:solidFill>
+                  <a:srgbClr val="D4D4D4"/>
+                </a:solidFill>
+                <a:latin typeface="Consolas"/>
+              </a:rPr>
+              <a:t>la</a:t>
+            </a:r>
+            <a:r>
+              <a:rPr sz="1500" i="0" b="0">
+                <a:solidFill>
+                  <a:srgbClr val="D4D4D4"/>
+                </a:solidFill>
+                <a:latin typeface="Consolas"/>
+              </a:rPr>
+              <a:t> </a:t>
+            </a:r>
+            <a:r>
+              <a:rPr sz="1500" i="0" b="0">
+                <a:solidFill>
+                  <a:srgbClr val="D4D4D4"/>
+                </a:solidFill>
+                <a:latin typeface="Consolas"/>
+              </a:rPr>
+              <a:t>cancelacion</a:t>
+            </a:r>
+          </a:p>
+          <a:p>
+            <a:pPr>
+              <a:spcAft>
+                <a:spcPts val="321"/>
+              </a:spcAft>
+            </a:pPr>
+            <a:r>
+              <a:rPr sz="1500" i="0" b="0">
+                <a:solidFill>
+                  <a:srgbClr val="D4D4D4"/>
+                </a:solidFill>
+                <a:latin typeface="Consolas"/>
+              </a:rPr>
+              <a:t>  </a:t>
+            </a:r>
+            <a:r>
+              <a:rPr sz="1500" i="0" b="0">
+                <a:solidFill>
+                  <a:srgbClr val="D4D4D4"/>
+                </a:solidFill>
+                <a:latin typeface="Consolas"/>
+              </a:rPr>
+              <a:t>end</a:t>
+            </a:r>
+          </a:p>
+          <a:p>
+            <a:pPr>
+              <a:spcAft>
+                <a:spcPts val="321"/>
+              </a:spcAft>
+            </a:pPr>
+            <a:r>
+              <a:rPr sz="1500" i="0" b="0">
+                <a:solidFill>
+                  <a:srgbClr val="D4D4D4"/>
+                </a:solidFill>
+                <a:latin typeface="Consolas"/>
+              </a:rPr>
+              <a:t>  </a:t>
+            </a:r>
+            <a:r>
+              <a:rPr sz="1500" i="0" b="0">
+                <a:solidFill>
+                  <a:srgbClr val="D4D4D4"/>
+                </a:solidFill>
+                <a:latin typeface="Consolas"/>
+              </a:rPr>
+              <a:t>Note</a:t>
+            </a:r>
+            <a:r>
+              <a:rPr sz="1500" i="0" b="0">
+                <a:solidFill>
+                  <a:srgbClr val="D4D4D4"/>
+                </a:solidFill>
+                <a:latin typeface="Consolas"/>
+              </a:rPr>
+              <a:t> </a:t>
+            </a:r>
+            <a:r>
+              <a:rPr sz="1500" i="0" b="0">
+                <a:solidFill>
+                  <a:srgbClr val="D4D4D4"/>
+                </a:solidFill>
+                <a:latin typeface="Consolas"/>
+              </a:rPr>
+              <a:t>over</a:t>
+            </a:r>
+            <a:r>
+              <a:rPr sz="1500" i="0" b="0">
+                <a:solidFill>
+                  <a:srgbClr val="D4D4D4"/>
+                </a:solidFill>
+                <a:latin typeface="Consolas"/>
+              </a:rPr>
+              <a:t> </a:t>
+            </a:r>
+            <a:r>
+              <a:rPr sz="1500" i="0" b="0">
+                <a:solidFill>
+                  <a:srgbClr val="D4D4D4"/>
+                </a:solidFill>
+                <a:latin typeface="Consolas"/>
+              </a:rPr>
+              <a:t>A</a:t>
+            </a:r>
+            <a:r>
+              <a:rPr sz="1500" i="0" b="0">
+                <a:solidFill>
+                  <a:srgbClr val="D4D4D4"/>
+                </a:solidFill>
+                <a:latin typeface="Consolas"/>
+              </a:rPr>
+              <a:t>,</a:t>
+            </a:r>
+            <a:r>
+              <a:rPr sz="1500" i="0" b="0">
+                <a:solidFill>
+                  <a:srgbClr val="D4D4D4"/>
+                </a:solidFill>
+                <a:latin typeface="Consolas"/>
+              </a:rPr>
+              <a:t>B</a:t>
+            </a:r>
+            <a:r>
+              <a:rPr sz="1500" i="0" b="0">
+                <a:solidFill>
+                  <a:srgbClr val="D4D4D4"/>
+                </a:solidFill>
+                <a:latin typeface="Consolas"/>
+              </a:rPr>
+              <a:t>: </a:t>
+            </a:r>
+            <a:r>
+              <a:rPr sz="1500" i="0" b="0">
+                <a:solidFill>
+                  <a:srgbClr val="D4D4D4"/>
+                </a:solidFill>
+                <a:latin typeface="Consolas"/>
+              </a:rPr>
+              <a:t>La</a:t>
+            </a:r>
+            <a:r>
+              <a:rPr sz="1500" i="0" b="0">
+                <a:solidFill>
+                  <a:srgbClr val="D4D4D4"/>
+                </a:solidFill>
+                <a:latin typeface="Consolas"/>
+              </a:rPr>
+              <a:t> </a:t>
+            </a:r>
+            <a:r>
+              <a:rPr sz="1500" i="0" b="0">
+                <a:solidFill>
+                  <a:srgbClr val="D4D4D4"/>
+                </a:solidFill>
+                <a:latin typeface="Consolas"/>
+              </a:rPr>
+              <a:t>aplicacion</a:t>
+            </a:r>
+            <a:r>
+              <a:rPr sz="1500" i="0" b="0">
+                <a:solidFill>
+                  <a:srgbClr val="D4D4D4"/>
+                </a:solidFill>
+                <a:latin typeface="Consolas"/>
+              </a:rPr>
+              <a:t> </a:t>
+            </a:r>
+            <a:r>
+              <a:rPr sz="1500" i="0" b="0">
+                <a:solidFill>
+                  <a:srgbClr val="D4D4D4"/>
+                </a:solidFill>
+                <a:latin typeface="Consolas"/>
+              </a:rPr>
+              <a:t>no</a:t>
+            </a:r>
+            <a:r>
+              <a:rPr sz="1500" i="0" b="0">
+                <a:solidFill>
+                  <a:srgbClr val="D4D4D4"/>
+                </a:solidFill>
+                <a:latin typeface="Consolas"/>
+              </a:rPr>
+              <a:t> </a:t>
+            </a:r>
+            <a:r>
+              <a:rPr sz="1500" i="0" b="0">
+                <a:solidFill>
+                  <a:srgbClr val="D4D4D4"/>
+                </a:solidFill>
+                <a:latin typeface="Consolas"/>
+              </a:rPr>
+              <a:t>hace</a:t>
+            </a:r>
+            <a:r>
+              <a:rPr sz="1500" i="0" b="0">
+                <a:solidFill>
+                  <a:srgbClr val="D4D4D4"/>
+                </a:solidFill>
+                <a:latin typeface="Consolas"/>
+              </a:rPr>
+              <a:t> </a:t>
+            </a:r>
+            <a:r>
+              <a:rPr sz="1500" i="0" b="0">
+                <a:solidFill>
+                  <a:srgbClr val="D4D4D4"/>
+                </a:solidFill>
+                <a:latin typeface="Consolas"/>
+              </a:rPr>
+              <a:t>UPDATE</a:t>
+            </a:r>
+            <a:r>
+              <a:rPr sz="1500" i="0" b="0">
+                <a:solidFill>
+                  <a:srgbClr val="D4D4D4"/>
+                </a:solidFill>
+                <a:latin typeface="Consolas"/>
+              </a:rPr>
+              <a:t> </a:t>
+            </a:r>
+            <a:r>
+              <a:rPr sz="1500" i="0" b="0">
+                <a:solidFill>
+                  <a:srgbClr val="D4D4D4"/>
+                </a:solidFill>
+                <a:latin typeface="Consolas"/>
+              </a:rPr>
+              <a:t>directo</a:t>
+            </a:r>
+            <a:r>
+              <a:rPr sz="1500" i="0" b="0">
+                <a:solidFill>
+                  <a:srgbClr val="D4D4D4"/>
+                </a:solidFill>
+                <a:latin typeface="Consolas"/>
+              </a:rPr>
+              <a:t> </a:t>
+            </a:r>
+            <a:r>
+              <a:rPr sz="1500" i="0" b="0">
+                <a:solidFill>
+                  <a:srgbClr val="D4D4D4"/>
+                </a:solidFill>
+                <a:latin typeface="Consolas"/>
+              </a:rPr>
+              <a:t>sobre</a:t>
+            </a:r>
+            <a:r>
+              <a:rPr sz="1500" i="0" b="0">
+                <a:solidFill>
+                  <a:srgbClr val="D4D4D4"/>
+                </a:solidFill>
+                <a:latin typeface="Consolas"/>
+              </a:rPr>
+              <a:t> </a:t>
+            </a:r>
+            <a:r>
+              <a:rPr sz="1500" i="0" b="0">
+                <a:solidFill>
+                  <a:srgbClr val="D4D4D4"/>
+                </a:solidFill>
+                <a:latin typeface="Consolas"/>
+              </a:rPr>
+              <a:t>cita</a:t>
+            </a:r>
+          </a:p>
+        </p:txBody>
+      </p:sp>
+      <p:sp>
+        <p:nvSpPr>
+          <p:cNvPr id="13" name="TextBox 12"/>
           <p:cNvSpPr txBox="1"/>
           <p:nvPr/>
         </p:nvSpPr>
@@ -7372,142 +12144,6 @@
   <p:clrMapOvr>
     <a:masterClrMapping/>
   </p:clrMapOvr>
-  <p:timing>
-    <p:tnLst>
-      <p:par>
-        <p:cTn id="1" dur="indefinite" restart="never" nodeType="tmRoot">
-          <p:childTnLst>
-            <p:seq concurrent="1" nextAc="seek">
-              <p:cTn id="2" dur="indefinite" nodeType="mainSeq">
-                <p:childTnLst>
-                  <p:par>
-                    <p:cTn id="3" fill="hold">
-                      <p:stCondLst>
-                        <p:cond delay="indefinite"/>
-                      </p:stCondLst>
-                      <p:childTnLst>
-                        <p:par>
-                          <p:cTn id="4" fill="hold">
-                            <p:stCondLst>
-                              <p:cond delay="0"/>
-                            </p:stCondLst>
-                            <p:childTnLst>
-                              <p:par>
-                                <p:cTn id="5" presetID="10" presetClass="entr" presetSubtype="0" fill="hold" nodeType="clickEffect">
-                                  <p:stCondLst>
-                                    <p:cond delay="0"/>
-                                  </p:stCondLst>
-                                  <p:childTnLst>
-                                    <p:set>
-                                      <p:cBhvr>
-                                        <p:cTn id="6" dur="1" fill="hold">
-                                          <p:stCondLst>
-                                            <p:cond delay="0"/>
-                                          </p:stCondLst>
-                                        </p:cTn>
-                                        <p:tgtEl>
-                                          <p:spTgt spid="7"/>
-                                        </p:tgtEl>
-                                        <p:attrNameLst>
-                                          <p:attrName>style.visibility</p:attrName>
-                                        </p:attrNameLst>
-                                      </p:cBhvr>
-                                      <p:to>
-                                        <p:strVal val="visible"/>
-                                      </p:to>
-                                    </p:set>
-                                    <p:animEffect transition="in" filter="fade">
-                                      <p:cBhvr>
-                                        <p:cTn id="7" dur="450"/>
-                                        <p:tgtEl>
-                                          <p:spTgt spid="7"/>
-                                        </p:tgtEl>
-                                      </p:cBhvr>
-                                    </p:animEffect>
-                                  </p:childTnLst>
-                                </p:cTn>
-                              </p:par>
-                            </p:childTnLst>
-                          </p:cTn>
-                        </p:par>
-                      </p:childTnLst>
-                    </p:cTn>
-                  </p:par>
-                  <p:par>
-                    <p:cTn id="8" fill="hold">
-                      <p:stCondLst>
-                        <p:cond delay="indefinite"/>
-                      </p:stCondLst>
-                      <p:childTnLst>
-                        <p:par>
-                          <p:cTn id="9" fill="hold">
-                            <p:stCondLst>
-                              <p:cond delay="0"/>
-                            </p:stCondLst>
-                            <p:childTnLst>
-                              <p:par>
-                                <p:cTn id="10" presetID="10" presetClass="entr" presetSubtype="0" fill="hold" nodeType="clickEffect">
-                                  <p:stCondLst>
-                                    <p:cond delay="0"/>
-                                  </p:stCondLst>
-                                  <p:childTnLst>
-                                    <p:set>
-                                      <p:cBhvr>
-                                        <p:cTn id="11" dur="1" fill="hold">
-                                          <p:stCondLst>
-                                            <p:cond delay="0"/>
-                                          </p:stCondLst>
-                                        </p:cTn>
-                                        <p:tgtEl>
-                                          <p:spTgt spid="8"/>
-                                        </p:tgtEl>
-                                        <p:attrNameLst>
-                                          <p:attrName>style.visibility</p:attrName>
-                                        </p:attrNameLst>
-                                      </p:cBhvr>
-                                      <p:to>
-                                        <p:strVal val="visible"/>
-                                      </p:to>
-                                    </p:set>
-                                    <p:animEffect transition="in" filter="fade">
-                                      <p:cBhvr>
-                                        <p:cTn id="12" dur="450"/>
-                                        <p:tgtEl>
-                                          <p:spTgt spid="8"/>
-                                        </p:tgtEl>
-                                      </p:cBhvr>
-                                    </p:animEffect>
-                                  </p:childTnLst>
-                                </p:cTn>
-                              </p:par>
-                            </p:childTnLst>
-                          </p:cTn>
-                        </p:par>
-                      </p:childTnLst>
-                    </p:cTn>
-                  </p:par>
-                </p:childTnLst>
-              </p:cTn>
-              <p:prevCondLst>
-                <p:cond evt="onPrev" delay="0">
-                  <p:tgtEl>
-                    <p:sldTgt/>
-                  </p:tgtEl>
-                </p:cond>
-              </p:prevCondLst>
-              <p:nextCondLst>
-                <p:cond evt="onNext" delay="0">
-                  <p:tgtEl>
-                    <p:sldTgt/>
-                  </p:tgtEl>
-                </p:cond>
-              </p:nextCondLst>
-            </p:seq>
-          </p:childTnLst>
-        </p:cTn>
-      </p:par>
-    </p:tnLst>
-  </p:timing>
 </p:sld>
 </file>
 
@@ -7644,7 +12280,7 @@
                 </a:solidFill>
                 <a:latin typeface="Calibri"/>
               </a:rPr>
-              <a:t>Cambiar el esquema sin romper la aplicacion que ya corre</a:t>
+              <a:t>El pool de conexiones: que es y por que se agota</a:t>
             </a:r>
           </a:p>
         </p:txBody>
@@ -7696,7 +12332,7 @@
       </p:sp>
       <p:pic>
         <p:nvPicPr>
-          <p:cNvPr id="6" name="Picture 5" descr="expandir-contraer-paso1.png"/>
+          <p:cNvPr id="6" name="Picture 5" descr="pool-conexiones-paso1.png"/>
           <p:cNvPicPr>
             <a:picLocks noChangeAspect="1"/>
           </p:cNvPicPr>
@@ -7720,7 +12356,7 @@
       </p:pic>
       <p:pic>
         <p:nvPicPr>
-          <p:cNvPr id="7" name="Picture 6" descr="expandir-contraer-paso2.png"/>
+          <p:cNvPr id="7" name="Picture 6" descr="pool-conexiones-paso2.png"/>
           <p:cNvPicPr>
             <a:picLocks noChangeAspect="1"/>
           </p:cNvPicPr>
@@ -7744,7 +12380,7 @@
       </p:pic>
       <p:pic>
         <p:nvPicPr>
-          <p:cNvPr id="8" name="Picture 7" descr="expandir-contraer-paso3.png"/>
+          <p:cNvPr id="8" name="Picture 7" descr="pool-conexiones-paso3.png"/>
           <p:cNvPicPr>
             <a:picLocks noChangeAspect="1"/>
           </p:cNvPicPr>
@@ -7835,7 +12471,25 @@
                 </a:solidFill>
                 <a:latin typeface="Calibri"/>
               </a:rPr>
-              <a:t>–   Queda el problema mas subestimado: cambiar el esquema sin romper la aplicacion que ya esta corriendo.</a:t>
+              <a:t>–   Abrir una conexión cuesta </a:t>
+            </a:r>
+            <a:r>
+              <a:rPr sz="2000" b="1" i="0">
+                <a:solidFill>
+                  <a:srgbClr val="333333"/>
+                </a:solidFill>
+                <a:latin typeface="Calibri"/>
+              </a:rPr>
+              <a:t>decenas de milisegundos</a:t>
+            </a:r>
+            <a:r>
+              <a:rPr sz="2000" b="0" i="0">
+                <a:solidFill>
+                  <a:srgbClr val="333333"/>
+                </a:solidFill>
+                <a:latin typeface="Calibri"/>
+              </a:rPr>
+              <a:t>, y una consulta indexada, dos o tres.</a:t>
             </a:r>
           </a:p>
           <a:p>
@@ -7851,7 +12505,25 @@
                 </a:solidFill>
                 <a:latin typeface="Calibri"/>
               </a:rPr>
-              <a:t>–   La regla es que nunca se cambia una cosa en su lugar, se expande, se migra y despues se contrae.</a:t>
+              <a:t>–   Un </a:t>
+            </a:r>
+            <a:r>
+              <a:rPr sz="2000" b="1" i="0">
+                <a:solidFill>
+                  <a:srgbClr val="333333"/>
+                </a:solidFill>
+                <a:latin typeface="Calibri"/>
+              </a:rPr>
+              <a:t>pool</a:t>
+            </a:r>
+            <a:r>
+              <a:rPr sz="2000" b="0" i="0">
+                <a:solidFill>
+                  <a:srgbClr val="333333"/>
+                </a:solidFill>
+                <a:latin typeface="Calibri"/>
+              </a:rPr>
+              <a:t> mantiene conexiones ya abiertas, las presta a cada petición y las recupera al terminar.</a:t>
             </a:r>
           </a:p>
           <a:p>
@@ -7867,7 +12539,25 @@
                 </a:solidFill>
                 <a:latin typeface="Calibri"/>
               </a:rPr>
-              <a:t>–   Uno, expandir:, sin tocar ningun procedimiento; la aplicacion vieja ignora la columna y sigue igual porque admite nulos.</a:t>
+              <a:t>–   Su tamaño no se maximiza: se empieza con </a:t>
+            </a:r>
+            <a:r>
+              <a:rPr sz="2000" b="1" i="0">
+                <a:solidFill>
+                  <a:srgbClr val="333333"/>
+                </a:solidFill>
+                <a:latin typeface="Calibri"/>
+              </a:rPr>
+              <a:t>unas diez</a:t>
+            </a:r>
+            <a:r>
+              <a:rPr sz="2000" b="0" i="0">
+                <a:solidFill>
+                  <a:srgbClr val="333333"/>
+                </a:solidFill>
+                <a:latin typeface="Calibri"/>
+              </a:rPr>
+              <a:t> y se sube solo midiendo.</a:t>
             </a:r>
           </a:p>
           <a:p>
@@ -7883,7 +12573,25 @@
                 </a:solidFill>
                 <a:latin typeface="Calibri"/>
               </a:rPr>
-              <a:t>–   Dos, escribir en ambos lados: sp_inactivar_mascota se actualiza para llenar tambien la columna nueva.</a:t>
+              <a:t>–   Si una ruta no devuelve la conexión, el pool se </a:t>
+            </a:r>
+            <a:r>
+              <a:rPr sz="2000" b="1" i="0">
+                <a:solidFill>
+                  <a:srgbClr val="333333"/>
+                </a:solidFill>
+                <a:latin typeface="Calibri"/>
+              </a:rPr>
+              <a:t>agota</a:t>
+            </a:r>
+            <a:r>
+              <a:rPr sz="2000" b="0" i="0">
+                <a:solidFill>
+                  <a:srgbClr val="333333"/>
+                </a:solidFill>
+                <a:latin typeface="Calibri"/>
+              </a:rPr>
+              <a:t> y el sistema deja de responder.</a:t>
             </a:r>
           </a:p>
         </p:txBody>
@@ -8200,21 +12908,173 @@
                 </a:solidFill>
                 <a:latin typeface="Calibri"/>
               </a:rPr>
-              <a:t>Demo del dia</a:t>
-            </a:r>
-          </a:p>
-        </p:txBody>
-      </p:sp>
-      <p:sp>
-        <p:nvSpPr>
-          <p:cNvPr id="5" name="TextBox 4"/>
+              <a:t>Logica en la base o en la aplicacion: honestidad y no propaganda</a:t>
+            </a:r>
+          </a:p>
+        </p:txBody>
+      </p:sp>
+      <p:sp>
+        <p:nvSpPr>
+          <p:cNvPr id="5" name="Rounded Rectangle 4"/>
+          <p:cNvSpPr/>
+          <p:nvPr/>
+        </p:nvSpPr>
+        <p:spPr>
+          <a:xfrm>
+            <a:off x="5803166" y="1188719"/>
+            <a:ext cx="5998464" cy="4828032"/>
+          </a:xfrm>
+          <a:prstGeom prst="roundRect">
+            <a:avLst>
+              <a:gd name="adj" fmla="val 4000"/>
+            </a:avLst>
+          </a:prstGeom>
+          <a:solidFill>
+            <a:srgbClr val="E8EEF4"/>
+          </a:solidFill>
+          <a:ln>
+            <a:noFill/>
+          </a:ln>
+        </p:spPr>
+        <p:style>
+          <a:lnRef idx="1">
+            <a:schemeClr val="accent1"/>
+          </a:lnRef>
+          <a:fillRef idx="3">
+            <a:schemeClr val="accent1"/>
+          </a:fillRef>
+          <a:effectRef idx="2">
+            <a:schemeClr val="accent1"/>
+          </a:effectRef>
+          <a:fontRef idx="minor">
+            <a:schemeClr val="lt1"/>
+          </a:fontRef>
+        </p:style>
+        <p:txBody>
+          <a:bodyPr rtlCol="0" anchor="ctr"/>
+          <a:lstStyle/>
+          <a:p>
+            <a:pPr algn="ctr"/>
+          </a:p>
+        </p:txBody>
+      </p:sp>
+      <p:pic>
+        <p:nvPicPr>
+          <p:cNvPr id="6" name="Picture 5" descr="logica-base-app-paso1.png"/>
+          <p:cNvPicPr>
+            <a:picLocks noChangeAspect="1"/>
+          </p:cNvPicPr>
+          <p:nvPr/>
+        </p:nvPicPr>
+        <p:blipFill>
+          <a:blip r:embed="rId2"/>
+          <a:stretch>
+            <a:fillRect/>
+          </a:stretch>
+        </p:blipFill>
+        <p:spPr>
+          <a:xfrm>
+            <a:off x="5876318" y="1261872"/>
+            <a:ext cx="5852160" cy="4681728"/>
+          </a:xfrm>
+          <a:prstGeom prst="rect">
+            <a:avLst/>
+          </a:prstGeom>
+        </p:spPr>
+      </p:pic>
+      <p:pic>
+        <p:nvPicPr>
+          <p:cNvPr id="7" name="Picture 6" descr="logica-base-app-paso2.png"/>
+          <p:cNvPicPr>
+            <a:picLocks noChangeAspect="1"/>
+          </p:cNvPicPr>
+          <p:nvPr/>
+        </p:nvPicPr>
+        <p:blipFill>
+          <a:blip r:embed="rId3"/>
+          <a:stretch>
+            <a:fillRect/>
+          </a:stretch>
+        </p:blipFill>
+        <p:spPr>
+          <a:xfrm>
+            <a:off x="5876318" y="1261872"/>
+            <a:ext cx="5852160" cy="4681728"/>
+          </a:xfrm>
+          <a:prstGeom prst="rect">
+            <a:avLst/>
+          </a:prstGeom>
+        </p:spPr>
+      </p:pic>
+      <p:pic>
+        <p:nvPicPr>
+          <p:cNvPr id="8" name="Picture 7" descr="logica-base-app-paso3.png"/>
+          <p:cNvPicPr>
+            <a:picLocks noChangeAspect="1"/>
+          </p:cNvPicPr>
+          <p:nvPr/>
+        </p:nvPicPr>
+        <p:blipFill>
+          <a:blip r:embed="rId4"/>
+          <a:stretch>
+            <a:fillRect/>
+          </a:stretch>
+        </p:blipFill>
+        <p:spPr>
+          <a:xfrm>
+            <a:off x="5876318" y="1261872"/>
+            <a:ext cx="5852160" cy="4681728"/>
+          </a:xfrm>
+          <a:prstGeom prst="rect">
+            <a:avLst/>
+          </a:prstGeom>
+        </p:spPr>
+      </p:pic>
+      <p:sp>
+        <p:nvSpPr>
+          <p:cNvPr id="13" name="TextBox 12"/>
           <p:cNvSpPr txBox="1"/>
           <p:nvPr/>
         </p:nvSpPr>
         <p:spPr>
           <a:xfrm>
-            <a:off x="457200" y="1170432"/>
-            <a:ext cx="11277295" cy="5230368"/>
+            <a:off x="5870301" y="5961888"/>
+            <a:ext cx="5864193" cy="320040"/>
+          </a:xfrm>
+          <a:prstGeom prst="rect">
+            <a:avLst/>
+          </a:prstGeom>
+          <a:noFill/>
+        </p:spPr>
+        <p:txBody>
+          <a:bodyPr wrap="square">
+            <a:spAutoFit/>
+          </a:bodyPr>
+          <a:lstStyle/>
+          <a:p>
+            <a:pPr algn="ctr"/>
+            <a:r>
+              <a:rPr sz="1100" b="0" i="1">
+                <a:solidFill>
+                  <a:srgbClr val="666666"/>
+                </a:solidFill>
+                <a:latin typeface="Calibri"/>
+              </a:rPr>
+              <a:t>Clic para avanzar la animación</a:t>
+            </a:r>
+          </a:p>
+        </p:txBody>
+      </p:sp>
+      <p:sp>
+        <p:nvSpPr>
+          <p:cNvPr id="14" name="TextBox 13"/>
+          <p:cNvSpPr txBox="1"/>
+          <p:nvPr/>
+        </p:nvSpPr>
+        <p:spPr>
+          <a:xfrm>
+            <a:off x="457200" y="1353312"/>
+            <a:ext cx="5093061" cy="5047488"/>
           </a:xfrm>
           <a:prstGeom prst="rect">
             <a:avLst/>
@@ -8239,7 +13099,7 @@
                 </a:solidFill>
                 <a:latin typeface="Calibri"/>
               </a:rPr>
-              <a:t>–   </a:t>
+              <a:t>–   A favor de la base: la regla se escribe </a:t>
             </a:r>
             <a:r>
               <a:rPr sz="2000" b="1" i="0">
@@ -8248,7 +13108,7 @@
                 </a:solidFill>
                 <a:latin typeface="Calibri"/>
               </a:rPr>
-              <a:t>Herramienta:</a:t>
+              <a:t>una vez</a:t>
             </a:r>
             <a:r>
               <a:rPr sz="2000" b="0" i="0">
@@ -8257,7 +13117,7 @@
                 </a:solidFill>
                 <a:latin typeface="Calibri"/>
               </a:rPr>
-              <a:t> Google Docs + Live SQL + Excalidraw</a:t>
+              <a:t> y la cumplen todos los clientes, en la misma transacción.</a:t>
             </a:r>
           </a:p>
           <a:p>
@@ -8273,7 +13133,7 @@
                 </a:solidFill>
                 <a:latin typeface="Calibri"/>
               </a:rPr>
-              <a:t>–   </a:t>
+              <a:t>–   En contra: es más difícil de probar y versionar, </a:t>
             </a:r>
             <a:r>
               <a:rPr sz="2000" b="1" i="0">
@@ -8282,7 +13142,7 @@
                 </a:solidFill>
                 <a:latin typeface="Calibri"/>
               </a:rPr>
-              <a:t>Demo:</a:t>
+              <a:t>ata al motor</a:t>
             </a:r>
             <a:r>
               <a:rPr sz="2000" b="0" i="0">
@@ -8291,7 +13151,7 @@
                 </a:solidFill>
                 <a:latin typeface="Calibri"/>
               </a:rPr>
-              <a:t> Plantilla contrato sp_agendar_cita + storyboard 6 slides.</a:t>
+              <a:t> y su CPU es la más cara de escalar.</a:t>
             </a:r>
           </a:p>
           <a:p>
@@ -8307,15 +13167,17 @@
                 </a:solidFill>
                 <a:latin typeface="Calibri"/>
               </a:rPr>
-              <a:t>–   Sigan el mismo dominio de la clínica (no inventen otro caso).</a:t>
-            </a:r>
-          </a:p>
-          <a:p>
-            <a:pPr>
-              <a:spcAft>
-                <a:spcPts val="800"/>
-              </a:spcAft>
-            </a:pPr>
+              <a:t>–   Criterio: lo que protege la </a:t>
+            </a:r>
+            <a:r>
+              <a:rPr sz="2000" b="1" i="0">
+                <a:solidFill>
+                  <a:srgbClr val="333333"/>
+                </a:solidFill>
+                <a:latin typeface="Calibri"/>
+              </a:rPr>
+              <a:t>integridad</a:t>
+            </a:r>
             <a:r>
               <a:rPr sz="2000" b="0" i="0">
                 <a:solidFill>
@@ -8323,66 +13185,14 @@
                 </a:solidFill>
                 <a:latin typeface="Calibri"/>
               </a:rPr>
-              <a:t>–   </a:t>
-            </a:r>
-            <a:r>
-              <a:rPr sz="2000" b="1" i="0">
-                <a:solidFill>
-                  <a:srgbClr val="333333"/>
-                </a:solidFill>
-                <a:latin typeface="Calibri"/>
-              </a:rPr>
-              <a:t>Qué observar:</a:t>
-            </a:r>
-            <a:r>
-              <a:rPr sz="2000" b="0" i="0">
-                <a:solidFill>
-                  <a:srgbClr val="333333"/>
-                </a:solidFill>
-                <a:latin typeface="Calibri"/>
-              </a:rPr>
-              <a:t> el parametro viaja como dato: el texto «Luna' OR '1'='1» se busca literal y no devuelve todas las mascotas.</a:t>
-            </a:r>
-          </a:p>
-          <a:p>
-            <a:pPr>
-              <a:spcAft>
-                <a:spcPts val="800"/>
-              </a:spcAft>
-            </a:pPr>
-            <a:r>
-              <a:rPr sz="2000" b="0" i="0">
-                <a:solidFill>
-                  <a:srgbClr val="333333"/>
-                </a:solidFill>
-                <a:latin typeface="Calibri"/>
-              </a:rPr>
-              <a:t>–   </a:t>
-            </a:r>
-            <a:r>
-              <a:rPr sz="2000" b="1" i="0">
-                <a:solidFill>
-                  <a:srgbClr val="333333"/>
-                </a:solidFill>
-                <a:latin typeface="Calibri"/>
-              </a:rPr>
-              <a:t>Qué observar:</a:t>
-            </a:r>
-            <a:r>
-              <a:rPr sz="2000" b="0" i="0">
-                <a:solidFill>
-                  <a:srgbClr val="333333"/>
-                </a:solidFill>
-                <a:latin typeface="Calibri"/>
-              </a:rPr>
-              <a:t> la aplicacion solo conoce la firma del procedimiento y sus mensajes de error: no ve tablas ni arma SQL con texto.</a:t>
-            </a:r>
-          </a:p>
-        </p:txBody>
-      </p:sp>
-      <p:sp>
-        <p:nvSpPr>
-          <p:cNvPr id="6" name="TextBox 5"/>
+              <a:t> de los datos va en la base, y la presentación, en la aplicación.</a:t>
+            </a:r>
+          </a:p>
+        </p:txBody>
+      </p:sp>
+      <p:sp>
+        <p:nvSpPr>
+          <p:cNvPr id="15" name="TextBox 14"/>
           <p:cNvSpPr txBox="1"/>
           <p:nvPr/>
         </p:nvSpPr>
@@ -8420,6 +13230,142 @@
   <p:clrMapOvr>
     <a:masterClrMapping/>
   </p:clrMapOvr>
+  <p:timing>
+    <p:tnLst>
+      <p:par>
+        <p:cTn id="1" dur="indefinite" restart="never" nodeType="tmRoot">
+          <p:childTnLst>
+            <p:seq concurrent="1" nextAc="seek">
+              <p:cTn id="2" dur="indefinite" nodeType="mainSeq">
+                <p:childTnLst>
+                  <p:par>
+                    <p:cTn id="3" fill="hold">
+                      <p:stCondLst>
+                        <p:cond delay="indefinite"/>
+                      </p:stCondLst>
+                      <p:childTnLst>
+                        <p:par>
+                          <p:cTn id="4" fill="hold">
+                            <p:stCondLst>
+                              <p:cond delay="0"/>
+                            </p:stCondLst>
+                            <p:childTnLst>
+                              <p:par>
+                                <p:cTn id="5" presetID="10" presetClass="entr" presetSubtype="0" fill="hold" nodeType="clickEffect">
+                                  <p:stCondLst>
+                                    <p:cond delay="0"/>
+                                  </p:stCondLst>
+                                  <p:childTnLst>
+                                    <p:set>
+                                      <p:cBhvr>
+                                        <p:cTn id="6" dur="1" fill="hold">
+                                          <p:stCondLst>
+                                            <p:cond delay="0"/>
+                                          </p:stCondLst>
+                                        </p:cTn>
+                                        <p:tgtEl>
+                                          <p:spTgt spid="7"/>
+                                        </p:tgtEl>
+                                        <p:attrNameLst>
+                                          <p:attrName>style.visibility</p:attrName>
+                                        </p:attrNameLst>
+                                      </p:cBhvr>
+                                      <p:to>
+                                        <p:strVal val="visible"/>
+                                      </p:to>
+                                    </p:set>
+                                    <p:animEffect transition="in" filter="fade">
+                                      <p:cBhvr>
+                                        <p:cTn id="7" dur="450"/>
+                                        <p:tgtEl>
+                                          <p:spTgt spid="7"/>
+                                        </p:tgtEl>
+                                      </p:cBhvr>
+                                    </p:animEffect>
+                                  </p:childTnLst>
+                                </p:cTn>
+                              </p:par>
+                            </p:childTnLst>
+                          </p:cTn>
+                        </p:par>
+                      </p:childTnLst>
+                    </p:cTn>
+                  </p:par>
+                  <p:par>
+                    <p:cTn id="8" fill="hold">
+                      <p:stCondLst>
+                        <p:cond delay="indefinite"/>
+                      </p:stCondLst>
+                      <p:childTnLst>
+                        <p:par>
+                          <p:cTn id="9" fill="hold">
+                            <p:stCondLst>
+                              <p:cond delay="0"/>
+                            </p:stCondLst>
+                            <p:childTnLst>
+                              <p:par>
+                                <p:cTn id="10" presetID="10" presetClass="entr" presetSubtype="0" fill="hold" nodeType="clickEffect">
+                                  <p:stCondLst>
+                                    <p:cond delay="0"/>
+                                  </p:stCondLst>
+                                  <p:childTnLst>
+                                    <p:set>
+                                      <p:cBhvr>
+                                        <p:cTn id="11" dur="1" fill="hold">
+                                          <p:stCondLst>
+                                            <p:cond delay="0"/>
+                                          </p:stCondLst>
+                                        </p:cTn>
+                                        <p:tgtEl>
+                                          <p:spTgt spid="8"/>
+                                        </p:tgtEl>
+                                        <p:attrNameLst>
+                                          <p:attrName>style.visibility</p:attrName>
+                                        </p:attrNameLst>
+                                      </p:cBhvr>
+                                      <p:to>
+                                        <p:strVal val="visible"/>
+                                      </p:to>
+                                    </p:set>
+                                    <p:animEffect transition="in" filter="fade">
+                                      <p:cBhvr>
+                                        <p:cTn id="12" dur="450"/>
+                                        <p:tgtEl>
+                                          <p:spTgt spid="8"/>
+                                        </p:tgtEl>
+                                      </p:cBhvr>
+                                    </p:animEffect>
+                                  </p:childTnLst>
+                                </p:cTn>
+                              </p:par>
+                            </p:childTnLst>
+                          </p:cTn>
+                        </p:par>
+                      </p:childTnLst>
+                    </p:cTn>
+                  </p:par>
+                </p:childTnLst>
+              </p:cTn>
+              <p:prevCondLst>
+                <p:cond evt="onPrev" delay="0">
+                  <p:tgtEl>
+                    <p:sldTgt/>
+                  </p:tgtEl>
+                </p:cond>
+              </p:prevCondLst>
+              <p:nextCondLst>
+                <p:cond evt="onNext" delay="0">
+                  <p:tgtEl>
+                    <p:sldTgt/>
+                  </p:tgtEl>
+                </p:cond>
+              </p:nextCondLst>
+            </p:seq>
+          </p:childTnLst>
+        </p:cTn>
+      </p:par>
+    </p:tnLst>
+  </p:timing>
 </p:sld>
 </file>
 
@@ -8450,6 +13396,1240 @@
         <p:spPr>
           <a:xfrm>
             <a:off x="0" y="0"/>
+            <a:ext cx="12191695" cy="960120"/>
+          </a:xfrm>
+          <a:prstGeom prst="rect">
+            <a:avLst/>
+          </a:prstGeom>
+          <a:solidFill>
+            <a:srgbClr val="095292"/>
+          </a:solidFill>
+          <a:ln>
+            <a:noFill/>
+          </a:ln>
+        </p:spPr>
+        <p:style>
+          <a:lnRef idx="1">
+            <a:schemeClr val="accent1"/>
+          </a:lnRef>
+          <a:fillRef idx="3">
+            <a:schemeClr val="accent1"/>
+          </a:fillRef>
+          <a:effectRef idx="2">
+            <a:schemeClr val="accent1"/>
+          </a:effectRef>
+          <a:fontRef idx="minor">
+            <a:schemeClr val="lt1"/>
+          </a:fontRef>
+        </p:style>
+        <p:txBody>
+          <a:bodyPr rtlCol="0" anchor="ctr"/>
+          <a:lstStyle/>
+          <a:p>
+            <a:pPr algn="ctr"/>
+          </a:p>
+        </p:txBody>
+      </p:sp>
+      <p:sp>
+        <p:nvSpPr>
+          <p:cNvPr id="3" name="Rectangle 2"/>
+          <p:cNvSpPr/>
+          <p:nvPr/>
+        </p:nvSpPr>
+        <p:spPr>
+          <a:xfrm>
+            <a:off x="0" y="960120"/>
+            <a:ext cx="12191695" cy="41148"/>
+          </a:xfrm>
+          <a:prstGeom prst="rect">
+            <a:avLst/>
+          </a:prstGeom>
+          <a:solidFill>
+            <a:srgbClr val="FFD000"/>
+          </a:solidFill>
+          <a:ln>
+            <a:noFill/>
+          </a:ln>
+        </p:spPr>
+        <p:style>
+          <a:lnRef idx="1">
+            <a:schemeClr val="accent1"/>
+          </a:lnRef>
+          <a:fillRef idx="3">
+            <a:schemeClr val="accent1"/>
+          </a:fillRef>
+          <a:effectRef idx="2">
+            <a:schemeClr val="accent1"/>
+          </a:effectRef>
+          <a:fontRef idx="minor">
+            <a:schemeClr val="lt1"/>
+          </a:fontRef>
+        </p:style>
+        <p:txBody>
+          <a:bodyPr rtlCol="0" anchor="ctr"/>
+          <a:lstStyle/>
+          <a:p>
+            <a:pPr algn="ctr"/>
+          </a:p>
+        </p:txBody>
+      </p:sp>
+      <p:sp>
+        <p:nvSpPr>
+          <p:cNvPr id="4" name="TextBox 3"/>
+          <p:cNvSpPr txBox="1"/>
+          <p:nvPr/>
+        </p:nvSpPr>
+        <p:spPr>
+          <a:xfrm>
+            <a:off x="457200" y="164592"/>
+            <a:ext cx="11277295" cy="502920"/>
+          </a:xfrm>
+          <a:prstGeom prst="rect">
+            <a:avLst/>
+          </a:prstGeom>
+          <a:noFill/>
+        </p:spPr>
+        <p:txBody>
+          <a:bodyPr wrap="square">
+            <a:spAutoFit/>
+          </a:bodyPr>
+          <a:lstStyle/>
+          <a:p>
+            <a:r>
+              <a:rPr sz="2600" b="1" i="0">
+                <a:solidFill>
+                  <a:srgbClr val="FFFFFF"/>
+                </a:solidFill>
+                <a:latin typeface="Calibri"/>
+              </a:rPr>
+              <a:t>Cambiar el esquema sin romper la aplicacion que ya corre</a:t>
+            </a:r>
+          </a:p>
+        </p:txBody>
+      </p:sp>
+      <p:sp>
+        <p:nvSpPr>
+          <p:cNvPr id="5" name="Rounded Rectangle 4"/>
+          <p:cNvSpPr/>
+          <p:nvPr/>
+        </p:nvSpPr>
+        <p:spPr>
+          <a:xfrm>
+            <a:off x="5803166" y="1188719"/>
+            <a:ext cx="5998464" cy="4828032"/>
+          </a:xfrm>
+          <a:prstGeom prst="roundRect">
+            <a:avLst>
+              <a:gd name="adj" fmla="val 4000"/>
+            </a:avLst>
+          </a:prstGeom>
+          <a:solidFill>
+            <a:srgbClr val="E8EEF4"/>
+          </a:solidFill>
+          <a:ln>
+            <a:noFill/>
+          </a:ln>
+        </p:spPr>
+        <p:style>
+          <a:lnRef idx="1">
+            <a:schemeClr val="accent1"/>
+          </a:lnRef>
+          <a:fillRef idx="3">
+            <a:schemeClr val="accent1"/>
+          </a:fillRef>
+          <a:effectRef idx="2">
+            <a:schemeClr val="accent1"/>
+          </a:effectRef>
+          <a:fontRef idx="minor">
+            <a:schemeClr val="lt1"/>
+          </a:fontRef>
+        </p:style>
+        <p:txBody>
+          <a:bodyPr rtlCol="0" anchor="ctr"/>
+          <a:lstStyle/>
+          <a:p>
+            <a:pPr algn="ctr"/>
+          </a:p>
+        </p:txBody>
+      </p:sp>
+      <p:pic>
+        <p:nvPicPr>
+          <p:cNvPr id="6" name="Picture 5" descr="expandir-contraer-paso1.png"/>
+          <p:cNvPicPr>
+            <a:picLocks noChangeAspect="1"/>
+          </p:cNvPicPr>
+          <p:nvPr/>
+        </p:nvPicPr>
+        <p:blipFill>
+          <a:blip r:embed="rId2"/>
+          <a:stretch>
+            <a:fillRect/>
+          </a:stretch>
+        </p:blipFill>
+        <p:spPr>
+          <a:xfrm>
+            <a:off x="5876318" y="1261872"/>
+            <a:ext cx="5852160" cy="4681728"/>
+          </a:xfrm>
+          <a:prstGeom prst="rect">
+            <a:avLst/>
+          </a:prstGeom>
+        </p:spPr>
+      </p:pic>
+      <p:pic>
+        <p:nvPicPr>
+          <p:cNvPr id="7" name="Picture 6" descr="expandir-contraer-paso2.png"/>
+          <p:cNvPicPr>
+            <a:picLocks noChangeAspect="1"/>
+          </p:cNvPicPr>
+          <p:nvPr/>
+        </p:nvPicPr>
+        <p:blipFill>
+          <a:blip r:embed="rId3"/>
+          <a:stretch>
+            <a:fillRect/>
+          </a:stretch>
+        </p:blipFill>
+        <p:spPr>
+          <a:xfrm>
+            <a:off x="5876318" y="1261872"/>
+            <a:ext cx="5852160" cy="4681728"/>
+          </a:xfrm>
+          <a:prstGeom prst="rect">
+            <a:avLst/>
+          </a:prstGeom>
+        </p:spPr>
+      </p:pic>
+      <p:pic>
+        <p:nvPicPr>
+          <p:cNvPr id="8" name="Picture 7" descr="expandir-contraer-paso3.png"/>
+          <p:cNvPicPr>
+            <a:picLocks noChangeAspect="1"/>
+          </p:cNvPicPr>
+          <p:nvPr/>
+        </p:nvPicPr>
+        <p:blipFill>
+          <a:blip r:embed="rId4"/>
+          <a:stretch>
+            <a:fillRect/>
+          </a:stretch>
+        </p:blipFill>
+        <p:spPr>
+          <a:xfrm>
+            <a:off x="5876318" y="1261872"/>
+            <a:ext cx="5852160" cy="4681728"/>
+          </a:xfrm>
+          <a:prstGeom prst="rect">
+            <a:avLst/>
+          </a:prstGeom>
+        </p:spPr>
+      </p:pic>
+      <p:pic>
+        <p:nvPicPr>
+          <p:cNvPr id="9" name="Picture 8" descr="expandir-contraer-paso4.png"/>
+          <p:cNvPicPr>
+            <a:picLocks noChangeAspect="1"/>
+          </p:cNvPicPr>
+          <p:nvPr/>
+        </p:nvPicPr>
+        <p:blipFill>
+          <a:blip r:embed="rId5"/>
+          <a:stretch>
+            <a:fillRect/>
+          </a:stretch>
+        </p:blipFill>
+        <p:spPr>
+          <a:xfrm>
+            <a:off x="5876318" y="1261872"/>
+            <a:ext cx="5852160" cy="4681728"/>
+          </a:xfrm>
+          <a:prstGeom prst="rect">
+            <a:avLst/>
+          </a:prstGeom>
+        </p:spPr>
+      </p:pic>
+      <p:pic>
+        <p:nvPicPr>
+          <p:cNvPr id="10" name="Picture 9" descr="expandir-contraer-paso5.png"/>
+          <p:cNvPicPr>
+            <a:picLocks noChangeAspect="1"/>
+          </p:cNvPicPr>
+          <p:nvPr/>
+        </p:nvPicPr>
+        <p:blipFill>
+          <a:blip r:embed="rId6"/>
+          <a:stretch>
+            <a:fillRect/>
+          </a:stretch>
+        </p:blipFill>
+        <p:spPr>
+          <a:xfrm>
+            <a:off x="5876318" y="1261872"/>
+            <a:ext cx="5852160" cy="4681728"/>
+          </a:xfrm>
+          <a:prstGeom prst="rect">
+            <a:avLst/>
+          </a:prstGeom>
+        </p:spPr>
+      </p:pic>
+      <p:pic>
+        <p:nvPicPr>
+          <p:cNvPr id="11" name="Picture 10" descr="expandir-contraer-paso6.png"/>
+          <p:cNvPicPr>
+            <a:picLocks noChangeAspect="1"/>
+          </p:cNvPicPr>
+          <p:nvPr/>
+        </p:nvPicPr>
+        <p:blipFill>
+          <a:blip r:embed="rId7"/>
+          <a:stretch>
+            <a:fillRect/>
+          </a:stretch>
+        </p:blipFill>
+        <p:spPr>
+          <a:xfrm>
+            <a:off x="5876318" y="1261872"/>
+            <a:ext cx="5852160" cy="4681728"/>
+          </a:xfrm>
+          <a:prstGeom prst="rect">
+            <a:avLst/>
+          </a:prstGeom>
+        </p:spPr>
+      </p:pic>
+      <p:sp>
+        <p:nvSpPr>
+          <p:cNvPr id="28" name="TextBox 27"/>
+          <p:cNvSpPr txBox="1"/>
+          <p:nvPr/>
+        </p:nvSpPr>
+        <p:spPr>
+          <a:xfrm>
+            <a:off x="5870301" y="5961888"/>
+            <a:ext cx="5864193" cy="320040"/>
+          </a:xfrm>
+          <a:prstGeom prst="rect">
+            <a:avLst/>
+          </a:prstGeom>
+          <a:noFill/>
+        </p:spPr>
+        <p:txBody>
+          <a:bodyPr wrap="square">
+            <a:spAutoFit/>
+          </a:bodyPr>
+          <a:lstStyle/>
+          <a:p>
+            <a:pPr algn="ctr"/>
+            <a:r>
+              <a:rPr sz="1100" b="0" i="1">
+                <a:solidFill>
+                  <a:srgbClr val="666666"/>
+                </a:solidFill>
+                <a:latin typeface="Calibri"/>
+              </a:rPr>
+              <a:t>Clic para avanzar la animación</a:t>
+            </a:r>
+          </a:p>
+        </p:txBody>
+      </p:sp>
+      <p:sp>
+        <p:nvSpPr>
+          <p:cNvPr id="29" name="TextBox 28"/>
+          <p:cNvSpPr txBox="1"/>
+          <p:nvPr/>
+        </p:nvSpPr>
+        <p:spPr>
+          <a:xfrm>
+            <a:off x="457200" y="1353312"/>
+            <a:ext cx="5093061" cy="5047488"/>
+          </a:xfrm>
+          <a:prstGeom prst="rect">
+            <a:avLst/>
+          </a:prstGeom>
+          <a:noFill/>
+        </p:spPr>
+        <p:txBody>
+          <a:bodyPr wrap="square">
+            <a:spAutoFit/>
+          </a:bodyPr>
+          <a:lstStyle/>
+          <a:p>
+            <a:pPr>
+              <a:spcAft>
+                <a:spcPts val="800"/>
+              </a:spcAft>
+            </a:pPr>
+            <a:r>
+              <a:rPr sz="2000" b="0" i="0">
+                <a:solidFill>
+                  <a:srgbClr val="333333"/>
+                </a:solidFill>
+                <a:latin typeface="Calibri"/>
+              </a:rPr>
+              <a:t>–   Un cambio de esquema </a:t>
+            </a:r>
+            <a:r>
+              <a:rPr sz="2000" b="1" i="0">
+                <a:solidFill>
+                  <a:srgbClr val="333333"/>
+                </a:solidFill>
+                <a:latin typeface="Calibri"/>
+              </a:rPr>
+              <a:t>nunca se hace en su lugar</a:t>
+            </a:r>
+            <a:r>
+              <a:rPr sz="2000" b="0" i="0">
+                <a:solidFill>
+                  <a:srgbClr val="333333"/>
+                </a:solidFill>
+                <a:latin typeface="Calibri"/>
+              </a:rPr>
+              <a:t>: se expande, se migra y después se contrae.</a:t>
+            </a:r>
+          </a:p>
+          <a:p>
+            <a:pPr>
+              <a:spcAft>
+                <a:spcPts val="800"/>
+              </a:spcAft>
+            </a:pPr>
+            <a:r>
+              <a:rPr sz="2000" b="0" i="0">
+                <a:solidFill>
+                  <a:srgbClr val="333333"/>
+                </a:solidFill>
+                <a:latin typeface="Calibri"/>
+              </a:rPr>
+              <a:t>–   Primero se </a:t>
+            </a:r>
+            <a:r>
+              <a:rPr sz="2000" b="1" i="0">
+                <a:solidFill>
+                  <a:srgbClr val="333333"/>
+                </a:solidFill>
+                <a:latin typeface="Calibri"/>
+              </a:rPr>
+              <a:t>agrega</a:t>
+            </a:r>
+            <a:r>
+              <a:rPr sz="2000" b="0" i="0">
+                <a:solidFill>
+                  <a:srgbClr val="333333"/>
+                </a:solidFill>
+                <a:latin typeface="Calibri"/>
+              </a:rPr>
+              <a:t> la columna nueva que admite nulos, y la aplicación vieja sigue igual.</a:t>
+            </a:r>
+          </a:p>
+          <a:p>
+            <a:pPr>
+              <a:spcAft>
+                <a:spcPts val="800"/>
+              </a:spcAft>
+            </a:pPr>
+            <a:r>
+              <a:rPr sz="2000" b="0" i="0">
+                <a:solidFill>
+                  <a:srgbClr val="333333"/>
+                </a:solidFill>
+                <a:latin typeface="Calibri"/>
+              </a:rPr>
+              <a:t>–   Luego se escribe en ambos lados, se rellena el histórico </a:t>
+            </a:r>
+            <a:r>
+              <a:rPr sz="2000" b="1" i="0">
+                <a:solidFill>
+                  <a:srgbClr val="333333"/>
+                </a:solidFill>
+                <a:latin typeface="Calibri"/>
+              </a:rPr>
+              <a:t>por lotes</a:t>
+            </a:r>
+            <a:r>
+              <a:rPr sz="2000" b="0" i="0">
+                <a:solidFill>
+                  <a:srgbClr val="333333"/>
+                </a:solidFill>
+                <a:latin typeface="Calibri"/>
+              </a:rPr>
+              <a:t> y se mueven las lecturas.</a:t>
+            </a:r>
+          </a:p>
+          <a:p>
+            <a:pPr>
+              <a:spcAft>
+                <a:spcPts val="800"/>
+              </a:spcAft>
+            </a:pPr>
+            <a:r>
+              <a:rPr sz="2000" b="0" i="0">
+                <a:solidFill>
+                  <a:srgbClr val="333333"/>
+                </a:solidFill>
+                <a:latin typeface="Calibri"/>
+              </a:rPr>
+              <a:t>–   Lo viejo se </a:t>
+            </a:r>
+            <a:r>
+              <a:rPr sz="2000" b="1" i="0">
+                <a:solidFill>
+                  <a:srgbClr val="333333"/>
+                </a:solidFill>
+                <a:latin typeface="Calibri"/>
+              </a:rPr>
+              <a:t>borra</a:t>
+            </a:r>
+            <a:r>
+              <a:rPr sz="2000" b="0" i="0">
+                <a:solidFill>
+                  <a:srgbClr val="333333"/>
+                </a:solidFill>
+                <a:latin typeface="Calibri"/>
+              </a:rPr>
+              <a:t> solo cuando ninguna versión desplegada lo usa.</a:t>
+            </a:r>
+          </a:p>
+        </p:txBody>
+      </p:sp>
+      <p:sp>
+        <p:nvSpPr>
+          <p:cNvPr id="30" name="TextBox 29"/>
+          <p:cNvSpPr txBox="1"/>
+          <p:nvPr/>
+        </p:nvSpPr>
+        <p:spPr>
+          <a:xfrm>
+            <a:off x="11185855" y="6473952"/>
+            <a:ext cx="640080" cy="274320"/>
+          </a:xfrm>
+          <a:prstGeom prst="rect">
+            <a:avLst/>
+          </a:prstGeom>
+          <a:noFill/>
+        </p:spPr>
+        <p:txBody>
+          <a:bodyPr wrap="square">
+            <a:spAutoFit/>
+          </a:bodyPr>
+          <a:lstStyle/>
+          <a:p>
+            <a:pPr algn="r"/>
+            <a:r>
+              <a:rPr sz="1100" b="0" i="0">
+                <a:solidFill>
+                  <a:srgbClr val="666666"/>
+                </a:solidFill>
+                <a:latin typeface="Calibri"/>
+              </a:rPr>
+              <a:t>16</a:t>
+            </a:r>
+          </a:p>
+        </p:txBody>
+      </p:sp>
+    </p:spTree>
+  </p:cSld>
+  <p:clrMapOvr>
+    <a:masterClrMapping/>
+  </p:clrMapOvr>
+  <p:timing>
+    <p:tnLst>
+      <p:par>
+        <p:cTn id="1" dur="indefinite" restart="never" nodeType="tmRoot">
+          <p:childTnLst>
+            <p:seq concurrent="1" nextAc="seek">
+              <p:cTn id="2" dur="indefinite" nodeType="mainSeq">
+                <p:childTnLst>
+                  <p:par>
+                    <p:cTn id="3" fill="hold">
+                      <p:stCondLst>
+                        <p:cond delay="indefinite"/>
+                      </p:stCondLst>
+                      <p:childTnLst>
+                        <p:par>
+                          <p:cTn id="4" fill="hold">
+                            <p:stCondLst>
+                              <p:cond delay="0"/>
+                            </p:stCondLst>
+                            <p:childTnLst>
+                              <p:par>
+                                <p:cTn id="5" presetID="10" presetClass="entr" presetSubtype="0" fill="hold" nodeType="clickEffect">
+                                  <p:stCondLst>
+                                    <p:cond delay="0"/>
+                                  </p:stCondLst>
+                                  <p:childTnLst>
+                                    <p:set>
+                                      <p:cBhvr>
+                                        <p:cTn id="6" dur="1" fill="hold">
+                                          <p:stCondLst>
+                                            <p:cond delay="0"/>
+                                          </p:stCondLst>
+                                        </p:cTn>
+                                        <p:tgtEl>
+                                          <p:spTgt spid="7"/>
+                                        </p:tgtEl>
+                                        <p:attrNameLst>
+                                          <p:attrName>style.visibility</p:attrName>
+                                        </p:attrNameLst>
+                                      </p:cBhvr>
+                                      <p:to>
+                                        <p:strVal val="visible"/>
+                                      </p:to>
+                                    </p:set>
+                                    <p:animEffect transition="in" filter="fade">
+                                      <p:cBhvr>
+                                        <p:cTn id="7" dur="450"/>
+                                        <p:tgtEl>
+                                          <p:spTgt spid="7"/>
+                                        </p:tgtEl>
+                                      </p:cBhvr>
+                                    </p:animEffect>
+                                  </p:childTnLst>
+                                </p:cTn>
+                              </p:par>
+                            </p:childTnLst>
+                          </p:cTn>
+                        </p:par>
+                      </p:childTnLst>
+                    </p:cTn>
+                  </p:par>
+                  <p:par>
+                    <p:cTn id="8" fill="hold">
+                      <p:stCondLst>
+                        <p:cond delay="indefinite"/>
+                      </p:stCondLst>
+                      <p:childTnLst>
+                        <p:par>
+                          <p:cTn id="9" fill="hold">
+                            <p:stCondLst>
+                              <p:cond delay="0"/>
+                            </p:stCondLst>
+                            <p:childTnLst>
+                              <p:par>
+                                <p:cTn id="10" presetID="10" presetClass="entr" presetSubtype="0" fill="hold" nodeType="clickEffect">
+                                  <p:stCondLst>
+                                    <p:cond delay="0"/>
+                                  </p:stCondLst>
+                                  <p:childTnLst>
+                                    <p:set>
+                                      <p:cBhvr>
+                                        <p:cTn id="11" dur="1" fill="hold">
+                                          <p:stCondLst>
+                                            <p:cond delay="0"/>
+                                          </p:stCondLst>
+                                        </p:cTn>
+                                        <p:tgtEl>
+                                          <p:spTgt spid="8"/>
+                                        </p:tgtEl>
+                                        <p:attrNameLst>
+                                          <p:attrName>style.visibility</p:attrName>
+                                        </p:attrNameLst>
+                                      </p:cBhvr>
+                                      <p:to>
+                                        <p:strVal val="visible"/>
+                                      </p:to>
+                                    </p:set>
+                                    <p:animEffect transition="in" filter="fade">
+                                      <p:cBhvr>
+                                        <p:cTn id="12" dur="450"/>
+                                        <p:tgtEl>
+                                          <p:spTgt spid="8"/>
+                                        </p:tgtEl>
+                                      </p:cBhvr>
+                                    </p:animEffect>
+                                  </p:childTnLst>
+                                </p:cTn>
+                              </p:par>
+                            </p:childTnLst>
+                          </p:cTn>
+                        </p:par>
+                      </p:childTnLst>
+                    </p:cTn>
+                  </p:par>
+                  <p:par>
+                    <p:cTn id="13" fill="hold">
+                      <p:stCondLst>
+                        <p:cond delay="indefinite"/>
+                      </p:stCondLst>
+                      <p:childTnLst>
+                        <p:par>
+                          <p:cTn id="14" fill="hold">
+                            <p:stCondLst>
+                              <p:cond delay="0"/>
+                            </p:stCondLst>
+                            <p:childTnLst>
+                              <p:par>
+                                <p:cTn id="15" presetID="10" presetClass="entr" presetSubtype="0" fill="hold" nodeType="clickEffect">
+                                  <p:stCondLst>
+                                    <p:cond delay="0"/>
+                                  </p:stCondLst>
+                                  <p:childTnLst>
+                                    <p:set>
+                                      <p:cBhvr>
+                                        <p:cTn id="16" dur="1" fill="hold">
+                                          <p:stCondLst>
+                                            <p:cond delay="0"/>
+                                          </p:stCondLst>
+                                        </p:cTn>
+                                        <p:tgtEl>
+                                          <p:spTgt spid="9"/>
+                                        </p:tgtEl>
+                                        <p:attrNameLst>
+                                          <p:attrName>style.visibility</p:attrName>
+                                        </p:attrNameLst>
+                                      </p:cBhvr>
+                                      <p:to>
+                                        <p:strVal val="visible"/>
+                                      </p:to>
+                                    </p:set>
+                                    <p:animEffect transition="in" filter="fade">
+                                      <p:cBhvr>
+                                        <p:cTn id="17" dur="450"/>
+                                        <p:tgtEl>
+                                          <p:spTgt spid="9"/>
+                                        </p:tgtEl>
+                                      </p:cBhvr>
+                                    </p:animEffect>
+                                  </p:childTnLst>
+                                </p:cTn>
+                              </p:par>
+                            </p:childTnLst>
+                          </p:cTn>
+                        </p:par>
+                      </p:childTnLst>
+                    </p:cTn>
+                  </p:par>
+                  <p:par>
+                    <p:cTn id="18" fill="hold">
+                      <p:stCondLst>
+                        <p:cond delay="indefinite"/>
+                      </p:stCondLst>
+                      <p:childTnLst>
+                        <p:par>
+                          <p:cTn id="19" fill="hold">
+                            <p:stCondLst>
+                              <p:cond delay="0"/>
+                            </p:stCondLst>
+                            <p:childTnLst>
+                              <p:par>
+                                <p:cTn id="20" presetID="10" presetClass="entr" presetSubtype="0" fill="hold" nodeType="clickEffect">
+                                  <p:stCondLst>
+                                    <p:cond delay="0"/>
+                                  </p:stCondLst>
+                                  <p:childTnLst>
+                                    <p:set>
+                                      <p:cBhvr>
+                                        <p:cTn id="21" dur="1" fill="hold">
+                                          <p:stCondLst>
+                                            <p:cond delay="0"/>
+                                          </p:stCondLst>
+                                        </p:cTn>
+                                        <p:tgtEl>
+                                          <p:spTgt spid="10"/>
+                                        </p:tgtEl>
+                                        <p:attrNameLst>
+                                          <p:attrName>style.visibility</p:attrName>
+                                        </p:attrNameLst>
+                                      </p:cBhvr>
+                                      <p:to>
+                                        <p:strVal val="visible"/>
+                                      </p:to>
+                                    </p:set>
+                                    <p:animEffect transition="in" filter="fade">
+                                      <p:cBhvr>
+                                        <p:cTn id="22" dur="450"/>
+                                        <p:tgtEl>
+                                          <p:spTgt spid="10"/>
+                                        </p:tgtEl>
+                                      </p:cBhvr>
+                                    </p:animEffect>
+                                  </p:childTnLst>
+                                </p:cTn>
+                              </p:par>
+                            </p:childTnLst>
+                          </p:cTn>
+                        </p:par>
+                      </p:childTnLst>
+                    </p:cTn>
+                  </p:par>
+                  <p:par>
+                    <p:cTn id="23" fill="hold">
+                      <p:stCondLst>
+                        <p:cond delay="indefinite"/>
+                      </p:stCondLst>
+                      <p:childTnLst>
+                        <p:par>
+                          <p:cTn id="24" fill="hold">
+                            <p:stCondLst>
+                              <p:cond delay="0"/>
+                            </p:stCondLst>
+                            <p:childTnLst>
+                              <p:par>
+                                <p:cTn id="25" presetID="10" presetClass="entr" presetSubtype="0" fill="hold" nodeType="clickEffect">
+                                  <p:stCondLst>
+                                    <p:cond delay="0"/>
+                                  </p:stCondLst>
+                                  <p:childTnLst>
+                                    <p:set>
+                                      <p:cBhvr>
+                                        <p:cTn id="26" dur="1" fill="hold">
+                                          <p:stCondLst>
+                                            <p:cond delay="0"/>
+                                          </p:stCondLst>
+                                        </p:cTn>
+                                        <p:tgtEl>
+                                          <p:spTgt spid="11"/>
+                                        </p:tgtEl>
+                                        <p:attrNameLst>
+                                          <p:attrName>style.visibility</p:attrName>
+                                        </p:attrNameLst>
+                                      </p:cBhvr>
+                                      <p:to>
+                                        <p:strVal val="visible"/>
+                                      </p:to>
+                                    </p:set>
+                                    <p:animEffect transition="in" filter="fade">
+                                      <p:cBhvr>
+                                        <p:cTn id="27" dur="450"/>
+                                        <p:tgtEl>
+                                          <p:spTgt spid="11"/>
+                                        </p:tgtEl>
+                                      </p:cBhvr>
+                                    </p:animEffect>
+                                  </p:childTnLst>
+                                </p:cTn>
+                              </p:par>
+                            </p:childTnLst>
+                          </p:cTn>
+                        </p:par>
+                      </p:childTnLst>
+                    </p:cTn>
+                  </p:par>
+                </p:childTnLst>
+              </p:cTn>
+              <p:prevCondLst>
+                <p:cond evt="onPrev" delay="0">
+                  <p:tgtEl>
+                    <p:sldTgt/>
+                  </p:tgtEl>
+                </p:cond>
+              </p:prevCondLst>
+              <p:nextCondLst>
+                <p:cond evt="onNext" delay="0">
+                  <p:tgtEl>
+                    <p:sldTgt/>
+                  </p:tgtEl>
+                </p:cond>
+              </p:nextCondLst>
+            </p:seq>
+          </p:childTnLst>
+        </p:cTn>
+      </p:par>
+    </p:tnLst>
+  </p:timing>
+</p:sld>
+</file>
+
+<file path=ppt/slides/slide17.xml><?xml version="1.0" encoding="utf-8"?>
+<p:sld xmlns:a="http://schemas.openxmlformats.org/drawingml/2006/main" xmlns:p="http://schemas.openxmlformats.org/presentationml/2006/main" xmlns:r="http://schemas.openxmlformats.org/officeDocument/2006/relationships">
+  <p:cSld>
+    <p:bg>
+      <p:bgPr>
+        <a:solidFill>
+          <a:srgbClr val="FFFFFF"/>
+        </a:solidFill>
+        <a:effectLst/>
+      </p:bgPr>
+    </p:bg>
+    <p:spTree>
+      <p:nvGrpSpPr>
+        <p:cNvPr id="1" name=""/>
+        <p:cNvGrpSpPr/>
+        <p:nvPr/>
+      </p:nvGrpSpPr>
+      <p:grpSpPr/>
+      <p:sp>
+        <p:nvSpPr>
+          <p:cNvPr id="2" name="Rectangle 1"/>
+          <p:cNvSpPr/>
+          <p:nvPr/>
+        </p:nvSpPr>
+        <p:spPr>
+          <a:xfrm>
+            <a:off x="0" y="0"/>
+            <a:ext cx="12191695" cy="960120"/>
+          </a:xfrm>
+          <a:prstGeom prst="rect">
+            <a:avLst/>
+          </a:prstGeom>
+          <a:solidFill>
+            <a:srgbClr val="095292"/>
+          </a:solidFill>
+          <a:ln>
+            <a:noFill/>
+          </a:ln>
+        </p:spPr>
+        <p:style>
+          <a:lnRef idx="1">
+            <a:schemeClr val="accent1"/>
+          </a:lnRef>
+          <a:fillRef idx="3">
+            <a:schemeClr val="accent1"/>
+          </a:fillRef>
+          <a:effectRef idx="2">
+            <a:schemeClr val="accent1"/>
+          </a:effectRef>
+          <a:fontRef idx="minor">
+            <a:schemeClr val="lt1"/>
+          </a:fontRef>
+        </p:style>
+        <p:txBody>
+          <a:bodyPr rtlCol="0" anchor="ctr"/>
+          <a:lstStyle/>
+          <a:p>
+            <a:pPr algn="ctr"/>
+          </a:p>
+        </p:txBody>
+      </p:sp>
+      <p:sp>
+        <p:nvSpPr>
+          <p:cNvPr id="3" name="Rectangle 2"/>
+          <p:cNvSpPr/>
+          <p:nvPr/>
+        </p:nvSpPr>
+        <p:spPr>
+          <a:xfrm>
+            <a:off x="0" y="960120"/>
+            <a:ext cx="12191695" cy="41148"/>
+          </a:xfrm>
+          <a:prstGeom prst="rect">
+            <a:avLst/>
+          </a:prstGeom>
+          <a:solidFill>
+            <a:srgbClr val="FFD000"/>
+          </a:solidFill>
+          <a:ln>
+            <a:noFill/>
+          </a:ln>
+        </p:spPr>
+        <p:style>
+          <a:lnRef idx="1">
+            <a:schemeClr val="accent1"/>
+          </a:lnRef>
+          <a:fillRef idx="3">
+            <a:schemeClr val="accent1"/>
+          </a:fillRef>
+          <a:effectRef idx="2">
+            <a:schemeClr val="accent1"/>
+          </a:effectRef>
+          <a:fontRef idx="minor">
+            <a:schemeClr val="lt1"/>
+          </a:fontRef>
+        </p:style>
+        <p:txBody>
+          <a:bodyPr rtlCol="0" anchor="ctr"/>
+          <a:lstStyle/>
+          <a:p>
+            <a:pPr algn="ctr"/>
+          </a:p>
+        </p:txBody>
+      </p:sp>
+      <p:sp>
+        <p:nvSpPr>
+          <p:cNvPr id="4" name="TextBox 3"/>
+          <p:cNvSpPr txBox="1"/>
+          <p:nvPr/>
+        </p:nvSpPr>
+        <p:spPr>
+          <a:xfrm>
+            <a:off x="457200" y="164592"/>
+            <a:ext cx="11277295" cy="502920"/>
+          </a:xfrm>
+          <a:prstGeom prst="rect">
+            <a:avLst/>
+          </a:prstGeom>
+          <a:noFill/>
+        </p:spPr>
+        <p:txBody>
+          <a:bodyPr wrap="square">
+            <a:spAutoFit/>
+          </a:bodyPr>
+          <a:lstStyle/>
+          <a:p>
+            <a:r>
+              <a:rPr sz="2600" b="1" i="0">
+                <a:solidFill>
+                  <a:srgbClr val="FFFFFF"/>
+                </a:solidFill>
+                <a:latin typeface="Calibri"/>
+              </a:rPr>
+              <a:t>Demo del dia</a:t>
+            </a:r>
+          </a:p>
+        </p:txBody>
+      </p:sp>
+      <p:sp>
+        <p:nvSpPr>
+          <p:cNvPr id="5" name="Rounded Rectangle 4"/>
+          <p:cNvSpPr/>
+          <p:nvPr/>
+        </p:nvSpPr>
+        <p:spPr>
+          <a:xfrm>
+            <a:off x="5797149" y="1343926"/>
+            <a:ext cx="6010497" cy="4837658"/>
+          </a:xfrm>
+          <a:prstGeom prst="roundRect">
+            <a:avLst>
+              <a:gd name="adj" fmla="val 4000"/>
+            </a:avLst>
+          </a:prstGeom>
+          <a:solidFill>
+            <a:srgbClr val="E8EEF4"/>
+          </a:solidFill>
+          <a:ln>
+            <a:noFill/>
+          </a:ln>
+        </p:spPr>
+        <p:style>
+          <a:lnRef idx="1">
+            <a:schemeClr val="accent1"/>
+          </a:lnRef>
+          <a:fillRef idx="3">
+            <a:schemeClr val="accent1"/>
+          </a:fillRef>
+          <a:effectRef idx="2">
+            <a:schemeClr val="accent1"/>
+          </a:effectRef>
+          <a:fontRef idx="minor">
+            <a:schemeClr val="lt1"/>
+          </a:fontRef>
+        </p:style>
+        <p:txBody>
+          <a:bodyPr rtlCol="0" anchor="ctr"/>
+          <a:lstStyle/>
+          <a:p>
+            <a:pPr algn="ctr"/>
+          </a:p>
+        </p:txBody>
+      </p:sp>
+      <p:pic>
+        <p:nvPicPr>
+          <p:cNvPr id="6" name="Picture 5" descr="ilus-demo-paso1.png"/>
+          <p:cNvPicPr>
+            <a:picLocks noChangeAspect="1"/>
+          </p:cNvPicPr>
+          <p:nvPr/>
+        </p:nvPicPr>
+        <p:blipFill>
+          <a:blip r:embed="rId2"/>
+          <a:stretch>
+            <a:fillRect/>
+          </a:stretch>
+        </p:blipFill>
+        <p:spPr>
+          <a:xfrm>
+            <a:off x="5870301" y="1417078"/>
+            <a:ext cx="5864193" cy="4691354"/>
+          </a:xfrm>
+          <a:prstGeom prst="rect">
+            <a:avLst/>
+          </a:prstGeom>
+        </p:spPr>
+      </p:pic>
+      <p:sp>
+        <p:nvSpPr>
+          <p:cNvPr id="7" name="TextBox 6"/>
+          <p:cNvSpPr txBox="1"/>
+          <p:nvPr/>
+        </p:nvSpPr>
+        <p:spPr>
+          <a:xfrm>
+            <a:off x="457200" y="1353312"/>
+            <a:ext cx="5093061" cy="5047488"/>
+          </a:xfrm>
+          <a:prstGeom prst="rect">
+            <a:avLst/>
+          </a:prstGeom>
+          <a:noFill/>
+        </p:spPr>
+        <p:txBody>
+          <a:bodyPr wrap="square">
+            <a:spAutoFit/>
+          </a:bodyPr>
+          <a:lstStyle/>
+          <a:p>
+            <a:pPr>
+              <a:spcAft>
+                <a:spcPts val="800"/>
+              </a:spcAft>
+            </a:pPr>
+            <a:r>
+              <a:rPr sz="2000" b="0" i="0">
+                <a:solidFill>
+                  <a:srgbClr val="333333"/>
+                </a:solidFill>
+                <a:latin typeface="Calibri"/>
+              </a:rPr>
+              <a:t>–   La búsqueda armada </a:t>
+            </a:r>
+            <a:r>
+              <a:rPr sz="2000" b="1" i="0">
+                <a:solidFill>
+                  <a:srgbClr val="333333"/>
+                </a:solidFill>
+                <a:latin typeface="Calibri"/>
+              </a:rPr>
+              <a:t>concatenando</a:t>
+            </a:r>
+            <a:r>
+              <a:rPr sz="2000" b="0" i="0">
+                <a:solidFill>
+                  <a:srgbClr val="333333"/>
+                </a:solidFill>
+                <a:latin typeface="Calibri"/>
+              </a:rPr>
+              <a:t> devuelve las 8 mascotas con la entrada «' OR 1=1 --»</a:t>
+            </a:r>
+          </a:p>
+          <a:p>
+            <a:pPr>
+              <a:spcAft>
+                <a:spcPts val="800"/>
+              </a:spcAft>
+            </a:pPr>
+            <a:r>
+              <a:rPr sz="2000" b="0" i="0">
+                <a:solidFill>
+                  <a:srgbClr val="333333"/>
+                </a:solidFill>
+                <a:latin typeface="Calibri"/>
+              </a:rPr>
+              <a:t>–   La misma entrada como </a:t>
+            </a:r>
+            <a:r>
+              <a:rPr sz="2000" b="1" i="0">
+                <a:solidFill>
+                  <a:srgbClr val="333333"/>
+                </a:solidFill>
+                <a:latin typeface="Calibri"/>
+              </a:rPr>
+              <a:t>parámetro</a:t>
+            </a:r>
+            <a:r>
+              <a:rPr sz="2000" b="0" i="0">
+                <a:solidFill>
+                  <a:srgbClr val="333333"/>
+                </a:solidFill>
+                <a:latin typeface="Calibri"/>
+              </a:rPr>
+              <a:t> devuelve 0 filas, porque se busca literal.</a:t>
+            </a:r>
+          </a:p>
+          <a:p>
+            <a:pPr>
+              <a:spcAft>
+                <a:spcPts val="800"/>
+              </a:spcAft>
+            </a:pPr>
+            <a:r>
+              <a:rPr sz="2000" b="0" i="0">
+                <a:solidFill>
+                  <a:srgbClr val="333333"/>
+                </a:solidFill>
+                <a:latin typeface="Calibri"/>
+              </a:rPr>
+              <a:t>–   La aplicación solo conoce la </a:t>
+            </a:r>
+            <a:r>
+              <a:rPr sz="2000" b="1" i="0">
+                <a:solidFill>
+                  <a:srgbClr val="333333"/>
+                </a:solidFill>
+                <a:latin typeface="Calibri"/>
+              </a:rPr>
+              <a:t>firma</a:t>
+            </a:r>
+            <a:r>
+              <a:rPr sz="2000" b="0" i="0">
+                <a:solidFill>
+                  <a:srgbClr val="333333"/>
+                </a:solidFill>
+                <a:latin typeface="Calibri"/>
+              </a:rPr>
+              <a:t>: el CALL inválido responde su mensaje y no deja nada escrito.</a:t>
+            </a:r>
+          </a:p>
+        </p:txBody>
+      </p:sp>
+      <p:sp>
+        <p:nvSpPr>
+          <p:cNvPr id="8" name="TextBox 7"/>
+          <p:cNvSpPr txBox="1"/>
+          <p:nvPr/>
+        </p:nvSpPr>
+        <p:spPr>
+          <a:xfrm>
+            <a:off x="11185855" y="6473952"/>
+            <a:ext cx="640080" cy="274320"/>
+          </a:xfrm>
+          <a:prstGeom prst="rect">
+            <a:avLst/>
+          </a:prstGeom>
+          <a:noFill/>
+        </p:spPr>
+        <p:txBody>
+          <a:bodyPr wrap="square">
+            <a:spAutoFit/>
+          </a:bodyPr>
+          <a:lstStyle/>
+          <a:p>
+            <a:pPr algn="r"/>
+            <a:r>
+              <a:rPr sz="1100" b="0" i="0">
+                <a:solidFill>
+                  <a:srgbClr val="666666"/>
+                </a:solidFill>
+                <a:latin typeface="Calibri"/>
+              </a:rPr>
+              <a:t>17</a:t>
+            </a:r>
+          </a:p>
+        </p:txBody>
+      </p:sp>
+    </p:spTree>
+  </p:cSld>
+  <p:clrMapOvr>
+    <a:masterClrMapping/>
+  </p:clrMapOvr>
+</p:sld>
+</file>
+
+<file path=ppt/slides/slide18.xml><?xml version="1.0" encoding="utf-8"?>
+<p:sld xmlns:a="http://schemas.openxmlformats.org/drawingml/2006/main" xmlns:p="http://schemas.openxmlformats.org/presentationml/2006/main" xmlns:r="http://schemas.openxmlformats.org/officeDocument/2006/relationships">
+  <p:cSld>
+    <p:bg>
+      <p:bgPr>
+        <a:solidFill>
+          <a:srgbClr val="FFFFFF"/>
+        </a:solidFill>
+        <a:effectLst/>
+      </p:bgPr>
+    </p:bg>
+    <p:spTree>
+      <p:nvGrpSpPr>
+        <p:cNvPr id="1" name=""/>
+        <p:cNvGrpSpPr/>
+        <p:nvPr/>
+      </p:nvGrpSpPr>
+      <p:grpSpPr/>
+      <p:sp>
+        <p:nvSpPr>
+          <p:cNvPr id="2" name="Rectangle 1"/>
+          <p:cNvSpPr/>
+          <p:nvPr/>
+        </p:nvSpPr>
+        <p:spPr>
+          <a:xfrm>
+            <a:off x="0" y="0"/>
             <a:ext cx="12191695" cy="1170432"/>
           </a:xfrm>
           <a:prstGeom prst="rect">
@@ -9309,7 +15489,7 @@
                 </a:solidFill>
                 <a:latin typeface="Calibri"/>
               </a:rPr>
-              <a:t>16</a:t>
+              <a:t>18</a:t>
             </a:r>
           </a:p>
         </p:txBody>
@@ -9322,7 +15502,7 @@
 </p:sld>
 </file>
 
-<file path=ppt/slides/slide17.xml><?xml version="1.0" encoding="utf-8"?>
+<file path=ppt/slides/slide19.xml><?xml version="1.0" encoding="utf-8"?>
 <p:sld xmlns:a="http://schemas.openxmlformats.org/drawingml/2006/main" xmlns:p="http://schemas.openxmlformats.org/presentationml/2006/main" xmlns:r="http://schemas.openxmlformats.org/officeDocument/2006/relationships">
   <p:cSld>
     <p:bg>
@@ -9744,7 +15924,7 @@
                 </a:solidFill>
                 <a:latin typeface="Calibri"/>
               </a:rPr>
-              <a:t> Integracion app &lt;-&gt; BD · Prep. presentacion</a:t>
+              <a:t> integrar la aplicación con la base: la única puerta, el contrato y los errores.</a:t>
             </a:r>
           </a:p>
           <a:p>
@@ -9769,7 +15949,7 @@
                 </a:solidFill>
                 <a:latin typeface="Calibri"/>
               </a:rPr>
-              <a:t>Google Docs + Live SQL + Excalidraw</a:t>
+              <a:t>PostgreSQL en el navegador</a:t>
             </a:r>
             <a:r>
               <a:rPr sz="2000" b="0" i="0">
@@ -9778,7 +15958,7 @@
                 </a:solidFill>
                 <a:latin typeface="Calibri"/>
               </a:rPr>
-              <a:t> · Bloque </a:t>
+              <a:t> y un editor de diagramas · Bloque </a:t>
             </a:r>
             <a:r>
               <a:rPr sz="2000" b="1" i="0">
@@ -9803,7 +15983,7 @@
                 </a:solidFill>
                 <a:latin typeface="Calibri"/>
               </a:rPr>
-              <a:t>–   Gratis + navegador · free tier · sin software de pago obligatorio.</a:t>
+              <a:t>–   Gratis + navegador · sin software de pago obligatorio.</a:t>
             </a:r>
           </a:p>
           <a:p>
@@ -9869,7 +16049,7 @@
                 </a:solidFill>
                 <a:latin typeface="Calibri"/>
               </a:rPr>
-              <a:t> Integrar no es conectarse · Inyeccion SQL · La inyeccion de SQL, explicada con las dos versiones · Por que el parametro lo evita por construccion.</a:t>
+              <a:t> la única puerta · inyección SQL y parámetros · el contrato · errores entre capas · pool de conexiones · cambios de esquema.</a:t>
             </a:r>
           </a:p>
         </p:txBody>
@@ -11093,7 +17273,25 @@
                 </a:solidFill>
                 <a:latin typeface="Calibri"/>
               </a:rPr>
-              <a:t>–   Integrar la aplicacion con la base de datos no es conectarse: conectarse son dos lineas de configuracion.</a:t>
+              <a:t>–   Conectarse son dos líneas de configuración; </a:t>
+            </a:r>
+            <a:r>
+              <a:rPr sz="2000" b="1" i="0">
+                <a:solidFill>
+                  <a:srgbClr val="333333"/>
+                </a:solidFill>
+                <a:latin typeface="Calibri"/>
+              </a:rPr>
+              <a:t>integrar</a:t>
+            </a:r>
+            <a:r>
+              <a:rPr sz="2000" b="0" i="0">
+                <a:solidFill>
+                  <a:srgbClr val="333333"/>
+                </a:solidFill>
+                <a:latin typeface="Calibri"/>
+              </a:rPr>
+              <a:t> es decidir por qué puerta la aplicación toca los datos.</a:t>
             </a:r>
           </a:p>
           <a:p>
@@ -11109,7 +17307,25 @@
                 </a:solidFill>
                 <a:latin typeface="Calibri"/>
               </a:rPr>
-              <a:t>–   Integrar es decidir cual es la unica puerta por la que la aplicacion puede tocar los datos, y dejar esa puerta escrita en un documento que las dos…</a:t>
+              <a:t>–   Si la aplicación arma </a:t>
+            </a:r>
+            <a:r>
+              <a:rPr sz="2000" b="1" i="0">
+                <a:solidFill>
+                  <a:srgbClr val="333333"/>
+                </a:solidFill>
+                <a:latin typeface="Calibri"/>
+              </a:rPr>
+              <a:t>texto SQL</a:t>
+            </a:r>
+            <a:r>
+              <a:rPr sz="2000" b="0" i="0">
+                <a:solidFill>
+                  <a:srgbClr val="333333"/>
+                </a:solidFill>
+                <a:latin typeface="Calibri"/>
+              </a:rPr>
+              <a:t> contra las tablas, abre la inyección y repite la regla en cada pantalla.</a:t>
             </a:r>
           </a:p>
           <a:p>
@@ -11125,7 +17341,59 @@
                 </a:solidFill>
                 <a:latin typeface="Calibri"/>
               </a:rPr>
-              <a:t>–   En la primera, la aplicacion arma texto SQL contra las tablas.</a:t>
+              <a:t>–   Si solo invoca </a:t>
+            </a:r>
+            <a:r>
+              <a:rPr sz="2000" b="1" i="0">
+                <a:solidFill>
+                  <a:srgbClr val="333333"/>
+                </a:solidFill>
+                <a:latin typeface="Calibri"/>
+              </a:rPr>
+              <a:t>procedimientos y funciones</a:t>
+            </a:r>
+            <a:r>
+              <a:rPr sz="2000" b="0" i="0">
+                <a:solidFill>
+                  <a:srgbClr val="333333"/>
+                </a:solidFill>
+                <a:latin typeface="Calibri"/>
+              </a:rPr>
+              <a:t>, cada regla vive en un lugar y basta con EXECUTE.</a:t>
+            </a:r>
+          </a:p>
+          <a:p>
+            <a:pPr>
+              <a:spcAft>
+                <a:spcPts val="800"/>
+              </a:spcAft>
+            </a:pPr>
+            <a:r>
+              <a:rPr sz="2000" b="0" i="0">
+                <a:solidFill>
+                  <a:srgbClr val="333333"/>
+                </a:solidFill>
+                <a:latin typeface="Calibri"/>
+              </a:rPr>
+              <a:t>–   Esa puerta, escrita en un documento que las dos partes respetan, es el </a:t>
+            </a:r>
+            <a:r>
+              <a:rPr sz="2000" b="1" i="0">
+                <a:solidFill>
+                  <a:srgbClr val="333333"/>
+                </a:solidFill>
+                <a:latin typeface="Calibri"/>
+              </a:rPr>
+              <a:t>contrato</a:t>
+            </a:r>
+            <a:r>
+              <a:rPr sz="2000" b="0" i="0">
+                <a:solidFill>
+                  <a:srgbClr val="333333"/>
+                </a:solidFill>
+                <a:latin typeface="Calibri"/>
+              </a:rPr>
+              <a:t>.</a:t>
             </a:r>
           </a:p>
         </p:txBody>
@@ -11633,7 +17901,25 @@
                 </a:solidFill>
                 <a:latin typeface="Calibri"/>
               </a:rPr>
-              <a:t>–   La inyeccion SQL es lo que ocurre cuando un dato que escribio un usuario termina siendo interpretado como codigo por el motor.</a:t>
+              <a:t>–   La </a:t>
+            </a:r>
+            <a:r>
+              <a:rPr sz="2000" b="1" i="0">
+                <a:solidFill>
+                  <a:srgbClr val="333333"/>
+                </a:solidFill>
+                <a:latin typeface="Calibri"/>
+              </a:rPr>
+              <a:t>inyección SQL</a:t>
+            </a:r>
+            <a:r>
+              <a:rPr sz="2000" b="0" i="0">
+                <a:solidFill>
+                  <a:srgbClr val="333333"/>
+                </a:solidFill>
+                <a:latin typeface="Calibri"/>
+              </a:rPr>
+              <a:t> ocurre cuando un dato que escribió el usuario termina ejecutado como código.</a:t>
             </a:r>
           </a:p>
           <a:p>
@@ -11649,7 +17935,25 @@
                 </a:solidFill>
                 <a:latin typeface="Calibri"/>
               </a:rPr>
-              <a:t>–   El motor no puede distinguir que parte del texto la escribio el programador y que parte el usuario.</a:t>
+              <a:t>–   Si la aplicación </a:t>
+            </a:r>
+            <a:r>
+              <a:rPr sz="2000" b="1" i="0">
+                <a:solidFill>
+                  <a:srgbClr val="333333"/>
+                </a:solidFill>
+                <a:latin typeface="Calibri"/>
+              </a:rPr>
+              <a:t>concatena</a:t>
+            </a:r>
+            <a:r>
+              <a:rPr sz="2000" b="0" i="0">
+                <a:solidFill>
+                  <a:srgbClr val="333333"/>
+                </a:solidFill>
+                <a:latin typeface="Calibri"/>
+              </a:rPr>
+              <a:t> la entrada, el motor recibe un solo texto y no distingue quién escribió qué.</a:t>
             </a:r>
           </a:p>
           <a:p>
@@ -11665,7 +17969,59 @@
                 </a:solidFill>
                 <a:latin typeface="Calibri"/>
               </a:rPr>
-              <a:t>–   Si alguien escribe la secuencia comilla, espacio, OR 1=1, espacio, doble guion, el motor recibe WHERE nombre = '' OR 1=1 -- ' y devuelve la tabla…</a:t>
+              <a:t>–   Con la entrada </a:t>
+            </a:r>
+            <a:r>
+              <a:rPr sz="2000" b="1" i="0">
+                <a:solidFill>
+                  <a:srgbClr val="333333"/>
+                </a:solidFill>
+                <a:latin typeface="Calibri"/>
+              </a:rPr>
+              <a:t>' OR 1=1 --</a:t>
+            </a:r>
+            <a:r>
+              <a:rPr sz="2000" b="0" i="0">
+                <a:solidFill>
+                  <a:srgbClr val="333333"/>
+                </a:solidFill>
+                <a:latin typeface="Calibri"/>
+              </a:rPr>
+              <a:t> la condición es verdadera en todas las filas y el resto queda comentado.</a:t>
+            </a:r>
+          </a:p>
+          <a:p>
+            <a:pPr>
+              <a:spcAft>
+                <a:spcPts val="800"/>
+              </a:spcAft>
+            </a:pPr>
+            <a:r>
+              <a:rPr sz="2000" b="0" i="0">
+                <a:solidFill>
+                  <a:srgbClr val="333333"/>
+                </a:solidFill>
+                <a:latin typeface="Calibri"/>
+              </a:rPr>
+              <a:t>–   La búsqueda de una mascota devuelve </a:t>
+            </a:r>
+            <a:r>
+              <a:rPr sz="2000" b="1" i="0">
+                <a:solidFill>
+                  <a:srgbClr val="333333"/>
+                </a:solidFill>
+                <a:latin typeface="Calibri"/>
+              </a:rPr>
+              <a:t>las 8</a:t>
+            </a:r>
+            <a:r>
+              <a:rPr sz="2000" b="0" i="0">
+                <a:solidFill>
+                  <a:srgbClr val="333333"/>
+                </a:solidFill>
+                <a:latin typeface="Calibri"/>
+              </a:rPr>
+              <a:t>: el dato se interpretó como código.</a:t>
             </a:r>
           </a:p>
         </p:txBody>
@@ -11996,7 +18352,7 @@
         <p:spPr>
           <a:xfrm>
             <a:off x="457200" y="1261872"/>
-            <a:ext cx="11277295" cy="4568884"/>
+            <a:ext cx="11277295" cy="4917043"/>
           </a:xfrm>
           <a:prstGeom prst="roundRect">
             <a:avLst>
@@ -12246,7 +18602,7 @@
         <p:spPr>
           <a:xfrm>
             <a:off x="685800" y="1719072"/>
-            <a:ext cx="502920" cy="3974524"/>
+            <a:ext cx="502920" cy="4322683"/>
           </a:xfrm>
           <a:prstGeom prst="rect">
             <a:avLst/>
@@ -12434,6 +18790,22 @@
               <a:t>11</a:t>
             </a:r>
           </a:p>
+          <a:p>
+            <a:pPr algn="r">
+              <a:spcAft>
+                <a:spcPts val="428"/>
+              </a:spcAft>
+            </a:pPr>
+            <a:r>
+              <a:rPr sz="2000" i="0" b="0">
+                <a:solidFill>
+                  <a:srgbClr val="858585"/>
+                </a:solidFill>
+                <a:latin typeface="Consolas"/>
+              </a:rPr>
+              <a:t>12</a:t>
+            </a:r>
+          </a:p>
         </p:txBody>
       </p:sp>
       <p:sp>
@@ -12445,7 +18817,7 @@
         <p:spPr>
           <a:xfrm>
             <a:off x="1188720" y="1719072"/>
-            <a:ext cx="10271455" cy="3974524"/>
+            <a:ext cx="10271455" cy="4322683"/>
           </a:xfrm>
           <a:prstGeom prst="rect">
             <a:avLst/>
@@ -12502,7 +18874,7 @@
                 </a:solidFill>
                 <a:latin typeface="Consolas"/>
               </a:rPr>
-              <a:t>-- Si entrada = 'x'; DROP TABLE cita; --</a:t>
+              <a:t>-- Si entrada = x'; UPDATE cita SET estado = 'CANCELADA'; --</a:t>
             </a:r>
           </a:p>
           <a:p>
@@ -12518,7 +18890,7 @@
                 </a:solidFill>
                 <a:latin typeface="Consolas"/>
               </a:rPr>
-              <a:t>-- el motor recibe dos sentencias y ejecuta las dos.</a:t>
+              <a:t>-- el motor recibe DOS sentencias y ejecuta las dos: agenda cancelada</a:t>
             </a:r>
           </a:p>
           <a:p>
@@ -12875,7 +19247,16 @@
                 </a:solidFill>
                 <a:latin typeface="Consolas"/>
               </a:rPr>
-              <a:t>);</a:t>
+              <a:t>);             </a:t>
+            </a:r>
+            <a:r>
+              <a:rPr sz="2000" i="1" b="0">
+                <a:solidFill>
+                  <a:srgbClr val="6A9955"/>
+                </a:solidFill>
+                <a:latin typeface="Consolas"/>
+              </a:rPr>
+              <a:t>-- 1 fila</a:t>
             </a:r>
           </a:p>
           <a:p>
@@ -12918,16 +19299,41 @@
                 </a:solidFill>
                 <a:latin typeface="Consolas"/>
               </a:rPr>
-              <a:t>(</a:t>
-            </a:r>
+              <a:t>(                  </a:t>
+            </a:r>
+            <a:r>
+              <a:rPr sz="2000" i="1" b="0">
+                <a:solidFill>
+                  <a:srgbClr val="6A9955"/>
+                </a:solidFill>
+                <a:latin typeface="Consolas"/>
+              </a:rPr>
+              <a:t>-- 0 filas: el UPDATE no corre</a:t>
+            </a:r>
+          </a:p>
+          <a:p>
+            <a:pPr>
+              <a:spcAft>
+                <a:spcPts val="428"/>
+              </a:spcAft>
+            </a:pPr>
             <a:r>
               <a:rPr sz="2000" i="0" b="0">
                 <a:solidFill>
+                  <a:srgbClr val="D4D4D4"/>
+                </a:solidFill>
+                <a:latin typeface="Consolas"/>
+              </a:rPr>
+              <a:t>  </a:t>
+            </a:r>
+            <a:r>
+              <a:rPr sz="2000" i="0" b="0">
+                <a:solidFill>
                   <a:srgbClr val="CE9178"/>
                 </a:solidFill>
                 <a:latin typeface="Consolas"/>
               </a:rPr>
-              <a:t>'x''; DROP TABLE cita; --'</a:t>
+              <a:t>'x''; UPDATE cita SET estado = ''CANCELADA''; --'</a:t>
             </a:r>
             <a:r>
               <a:rPr sz="2000" i="0" b="0">
@@ -12936,16 +19342,7 @@
                 </a:solidFill>
                 <a:latin typeface="Consolas"/>
               </a:rPr>
-              <a:t>);   </a:t>
-            </a:r>
-            <a:r>
-              <a:rPr sz="2000" i="1" b="0">
-                <a:solidFill>
-                  <a:srgbClr val="6A9955"/>
-                </a:solidFill>
-                <a:latin typeface="Consolas"/>
-              </a:rPr>
-              <a:t>-- 0 filas, nada mas</a:t>
+              <a:t>);</a:t>
             </a:r>
           </a:p>
         </p:txBody>
@@ -13317,7 +19714,25 @@
                 </a:solidFill>
                 <a:latin typeface="Calibri"/>
               </a:rPr>
-              <a:t>–   Cuando la aplicacion envia la sentencia con marcadores de posicion (en PostgreSQL $1 en una sentencia preparada, en JDBC el signo de interrogacion</a:t>
+              <a:t>–   Con un </a:t>
+            </a:r>
+            <a:r>
+              <a:rPr sz="2000" b="1" i="0">
+                <a:solidFill>
+                  <a:srgbClr val="333333"/>
+                </a:solidFill>
+                <a:latin typeface="Calibri"/>
+              </a:rPr>
+              <a:t>parámetro</a:t>
+            </a:r>
+            <a:r>
+              <a:rPr sz="2000" b="0" i="0">
+                <a:solidFill>
+                  <a:srgbClr val="333333"/>
+                </a:solidFill>
+                <a:latin typeface="Calibri"/>
+              </a:rPr>
+              <a:t>, el motor analiza primero la sentencia con su marcador $1, sin ningún valor.</a:t>
             </a:r>
           </a:p>
           <a:p>
@@ -13333,7 +19748,25 @@
                 </a:solidFill>
                 <a:latin typeface="Calibri"/>
               </a:rPr>
-              <a:t>–   Oracle escribe:p_nombre, solo como contraste) el motor analiza primero la sentencia sin los valores, construye el plan de ejecucion.</a:t>
+              <a:t>–   Después recibe el valor como </a:t>
+            </a:r>
+            <a:r>
+              <a:rPr sz="2000" b="1" i="0">
+                <a:solidFill>
+                  <a:srgbClr val="333333"/>
+                </a:solidFill>
+                <a:latin typeface="Calibri"/>
+              </a:rPr>
+              <a:t>dato tipado</a:t>
+            </a:r>
+            <a:r>
+              <a:rPr sz="2000" b="0" i="0">
+                <a:solidFill>
+                  <a:srgbClr val="333333"/>
+                </a:solidFill>
+                <a:latin typeface="Calibri"/>
+              </a:rPr>
+              <a:t> en una casilla ya reservada, y nunca lo vuelve a analizar.</a:t>
             </a:r>
           </a:p>
           <a:p>
@@ -13349,7 +19782,59 @@
                 </a:solidFill>
                 <a:latin typeface="Calibri"/>
               </a:rPr>
-              <a:t>–   Ese valor nunca vuelve al analizador sintactico: si el usuario escribio comilla OR 1=1 doble guion.</a:t>
+              <a:t>–   La entrada maliciosa se busca </a:t>
+            </a:r>
+            <a:r>
+              <a:rPr sz="2000" b="1" i="0">
+                <a:solidFill>
+                  <a:srgbClr val="333333"/>
+                </a:solidFill>
+                <a:latin typeface="Calibri"/>
+              </a:rPr>
+              <a:t>literal</a:t>
+            </a:r>
+            <a:r>
+              <a:rPr sz="2000" b="0" i="0">
+                <a:solidFill>
+                  <a:srgbClr val="333333"/>
+                </a:solidFill>
+                <a:latin typeface="Calibri"/>
+              </a:rPr>
+              <a:t> y devuelve 0 filas: la inyección es imposible, no improbable.</a:t>
+            </a:r>
+          </a:p>
+          <a:p>
+            <a:pPr>
+              <a:spcAft>
+                <a:spcPts val="800"/>
+              </a:spcAft>
+            </a:pPr>
+            <a:r>
+              <a:rPr sz="2000" b="0" i="0">
+                <a:solidFill>
+                  <a:srgbClr val="333333"/>
+                </a:solidFill>
+                <a:latin typeface="Calibri"/>
+              </a:rPr>
+              <a:t>–   Un ORM protege mientras se usen sus parámetros, y deja de hacerlo al </a:t>
+            </a:r>
+            <a:r>
+              <a:rPr sz="2000" b="1" i="0">
+                <a:solidFill>
+                  <a:srgbClr val="333333"/>
+                </a:solidFill>
+                <a:latin typeface="Calibri"/>
+              </a:rPr>
+              <a:t>concatenar</a:t>
+            </a:r>
+            <a:r>
+              <a:rPr sz="2000" b="0" i="0">
+                <a:solidFill>
+                  <a:srgbClr val="333333"/>
+                </a:solidFill>
+                <a:latin typeface="Calibri"/>
+              </a:rPr>
+              <a:t> una consulta.</a:t>
             </a:r>
           </a:p>
         </p:txBody>
@@ -13857,7 +20342,25 @@
                 </a:solidFill>
                 <a:latin typeface="Calibri"/>
               </a:rPr>
-              <a:t>–   Contrato, dicho en serio, es mucho mas que el nombre del procedimiento.</a:t>
+              <a:t>–   Un </a:t>
+            </a:r>
+            <a:r>
+              <a:rPr sz="2000" b="1" i="0">
+                <a:solidFill>
+                  <a:srgbClr val="333333"/>
+                </a:solidFill>
+                <a:latin typeface="Calibri"/>
+              </a:rPr>
+              <a:t>contrato</a:t>
+            </a:r>
+            <a:r>
+              <a:rPr sz="2000" b="0" i="0">
+                <a:solidFill>
+                  <a:srgbClr val="333333"/>
+                </a:solidFill>
+                <a:latin typeface="Calibri"/>
+              </a:rPr>
+              <a:t> dice todo lo que la aplicación necesita para llamar una operación sin leer su código.</a:t>
             </a:r>
           </a:p>
           <a:p>
@@ -13873,7 +20376,25 @@
                 </a:solidFill>
                 <a:latin typeface="Calibri"/>
               </a:rPr>
-              <a:t>–   La firma: nombre y lista ordenada de parametros con su tipo y su direccion.</a:t>
+              <a:t>–   Firma, </a:t>
+            </a:r>
+            <a:r>
+              <a:rPr sz="2000" b="1" i="0">
+                <a:solidFill>
+                  <a:srgbClr val="333333"/>
+                </a:solidFill>
+                <a:latin typeface="Calibri"/>
+              </a:rPr>
+              <a:t>precondiciones</a:t>
+            </a:r>
+            <a:r>
+              <a:rPr sz="2000" b="0" i="0">
+                <a:solidFill>
+                  <a:srgbClr val="333333"/>
+                </a:solidFill>
+                <a:latin typeface="Calibri"/>
+              </a:rPr>
+              <a:t> y efecto: qué recibe, qué debe ser cierto antes y qué queda distinto después.</a:t>
             </a:r>
           </a:p>
           <a:p>
@@ -13889,7 +20410,25 @@
                 </a:solidFill>
                 <a:latin typeface="Calibri"/>
               </a:rPr>
-              <a:t>–   Las precondiciones: lo que debe ser verdadero antes de llamar.</a:t>
+              <a:t>–   Además, los </a:t>
+            </a:r>
+            <a:r>
+              <a:rPr sz="2000" b="1" i="0">
+                <a:solidFill>
+                  <a:srgbClr val="333333"/>
+                </a:solidFill>
+                <a:latin typeface="Calibri"/>
+              </a:rPr>
+              <a:t>errores</a:t>
+            </a:r>
+            <a:r>
+              <a:rPr sz="2000" b="0" i="0">
+                <a:solidFill>
+                  <a:srgbClr val="333333"/>
+                </a:solidFill>
+                <a:latin typeface="Calibri"/>
+              </a:rPr>
+              <a:t>, la idempotencia y la versión: qué falla, si repetir es seguro y cómo cambia.</a:t>
             </a:r>
           </a:p>
           <a:p>
@@ -13905,7 +20444,25 @@
                 </a:solidFill>
                 <a:latin typeface="Calibri"/>
               </a:rPr>
-              <a:t>–   El efecto o postcondicion: que quedo distinto en la base despues de la llamada.</a:t>
+              <a:t>–   Agendar no es </a:t>
+            </a:r>
+            <a:r>
+              <a:rPr sz="2000" b="1" i="0">
+                <a:solidFill>
+                  <a:srgbClr val="333333"/>
+                </a:solidFill>
+                <a:latin typeface="Calibri"/>
+              </a:rPr>
+              <a:t>idempotente</a:t>
+            </a:r>
+            <a:r>
+              <a:rPr sz="2000" b="0" i="0">
+                <a:solidFill>
+                  <a:srgbClr val="333333"/>
+                </a:solidFill>
+                <a:latin typeface="Calibri"/>
+              </a:rPr>
+              <a:t>: un doble clic crea dos citas, salvo que un UNIQUE lo impida.</a:t>
             </a:r>
           </a:p>
         </p:txBody>

--- a/Bases de Datos II/Clases/Clase 12 - Integracion y preparacion final/Presentacion.pptx
+++ b/Bases de Datos II/Clases/Clase 12 - Integracion y preparacion final/Presentacion.pptx
@@ -9946,7 +9946,7 @@
         <p:spPr>
           <a:xfrm>
             <a:off x="457200" y="1261872"/>
-            <a:ext cx="11277295" cy="5069443"/>
+            <a:ext cx="6991923" cy="4325302"/>
           </a:xfrm>
           <a:prstGeom prst="roundRect">
             <a:avLst>
@@ -9991,7 +9991,7 @@
         <p:spPr>
           <a:xfrm>
             <a:off x="457200" y="1261872"/>
-            <a:ext cx="11277295" cy="365760"/>
+            <a:ext cx="6991923" cy="365760"/>
           </a:xfrm>
           <a:prstGeom prst="rect">
             <a:avLst/>
@@ -10163,7 +10163,7 @@
         <p:spPr>
           <a:xfrm>
             <a:off x="1371600" y="1298448"/>
-            <a:ext cx="10180015" cy="292608"/>
+            <a:ext cx="5894643" cy="292608"/>
           </a:xfrm>
           <a:prstGeom prst="rect">
             <a:avLst/>
@@ -10196,7 +10196,7 @@
         <p:spPr>
           <a:xfrm>
             <a:off x="685800" y="1719072"/>
-            <a:ext cx="502920" cy="4475083"/>
+            <a:ext cx="502920" cy="3730942"/>
           </a:xfrm>
           <a:prstGeom prst="rect">
             <a:avLst/>
@@ -10211,11 +10211,11 @@
           <a:p>
             <a:pPr algn="r">
               <a:spcAft>
-                <a:spcPts val="321"/>
+                <a:spcPts val="257"/>
               </a:spcAft>
             </a:pPr>
             <a:r>
-              <a:rPr sz="1500" i="0" b="0">
+              <a:rPr sz="1200" i="0" b="0">
                 <a:solidFill>
                   <a:srgbClr val="858585"/>
                 </a:solidFill>
@@ -10227,11 +10227,11 @@
           <a:p>
             <a:pPr algn="r">
               <a:spcAft>
-                <a:spcPts val="321"/>
+                <a:spcPts val="257"/>
               </a:spcAft>
             </a:pPr>
             <a:r>
-              <a:rPr sz="1500" i="0" b="0">
+              <a:rPr sz="1200" i="0" b="0">
                 <a:solidFill>
                   <a:srgbClr val="858585"/>
                 </a:solidFill>
@@ -10243,11 +10243,11 @@
           <a:p>
             <a:pPr algn="r">
               <a:spcAft>
-                <a:spcPts val="321"/>
+                <a:spcPts val="257"/>
               </a:spcAft>
             </a:pPr>
             <a:r>
-              <a:rPr sz="1500" i="0" b="0">
+              <a:rPr sz="1200" i="0" b="0">
                 <a:solidFill>
                   <a:srgbClr val="858585"/>
                 </a:solidFill>
@@ -10259,11 +10259,11 @@
           <a:p>
             <a:pPr algn="r">
               <a:spcAft>
-                <a:spcPts val="321"/>
+                <a:spcPts val="257"/>
               </a:spcAft>
             </a:pPr>
             <a:r>
-              <a:rPr sz="1500" i="0" b="0">
+              <a:rPr sz="1200" i="0" b="0">
                 <a:solidFill>
                   <a:srgbClr val="858585"/>
                 </a:solidFill>
@@ -10275,11 +10275,11 @@
           <a:p>
             <a:pPr algn="r">
               <a:spcAft>
-                <a:spcPts val="321"/>
+                <a:spcPts val="257"/>
               </a:spcAft>
             </a:pPr>
             <a:r>
-              <a:rPr sz="1500" i="0" b="0">
+              <a:rPr sz="1200" i="0" b="0">
                 <a:solidFill>
                   <a:srgbClr val="858585"/>
                 </a:solidFill>
@@ -10291,11 +10291,11 @@
           <a:p>
             <a:pPr algn="r">
               <a:spcAft>
-                <a:spcPts val="321"/>
+                <a:spcPts val="257"/>
               </a:spcAft>
             </a:pPr>
             <a:r>
-              <a:rPr sz="1500" i="0" b="0">
+              <a:rPr sz="1200" i="0" b="0">
                 <a:solidFill>
                   <a:srgbClr val="858585"/>
                 </a:solidFill>
@@ -10307,11 +10307,11 @@
           <a:p>
             <a:pPr algn="r">
               <a:spcAft>
-                <a:spcPts val="321"/>
+                <a:spcPts val="257"/>
               </a:spcAft>
             </a:pPr>
             <a:r>
-              <a:rPr sz="1500" i="0" b="0">
+              <a:rPr sz="1200" i="0" b="0">
                 <a:solidFill>
                   <a:srgbClr val="858585"/>
                 </a:solidFill>
@@ -10323,11 +10323,11 @@
           <a:p>
             <a:pPr algn="r">
               <a:spcAft>
-                <a:spcPts val="321"/>
+                <a:spcPts val="257"/>
               </a:spcAft>
             </a:pPr>
             <a:r>
-              <a:rPr sz="1500" i="0" b="0">
+              <a:rPr sz="1200" i="0" b="0">
                 <a:solidFill>
                   <a:srgbClr val="858585"/>
                 </a:solidFill>
@@ -10339,11 +10339,11 @@
           <a:p>
             <a:pPr algn="r">
               <a:spcAft>
-                <a:spcPts val="321"/>
+                <a:spcPts val="257"/>
               </a:spcAft>
             </a:pPr>
             <a:r>
-              <a:rPr sz="1500" i="0" b="0">
+              <a:rPr sz="1200" i="0" b="0">
                 <a:solidFill>
                   <a:srgbClr val="858585"/>
                 </a:solidFill>
@@ -10355,11 +10355,11 @@
           <a:p>
             <a:pPr algn="r">
               <a:spcAft>
-                <a:spcPts val="321"/>
+                <a:spcPts val="257"/>
               </a:spcAft>
             </a:pPr>
             <a:r>
-              <a:rPr sz="1500" i="0" b="0">
+              <a:rPr sz="1200" i="0" b="0">
                 <a:solidFill>
                   <a:srgbClr val="858585"/>
                 </a:solidFill>
@@ -10371,11 +10371,11 @@
           <a:p>
             <a:pPr algn="r">
               <a:spcAft>
-                <a:spcPts val="321"/>
+                <a:spcPts val="257"/>
               </a:spcAft>
             </a:pPr>
             <a:r>
-              <a:rPr sz="1500" i="0" b="0">
+              <a:rPr sz="1200" i="0" b="0">
                 <a:solidFill>
                   <a:srgbClr val="858585"/>
                 </a:solidFill>
@@ -10387,11 +10387,11 @@
           <a:p>
             <a:pPr algn="r">
               <a:spcAft>
-                <a:spcPts val="321"/>
+                <a:spcPts val="257"/>
               </a:spcAft>
             </a:pPr>
             <a:r>
-              <a:rPr sz="1500" i="0" b="0">
+              <a:rPr sz="1200" i="0" b="0">
                 <a:solidFill>
                   <a:srgbClr val="858585"/>
                 </a:solidFill>
@@ -10403,11 +10403,11 @@
           <a:p>
             <a:pPr algn="r">
               <a:spcAft>
-                <a:spcPts val="321"/>
+                <a:spcPts val="257"/>
               </a:spcAft>
             </a:pPr>
             <a:r>
-              <a:rPr sz="1500" i="0" b="0">
+              <a:rPr sz="1200" i="0" b="0">
                 <a:solidFill>
                   <a:srgbClr val="858585"/>
                 </a:solidFill>
@@ -10419,11 +10419,11 @@
           <a:p>
             <a:pPr algn="r">
               <a:spcAft>
-                <a:spcPts val="321"/>
+                <a:spcPts val="257"/>
               </a:spcAft>
             </a:pPr>
             <a:r>
-              <a:rPr sz="1500" i="0" b="0">
+              <a:rPr sz="1200" i="0" b="0">
                 <a:solidFill>
                   <a:srgbClr val="858585"/>
                 </a:solidFill>
@@ -10435,11 +10435,11 @@
           <a:p>
             <a:pPr algn="r">
               <a:spcAft>
-                <a:spcPts val="321"/>
+                <a:spcPts val="257"/>
               </a:spcAft>
             </a:pPr>
             <a:r>
-              <a:rPr sz="1500" i="0" b="0">
+              <a:rPr sz="1200" i="0" b="0">
                 <a:solidFill>
                   <a:srgbClr val="858585"/>
                 </a:solidFill>
@@ -10451,11 +10451,11 @@
           <a:p>
             <a:pPr algn="r">
               <a:spcAft>
-                <a:spcPts val="321"/>
+                <a:spcPts val="257"/>
               </a:spcAft>
             </a:pPr>
             <a:r>
-              <a:rPr sz="1500" i="0" b="0">
+              <a:rPr sz="1200" i="0" b="0">
                 <a:solidFill>
                   <a:srgbClr val="858585"/>
                 </a:solidFill>
@@ -10475,7 +10475,7 @@
         <p:spPr>
           <a:xfrm>
             <a:off x="1188720" y="1719072"/>
-            <a:ext cx="10271455" cy="4475083"/>
+            <a:ext cx="5986083" cy="3730942"/>
           </a:xfrm>
           <a:prstGeom prst="rect">
             <a:avLst/>
@@ -10490,11 +10490,11 @@
           <a:p>
             <a:pPr>
               <a:spcAft>
-                <a:spcPts val="321"/>
+                <a:spcPts val="257"/>
               </a:spcAft>
             </a:pPr>
             <a:r>
-              <a:rPr sz="1500" i="0" b="0">
+              <a:rPr sz="1200" i="0" b="0">
                 <a:solidFill>
                   <a:srgbClr val="D4D4D4"/>
                 </a:solidFill>
@@ -10506,11 +10506,11 @@
           <a:p>
             <a:pPr>
               <a:spcAft>
-                <a:spcPts val="321"/>
+                <a:spcPts val="257"/>
               </a:spcAft>
             </a:pPr>
             <a:r>
-              <a:rPr sz="1500" i="0" b="0">
+              <a:rPr sz="1200" i="0" b="0">
                 <a:solidFill>
                   <a:srgbClr val="D4D4D4"/>
                 </a:solidFill>
@@ -10519,7 +10519,7 @@
               <a:t>  </a:t>
             </a:r>
             <a:r>
-              <a:rPr sz="1500" i="0" b="0">
+              <a:rPr sz="1200" i="0" b="0">
                 <a:solidFill>
                   <a:srgbClr val="D4D4D4"/>
                 </a:solidFill>
@@ -10528,7 +10528,7 @@
               <a:t>actor</a:t>
             </a:r>
             <a:r>
-              <a:rPr sz="1500" i="0" b="0">
+              <a:rPr sz="1200" i="0" b="0">
                 <a:solidFill>
                   <a:srgbClr val="D4D4D4"/>
                 </a:solidFill>
@@ -10537,7 +10537,7 @@
               <a:t> </a:t>
             </a:r>
             <a:r>
-              <a:rPr sz="1500" i="0" b="0">
+              <a:rPr sz="1200" i="0" b="0">
                 <a:solidFill>
                   <a:srgbClr val="D4D4D4"/>
                 </a:solidFill>
@@ -10546,7 +10546,7 @@
               <a:t>R</a:t>
             </a:r>
             <a:r>
-              <a:rPr sz="1500" i="0" b="0">
+              <a:rPr sz="1200" i="0" b="0">
                 <a:solidFill>
                   <a:srgbClr val="D4D4D4"/>
                 </a:solidFill>
@@ -10555,7 +10555,7 @@
               <a:t> </a:t>
             </a:r>
             <a:r>
-              <a:rPr sz="1500" i="0" b="0">
+              <a:rPr sz="1200" i="0" b="0">
                 <a:solidFill>
                   <a:srgbClr val="D4D4D4"/>
                 </a:solidFill>
@@ -10564,7 +10564,7 @@
               <a:t>as</a:t>
             </a:r>
             <a:r>
-              <a:rPr sz="1500" i="0" b="0">
+              <a:rPr sz="1200" i="0" b="0">
                 <a:solidFill>
                   <a:srgbClr val="D4D4D4"/>
                 </a:solidFill>
@@ -10573,7 +10573,7 @@
               <a:t> </a:t>
             </a:r>
             <a:r>
-              <a:rPr sz="1500" i="0" b="0">
+              <a:rPr sz="1200" i="0" b="0">
                 <a:solidFill>
                   <a:srgbClr val="D4D4D4"/>
                 </a:solidFill>
@@ -10585,11 +10585,11 @@
           <a:p>
             <a:pPr>
               <a:spcAft>
-                <a:spcPts val="321"/>
+                <a:spcPts val="257"/>
               </a:spcAft>
             </a:pPr>
             <a:r>
-              <a:rPr sz="1500" i="0" b="0">
+              <a:rPr sz="1200" i="0" b="0">
                 <a:solidFill>
                   <a:srgbClr val="D4D4D4"/>
                 </a:solidFill>
@@ -10598,7 +10598,7 @@
               <a:t>  </a:t>
             </a:r>
             <a:r>
-              <a:rPr sz="1500" i="0" b="0">
+              <a:rPr sz="1200" i="0" b="0">
                 <a:solidFill>
                   <a:srgbClr val="D4D4D4"/>
                 </a:solidFill>
@@ -10607,7 +10607,7 @@
               <a:t>participant</a:t>
             </a:r>
             <a:r>
-              <a:rPr sz="1500" i="0" b="0">
+              <a:rPr sz="1200" i="0" b="0">
                 <a:solidFill>
                   <a:srgbClr val="D4D4D4"/>
                 </a:solidFill>
@@ -10616,7 +10616,7 @@
               <a:t> </a:t>
             </a:r>
             <a:r>
-              <a:rPr sz="1500" i="0" b="0">
+              <a:rPr sz="1200" i="0" b="0">
                 <a:solidFill>
                   <a:srgbClr val="D4D4D4"/>
                 </a:solidFill>
@@ -10625,7 +10625,7 @@
               <a:t>A</a:t>
             </a:r>
             <a:r>
-              <a:rPr sz="1500" i="0" b="0">
+              <a:rPr sz="1200" i="0" b="0">
                 <a:solidFill>
                   <a:srgbClr val="D4D4D4"/>
                 </a:solidFill>
@@ -10634,7 +10634,7 @@
               <a:t> </a:t>
             </a:r>
             <a:r>
-              <a:rPr sz="1500" i="0" b="0">
+              <a:rPr sz="1200" i="0" b="0">
                 <a:solidFill>
                   <a:srgbClr val="D4D4D4"/>
                 </a:solidFill>
@@ -10643,7 +10643,7 @@
               <a:t>as</a:t>
             </a:r>
             <a:r>
-              <a:rPr sz="1500" i="0" b="0">
+              <a:rPr sz="1200" i="0" b="0">
                 <a:solidFill>
                   <a:srgbClr val="D4D4D4"/>
                 </a:solidFill>
@@ -10652,7 +10652,7 @@
               <a:t> </a:t>
             </a:r>
             <a:r>
-              <a:rPr sz="1500" i="0" b="0">
+              <a:rPr sz="1200" i="0" b="0">
                 <a:solidFill>
                   <a:srgbClr val="D4D4D4"/>
                 </a:solidFill>
@@ -10664,11 +10664,11 @@
           <a:p>
             <a:pPr>
               <a:spcAft>
-                <a:spcPts val="321"/>
+                <a:spcPts val="257"/>
               </a:spcAft>
             </a:pPr>
             <a:r>
-              <a:rPr sz="1500" i="0" b="0">
+              <a:rPr sz="1200" i="0" b="0">
                 <a:solidFill>
                   <a:srgbClr val="D4D4D4"/>
                 </a:solidFill>
@@ -10677,7 +10677,7 @@
               <a:t>  </a:t>
             </a:r>
             <a:r>
-              <a:rPr sz="1500" i="0" b="0">
+              <a:rPr sz="1200" i="0" b="0">
                 <a:solidFill>
                   <a:srgbClr val="D4D4D4"/>
                 </a:solidFill>
@@ -10686,7 +10686,7 @@
               <a:t>participant</a:t>
             </a:r>
             <a:r>
-              <a:rPr sz="1500" i="0" b="0">
+              <a:rPr sz="1200" i="0" b="0">
                 <a:solidFill>
                   <a:srgbClr val="D4D4D4"/>
                 </a:solidFill>
@@ -10695,7 +10695,7 @@
               <a:t> </a:t>
             </a:r>
             <a:r>
-              <a:rPr sz="1500" i="0" b="0">
+              <a:rPr sz="1200" i="0" b="0">
                 <a:solidFill>
                   <a:srgbClr val="D4D4D4"/>
                 </a:solidFill>
@@ -10704,7 +10704,7 @@
               <a:t>B</a:t>
             </a:r>
             <a:r>
-              <a:rPr sz="1500" i="0" b="0">
+              <a:rPr sz="1200" i="0" b="0">
                 <a:solidFill>
                   <a:srgbClr val="D4D4D4"/>
                 </a:solidFill>
@@ -10713,7 +10713,7 @@
               <a:t> </a:t>
             </a:r>
             <a:r>
-              <a:rPr sz="1500" i="0" b="0">
+              <a:rPr sz="1200" i="0" b="0">
                 <a:solidFill>
                   <a:srgbClr val="D4D4D4"/>
                 </a:solidFill>
@@ -10722,7 +10722,7 @@
               <a:t>as</a:t>
             </a:r>
             <a:r>
-              <a:rPr sz="1500" i="0" b="0">
+              <a:rPr sz="1200" i="0" b="0">
                 <a:solidFill>
                   <a:srgbClr val="D4D4D4"/>
                 </a:solidFill>
@@ -10731,7 +10731,7 @@
               <a:t> </a:t>
             </a:r>
             <a:r>
-              <a:rPr sz="1500" i="0" b="0">
+              <a:rPr sz="1200" i="0" b="0">
                 <a:solidFill>
                   <a:srgbClr val="D4D4D4"/>
                 </a:solidFill>
@@ -10740,7 +10740,7 @@
               <a:t>Capa</a:t>
             </a:r>
             <a:r>
-              <a:rPr sz="1500" i="0" b="0">
+              <a:rPr sz="1200" i="0" b="0">
                 <a:solidFill>
                   <a:srgbClr val="D4D4D4"/>
                 </a:solidFill>
@@ -10749,7 +10749,7 @@
               <a:t> </a:t>
             </a:r>
             <a:r>
-              <a:rPr sz="1500" i="0" b="0">
+              <a:rPr sz="1200" i="0" b="0">
                 <a:solidFill>
                   <a:srgbClr val="D4D4D4"/>
                 </a:solidFill>
@@ -10758,7 +10758,7 @@
               <a:t>de</a:t>
             </a:r>
             <a:r>
-              <a:rPr sz="1500" i="0" b="0">
+              <a:rPr sz="1200" i="0" b="0">
                 <a:solidFill>
                   <a:srgbClr val="D4D4D4"/>
                 </a:solidFill>
@@ -10767,7 +10767,7 @@
               <a:t> </a:t>
             </a:r>
             <a:r>
-              <a:rPr sz="1500" i="0" b="0">
+              <a:rPr sz="1200" i="0" b="0">
                 <a:solidFill>
                   <a:srgbClr val="D4D4D4"/>
                 </a:solidFill>
@@ -10779,11 +10779,11 @@
           <a:p>
             <a:pPr>
               <a:spcAft>
-                <a:spcPts val="321"/>
+                <a:spcPts val="257"/>
               </a:spcAft>
             </a:pPr>
             <a:r>
-              <a:rPr sz="1500" i="0" b="0">
+              <a:rPr sz="1200" i="0" b="0">
                 <a:solidFill>
                   <a:srgbClr val="D4D4D4"/>
                 </a:solidFill>
@@ -10792,7 +10792,7 @@
               <a:t>  </a:t>
             </a:r>
             <a:r>
-              <a:rPr sz="1500" i="0" b="0">
+              <a:rPr sz="1200" i="0" b="0">
                 <a:solidFill>
                   <a:srgbClr val="D4D4D4"/>
                 </a:solidFill>
@@ -10801,7 +10801,7 @@
               <a:t>participant</a:t>
             </a:r>
             <a:r>
-              <a:rPr sz="1500" i="0" b="0">
+              <a:rPr sz="1200" i="0" b="0">
                 <a:solidFill>
                   <a:srgbClr val="D4D4D4"/>
                 </a:solidFill>
@@ -10810,7 +10810,7 @@
               <a:t> </a:t>
             </a:r>
             <a:r>
-              <a:rPr sz="1500" i="0" b="0">
+              <a:rPr sz="1200" i="0" b="0">
                 <a:solidFill>
                   <a:srgbClr val="D4D4D4"/>
                 </a:solidFill>
@@ -10819,7 +10819,7 @@
               <a:t>T</a:t>
             </a:r>
             <a:r>
-              <a:rPr sz="1500" i="0" b="0">
+              <a:rPr sz="1200" i="0" b="0">
                 <a:solidFill>
                   <a:srgbClr val="D4D4D4"/>
                 </a:solidFill>
@@ -10828,7 +10828,7 @@
               <a:t> </a:t>
             </a:r>
             <a:r>
-              <a:rPr sz="1500" i="0" b="0">
+              <a:rPr sz="1200" i="0" b="0">
                 <a:solidFill>
                   <a:srgbClr val="D4D4D4"/>
                 </a:solidFill>
@@ -10837,7 +10837,7 @@
               <a:t>as</a:t>
             </a:r>
             <a:r>
-              <a:rPr sz="1500" i="0" b="0">
+              <a:rPr sz="1200" i="0" b="0">
                 <a:solidFill>
                   <a:srgbClr val="D4D4D4"/>
                 </a:solidFill>
@@ -10846,7 +10846,7 @@
               <a:t> </a:t>
             </a:r>
             <a:r>
-              <a:rPr sz="1500" i="0" b="0">
+              <a:rPr sz="1200" i="0" b="0">
                 <a:solidFill>
                   <a:srgbClr val="D4D4D4"/>
                 </a:solidFill>
@@ -10855,7 +10855,7 @@
               <a:t>Tabla</a:t>
             </a:r>
             <a:r>
-              <a:rPr sz="1500" i="0" b="0">
+              <a:rPr sz="1200" i="0" b="0">
                 <a:solidFill>
                   <a:srgbClr val="D4D4D4"/>
                 </a:solidFill>
@@ -10864,7 +10864,7 @@
               <a:t> </a:t>
             </a:r>
             <a:r>
-              <a:rPr sz="1500" i="0" b="0">
+              <a:rPr sz="1200" i="0" b="0">
                 <a:solidFill>
                   <a:srgbClr val="D4D4D4"/>
                 </a:solidFill>
@@ -10876,11 +10876,11 @@
           <a:p>
             <a:pPr>
               <a:spcAft>
-                <a:spcPts val="321"/>
+                <a:spcPts val="257"/>
               </a:spcAft>
             </a:pPr>
             <a:r>
-              <a:rPr sz="1500" i="0" b="0">
+              <a:rPr sz="1200" i="0" b="0">
                 <a:solidFill>
                   <a:srgbClr val="D4D4D4"/>
                 </a:solidFill>
@@ -10889,7 +10889,7 @@
               <a:t>  </a:t>
             </a:r>
             <a:r>
-              <a:rPr sz="1500" i="0" b="0">
+              <a:rPr sz="1200" i="0" b="0">
                 <a:solidFill>
                   <a:srgbClr val="D4D4D4"/>
                 </a:solidFill>
@@ -10898,7 +10898,7 @@
               <a:t>R</a:t>
             </a:r>
             <a:r>
-              <a:rPr sz="1500" i="0" b="0">
+              <a:rPr sz="1200" i="0" b="0">
                 <a:solidFill>
                   <a:srgbClr val="D4D4D4"/>
                 </a:solidFill>
@@ -10907,7 +10907,7 @@
               <a:t>-&gt;&gt;</a:t>
             </a:r>
             <a:r>
-              <a:rPr sz="1500" i="0" b="0">
+              <a:rPr sz="1200" i="0" b="0">
                 <a:solidFill>
                   <a:srgbClr val="D4D4D4"/>
                 </a:solidFill>
@@ -10916,7 +10916,7 @@
               <a:t>A</a:t>
             </a:r>
             <a:r>
-              <a:rPr sz="1500" i="0" b="0">
+              <a:rPr sz="1200" i="0" b="0">
                 <a:solidFill>
                   <a:srgbClr val="D4D4D4"/>
                 </a:solidFill>
@@ -10925,7 +10925,7 @@
               <a:t>: </a:t>
             </a:r>
             <a:r>
-              <a:rPr sz="1500" i="0" b="0">
+              <a:rPr sz="1200" i="0" b="0">
                 <a:solidFill>
                   <a:srgbClr val="D4D4D4"/>
                 </a:solidFill>
@@ -10934,7 +10934,7 @@
               <a:t>Cancelar</a:t>
             </a:r>
             <a:r>
-              <a:rPr sz="1500" i="0" b="0">
+              <a:rPr sz="1200" i="0" b="0">
                 <a:solidFill>
                   <a:srgbClr val="D4D4D4"/>
                 </a:solidFill>
@@ -10943,7 +10943,7 @@
               <a:t> </a:t>
             </a:r>
             <a:r>
-              <a:rPr sz="1500" i="0" b="0">
+              <a:rPr sz="1200" i="0" b="0">
                 <a:solidFill>
                   <a:srgbClr val="D4D4D4"/>
                 </a:solidFill>
@@ -10952,7 +10952,7 @@
               <a:t>la</a:t>
             </a:r>
             <a:r>
-              <a:rPr sz="1500" i="0" b="0">
+              <a:rPr sz="1200" i="0" b="0">
                 <a:solidFill>
                   <a:srgbClr val="D4D4D4"/>
                 </a:solidFill>
@@ -10961,7 +10961,7 @@
               <a:t> </a:t>
             </a:r>
             <a:r>
-              <a:rPr sz="1500" i="0" b="0">
+              <a:rPr sz="1200" i="0" b="0">
                 <a:solidFill>
                   <a:srgbClr val="D4D4D4"/>
                 </a:solidFill>
@@ -10970,7 +10970,7 @@
               <a:t>cita</a:t>
             </a:r>
             <a:r>
-              <a:rPr sz="1500" i="0" b="0">
+              <a:rPr sz="1200" i="0" b="0">
                 <a:solidFill>
                   <a:srgbClr val="D4D4D4"/>
                 </a:solidFill>
@@ -10979,7 +10979,7 @@
               <a:t> </a:t>
             </a:r>
             <a:r>
-              <a:rPr sz="1500" i="0" b="0">
+              <a:rPr sz="1200" i="0" b="0">
                 <a:solidFill>
                   <a:srgbClr val="B5CEA8"/>
                 </a:solidFill>
@@ -10991,11 +10991,11 @@
           <a:p>
             <a:pPr>
               <a:spcAft>
-                <a:spcPts val="321"/>
+                <a:spcPts val="257"/>
               </a:spcAft>
             </a:pPr>
             <a:r>
-              <a:rPr sz="1500" i="0" b="0">
+              <a:rPr sz="1200" i="0" b="0">
                 <a:solidFill>
                   <a:srgbClr val="D4D4D4"/>
                 </a:solidFill>
@@ -11004,7 +11004,7 @@
               <a:t>  </a:t>
             </a:r>
             <a:r>
-              <a:rPr sz="1500" i="0" b="0">
+              <a:rPr sz="1200" i="0" b="0">
                 <a:solidFill>
                   <a:srgbClr val="D4D4D4"/>
                 </a:solidFill>
@@ -11013,7 +11013,7 @@
               <a:t>A</a:t>
             </a:r>
             <a:r>
-              <a:rPr sz="1500" i="0" b="0">
+              <a:rPr sz="1200" i="0" b="0">
                 <a:solidFill>
                   <a:srgbClr val="D4D4D4"/>
                 </a:solidFill>
@@ -11022,7 +11022,7 @@
               <a:t>-&gt;&gt;</a:t>
             </a:r>
             <a:r>
-              <a:rPr sz="1500" i="0" b="0">
+              <a:rPr sz="1200" i="0" b="0">
                 <a:solidFill>
                   <a:srgbClr val="D4D4D4"/>
                 </a:solidFill>
@@ -11031,7 +11031,7 @@
               <a:t>B</a:t>
             </a:r>
             <a:r>
-              <a:rPr sz="1500" i="0" b="0">
+              <a:rPr sz="1200" i="0" b="0">
                 <a:solidFill>
                   <a:srgbClr val="D4D4D4"/>
                 </a:solidFill>
@@ -11040,7 +11040,7 @@
               <a:t>: </a:t>
             </a:r>
             <a:r>
-              <a:rPr sz="1500" i="0" b="0">
+              <a:rPr sz="1200" i="0" b="0">
                 <a:solidFill>
                   <a:srgbClr val="DCDCAA"/>
                 </a:solidFill>
@@ -11049,7 +11049,7 @@
               <a:t>api_cancelar_cita</a:t>
             </a:r>
             <a:r>
-              <a:rPr sz="1500" i="0" b="0">
+              <a:rPr sz="1200" i="0" b="0">
                 <a:solidFill>
                   <a:srgbClr val="D4D4D4"/>
                 </a:solidFill>
@@ -11058,7 +11058,7 @@
               <a:t>(</a:t>
             </a:r>
             <a:r>
-              <a:rPr sz="1500" i="0" b="0">
+              <a:rPr sz="1200" i="0" b="0">
                 <a:solidFill>
                   <a:srgbClr val="B5CEA8"/>
                 </a:solidFill>
@@ -11067,7 +11067,7 @@
               <a:t>3</a:t>
             </a:r>
             <a:r>
-              <a:rPr sz="1500" i="0" b="0">
+              <a:rPr sz="1200" i="0" b="0">
                 <a:solidFill>
                   <a:srgbClr val="D4D4D4"/>
                 </a:solidFill>
@@ -11076,7 +11076,7 @@
               <a:t>) </a:t>
             </a:r>
             <a:r>
-              <a:rPr sz="1500" i="0" b="0">
+              <a:rPr sz="1200" i="0" b="0">
                 <a:solidFill>
                   <a:srgbClr val="D4D4D4"/>
                 </a:solidFill>
@@ -11085,7 +11085,7 @@
               <a:t>como</a:t>
             </a:r>
             <a:r>
-              <a:rPr sz="1500" i="0" b="0">
+              <a:rPr sz="1200" i="0" b="0">
                 <a:solidFill>
                   <a:srgbClr val="D4D4D4"/>
                 </a:solidFill>
@@ -11094,7 +11094,7 @@
               <a:t> </a:t>
             </a:r>
             <a:r>
-              <a:rPr sz="1500" i="0" b="0">
+              <a:rPr sz="1200" i="0" b="0">
                 <a:solidFill>
                   <a:srgbClr val="D4D4D4"/>
                 </a:solidFill>
@@ -11106,11 +11106,11 @@
           <a:p>
             <a:pPr>
               <a:spcAft>
-                <a:spcPts val="321"/>
+                <a:spcPts val="257"/>
               </a:spcAft>
             </a:pPr>
             <a:r>
-              <a:rPr sz="1500" i="0" b="0">
+              <a:rPr sz="1200" i="0" b="0">
                 <a:solidFill>
                   <a:srgbClr val="D4D4D4"/>
                 </a:solidFill>
@@ -11119,7 +11119,7 @@
               <a:t>  </a:t>
             </a:r>
             <a:r>
-              <a:rPr sz="1500" i="0" b="0">
+              <a:rPr sz="1200" i="0" b="0">
                 <a:solidFill>
                   <a:srgbClr val="D4D4D4"/>
                 </a:solidFill>
@@ -11128,7 +11128,7 @@
               <a:t>B</a:t>
             </a:r>
             <a:r>
-              <a:rPr sz="1500" i="0" b="0">
+              <a:rPr sz="1200" i="0" b="0">
                 <a:solidFill>
                   <a:srgbClr val="D4D4D4"/>
                 </a:solidFill>
@@ -11137,7 +11137,7 @@
               <a:t>-&gt;&gt;</a:t>
             </a:r>
             <a:r>
-              <a:rPr sz="1500" i="0" b="0">
+              <a:rPr sz="1200" i="0" b="0">
                 <a:solidFill>
                   <a:srgbClr val="D4D4D4"/>
                 </a:solidFill>
@@ -11146,7 +11146,7 @@
               <a:t>T</a:t>
             </a:r>
             <a:r>
-              <a:rPr sz="1500" i="0" b="0">
+              <a:rPr sz="1200" i="0" b="0">
                 <a:solidFill>
                   <a:srgbClr val="D4D4D4"/>
                 </a:solidFill>
@@ -11155,7 +11155,7 @@
               <a:t>: </a:t>
             </a:r>
             <a:r>
-              <a:rPr sz="1500" i="0" b="0">
+              <a:rPr sz="1200" i="0" b="0">
                 <a:solidFill>
                   <a:srgbClr val="D4D4D4"/>
                 </a:solidFill>
@@ -11164,7 +11164,7 @@
               <a:t>UPDATE</a:t>
             </a:r>
             <a:r>
-              <a:rPr sz="1500" i="0" b="0">
+              <a:rPr sz="1200" i="0" b="0">
                 <a:solidFill>
                   <a:srgbClr val="D4D4D4"/>
                 </a:solidFill>
@@ -11173,7 +11173,7 @@
               <a:t> </a:t>
             </a:r>
             <a:r>
-              <a:rPr sz="1500" i="0" b="0">
+              <a:rPr sz="1200" i="0" b="0">
                 <a:solidFill>
                   <a:srgbClr val="D4D4D4"/>
                 </a:solidFill>
@@ -11182,7 +11182,7 @@
               <a:t>solo</a:t>
             </a:r>
             <a:r>
-              <a:rPr sz="1500" i="0" b="0">
+              <a:rPr sz="1200" i="0" b="0">
                 <a:solidFill>
                   <a:srgbClr val="D4D4D4"/>
                 </a:solidFill>
@@ -11191,7 +11191,7 @@
               <a:t> </a:t>
             </a:r>
             <a:r>
-              <a:rPr sz="1500" i="0" b="0">
+              <a:rPr sz="1200" i="0" b="0">
                 <a:solidFill>
                   <a:srgbClr val="D4D4D4"/>
                 </a:solidFill>
@@ -11200,7 +11200,7 @@
               <a:t>si</a:t>
             </a:r>
             <a:r>
-              <a:rPr sz="1500" i="0" b="0">
+              <a:rPr sz="1200" i="0" b="0">
                 <a:solidFill>
                   <a:srgbClr val="D4D4D4"/>
                 </a:solidFill>
@@ -11209,7 +11209,7 @@
               <a:t> </a:t>
             </a:r>
             <a:r>
-              <a:rPr sz="1500" i="0" b="0">
+              <a:rPr sz="1200" i="0" b="0">
                 <a:solidFill>
                   <a:srgbClr val="D4D4D4"/>
                 </a:solidFill>
@@ -11218,7 +11218,7 @@
               <a:t>esta</a:t>
             </a:r>
             <a:r>
-              <a:rPr sz="1500" i="0" b="0">
+              <a:rPr sz="1200" i="0" b="0">
                 <a:solidFill>
                   <a:srgbClr val="D4D4D4"/>
                 </a:solidFill>
@@ -11227,7 +11227,7 @@
               <a:t> </a:t>
             </a:r>
             <a:r>
-              <a:rPr sz="1500" i="0" b="0">
+              <a:rPr sz="1200" i="0" b="0">
                 <a:solidFill>
                   <a:srgbClr val="D4D4D4"/>
                 </a:solidFill>
@@ -11239,11 +11239,11 @@
           <a:p>
             <a:pPr>
               <a:spcAft>
-                <a:spcPts val="321"/>
+                <a:spcPts val="257"/>
               </a:spcAft>
             </a:pPr>
             <a:r>
-              <a:rPr sz="1500" i="0" b="0">
+              <a:rPr sz="1200" i="0" b="0">
                 <a:solidFill>
                   <a:srgbClr val="D4D4D4"/>
                 </a:solidFill>
@@ -11252,7 +11252,7 @@
               <a:t>  </a:t>
             </a:r>
             <a:r>
-              <a:rPr sz="1500" i="0" b="0">
+              <a:rPr sz="1200" i="0" b="0">
                 <a:solidFill>
                   <a:srgbClr val="D4D4D4"/>
                 </a:solidFill>
@@ -11261,7 +11261,7 @@
               <a:t>alt</a:t>
             </a:r>
             <a:r>
-              <a:rPr sz="1500" i="0" b="0">
+              <a:rPr sz="1200" i="0" b="0">
                 <a:solidFill>
                   <a:srgbClr val="D4D4D4"/>
                 </a:solidFill>
@@ -11270,7 +11270,7 @@
               <a:t> </a:t>
             </a:r>
             <a:r>
-              <a:rPr sz="1500" i="0" b="0">
+              <a:rPr sz="1200" i="0" b="0">
                 <a:solidFill>
                   <a:srgbClr val="D4D4D4"/>
                 </a:solidFill>
@@ -11279,7 +11279,7 @@
               <a:t>ok</a:t>
             </a:r>
             <a:r>
-              <a:rPr sz="1500" i="0" b="0">
+              <a:rPr sz="1200" i="0" b="0">
                 <a:solidFill>
                   <a:srgbClr val="D4D4D4"/>
                 </a:solidFill>
@@ -11288,7 +11288,7 @@
               <a:t> = </a:t>
             </a:r>
             <a:r>
-              <a:rPr sz="1500" i="0" b="0">
+              <a:rPr sz="1200" i="0" b="0">
                 <a:solidFill>
                   <a:srgbClr val="D4D4D4"/>
                 </a:solidFill>
@@ -11300,11 +11300,11 @@
           <a:p>
             <a:pPr>
               <a:spcAft>
-                <a:spcPts val="321"/>
+                <a:spcPts val="257"/>
               </a:spcAft>
             </a:pPr>
             <a:r>
-              <a:rPr sz="1500" i="0" b="0">
+              <a:rPr sz="1200" i="0" b="0">
                 <a:solidFill>
                   <a:srgbClr val="D4D4D4"/>
                 </a:solidFill>
@@ -11313,7 +11313,7 @@
               <a:t>    </a:t>
             </a:r>
             <a:r>
-              <a:rPr sz="1500" i="0" b="0">
+              <a:rPr sz="1200" i="0" b="0">
                 <a:solidFill>
                   <a:srgbClr val="D4D4D4"/>
                 </a:solidFill>
@@ -11322,7 +11322,7 @@
               <a:t>B</a:t>
             </a:r>
             <a:r>
-              <a:rPr sz="1500" i="0" b="0">
+              <a:rPr sz="1200" i="0" b="0">
                 <a:solidFill>
                   <a:srgbClr val="D4D4D4"/>
                 </a:solidFill>
@@ -11331,7 +11331,7 @@
               <a:t>--&gt;&gt;</a:t>
             </a:r>
             <a:r>
-              <a:rPr sz="1500" i="0" b="0">
+              <a:rPr sz="1200" i="0" b="0">
                 <a:solidFill>
                   <a:srgbClr val="D4D4D4"/>
                 </a:solidFill>
@@ -11340,7 +11340,7 @@
               <a:t>A</a:t>
             </a:r>
             <a:r>
-              <a:rPr sz="1500" i="0" b="0">
+              <a:rPr sz="1200" i="0" b="0">
                 <a:solidFill>
                   <a:srgbClr val="D4D4D4"/>
                 </a:solidFill>
@@ -11349,7 +11349,7 @@
               <a:t>: </a:t>
             </a:r>
             <a:r>
-              <a:rPr sz="1500" i="0" b="0">
+              <a:rPr sz="1200" i="0" b="0">
                 <a:solidFill>
                   <a:srgbClr val="D4D4D4"/>
                 </a:solidFill>
@@ -11358,7 +11358,7 @@
               <a:t>false</a:t>
             </a:r>
             <a:r>
-              <a:rPr sz="1500" i="0" b="0">
+              <a:rPr sz="1200" i="0" b="0">
                 <a:solidFill>
                   <a:srgbClr val="D4D4D4"/>
                 </a:solidFill>
@@ -11367,7 +11367,7 @@
               <a:t>, </a:t>
             </a:r>
             <a:r>
-              <a:rPr sz="1500" i="0" b="0">
+              <a:rPr sz="1200" i="0" b="0">
                 <a:solidFill>
                   <a:srgbClr val="D4D4D4"/>
                 </a:solidFill>
@@ -11376,7 +11376,7 @@
               <a:t>No</a:t>
             </a:r>
             <a:r>
-              <a:rPr sz="1500" i="0" b="0">
+              <a:rPr sz="1200" i="0" b="0">
                 <a:solidFill>
                   <a:srgbClr val="D4D4D4"/>
                 </a:solidFill>
@@ -11385,7 +11385,7 @@
               <a:t> </a:t>
             </a:r>
             <a:r>
-              <a:rPr sz="1500" i="0" b="0">
+              <a:rPr sz="1200" i="0" b="0">
                 <a:solidFill>
                   <a:srgbClr val="D4D4D4"/>
                 </a:solidFill>
@@ -11394,7 +11394,7 @@
               <a:t>se</a:t>
             </a:r>
             <a:r>
-              <a:rPr sz="1500" i="0" b="0">
+              <a:rPr sz="1200" i="0" b="0">
                 <a:solidFill>
                   <a:srgbClr val="D4D4D4"/>
                 </a:solidFill>
@@ -11403,7 +11403,7 @@
               <a:t> </a:t>
             </a:r>
             <a:r>
-              <a:rPr sz="1500" i="0" b="0">
+              <a:rPr sz="1200" i="0" b="0">
                 <a:solidFill>
                   <a:srgbClr val="D4D4D4"/>
                 </a:solidFill>
@@ -11412,7 +11412,7 @@
               <a:t>puede</a:t>
             </a:r>
             <a:r>
-              <a:rPr sz="1500" i="0" b="0">
+              <a:rPr sz="1200" i="0" b="0">
                 <a:solidFill>
                   <a:srgbClr val="D4D4D4"/>
                 </a:solidFill>
@@ -11421,7 +11421,7 @@
               <a:t> </a:t>
             </a:r>
             <a:r>
-              <a:rPr sz="1500" i="0" b="0">
+              <a:rPr sz="1200" i="0" b="0">
                 <a:solidFill>
                   <a:srgbClr val="D4D4D4"/>
                 </a:solidFill>
@@ -11433,11 +11433,11 @@
           <a:p>
             <a:pPr>
               <a:spcAft>
-                <a:spcPts val="321"/>
+                <a:spcPts val="257"/>
               </a:spcAft>
             </a:pPr>
             <a:r>
-              <a:rPr sz="1500" i="0" b="0">
+              <a:rPr sz="1200" i="0" b="0">
                 <a:solidFill>
                   <a:srgbClr val="D4D4D4"/>
                 </a:solidFill>
@@ -11446,7 +11446,7 @@
               <a:t>    </a:t>
             </a:r>
             <a:r>
-              <a:rPr sz="1500" i="0" b="0">
+              <a:rPr sz="1200" i="0" b="0">
                 <a:solidFill>
                   <a:srgbClr val="D4D4D4"/>
                 </a:solidFill>
@@ -11455,7 +11455,7 @@
               <a:t>A</a:t>
             </a:r>
             <a:r>
-              <a:rPr sz="1500" i="0" b="0">
+              <a:rPr sz="1200" i="0" b="0">
                 <a:solidFill>
                   <a:srgbClr val="D4D4D4"/>
                 </a:solidFill>
@@ -11464,7 +11464,7 @@
               <a:t>--&gt;&gt;</a:t>
             </a:r>
             <a:r>
-              <a:rPr sz="1500" i="0" b="0">
+              <a:rPr sz="1200" i="0" b="0">
                 <a:solidFill>
                   <a:srgbClr val="D4D4D4"/>
                 </a:solidFill>
@@ -11473,7 +11473,7 @@
               <a:t>R</a:t>
             </a:r>
             <a:r>
-              <a:rPr sz="1500" i="0" b="0">
+              <a:rPr sz="1200" i="0" b="0">
                 <a:solidFill>
                   <a:srgbClr val="D4D4D4"/>
                 </a:solidFill>
@@ -11482,7 +11482,7 @@
               <a:t>: </a:t>
             </a:r>
             <a:r>
-              <a:rPr sz="1500" i="0" b="0">
+              <a:rPr sz="1200" i="0" b="0">
                 <a:solidFill>
                   <a:srgbClr val="D4D4D4"/>
                 </a:solidFill>
@@ -11491,7 +11491,7 @@
               <a:t>Muestra</a:t>
             </a:r>
             <a:r>
-              <a:rPr sz="1500" i="0" b="0">
+              <a:rPr sz="1200" i="0" b="0">
                 <a:solidFill>
                   <a:srgbClr val="D4D4D4"/>
                 </a:solidFill>
@@ -11500,7 +11500,7 @@
               <a:t> </a:t>
             </a:r>
             <a:r>
-              <a:rPr sz="1500" i="0" b="0">
+              <a:rPr sz="1200" i="0" b="0">
                 <a:solidFill>
                   <a:srgbClr val="D4D4D4"/>
                 </a:solidFill>
@@ -11509,7 +11509,7 @@
               <a:t>el</a:t>
             </a:r>
             <a:r>
-              <a:rPr sz="1500" i="0" b="0">
+              <a:rPr sz="1200" i="0" b="0">
                 <a:solidFill>
                   <a:srgbClr val="D4D4D4"/>
                 </a:solidFill>
@@ -11518,7 +11518,7 @@
               <a:t> </a:t>
             </a:r>
             <a:r>
-              <a:rPr sz="1500" i="0" b="0">
+              <a:rPr sz="1200" i="0" b="0">
                 <a:solidFill>
                   <a:srgbClr val="D4D4D4"/>
                 </a:solidFill>
@@ -11527,7 +11527,7 @@
               <a:t>mensaje</a:t>
             </a:r>
             <a:r>
-              <a:rPr sz="1500" i="0" b="0">
+              <a:rPr sz="1200" i="0" b="0">
                 <a:solidFill>
                   <a:srgbClr val="D4D4D4"/>
                 </a:solidFill>
@@ -11536,7 +11536,7 @@
               <a:t> </a:t>
             </a:r>
             <a:r>
-              <a:rPr sz="1500" i="0" b="0">
+              <a:rPr sz="1200" i="0" b="0">
                 <a:solidFill>
                   <a:srgbClr val="D4D4D4"/>
                 </a:solidFill>
@@ -11545,7 +11545,7 @@
               <a:t>y</a:t>
             </a:r>
             <a:r>
-              <a:rPr sz="1500" i="0" b="0">
+              <a:rPr sz="1200" i="0" b="0">
                 <a:solidFill>
                   <a:srgbClr val="D4D4D4"/>
                 </a:solidFill>
@@ -11554,7 +11554,7 @@
               <a:t> </a:t>
             </a:r>
             <a:r>
-              <a:rPr sz="1500" i="0" b="0">
+              <a:rPr sz="1200" i="0" b="0">
                 <a:solidFill>
                   <a:srgbClr val="D4D4D4"/>
                 </a:solidFill>
@@ -11563,7 +11563,7 @@
               <a:t>no</a:t>
             </a:r>
             <a:r>
-              <a:rPr sz="1500" i="0" b="0">
+              <a:rPr sz="1200" i="0" b="0">
                 <a:solidFill>
                   <a:srgbClr val="D4D4D4"/>
                 </a:solidFill>
@@ -11572,7 +11572,7 @@
               <a:t> </a:t>
             </a:r>
             <a:r>
-              <a:rPr sz="1500" i="0" b="0">
+              <a:rPr sz="1200" i="0" b="0">
                 <a:solidFill>
                   <a:srgbClr val="D4D4D4"/>
                 </a:solidFill>
@@ -11584,11 +11584,11 @@
           <a:p>
             <a:pPr>
               <a:spcAft>
-                <a:spcPts val="321"/>
+                <a:spcPts val="257"/>
               </a:spcAft>
             </a:pPr>
             <a:r>
-              <a:rPr sz="1500" i="0" b="0">
+              <a:rPr sz="1200" i="0" b="0">
                 <a:solidFill>
                   <a:srgbClr val="D4D4D4"/>
                 </a:solidFill>
@@ -11597,7 +11597,7 @@
               <a:t>  </a:t>
             </a:r>
             <a:r>
-              <a:rPr sz="1500" i="0" b="0">
+              <a:rPr sz="1200" i="0" b="0">
                 <a:solidFill>
                   <a:srgbClr val="D4D4D4"/>
                 </a:solidFill>
@@ -11606,7 +11606,7 @@
               <a:t>else</a:t>
             </a:r>
             <a:r>
-              <a:rPr sz="1500" i="0" b="0">
+              <a:rPr sz="1200" i="0" b="0">
                 <a:solidFill>
                   <a:srgbClr val="D4D4D4"/>
                 </a:solidFill>
@@ -11615,7 +11615,7 @@
               <a:t> </a:t>
             </a:r>
             <a:r>
-              <a:rPr sz="1500" i="0" b="0">
+              <a:rPr sz="1200" i="0" b="0">
                 <a:solidFill>
                   <a:srgbClr val="D4D4D4"/>
                 </a:solidFill>
@@ -11624,7 +11624,7 @@
               <a:t>ok</a:t>
             </a:r>
             <a:r>
-              <a:rPr sz="1500" i="0" b="0">
+              <a:rPr sz="1200" i="0" b="0">
                 <a:solidFill>
                   <a:srgbClr val="D4D4D4"/>
                 </a:solidFill>
@@ -11633,7 +11633,7 @@
               <a:t> = </a:t>
             </a:r>
             <a:r>
-              <a:rPr sz="1500" i="0" b="0">
+              <a:rPr sz="1200" i="0" b="0">
                 <a:solidFill>
                   <a:srgbClr val="D4D4D4"/>
                 </a:solidFill>
@@ -11645,11 +11645,11 @@
           <a:p>
             <a:pPr>
               <a:spcAft>
-                <a:spcPts val="321"/>
+                <a:spcPts val="257"/>
               </a:spcAft>
             </a:pPr>
             <a:r>
-              <a:rPr sz="1500" i="0" b="0">
+              <a:rPr sz="1200" i="0" b="0">
                 <a:solidFill>
                   <a:srgbClr val="D4D4D4"/>
                 </a:solidFill>
@@ -11658,7 +11658,7 @@
               <a:t>    </a:t>
             </a:r>
             <a:r>
-              <a:rPr sz="1500" i="0" b="0">
+              <a:rPr sz="1200" i="0" b="0">
                 <a:solidFill>
                   <a:srgbClr val="D4D4D4"/>
                 </a:solidFill>
@@ -11667,7 +11667,7 @@
               <a:t>B</a:t>
             </a:r>
             <a:r>
-              <a:rPr sz="1500" i="0" b="0">
+              <a:rPr sz="1200" i="0" b="0">
                 <a:solidFill>
                   <a:srgbClr val="D4D4D4"/>
                 </a:solidFill>
@@ -11676,7 +11676,7 @@
               <a:t>--&gt;&gt;</a:t>
             </a:r>
             <a:r>
-              <a:rPr sz="1500" i="0" b="0">
+              <a:rPr sz="1200" i="0" b="0">
                 <a:solidFill>
                   <a:srgbClr val="D4D4D4"/>
                 </a:solidFill>
@@ -11685,7 +11685,7 @@
               <a:t>A</a:t>
             </a:r>
             <a:r>
-              <a:rPr sz="1500" i="0" b="0">
+              <a:rPr sz="1200" i="0" b="0">
                 <a:solidFill>
                   <a:srgbClr val="D4D4D4"/>
                 </a:solidFill>
@@ -11694,7 +11694,7 @@
               <a:t>: </a:t>
             </a:r>
             <a:r>
-              <a:rPr sz="1500" i="0" b="0">
+              <a:rPr sz="1200" i="0" b="0">
                 <a:solidFill>
                   <a:srgbClr val="D4D4D4"/>
                 </a:solidFill>
@@ -11703,7 +11703,7 @@
               <a:t>true</a:t>
             </a:r>
             <a:r>
-              <a:rPr sz="1500" i="0" b="0">
+              <a:rPr sz="1200" i="0" b="0">
                 <a:solidFill>
                   <a:srgbClr val="D4D4D4"/>
                 </a:solidFill>
@@ -11712,7 +11712,7 @@
               <a:t>, </a:t>
             </a:r>
             <a:r>
-              <a:rPr sz="1500" i="0" b="0">
+              <a:rPr sz="1200" i="0" b="0">
                 <a:solidFill>
                   <a:srgbClr val="D4D4D4"/>
                 </a:solidFill>
@@ -11721,7 +11721,7 @@
               <a:t>Cita</a:t>
             </a:r>
             <a:r>
-              <a:rPr sz="1500" i="0" b="0">
+              <a:rPr sz="1200" i="0" b="0">
                 <a:solidFill>
                   <a:srgbClr val="D4D4D4"/>
                 </a:solidFill>
@@ -11730,7 +11730,7 @@
               <a:t> </a:t>
             </a:r>
             <a:r>
-              <a:rPr sz="1500" i="0" b="0">
+              <a:rPr sz="1200" i="0" b="0">
                 <a:solidFill>
                   <a:srgbClr val="D4D4D4"/>
                 </a:solidFill>
@@ -11739,7 +11739,7 @@
               <a:t>cancelada</a:t>
             </a:r>
             <a:r>
-              <a:rPr sz="1500" i="0" b="0">
+              <a:rPr sz="1200" i="0" b="0">
                 <a:solidFill>
                   <a:srgbClr val="D4D4D4"/>
                 </a:solidFill>
@@ -11748,7 +11748,7 @@
               <a:t>, </a:t>
             </a:r>
             <a:r>
-              <a:rPr sz="1500" i="0" b="0">
+              <a:rPr sz="1200" i="0" b="0">
                 <a:solidFill>
                   <a:srgbClr val="B5CEA8"/>
                 </a:solidFill>
@@ -11760,11 +11760,11 @@
           <a:p>
             <a:pPr>
               <a:spcAft>
-                <a:spcPts val="321"/>
+                <a:spcPts val="257"/>
               </a:spcAft>
             </a:pPr>
             <a:r>
-              <a:rPr sz="1500" i="0" b="0">
+              <a:rPr sz="1200" i="0" b="0">
                 <a:solidFill>
                   <a:srgbClr val="D4D4D4"/>
                 </a:solidFill>
@@ -11773,7 +11773,7 @@
               <a:t>    </a:t>
             </a:r>
             <a:r>
-              <a:rPr sz="1500" i="0" b="0">
+              <a:rPr sz="1200" i="0" b="0">
                 <a:solidFill>
                   <a:srgbClr val="D4D4D4"/>
                 </a:solidFill>
@@ -11782,7 +11782,7 @@
               <a:t>A</a:t>
             </a:r>
             <a:r>
-              <a:rPr sz="1500" i="0" b="0">
+              <a:rPr sz="1200" i="0" b="0">
                 <a:solidFill>
                   <a:srgbClr val="D4D4D4"/>
                 </a:solidFill>
@@ -11791,7 +11791,7 @@
               <a:t>--&gt;&gt;</a:t>
             </a:r>
             <a:r>
-              <a:rPr sz="1500" i="0" b="0">
+              <a:rPr sz="1200" i="0" b="0">
                 <a:solidFill>
                   <a:srgbClr val="D4D4D4"/>
                 </a:solidFill>
@@ -11800,7 +11800,7 @@
               <a:t>R</a:t>
             </a:r>
             <a:r>
-              <a:rPr sz="1500" i="0" b="0">
+              <a:rPr sz="1200" i="0" b="0">
                 <a:solidFill>
                   <a:srgbClr val="D4D4D4"/>
                 </a:solidFill>
@@ -11809,7 +11809,7 @@
               <a:t>: </a:t>
             </a:r>
             <a:r>
-              <a:rPr sz="1500" i="0" b="0">
+              <a:rPr sz="1200" i="0" b="0">
                 <a:solidFill>
                   <a:srgbClr val="D4D4D4"/>
                 </a:solidFill>
@@ -11818,7 +11818,7 @@
               <a:t>Confirma</a:t>
             </a:r>
             <a:r>
-              <a:rPr sz="1500" i="0" b="0">
+              <a:rPr sz="1200" i="0" b="0">
                 <a:solidFill>
                   <a:srgbClr val="D4D4D4"/>
                 </a:solidFill>
@@ -11827,7 +11827,7 @@
               <a:t> </a:t>
             </a:r>
             <a:r>
-              <a:rPr sz="1500" i="0" b="0">
+              <a:rPr sz="1200" i="0" b="0">
                 <a:solidFill>
                   <a:srgbClr val="D4D4D4"/>
                 </a:solidFill>
@@ -11836,7 +11836,7 @@
               <a:t>la</a:t>
             </a:r>
             <a:r>
-              <a:rPr sz="1500" i="0" b="0">
+              <a:rPr sz="1200" i="0" b="0">
                 <a:solidFill>
                   <a:srgbClr val="D4D4D4"/>
                 </a:solidFill>
@@ -11845,7 +11845,7 @@
               <a:t> </a:t>
             </a:r>
             <a:r>
-              <a:rPr sz="1500" i="0" b="0">
+              <a:rPr sz="1200" i="0" b="0">
                 <a:solidFill>
                   <a:srgbClr val="D4D4D4"/>
                 </a:solidFill>
@@ -11857,11 +11857,11 @@
           <a:p>
             <a:pPr>
               <a:spcAft>
-                <a:spcPts val="321"/>
+                <a:spcPts val="257"/>
               </a:spcAft>
             </a:pPr>
             <a:r>
-              <a:rPr sz="1500" i="0" b="0">
+              <a:rPr sz="1200" i="0" b="0">
                 <a:solidFill>
                   <a:srgbClr val="D4D4D4"/>
                 </a:solidFill>
@@ -11870,7 +11870,7 @@
               <a:t>  </a:t>
             </a:r>
             <a:r>
-              <a:rPr sz="1500" i="0" b="0">
+              <a:rPr sz="1200" i="0" b="0">
                 <a:solidFill>
                   <a:srgbClr val="D4D4D4"/>
                 </a:solidFill>
@@ -11882,11 +11882,11 @@
           <a:p>
             <a:pPr>
               <a:spcAft>
-                <a:spcPts val="321"/>
+                <a:spcPts val="257"/>
               </a:spcAft>
             </a:pPr>
             <a:r>
-              <a:rPr sz="1500" i="0" b="0">
+              <a:rPr sz="1200" i="0" b="0">
                 <a:solidFill>
                   <a:srgbClr val="D4D4D4"/>
                 </a:solidFill>
@@ -11895,7 +11895,7 @@
               <a:t>  </a:t>
             </a:r>
             <a:r>
-              <a:rPr sz="1500" i="0" b="0">
+              <a:rPr sz="1200" i="0" b="0">
                 <a:solidFill>
                   <a:srgbClr val="D4D4D4"/>
                 </a:solidFill>
@@ -11904,7 +11904,7 @@
               <a:t>Note</a:t>
             </a:r>
             <a:r>
-              <a:rPr sz="1500" i="0" b="0">
+              <a:rPr sz="1200" i="0" b="0">
                 <a:solidFill>
                   <a:srgbClr val="D4D4D4"/>
                 </a:solidFill>
@@ -11913,7 +11913,7 @@
               <a:t> </a:t>
             </a:r>
             <a:r>
-              <a:rPr sz="1500" i="0" b="0">
+              <a:rPr sz="1200" i="0" b="0">
                 <a:solidFill>
                   <a:srgbClr val="D4D4D4"/>
                 </a:solidFill>
@@ -11922,7 +11922,7 @@
               <a:t>over</a:t>
             </a:r>
             <a:r>
-              <a:rPr sz="1500" i="0" b="0">
+              <a:rPr sz="1200" i="0" b="0">
                 <a:solidFill>
                   <a:srgbClr val="D4D4D4"/>
                 </a:solidFill>
@@ -11931,7 +11931,7 @@
               <a:t> </a:t>
             </a:r>
             <a:r>
-              <a:rPr sz="1500" i="0" b="0">
+              <a:rPr sz="1200" i="0" b="0">
                 <a:solidFill>
                   <a:srgbClr val="D4D4D4"/>
                 </a:solidFill>
@@ -11940,7 +11940,7 @@
               <a:t>A</a:t>
             </a:r>
             <a:r>
-              <a:rPr sz="1500" i="0" b="0">
+              <a:rPr sz="1200" i="0" b="0">
                 <a:solidFill>
                   <a:srgbClr val="D4D4D4"/>
                 </a:solidFill>
@@ -11949,7 +11949,7 @@
               <a:t>,</a:t>
             </a:r>
             <a:r>
-              <a:rPr sz="1500" i="0" b="0">
+              <a:rPr sz="1200" i="0" b="0">
                 <a:solidFill>
                   <a:srgbClr val="D4D4D4"/>
                 </a:solidFill>
@@ -11958,7 +11958,7 @@
               <a:t>B</a:t>
             </a:r>
             <a:r>
-              <a:rPr sz="1500" i="0" b="0">
+              <a:rPr sz="1200" i="0" b="0">
                 <a:solidFill>
                   <a:srgbClr val="D4D4D4"/>
                 </a:solidFill>
@@ -11967,7 +11967,7 @@
               <a:t>: </a:t>
             </a:r>
             <a:r>
-              <a:rPr sz="1500" i="0" b="0">
+              <a:rPr sz="1200" i="0" b="0">
                 <a:solidFill>
                   <a:srgbClr val="D4D4D4"/>
                 </a:solidFill>
@@ -11976,7 +11976,7 @@
               <a:t>La</a:t>
             </a:r>
             <a:r>
-              <a:rPr sz="1500" i="0" b="0">
+              <a:rPr sz="1200" i="0" b="0">
                 <a:solidFill>
                   <a:srgbClr val="D4D4D4"/>
                 </a:solidFill>
@@ -11985,7 +11985,7 @@
               <a:t> </a:t>
             </a:r>
             <a:r>
-              <a:rPr sz="1500" i="0" b="0">
+              <a:rPr sz="1200" i="0" b="0">
                 <a:solidFill>
                   <a:srgbClr val="D4D4D4"/>
                 </a:solidFill>
@@ -11994,7 +11994,7 @@
               <a:t>aplicacion</a:t>
             </a:r>
             <a:r>
-              <a:rPr sz="1500" i="0" b="0">
+              <a:rPr sz="1200" i="0" b="0">
                 <a:solidFill>
                   <a:srgbClr val="D4D4D4"/>
                 </a:solidFill>
@@ -12003,7 +12003,7 @@
               <a:t> </a:t>
             </a:r>
             <a:r>
-              <a:rPr sz="1500" i="0" b="0">
+              <a:rPr sz="1200" i="0" b="0">
                 <a:solidFill>
                   <a:srgbClr val="D4D4D4"/>
                 </a:solidFill>
@@ -12012,7 +12012,7 @@
               <a:t>no</a:t>
             </a:r>
             <a:r>
-              <a:rPr sz="1500" i="0" b="0">
+              <a:rPr sz="1200" i="0" b="0">
                 <a:solidFill>
                   <a:srgbClr val="D4D4D4"/>
                 </a:solidFill>
@@ -12021,7 +12021,7 @@
               <a:t> </a:t>
             </a:r>
             <a:r>
-              <a:rPr sz="1500" i="0" b="0">
+              <a:rPr sz="1200" i="0" b="0">
                 <a:solidFill>
                   <a:srgbClr val="D4D4D4"/>
                 </a:solidFill>
@@ -12030,7 +12030,7 @@
               <a:t>hace</a:t>
             </a:r>
             <a:r>
-              <a:rPr sz="1500" i="0" b="0">
+              <a:rPr sz="1200" i="0" b="0">
                 <a:solidFill>
                   <a:srgbClr val="D4D4D4"/>
                 </a:solidFill>
@@ -12039,7 +12039,7 @@
               <a:t> </a:t>
             </a:r>
             <a:r>
-              <a:rPr sz="1500" i="0" b="0">
+              <a:rPr sz="1200" i="0" b="0">
                 <a:solidFill>
                   <a:srgbClr val="D4D4D4"/>
                 </a:solidFill>
@@ -12048,7 +12048,7 @@
               <a:t>UPDATE</a:t>
             </a:r>
             <a:r>
-              <a:rPr sz="1500" i="0" b="0">
+              <a:rPr sz="1200" i="0" b="0">
                 <a:solidFill>
                   <a:srgbClr val="D4D4D4"/>
                 </a:solidFill>
@@ -12057,7 +12057,7 @@
               <a:t> </a:t>
             </a:r>
             <a:r>
-              <a:rPr sz="1500" i="0" b="0">
+              <a:rPr sz="1200" i="0" b="0">
                 <a:solidFill>
                   <a:srgbClr val="D4D4D4"/>
                 </a:solidFill>
@@ -12066,7 +12066,7 @@
               <a:t>directo</a:t>
             </a:r>
             <a:r>
-              <a:rPr sz="1500" i="0" b="0">
+              <a:rPr sz="1200" i="0" b="0">
                 <a:solidFill>
                   <a:srgbClr val="D4D4D4"/>
                 </a:solidFill>
@@ -12075,7 +12075,7 @@
               <a:t> </a:t>
             </a:r>
             <a:r>
-              <a:rPr sz="1500" i="0" b="0">
+              <a:rPr sz="1200" i="0" b="0">
                 <a:solidFill>
                   <a:srgbClr val="D4D4D4"/>
                 </a:solidFill>
@@ -12084,7 +12084,7 @@
               <a:t>sobre</a:t>
             </a:r>
             <a:r>
-              <a:rPr sz="1500" i="0" b="0">
+              <a:rPr sz="1200" i="0" b="0">
                 <a:solidFill>
                   <a:srgbClr val="D4D4D4"/>
                 </a:solidFill>
@@ -12093,7 +12093,7 @@
               <a:t> </a:t>
             </a:r>
             <a:r>
-              <a:rPr sz="1500" i="0" b="0">
+              <a:rPr sz="1200" i="0" b="0">
                 <a:solidFill>
                   <a:srgbClr val="D4D4D4"/>
                 </a:solidFill>
@@ -12106,7 +12106,111 @@
       </p:sp>
       <p:sp>
         <p:nvSpPr>
-          <p:cNvPr id="13" name="TextBox 12"/>
+          <p:cNvPr id="13" name="Rounded Rectangle 12"/>
+          <p:cNvSpPr/>
+          <p:nvPr/>
+        </p:nvSpPr>
+        <p:spPr>
+          <a:xfrm>
+            <a:off x="7668579" y="1261872"/>
+            <a:ext cx="4120780" cy="3318569"/>
+          </a:xfrm>
+          <a:prstGeom prst="roundRect">
+            <a:avLst>
+              <a:gd name="adj" fmla="val 4000"/>
+            </a:avLst>
+          </a:prstGeom>
+          <a:solidFill>
+            <a:srgbClr val="E8EEF4"/>
+          </a:solidFill>
+          <a:ln>
+            <a:noFill/>
+          </a:ln>
+        </p:spPr>
+        <p:style>
+          <a:lnRef idx="1">
+            <a:schemeClr val="accent1"/>
+          </a:lnRef>
+          <a:fillRef idx="3">
+            <a:schemeClr val="accent1"/>
+          </a:fillRef>
+          <a:effectRef idx="2">
+            <a:schemeClr val="accent1"/>
+          </a:effectRef>
+          <a:fontRef idx="minor">
+            <a:schemeClr val="lt1"/>
+          </a:fontRef>
+        </p:style>
+        <p:txBody>
+          <a:bodyPr rtlCol="0" anchor="ctr"/>
+          <a:lstStyle/>
+          <a:p>
+            <a:pPr algn="ctr"/>
+          </a:p>
+        </p:txBody>
+      </p:sp>
+      <p:pic>
+        <p:nvPicPr>
+          <p:cNvPr id="14" name="Picture 13" descr="dg-cancelar-cita-paso1.png"/>
+          <p:cNvPicPr>
+            <a:picLocks noChangeAspect="1"/>
+          </p:cNvPicPr>
+          <p:nvPr/>
+        </p:nvPicPr>
+        <p:blipFill>
+          <a:blip r:embed="rId2"/>
+          <a:stretch>
+            <a:fillRect/>
+          </a:stretch>
+        </p:blipFill>
+        <p:spPr>
+          <a:xfrm>
+            <a:off x="7723443" y="1316736"/>
+            <a:ext cx="4011052" cy="3208841"/>
+          </a:xfrm>
+          <a:prstGeom prst="rect">
+            <a:avLst/>
+          </a:prstGeom>
+        </p:spPr>
+      </p:pic>
+      <p:sp>
+        <p:nvSpPr>
+          <p:cNvPr id="15" name="TextBox 14"/>
+          <p:cNvSpPr txBox="1"/>
+          <p:nvPr/>
+        </p:nvSpPr>
+        <p:spPr>
+          <a:xfrm>
+            <a:off x="7723443" y="4580441"/>
+            <a:ext cx="4011052" cy="320040"/>
+          </a:xfrm>
+          <a:prstGeom prst="rect">
+            <a:avLst/>
+          </a:prstGeom>
+          <a:noFill/>
+        </p:spPr>
+        <p:txBody>
+          <a:bodyPr wrap="square">
+            <a:spAutoFit/>
+          </a:bodyPr>
+          <a:lstStyle/>
+          <a:p>
+            <a:pPr algn="ctr"/>
+            <a:r>
+              <a:rPr sz="1200" b="0" i="1">
+                <a:solidFill>
+                  <a:srgbClr val="666666"/>
+                </a:solidFill>
+                <a:latin typeface="Calibri"/>
+              </a:rPr>
+              <a:t>Lo que dibuja este código</a:t>
+            </a:r>
+          </a:p>
+        </p:txBody>
+      </p:sp>
+      <p:sp>
+        <p:nvSpPr>
+          <p:cNvPr id="16" name="TextBox 15"/>
           <p:cNvSpPr txBox="1"/>
           <p:nvPr/>
         </p:nvSpPr>
@@ -18352,7 +18456,7 @@
         <p:spPr>
           <a:xfrm>
             <a:off x="457200" y="1261872"/>
-            <a:ext cx="11277295" cy="4917043"/>
+            <a:ext cx="11277295" cy="4544972"/>
           </a:xfrm>
           <a:prstGeom prst="roundRect">
             <a:avLst>
@@ -18602,7 +18706,7 @@
         <p:spPr>
           <a:xfrm>
             <a:off x="685800" y="1719072"/>
-            <a:ext cx="502920" cy="4322683"/>
+            <a:ext cx="502920" cy="3950612"/>
           </a:xfrm>
           <a:prstGeom prst="rect">
             <a:avLst/>
@@ -18617,11 +18721,11 @@
           <a:p>
             <a:pPr algn="r">
               <a:spcAft>
-                <a:spcPts val="428"/>
+                <a:spcPts val="385"/>
               </a:spcAft>
             </a:pPr>
             <a:r>
-              <a:rPr sz="2000" i="0" b="0">
+              <a:rPr sz="1800" i="0" b="0">
                 <a:solidFill>
                   <a:srgbClr val="858585"/>
                 </a:solidFill>
@@ -18633,11 +18737,11 @@
           <a:p>
             <a:pPr algn="r">
               <a:spcAft>
-                <a:spcPts val="428"/>
+                <a:spcPts val="385"/>
               </a:spcAft>
             </a:pPr>
             <a:r>
-              <a:rPr sz="2000" i="0" b="0">
+              <a:rPr sz="1800" i="0" b="0">
                 <a:solidFill>
                   <a:srgbClr val="858585"/>
                 </a:solidFill>
@@ -18649,11 +18753,11 @@
           <a:p>
             <a:pPr algn="r">
               <a:spcAft>
-                <a:spcPts val="428"/>
+                <a:spcPts val="385"/>
               </a:spcAft>
             </a:pPr>
             <a:r>
-              <a:rPr sz="2000" i="0" b="0">
+              <a:rPr sz="1800" i="0" b="0">
                 <a:solidFill>
                   <a:srgbClr val="858585"/>
                 </a:solidFill>
@@ -18665,11 +18769,11 @@
           <a:p>
             <a:pPr algn="r">
               <a:spcAft>
-                <a:spcPts val="428"/>
+                <a:spcPts val="385"/>
               </a:spcAft>
             </a:pPr>
             <a:r>
-              <a:rPr sz="2000" i="0" b="0">
+              <a:rPr sz="1800" i="0" b="0">
                 <a:solidFill>
                   <a:srgbClr val="858585"/>
                 </a:solidFill>
@@ -18681,11 +18785,11 @@
           <a:p>
             <a:pPr algn="r">
               <a:spcAft>
-                <a:spcPts val="428"/>
+                <a:spcPts val="385"/>
               </a:spcAft>
             </a:pPr>
             <a:r>
-              <a:rPr sz="2000" i="0" b="0">
+              <a:rPr sz="1800" i="0" b="0">
                 <a:solidFill>
                   <a:srgbClr val="858585"/>
                 </a:solidFill>
@@ -18697,11 +18801,11 @@
           <a:p>
             <a:pPr algn="r">
               <a:spcAft>
-                <a:spcPts val="428"/>
+                <a:spcPts val="385"/>
               </a:spcAft>
             </a:pPr>
             <a:r>
-              <a:rPr sz="2000" i="0" b="0">
+              <a:rPr sz="1800" i="0" b="0">
                 <a:solidFill>
                   <a:srgbClr val="858585"/>
                 </a:solidFill>
@@ -18713,11 +18817,11 @@
           <a:p>
             <a:pPr algn="r">
               <a:spcAft>
-                <a:spcPts val="428"/>
+                <a:spcPts val="385"/>
               </a:spcAft>
             </a:pPr>
             <a:r>
-              <a:rPr sz="2000" i="0" b="0">
+              <a:rPr sz="1800" i="0" b="0">
                 <a:solidFill>
                   <a:srgbClr val="858585"/>
                 </a:solidFill>
@@ -18729,11 +18833,11 @@
           <a:p>
             <a:pPr algn="r">
               <a:spcAft>
-                <a:spcPts val="428"/>
+                <a:spcPts val="385"/>
               </a:spcAft>
             </a:pPr>
             <a:r>
-              <a:rPr sz="2000" i="0" b="0">
+              <a:rPr sz="1800" i="0" b="0">
                 <a:solidFill>
                   <a:srgbClr val="858585"/>
                 </a:solidFill>
@@ -18745,11 +18849,11 @@
           <a:p>
             <a:pPr algn="r">
               <a:spcAft>
-                <a:spcPts val="428"/>
+                <a:spcPts val="385"/>
               </a:spcAft>
             </a:pPr>
             <a:r>
-              <a:rPr sz="2000" i="0" b="0">
+              <a:rPr sz="1800" i="0" b="0">
                 <a:solidFill>
                   <a:srgbClr val="858585"/>
                 </a:solidFill>
@@ -18761,11 +18865,11 @@
           <a:p>
             <a:pPr algn="r">
               <a:spcAft>
-                <a:spcPts val="428"/>
+                <a:spcPts val="385"/>
               </a:spcAft>
             </a:pPr>
             <a:r>
-              <a:rPr sz="2000" i="0" b="0">
+              <a:rPr sz="1800" i="0" b="0">
                 <a:solidFill>
                   <a:srgbClr val="858585"/>
                 </a:solidFill>
@@ -18777,11 +18881,11 @@
           <a:p>
             <a:pPr algn="r">
               <a:spcAft>
-                <a:spcPts val="428"/>
+                <a:spcPts val="385"/>
               </a:spcAft>
             </a:pPr>
             <a:r>
-              <a:rPr sz="2000" i="0" b="0">
+              <a:rPr sz="1800" i="0" b="0">
                 <a:solidFill>
                   <a:srgbClr val="858585"/>
                 </a:solidFill>
@@ -18793,11 +18897,11 @@
           <a:p>
             <a:pPr algn="r">
               <a:spcAft>
-                <a:spcPts val="428"/>
+                <a:spcPts val="385"/>
               </a:spcAft>
             </a:pPr>
             <a:r>
-              <a:rPr sz="2000" i="0" b="0">
+              <a:rPr sz="1800" i="0" b="0">
                 <a:solidFill>
                   <a:srgbClr val="858585"/>
                 </a:solidFill>
@@ -18817,7 +18921,7 @@
         <p:spPr>
           <a:xfrm>
             <a:off x="1188720" y="1719072"/>
-            <a:ext cx="10271455" cy="4322683"/>
+            <a:ext cx="10271455" cy="3950612"/>
           </a:xfrm>
           <a:prstGeom prst="rect">
             <a:avLst/>
@@ -18832,11 +18936,11 @@
           <a:p>
             <a:pPr>
               <a:spcAft>
-                <a:spcPts val="428"/>
+                <a:spcPts val="385"/>
               </a:spcAft>
             </a:pPr>
             <a:r>
-              <a:rPr sz="2000" i="1" b="0">
+              <a:rPr sz="1800" i="1" b="0">
                 <a:solidFill>
                   <a:srgbClr val="6A9955"/>
                 </a:solidFill>
@@ -18848,11 +18952,11 @@
           <a:p>
             <a:pPr>
               <a:spcAft>
-                <a:spcPts val="428"/>
+                <a:spcPts val="385"/>
               </a:spcAft>
             </a:pPr>
             <a:r>
-              <a:rPr sz="2000" i="1" b="0">
+              <a:rPr sz="1800" i="1" b="0">
                 <a:solidFill>
                   <a:srgbClr val="6A9955"/>
                 </a:solidFill>
@@ -18864,11 +18968,11 @@
           <a:p>
             <a:pPr>
               <a:spcAft>
-                <a:spcPts val="428"/>
+                <a:spcPts val="385"/>
               </a:spcAft>
             </a:pPr>
             <a:r>
-              <a:rPr sz="2000" i="1" b="0">
+              <a:rPr sz="1800" i="1" b="0">
                 <a:solidFill>
                   <a:srgbClr val="6A9955"/>
                 </a:solidFill>
@@ -18880,11 +18984,11 @@
           <a:p>
             <a:pPr>
               <a:spcAft>
-                <a:spcPts val="428"/>
+                <a:spcPts val="385"/>
               </a:spcAft>
             </a:pPr>
             <a:r>
-              <a:rPr sz="2000" i="1" b="0">
+              <a:rPr sz="1800" i="1" b="0">
                 <a:solidFill>
                   <a:srgbClr val="6A9955"/>
                 </a:solidFill>
@@ -18896,11 +19000,11 @@
           <a:p>
             <a:pPr>
               <a:spcAft>
-                <a:spcPts val="428"/>
+                <a:spcPts val="385"/>
               </a:spcAft>
             </a:pPr>
             <a:r>
-              <a:rPr sz="2000" i="0" b="0">
+              <a:rPr sz="1800" i="0" b="0">
                 <a:solidFill>
                   <a:srgbClr val="D4D4D4"/>
                 </a:solidFill>
@@ -18912,11 +19016,11 @@
           <a:p>
             <a:pPr>
               <a:spcAft>
-                <a:spcPts val="428"/>
+                <a:spcPts val="385"/>
               </a:spcAft>
             </a:pPr>
             <a:r>
-              <a:rPr sz="2000" i="1" b="0">
+              <a:rPr sz="1800" i="1" b="0">
                 <a:solidFill>
                   <a:srgbClr val="6A9955"/>
                 </a:solidFill>
@@ -18928,11 +19032,11 @@
           <a:p>
             <a:pPr>
               <a:spcAft>
-                <a:spcPts val="428"/>
+                <a:spcPts val="385"/>
               </a:spcAft>
             </a:pPr>
             <a:r>
-              <a:rPr sz="2000" i="0" b="0">
+              <a:rPr sz="1800" i="0" b="0">
                 <a:solidFill>
                   <a:srgbClr val="D4D4D4"/>
                 </a:solidFill>
@@ -18941,7 +19045,7 @@
               <a:t>PREPARE</a:t>
             </a:r>
             <a:r>
-              <a:rPr sz="2000" i="0" b="0">
+              <a:rPr sz="1800" i="0" b="0">
                 <a:solidFill>
                   <a:srgbClr val="D4D4D4"/>
                 </a:solidFill>
@@ -18950,7 +19054,7 @@
               <a:t> </a:t>
             </a:r>
             <a:r>
-              <a:rPr sz="2000" i="0" b="0">
+              <a:rPr sz="1800" i="0" b="0">
                 <a:solidFill>
                   <a:srgbClr val="DCDCAA"/>
                 </a:solidFill>
@@ -18959,7 +19063,7 @@
               <a:t>buscar_dueno</a:t>
             </a:r>
             <a:r>
-              <a:rPr sz="2000" i="0" b="0">
+              <a:rPr sz="1800" i="0" b="0">
                 <a:solidFill>
                   <a:srgbClr val="D4D4D4"/>
                 </a:solidFill>
@@ -18968,7 +19072,7 @@
               <a:t> (</a:t>
             </a:r>
             <a:r>
-              <a:rPr sz="2000" i="0" b="0">
+              <a:rPr sz="1800" i="0" b="0">
                 <a:solidFill>
                   <a:srgbClr val="4EC9B0"/>
                 </a:solidFill>
@@ -18977,7 +19081,7 @@
               <a:t>VARCHAR</a:t>
             </a:r>
             <a:r>
-              <a:rPr sz="2000" i="0" b="0">
+              <a:rPr sz="1800" i="0" b="0">
                 <a:solidFill>
                   <a:srgbClr val="D4D4D4"/>
                 </a:solidFill>
@@ -18986,7 +19090,7 @@
               <a:t>) </a:t>
             </a:r>
             <a:r>
-              <a:rPr sz="2000" i="0" b="0">
+              <a:rPr sz="1800" i="0" b="0">
                 <a:solidFill>
                   <a:srgbClr val="569CD6"/>
                 </a:solidFill>
@@ -18998,11 +19102,11 @@
           <a:p>
             <a:pPr>
               <a:spcAft>
-                <a:spcPts val="428"/>
+                <a:spcPts val="385"/>
               </a:spcAft>
             </a:pPr>
             <a:r>
-              <a:rPr sz="2000" i="0" b="0">
+              <a:rPr sz="1800" i="0" b="0">
                 <a:solidFill>
                   <a:srgbClr val="D4D4D4"/>
                 </a:solidFill>
@@ -19011,7 +19115,7 @@
               <a:t>  </a:t>
             </a:r>
             <a:r>
-              <a:rPr sz="2000" i="0" b="0">
+              <a:rPr sz="1800" i="0" b="0">
                 <a:solidFill>
                   <a:srgbClr val="569CD6"/>
                 </a:solidFill>
@@ -19020,7 +19124,7 @@
               <a:t>SELECT</a:t>
             </a:r>
             <a:r>
-              <a:rPr sz="2000" i="0" b="0">
+              <a:rPr sz="1800" i="0" b="0">
                 <a:solidFill>
                   <a:srgbClr val="D4D4D4"/>
                 </a:solidFill>
@@ -19029,7 +19133,7 @@
               <a:t> </a:t>
             </a:r>
             <a:r>
-              <a:rPr sz="2000" i="0" b="0">
+              <a:rPr sz="1800" i="0" b="0">
                 <a:solidFill>
                   <a:srgbClr val="D4D4D4"/>
                 </a:solidFill>
@@ -19038,7 +19142,7 @@
               <a:t>id_dueno</a:t>
             </a:r>
             <a:r>
-              <a:rPr sz="2000" i="0" b="0">
+              <a:rPr sz="1800" i="0" b="0">
                 <a:solidFill>
                   <a:srgbClr val="D4D4D4"/>
                 </a:solidFill>
@@ -19047,7 +19151,7 @@
               <a:t>, </a:t>
             </a:r>
             <a:r>
-              <a:rPr sz="2000" i="0" b="0">
+              <a:rPr sz="1800" i="0" b="0">
                 <a:solidFill>
                   <a:srgbClr val="D4D4D4"/>
                 </a:solidFill>
@@ -19056,7 +19160,7 @@
               <a:t>nombre</a:t>
             </a:r>
             <a:r>
-              <a:rPr sz="2000" i="0" b="0">
+              <a:rPr sz="1800" i="0" b="0">
                 <a:solidFill>
                   <a:srgbClr val="D4D4D4"/>
                 </a:solidFill>
@@ -19065,7 +19169,7 @@
               <a:t>, </a:t>
             </a:r>
             <a:r>
-              <a:rPr sz="2000" i="0" b="0">
+              <a:rPr sz="1800" i="0" b="0">
                 <a:solidFill>
                   <a:srgbClr val="D4D4D4"/>
                 </a:solidFill>
@@ -19074,7 +19178,7 @@
               <a:t>telefono</a:t>
             </a:r>
             <a:r>
-              <a:rPr sz="2000" i="0" b="0">
+              <a:rPr sz="1800" i="0" b="0">
                 <a:solidFill>
                   <a:srgbClr val="D4D4D4"/>
                 </a:solidFill>
@@ -19083,7 +19187,7 @@
               <a:t> </a:t>
             </a:r>
             <a:r>
-              <a:rPr sz="2000" i="0" b="0">
+              <a:rPr sz="1800" i="0" b="0">
                 <a:solidFill>
                   <a:srgbClr val="569CD6"/>
                 </a:solidFill>
@@ -19092,7 +19196,7 @@
               <a:t>FROM</a:t>
             </a:r>
             <a:r>
-              <a:rPr sz="2000" i="0" b="0">
+              <a:rPr sz="1800" i="0" b="0">
                 <a:solidFill>
                   <a:srgbClr val="D4D4D4"/>
                 </a:solidFill>
@@ -19101,7 +19205,7 @@
               <a:t> </a:t>
             </a:r>
             <a:r>
-              <a:rPr sz="2000" i="0" b="0">
+              <a:rPr sz="1800" i="0" b="0">
                 <a:solidFill>
                   <a:srgbClr val="D4D4D4"/>
                 </a:solidFill>
@@ -19110,7 +19214,7 @@
               <a:t>dueno</a:t>
             </a:r>
             <a:r>
-              <a:rPr sz="2000" i="0" b="0">
+              <a:rPr sz="1800" i="0" b="0">
                 <a:solidFill>
                   <a:srgbClr val="D4D4D4"/>
                 </a:solidFill>
@@ -19119,7 +19223,7 @@
               <a:t> </a:t>
             </a:r>
             <a:r>
-              <a:rPr sz="2000" i="0" b="0">
+              <a:rPr sz="1800" i="0" b="0">
                 <a:solidFill>
                   <a:srgbClr val="569CD6"/>
                 </a:solidFill>
@@ -19128,7 +19232,7 @@
               <a:t>WHERE</a:t>
             </a:r>
             <a:r>
-              <a:rPr sz="2000" i="0" b="0">
+              <a:rPr sz="1800" i="0" b="0">
                 <a:solidFill>
                   <a:srgbClr val="D4D4D4"/>
                 </a:solidFill>
@@ -19137,7 +19241,7 @@
               <a:t> </a:t>
             </a:r>
             <a:r>
-              <a:rPr sz="2000" i="0" b="0">
+              <a:rPr sz="1800" i="0" b="0">
                 <a:solidFill>
                   <a:srgbClr val="D4D4D4"/>
                 </a:solidFill>
@@ -19146,7 +19250,7 @@
               <a:t>nombre</a:t>
             </a:r>
             <a:r>
-              <a:rPr sz="2000" i="0" b="0">
+              <a:rPr sz="1800" i="0" b="0">
                 <a:solidFill>
                   <a:srgbClr val="D4D4D4"/>
                 </a:solidFill>
@@ -19155,7 +19259,7 @@
               <a:t> = $</a:t>
             </a:r>
             <a:r>
-              <a:rPr sz="2000" i="0" b="0">
+              <a:rPr sz="1800" i="0" b="0">
                 <a:solidFill>
                   <a:srgbClr val="B5CEA8"/>
                 </a:solidFill>
@@ -19164,7 +19268,7 @@
               <a:t>1</a:t>
             </a:r>
             <a:r>
-              <a:rPr sz="2000" i="0" b="0">
+              <a:rPr sz="1800" i="0" b="0">
                 <a:solidFill>
                   <a:srgbClr val="D4D4D4"/>
                 </a:solidFill>
@@ -19176,11 +19280,11 @@
           <a:p>
             <a:pPr>
               <a:spcAft>
-                <a:spcPts val="428"/>
+                <a:spcPts val="385"/>
               </a:spcAft>
             </a:pPr>
             <a:r>
-              <a:rPr sz="2000" i="0" b="0">
+              <a:rPr sz="1800" i="0" b="0">
                 <a:solidFill>
                   <a:srgbClr val="D4D4D4"/>
                 </a:solidFill>
@@ -19192,11 +19296,11 @@
           <a:p>
             <a:pPr>
               <a:spcAft>
-                <a:spcPts val="428"/>
+                <a:spcPts val="385"/>
               </a:spcAft>
             </a:pPr>
             <a:r>
-              <a:rPr sz="2000" i="0" b="0">
+              <a:rPr sz="1800" i="0" b="0">
                 <a:solidFill>
                   <a:srgbClr val="569CD6"/>
                 </a:solidFill>
@@ -19205,7 +19309,7 @@
               <a:t>EXECUTE</a:t>
             </a:r>
             <a:r>
-              <a:rPr sz="2000" i="0" b="0">
+              <a:rPr sz="1800" i="0" b="0">
                 <a:solidFill>
                   <a:srgbClr val="D4D4D4"/>
                 </a:solidFill>
@@ -19214,7 +19318,7 @@
               <a:t> </a:t>
             </a:r>
             <a:r>
-              <a:rPr sz="2000" i="0" b="0">
+              <a:rPr sz="1800" i="0" b="0">
                 <a:solidFill>
                   <a:srgbClr val="DCDCAA"/>
                 </a:solidFill>
@@ -19223,7 +19327,7 @@
               <a:t>buscar_dueno</a:t>
             </a:r>
             <a:r>
-              <a:rPr sz="2000" i="0" b="0">
+              <a:rPr sz="1800" i="0" b="0">
                 <a:solidFill>
                   <a:srgbClr val="D4D4D4"/>
                 </a:solidFill>
@@ -19232,7 +19336,7 @@
               <a:t>(</a:t>
             </a:r>
             <a:r>
-              <a:rPr sz="2000" i="0" b="0">
+              <a:rPr sz="1800" i="0" b="0">
                 <a:solidFill>
                   <a:srgbClr val="CE9178"/>
                 </a:solidFill>
@@ -19241,7 +19345,7 @@
               <a:t>'Ana Gomez'</a:t>
             </a:r>
             <a:r>
-              <a:rPr sz="2000" i="0" b="0">
+              <a:rPr sz="1800" i="0" b="0">
                 <a:solidFill>
                   <a:srgbClr val="D4D4D4"/>
                 </a:solidFill>
@@ -19250,7 +19354,7 @@
               <a:t>);             </a:t>
             </a:r>
             <a:r>
-              <a:rPr sz="2000" i="1" b="0">
+              <a:rPr sz="1800" i="1" b="0">
                 <a:solidFill>
                   <a:srgbClr val="6A9955"/>
                 </a:solidFill>
@@ -19262,11 +19366,11 @@
           <a:p>
             <a:pPr>
               <a:spcAft>
-                <a:spcPts val="428"/>
+                <a:spcPts val="385"/>
               </a:spcAft>
             </a:pPr>
             <a:r>
-              <a:rPr sz="2000" i="0" b="0">
+              <a:rPr sz="1800" i="0" b="0">
                 <a:solidFill>
                   <a:srgbClr val="569CD6"/>
                 </a:solidFill>
@@ -19275,7 +19379,7 @@
               <a:t>EXECUTE</a:t>
             </a:r>
             <a:r>
-              <a:rPr sz="2000" i="0" b="0">
+              <a:rPr sz="1800" i="0" b="0">
                 <a:solidFill>
                   <a:srgbClr val="D4D4D4"/>
                 </a:solidFill>
@@ -19284,7 +19388,7 @@
               <a:t> </a:t>
             </a:r>
             <a:r>
-              <a:rPr sz="2000" i="0" b="0">
+              <a:rPr sz="1800" i="0" b="0">
                 <a:solidFill>
                   <a:srgbClr val="DCDCAA"/>
                 </a:solidFill>
@@ -19293,7 +19397,7 @@
               <a:t>buscar_dueno</a:t>
             </a:r>
             <a:r>
-              <a:rPr sz="2000" i="0" b="0">
+              <a:rPr sz="1800" i="0" b="0">
                 <a:solidFill>
                   <a:srgbClr val="D4D4D4"/>
                 </a:solidFill>
@@ -19302,7 +19406,7 @@
               <a:t>(                  </a:t>
             </a:r>
             <a:r>
-              <a:rPr sz="2000" i="1" b="0">
+              <a:rPr sz="1800" i="1" b="0">
                 <a:solidFill>
                   <a:srgbClr val="6A9955"/>
                 </a:solidFill>
@@ -19314,11 +19418,11 @@
           <a:p>
             <a:pPr>
               <a:spcAft>
-                <a:spcPts val="428"/>
+                <a:spcPts val="385"/>
               </a:spcAft>
             </a:pPr>
             <a:r>
-              <a:rPr sz="2000" i="0" b="0">
+              <a:rPr sz="1800" i="0" b="0">
                 <a:solidFill>
                   <a:srgbClr val="D4D4D4"/>
                 </a:solidFill>
@@ -19327,7 +19431,7 @@
               <a:t>  </a:t>
             </a:r>
             <a:r>
-              <a:rPr sz="2000" i="0" b="0">
+              <a:rPr sz="1800" i="0" b="0">
                 <a:solidFill>
                   <a:srgbClr val="CE9178"/>
                 </a:solidFill>
@@ -19336,7 +19440,7 @@
               <a:t>'x''; UPDATE cita SET estado = ''CANCELADA''; --'</a:t>
             </a:r>
             <a:r>
-              <a:rPr sz="2000" i="0" b="0">
+              <a:rPr sz="1800" i="0" b="0">
                 <a:solidFill>
                   <a:srgbClr val="D4D4D4"/>
                 </a:solidFill>
@@ -20793,7 +20897,7 @@
         <p:spPr>
           <a:xfrm>
             <a:off x="457200" y="1261872"/>
-            <a:ext cx="11277295" cy="4862125"/>
+            <a:ext cx="11277295" cy="4660587"/>
           </a:xfrm>
           <a:prstGeom prst="roundRect">
             <a:avLst>
@@ -21043,7 +21147,7 @@
         <p:spPr>
           <a:xfrm>
             <a:off x="685800" y="1719072"/>
-            <a:ext cx="502920" cy="4267765"/>
+            <a:ext cx="502920" cy="4066227"/>
           </a:xfrm>
           <a:prstGeom prst="rect">
             <a:avLst/>
@@ -21058,11 +21162,11 @@
           <a:p>
             <a:pPr algn="r">
               <a:spcAft>
-                <a:spcPts val="385"/>
+                <a:spcPts val="364"/>
               </a:spcAft>
             </a:pPr>
             <a:r>
-              <a:rPr sz="1800" i="0" b="0">
+              <a:rPr sz="1700" i="0" b="0">
                 <a:solidFill>
                   <a:srgbClr val="858585"/>
                 </a:solidFill>
@@ -21074,11 +21178,11 @@
           <a:p>
             <a:pPr algn="r">
               <a:spcAft>
-                <a:spcPts val="385"/>
+                <a:spcPts val="364"/>
               </a:spcAft>
             </a:pPr>
             <a:r>
-              <a:rPr sz="1800" i="0" b="0">
+              <a:rPr sz="1700" i="0" b="0">
                 <a:solidFill>
                   <a:srgbClr val="858585"/>
                 </a:solidFill>
@@ -21090,11 +21194,11 @@
           <a:p>
             <a:pPr algn="r">
               <a:spcAft>
-                <a:spcPts val="385"/>
+                <a:spcPts val="364"/>
               </a:spcAft>
             </a:pPr>
             <a:r>
-              <a:rPr sz="1800" i="0" b="0">
+              <a:rPr sz="1700" i="0" b="0">
                 <a:solidFill>
                   <a:srgbClr val="858585"/>
                 </a:solidFill>
@@ -21106,11 +21210,11 @@
           <a:p>
             <a:pPr algn="r">
               <a:spcAft>
-                <a:spcPts val="385"/>
+                <a:spcPts val="364"/>
               </a:spcAft>
             </a:pPr>
             <a:r>
-              <a:rPr sz="1800" i="0" b="0">
+              <a:rPr sz="1700" i="0" b="0">
                 <a:solidFill>
                   <a:srgbClr val="858585"/>
                 </a:solidFill>
@@ -21122,11 +21226,11 @@
           <a:p>
             <a:pPr algn="r">
               <a:spcAft>
-                <a:spcPts val="385"/>
+                <a:spcPts val="364"/>
               </a:spcAft>
             </a:pPr>
             <a:r>
-              <a:rPr sz="1800" i="0" b="0">
+              <a:rPr sz="1700" i="0" b="0">
                 <a:solidFill>
                   <a:srgbClr val="858585"/>
                 </a:solidFill>
@@ -21138,11 +21242,11 @@
           <a:p>
             <a:pPr algn="r">
               <a:spcAft>
-                <a:spcPts val="385"/>
+                <a:spcPts val="364"/>
               </a:spcAft>
             </a:pPr>
             <a:r>
-              <a:rPr sz="1800" i="0" b="0">
+              <a:rPr sz="1700" i="0" b="0">
                 <a:solidFill>
                   <a:srgbClr val="858585"/>
                 </a:solidFill>
@@ -21154,11 +21258,11 @@
           <a:p>
             <a:pPr algn="r">
               <a:spcAft>
-                <a:spcPts val="385"/>
+                <a:spcPts val="364"/>
               </a:spcAft>
             </a:pPr>
             <a:r>
-              <a:rPr sz="1800" i="0" b="0">
+              <a:rPr sz="1700" i="0" b="0">
                 <a:solidFill>
                   <a:srgbClr val="858585"/>
                 </a:solidFill>
@@ -21170,11 +21274,11 @@
           <a:p>
             <a:pPr algn="r">
               <a:spcAft>
-                <a:spcPts val="385"/>
+                <a:spcPts val="364"/>
               </a:spcAft>
             </a:pPr>
             <a:r>
-              <a:rPr sz="1800" i="0" b="0">
+              <a:rPr sz="1700" i="0" b="0">
                 <a:solidFill>
                   <a:srgbClr val="858585"/>
                 </a:solidFill>
@@ -21186,11 +21290,11 @@
           <a:p>
             <a:pPr algn="r">
               <a:spcAft>
-                <a:spcPts val="385"/>
+                <a:spcPts val="364"/>
               </a:spcAft>
             </a:pPr>
             <a:r>
-              <a:rPr sz="1800" i="0" b="0">
+              <a:rPr sz="1700" i="0" b="0">
                 <a:solidFill>
                   <a:srgbClr val="858585"/>
                 </a:solidFill>
@@ -21202,11 +21306,11 @@
           <a:p>
             <a:pPr algn="r">
               <a:spcAft>
-                <a:spcPts val="385"/>
+                <a:spcPts val="364"/>
               </a:spcAft>
             </a:pPr>
             <a:r>
-              <a:rPr sz="1800" i="0" b="0">
+              <a:rPr sz="1700" i="0" b="0">
                 <a:solidFill>
                   <a:srgbClr val="858585"/>
                 </a:solidFill>
@@ -21218,11 +21322,11 @@
           <a:p>
             <a:pPr algn="r">
               <a:spcAft>
-                <a:spcPts val="385"/>
+                <a:spcPts val="364"/>
               </a:spcAft>
             </a:pPr>
             <a:r>
-              <a:rPr sz="1800" i="0" b="0">
+              <a:rPr sz="1700" i="0" b="0">
                 <a:solidFill>
                   <a:srgbClr val="858585"/>
                 </a:solidFill>
@@ -21234,11 +21338,11 @@
           <a:p>
             <a:pPr algn="r">
               <a:spcAft>
-                <a:spcPts val="385"/>
+                <a:spcPts val="364"/>
               </a:spcAft>
             </a:pPr>
             <a:r>
-              <a:rPr sz="1800" i="0" b="0">
+              <a:rPr sz="1700" i="0" b="0">
                 <a:solidFill>
                   <a:srgbClr val="858585"/>
                 </a:solidFill>
@@ -21250,11 +21354,11 @@
           <a:p>
             <a:pPr algn="r">
               <a:spcAft>
-                <a:spcPts val="385"/>
+                <a:spcPts val="364"/>
               </a:spcAft>
             </a:pPr>
             <a:r>
-              <a:rPr sz="1800" i="0" b="0">
+              <a:rPr sz="1700" i="0" b="0">
                 <a:solidFill>
                   <a:srgbClr val="858585"/>
                 </a:solidFill>
@@ -21274,7 +21378,7 @@
         <p:spPr>
           <a:xfrm>
             <a:off x="1188720" y="1719072"/>
-            <a:ext cx="10271455" cy="4267765"/>
+            <a:ext cx="10271455" cy="4066227"/>
           </a:xfrm>
           <a:prstGeom prst="rect">
             <a:avLst/>
@@ -21289,11 +21393,11 @@
           <a:p>
             <a:pPr>
               <a:spcAft>
-                <a:spcPts val="385"/>
+                <a:spcPts val="364"/>
               </a:spcAft>
             </a:pPr>
             <a:r>
-              <a:rPr sz="1800" i="1" b="0">
+              <a:rPr sz="1700" i="1" b="0">
                 <a:solidFill>
                   <a:srgbClr val="6A9955"/>
                 </a:solidFill>
@@ -21305,11 +21409,11 @@
           <a:p>
             <a:pPr>
               <a:spcAft>
-                <a:spcPts val="385"/>
+                <a:spcPts val="364"/>
               </a:spcAft>
             </a:pPr>
             <a:r>
-              <a:rPr sz="1800" i="0" b="0">
+              <a:rPr sz="1700" i="0" b="0">
                 <a:solidFill>
                   <a:srgbClr val="569CD6"/>
                 </a:solidFill>
@@ -21318,7 +21422,7 @@
               <a:t>CREATE</a:t>
             </a:r>
             <a:r>
-              <a:rPr sz="1800" i="0" b="0">
+              <a:rPr sz="1700" i="0" b="0">
                 <a:solidFill>
                   <a:srgbClr val="D4D4D4"/>
                 </a:solidFill>
@@ -21327,7 +21431,7 @@
               <a:t> </a:t>
             </a:r>
             <a:r>
-              <a:rPr sz="1800" i="0" b="0">
+              <a:rPr sz="1700" i="0" b="0">
                 <a:solidFill>
                   <a:srgbClr val="569CD6"/>
                 </a:solidFill>
@@ -21336,7 +21440,7 @@
               <a:t>OR</a:t>
             </a:r>
             <a:r>
-              <a:rPr sz="1800" i="0" b="0">
+              <a:rPr sz="1700" i="0" b="0">
                 <a:solidFill>
                   <a:srgbClr val="D4D4D4"/>
                 </a:solidFill>
@@ -21345,7 +21449,7 @@
               <a:t> </a:t>
             </a:r>
             <a:r>
-              <a:rPr sz="1800" i="0" b="0">
+              <a:rPr sz="1700" i="0" b="0">
                 <a:solidFill>
                   <a:srgbClr val="569CD6"/>
                 </a:solidFill>
@@ -21354,7 +21458,7 @@
               <a:t>REPLACE</a:t>
             </a:r>
             <a:r>
-              <a:rPr sz="1800" i="0" b="0">
+              <a:rPr sz="1700" i="0" b="0">
                 <a:solidFill>
                   <a:srgbClr val="D4D4D4"/>
                 </a:solidFill>
@@ -21363,7 +21467,7 @@
               <a:t> </a:t>
             </a:r>
             <a:r>
-              <a:rPr sz="1800" i="0" b="0">
+              <a:rPr sz="1700" i="0" b="0">
                 <a:solidFill>
                   <a:srgbClr val="569CD6"/>
                 </a:solidFill>
@@ -21372,7 +21476,7 @@
               <a:t>FUNCTION</a:t>
             </a:r>
             <a:r>
-              <a:rPr sz="1800" i="0" b="0">
+              <a:rPr sz="1700" i="0" b="0">
                 <a:solidFill>
                   <a:srgbClr val="D4D4D4"/>
                 </a:solidFill>
@@ -21381,7 +21485,7 @@
               <a:t> </a:t>
             </a:r>
             <a:r>
-              <a:rPr sz="1800" i="0" b="0">
+              <a:rPr sz="1700" i="0" b="0">
                 <a:solidFill>
                   <a:srgbClr val="DCDCAA"/>
                 </a:solidFill>
@@ -21390,7 +21494,7 @@
               <a:t>api_agenda_del_dia</a:t>
             </a:r>
             <a:r>
-              <a:rPr sz="1800" i="0" b="0">
+              <a:rPr sz="1700" i="0" b="0">
                 <a:solidFill>
                   <a:srgbClr val="D4D4D4"/>
                 </a:solidFill>
@@ -21399,7 +21503,7 @@
               <a:t>(</a:t>
             </a:r>
             <a:r>
-              <a:rPr sz="1800" i="0" b="0">
+              <a:rPr sz="1700" i="0" b="0">
                 <a:solidFill>
                   <a:srgbClr val="D4D4D4"/>
                 </a:solidFill>
@@ -21408,7 +21512,7 @@
               <a:t>p_dia</a:t>
             </a:r>
             <a:r>
-              <a:rPr sz="1800" i="0" b="0">
+              <a:rPr sz="1700" i="0" b="0">
                 <a:solidFill>
                   <a:srgbClr val="D4D4D4"/>
                 </a:solidFill>
@@ -21417,7 +21521,7 @@
               <a:t> </a:t>
             </a:r>
             <a:r>
-              <a:rPr sz="1800" i="0" b="0">
+              <a:rPr sz="1700" i="0" b="0">
                 <a:solidFill>
                   <a:srgbClr val="4EC9B0"/>
                 </a:solidFill>
@@ -21426,7 +21530,7 @@
               <a:t>DATE</a:t>
             </a:r>
             <a:r>
-              <a:rPr sz="1800" i="0" b="0">
+              <a:rPr sz="1700" i="0" b="0">
                 <a:solidFill>
                   <a:srgbClr val="D4D4D4"/>
                 </a:solidFill>
@@ -21438,11 +21542,11 @@
           <a:p>
             <a:pPr>
               <a:spcAft>
-                <a:spcPts val="385"/>
+                <a:spcPts val="364"/>
               </a:spcAft>
             </a:pPr>
             <a:r>
-              <a:rPr sz="1800" i="0" b="0">
+              <a:rPr sz="1700" i="0" b="0">
                 <a:solidFill>
                   <a:srgbClr val="569CD6"/>
                 </a:solidFill>
@@ -21451,7 +21555,7 @@
               <a:t>RETURNS</a:t>
             </a:r>
             <a:r>
-              <a:rPr sz="1800" i="0" b="0">
+              <a:rPr sz="1700" i="0" b="0">
                 <a:solidFill>
                   <a:srgbClr val="D4D4D4"/>
                 </a:solidFill>
@@ -21460,7 +21564,7 @@
               <a:t> </a:t>
             </a:r>
             <a:r>
-              <a:rPr sz="1800" i="0" b="0">
+              <a:rPr sz="1700" i="0" b="0">
                 <a:solidFill>
                   <a:srgbClr val="569CD6"/>
                 </a:solidFill>
@@ -21469,7 +21573,7 @@
               <a:t>TABLE</a:t>
             </a:r>
             <a:r>
-              <a:rPr sz="1800" i="0" b="0">
+              <a:rPr sz="1700" i="0" b="0">
                 <a:solidFill>
                   <a:srgbClr val="D4D4D4"/>
                 </a:solidFill>
@@ -21478,7 +21582,7 @@
               <a:t> (</a:t>
             </a:r>
             <a:r>
-              <a:rPr sz="1800" i="0" b="0">
+              <a:rPr sz="1700" i="0" b="0">
                 <a:solidFill>
                   <a:srgbClr val="D4D4D4"/>
                 </a:solidFill>
@@ -21487,7 +21591,7 @@
               <a:t>id_cita</a:t>
             </a:r>
             <a:r>
-              <a:rPr sz="1800" i="0" b="0">
+              <a:rPr sz="1700" i="0" b="0">
                 <a:solidFill>
                   <a:srgbClr val="D4D4D4"/>
                 </a:solidFill>
@@ -21496,7 +21600,7 @@
               <a:t> </a:t>
             </a:r>
             <a:r>
-              <a:rPr sz="1800" i="0" b="0">
+              <a:rPr sz="1700" i="0" b="0">
                 <a:solidFill>
                   <a:srgbClr val="4EC9B0"/>
                 </a:solidFill>
@@ -21505,7 +21609,7 @@
               <a:t>INT</a:t>
             </a:r>
             <a:r>
-              <a:rPr sz="1800" i="0" b="0">
+              <a:rPr sz="1700" i="0" b="0">
                 <a:solidFill>
                   <a:srgbClr val="D4D4D4"/>
                 </a:solidFill>
@@ -21514,7 +21618,7 @@
               <a:t>, </a:t>
             </a:r>
             <a:r>
-              <a:rPr sz="1800" i="0" b="0">
+              <a:rPr sz="1700" i="0" b="0">
                 <a:solidFill>
                   <a:srgbClr val="D4D4D4"/>
                 </a:solidFill>
@@ -21523,7 +21627,7 @@
               <a:t>hora</a:t>
             </a:r>
             <a:r>
-              <a:rPr sz="1800" i="0" b="0">
+              <a:rPr sz="1700" i="0" b="0">
                 <a:solidFill>
                   <a:srgbClr val="D4D4D4"/>
                 </a:solidFill>
@@ -21532,7 +21636,7 @@
               <a:t> </a:t>
             </a:r>
             <a:r>
-              <a:rPr sz="1800" i="0" b="0">
+              <a:rPr sz="1700" i="0" b="0">
                 <a:solidFill>
                   <a:srgbClr val="4EC9B0"/>
                 </a:solidFill>
@@ -21541,7 +21645,7 @@
               <a:t>TIMESTAMP</a:t>
             </a:r>
             <a:r>
-              <a:rPr sz="1800" i="0" b="0">
+              <a:rPr sz="1700" i="0" b="0">
                 <a:solidFill>
                   <a:srgbClr val="D4D4D4"/>
                 </a:solidFill>
@@ -21550,7 +21654,7 @@
               <a:t>, </a:t>
             </a:r>
             <a:r>
-              <a:rPr sz="1800" i="0" b="0">
+              <a:rPr sz="1700" i="0" b="0">
                 <a:solidFill>
                   <a:srgbClr val="D4D4D4"/>
                 </a:solidFill>
@@ -21559,7 +21663,7 @@
               <a:t>mascota</a:t>
             </a:r>
             <a:r>
-              <a:rPr sz="1800" i="0" b="0">
+              <a:rPr sz="1700" i="0" b="0">
                 <a:solidFill>
                   <a:srgbClr val="D4D4D4"/>
                 </a:solidFill>
@@ -21568,7 +21672,7 @@
               <a:t> </a:t>
             </a:r>
             <a:r>
-              <a:rPr sz="1800" i="0" b="0">
+              <a:rPr sz="1700" i="0" b="0">
                 <a:solidFill>
                   <a:srgbClr val="4EC9B0"/>
                 </a:solidFill>
@@ -21577,7 +21681,7 @@
               <a:t>VARCHAR</a:t>
             </a:r>
             <a:r>
-              <a:rPr sz="1800" i="0" b="0">
+              <a:rPr sz="1700" i="0" b="0">
                 <a:solidFill>
                   <a:srgbClr val="D4D4D4"/>
                 </a:solidFill>
@@ -21586,7 +21690,7 @@
               <a:t>, </a:t>
             </a:r>
             <a:r>
-              <a:rPr sz="1800" i="0" b="0">
+              <a:rPr sz="1700" i="0" b="0">
                 <a:solidFill>
                   <a:srgbClr val="D4D4D4"/>
                 </a:solidFill>
@@ -21595,7 +21699,7 @@
               <a:t>dueno</a:t>
             </a:r>
             <a:r>
-              <a:rPr sz="1800" i="0" b="0">
+              <a:rPr sz="1700" i="0" b="0">
                 <a:solidFill>
                   <a:srgbClr val="D4D4D4"/>
                 </a:solidFill>
@@ -21604,7 +21708,7 @@
               <a:t> </a:t>
             </a:r>
             <a:r>
-              <a:rPr sz="1800" i="0" b="0">
+              <a:rPr sz="1700" i="0" b="0">
                 <a:solidFill>
                   <a:srgbClr val="4EC9B0"/>
                 </a:solidFill>
@@ -21613,7 +21717,7 @@
               <a:t>VARCHAR</a:t>
             </a:r>
             <a:r>
-              <a:rPr sz="1800" i="0" b="0">
+              <a:rPr sz="1700" i="0" b="0">
                 <a:solidFill>
                   <a:srgbClr val="D4D4D4"/>
                 </a:solidFill>
@@ -21625,11 +21729,11 @@
           <a:p>
             <a:pPr>
               <a:spcAft>
-                <a:spcPts val="385"/>
+                <a:spcPts val="364"/>
               </a:spcAft>
             </a:pPr>
             <a:r>
-              <a:rPr sz="1800" i="0" b="0">
+              <a:rPr sz="1700" i="0" b="0">
                 <a:solidFill>
                   <a:srgbClr val="569CD6"/>
                 </a:solidFill>
@@ -21638,7 +21742,7 @@
               <a:t>LANGUAGE</a:t>
             </a:r>
             <a:r>
-              <a:rPr sz="1800" i="0" b="0">
+              <a:rPr sz="1700" i="0" b="0">
                 <a:solidFill>
                   <a:srgbClr val="D4D4D4"/>
                 </a:solidFill>
@@ -21647,7 +21751,7 @@
               <a:t> </a:t>
             </a:r>
             <a:r>
-              <a:rPr sz="1800" i="0" b="0">
+              <a:rPr sz="1700" i="0" b="0">
                 <a:solidFill>
                   <a:srgbClr val="D4D4D4"/>
                 </a:solidFill>
@@ -21659,11 +21763,11 @@
           <a:p>
             <a:pPr>
               <a:spcAft>
-                <a:spcPts val="385"/>
+                <a:spcPts val="364"/>
               </a:spcAft>
             </a:pPr>
             <a:r>
-              <a:rPr sz="1800" i="0" b="0">
+              <a:rPr sz="1700" i="0" b="0">
                 <a:solidFill>
                   <a:srgbClr val="569CD6"/>
                 </a:solidFill>
@@ -21675,11 +21779,11 @@
           <a:p>
             <a:pPr>
               <a:spcAft>
-                <a:spcPts val="385"/>
+                <a:spcPts val="364"/>
               </a:spcAft>
             </a:pPr>
             <a:r>
-              <a:rPr sz="1800" i="0" b="0">
+              <a:rPr sz="1700" i="0" b="0">
                 <a:solidFill>
                   <a:srgbClr val="569CD6"/>
                 </a:solidFill>
@@ -21688,7 +21792,7 @@
               <a:t>AS</a:t>
             </a:r>
             <a:r>
-              <a:rPr sz="1800" i="0" b="0">
+              <a:rPr sz="1700" i="0" b="0">
                 <a:solidFill>
                   <a:srgbClr val="D4D4D4"/>
                 </a:solidFill>
@@ -21697,7 +21801,7 @@
               <a:t> </a:t>
             </a:r>
             <a:r>
-              <a:rPr sz="1800" i="0" b="0">
+              <a:rPr sz="1700" i="0" b="0">
                 <a:solidFill>
                   <a:srgbClr val="569CD6"/>
                 </a:solidFill>
@@ -21709,11 +21813,11 @@
           <a:p>
             <a:pPr>
               <a:spcAft>
-                <a:spcPts val="385"/>
+                <a:spcPts val="364"/>
               </a:spcAft>
             </a:pPr>
             <a:r>
-              <a:rPr sz="1800" i="0" b="0">
+              <a:rPr sz="1700" i="0" b="0">
                 <a:solidFill>
                   <a:srgbClr val="D4D4D4"/>
                 </a:solidFill>
@@ -21722,7 +21826,7 @@
               <a:t>  </a:t>
             </a:r>
             <a:r>
-              <a:rPr sz="1800" i="0" b="0">
+              <a:rPr sz="1700" i="0" b="0">
                 <a:solidFill>
                   <a:srgbClr val="569CD6"/>
                 </a:solidFill>
@@ -21731,7 +21835,7 @@
               <a:t>SELECT</a:t>
             </a:r>
             <a:r>
-              <a:rPr sz="1800" i="0" b="0">
+              <a:rPr sz="1700" i="0" b="0">
                 <a:solidFill>
                   <a:srgbClr val="D4D4D4"/>
                 </a:solidFill>
@@ -21740,7 +21844,7 @@
               <a:t> </a:t>
             </a:r>
             <a:r>
-              <a:rPr sz="1800" i="0" b="0">
+              <a:rPr sz="1700" i="0" b="0">
                 <a:solidFill>
                   <a:srgbClr val="D4D4D4"/>
                 </a:solidFill>
@@ -21749,7 +21853,7 @@
               <a:t>c</a:t>
             </a:r>
             <a:r>
-              <a:rPr sz="1800" i="0" b="0">
+              <a:rPr sz="1700" i="0" b="0">
                 <a:solidFill>
                   <a:srgbClr val="D4D4D4"/>
                 </a:solidFill>
@@ -21758,7 +21862,7 @@
               <a:t>.</a:t>
             </a:r>
             <a:r>
-              <a:rPr sz="1800" i="0" b="0">
+              <a:rPr sz="1700" i="0" b="0">
                 <a:solidFill>
                   <a:srgbClr val="D4D4D4"/>
                 </a:solidFill>
@@ -21767,7 +21871,7 @@
               <a:t>id_cita</a:t>
             </a:r>
             <a:r>
-              <a:rPr sz="1800" i="0" b="0">
+              <a:rPr sz="1700" i="0" b="0">
                 <a:solidFill>
                   <a:srgbClr val="D4D4D4"/>
                 </a:solidFill>
@@ -21776,7 +21880,7 @@
               <a:t>, </a:t>
             </a:r>
             <a:r>
-              <a:rPr sz="1800" i="0" b="0">
+              <a:rPr sz="1700" i="0" b="0">
                 <a:solidFill>
                   <a:srgbClr val="D4D4D4"/>
                 </a:solidFill>
@@ -21785,7 +21889,7 @@
               <a:t>c</a:t>
             </a:r>
             <a:r>
-              <a:rPr sz="1800" i="0" b="0">
+              <a:rPr sz="1700" i="0" b="0">
                 <a:solidFill>
                   <a:srgbClr val="D4D4D4"/>
                 </a:solidFill>
@@ -21794,7 +21898,7 @@
               <a:t>.</a:t>
             </a:r>
             <a:r>
-              <a:rPr sz="1800" i="0" b="0">
+              <a:rPr sz="1700" i="0" b="0">
                 <a:solidFill>
                   <a:srgbClr val="D4D4D4"/>
                 </a:solidFill>
@@ -21803,7 +21907,7 @@
               <a:t>fecha_hora</a:t>
             </a:r>
             <a:r>
-              <a:rPr sz="1800" i="0" b="0">
+              <a:rPr sz="1700" i="0" b="0">
                 <a:solidFill>
                   <a:srgbClr val="D4D4D4"/>
                 </a:solidFill>
@@ -21812,7 +21916,7 @@
               <a:t>, </a:t>
             </a:r>
             <a:r>
-              <a:rPr sz="1800" i="0" b="0">
+              <a:rPr sz="1700" i="0" b="0">
                 <a:solidFill>
                   <a:srgbClr val="D4D4D4"/>
                 </a:solidFill>
@@ -21821,7 +21925,7 @@
               <a:t>m</a:t>
             </a:r>
             <a:r>
-              <a:rPr sz="1800" i="0" b="0">
+              <a:rPr sz="1700" i="0" b="0">
                 <a:solidFill>
                   <a:srgbClr val="D4D4D4"/>
                 </a:solidFill>
@@ -21830,7 +21934,7 @@
               <a:t>.</a:t>
             </a:r>
             <a:r>
-              <a:rPr sz="1800" i="0" b="0">
+              <a:rPr sz="1700" i="0" b="0">
                 <a:solidFill>
                   <a:srgbClr val="D4D4D4"/>
                 </a:solidFill>
@@ -21839,7 +21943,7 @@
               <a:t>nombre</a:t>
             </a:r>
             <a:r>
-              <a:rPr sz="1800" i="0" b="0">
+              <a:rPr sz="1700" i="0" b="0">
                 <a:solidFill>
                   <a:srgbClr val="D4D4D4"/>
                 </a:solidFill>
@@ -21848,7 +21952,7 @@
               <a:t>, </a:t>
             </a:r>
             <a:r>
-              <a:rPr sz="1800" i="0" b="0">
+              <a:rPr sz="1700" i="0" b="0">
                 <a:solidFill>
                   <a:srgbClr val="D4D4D4"/>
                 </a:solidFill>
@@ -21857,7 +21961,7 @@
               <a:t>d</a:t>
             </a:r>
             <a:r>
-              <a:rPr sz="1800" i="0" b="0">
+              <a:rPr sz="1700" i="0" b="0">
                 <a:solidFill>
                   <a:srgbClr val="D4D4D4"/>
                 </a:solidFill>
@@ -21866,7 +21970,7 @@
               <a:t>.</a:t>
             </a:r>
             <a:r>
-              <a:rPr sz="1800" i="0" b="0">
+              <a:rPr sz="1700" i="0" b="0">
                 <a:solidFill>
                   <a:srgbClr val="D4D4D4"/>
                 </a:solidFill>
@@ -21878,11 +21982,11 @@
           <a:p>
             <a:pPr>
               <a:spcAft>
-                <a:spcPts val="385"/>
+                <a:spcPts val="364"/>
               </a:spcAft>
             </a:pPr>
             <a:r>
-              <a:rPr sz="1800" i="0" b="0">
+              <a:rPr sz="1700" i="0" b="0">
                 <a:solidFill>
                   <a:srgbClr val="D4D4D4"/>
                 </a:solidFill>
@@ -21891,7 +21995,7 @@
               <a:t>  </a:t>
             </a:r>
             <a:r>
-              <a:rPr sz="1800" i="0" b="0">
+              <a:rPr sz="1700" i="0" b="0">
                 <a:solidFill>
                   <a:srgbClr val="569CD6"/>
                 </a:solidFill>
@@ -21900,7 +22004,7 @@
               <a:t>FROM</a:t>
             </a:r>
             <a:r>
-              <a:rPr sz="1800" i="0" b="0">
+              <a:rPr sz="1700" i="0" b="0">
                 <a:solidFill>
                   <a:srgbClr val="D4D4D4"/>
                 </a:solidFill>
@@ -21909,7 +22013,7 @@
               <a:t> </a:t>
             </a:r>
             <a:r>
-              <a:rPr sz="1800" i="0" b="0">
+              <a:rPr sz="1700" i="0" b="0">
                 <a:solidFill>
                   <a:srgbClr val="D4D4D4"/>
                 </a:solidFill>
@@ -21918,7 +22022,7 @@
               <a:t>cita</a:t>
             </a:r>
             <a:r>
-              <a:rPr sz="1800" i="0" b="0">
+              <a:rPr sz="1700" i="0" b="0">
                 <a:solidFill>
                   <a:srgbClr val="D4D4D4"/>
                 </a:solidFill>
@@ -21927,7 +22031,7 @@
               <a:t> </a:t>
             </a:r>
             <a:r>
-              <a:rPr sz="1800" i="0" b="0">
+              <a:rPr sz="1700" i="0" b="0">
                 <a:solidFill>
                   <a:srgbClr val="D4D4D4"/>
                 </a:solidFill>
@@ -21939,11 +22043,11 @@
           <a:p>
             <a:pPr>
               <a:spcAft>
-                <a:spcPts val="385"/>
+                <a:spcPts val="364"/>
               </a:spcAft>
             </a:pPr>
             <a:r>
-              <a:rPr sz="1800" i="0" b="0">
+              <a:rPr sz="1700" i="0" b="0">
                 <a:solidFill>
                   <a:srgbClr val="D4D4D4"/>
                 </a:solidFill>
@@ -21952,7 +22056,7 @@
               <a:t>  </a:t>
             </a:r>
             <a:r>
-              <a:rPr sz="1800" i="0" b="0">
+              <a:rPr sz="1700" i="0" b="0">
                 <a:solidFill>
                   <a:srgbClr val="569CD6"/>
                 </a:solidFill>
@@ -21961,7 +22065,7 @@
               <a:t>JOIN</a:t>
             </a:r>
             <a:r>
-              <a:rPr sz="1800" i="0" b="0">
+              <a:rPr sz="1700" i="0" b="0">
                 <a:solidFill>
                   <a:srgbClr val="D4D4D4"/>
                 </a:solidFill>
@@ -21970,7 +22074,7 @@
               <a:t> </a:t>
             </a:r>
             <a:r>
-              <a:rPr sz="1800" i="0" b="0">
+              <a:rPr sz="1700" i="0" b="0">
                 <a:solidFill>
                   <a:srgbClr val="D4D4D4"/>
                 </a:solidFill>
@@ -21979,7 +22083,7 @@
               <a:t>mascota</a:t>
             </a:r>
             <a:r>
-              <a:rPr sz="1800" i="0" b="0">
+              <a:rPr sz="1700" i="0" b="0">
                 <a:solidFill>
                   <a:srgbClr val="D4D4D4"/>
                 </a:solidFill>
@@ -21988,7 +22092,7 @@
               <a:t> </a:t>
             </a:r>
             <a:r>
-              <a:rPr sz="1800" i="0" b="0">
+              <a:rPr sz="1700" i="0" b="0">
                 <a:solidFill>
                   <a:srgbClr val="D4D4D4"/>
                 </a:solidFill>
@@ -21997,7 +22101,7 @@
               <a:t>m</a:t>
             </a:r>
             <a:r>
-              <a:rPr sz="1800" i="0" b="0">
+              <a:rPr sz="1700" i="0" b="0">
                 <a:solidFill>
                   <a:srgbClr val="D4D4D4"/>
                 </a:solidFill>
@@ -22006,7 +22110,7 @@
               <a:t> </a:t>
             </a:r>
             <a:r>
-              <a:rPr sz="1800" i="0" b="0">
+              <a:rPr sz="1700" i="0" b="0">
                 <a:solidFill>
                   <a:srgbClr val="569CD6"/>
                 </a:solidFill>
@@ -22015,7 +22119,7 @@
               <a:t>ON</a:t>
             </a:r>
             <a:r>
-              <a:rPr sz="1800" i="0" b="0">
+              <a:rPr sz="1700" i="0" b="0">
                 <a:solidFill>
                   <a:srgbClr val="D4D4D4"/>
                 </a:solidFill>
@@ -22024,7 +22128,7 @@
               <a:t> </a:t>
             </a:r>
             <a:r>
-              <a:rPr sz="1800" i="0" b="0">
+              <a:rPr sz="1700" i="0" b="0">
                 <a:solidFill>
                   <a:srgbClr val="D4D4D4"/>
                 </a:solidFill>
@@ -22033,7 +22137,7 @@
               <a:t>m</a:t>
             </a:r>
             <a:r>
-              <a:rPr sz="1800" i="0" b="0">
+              <a:rPr sz="1700" i="0" b="0">
                 <a:solidFill>
                   <a:srgbClr val="D4D4D4"/>
                 </a:solidFill>
@@ -22042,7 +22146,7 @@
               <a:t>.</a:t>
             </a:r>
             <a:r>
-              <a:rPr sz="1800" i="0" b="0">
+              <a:rPr sz="1700" i="0" b="0">
                 <a:solidFill>
                   <a:srgbClr val="D4D4D4"/>
                 </a:solidFill>
@@ -22051,7 +22155,7 @@
               <a:t>id_mascota</a:t>
             </a:r>
             <a:r>
-              <a:rPr sz="1800" i="0" b="0">
+              <a:rPr sz="1700" i="0" b="0">
                 <a:solidFill>
                   <a:srgbClr val="D4D4D4"/>
                 </a:solidFill>
@@ -22060,7 +22164,7 @@
               <a:t> = </a:t>
             </a:r>
             <a:r>
-              <a:rPr sz="1800" i="0" b="0">
+              <a:rPr sz="1700" i="0" b="0">
                 <a:solidFill>
                   <a:srgbClr val="D4D4D4"/>
                 </a:solidFill>
@@ -22069,7 +22173,7 @@
               <a:t>c</a:t>
             </a:r>
             <a:r>
-              <a:rPr sz="1800" i="0" b="0">
+              <a:rPr sz="1700" i="0" b="0">
                 <a:solidFill>
                   <a:srgbClr val="D4D4D4"/>
                 </a:solidFill>
@@ -22078,7 +22182,7 @@
               <a:t>.</a:t>
             </a:r>
             <a:r>
-              <a:rPr sz="1800" i="0" b="0">
+              <a:rPr sz="1700" i="0" b="0">
                 <a:solidFill>
                   <a:srgbClr val="D4D4D4"/>
                 </a:solidFill>
@@ -22090,11 +22194,11 @@
           <a:p>
             <a:pPr>
               <a:spcAft>
-                <a:spcPts val="385"/>
+                <a:spcPts val="364"/>
               </a:spcAft>
             </a:pPr>
             <a:r>
-              <a:rPr sz="1800" i="0" b="0">
+              <a:rPr sz="1700" i="0" b="0">
                 <a:solidFill>
                   <a:srgbClr val="D4D4D4"/>
                 </a:solidFill>
@@ -22103,7 +22207,7 @@
               <a:t>  </a:t>
             </a:r>
             <a:r>
-              <a:rPr sz="1800" i="0" b="0">
+              <a:rPr sz="1700" i="0" b="0">
                 <a:solidFill>
                   <a:srgbClr val="569CD6"/>
                 </a:solidFill>
@@ -22112,7 +22216,7 @@
               <a:t>JOIN</a:t>
             </a:r>
             <a:r>
-              <a:rPr sz="1800" i="0" b="0">
+              <a:rPr sz="1700" i="0" b="0">
                 <a:solidFill>
                   <a:srgbClr val="D4D4D4"/>
                 </a:solidFill>
@@ -22121,7 +22225,7 @@
               <a:t> </a:t>
             </a:r>
             <a:r>
-              <a:rPr sz="1800" i="0" b="0">
+              <a:rPr sz="1700" i="0" b="0">
                 <a:solidFill>
                   <a:srgbClr val="D4D4D4"/>
                 </a:solidFill>
@@ -22130,7 +22234,7 @@
               <a:t>dueno</a:t>
             </a:r>
             <a:r>
-              <a:rPr sz="1800" i="0" b="0">
+              <a:rPr sz="1700" i="0" b="0">
                 <a:solidFill>
                   <a:srgbClr val="D4D4D4"/>
                 </a:solidFill>
@@ -22139,7 +22243,7 @@
               <a:t>   </a:t>
             </a:r>
             <a:r>
-              <a:rPr sz="1800" i="0" b="0">
+              <a:rPr sz="1700" i="0" b="0">
                 <a:solidFill>
                   <a:srgbClr val="D4D4D4"/>
                 </a:solidFill>
@@ -22148,7 +22252,7 @@
               <a:t>d</a:t>
             </a:r>
             <a:r>
-              <a:rPr sz="1800" i="0" b="0">
+              <a:rPr sz="1700" i="0" b="0">
                 <a:solidFill>
                   <a:srgbClr val="D4D4D4"/>
                 </a:solidFill>
@@ -22157,7 +22261,7 @@
               <a:t> </a:t>
             </a:r>
             <a:r>
-              <a:rPr sz="1800" i="0" b="0">
+              <a:rPr sz="1700" i="0" b="0">
                 <a:solidFill>
                   <a:srgbClr val="569CD6"/>
                 </a:solidFill>
@@ -22166,7 +22270,7 @@
               <a:t>ON</a:t>
             </a:r>
             <a:r>
-              <a:rPr sz="1800" i="0" b="0">
+              <a:rPr sz="1700" i="0" b="0">
                 <a:solidFill>
                   <a:srgbClr val="D4D4D4"/>
                 </a:solidFill>
@@ -22175,7 +22279,7 @@
               <a:t> </a:t>
             </a:r>
             <a:r>
-              <a:rPr sz="1800" i="0" b="0">
+              <a:rPr sz="1700" i="0" b="0">
                 <a:solidFill>
                   <a:srgbClr val="D4D4D4"/>
                 </a:solidFill>
@@ -22184,7 +22288,7 @@
               <a:t>d</a:t>
             </a:r>
             <a:r>
-              <a:rPr sz="1800" i="0" b="0">
+              <a:rPr sz="1700" i="0" b="0">
                 <a:solidFill>
                   <a:srgbClr val="D4D4D4"/>
                 </a:solidFill>
@@ -22193,7 +22297,7 @@
               <a:t>.</a:t>
             </a:r>
             <a:r>
-              <a:rPr sz="1800" i="0" b="0">
+              <a:rPr sz="1700" i="0" b="0">
                 <a:solidFill>
                   <a:srgbClr val="D4D4D4"/>
                 </a:solidFill>
@@ -22202,7 +22306,7 @@
               <a:t>id_dueno</a:t>
             </a:r>
             <a:r>
-              <a:rPr sz="1800" i="0" b="0">
+              <a:rPr sz="1700" i="0" b="0">
                 <a:solidFill>
                   <a:srgbClr val="D4D4D4"/>
                 </a:solidFill>
@@ -22211,7 +22315,7 @@
               <a:t>   = </a:t>
             </a:r>
             <a:r>
-              <a:rPr sz="1800" i="0" b="0">
+              <a:rPr sz="1700" i="0" b="0">
                 <a:solidFill>
                   <a:srgbClr val="D4D4D4"/>
                 </a:solidFill>
@@ -22220,7 +22324,7 @@
               <a:t>m</a:t>
             </a:r>
             <a:r>
-              <a:rPr sz="1800" i="0" b="0">
+              <a:rPr sz="1700" i="0" b="0">
                 <a:solidFill>
                   <a:srgbClr val="D4D4D4"/>
                 </a:solidFill>
@@ -22229,7 +22333,7 @@
               <a:t>.</a:t>
             </a:r>
             <a:r>
-              <a:rPr sz="1800" i="0" b="0">
+              <a:rPr sz="1700" i="0" b="0">
                 <a:solidFill>
                   <a:srgbClr val="D4D4D4"/>
                 </a:solidFill>
@@ -22241,11 +22345,11 @@
           <a:p>
             <a:pPr>
               <a:spcAft>
-                <a:spcPts val="385"/>
+                <a:spcPts val="364"/>
               </a:spcAft>
             </a:pPr>
             <a:r>
-              <a:rPr sz="1800" i="0" b="0">
+              <a:rPr sz="1700" i="0" b="0">
                 <a:solidFill>
                   <a:srgbClr val="D4D4D4"/>
                 </a:solidFill>
@@ -22254,7 +22358,7 @@
               <a:t>  </a:t>
             </a:r>
             <a:r>
-              <a:rPr sz="1800" i="0" b="0">
+              <a:rPr sz="1700" i="0" b="0">
                 <a:solidFill>
                   <a:srgbClr val="569CD6"/>
                 </a:solidFill>
@@ -22263,7 +22367,7 @@
               <a:t>WHERE</a:t>
             </a:r>
             <a:r>
-              <a:rPr sz="1800" i="0" b="0">
+              <a:rPr sz="1700" i="0" b="0">
                 <a:solidFill>
                   <a:srgbClr val="D4D4D4"/>
                 </a:solidFill>
@@ -22272,7 +22376,7 @@
               <a:t> </a:t>
             </a:r>
             <a:r>
-              <a:rPr sz="1800" i="0" b="0">
+              <a:rPr sz="1700" i="0" b="0">
                 <a:solidFill>
                   <a:srgbClr val="D4D4D4"/>
                 </a:solidFill>
@@ -22281,7 +22385,7 @@
               <a:t>c</a:t>
             </a:r>
             <a:r>
-              <a:rPr sz="1800" i="0" b="0">
+              <a:rPr sz="1700" i="0" b="0">
                 <a:solidFill>
                   <a:srgbClr val="D4D4D4"/>
                 </a:solidFill>
@@ -22290,7 +22394,7 @@
               <a:t>.</a:t>
             </a:r>
             <a:r>
-              <a:rPr sz="1800" i="0" b="0">
+              <a:rPr sz="1700" i="0" b="0">
                 <a:solidFill>
                   <a:srgbClr val="D4D4D4"/>
                 </a:solidFill>
@@ -22299,7 +22403,7 @@
               <a:t>fecha_hora</a:t>
             </a:r>
             <a:r>
-              <a:rPr sz="1800" i="0" b="0">
+              <a:rPr sz="1700" i="0" b="0">
                 <a:solidFill>
                   <a:srgbClr val="D4D4D4"/>
                 </a:solidFill>
@@ -22308,7 +22412,7 @@
               <a:t> &gt;= </a:t>
             </a:r>
             <a:r>
-              <a:rPr sz="1800" i="0" b="0">
+              <a:rPr sz="1700" i="0" b="0">
                 <a:solidFill>
                   <a:srgbClr val="D4D4D4"/>
                 </a:solidFill>
@@ -22317,7 +22421,7 @@
               <a:t>p_dia</a:t>
             </a:r>
             <a:r>
-              <a:rPr sz="1800" i="0" b="0">
+              <a:rPr sz="1700" i="0" b="0">
                 <a:solidFill>
                   <a:srgbClr val="D4D4D4"/>
                 </a:solidFill>
@@ -22326,7 +22430,7 @@
               <a:t> </a:t>
             </a:r>
             <a:r>
-              <a:rPr sz="1800" i="0" b="0">
+              <a:rPr sz="1700" i="0" b="0">
                 <a:solidFill>
                   <a:srgbClr val="569CD6"/>
                 </a:solidFill>
@@ -22335,7 +22439,7 @@
               <a:t>AND</a:t>
             </a:r>
             <a:r>
-              <a:rPr sz="1800" i="0" b="0">
+              <a:rPr sz="1700" i="0" b="0">
                 <a:solidFill>
                   <a:srgbClr val="D4D4D4"/>
                 </a:solidFill>
@@ -22344,7 +22448,7 @@
               <a:t> </a:t>
             </a:r>
             <a:r>
-              <a:rPr sz="1800" i="0" b="0">
+              <a:rPr sz="1700" i="0" b="0">
                 <a:solidFill>
                   <a:srgbClr val="D4D4D4"/>
                 </a:solidFill>
@@ -22353,7 +22457,7 @@
               <a:t>c</a:t>
             </a:r>
             <a:r>
-              <a:rPr sz="1800" i="0" b="0">
+              <a:rPr sz="1700" i="0" b="0">
                 <a:solidFill>
                   <a:srgbClr val="D4D4D4"/>
                 </a:solidFill>
@@ -22362,7 +22466,7 @@
               <a:t>.</a:t>
             </a:r>
             <a:r>
-              <a:rPr sz="1800" i="0" b="0">
+              <a:rPr sz="1700" i="0" b="0">
                 <a:solidFill>
                   <a:srgbClr val="D4D4D4"/>
                 </a:solidFill>
@@ -22371,7 +22475,7 @@
               <a:t>fecha_hora</a:t>
             </a:r>
             <a:r>
-              <a:rPr sz="1800" i="0" b="0">
+              <a:rPr sz="1700" i="0" b="0">
                 <a:solidFill>
                   <a:srgbClr val="D4D4D4"/>
                 </a:solidFill>
@@ -22380,7 +22484,7 @@
               <a:t> &lt; </a:t>
             </a:r>
             <a:r>
-              <a:rPr sz="1800" i="0" b="0">
+              <a:rPr sz="1700" i="0" b="0">
                 <a:solidFill>
                   <a:srgbClr val="D4D4D4"/>
                 </a:solidFill>
@@ -22389,7 +22493,7 @@
               <a:t>p_dia</a:t>
             </a:r>
             <a:r>
-              <a:rPr sz="1800" i="0" b="0">
+              <a:rPr sz="1700" i="0" b="0">
                 <a:solidFill>
                   <a:srgbClr val="D4D4D4"/>
                 </a:solidFill>
@@ -22398,7 +22502,7 @@
               <a:t> + </a:t>
             </a:r>
             <a:r>
-              <a:rPr sz="1800" i="0" b="0">
+              <a:rPr sz="1700" i="0" b="0">
                 <a:solidFill>
                   <a:srgbClr val="B5CEA8"/>
                 </a:solidFill>
@@ -22410,11 +22514,11 @@
           <a:p>
             <a:pPr>
               <a:spcAft>
-                <a:spcPts val="385"/>
+                <a:spcPts val="364"/>
               </a:spcAft>
             </a:pPr>
             <a:r>
-              <a:rPr sz="1800" i="0" b="0">
+              <a:rPr sz="1700" i="0" b="0">
                 <a:solidFill>
                   <a:srgbClr val="D4D4D4"/>
                 </a:solidFill>
@@ -22423,7 +22527,7 @@
               <a:t>  </a:t>
             </a:r>
             <a:r>
-              <a:rPr sz="1800" i="0" b="0">
+              <a:rPr sz="1700" i="0" b="0">
                 <a:solidFill>
                   <a:srgbClr val="569CD6"/>
                 </a:solidFill>
@@ -22432,7 +22536,7 @@
               <a:t>ORDER</a:t>
             </a:r>
             <a:r>
-              <a:rPr sz="1800" i="0" b="0">
+              <a:rPr sz="1700" i="0" b="0">
                 <a:solidFill>
                   <a:srgbClr val="D4D4D4"/>
                 </a:solidFill>
@@ -22441,7 +22545,7 @@
               <a:t> </a:t>
             </a:r>
             <a:r>
-              <a:rPr sz="1800" i="0" b="0">
+              <a:rPr sz="1700" i="0" b="0">
                 <a:solidFill>
                   <a:srgbClr val="569CD6"/>
                 </a:solidFill>
@@ -22450,7 +22554,7 @@
               <a:t>BY</a:t>
             </a:r>
             <a:r>
-              <a:rPr sz="1800" i="0" b="0">
+              <a:rPr sz="1700" i="0" b="0">
                 <a:solidFill>
                   <a:srgbClr val="D4D4D4"/>
                 </a:solidFill>
@@ -22459,7 +22563,7 @@
               <a:t> </a:t>
             </a:r>
             <a:r>
-              <a:rPr sz="1800" i="0" b="0">
+              <a:rPr sz="1700" i="0" b="0">
                 <a:solidFill>
                   <a:srgbClr val="D4D4D4"/>
                 </a:solidFill>
@@ -22468,7 +22572,7 @@
               <a:t>c</a:t>
             </a:r>
             <a:r>
-              <a:rPr sz="1800" i="0" b="0">
+              <a:rPr sz="1700" i="0" b="0">
                 <a:solidFill>
                   <a:srgbClr val="D4D4D4"/>
                 </a:solidFill>
@@ -22477,7 +22581,7 @@
               <a:t>.</a:t>
             </a:r>
             <a:r>
-              <a:rPr sz="1800" i="0" b="0">
+              <a:rPr sz="1700" i="0" b="0">
                 <a:solidFill>
                   <a:srgbClr val="D4D4D4"/>
                 </a:solidFill>
@@ -22486,7 +22590,7 @@
               <a:t>fecha_hora</a:t>
             </a:r>
             <a:r>
-              <a:rPr sz="1800" i="0" b="0">
+              <a:rPr sz="1700" i="0" b="0">
                 <a:solidFill>
                   <a:srgbClr val="D4D4D4"/>
                 </a:solidFill>
@@ -22498,11 +22602,11 @@
           <a:p>
             <a:pPr>
               <a:spcAft>
-                <a:spcPts val="385"/>
+                <a:spcPts val="364"/>
               </a:spcAft>
             </a:pPr>
             <a:r>
-              <a:rPr sz="1800" i="0" b="0">
+              <a:rPr sz="1700" i="0" b="0">
                 <a:solidFill>
                   <a:srgbClr val="569CD6"/>
                 </a:solidFill>
@@ -22511,7 +22615,7 @@
               <a:t>$$</a:t>
             </a:r>
             <a:r>
-              <a:rPr sz="1800" i="0" b="0">
+              <a:rPr sz="1700" i="0" b="0">
                 <a:solidFill>
                   <a:srgbClr val="D4D4D4"/>
                 </a:solidFill>
